--- a/ppts_output_v3/03_个人所得税风险指引.pptx
+++ b/ppts_output_v3/03_个人所得税风险指引.pptx
@@ -7415,28 +7415,6 @@
               <a:t>个人所得的范围是指个人因任职或者受雇而取得的工资、薪金、奖金、年终加薪、劳动分红、津贴、补贴以及与任职或者受雇有关的其他所得。企业无论以何种形式为员工或其子女支付或报销医药费、子女教育费，都应与员工当期工资合并，按“工资、薪金所得”项目扣缴个人所得税。</a:t>
             </a:r>
           </a:p>
-          <a:p>
-            <a:pPr algn="l">
-              <a:lnSpc>
-                <a:spcPts val="1820"/>
-              </a:lnSpc>
-              <a:spcBef>
-                <a:spcPts val="200"/>
-              </a:spcBef>
-              <a:spcAft>
-                <a:spcPts val="200"/>
-              </a:spcAft>
-            </a:pPr>
-            <a:r>
-              <a:rPr sz="1400" b="0">
-                <a:solidFill>
-                  <a:srgbClr val="000000"/>
-                </a:solidFill>
-                <a:latin typeface="Microsoft YaHei"/>
-              </a:rPr>
-              <a:t>184</a:t>
-            </a:r>
-          </a:p>
         </p:txBody>
       </p:sp>
     </p:spTree>
@@ -7750,28 +7728,6 @@
               <a:t>劳务报酬所得属于一次性收入的，以取得该项目收入为一次；属于同一项目连续性收入的，以一个月内取得的收入为一次。</a:t>
             </a:r>
           </a:p>
-          <a:p>
-            <a:pPr algn="l">
-              <a:lnSpc>
-                <a:spcPts val="1820"/>
-              </a:lnSpc>
-              <a:spcBef>
-                <a:spcPts val="200"/>
-              </a:spcBef>
-              <a:spcAft>
-                <a:spcPts val="200"/>
-              </a:spcAft>
-            </a:pPr>
-            <a:r>
-              <a:rPr sz="1400" b="0">
-                <a:solidFill>
-                  <a:srgbClr val="000000"/>
-                </a:solidFill>
-                <a:latin typeface="Microsoft YaHei"/>
-              </a:rPr>
-              <a:t>185</a:t>
-            </a:r>
-          </a:p>
         </p:txBody>
       </p:sp>
     </p:spTree>
@@ -8398,28 +8354,6 @@
               <a:t>企业在业务宣传、广告等活动中，随机向本单位以外的个人赠送礼品（包括网络红包，下同），以及企业在年会、座谈会、庆典以及其他活动中向本单位以外的个人赠送礼品，个人取得的礼品收入，应按“偶然所得”代扣代缴个税。</a:t>
             </a:r>
           </a:p>
-          <a:p>
-            <a:pPr algn="l">
-              <a:lnSpc>
-                <a:spcPts val="1820"/>
-              </a:lnSpc>
-              <a:spcBef>
-                <a:spcPts val="200"/>
-              </a:spcBef>
-              <a:spcAft>
-                <a:spcPts val="200"/>
-              </a:spcAft>
-            </a:pPr>
-            <a:r>
-              <a:rPr sz="1400" b="0">
-                <a:solidFill>
-                  <a:srgbClr val="000000"/>
-                </a:solidFill>
-                <a:latin typeface="Microsoft YaHei"/>
-              </a:rPr>
-              <a:t>187</a:t>
-            </a:r>
-          </a:p>
         </p:txBody>
       </p:sp>
     </p:spTree>
@@ -9046,28 +8980,6 @@
               <a:t>企事业单位和个人超过规定的比例和标准缴付的住房公积金，将超过部分应并入个人当期的工资、薪金收入，计算扣缴个人所得税。</a:t>
             </a:r>
           </a:p>
-          <a:p>
-            <a:pPr algn="l">
-              <a:lnSpc>
-                <a:spcPts val="1820"/>
-              </a:lnSpc>
-              <a:spcBef>
-                <a:spcPts val="200"/>
-              </a:spcBef>
-              <a:spcAft>
-                <a:spcPts val="200"/>
-              </a:spcAft>
-            </a:pPr>
-            <a:r>
-              <a:rPr sz="1400" b="0">
-                <a:solidFill>
-                  <a:srgbClr val="000000"/>
-                </a:solidFill>
-                <a:latin typeface="Microsoft YaHei"/>
-              </a:rPr>
-              <a:t>189</a:t>
-            </a:r>
-          </a:p>
         </p:txBody>
       </p:sp>
     </p:spTree>
@@ -15260,28 +15172,6 @@
                 <a:latin typeface="Microsoft YaHei"/>
               </a:rPr>
               <a:t>查看股东会决议，核实是否将未分配利润、盈余公积、资本公积转增股本，结合个人所得税申报材料，确认是否按规定代扣代缴了自然人股东的个人所得税。</a:t>
-            </a:r>
-          </a:p>
-          <a:p>
-            <a:pPr algn="l">
-              <a:lnSpc>
-                <a:spcPts val="1820"/>
-              </a:lnSpc>
-              <a:spcBef>
-                <a:spcPts val="200"/>
-              </a:spcBef>
-              <a:spcAft>
-                <a:spcPts val="200"/>
-              </a:spcAft>
-            </a:pPr>
-            <a:r>
-              <a:rPr sz="1400" b="0">
-                <a:solidFill>
-                  <a:srgbClr val="000000"/>
-                </a:solidFill>
-                <a:latin typeface="Microsoft YaHei"/>
-              </a:rPr>
-              <a:t>209</a:t>
             </a:r>
           </a:p>
         </p:txBody>

--- a/ppts_output_v3/03_个人所得税风险指引.pptx
+++ b/ppts_output_v3/03_个人所得税风险指引.pptx
@@ -3397,7 +3397,7 @@
                 </a:solidFill>
                 <a:latin typeface="Microsoft YaHei"/>
               </a:rPr>
-              <a:t>2023 年 12 月 31 日前，居民个人取得的全年一次性奖金可以不并入当年综合所得，单独计算纳税，为了避开临界点降低税率，企业通常将超出临界点部分奖金以费用报销形式发放，账面计提奖金数与企业奖金发放文件或其他资料不符，存在少缴个税风险。</a:t>
+              <a:t>2023年12月31日前，居民个人取得的全年一次性奖金可以不并入当年综合所得，单独计算纳税，为了避开临界点降低税率，企业通常将超出临界点部分奖金以费用报销形式发放，账面计提奖金数与企业奖金发放文件或其他资料不符，存在少缴个税风险。</a:t>
             </a:r>
           </a:p>
           <a:p>
@@ -3441,51 +3441,29 @@
                 </a:solidFill>
                 <a:latin typeface="Microsoft YaHei"/>
               </a:rPr>
-              <a:t>根据《财政部关于个人所得税法修改后有关优惠政策衔接问题的通知》（财税〔2018〕164 号文）第一条规定：对居民个人取得全年一次性奖金，符合《国家税务总局关于调整个人取得全年一次性奖金等计算征收个人所得税方法问题的通知》，在 2021 年 12 月 31 日前，不并入当年综合所得，以全年一次性奖金收入除以 12 个月得到的数额，按照本通知所附按月换算后的综合所得税率表，单独计算纳税。自 2022 年 1 月1 日起，居民个人取得全年一次性奖金，则应并入当年综合所得计算缴纳个人所得税。《关于延续实施全年一次性奖金等个人所得税优惠政策的公告》（财政部 税务总局公告 2021 年第 42 号）规定：一、《财政部 税务总局关于个人所得税法修改后有关优惠政策衔接问题的通知》（财税〔2018〕164 号）规定的全年一次性奖金单独计税优惠政策，执行期限延长至 2023 年12 月31 日;上市公司股权激励单独计税优惠政策，执行期限延长至2022 年12 月31 日。《财政部 税务总局关于延续实施全年一次性奖金个人所得税政策的公告》（财政部 税务总局公告 2023 年第30 号）</a:t>
-            </a:r>
-          </a:p>
-          <a:p>
-            <a:pPr algn="l">
-              <a:lnSpc>
-                <a:spcPts val="1820"/>
-              </a:lnSpc>
-              <a:spcBef>
-                <a:spcPts val="200"/>
-              </a:spcBef>
-              <a:spcAft>
-                <a:spcPts val="200"/>
-              </a:spcAft>
-            </a:pPr>
-            <a:r>
-              <a:rPr sz="1400" b="0">
-                <a:solidFill>
-                  <a:srgbClr val="000000"/>
-                </a:solidFill>
-                <a:latin typeface="Microsoft YaHei"/>
-              </a:rPr>
-              <a:t>规定：为进一步减轻纳税人负担，现将全年一次性奖金个人所得税政策公告如下：</a:t>
-            </a:r>
-          </a:p>
-          <a:p>
-            <a:pPr algn="l">
-              <a:lnSpc>
-                <a:spcPts val="1820"/>
-              </a:lnSpc>
-              <a:spcBef>
-                <a:spcPts val="200"/>
-              </a:spcBef>
-              <a:spcAft>
-                <a:spcPts val="200"/>
-              </a:spcAft>
-            </a:pPr>
-            <a:r>
-              <a:rPr sz="1400" b="0">
-                <a:solidFill>
-                  <a:srgbClr val="000000"/>
-                </a:solidFill>
-                <a:latin typeface="Microsoft YaHei"/>
-              </a:rPr>
-              <a:t>一、居民个人取得全年一次性奖金，符合《国家税务总局关于调整个人取得全年一次性奖金等计算征收个人所得税方法问题的通知》（国税发〔2005〕9 号）规定的，不并入当年综合所得，以全年一次性奖金收入除以 12 个月得到的数额，按照本公告所附按月换算后的综合所得税率表，确定适用税率和速算扣除数，单独计算纳税。计算公式为：</a:t>
+              <a:t>根据《财政部关于个人所得税法修改后有关优惠政策衔接问题的通知》（财税〔2018〕164号文）第一条规定：对居民个人取得全年一次性奖金，符合《国家税务总局关于调整个人取得全年一次性奖金等计算征收个人所得税方法问题的通知》，在2021年12月31日前，不并入当年综合所得，以全年一次性奖金收入除以12个月得到的数额，按照本通知所附按月换算后的综合所得税率表，单独计算纳税。自2022年1月1日起，居民个人取得全年一次性奖金，则应并入当年综合所得计算缴纳个人所得税。《关于延续实施全年一次性奖金等个人所得税优惠政策的公告》（财政部 税务总局公告2021年第42号）规定：一、《财政部 税务总局关于个人所得税法修改后有关优惠政策衔接问题的通知》（财税〔2018〕164号）规定的全年一次性奖金单独计税优惠政策，执行期限延长至2023年12月31日;上市公司股权激励单独计税优惠政策，执行期限延长至2022年12月31日。《财政部 税务总局关于延续实施全年一次性奖金个人所得税政策的公告》（财政部 税务总局公告2023年第30号）规定：为进一步减轻纳税人负担，现将全年一次性奖金个人所得税政策公告如下：</a:t>
+            </a:r>
+          </a:p>
+          <a:p>
+            <a:pPr algn="l">
+              <a:lnSpc>
+                <a:spcPts val="1820"/>
+              </a:lnSpc>
+              <a:spcBef>
+                <a:spcPts val="200"/>
+              </a:spcBef>
+              <a:spcAft>
+                <a:spcPts val="200"/>
+              </a:spcAft>
+            </a:pPr>
+            <a:r>
+              <a:rPr sz="1400" b="0">
+                <a:solidFill>
+                  <a:srgbClr val="000000"/>
+                </a:solidFill>
+                <a:latin typeface="Microsoft YaHei"/>
+              </a:rPr>
+              <a:t>一、居民个人取得全年一次性奖金，符合《国家税务总局关于调整个人取得全年一次性奖金等计算征收个人所得税方法问题的通知》（国税发〔2005〕9号）规定的，不并入当年综合所得，以全年一次性奖金收入除以12个月得到的数额，按照本公告所附按月换算后的综合所得税率表，确定适用税率和速算扣除数，单独计算纳税。计算公式为：</a:t>
             </a:r>
           </a:p>
           <a:p>
@@ -3529,7 +3507,7 @@
                 </a:solidFill>
                 <a:latin typeface="Microsoft YaHei"/>
               </a:rPr>
-              <a:t>三、本公告执行至 2027 年 12 月 31 日。</a:t>
+              <a:t>三、本公告执行至2027年12月31日。</a:t>
             </a:r>
           </a:p>
           <a:p>
@@ -3617,7 +3595,7 @@
                 </a:solidFill>
                 <a:latin typeface="Microsoft YaHei"/>
               </a:rPr>
-              <a:t>2027 年 12 月 31 日前，居民个人取得的全年一次性奖金可以不并入当年综合所得，以全年一次性奖金收入除以12 个月得到的数额，按照本通知所附按月换算后的综合所得税率表单独计算纳税，自2028年 1 月 1 日起，居民个人取得全年一次性奖金，则应并入当年综合所得计算缴纳个人所得税。企业应保证账面计提奖金数与企业奖金发放文件或其他资料相符，作为以后税务稽查备用。对员工少缴的个税应进行补缴。</a:t>
+              <a:t>2027年12月31日前，居民个人取得的全年一次性奖金可以不并入当年综合所得，以全年一次性奖金收入除以12个月得到的数额，按照本通知所附按月换算后的综合所得税率表单独计算纳税，自2028年1月1日起，居民个人取得全年一次性奖金，则应并入当年综合所得计算缴纳个人所得税。企业应保证账面计提奖金数与企业奖金发放文件或其他资料相符，作为以后税务稽查备用。对员工少缴的个税应进行补缴。</a:t>
             </a:r>
           </a:p>
         </p:txBody>
@@ -3820,29 +3798,29 @@
                 </a:solidFill>
                 <a:latin typeface="Microsoft YaHei"/>
               </a:rPr>
-              <a:t>国家税务总局所得税司 2012 年 4 月11 日在国家税务总局网站就所得税相关政策中答复，集体享受的、不可分割的、非现金方式的福利不需缴纳个人所得税。国家税务总局在官方网站进行2018 年第三季度税收政策解读也明确，对于任职受雇单位发给个人的福利，不论是现金还是实物，依法均应缴纳个人所得税。但对于集体享受的、不可分割的、未向个人量化的非现金方式的福利，原则上不征收个人所得税。</a:t>
-            </a:r>
-          </a:p>
-          <a:p>
-            <a:pPr algn="l">
-              <a:lnSpc>
-                <a:spcPts val="1820"/>
-              </a:lnSpc>
-              <a:spcBef>
-                <a:spcPts val="200"/>
-              </a:spcBef>
-              <a:spcAft>
-                <a:spcPts val="200"/>
-              </a:spcAft>
-            </a:pPr>
-            <a:r>
-              <a:rPr sz="1400" b="0">
-                <a:solidFill>
-                  <a:srgbClr val="000000"/>
-                </a:solidFill>
-                <a:latin typeface="Microsoft YaHei"/>
-              </a:rPr>
-              <a:t>根据《国务院关于修改&lt;中华人民共和国个人所得税法实施条例&gt;的决定》（中华人民共和国国务院令第600 号）第十条规定：个人所得的形式，包括现金、实物、有价证券和其他形式的经济利益。所得为实物的，应当按照取得的凭证上所注明的价格计算应纳税所得额；无凭证的实物或者凭证上所注明的价格明显偏低的，参照市场价格核定应纳税所得额。所得为有价证券的，根据票面价格和市场价格核定应纳税所得额。所得为其他形式的经济利益的，参照市场价格核定应纳税所得额。</a:t>
+              <a:t>国家税务总局所得税司2012年4月11日在国家税务总局网站就所得税相关政策中答复，集体享受的、不可分割的、非现金方式的福利不需缴纳个人所得税。国家税务总局在官方网站进行2018年第三季度税收政策解读也明确，对于任职受雇单位发给个人的福利，不论是现金还是实物，依法均应缴纳个人所得税。但对于集体享受的、不可分割的、未向个人量化的非现金方式的福利，原则上不征收个人所得税。</a:t>
+            </a:r>
+          </a:p>
+          <a:p>
+            <a:pPr algn="l">
+              <a:lnSpc>
+                <a:spcPts val="1820"/>
+              </a:lnSpc>
+              <a:spcBef>
+                <a:spcPts val="200"/>
+              </a:spcBef>
+              <a:spcAft>
+                <a:spcPts val="200"/>
+              </a:spcAft>
+            </a:pPr>
+            <a:r>
+              <a:rPr sz="1400" b="0">
+                <a:solidFill>
+                  <a:srgbClr val="000000"/>
+                </a:solidFill>
+                <a:latin typeface="Microsoft YaHei"/>
+              </a:rPr>
+              <a:t>根据《国务院关于修改&lt;中华人民共和国个人所得税法实施条例&gt;的决定》（中华人民共和国国务院令第600号）第十条规定：个人所得的形式，包括现金、实物、有价证券和其他形式的经济利益。所得为实物的，应当按照取得的凭证上所注明的价格计算应纳税所得额；无凭证的实物或者凭证上所注明的价格明显偏低的，参照市场价格核定应纳税所得额。所得为有价证券的，根据票面价格和市场价格核定应纳税所得额。所得为其他形式的经济利益的，参照市场价格核定应纳税所得额。</a:t>
             </a:r>
           </a:p>
           <a:p>
@@ -4133,7 +4111,7 @@
                 </a:solidFill>
                 <a:latin typeface="Microsoft YaHei"/>
               </a:rPr>
-              <a:t>根据《中华人民共和国个人所得税法》（中华人民共和国主席令第 9 号）第四条第四款的规定：福利费免纳个人所得税。根据《中华人民共和国个人所得税法实施条例》第十一条规定：个人所得税法第四条第一款第四项所称福利费，是指根据国家有关规定，从企业、事业单位、国家机关、社会组织提留的福利费或者工会经费中支付给个人的生活补助费；所称救济金，是指各级人民政府民政部门支付给个人的生活困难补助费。根据《国家税务总局关于生活补助费范围确定问题的通知》（国税发〔1998〕155 号）规定：</a:t>
+              <a:t>根据《中华人民共和国个人所得税法》（中华人民共和国主席令第9号）第四条第四款的规定：福利费免纳个人所得税。根据《中华人民共和国个人所得税法实施条例》第十一条规定：个人所得税法第四条第一款第四项所称福利费，是指根据国家有关规定，从企业、事业单位、国家机关、社会组织提留的福利费或者工会经费中支付给个人的生活补助费；所称救济金，是指各级人民政府民政部门支付给个人的生活困难补助费。根据《国家税务总局关于生活补助费范围确定问题的通知》（国税发〔1998〕155号）规定：</a:t>
             </a:r>
           </a:p>
           <a:p>
@@ -4446,7 +4424,7 @@
                 </a:solidFill>
                 <a:latin typeface="Microsoft YaHei"/>
               </a:rPr>
-              <a:t>根据《国家税务总局关于生活补助费范围确定问题的通知》（国税发〔1998〕155 号）第二条规定：“下列收入不属于免税的福利费范围，应当并入纳税人的工资、薪金收入计征个人所得税：1.从超出国家规定的比例或基数计提的福利费、工会经费中支付给个人的各种补贴、补助；2.从福利费和工会经费中支付给本单位职工的人人有份的补贴、补助；3.单位为个人购买汽车、住房、电子计算机等不属于临时性生活困难补助性质的支出。”</a:t>
+              <a:t>根据《国家税务总局关于生活补助费范围确定问题的通知》（国税发〔1998〕155号）第二条规定：“下列收入不属于免税的福利费范围，应当并入纳税人的工资、薪金收入计征个人所得税：1.从超出国家规定的比例或基数计提的福利费、工会经费中支付给个人的各种补贴、补助；2.从福利费和工会经费中支付给本单位职工的人人有份的补贴、补助；3.单位为个人购买汽车、住房、电子计算机等不属于临时性生活困难补助性质的支出。”</a:t>
             </a:r>
           </a:p>
           <a:p>
@@ -4693,29 +4671,7 @@
                 </a:solidFill>
                 <a:latin typeface="Microsoft YaHei"/>
               </a:rPr>
-              <a:t>单位按低于购置或建造成本价格出售住房给职工，职工因此而少支出的差价部分，属于职工因任职受雇取得的与任职有关的其他所得。但企业需要注意区分两种情形：</a:t>
-            </a:r>
-          </a:p>
-          <a:p>
-            <a:pPr algn="l">
-              <a:lnSpc>
-                <a:spcPts val="1820"/>
-              </a:lnSpc>
-              <a:spcBef>
-                <a:spcPts val="200"/>
-              </a:spcBef>
-              <a:spcAft>
-                <a:spcPts val="200"/>
-              </a:spcAft>
-            </a:pPr>
-            <a:r>
-              <a:rPr sz="1400" b="0">
-                <a:solidFill>
-                  <a:srgbClr val="000000"/>
-                </a:solidFill>
-                <a:latin typeface="Microsoft YaHei"/>
-              </a:rPr>
-              <a:t>1.房改房免税情形：住房制度改革期间，按县级以上政府规定的房改成本价格出售公有住房，差价收益免征个人所得税。2.一般情形：除上述情形外，单位低价售房，职工取得的差价部分应按规定缴纳个人所得税。</a:t>
+              <a:t>单位按低于购置或建造成本价格出售住房给职工，职工因此而少支出的差价部分，属于职工因任职受雇取得的与任职有关的其他所得。但企业需要注意区分两种情形：1.房改房免税情形：住房制度改革期间，按县级以上政府规定的房改成本价格出售公有住房，差价收益免征个人所得税。2.一般情形：除上述情形外，单位低价售房，职工取得的差价部分应按规定缴纳个人所得税。</a:t>
             </a:r>
           </a:p>
           <a:p>
@@ -4781,7 +4737,7 @@
                 </a:solidFill>
                 <a:latin typeface="Microsoft YaHei"/>
               </a:rPr>
-              <a:t>一、《财政部 国家税务总局关于单位低价向职工售房有关个人所得税问题的通知》（财税〔2007〕13 号）第一条：根据住房制度改革政策的有关规定，国家机关、企事业单位及其他组织在住房制度改革期间，按照所在地县级以上人民政府规定的房改成本价格向职工出售公有住房，职工因支付的房改成本价格低于房屋建造成本价格或市场价格而取得的差价收益，免征个人所得税。</a:t>
+              <a:t>一、《财政部 国家税务总局关于单位低价向职工售房有关个人所得税问题的通知》（财税〔2007〕13号）第一条：根据住房制度改革政策的有关规定，国家机关、企事业单位及其他组织在住房制度改革期间，按照所在地县级以上人民政府规定的房改成本价格向职工出售公有住房，职工因支付的房改成本价格低于房屋建造成本价格或市场价格而取得的差价收益，免征个人所得税。</a:t>
             </a:r>
           </a:p>
           <a:p>
@@ -4847,7 +4803,7 @@
                 </a:solidFill>
                 <a:latin typeface="Microsoft YaHei"/>
               </a:rPr>
-              <a:t>二、《财政部 税务总局关于个人所得税法修改后有关优惠政策衔接问题的通知》（财税〔2018〕164 号）第六条单位按低于购置或建造成本价格出售住房给职工，职工因此而少支出的差价部分，符合《财政部 国家税务总局关于单位低价向职工售房有关个人所得税问题的通知》（财税〔2007〕13 号）第二条规定的，不并入当年综合所得，以差价收入除以12 个月得到的数额，按照月度税率表确定适用税率和速算扣除数，单独计算纳税。</a:t>
+              <a:t>二、《财政部 税务总局关于个人所得税法修改后有关优惠政策衔接问题的通知》（财税〔2018〕164号）第六条单位按低于购置或建造成本价格出售住房给职工，职工因此而少支出的差价部分，符合《财政部 国家税务总局关于单位低价向职工售房有关个人所得税问题的通知》（财税〔2007〕13号）第二条规定的，不并入当年综合所得，以差价收入除以12个月得到的数额，按照月度税率表确定适用税率和速算扣除数，单独计算纳税。</a:t>
             </a:r>
           </a:p>
           <a:p>
@@ -4935,29 +4891,7 @@
                 </a:solidFill>
                 <a:latin typeface="Microsoft YaHei"/>
               </a:rPr>
-              <a:t>1.属于房改房免税情形的，企业错误申报纳税，导致职工多缴税款，可能引发纠纷。</a:t>
-            </a:r>
-          </a:p>
-          <a:p>
-            <a:pPr algn="l">
-              <a:lnSpc>
-                <a:spcPts val="1820"/>
-              </a:lnSpc>
-              <a:spcBef>
-                <a:spcPts val="200"/>
-              </a:spcBef>
-              <a:spcAft>
-                <a:spcPts val="200"/>
-              </a:spcAft>
-            </a:pPr>
-            <a:r>
-              <a:rPr sz="1400" b="0">
-                <a:solidFill>
-                  <a:srgbClr val="000000"/>
-                </a:solidFill>
-                <a:latin typeface="Microsoft YaHei"/>
-              </a:rPr>
-              <a:t>2.属于应税情形的，企业未依法代扣代缴，或错误将差价并入综合所得计算纳税，可能导致职工少缴或多缴税款，企业因未正确履行扣缴义务面临被税务机关责令补缴税款、加收滞纳金及罚款的风险。</a:t>
+              <a:t>1.属于房改房免税情形的，企业错误申报纳税，导致职工多缴税款，可能引发纠纷。2.属于应税情形的，企业未依法代扣代缴，或错误将差价并入综合所得计算纳税，可能导致职工少缴或多缴税款，企业因未正确履行扣缴义务面临被税务机关责令补缴税款、加收滞纳金及罚款的风险。</a:t>
             </a:r>
           </a:p>
           <a:p>
@@ -5001,51 +4935,7 @@
                 </a:solidFill>
                 <a:latin typeface="Microsoft YaHei"/>
               </a:rPr>
-              <a:t>准确区分两类情形：</a:t>
-            </a:r>
-          </a:p>
-          <a:p>
-            <a:pPr algn="l">
-              <a:lnSpc>
-                <a:spcPts val="1820"/>
-              </a:lnSpc>
-              <a:spcBef>
-                <a:spcPts val="200"/>
-              </a:spcBef>
-              <a:spcAft>
-                <a:spcPts val="200"/>
-              </a:spcAft>
-            </a:pPr>
-            <a:r>
-              <a:rPr sz="1400" b="0">
-                <a:solidFill>
-                  <a:srgbClr val="000000"/>
-                </a:solidFill>
-                <a:latin typeface="Microsoft YaHei"/>
-              </a:rPr>
-              <a:t>1.查看售房是否发生在住房制度改革期间2.查看是否按照县级以上政府规定的房改成本价格出售3.查看出售的是否为公有住房符合上述条件的，差价部分免征个人所得税应税情形的计税处理：</a:t>
-            </a:r>
-          </a:p>
-          <a:p>
-            <a:pPr algn="l">
-              <a:lnSpc>
-                <a:spcPts val="1820"/>
-              </a:lnSpc>
-              <a:spcBef>
-                <a:spcPts val="200"/>
-              </a:spcBef>
-              <a:spcAft>
-                <a:spcPts val="200"/>
-              </a:spcAft>
-            </a:pPr>
-            <a:r>
-              <a:rPr sz="1400" b="0">
-                <a:solidFill>
-                  <a:srgbClr val="000000"/>
-                </a:solidFill>
-                <a:latin typeface="Microsoft YaHei"/>
-              </a:rPr>
-              <a:t>1.将差价收入除以 12 个月，根据月度税率表确定适用税率和速算扣除数2.按照“不并入当年综合所得，单独计算纳税”的原则计算应纳税额企业在支付或确认职工取得该项所得时，应依法履行代扣代缴义务，及时向税务机关申报缴纳个人所得税。企业应留存相关购房合同、房改批复文件、成本核算资料及扣缴凭证备查。</a:t>
+              <a:t>准确区分两类情形：1.查看售房是否发生在住房制度改革期间2.查看是否按照县级以上政府规定的房改成本价格出售3.查看出售的是否为公有住房符合上述条件的，差价部分免征个人所得税应税情形的计税处理：1.将差价收入除以12个月，根据月度税率表确定适用税率和速算扣除数2.按照“不并入当年综合所得，单独计算纳税”的原则计算应纳税额企业在支付或确认职工取得该项所得时，应依法履行代扣代缴义务，及时向税务机关申报缴纳个人所得税。企业应留存相关购房合同、房改批复文件、成本核算资料及扣缴凭证备查。</a:t>
             </a:r>
           </a:p>
         </p:txBody>
@@ -5561,29 +5451,29 @@
                 </a:solidFill>
                 <a:latin typeface="Microsoft YaHei"/>
               </a:rPr>
-              <a:t>根据财政部《关于企业加强职工福利费财务管理的通知》（财企〔2009〕242 号）第二条规定：企业为职工提供的交通、住房、通信待遇，如果已实行货币化改革的，按月按标准发放或支付的交通补贴或者车改补贴、住房补贴、通信补贴，无论是直接发放给个人，还是个人提供票据报销后支付的，由于已形成对劳动力成本进行“普惠制”定期按标准补偿的机制，具有工资性质，因此，应当纳入职工工资总额，不再纳入职工福利费管理。</a:t>
-            </a:r>
-          </a:p>
-          <a:p>
-            <a:pPr algn="l">
-              <a:lnSpc>
-                <a:spcPts val="1820"/>
-              </a:lnSpc>
-              <a:spcBef>
-                <a:spcPts val="200"/>
-              </a:spcBef>
-              <a:spcAft>
-                <a:spcPts val="200"/>
-              </a:spcAft>
-            </a:pPr>
-            <a:r>
-              <a:rPr sz="1400" b="0">
-                <a:solidFill>
-                  <a:srgbClr val="000000"/>
-                </a:solidFill>
-                <a:latin typeface="Microsoft YaHei"/>
-              </a:rPr>
-              <a:t>根据《国家税务总局关于个人所得税有关政策问题的通知》（国税发〔1999〕58 号）第二条规定：个人因公务用车和通信制度改革而取得的公务用车、通讯补贴收入，扣除一定标准的公务费用后，按照“工资、薪金”所得项目计征个人所得税。按月发放的，并入当月“工资、薪金”所得计征个人所得税；不按月发放的，分解到所属月份并与该月份“工资、薪金”所得合并后计征个人所得税。公务费用的扣除标准，由省级地方税务局根据纳税人公务交通、通信费用的实际发生情况调查测算，报经省级人民政府批准后确定，并报国家税务总局备案。</a:t>
+              <a:t>根据财政部《关于企业加强职工福利费财务管理的通知》（财企〔2009〕242号）第二条规定：企业为职工提供的交通、住房、通信待遇，如果已实行货币化改革的，按月按标准发放或支付的交通补贴或者车改补贴、住房补贴、通信补贴，无论是直接发放给个人，还是个人提供票据报销后支付的，由于已形成对劳动力成本进行“普惠制”定期按标准补偿的机制，具有工资性质，因此，应当纳入职工工资总额，不再纳入职工福利费管理。</a:t>
+            </a:r>
+          </a:p>
+          <a:p>
+            <a:pPr algn="l">
+              <a:lnSpc>
+                <a:spcPts val="1820"/>
+              </a:lnSpc>
+              <a:spcBef>
+                <a:spcPts val="200"/>
+              </a:spcBef>
+              <a:spcAft>
+                <a:spcPts val="200"/>
+              </a:spcAft>
+            </a:pPr>
+            <a:r>
+              <a:rPr sz="1400" b="0">
+                <a:solidFill>
+                  <a:srgbClr val="000000"/>
+                </a:solidFill>
+                <a:latin typeface="Microsoft YaHei"/>
+              </a:rPr>
+              <a:t>根据《国家税务总局关于个人所得税有关政策问题的通知》（国税发〔1999〕58号）第二条规定：个人因公务用车和通信制度改革而取得的公务用车、通讯补贴收入，扣除一定标准的公务费用后，按照“工资、薪金”所得项目计征个人所得税。按月发放的，并入当月“工资、薪金”所得计征个人所得税；不按月发放的，分解到所属月份并与该月份“工资、薪金”所得合并后计征个人所得税。公务费用的扣除标准，由省级地方税务局根据纳税人公务交通、通信费用的实际发生情况调查测算，报经省级人民政府批准后确定，并报国家税务总局备案。</a:t>
             </a:r>
           </a:p>
           <a:p>
@@ -5627,29 +5517,29 @@
                 </a:solidFill>
                 <a:latin typeface="Microsoft YaHei"/>
               </a:rPr>
-              <a:t>第一条 实行公务用车改革的党政机关和企事业单位交通费用补贴每人每月扣除 1000 元，超出部分计征个人所得税。其他形式的交通费补贴一律计征个人所得税。</a:t>
-            </a:r>
-          </a:p>
-          <a:p>
-            <a:pPr algn="l">
-              <a:lnSpc>
-                <a:spcPts val="1820"/>
-              </a:lnSpc>
-              <a:spcBef>
-                <a:spcPts val="200"/>
-              </a:spcBef>
-              <a:spcAft>
-                <a:spcPts val="200"/>
-              </a:spcAft>
-            </a:pPr>
-            <a:r>
-              <a:rPr sz="1400" b="0">
-                <a:solidFill>
-                  <a:srgbClr val="000000"/>
-                </a:solidFill>
-                <a:latin typeface="Microsoft YaHei"/>
-              </a:rPr>
-              <a:t>第三条 保留行政级别的企事业单位，其领导班子成员及特殊岗位人员住宅电话和移动电话补贴，扣除参照党政机关干部的相关规定标准发放的通信费补贴额，超出部分计征个人所得税；没有行政级别的企事业单位，其领导班子成员住宅电话和移动电话补贴两项合计每人每月扣除 400 元，超出部分计征个人所得税；特殊岗位人员两项合计每人每月最高扣除 300 元，超出部分计征个人所得税。</a:t>
+              <a:t>第一条 实行公务用车改革的党政机关和企事业单位交通费用补贴每人每月扣除1000元，超出部分计征个人所得税。其他形式的交通费补贴一律计征个人所得税。</a:t>
+            </a:r>
+          </a:p>
+          <a:p>
+            <a:pPr algn="l">
+              <a:lnSpc>
+                <a:spcPts val="1820"/>
+              </a:lnSpc>
+              <a:spcBef>
+                <a:spcPts val="200"/>
+              </a:spcBef>
+              <a:spcAft>
+                <a:spcPts val="200"/>
+              </a:spcAft>
+            </a:pPr>
+            <a:r>
+              <a:rPr sz="1400" b="0">
+                <a:solidFill>
+                  <a:srgbClr val="000000"/>
+                </a:solidFill>
+                <a:latin typeface="Microsoft YaHei"/>
+              </a:rPr>
+              <a:t>第三条 保留行政级别的企事业单位，其领导班子成员及特殊岗位人员住宅电话和移动电话补贴，扣除参照党政机关干部的相关规定标准发放的通信费补贴额，超出部分计征个人所得税；没有行政级别的企事业单位，其领导班子成员住宅电话和移动电话补贴两项合计每人每月扣除400元，超出部分计征个人所得税；特殊岗位人员两项合计每人每月最高扣除300元，超出部分计征个人所得税。</a:t>
             </a:r>
           </a:p>
           <a:p>
@@ -5896,7 +5786,7 @@
                 </a:solidFill>
                 <a:latin typeface="Microsoft YaHei"/>
               </a:rPr>
-              <a:t>纳税人本人及其配偶在纳税人的主要工作城市有住房的，住房租金的专项支出每月 1500 元/每月 1100 元/每月800 元不得扣除。一个纳税年度内，纳税人本人及其配偶已选择了住房租金扣除，其发生的每月 1000 元住房贷款利息专项支出，不得扣除。</a:t>
+              <a:t>纳税人本人及其配偶在纳税人的主要工作城市有住房的，住房租金的专项支出每月1500元/每月1100元/每月800元不得扣除。一个纳税年度内，纳税人本人及其配偶已选择了住房租金扣除，其发生的每月1000元住房贷款利息专项支出，不得扣除。</a:t>
             </a:r>
           </a:p>
           <a:p>
@@ -5940,29 +5830,29 @@
                 </a:solidFill>
                 <a:latin typeface="Microsoft YaHei"/>
               </a:rPr>
-              <a:t>根据《国务院关于印发个人所得税专项附加扣除暂行办法的通知》（国发〔2018〕41 号）的规定：</a:t>
-            </a:r>
-          </a:p>
-          <a:p>
-            <a:pPr algn="l">
-              <a:lnSpc>
-                <a:spcPts val="1820"/>
-              </a:lnSpc>
-              <a:spcBef>
-                <a:spcPts val="200"/>
-              </a:spcBef>
-              <a:spcAft>
-                <a:spcPts val="200"/>
-              </a:spcAft>
-            </a:pPr>
-            <a:r>
-              <a:rPr sz="1400" b="0">
-                <a:solidFill>
-                  <a:srgbClr val="000000"/>
-                </a:solidFill>
-                <a:latin typeface="Microsoft YaHei"/>
-              </a:rPr>
-              <a:t>第十七条 纳税人在主要工作城市没有自有住房而发生的住房租金支出，可以按照以下标准定额扣除：（一）直辖市、省会（首府）城市、计划单列市以及国务院确定的其他城市，扣除标准为每月 1500 元；（二）除第一项所列城市以外，市辖区户籍人口超过100 万的城市，扣除标准为每月 1100 元；市辖区户籍人口不超过100 万的城市，扣除标准为每月 800 元。纳税人的配偶在纳税人的主要工作城市有自有住房的，视同纳税人在主要工作城市有自有住房。市辖区户籍人口，以国家统计局公布的数据为准。</a:t>
+              <a:t>根据《国务院关于印发个人所得税专项附加扣除暂行办法的通知》（国发〔2018〕41号）的规定：</a:t>
+            </a:r>
+          </a:p>
+          <a:p>
+            <a:pPr algn="l">
+              <a:lnSpc>
+                <a:spcPts val="1820"/>
+              </a:lnSpc>
+              <a:spcBef>
+                <a:spcPts val="200"/>
+              </a:spcBef>
+              <a:spcAft>
+                <a:spcPts val="200"/>
+              </a:spcAft>
+            </a:pPr>
+            <a:r>
+              <a:rPr sz="1400" b="0">
+                <a:solidFill>
+                  <a:srgbClr val="000000"/>
+                </a:solidFill>
+                <a:latin typeface="Microsoft YaHei"/>
+              </a:rPr>
+              <a:t>第十七条 纳税人在主要工作城市没有自有住房而发生的住房租金支出，可以按照以下标准定额扣除：（一）直辖市、省会（首府）城市、计划单列市以及国务院确定的其他城市，扣除标准为每月1500元；（二）除第一项所列城市以外，市辖区户籍人口超过100万的城市，扣除标准为每月1100元；市辖区户籍人口不超过100万的城市，扣除标准为每月800元。纳税人的配偶在纳税人的主要工作城市有自有住房的，视同纳税人在主要工作城市有自有住房。市辖区户籍人口，以国家统计局公布的数据为准。</a:t>
             </a:r>
           </a:p>
           <a:p>
@@ -6297,7 +6187,7 @@
                 </a:solidFill>
                 <a:latin typeface="Microsoft YaHei"/>
               </a:rPr>
-              <a:t>根据《中华人民共和国个人所得税法实施条例》（国务院令第707 号）规定：</a:t>
+              <a:t>根据《中华人民共和国个人所得税法实施条例》（国务院令第707号）规定：</a:t>
             </a:r>
           </a:p>
           <a:p>
@@ -6363,7 +6253,7 @@
                 </a:solidFill>
                 <a:latin typeface="Microsoft YaHei"/>
               </a:rPr>
-              <a:t>根据《国家税务总局关于印发〈征收个人所得税若干问题的规定〉的通知》（国税发〔1994〕89 号）第二条第（二）项规定，下列不属于工资、薪金性质的补贴、津贴或者不属于纳税人本人工资、薪金所得项目的收入，不征税：1.独生子女补贴；2.执行公务员工资制度未纳入基本工资总额的补贴、津贴差额和家属成员的副食品补贴；3. 托儿补助费；4.差旅费津贴、误餐补助。</a:t>
+              <a:t>根据《国家税务总局关于印发〈征收个人所得税若干问题的规定〉的通知》（国税发〔1994〕89号）第二条第（二）项规定，下列不属于工资、薪金性质的补贴、津贴或者不属于纳税人本人工资、薪金所得项目的收入，不征税：1.独生子女补贴；2.执行公务员工资制度未纳入基本工资总额的补贴、津贴差额和家属成员的副食品补贴；3. 托儿补助费；4.差旅费津贴、误餐补助。</a:t>
             </a:r>
           </a:p>
           <a:p>
@@ -6654,7 +6544,7 @@
                 </a:solidFill>
                 <a:latin typeface="Microsoft YaHei"/>
               </a:rPr>
-              <a:t>根据《中华人民共和国个人所得税法实施条例》（国务院令第707 号）的规定：</a:t>
+              <a:t>根据《中华人民共和国个人所得税法实施条例》（国务院令第707号）的规定：</a:t>
             </a:r>
           </a:p>
           <a:p>
@@ -7011,7 +6901,7 @@
                 </a:solidFill>
                 <a:latin typeface="Microsoft YaHei"/>
               </a:rPr>
-              <a:t>“第十一条 居民个人取得综合所得，按年计算个人所得税；有扣缴义务人的，由扣缴义务人按月或者按次预扣预缴税款；需要办理汇算清缴的，应当在取得所得的次年三月一日至六月三十日内办理汇算清缴。预扣预缴办法由国务院税务主管部门制定。居民个人向扣缴义务人提供专项附加扣除信息的，扣缴义务人按月预扣预缴税款时应当按照规定予以扣除，不得拒绝。非居民个人取得工资、薪金所得，劳务报酬所得，稿酬所得和特许权使用费所得，有扣缴义务人的，由扣缴义务人按月或者按次代扣代缴税款，不办理汇算清缴。” 根据《个人所得税综合所得汇算清缴管理办法》（国家税务总局令第 57 号）第五条的规定，纳税人应当在取得综合所得的纳税年度的次年三月一日至六月三十日内办理汇算清缴。在中国境内无住所的纳税人在汇算清缴开始前离境的，可以在离境前办理。</a:t>
+              <a:t>“第十一条 居民个人取得综合所得，按年计算个人所得税；有扣缴义务人的，由扣缴义务人按月或者按次预扣预缴税款；需要办理汇算清缴的，应当在取得所得的次年三月一日至六月三十日内办理汇算清缴。预扣预缴办法由国务院税务主管部门制定。居民个人向扣缴义务人提供专项附加扣除信息的，扣缴义务人按月预扣预缴税款时应当按照规定予以扣除，不得拒绝。非居民个人取得工资、薪金所得，劳务报酬所得，稿酬所得和特许权使用费所得，有扣缴义务人的，由扣缴义务人按月或者按次代扣代缴税款，不办理汇算清缴。” 根据《个人所得税综合所得汇算清缴管理办法》（国家税务总局令第57号）第五条的规定，纳税人应当在取得综合所得的纳税年度的次年三月一日至六月三十日内办理汇算清缴。在中国境内无住所的纳税人在汇算清缴开始前离境的，可以在离境前办理。</a:t>
             </a:r>
           </a:p>
           <a:p>
@@ -7302,7 +7192,7 @@
                 </a:solidFill>
                 <a:latin typeface="Microsoft YaHei"/>
               </a:rPr>
-              <a:t>根据《中华人民共和国个人所得税法实施条例》（国务院令第707 号）的规定：</a:t>
+              <a:t>根据《中华人民共和国个人所得税法实施条例》（国务院令第707号）的规定：</a:t>
             </a:r>
           </a:p>
           <a:p>
@@ -7615,7 +7505,7 @@
                 </a:solidFill>
                 <a:latin typeface="Microsoft YaHei"/>
               </a:rPr>
-              <a:t>《个人所得税法》第六条第二项规定：劳务报酬所得、稿酬所得、特许权使用费所得以每次收入额为应纳税所得额。根据《中华人民共和国个人所得税法实施条例》（国务院令第707 号）的规定：</a:t>
+              <a:t>《个人所得税法》第六条第二项规定：劳务报酬所得、稿酬所得、特许权使用费所得以每次收入额为应纳税所得额。根据《中华人民共和国个人所得税法实施条例》（国务院令第707号）的规定：</a:t>
             </a:r>
           </a:p>
           <a:p>
@@ -7928,7 +7818,7 @@
                 </a:solidFill>
                 <a:latin typeface="Microsoft YaHei"/>
               </a:rPr>
-              <a:t>根据《中华人民共和国税收征管法》（主席令2013 年第5号）第六十九条的规定：</a:t>
+              <a:t>根据《中华人民共和国税收征管法》（主席令2013年第5号）第六十九条的规定：</a:t>
             </a:r>
           </a:p>
           <a:p>
@@ -7994,7 +7884,7 @@
                 </a:solidFill>
                 <a:latin typeface="Microsoft YaHei"/>
               </a:rPr>
-              <a:t>企业未履行代扣代缴义务的，个人应补缴欠缴的个税，企业应承担 50%以上 3 倍以下罚款。</a:t>
+              <a:t>企业未履行代扣代缴义务的，个人应补缴欠缴的个税，企业应承担50%以上3倍以下罚款。</a:t>
             </a:r>
           </a:p>
           <a:p>
@@ -8241,7 +8131,7 @@
                 </a:solidFill>
                 <a:latin typeface="Microsoft YaHei"/>
               </a:rPr>
-              <a:t>根据《财政部 国家税务总局关于个人取得有关收入适用个人所得税应税所得项目的公告》（财政部 税务总局公告2019 年第74号）第三条规定：</a:t>
+              <a:t>根据《财政部 国家税务总局关于个人取得有关收入适用个人所得税应税所得项目的公告》（财政部 税务总局公告2019年第74号）第三条规定：</a:t>
             </a:r>
           </a:p>
           <a:p>
@@ -8554,7 +8444,7 @@
                 </a:solidFill>
                 <a:latin typeface="Microsoft YaHei"/>
               </a:rPr>
-              <a:t>根据《财政部 国家税务总局关于基本养老保险费基本医疗保险费失业保险费住房公积金有关个人所得税政策的通知》（财税〔2006〕10 号）第一条规定：</a:t>
+              <a:t>根据《财政部 国家税务总局关于基本养老保险费基本医疗保险费失业保险费住房公积金有关个人所得税政策的通知》（财税〔2006〕10号）第一条规定：</a:t>
             </a:r>
           </a:p>
           <a:p>
@@ -8867,29 +8757,29 @@
                 </a:solidFill>
                 <a:latin typeface="Microsoft YaHei"/>
               </a:rPr>
-              <a:t>根据《财政部 国家税务总局关于基本养老保险费基本医疗保险费失业保险费住房公积金有关个人所得税政策的通知》（财税〔2006〕10 号）第二条规定：</a:t>
-            </a:r>
-          </a:p>
-          <a:p>
-            <a:pPr algn="l">
-              <a:lnSpc>
-                <a:spcPts val="1820"/>
-              </a:lnSpc>
-              <a:spcBef>
-                <a:spcPts val="200"/>
-              </a:spcBef>
-              <a:spcAft>
-                <a:spcPts val="200"/>
-              </a:spcAft>
-            </a:pPr>
-            <a:r>
-              <a:rPr sz="1400" b="0">
-                <a:solidFill>
-                  <a:srgbClr val="000000"/>
-                </a:solidFill>
-                <a:latin typeface="Microsoft YaHei"/>
-              </a:rPr>
-              <a:t>单位和个人分别在不超过职工本人上一年度月平均工资12%的幅度内，其实际缴存的住房公积金，允许在个人应纳税所得额中扣除。单位和职工个人缴存住房公积金的月平均工资不得超过职工工作地所在设区城市上一年度职工月平均工资的3 倍，具体标准按照各地有关规定执行。单位和个人超过上述规定比例和标准缴付的住房公积金，应将超过部分并入个人当期的工资、薪金收入，计征个人所得税。</a:t>
+              <a:t>根据《财政部 国家税务总局关于基本养老保险费基本医疗保险费失业保险费住房公积金有关个人所得税政策的通知》（财税〔2006〕10号）第二条规定：</a:t>
+            </a:r>
+          </a:p>
+          <a:p>
+            <a:pPr algn="l">
+              <a:lnSpc>
+                <a:spcPts val="1820"/>
+              </a:lnSpc>
+              <a:spcBef>
+                <a:spcPts val="200"/>
+              </a:spcBef>
+              <a:spcAft>
+                <a:spcPts val="200"/>
+              </a:spcAft>
+            </a:pPr>
+            <a:r>
+              <a:rPr sz="1400" b="0">
+                <a:solidFill>
+                  <a:srgbClr val="000000"/>
+                </a:solidFill>
+                <a:latin typeface="Microsoft YaHei"/>
+              </a:rPr>
+              <a:t>单位和个人分别在不超过职工本人上一年度月平均工资12%的幅度内，其实际缴存的住房公积金，允许在个人应纳税所得额中扣除。单位和职工个人缴存住房公积金的月平均工资不得超过职工工作地所在设区城市上一年度职工月平均工资的3倍，具体标准按照各地有关规定执行。单位和个人超过上述规定比例和标准缴付的住房公积金，应将超过部分并入个人当期的工资、薪金收入，计征个人所得税。</a:t>
             </a:r>
           </a:p>
           <a:p>
@@ -9180,7 +9070,7 @@
                 </a:solidFill>
                 <a:latin typeface="Microsoft YaHei"/>
               </a:rPr>
-              <a:t>按照《财政部关于个人所得税法修改后有关优惠政策衔接问题的通知》（财税〔2018〕164 号）第四条规定：个人达到国家规定的退休年龄，领取的企业年金、职业年金，符合《财政部 人力资源社会保障部 国家税务总局关于企业年金职业年金个人所得税有关问题的通知》（财税〔2013〕103 号）规定的，不并入综合所得，全额单独计算应纳税款。其中按月领取的，适用月度税率表计算纳税；按季领取的，平均分摊计入各月，按每月领取额适用月度税率表计算纳税；按年领取的，适用综合所得税率表计算纳税。个人因出境定居而一次性领取的年金个人账户资金，或个人死亡后，其指定的受益人或法定继承人一次性领取的年金个人账户余额，适用综合所得税率表计算纳税。对个人除上述特殊原因外一次性领取年金个人账户资金或余额的，适用月度税率表计算纳税。</a:t>
+              <a:t>按照《财政部关于个人所得税法修改后有关优惠政策衔接问题的通知》（财税〔2018〕164号）第四条规定：个人达到国家规定的退休年龄，领取的企业年金、职业年金，符合《财政部 人力资源社会保障部 国家税务总局关于企业年金职业年金个人所得税有关问题的通知》（财税〔2013〕103号）规定的，不并入综合所得，全额单独计算应纳税款。其中按月领取的，适用月度税率表计算纳税；按季领取的，平均分摊计入各月，按每月领取额适用月度税率表计算纳税；按年领取的，适用综合所得税率表计算纳税。个人因出境定居而一次性领取的年金个人账户资金，或个人死亡后，其指定的受益人或法定继承人一次性领取的年金个人账户余额，适用综合所得税率表计算纳税。对个人除上述特殊原因外一次性领取年金个人账户资金或余额的，适用月度税率表计算纳税。</a:t>
             </a:r>
           </a:p>
           <a:p>
@@ -9268,7 +9158,7 @@
                 </a:solidFill>
                 <a:latin typeface="Microsoft YaHei"/>
               </a:rPr>
-              <a:t>企业应向主管税务局报送年金方案、人社部出具的方案备案函、计划确认函等资料。托管人根据受托人指令及账户管理人提供的资料，按照规定计算扣缴个人当期领取年金待遇的应纳税款，并向托管人所在地主管税务机关申报解缴。 在年金领取环节，由托管人在为个人支付年金待遇时，根据个人当月取得的年金所得、往期缴费及纳税情况计算扣缴个人所得税，并向托管人主管税务机关申报缴纳。年金托管人在第一次代扣代缴年金领取人的个人所得税时，应在《个人所得税基础信息表（A 表）》“备注”中注明“年金领取”字样。其余项目仍按《个人所得税基础信息表（A 表）》的填表说明填写。扣缴义务人应将个人领取的年金所属期间填入《扣缴个人所得税报告表》第 6 列“所得期间”，将领取年金金额填入第7 列“收入额”，将允许减计的金额填入第 15 列“其他”。其余项目仍按《扣缴个人所得税报告表》的填表说明填写。</a:t>
+              <a:t>企业应向主管税务局报送年金方案、人社部出具的方案备案函、计划确认函等资料。托管人根据受托人指令及账户管理人提供的资料，按照规定计算扣缴个人当期领取年金待遇的应纳税款，并向托管人所在地主管税务机关申报解缴。 在年金领取环节，由托管人在为个人支付年金待遇时，根据个人当月取得的年金所得、往期缴费及纳税情况计算扣缴个人所得税，并向托管人主管税务机关申报缴纳。年金托管人在第一次代扣代缴年金领取人的个人所得税时，应在《个人所得税基础信息表（A 表）》“备注”中注明“年金领取”字样。其余项目仍按《个人所得税基础信息表（A 表）》的填表说明填写。扣缴义务人应将个人领取的年金所属期间填入《扣缴个人所得税报告表》第6列“所得期间”，将领取年金金额填入第7列“收入额”，将允许减计的金额填入第15列“其他”。其余项目仍按《扣缴个人所得税报告表》的填表说明填写。</a:t>
             </a:r>
           </a:p>
         </p:txBody>
@@ -9427,7 +9317,7 @@
                 </a:solidFill>
                 <a:latin typeface="Microsoft YaHei"/>
               </a:rPr>
-              <a:t>很多大型国企或外企都实行年金制度，按现行政策，个人根据国家有关政策规定缴付的年金个人缴费部分，在不超过本人缴费工资计税基数的 4%标准内的部分可以在个人当期的应纳税所得额中扣除，但超出 4%部分应并入个人当期的工资、薪金所得，依法计征个人所得税。企业若未代扣代缴，存在少缴个税风险。</a:t>
+              <a:t>很多大型国企或外企都实行年金制度，按现行政策，个人根据国家有关政策规定缴付的年金个人缴费部分，在不超过本人缴费工资计税基数的4%标准内的部分可以在个人当期的应纳税所得额中扣除，但超出4%部分应并入个人当期的工资、薪金所得，依法计征个人所得税。企业若未代扣代缴，存在少缴个税风险。</a:t>
             </a:r>
           </a:p>
           <a:p>
@@ -9471,73 +9361,51 @@
                 </a:solidFill>
                 <a:latin typeface="Microsoft YaHei"/>
               </a:rPr>
-              <a:t>根据《财政部 国家税务总局 人力资源和社会保障部关于企业年金职业年金个人所得税有关问题的通知》（财税〔2013〕103 号）规定：</a:t>
-            </a:r>
-          </a:p>
-          <a:p>
-            <a:pPr algn="l">
-              <a:lnSpc>
-                <a:spcPts val="1820"/>
-              </a:lnSpc>
-              <a:spcBef>
-                <a:spcPts val="200"/>
-              </a:spcBef>
-              <a:spcAft>
-                <a:spcPts val="200"/>
-              </a:spcAft>
-            </a:pPr>
-            <a:r>
-              <a:rPr sz="1400" b="0">
-                <a:solidFill>
-                  <a:srgbClr val="000000"/>
-                </a:solidFill>
-                <a:latin typeface="Microsoft YaHei"/>
-              </a:rPr>
-              <a:t>第一条 2.个人根据国家有关政策规定缴付的年金个人缴费部分，在不超过本人缴费工资计税基数的 4%标准内的部分，暂从个人当期的应纳税所得额中扣除。</a:t>
-            </a:r>
-          </a:p>
-          <a:p>
-            <a:pPr algn="l">
-              <a:lnSpc>
-                <a:spcPts val="1820"/>
-              </a:lnSpc>
-              <a:spcBef>
-                <a:spcPts val="200"/>
-              </a:spcBef>
-              <a:spcAft>
-                <a:spcPts val="200"/>
-              </a:spcAft>
-            </a:pPr>
-            <a:r>
-              <a:rPr sz="1400" b="0">
-                <a:solidFill>
-                  <a:srgbClr val="000000"/>
-                </a:solidFill>
-                <a:latin typeface="Microsoft YaHei"/>
-              </a:rPr>
-              <a:t>3.超过本通知第一条第 1 项和第 2 项规定的标准缴付的年金单位缴费和个人缴费部分，应并入个人当期的工资、薪金所得，依法计征个人所得税。税款由建立年金的单位代扣代缴，并向主管税务机关申报解缴。</a:t>
-            </a:r>
-          </a:p>
-          <a:p>
-            <a:pPr algn="l">
-              <a:lnSpc>
-                <a:spcPts val="1820"/>
-              </a:lnSpc>
-              <a:spcBef>
-                <a:spcPts val="200"/>
-              </a:spcBef>
-              <a:spcAft>
-                <a:spcPts val="200"/>
-              </a:spcAft>
-            </a:pPr>
-            <a:r>
-              <a:rPr sz="1400" b="0">
-                <a:solidFill>
-                  <a:srgbClr val="000000"/>
-                </a:solidFill>
-                <a:latin typeface="Microsoft YaHei"/>
-              </a:rPr>
-              <a:t>第四条 建立年金计划的单位，应于建立年金计划的次月15日内，向其所在地主管税务机关报送年金方案、人力资源社会保障部门出具的方案备案函、计划确认函以及主管税务机关要求报送的其他相关资料。年金方案、受托人、托管人发生变化的，应于发生变化的次月15 日内重新向其主管税务机关报送上述资料。</a:t>
+              <a:t>根据《财政部 国家税务总局 人力资源和社会保障部关于企业年金职业年金个人所得税有关问题的通知》（财税〔2013〕103号）规定：</a:t>
+            </a:r>
+          </a:p>
+          <a:p>
+            <a:pPr algn="l">
+              <a:lnSpc>
+                <a:spcPts val="1820"/>
+              </a:lnSpc>
+              <a:spcBef>
+                <a:spcPts val="200"/>
+              </a:spcBef>
+              <a:spcAft>
+                <a:spcPts val="200"/>
+              </a:spcAft>
+            </a:pPr>
+            <a:r>
+              <a:rPr sz="1400" b="0">
+                <a:solidFill>
+                  <a:srgbClr val="000000"/>
+                </a:solidFill>
+                <a:latin typeface="Microsoft YaHei"/>
+              </a:rPr>
+              <a:t>第一条2.个人根据国家有关政策规定缴付的年金个人缴费部分，在不超过本人缴费工资计税基数的4%标准内的部分，暂从个人当期的应纳税所得额中扣除。3.超过本通知第一条第1项和第2项规定的标准缴付的年金单位缴费和个人缴费部分，应并入个人当期的工资、薪金所得，依法计征个人所得税。税款由建立年金的单位代扣代缴，并向主管税务机关申报解缴。</a:t>
+            </a:r>
+          </a:p>
+          <a:p>
+            <a:pPr algn="l">
+              <a:lnSpc>
+                <a:spcPts val="1820"/>
+              </a:lnSpc>
+              <a:spcBef>
+                <a:spcPts val="200"/>
+              </a:spcBef>
+              <a:spcAft>
+                <a:spcPts val="200"/>
+              </a:spcAft>
+            </a:pPr>
+            <a:r>
+              <a:rPr sz="1400" b="0">
+                <a:solidFill>
+                  <a:srgbClr val="000000"/>
+                </a:solidFill>
+                <a:latin typeface="Microsoft YaHei"/>
+              </a:rPr>
+              <a:t>第四条 建立年金计划的单位，应于建立年金计划的次月15日内，向其所在地主管税务机关报送年金方案、人力资源社会保障部门出具的方案备案函、计划确认函以及主管税务机关要求报送的其他相关资料。年金方案、受托人、托管人发生变化的，应于发生变化的次月15日内重新向其主管税务机关报送上述资料。</a:t>
             </a:r>
           </a:p>
           <a:p>
@@ -9784,7 +9652,7 @@
                 </a:solidFill>
                 <a:latin typeface="Microsoft YaHei"/>
               </a:rPr>
-              <a:t>员工与用人单位解除劳动关系取得一次性补偿收入，在当地上年职工平均工资 3 倍数额以内的部分，免征个人所得税；超过3 倍数额的部分，不并入当年综合所得，单独适用综合所得税率表，计算纳税。在员工工资未达到起征点时，企业将超出部分并入综合所得抵减未达起征点数额后，再适用税率纳税，少交个税。</a:t>
+              <a:t>员工与用人单位解除劳动关系取得一次性补偿收入，在当地上年职工平均工资3倍数额以内的部分，免征个人所得税；超过3倍数额的部分，不并入当年综合所得，单独适用综合所得税率表，计算纳税。在员工工资未达到起征点时，企业将超出部分并入综合所得抵减未达起征点数额后，再适用税率纳税，少交个税。</a:t>
             </a:r>
           </a:p>
           <a:p>
@@ -9828,7 +9696,7 @@
                 </a:solidFill>
                 <a:latin typeface="Microsoft YaHei"/>
               </a:rPr>
-              <a:t>按照《财政部关于个人所得税法修改后有关优惠政策衔接问题的通知》（财税〔2018〕164 号）第五条（一）规定：个人与用人单位解除劳动关系取得一次性补偿收入（包括用人单位发放的经济补偿金、生活补助费和其他补助费），在当地上年职工平均工资 3 倍数额以内的部分，免征个人所得税；超过3 倍数额的部分，不并入当年综合所得，单独适用综合所得税率表，计算纳税。</a:t>
+              <a:t>按照《财政部关于个人所得税法修改后有关优惠政策衔接问题的通知》（财税〔2018〕164号）第五条（一）规定：个人与用人单位解除劳动关系取得一次性补偿收入（包括用人单位发放的经济补偿金、生活补助费和其他补助费），在当地上年职工平均工资3倍数额以内的部分，免征个人所得税；超过3倍数额的部分，不并入当年综合所得，单独适用综合所得税率表，计算纳税。</a:t>
             </a:r>
           </a:p>
           <a:p>
@@ -9916,7 +9784,7 @@
                 </a:solidFill>
                 <a:latin typeface="Microsoft YaHei"/>
               </a:rPr>
-              <a:t>个人与用人单位解除劳动关系取得一次性补偿收入（包括用人单位发放的经济补偿金、生活补助费和其他补助费），在当地上年职工平均工资 3 倍数额以内的部分，免征个人所得税；超过3 倍数额的部分，不并入当年综合所得，单独适用综合所得税率表，计算纳税。</a:t>
+              <a:t>个人与用人单位解除劳动关系取得一次性补偿收入（包括用人单位发放的经济补偿金、生活补助费和其他补助费），在当地上年职工平均工资3倍数额以内的部分，免征个人所得税；超过3倍数额的部分，不并入当年综合所得，单独适用综合所得税率表，计算纳税。</a:t>
             </a:r>
           </a:p>
         </p:txBody>
@@ -10075,7 +9943,7 @@
                 </a:solidFill>
                 <a:latin typeface="Microsoft YaHei"/>
               </a:rPr>
-              <a:t>员工与用人单位解除劳动关系取得一次性补偿收入，在当地上年职工平均工资 3 倍数额以内的部分，免征个人所得税；超过3 倍数额的部分，不并入当年综合所得，单独适用综合所得税率表，计算纳税。企业为了逃避个税或虚增成本，让同一员工在几个关联企业之间频繁跳槽，利用一次性补偿收入的减免政策，既达到逃避个税的目的，又在所得税前列支了补偿成本，少缴所得税。</a:t>
+              <a:t>员工与用人单位解除劳动关系取得一次性补偿收入，在当地上年职工平均工资3倍数额以内的部分，免征个人所得税；超过3倍数额的部分，不并入当年综合所得，单独适用综合所得税率表，计算纳税。企业为了逃避个税或虚增成本，让同一员工在几个关联企业之间频繁跳槽，利用一次性补偿收入的减免政策，既达到逃避个税的目的，又在所得税前列支了补偿成本，少缴所得税。</a:t>
             </a:r>
           </a:p>
           <a:p>
@@ -10119,7 +9987,7 @@
                 </a:solidFill>
                 <a:latin typeface="Microsoft YaHei"/>
               </a:rPr>
-              <a:t>按照《财政部关于个人所得税法修改后有关优惠政策衔接问题的通知》（财税〔2018〕164 号）第五条（一）规定：个人与用人单位解除劳动关系取得一次性补偿收入（包括用人单位发放的经济补偿金、生活补助费和其他补助费），在当地上年职工平均工资 3 倍数额以内的部分，免征个人所得税；超过3 倍数额的部分，不并入当年综合所得，单独适用综合所得税率表，计算纳税。</a:t>
+              <a:t>按照《财政部关于个人所得税法修改后有关优惠政策衔接问题的通知》（财税〔2018〕164号）第五条（一）规定：个人与用人单位解除劳动关系取得一次性补偿收入（包括用人单位发放的经济补偿金、生活补助费和其他补助费），在当地上年职工平均工资3倍数额以内的部分，免征个人所得税；超过3倍数额的部分，不并入当年综合所得，单独适用综合所得税率表，计算纳税。</a:t>
             </a:r>
           </a:p>
           <a:p>
@@ -10207,7 +10075,7 @@
                 </a:solidFill>
                 <a:latin typeface="Microsoft YaHei"/>
               </a:rPr>
-              <a:t>个人与用人单位解除劳动关系取得一次性补偿收入（包括用人单位发放的经济补偿金、生活补助费和其他补助费），在当地上年职工平均工资 3 倍数额以内的部分，免征个人所得税；超过3 倍数额的部分，不并入当年综合所得，单独适用综合所得税率表，计算纳税。</a:t>
+              <a:t>个人与用人单位解除劳动关系取得一次性补偿收入（包括用人单位发放的经济补偿金、生活补助费和其他补助费），在当地上年职工平均工资3倍数额以内的部分，免征个人所得税；超过3倍数额的部分，不并入当年综合所得，单独适用综合所得税率表，计算纳税。</a:t>
             </a:r>
           </a:p>
         </p:txBody>
@@ -10410,7 +10278,7 @@
                 </a:solidFill>
                 <a:latin typeface="Microsoft YaHei"/>
               </a:rPr>
-              <a:t>根据《中华人民共和国个人所得税法实施条例》（中华人民共和国国务院令 第 707 号）第六条：</a:t>
+              <a:t>根据《中华人民共和国个人所得税法实施条例》（中华人民共和国国务院令 第707号）第六条：</a:t>
             </a:r>
           </a:p>
           <a:p>
@@ -10723,7 +10591,7 @@
                 </a:solidFill>
                 <a:latin typeface="Microsoft YaHei"/>
               </a:rPr>
-              <a:t>根据《国家税务总局关于明确个人所得税若干政策执行问题的通知》（国税发〔2009〕121 号）第二条的规定：（一）《国家税务总局关于印发〈征收个人所得税若干问题的规定〉的通知》（国税发〔1994〕89 号）第八条规定的董事费按劳务报酬所得项目征税方法，仅适用于个人担任公司董事、监事，且不在公司任职、受雇的情形。</a:t>
+              <a:t>根据《国家税务总局关于明确个人所得税若干政策执行问题的通知》（国税发〔2009〕121号）第二条的规定：（一）《国家税务总局关于印发〈征收个人所得税若干问题的规定〉的通知》（国税发〔1994〕89号）第八条规定的董事费按劳务报酬所得项目征税方法，仅适用于个人担任公司董事、监事，且不在公司任职、受雇的情形。</a:t>
             </a:r>
           </a:p>
           <a:p>
@@ -11036,7 +10904,7 @@
                 </a:solidFill>
                 <a:latin typeface="Microsoft YaHei"/>
               </a:rPr>
-              <a:t>根据《国家税务总局关于明确个人所得税若干政策执行问题的通知》（国税发〔2009〕121 号）第二条的规定：（一）《国家税务总局关于印发〈征收个人所得税若干问题的规定〉的通知》（国税发〔1994〕89 号）第八条规定的董事费按劳务报酬所得项目征税方法，仅适用于个人担任公司董事、监事，且不在公司任职、受雇的情形。</a:t>
+              <a:t>根据《国家税务总局关于明确个人所得税若干政策执行问题的通知》（国税发〔2009〕121号）第二条的规定：（一）《国家税务总局关于印发〈征收个人所得税若干问题的规定〉的通知》（国税发〔1994〕89号）第八条规定的董事费按劳务报酬所得项目征税方法，仅适用于个人担任公司董事、监事，且不在公司任职、受雇的情形。</a:t>
             </a:r>
           </a:p>
           <a:p>
@@ -11349,29 +11217,29 @@
                 </a:solidFill>
                 <a:latin typeface="Microsoft YaHei"/>
               </a:rPr>
-              <a:t>根据《国家税务总局关于发布&lt;股权转让所得个人所得税管理办法（试行）&gt;的公告》（国家税务总局公告2014 年第67 号）的规定：第三条 本办法所称股权转让是指个人将股权转让给其他个人或法人的行为，包括以下情形：（一）出售股权；（二）公司回购股权；（三）发行人首次公开发行新股时，被投资企业股东将其持有的股份以公开发行方式一并向投资者发售；（四）股权被司法或行政机关强制过户；（五）以股权对外投资或进行其他非货币性交易；（六）以股权抵偿债务；（七）其他股权转移行为。第四条 个人转让股权，以股权转让收入减除股权原值和合理费用后的余额为应纳税所得额，按“财产转让所得”缴纳个人所得税。合理费用是指股权转让时按照规定支付的有关税费。第五条 个人股权转让所得个人所得税，以股权转让方为纳税人，以受让方为扣缴义务人。</a:t>
-            </a:r>
-          </a:p>
-          <a:p>
-            <a:pPr algn="l">
-              <a:lnSpc>
-                <a:spcPts val="1820"/>
-              </a:lnSpc>
-              <a:spcBef>
-                <a:spcPts val="200"/>
-              </a:spcBef>
-              <a:spcAft>
-                <a:spcPts val="200"/>
-              </a:spcAft>
-            </a:pPr>
-            <a:r>
-              <a:rPr sz="1400" b="0">
-                <a:solidFill>
-                  <a:srgbClr val="000000"/>
-                </a:solidFill>
-                <a:latin typeface="Microsoft YaHei"/>
-              </a:rPr>
-              <a:t>根据《财政部 国家税务总局关于个人转让股票所得继续暂免征收个人所得税的通知》（财税字〔1998〕61 号）规定：为了配合企业改制，促进股票市场的稳健发展，经报国务院批准，从 1997 年 1 月 1 日起，对个人转让上市公司股票取得的所得继续暂免征收个人所得税。</a:t>
+              <a:t>根据《国家税务总局关于发布&lt;股权转让所得个人所得税管理办法（试行）&gt;的公告》（国家税务总局公告2014年第67号）的规定：第三条 本办法所称股权转让是指个人将股权转让给其他个人或法人的行为，包括以下情形：（一）出售股权；（二）公司回购股权；（三）发行人首次公开发行新股时，被投资企业股东将其持有的股份以公开发行方式一并向投资者发售；（四）股权被司法或行政机关强制过户；（五）以股权对外投资或进行其他非货币性交易；（六）以股权抵偿债务；（七）其他股权转移行为。第四条 个人转让股权，以股权转让收入减除股权原值和合理费用后的余额为应纳税所得额，按“财产转让所得”缴纳个人所得税。合理费用是指股权转让时按照规定支付的有关税费。第五条 个人股权转让所得个人所得税，以股权转让方为纳税人，以受让方为扣缴义务人。</a:t>
+            </a:r>
+          </a:p>
+          <a:p>
+            <a:pPr algn="l">
+              <a:lnSpc>
+                <a:spcPts val="1820"/>
+              </a:lnSpc>
+              <a:spcBef>
+                <a:spcPts val="200"/>
+              </a:spcBef>
+              <a:spcAft>
+                <a:spcPts val="200"/>
+              </a:spcAft>
+            </a:pPr>
+            <a:r>
+              <a:rPr sz="1400" b="0">
+                <a:solidFill>
+                  <a:srgbClr val="000000"/>
+                </a:solidFill>
+                <a:latin typeface="Microsoft YaHei"/>
+              </a:rPr>
+              <a:t>根据《财政部 国家税务总局关于个人转让股票所得继续暂免征收个人所得税的通知》（财税字〔1998〕61号）规定：为了配合企业改制，促进股票市场的稳健发展，经报国务院批准，从1997年1月1日起，对个人转让上市公司股票取得的所得继续暂免征收个人所得税。</a:t>
             </a:r>
           </a:p>
           <a:p>
@@ -11618,7 +11486,7 @@
                 </a:solidFill>
                 <a:latin typeface="Microsoft YaHei"/>
               </a:rPr>
-              <a:t>企业自然人股东转让股权时，通常存在低价转让或0 元转让的现象，比如认缴制下实缴注册资本为 0，0 元转让股权，股权转让收入为 0，转让人往往认为不需要缴个税。但申报的股权转让收入低于股权对应的净资产份额的，视为股权转让收入明显偏低，存在被核定转让收入补缴税款的风险。</a:t>
+              <a:t>企业自然人股东转让股权时，通常存在低价转让或0元转让的现象，比如认缴制下实缴注册资本为0，0元转让股权，股权转让收入为0，转让人往往认为不需要缴个税。但申报的股权转让收入低于股权对应的净资产份额的，视为股权转让收入明显偏低，存在被核定转让收入补缴税款的风险。</a:t>
             </a:r>
           </a:p>
           <a:p>
@@ -11662,7 +11530,7 @@
                 </a:solidFill>
                 <a:latin typeface="Microsoft YaHei"/>
               </a:rPr>
-              <a:t>根据《国家税务总局关于发布〈股权转让所得个人所得税管理办法（试行）〉的公告》（国家税务总局公告2014 年第67 号）的规定:第十一条 符合下列情形之一的，主管税务机关可以核定股权转让收入：</a:t>
+              <a:t>根据《国家税务总局关于发布〈股权转让所得个人所得税管理办法（试行）〉的公告》（国家税务总局公告2014年第67号）的规定:第十一条 符合下列情形之一的，主管税务机关可以核定股权转让收入：</a:t>
             </a:r>
           </a:p>
           <a:p>
@@ -11997,29 +11865,29 @@
                 </a:solidFill>
                 <a:latin typeface="Microsoft YaHei"/>
               </a:rPr>
-              <a:t>根据《国家税务总局关于发布&lt;股权转让所得个人所得税管理办法（试行）&gt;公告》（国家税务总局公告2014 年第67 号）的规定：第二十条 具有下列情形之一的，扣缴义务人、纳税人应当依法在次月 15 日内向主管税务机关申报纳税：（二）股权转让协议已签订生效的；</a:t>
-            </a:r>
-          </a:p>
-          <a:p>
-            <a:pPr algn="l">
-              <a:lnSpc>
-                <a:spcPts val="1820"/>
-              </a:lnSpc>
-              <a:spcBef>
-                <a:spcPts val="200"/>
-              </a:spcBef>
-              <a:spcAft>
-                <a:spcPts val="200"/>
-              </a:spcAft>
-            </a:pPr>
-            <a:r>
-              <a:rPr sz="1400" b="0">
-                <a:solidFill>
-                  <a:srgbClr val="000000"/>
-                </a:solidFill>
-                <a:latin typeface="Microsoft YaHei"/>
-              </a:rPr>
-              <a:t>根据《国家税务总局关于贯彻落实企业所得税法若干税收问题的通知》（国税函〔2010〕79 号）规定：第三条 企业转让股权收入，应于转让协议生效且完成股权变更手续时，确认收入的实现。转让股权收入扣除为取得该股权所发生的成本后，为股权转让所得。</a:t>
+              <a:t>根据《国家税务总局关于发布&lt;股权转让所得个人所得税管理办法（试行）&gt;公告》（国家税务总局公告2014年第67号）的规定：第二十条 具有下列情形之一的，扣缴义务人、纳税人应当依法在次月15日内向主管税务机关申报纳税：（二）股权转让协议已签订生效的；</a:t>
+            </a:r>
+          </a:p>
+          <a:p>
+            <a:pPr algn="l">
+              <a:lnSpc>
+                <a:spcPts val="1820"/>
+              </a:lnSpc>
+              <a:spcBef>
+                <a:spcPts val="200"/>
+              </a:spcBef>
+              <a:spcAft>
+                <a:spcPts val="200"/>
+              </a:spcAft>
+            </a:pPr>
+            <a:r>
+              <a:rPr sz="1400" b="0">
+                <a:solidFill>
+                  <a:srgbClr val="000000"/>
+                </a:solidFill>
+                <a:latin typeface="Microsoft YaHei"/>
+              </a:rPr>
+              <a:t>根据《国家税务总局关于贯彻落实企业所得税法若干税收问题的通知》（国税函〔2010〕79号）规定：第三条 企业转让股权收入，应于转让协议生效且完成股权变更手续时，确认收入的实现。转让股权收入扣除为取得该股权所发生的成本后，为股权转让所得。</a:t>
             </a:r>
           </a:p>
           <a:p>
@@ -12107,7 +11975,7 @@
                 </a:solidFill>
                 <a:latin typeface="Microsoft YaHei"/>
               </a:rPr>
-              <a:t>企业转让股权收入，应于转让协议生效且完成股权变更手续时，确认收入的实现。即使未收到款项，扣缴义务人、纳税人也应当依法在次月 15 日内向主管税务机关申报纳税。</a:t>
+              <a:t>企业转让股权收入，应于转让协议生效且完成股权变更手续时，确认收入的实现。即使未收到款项，扣缴义务人、纳税人也应当依法在次月15日内向主管税务机关申报纳税。</a:t>
             </a:r>
           </a:p>
         </p:txBody>
@@ -12310,7 +12178,7 @@
                 </a:solidFill>
                 <a:latin typeface="Microsoft YaHei"/>
               </a:rPr>
-              <a:t>根据《国家税务总局关于纳税人收回转让的股权征收个人所得税问题的批复》（国税函〔2005〕130 号）第二条规定，股权转让合同履行完毕、股权已作变更登记，且所得已经实现的，转让人取得的股权转让收入应当依法缴纳个人所得税。转让行为结束后，当事人双方签订并执行解除原股权转让合同、退回股权的协议，是另一次股权转让行为，对前次转让行为征收的个人所得税款不予退回。</a:t>
+              <a:t>根据《国家税务总局关于纳税人收回转让的股权征收个人所得税问题的批复》（国税函〔2005〕130号）第二条规定，股权转让合同履行完毕、股权已作变更登记，且所得已经实现的，转让人取得的股权转让收入应当依法缴纳个人所得税。转让行为结束后，当事人双方签订并执行解除原股权转让合同、退回股权的协议，是另一次股权转让行为，对前次转让行为征收的个人所得税款不予退回。</a:t>
             </a:r>
           </a:p>
           <a:p>
@@ -12601,7 +12469,7 @@
                 </a:solidFill>
                 <a:latin typeface="Microsoft YaHei"/>
               </a:rPr>
-              <a:t>根据《关于个人股权转让过程中取得违约金收入征收个人所得税问题的批复》（国税函〔2006〕866 号）规定：根据《中华人民共和国个人所得税法》的有关规定，股权成功转让后，转让方个人因受让方个人未按规定期限支付价款而取得的违约金收入，属于因财产转让而产生的收入。</a:t>
+              <a:t>根据《关于个人股权转让过程中取得违约金收入征收个人所得税问题的批复》（国税函〔2006〕866号）规定：根据《中华人民共和国个人所得税法》的有关规定，股权成功转让后，转让方个人因受让方个人未按规定期限支付价款而取得的违约金收入，属于因财产转让而产生的收入。</a:t>
             </a:r>
           </a:p>
           <a:p>
@@ -12848,7 +12716,7 @@
                 </a:solidFill>
                 <a:latin typeface="Microsoft YaHei"/>
               </a:rPr>
-              <a:t>住房贷款利息支出税前扣除不合理，比如纳税人的非首套住房贷款利息支出进行了扣除；纳税人首套贷款年限已经超过20 年的，住房贷款利息的专项支出每月 1000 元也进行了扣除；夫妻双方分别在各自单位在税前进行了扣除等。</a:t>
+              <a:t>住房贷款利息支出税前扣除不合理，比如纳税人的非首套住房贷款利息支出进行了扣除；纳税人首套贷款年限已经超过20年的，住房贷款利息的专项支出每月1000元也进行了扣除；夫妻双方分别在各自单位在税前进行了扣除等。</a:t>
             </a:r>
           </a:p>
           <a:p>
@@ -12892,29 +12760,7 @@
                 </a:solidFill>
                 <a:latin typeface="Microsoft YaHei"/>
               </a:rPr>
-              <a:t>根据《国务院关于印发个人所得税专项附加扣除暂行办法的通知》（国发〔2018〕41 号）</a:t>
-            </a:r>
-          </a:p>
-          <a:p>
-            <a:pPr algn="l">
-              <a:lnSpc>
-                <a:spcPts val="1820"/>
-              </a:lnSpc>
-              <a:spcBef>
-                <a:spcPts val="200"/>
-              </a:spcBef>
-              <a:spcAft>
-                <a:spcPts val="200"/>
-              </a:spcAft>
-            </a:pPr>
-            <a:r>
-              <a:rPr sz="1400" b="0">
-                <a:solidFill>
-                  <a:srgbClr val="000000"/>
-                </a:solidFill>
-                <a:latin typeface="Microsoft YaHei"/>
-              </a:rPr>
-              <a:t>第十四条 纳税人本人或者配偶单独或者共同使用商业银行或者住房公积金个人住房贷款为本人或者其配偶购买中国境内住房，发生的首套住房贷款利息支出，在实际发生贷款利息的年度，按照每月1000 元的标准定额扣除，扣除期限最长不超过240 个月。纳税人只能享受一次首套住房贷款的利息扣除。本办法所称首套住房贷款是指购买住房享受首套住房贷款利率的住房贷款。</a:t>
+              <a:t>根据《国务院关于印发个人所得税专项附加扣除暂行办法的通知》（国发〔2018〕41号）第十四条 纳税人本人或者配偶单独或者共同使用商业银行或者住房公积金个人住房贷款为本人或者其配偶购买中国境内住房，发生的首套住房贷款利息支出，在实际发生贷款利息的年度，按照每月1000元的标准定额扣除，扣除期限最长不超过240个月。纳税人只能享受一次首套住房贷款的利息扣除。本办法所称首套住房贷款是指购买住房享受首套住房贷款利率的住房贷款。</a:t>
             </a:r>
           </a:p>
           <a:p>
@@ -13002,7 +12848,7 @@
                 </a:solidFill>
                 <a:latin typeface="Microsoft YaHei"/>
               </a:rPr>
-              <a:t>纳税人在计算个税时，如果扣除的是非首套住房贷款利息支出及贷款年限已经超过 20 年的住房贷款利息支出，存在少缴个税的风险。</a:t>
+              <a:t>纳税人在计算个税时，如果扣除的是非首套住房贷款利息支出及贷款年限已经超过20年的住房贷款利息支出，存在少缴个税的风险。</a:t>
             </a:r>
           </a:p>
           <a:p>
@@ -13046,7 +12892,7 @@
                 </a:solidFill>
                 <a:latin typeface="Microsoft YaHei"/>
               </a:rPr>
-              <a:t>纳税人发生的首套住房贷款利息支出，在实际发生贷款利息的年度，按照每月 1000 元的标准定额扣除，扣除期限最长不超过240个月。纳税人只能享受一次首套住房贷款的利息扣除。首套住房贷款是指购买住房享受首套住房贷款利率的住房贷款。</a:t>
+              <a:t>纳税人发生的首套住房贷款利息支出，在实际发生贷款利息的年度，按照每月1000元的标准定额扣除，扣除期限最长不超过240个月。纳税人只能享受一次首套住房贷款的利息扣除。首套住房贷款是指购买住房享受首套住房贷款利率的住房贷款。</a:t>
             </a:r>
           </a:p>
         </p:txBody>
@@ -13205,7 +13051,7 @@
                 </a:solidFill>
                 <a:latin typeface="Microsoft YaHei"/>
               </a:rPr>
-              <a:t>纳税人赡养一位以上年满 60 岁老人的，即可享受。其中独生子女每月 3000 元，非独生子女可采取三种分摊方式，但不管哪一种，最多不能超过每人每月 1500 元标准。纳税人的父母或其他法定被赡养人未满 60 周岁的，赡养老人的专项支出（每月3000 元）不得扣除。</a:t>
+              <a:t>纳税人赡养一位以上年满60岁老人的，即可享受。其中独生子女每月3000元，非独生子女可采取三种分摊方式，但不管哪一种，最多不能超过每人每月1500元标准。纳税人的父母或其他法定被赡养人未满60周岁的，赡养老人的专项支出（每月3000元）不得扣除。</a:t>
             </a:r>
           </a:p>
           <a:p>
@@ -13249,51 +13095,51 @@
                 </a:solidFill>
                 <a:latin typeface="Microsoft YaHei"/>
               </a:rPr>
-              <a:t>根据《国务院关于印发个人所得税专项附加扣除暂行办法的通知》（国发〔2018〕41 号）第二十二条规定：</a:t>
-            </a:r>
-          </a:p>
-          <a:p>
-            <a:pPr algn="l">
-              <a:lnSpc>
-                <a:spcPts val="1820"/>
-              </a:lnSpc>
-              <a:spcBef>
-                <a:spcPts val="200"/>
-              </a:spcBef>
-              <a:spcAft>
-                <a:spcPts val="200"/>
-              </a:spcAft>
-            </a:pPr>
-            <a:r>
-              <a:rPr sz="1400" b="0">
-                <a:solidFill>
-                  <a:srgbClr val="000000"/>
-                </a:solidFill>
-                <a:latin typeface="Microsoft YaHei"/>
-              </a:rPr>
-              <a:t>纳税人赡养一位及以上被赡养人的赡养支出，统一按照以下标准定额扣除：（一）纳税人为独生子女的，按照每月2000 元的标准定额扣除；（二）纳税人为非独生子女的，由其与兄弟姐妹分摊每月2000 元的扣除额度，每人分摊的额度不能超过每月1000 元。可以由赡养人均摊或者约定分摊，也可以由被赡养人指定分摊。约定或者指定分摊的须签订书面分摊协议，指定分摊优先于约定分摊。具体分摊方式和额度在一个纳税年度内不能变更。第二十三条 本办法所称被赡养人是指年满60 岁的父母，以及子女均已去世的年满 60 岁的祖父母、外祖父母。根据《国家税务总局关于贯彻执行提高个人所得税有关专项附加扣除标准政策的公告》（国家税务总局公告2023 年第14 号）第二条规定：</a:t>
-            </a:r>
-          </a:p>
-          <a:p>
-            <a:pPr algn="l">
-              <a:lnSpc>
-                <a:spcPts val="1820"/>
-              </a:lnSpc>
-              <a:spcBef>
-                <a:spcPts val="200"/>
-              </a:spcBef>
-              <a:spcAft>
-                <a:spcPts val="200"/>
-              </a:spcAft>
-            </a:pPr>
-            <a:r>
-              <a:rPr sz="1400" b="0">
-                <a:solidFill>
-                  <a:srgbClr val="000000"/>
-                </a:solidFill>
-                <a:latin typeface="Microsoft YaHei"/>
-              </a:rPr>
-              <a:t>赡养老人专项附加扣除标准，由每月2000 元提高到3000元，其中，独生子女每月扣除 3000 元；非独生子女与兄弟姐妹分摊每月3000元的扣除额度，每人不超过 1500 元。</a:t>
+              <a:t>根据《国务院关于印发个人所得税专项附加扣除暂行办法的通知》（国发〔2018〕41号）第二十二条规定：</a:t>
+            </a:r>
+          </a:p>
+          <a:p>
+            <a:pPr algn="l">
+              <a:lnSpc>
+                <a:spcPts val="1820"/>
+              </a:lnSpc>
+              <a:spcBef>
+                <a:spcPts val="200"/>
+              </a:spcBef>
+              <a:spcAft>
+                <a:spcPts val="200"/>
+              </a:spcAft>
+            </a:pPr>
+            <a:r>
+              <a:rPr sz="1400" b="0">
+                <a:solidFill>
+                  <a:srgbClr val="000000"/>
+                </a:solidFill>
+                <a:latin typeface="Microsoft YaHei"/>
+              </a:rPr>
+              <a:t>纳税人赡养一位及以上被赡养人的赡养支出，统一按照以下标准定额扣除：（一）纳税人为独生子女的，按照每月2000元的标准定额扣除；（二）纳税人为非独生子女的，由其与兄弟姐妹分摊每月2000元的扣除额度，每人分摊的额度不能超过每月1000元。可以由赡养人均摊或者约定分摊，也可以由被赡养人指定分摊。约定或者指定分摊的须签订书面分摊协议，指定分摊优先于约定分摊。具体分摊方式和额度在一个纳税年度内不能变更。第二十三条 本办法所称被赡养人是指年满60岁的父母，以及子女均已去世的年满60岁的祖父母、外祖父母。根据《国家税务总局关于贯彻执行提高个人所得税有关专项附加扣除标准政策的公告》（国家税务总局公告2023年第14号）第二条规定：</a:t>
+            </a:r>
+          </a:p>
+          <a:p>
+            <a:pPr algn="l">
+              <a:lnSpc>
+                <a:spcPts val="1820"/>
+              </a:lnSpc>
+              <a:spcBef>
+                <a:spcPts val="200"/>
+              </a:spcBef>
+              <a:spcAft>
+                <a:spcPts val="200"/>
+              </a:spcAft>
+            </a:pPr>
+            <a:r>
+              <a:rPr sz="1400" b="0">
+                <a:solidFill>
+                  <a:srgbClr val="000000"/>
+                </a:solidFill>
+                <a:latin typeface="Microsoft YaHei"/>
+              </a:rPr>
+              <a:t>赡养老人专项附加扣除标准，由每月2000元提高到3000元，其中，独生子女每月扣除3000元；非独生子女与兄弟姐妹分摊每月3000元的扣除额度，每人不超过1500元。</a:t>
             </a:r>
           </a:p>
           <a:p>
@@ -13403,7 +13249,7 @@
                 </a:solidFill>
                 <a:latin typeface="Microsoft YaHei"/>
               </a:rPr>
-              <a:t>纳税人赡养一位及以上被赡养人的赡养支出，统一按照以下标准定额扣除：（一）纳税人为独生子女的，按照每月3000 元的标准定额扣除；（二）纳税人为非独生子女的，由其与兄弟姐妹分摊每月3000 元的扣除额度，每人分摊的额度不能超过每月1500 元。可以由赡养人均摊或者约定分摊，也可以由被赡养人指定分摊。约定或者指定分摊的须签订书面分摊协议，指定分摊优先于约定分摊。具体分摊方式和额度在一个纳税年度内不能变更。第二十三条本办法所称被赡养人是指年满 60 岁的父母，以及子女均已去世的年满60 岁的祖父母、外祖父母。</a:t>
+              <a:t>纳税人赡养一位及以上被赡养人的赡养支出，统一按照以下标准定额扣除：（一）纳税人为独生子女的，按照每月3000元的标准定额扣除；（二）纳税人为非独生子女的，由其与兄弟姐妹分摊每月3000元的扣除额度，每人分摊的额度不能超过每月1500元。可以由赡养人均摊或者约定分摊，也可以由被赡养人指定分摊。约定或者指定分摊的须签订书面分摊协议，指定分摊优先于约定分摊。具体分摊方式和额度在一个纳税年度内不能变更。第二十三条本办法所称被赡养人是指年满60岁的父母，以及子女均已去世的年满60岁的祖父母、外祖父母。</a:t>
             </a:r>
           </a:p>
         </p:txBody>
@@ -13562,7 +13408,7 @@
                 </a:solidFill>
                 <a:latin typeface="Microsoft YaHei"/>
               </a:rPr>
-              <a:t>无住所居民个人，在境内居住累计满183 天的年度连续满六年后，其从境内、境外取得的全部工资薪金所得均应计算缴纳个人所得税。很多企业仍旧以为境外所得免个税，未将境外所得并入境内工资薪金所得一并计征个人所得税。</a:t>
+              <a:t>无住所居民个人，在境内居住累计满183天的年度连续满六年后，其从境内、境外取得的全部工资薪金所得均应计算缴纳个人所得税。很多企业仍旧以为境外所得免个税，未将境外所得并入境内工资薪金所得一并计征个人所得税。</a:t>
             </a:r>
           </a:p>
           <a:p>
@@ -13606,29 +13452,29 @@
                 </a:solidFill>
                 <a:latin typeface="Microsoft YaHei"/>
               </a:rPr>
-              <a:t>根据《财政部 国家税务总局关于非居民个人和无住所居民个人有关个人所得税政策的公告》（财政部税务总局公告2019 年第35号） 第二条规定：</a:t>
-            </a:r>
-          </a:p>
-          <a:p>
-            <a:pPr algn="l">
-              <a:lnSpc>
-                <a:spcPts val="1820"/>
-              </a:lnSpc>
-              <a:spcBef>
-                <a:spcPts val="200"/>
-              </a:spcBef>
-              <a:spcAft>
-                <a:spcPts val="200"/>
-              </a:spcAft>
-            </a:pPr>
-            <a:r>
-              <a:rPr sz="1400" b="0">
-                <a:solidFill>
-                  <a:srgbClr val="000000"/>
-                </a:solidFill>
-                <a:latin typeface="Microsoft YaHei"/>
-              </a:rPr>
-              <a:t>在境内居住累计满 183 天的年度连续满六年后，不符合实施条例第四条优惠条件的无住所居民个人，其从境内、境外取得的全部工资薪金所得均应计算缴纳个人所得税。</a:t>
+              <a:t>根据《财政部 国家税务总局关于非居民个人和无住所居民个人有关个人所得税政策的公告》（财政部税务总局公告2019年第35号）第二条规定：</a:t>
+            </a:r>
+          </a:p>
+          <a:p>
+            <a:pPr algn="l">
+              <a:lnSpc>
+                <a:spcPts val="1820"/>
+              </a:lnSpc>
+              <a:spcBef>
+                <a:spcPts val="200"/>
+              </a:spcBef>
+              <a:spcAft>
+                <a:spcPts val="200"/>
+              </a:spcAft>
+            </a:pPr>
+            <a:r>
+              <a:rPr sz="1400" b="0">
+                <a:solidFill>
+                  <a:srgbClr val="000000"/>
+                </a:solidFill>
+                <a:latin typeface="Microsoft YaHei"/>
+              </a:rPr>
+              <a:t>在境内居住累计满183天的年度连续满六年后，不符合实施条例第四条优惠条件的无住所居民个人，其从境内、境外取得的全部工资薪金所得均应计算缴纳个人所得税。</a:t>
             </a:r>
           </a:p>
           <a:p>
@@ -13672,7 +13518,7 @@
                 </a:solidFill>
                 <a:latin typeface="Microsoft YaHei"/>
               </a:rPr>
-              <a:t>对于在境内居住累计满 183 天的年度连续满六年的无住所居民个人，企业若不将其境内、境外取得的全部工资薪金所得一起计算缴纳个人所得税，存在漏缴个税的风险。</a:t>
+              <a:t>对于在境内居住累计满183天的年度连续满六年的无住所居民个人，企业若不将其境内、境外取得的全部工资薪金所得一起计算缴纳个人所得税，存在漏缴个税的风险。</a:t>
             </a:r>
           </a:p>
           <a:p>
@@ -13716,7 +13562,7 @@
                 </a:solidFill>
                 <a:latin typeface="Microsoft YaHei"/>
               </a:rPr>
-              <a:t>对于在境内居住累计满 183 天的年度连续满六年的无住所居民个人，企业应将其境内、境外取得的全部工资薪金所得合并计算缴纳个人所得税，计算方法为：应纳税额=当月境内、外的工资、薪金应纳税所得额×适用税率-速算扣除数。</a:t>
+              <a:t>对于在境内居住累计满183天的年度连续满六年的无住所居民个人，企业应将其境内、境外取得的全部工资薪金所得合并计算缴纳个人所得税，计算方法为：应纳税额=当月境内、外的工资、薪金应纳税所得额×适用税率-速算扣除数。</a:t>
             </a:r>
           </a:p>
         </p:txBody>
@@ -13919,7 +13765,7 @@
                 </a:solidFill>
                 <a:latin typeface="Microsoft YaHei"/>
               </a:rPr>
-              <a:t>根据国家税务总局关于发布《个人所得税扣缴申报管理办法（试行）》的公告（国家税务总局公告 2018 年第61 号）第二条规定：扣缴义务人，是指向个人支付所得的单位或者个人。扣缴义务人应当依法办理全员全额扣缴申报。全员全额扣缴申报，是指扣缴义务人应当在代扣税款的次月十五日内，向主管税务机关报送其支付所得的所有个人的有关信息、支付所得数额、扣除事项和数额、扣缴税款的具体数额和总额以及其他相关涉税信息资料。</a:t>
+              <a:t>根据国家税务总局关于发布《个人所得税扣缴申报管理办法（试行）》的公告（国家税务总局公告2018年第61号）第二条规定：扣缴义务人，是指向个人支付所得的单位或者个人。扣缴义务人应当依法办理全员全额扣缴申报。全员全额扣缴申报，是指扣缴义务人应当在代扣税款的次月十五日内，向主管税务机关报送其支付所得的所有个人的有关信息、支付所得数额、扣除事项和数额、扣缴税款的具体数额和总额以及其他相关涉税信息资料。</a:t>
             </a:r>
           </a:p>
           <a:p>
@@ -14210,7 +14056,7 @@
                 </a:solidFill>
                 <a:latin typeface="Microsoft YaHei"/>
               </a:rPr>
-              <a:t>根据《中华人民共和国个人所得税法（2018 年修正）》（中华人民共和国国务院令第 707 号）第六条第（二）项及《国家税务总局关于发布&lt;个人所得税扣缴申报管理办法（试行）&gt;的公告》规定：非居民个人的工资、薪金所得，以每月收入额减除费用五千元后的余额为应纳税所得额；劳务报酬所得、稿酬所得、特许权使用费所得，以每次收入额为应纳税所得额，适用个人所得税税率表三（见下表）计算应纳税额。劳务报酬所得、稿酬所得、特许权使用费所得以收入减除百分之二十的费用后的余额为收入额。其中，稿酬所得的收入额减按百分之七十计算。</a:t>
+              <a:t>根据《中华人民共和国个人所得税法（2018年修正）》（中华人民共和国国务院令第707号）第六条第（二）项及《国家税务总局关于发布&lt;个人所得税扣缴申报管理办法（试行）&gt;的公告》规定：非居民个人的工资、薪金所得，以每月收入额减除费用五千元后的余额为应纳税所得额；劳务报酬所得、稿酬所得、特许权使用费所得，以每次收入额为应纳税所得额，适用个人所得税税率表三（见下表）计算应纳税额。劳务报酬所得、稿酬所得、特许权使用费所得以收入减除百分之二十的费用后的余额为收入额。其中，稿酬所得的收入额减按百分之七十计算。</a:t>
             </a:r>
           </a:p>
           <a:p>
@@ -14457,7 +14303,7 @@
                 </a:solidFill>
                 <a:latin typeface="Microsoft YaHei"/>
               </a:rPr>
-              <a:t>纳税人在一个纳税年度内，其在医保目录范围内的自付部分累计没有超过 15000 元医药费用的支出，不属于大病医疗支出，不得扣除。</a:t>
+              <a:t>纳税人在一个纳税年度内，其在医保目录范围内的自付部分累计没有超过15000元医药费用的支出，不属于大病医疗支出，不得扣除。</a:t>
             </a:r>
           </a:p>
           <a:p>
@@ -14501,7 +14347,7 @@
                 </a:solidFill>
                 <a:latin typeface="Microsoft YaHei"/>
               </a:rPr>
-              <a:t>根据《国务院关于印发个人所得税专项附加扣除暂行办法的通知》（国发〔2018〕41 号）第十一条规定：纳税人发生的医药费用，超过自己负担15000 元后的部分，可以选择由本人扣，也可以由其配偶扣；未成年子女发生的医药费用在超过 15000 元自付部分后，可以选择由其父母一方扣。年度预扣预缴时不扣除，在年度汇算清缴时按年扣除。</a:t>
+              <a:t>根据《国务院关于印发个人所得税专项附加扣除暂行办法的通知》（国发〔2018〕41号）第十一条规定：纳税人发生的医药费用，超过自己负担15000元后的部分，可以选择由本人扣，也可以由其配偶扣；未成年子女发生的医药费用在超过15000元自付部分后，可以选择由其父母一方扣。年度预扣预缴时不扣除，在年度汇算清缴时按年扣除。</a:t>
             </a:r>
           </a:p>
           <a:p>
@@ -14589,7 +14435,7 @@
                 </a:solidFill>
                 <a:latin typeface="Microsoft YaHei"/>
               </a:rPr>
-              <a:t>纳税人发生的医药费用，超过自己负担15000 元后的部分，可以选择由本人扣，也可以由其配偶扣；未成年子女发生的医药费用在超过 15000 元自付部分后，可以选择由其父母一方扣。年度预扣预缴时不扣除，在年度汇算清缴时按年扣除。</a:t>
+              <a:t>纳税人发生的医药费用，超过自己负担15000元后的部分，可以选择由本人扣，也可以由其配偶扣；未成年子女发生的医药费用在超过15000元自付部分后，可以选择由其父母一方扣。年度预扣预缴时不扣除，在年度汇算清缴时按年扣除。</a:t>
             </a:r>
           </a:p>
         </p:txBody>
@@ -14792,7 +14638,7 @@
                 </a:solidFill>
                 <a:latin typeface="Microsoft YaHei"/>
               </a:rPr>
-              <a:t>《财政部 税务总局关于延续实施外籍个人有关津补贴个人所得税政策的公告》（财政部 税务总局公告2023 年第29 号）第一条、第二条。</a:t>
+              <a:t>《财政部 税务总局关于延续实施外籍个人有关津补贴个人所得税政策的公告》（财政部 税务总局公告2023年第29号）第一条、第二条。</a:t>
             </a:r>
           </a:p>
           <a:p>
@@ -14880,7 +14726,7 @@
                 </a:solidFill>
                 <a:latin typeface="Microsoft YaHei"/>
               </a:rPr>
-              <a:t>外籍个人符合居民个人条件的，可以选择享受个人所得税专项附加扣除，也可以选择享受住房补贴、语言训练费、子女教育费等津补贴免税优惠政策，但不得同时享受。外籍个人一经选择，在一个纳税年度内不得变更。本政策执行至 2027 年12 月31 日。</a:t>
+              <a:t>外籍个人符合居民个人条件的，可以选择享受个人所得税专项附加扣除，也可以选择享受住房补贴、语言训练费、子女教育费等津补贴免税优惠政策，但不得同时享受。外籍个人一经选择，在一个纳税年度内不得变更。本政策执行至2027年12月31日。</a:t>
             </a:r>
           </a:p>
         </p:txBody>
@@ -15083,7 +14929,7 @@
                 </a:solidFill>
                 <a:latin typeface="Microsoft YaHei"/>
               </a:rPr>
-              <a:t>《国家税务总局关于股权奖励和转增股本个人所得税征管问题的公告》（国家税务总局公告 2015 年第80 号）;《财政部国家税务总局关于将国家自主创新示范区有关税收试点政策推广到全国范围实施的通知》（财税〔2015〕116 号）第三条；《国家税务总局关于个人投资者收购企业股权后将原盈余积累转增股本个人所得税问题的公告》（国家税务总局公告 2013 年第23 号）。</a:t>
+              <a:t>《国家税务总局关于股权奖励和转增股本个人所得税征管问题的公告》（国家税务总局公告2015年第80号）;《财政部国家税务总局关于将国家自主创新示范区有关税收试点政策推广到全国范围实施的通知》（财税〔2015〕116号）第三条；《国家税务总局关于个人投资者收购企业股权后将原盈余积累转增股本个人所得税问题的公告》（国家税务总局公告2013年第23号）。</a:t>
             </a:r>
           </a:p>
           <a:p>
@@ -15374,7 +15220,7 @@
                 </a:solidFill>
                 <a:latin typeface="Microsoft YaHei"/>
               </a:rPr>
-              <a:t>根据《财政部 国家税务总局关于个人股票期权所得征收个人所得税问题的通知》（财税〔2005〕35 号）第二条规定：（二）员工行权时，其从企业取得股票的实际购买价（施权价）低于购买日公平市场价（指该股票当日的收盘价，下同）的差额，是因员工在企业的表现和业绩情况而取得的与任职、受雇有关的所得，应按“工资、薪金所得”适用的规定计算缴纳个人所得税。对因特殊情况，员工在行权日之前将股票期权转让的，以股票期权的转让净收入，作为工资薪金所得征收个人所得税。</a:t>
+              <a:t>根据《财政部 国家税务总局关于个人股票期权所得征收个人所得税问题的通知》（财税〔2005〕35号）第二条规定：（二）员工行权时，其从企业取得股票的实际购买价（施权价）低于购买日公平市场价（指该股票当日的收盘价，下同）的差额，是因员工在企业的表现和业绩情况而取得的与任职、受雇有关的所得，应按“工资、薪金所得”适用的规定计算缴纳个人所得税。对因特殊情况，员工在行权日之前将股票期权转让的，以股票期权的转让净收入，作为工资薪金所得征收个人所得税。</a:t>
             </a:r>
           </a:p>
           <a:p>
@@ -15665,7 +15511,7 @@
                 </a:solidFill>
                 <a:latin typeface="Microsoft YaHei"/>
               </a:rPr>
-              <a:t>根据《财政部 国家税务总局关于企业为个人购买房屋或其他财产征收个人所得税问题的批复》（财税〔2008〕83 号）第一条规定：根据《中华人民共和国个人所得税法》和《财政部国家税务总局关于规范个人投资者个人所得税征收管理的通知》（财税〔2003〕158 号）的有关规定，符合以下情形的房屋或其他财产，不论所有权人是否将财产无偿或有偿交付企业使用，其实质均为企业对个人进行了实物性质的分配，应依法计征个人所得税。（一）企业出资购买房屋及其他财产，将所有权登记为投资者个人、投资者家庭成员或企业其他人员的；（二）企业投资者个人、投资者家庭成员或企业其他人员向企业借款用于购买房屋及其他财产，将所有权登记为投资者、投资者家庭成员或企业其他人员，且借款年度终了后未归还借款的。</a:t>
+              <a:t>根据《财政部 国家税务总局关于企业为个人购买房屋或其他财产征收个人所得税问题的批复》（财税〔2008〕83号）第一条规定：根据《中华人民共和国个人所得税法》和《财政部国家税务总局关于规范个人投资者个人所得税征收管理的通知》（财税〔2003〕158号）的有关规定，符合以下情形的房屋或其他财产，不论所有权人是否将财产无偿或有偿交付企业使用，其实质均为企业对个人进行了实物性质的分配，应依法计征个人所得税。（一）企业出资购买房屋及其他财产，将所有权登记为投资者个人、投资者家庭成员或企业其他人员的；（二）企业投资者个人、投资者家庭成员或企业其他人员向企业借款用于购买房屋及其他财产，将所有权登记为投资者、投资者家庭成员或企业其他人员，且借款年度终了后未归还借款的。</a:t>
             </a:r>
           </a:p>
           <a:p>
@@ -15978,29 +15824,29 @@
                 </a:solidFill>
                 <a:latin typeface="Microsoft YaHei"/>
               </a:rPr>
-              <a:t>对个人购买符合规定的商业健康保险产品的支出，允许在当年（月）计算应纳税所得额时予以税前扣除，扣除限额为2400 元/年（200元/月）。单位统一为员工购买符合规定的商业健康保险产品的支出，应分别计入员工个人工资薪金，视同个人购买，按上述限额予以扣除。</a:t>
-            </a:r>
-          </a:p>
-          <a:p>
-            <a:pPr algn="l">
-              <a:lnSpc>
-                <a:spcPts val="1820"/>
-              </a:lnSpc>
-              <a:spcBef>
-                <a:spcPts val="200"/>
-              </a:spcBef>
-              <a:spcAft>
-                <a:spcPts val="200"/>
-              </a:spcAft>
-            </a:pPr>
-            <a:r>
-              <a:rPr sz="1400" b="0">
-                <a:solidFill>
-                  <a:srgbClr val="000000"/>
-                </a:solidFill>
-                <a:latin typeface="Microsoft YaHei"/>
-              </a:rPr>
-              <a:t>根据《国家税务总局关于推广实施商业健康保险个人所得税政策有关征管问题的公告》（国家税务总局公告2017 年第17 号）规定：五、保险公司销售符合规定的商业健康保险产品，及时为购买保险的个人开具发票和保单凭证，并在保单凭证上注明税优识别码。个人购买商业健康保险未获得税优识别码的，其支出金额不得税前扣除。</a:t>
+              <a:t>对个人购买符合规定的商业健康保险产品的支出，允许在当年（月）计算应纳税所得额时予以税前扣除，扣除限额为2400元/年（200元/月）。单位统一为员工购买符合规定的商业健康保险产品的支出，应分别计入员工个人工资薪金，视同个人购买，按上述限额予以扣除。</a:t>
+            </a:r>
+          </a:p>
+          <a:p>
+            <a:pPr algn="l">
+              <a:lnSpc>
+                <a:spcPts val="1820"/>
+              </a:lnSpc>
+              <a:spcBef>
+                <a:spcPts val="200"/>
+              </a:spcBef>
+              <a:spcAft>
+                <a:spcPts val="200"/>
+              </a:spcAft>
+            </a:pPr>
+            <a:r>
+              <a:rPr sz="1400" b="0">
+                <a:solidFill>
+                  <a:srgbClr val="000000"/>
+                </a:solidFill>
+                <a:latin typeface="Microsoft YaHei"/>
+              </a:rPr>
+              <a:t>根据《国家税务总局关于推广实施商业健康保险个人所得税政策有关征管问题的公告》（国家税务总局公告2017年第17号）规定：五、保险公司销售符合规定的商业健康保险产品，及时为购买保险的个人开具发票和保单凭证，并在保单凭证上注明税优识别码。个人购买商业健康保险未获得税优识别码的，其支出金额不得税前扣除。</a:t>
             </a:r>
           </a:p>
           <a:p>
@@ -16313,95 +16159,95 @@
                 </a:solidFill>
                 <a:latin typeface="Microsoft YaHei"/>
               </a:rPr>
-              <a:t>根据《财政部 国家税务总局关于企业为个人购买房屋或其他财产征收个人所得税问题的批复》（财税〔2008〕83 号）批复江苏省地税局《关于以企业资金为个人购房是否征收个人所得税问题的请示》中明确规定：</a:t>
-            </a:r>
-          </a:p>
-          <a:p>
-            <a:pPr algn="l">
-              <a:lnSpc>
-                <a:spcPts val="1820"/>
-              </a:lnSpc>
-              <a:spcBef>
-                <a:spcPts val="200"/>
-              </a:spcBef>
-              <a:spcAft>
-                <a:spcPts val="200"/>
-              </a:spcAft>
-            </a:pPr>
-            <a:r>
-              <a:rPr sz="1400" b="0">
-                <a:solidFill>
-                  <a:srgbClr val="000000"/>
-                </a:solidFill>
-                <a:latin typeface="Microsoft YaHei"/>
-              </a:rPr>
-              <a:t>一、根据《中华人民共和国个人所得税法》和《财政部国家税务总局关于规范个人投资者个人所得税征收管理的通知》（财税〔2003〕158 号）的有关规定，符合以下情形的房屋或其他财产，不论所有权人是否将财产无偿或有偿交付企业使用，其实质均为企业对个人进行了实物性质的分配，应依法计征个人所得税。（一）企业出资购买房屋及其他财产，将所有权登记为投资者个人、投资者家庭成员或企业其他人员的；（二）企业投资者个人、投资者家庭成员或企业其他人员向企业借款用于购买房屋及其他财产，将所有权登记为投资者、投资者家庭成员或企业其他人员，且借款年度终了后未归还借款的。二、对个人独资企业、合伙企业的个人投资者或其家庭成员取得的上述所得，视为企业对个人投资者的利润分配，按照个体工商户的生产、经营所得项目计征个人所得税；对除个人独资企业、合伙企业以外其他企业的个人投资者或其家庭成员取得的上述所得，视为企业对个人投资者的红利分配，按照“利息、股息、红利所得”项目计征个人所得税；对企业其他人员取得的上述所得，按照“工资、薪金所得”项目计征个人所得税。</a:t>
-            </a:r>
-          </a:p>
-          <a:p>
-            <a:pPr algn="l">
-              <a:lnSpc>
-                <a:spcPts val="1820"/>
-              </a:lnSpc>
-              <a:spcBef>
-                <a:spcPts val="200"/>
-              </a:spcBef>
-              <a:spcAft>
-                <a:spcPts val="200"/>
-              </a:spcAft>
-            </a:pPr>
-            <a:r>
-              <a:rPr sz="1400" b="0">
-                <a:solidFill>
-                  <a:srgbClr val="000000"/>
-                </a:solidFill>
-                <a:latin typeface="Microsoft YaHei"/>
-              </a:rPr>
-              <a:t>根据《个人所得税法》（主席令第48 号）第八条规定：个人所得税，以所得人为纳税义务人，以支付所得的单位或者个人为扣缴义务人。</a:t>
-            </a:r>
-          </a:p>
-          <a:p>
-            <a:pPr algn="l">
-              <a:lnSpc>
-                <a:spcPts val="1820"/>
-              </a:lnSpc>
-              <a:spcBef>
-                <a:spcPts val="200"/>
-              </a:spcBef>
-              <a:spcAft>
-                <a:spcPts val="200"/>
-              </a:spcAft>
-            </a:pPr>
-            <a:r>
-              <a:rPr sz="1400" b="0">
-                <a:solidFill>
-                  <a:srgbClr val="000000"/>
-                </a:solidFill>
-                <a:latin typeface="Microsoft YaHei"/>
-              </a:rPr>
-              <a:t>根据《税收征收管理法》（主席令第49 号）第四条规定：纳税人、扣缴义务人必须依照法律、行政法规的规定缴纳税款、代扣代缴、代收代缴税款。</a:t>
-            </a:r>
-          </a:p>
-          <a:p>
-            <a:pPr algn="l">
-              <a:lnSpc>
-                <a:spcPts val="1820"/>
-              </a:lnSpc>
-              <a:spcBef>
-                <a:spcPts val="200"/>
-              </a:spcBef>
-              <a:spcAft>
-                <a:spcPts val="200"/>
-              </a:spcAft>
-            </a:pPr>
-            <a:r>
-              <a:rPr sz="1400" b="0">
-                <a:solidFill>
-                  <a:srgbClr val="000000"/>
-                </a:solidFill>
-                <a:latin typeface="Microsoft YaHei"/>
-              </a:rPr>
-              <a:t>根据《税收征收管理法》（主席令第49 号）第六十九条规定：扣缴义务人应扣未扣税款的，由税务机关向纳税人追缴税款，对扣缴义务人处应扣未扣税款百分之五十以上三倍以下的罚款。</a:t>
+              <a:t>根据《财政部 国家税务总局关于企业为个人购买房屋或其他财产征收个人所得税问题的批复》（财税〔2008〕83号）批复江苏省地税局《关于以企业资金为个人购房是否征收个人所得税问题的请示》中明确规定：</a:t>
+            </a:r>
+          </a:p>
+          <a:p>
+            <a:pPr algn="l">
+              <a:lnSpc>
+                <a:spcPts val="1820"/>
+              </a:lnSpc>
+              <a:spcBef>
+                <a:spcPts val="200"/>
+              </a:spcBef>
+              <a:spcAft>
+                <a:spcPts val="200"/>
+              </a:spcAft>
+            </a:pPr>
+            <a:r>
+              <a:rPr sz="1400" b="0">
+                <a:solidFill>
+                  <a:srgbClr val="000000"/>
+                </a:solidFill>
+                <a:latin typeface="Microsoft YaHei"/>
+              </a:rPr>
+              <a:t>一、根据《中华人民共和国个人所得税法》和《财政部国家税务总局关于规范个人投资者个人所得税征收管理的通知》（财税〔2003〕158号）的有关规定，符合以下情形的房屋或其他财产，不论所有权人是否将财产无偿或有偿交付企业使用，其实质均为企业对个人进行了实物性质的分配，应依法计征个人所得税。（一）企业出资购买房屋及其他财产，将所有权登记为投资者个人、投资者家庭成员或企业其他人员的；（二）企业投资者个人、投资者家庭成员或企业其他人员向企业借款用于购买房屋及其他财产，将所有权登记为投资者、投资者家庭成员或企业其他人员，且借款年度终了后未归还借款的。二、对个人独资企业、合伙企业的个人投资者或其家庭成员取得的上述所得，视为企业对个人投资者的利润分配，按照个体工商户的生产、经营所得项目计征个人所得税；对除个人独资企业、合伙企业以外其他企业的个人投资者或其家庭成员取得的上述所得，视为企业对个人投资者的红利分配，按照“利息、股息、红利所得”项目计征个人所得税；对企业其他人员取得的上述所得，按照“工资、薪金所得”项目计征个人所得税。</a:t>
+            </a:r>
+          </a:p>
+          <a:p>
+            <a:pPr algn="l">
+              <a:lnSpc>
+                <a:spcPts val="1820"/>
+              </a:lnSpc>
+              <a:spcBef>
+                <a:spcPts val="200"/>
+              </a:spcBef>
+              <a:spcAft>
+                <a:spcPts val="200"/>
+              </a:spcAft>
+            </a:pPr>
+            <a:r>
+              <a:rPr sz="1400" b="0">
+                <a:solidFill>
+                  <a:srgbClr val="000000"/>
+                </a:solidFill>
+                <a:latin typeface="Microsoft YaHei"/>
+              </a:rPr>
+              <a:t>根据《个人所得税法》（主席令第48号）第八条规定：个人所得税，以所得人为纳税义务人，以支付所得的单位或者个人为扣缴义务人。</a:t>
+            </a:r>
+          </a:p>
+          <a:p>
+            <a:pPr algn="l">
+              <a:lnSpc>
+                <a:spcPts val="1820"/>
+              </a:lnSpc>
+              <a:spcBef>
+                <a:spcPts val="200"/>
+              </a:spcBef>
+              <a:spcAft>
+                <a:spcPts val="200"/>
+              </a:spcAft>
+            </a:pPr>
+            <a:r>
+              <a:rPr sz="1400" b="0">
+                <a:solidFill>
+                  <a:srgbClr val="000000"/>
+                </a:solidFill>
+                <a:latin typeface="Microsoft YaHei"/>
+              </a:rPr>
+              <a:t>根据《税收征收管理法》（主席令第49号）第四条规定：纳税人、扣缴义务人必须依照法律、行政法规的规定缴纳税款、代扣代缴、代收代缴税款。</a:t>
+            </a:r>
+          </a:p>
+          <a:p>
+            <a:pPr algn="l">
+              <a:lnSpc>
+                <a:spcPts val="1820"/>
+              </a:lnSpc>
+              <a:spcBef>
+                <a:spcPts val="200"/>
+              </a:spcBef>
+              <a:spcAft>
+                <a:spcPts val="200"/>
+              </a:spcAft>
+            </a:pPr>
+            <a:r>
+              <a:rPr sz="1400" b="0">
+                <a:solidFill>
+                  <a:srgbClr val="000000"/>
+                </a:solidFill>
+                <a:latin typeface="Microsoft YaHei"/>
+              </a:rPr>
+              <a:t>根据《税收征收管理法》（主席令第49号）第六十九条规定：扣缴义务人应扣未扣税款的，由税务机关向纳税人追缴税款，对扣缴义务人处应扣未扣税款百分之五十以上三倍以下的罚款。</a:t>
             </a:r>
           </a:p>
           <a:p>
@@ -16692,7 +16538,7 @@
                 </a:solidFill>
                 <a:latin typeface="Microsoft YaHei"/>
               </a:rPr>
-              <a:t>根据《财政部 国家税务总局关于规范个人投资者个人所得税征收管理的通知》（财税〔2003〕158 号）第二条规定：纳税年度内个人投资者从其投资企业（个人独资企业、合伙企业除外）借款，在该纳税年度终了后既不归还，又未用于企业生产经营的，其未归还的借款可视为企业对个人投资者的红利分配，依照‘利息、股息、红利所得’项目计征个人所得税。</a:t>
+              <a:t>根据《财政部 国家税务总局关于规范个人投资者个人所得税征收管理的通知》（财税〔2003〕158号）第二条规定：纳税年度内个人投资者从其投资企业（个人独资企业、合伙企业除外）借款，在该纳税年度终了后既不归还，又未用于企业生产经营的，其未归还的借款可视为企业对个人投资者的红利分配，依照‘利息、股息、红利所得’项目计征个人所得税。</a:t>
             </a:r>
           </a:p>
           <a:p>
@@ -16736,7 +16582,7 @@
                 </a:solidFill>
                 <a:latin typeface="Microsoft YaHei"/>
               </a:rPr>
-              <a:t>个人股东借款，在该纳税年度终了后既不归还，又未用于企业生产经营的，其未归还的借款，应视为企业对个人投资者的红利分配，依照“利息、股息、红利所得”项 20%税率扣缴个人所得税。企业未代扣代缴股东个税的，存在股东个人补缴个税、滞纳金的风险，同时企业未履行扣缴义务人职责面临罚款风险。</a:t>
+              <a:t>个人股东借款，在该纳税年度终了后既不归还，又未用于企业生产经营的，其未归还的借款，应视为企业对个人投资者的红利分配，依照“利息、股息、红利所得”项20%税率扣缴个人所得税。企业未代扣代缴股东个税的，存在股东个人补缴个税、滞纳金的风险，同时企业未履行扣缴义务人职责面临罚款风险。</a:t>
             </a:r>
           </a:p>
           <a:p>

--- a/ppts_output_v3/03_个人所得税风险指引.pptx
+++ b/ppts_output_v3/03_个人所得税风险指引.pptx
@@ -3333,11 +3333,10 @@
             <a:spAutoFit/>
           </a:bodyPr>
           <a:lstStyle/>
-          <a:p/>
-          <a:p>
-            <a:pPr algn="l">
-              <a:lnSpc>
-                <a:spcPts val="2080"/>
+          <a:p>
+            <a:pPr algn="l">
+              <a:lnSpc>
+                <a:spcPct val="125000"/>
               </a:lnSpc>
               <a:spcBef>
                 <a:spcPts val="0"/>
@@ -3359,7 +3358,7 @@
           <a:p>
             <a:pPr algn="l">
               <a:lnSpc>
-                <a:spcPts val="2080"/>
+                <a:spcPct val="125000"/>
               </a:lnSpc>
               <a:spcBef>
                 <a:spcPts val="800"/>
@@ -3381,7 +3380,7 @@
           <a:p>
             <a:pPr algn="l">
               <a:lnSpc>
-                <a:spcPts val="1820"/>
+                <a:spcPct val="125000"/>
               </a:lnSpc>
               <a:spcBef>
                 <a:spcPts val="200"/>
@@ -3403,7 +3402,7 @@
           <a:p>
             <a:pPr algn="l">
               <a:lnSpc>
-                <a:spcPts val="2080"/>
+                <a:spcPct val="125000"/>
               </a:lnSpc>
               <a:spcBef>
                 <a:spcPts val="800"/>
@@ -3425,7 +3424,7 @@
           <a:p>
             <a:pPr algn="l">
               <a:lnSpc>
-                <a:spcPts val="1820"/>
+                <a:spcPct val="125000"/>
               </a:lnSpc>
               <a:spcBef>
                 <a:spcPts val="200"/>
@@ -3447,7 +3446,7 @@
           <a:p>
             <a:pPr algn="l">
               <a:lnSpc>
-                <a:spcPts val="1820"/>
+                <a:spcPct val="125000"/>
               </a:lnSpc>
               <a:spcBef>
                 <a:spcPts val="200"/>
@@ -3469,7 +3468,7 @@
           <a:p>
             <a:pPr algn="l">
               <a:lnSpc>
-                <a:spcPts val="1820"/>
+                <a:spcPct val="125000"/>
               </a:lnSpc>
               <a:spcBef>
                 <a:spcPts val="200"/>
@@ -3491,7 +3490,7 @@
           <a:p>
             <a:pPr algn="l">
               <a:lnSpc>
-                <a:spcPts val="1820"/>
+                <a:spcPct val="125000"/>
               </a:lnSpc>
               <a:spcBef>
                 <a:spcPts val="200"/>
@@ -3513,7 +3512,7 @@
           <a:p>
             <a:pPr algn="l">
               <a:lnSpc>
-                <a:spcPts val="2080"/>
+                <a:spcPct val="125000"/>
               </a:lnSpc>
               <a:spcBef>
                 <a:spcPts val="800"/>
@@ -3535,7 +3534,7 @@
           <a:p>
             <a:pPr algn="l">
               <a:lnSpc>
-                <a:spcPts val="1820"/>
+                <a:spcPct val="125000"/>
               </a:lnSpc>
               <a:spcBef>
                 <a:spcPts val="200"/>
@@ -3557,7 +3556,7 @@
           <a:p>
             <a:pPr algn="l">
               <a:lnSpc>
-                <a:spcPts val="2080"/>
+                <a:spcPct val="125000"/>
               </a:lnSpc>
               <a:spcBef>
                 <a:spcPts val="800"/>
@@ -3579,7 +3578,7 @@
           <a:p>
             <a:pPr algn="l">
               <a:lnSpc>
-                <a:spcPts val="1820"/>
+                <a:spcPct val="125000"/>
               </a:lnSpc>
               <a:spcBef>
                 <a:spcPts val="200"/>
@@ -3690,11 +3689,10 @@
             <a:spAutoFit/>
           </a:bodyPr>
           <a:lstStyle/>
-          <a:p/>
-          <a:p>
-            <a:pPr algn="l">
-              <a:lnSpc>
-                <a:spcPts val="2080"/>
+          <a:p>
+            <a:pPr algn="l">
+              <a:lnSpc>
+                <a:spcPct val="125000"/>
               </a:lnSpc>
               <a:spcBef>
                 <a:spcPts val="0"/>
@@ -3716,7 +3714,7 @@
           <a:p>
             <a:pPr algn="l">
               <a:lnSpc>
-                <a:spcPts val="2080"/>
+                <a:spcPct val="125000"/>
               </a:lnSpc>
               <a:spcBef>
                 <a:spcPts val="800"/>
@@ -3738,7 +3736,7 @@
           <a:p>
             <a:pPr algn="l">
               <a:lnSpc>
-                <a:spcPts val="1820"/>
+                <a:spcPct val="125000"/>
               </a:lnSpc>
               <a:spcBef>
                 <a:spcPts val="200"/>
@@ -3760,7 +3758,7 @@
           <a:p>
             <a:pPr algn="l">
               <a:lnSpc>
-                <a:spcPts val="2080"/>
+                <a:spcPct val="125000"/>
               </a:lnSpc>
               <a:spcBef>
                 <a:spcPts val="800"/>
@@ -3782,7 +3780,7 @@
           <a:p>
             <a:pPr algn="l">
               <a:lnSpc>
-                <a:spcPts val="1820"/>
+                <a:spcPct val="125000"/>
               </a:lnSpc>
               <a:spcBef>
                 <a:spcPts val="200"/>
@@ -3804,7 +3802,7 @@
           <a:p>
             <a:pPr algn="l">
               <a:lnSpc>
-                <a:spcPts val="1820"/>
+                <a:spcPct val="125000"/>
               </a:lnSpc>
               <a:spcBef>
                 <a:spcPts val="200"/>
@@ -3826,7 +3824,7 @@
           <a:p>
             <a:pPr algn="l">
               <a:lnSpc>
-                <a:spcPts val="2080"/>
+                <a:spcPct val="125000"/>
               </a:lnSpc>
               <a:spcBef>
                 <a:spcPts val="800"/>
@@ -3848,7 +3846,7 @@
           <a:p>
             <a:pPr algn="l">
               <a:lnSpc>
-                <a:spcPts val="1820"/>
+                <a:spcPct val="125000"/>
               </a:lnSpc>
               <a:spcBef>
                 <a:spcPts val="200"/>
@@ -3870,7 +3868,7 @@
           <a:p>
             <a:pPr algn="l">
               <a:lnSpc>
-                <a:spcPts val="2080"/>
+                <a:spcPct val="125000"/>
               </a:lnSpc>
               <a:spcBef>
                 <a:spcPts val="800"/>
@@ -3892,7 +3890,7 @@
           <a:p>
             <a:pPr algn="l">
               <a:lnSpc>
-                <a:spcPts val="1820"/>
+                <a:spcPct val="125000"/>
               </a:lnSpc>
               <a:spcBef>
                 <a:spcPts val="200"/>
@@ -4003,11 +4001,10 @@
             <a:spAutoFit/>
           </a:bodyPr>
           <a:lstStyle/>
-          <a:p/>
-          <a:p>
-            <a:pPr algn="l">
-              <a:lnSpc>
-                <a:spcPts val="2080"/>
+          <a:p>
+            <a:pPr algn="l">
+              <a:lnSpc>
+                <a:spcPct val="125000"/>
               </a:lnSpc>
               <a:spcBef>
                 <a:spcPts val="0"/>
@@ -4029,7 +4026,7 @@
           <a:p>
             <a:pPr algn="l">
               <a:lnSpc>
-                <a:spcPts val="2080"/>
+                <a:spcPct val="125000"/>
               </a:lnSpc>
               <a:spcBef>
                 <a:spcPts val="800"/>
@@ -4051,7 +4048,7 @@
           <a:p>
             <a:pPr algn="l">
               <a:lnSpc>
-                <a:spcPts val="1820"/>
+                <a:spcPct val="125000"/>
               </a:lnSpc>
               <a:spcBef>
                 <a:spcPts val="200"/>
@@ -4073,7 +4070,7 @@
           <a:p>
             <a:pPr algn="l">
               <a:lnSpc>
-                <a:spcPts val="2080"/>
+                <a:spcPct val="125000"/>
               </a:lnSpc>
               <a:spcBef>
                 <a:spcPts val="800"/>
@@ -4095,7 +4092,7 @@
           <a:p>
             <a:pPr algn="l">
               <a:lnSpc>
-                <a:spcPts val="1820"/>
+                <a:spcPct val="125000"/>
               </a:lnSpc>
               <a:spcBef>
                 <a:spcPts val="200"/>
@@ -4117,7 +4114,7 @@
           <a:p>
             <a:pPr algn="l">
               <a:lnSpc>
-                <a:spcPts val="1820"/>
+                <a:spcPct val="125000"/>
               </a:lnSpc>
               <a:spcBef>
                 <a:spcPts val="200"/>
@@ -4139,7 +4136,7 @@
           <a:p>
             <a:pPr algn="l">
               <a:lnSpc>
-                <a:spcPts val="2080"/>
+                <a:spcPct val="125000"/>
               </a:lnSpc>
               <a:spcBef>
                 <a:spcPts val="800"/>
@@ -4161,7 +4158,7 @@
           <a:p>
             <a:pPr algn="l">
               <a:lnSpc>
-                <a:spcPts val="1820"/>
+                <a:spcPct val="125000"/>
               </a:lnSpc>
               <a:spcBef>
                 <a:spcPts val="200"/>
@@ -4183,7 +4180,7 @@
           <a:p>
             <a:pPr algn="l">
               <a:lnSpc>
-                <a:spcPts val="2080"/>
+                <a:spcPct val="125000"/>
               </a:lnSpc>
               <a:spcBef>
                 <a:spcPts val="800"/>
@@ -4205,7 +4202,7 @@
           <a:p>
             <a:pPr algn="l">
               <a:lnSpc>
-                <a:spcPts val="1820"/>
+                <a:spcPct val="125000"/>
               </a:lnSpc>
               <a:spcBef>
                 <a:spcPts val="200"/>
@@ -4316,11 +4313,10 @@
             <a:spAutoFit/>
           </a:bodyPr>
           <a:lstStyle/>
-          <a:p/>
-          <a:p>
-            <a:pPr algn="l">
-              <a:lnSpc>
-                <a:spcPts val="2080"/>
+          <a:p>
+            <a:pPr algn="l">
+              <a:lnSpc>
+                <a:spcPct val="125000"/>
               </a:lnSpc>
               <a:spcBef>
                 <a:spcPts val="0"/>
@@ -4342,7 +4338,7 @@
           <a:p>
             <a:pPr algn="l">
               <a:lnSpc>
-                <a:spcPts val="2080"/>
+                <a:spcPct val="125000"/>
               </a:lnSpc>
               <a:spcBef>
                 <a:spcPts val="800"/>
@@ -4364,7 +4360,7 @@
           <a:p>
             <a:pPr algn="l">
               <a:lnSpc>
-                <a:spcPts val="1820"/>
+                <a:spcPct val="125000"/>
               </a:lnSpc>
               <a:spcBef>
                 <a:spcPts val="200"/>
@@ -4386,7 +4382,7 @@
           <a:p>
             <a:pPr algn="l">
               <a:lnSpc>
-                <a:spcPts val="2080"/>
+                <a:spcPct val="125000"/>
               </a:lnSpc>
               <a:spcBef>
                 <a:spcPts val="800"/>
@@ -4408,7 +4404,7 @@
           <a:p>
             <a:pPr algn="l">
               <a:lnSpc>
-                <a:spcPts val="1820"/>
+                <a:spcPct val="125000"/>
               </a:lnSpc>
               <a:spcBef>
                 <a:spcPts val="200"/>
@@ -4430,7 +4426,7 @@
           <a:p>
             <a:pPr algn="l">
               <a:lnSpc>
-                <a:spcPts val="2080"/>
+                <a:spcPct val="125000"/>
               </a:lnSpc>
               <a:spcBef>
                 <a:spcPts val="800"/>
@@ -4452,7 +4448,7 @@
           <a:p>
             <a:pPr algn="l">
               <a:lnSpc>
-                <a:spcPts val="1820"/>
+                <a:spcPct val="125000"/>
               </a:lnSpc>
               <a:spcBef>
                 <a:spcPts val="200"/>
@@ -4474,7 +4470,7 @@
           <a:p>
             <a:pPr algn="l">
               <a:lnSpc>
-                <a:spcPts val="2080"/>
+                <a:spcPct val="125000"/>
               </a:lnSpc>
               <a:spcBef>
                 <a:spcPts val="800"/>
@@ -4496,7 +4492,7 @@
           <a:p>
             <a:pPr algn="l">
               <a:lnSpc>
-                <a:spcPts val="1820"/>
+                <a:spcPct val="125000"/>
               </a:lnSpc>
               <a:spcBef>
                 <a:spcPts val="200"/>
@@ -4607,11 +4603,10 @@
             <a:spAutoFit/>
           </a:bodyPr>
           <a:lstStyle/>
-          <a:p/>
-          <a:p>
-            <a:pPr algn="l">
-              <a:lnSpc>
-                <a:spcPts val="2080"/>
+          <a:p>
+            <a:pPr algn="l">
+              <a:lnSpc>
+                <a:spcPct val="125000"/>
               </a:lnSpc>
               <a:spcBef>
                 <a:spcPts val="0"/>
@@ -4633,7 +4628,7 @@
           <a:p>
             <a:pPr algn="l">
               <a:lnSpc>
-                <a:spcPts val="2080"/>
+                <a:spcPct val="125000"/>
               </a:lnSpc>
               <a:spcBef>
                 <a:spcPts val="800"/>
@@ -4655,7 +4650,7 @@
           <a:p>
             <a:pPr algn="l">
               <a:lnSpc>
-                <a:spcPts val="1820"/>
+                <a:spcPct val="125000"/>
               </a:lnSpc>
               <a:spcBef>
                 <a:spcPts val="200"/>
@@ -4677,7 +4672,7 @@
           <a:p>
             <a:pPr algn="l">
               <a:lnSpc>
-                <a:spcPts val="1820"/>
+                <a:spcPct val="125000"/>
               </a:lnSpc>
               <a:spcBef>
                 <a:spcPts val="200"/>
@@ -4699,7 +4694,7 @@
           <a:p>
             <a:pPr algn="l">
               <a:lnSpc>
-                <a:spcPts val="2080"/>
+                <a:spcPct val="125000"/>
               </a:lnSpc>
               <a:spcBef>
                 <a:spcPts val="800"/>
@@ -4721,7 +4716,7 @@
           <a:p>
             <a:pPr algn="l">
               <a:lnSpc>
-                <a:spcPts val="1820"/>
+                <a:spcPct val="125000"/>
               </a:lnSpc>
               <a:spcBef>
                 <a:spcPts val="200"/>
@@ -4743,7 +4738,7 @@
           <a:p>
             <a:pPr algn="l">
               <a:lnSpc>
-                <a:spcPts val="1820"/>
+                <a:spcPct val="125000"/>
               </a:lnSpc>
               <a:spcBef>
                 <a:spcPts val="200"/>
@@ -4765,7 +4760,7 @@
           <a:p>
             <a:pPr algn="l">
               <a:lnSpc>
-                <a:spcPts val="1820"/>
+                <a:spcPct val="125000"/>
               </a:lnSpc>
               <a:spcBef>
                 <a:spcPts val="200"/>
@@ -4787,7 +4782,7 @@
           <a:p>
             <a:pPr algn="l">
               <a:lnSpc>
-                <a:spcPts val="1820"/>
+                <a:spcPct val="125000"/>
               </a:lnSpc>
               <a:spcBef>
                 <a:spcPts val="200"/>
@@ -4809,7 +4804,7 @@
           <a:p>
             <a:pPr algn="l">
               <a:lnSpc>
-                <a:spcPts val="1820"/>
+                <a:spcPct val="125000"/>
               </a:lnSpc>
               <a:spcBef>
                 <a:spcPts val="200"/>
@@ -4831,7 +4826,7 @@
           <a:p>
             <a:pPr algn="l">
               <a:lnSpc>
-                <a:spcPts val="1820"/>
+                <a:spcPct val="125000"/>
               </a:lnSpc>
               <a:spcBef>
                 <a:spcPts val="200"/>
@@ -4853,7 +4848,7 @@
           <a:p>
             <a:pPr algn="l">
               <a:lnSpc>
-                <a:spcPts val="2080"/>
+                <a:spcPct val="125000"/>
               </a:lnSpc>
               <a:spcBef>
                 <a:spcPts val="800"/>
@@ -4875,7 +4870,7 @@
           <a:p>
             <a:pPr algn="l">
               <a:lnSpc>
-                <a:spcPts val="1820"/>
+                <a:spcPct val="125000"/>
               </a:lnSpc>
               <a:spcBef>
                 <a:spcPts val="200"/>
@@ -4897,7 +4892,7 @@
           <a:p>
             <a:pPr algn="l">
               <a:lnSpc>
-                <a:spcPts val="2080"/>
+                <a:spcPct val="125000"/>
               </a:lnSpc>
               <a:spcBef>
                 <a:spcPts val="800"/>
@@ -4919,7 +4914,7 @@
           <a:p>
             <a:pPr algn="l">
               <a:lnSpc>
-                <a:spcPts val="1820"/>
+                <a:spcPct val="125000"/>
               </a:lnSpc>
               <a:spcBef>
                 <a:spcPts val="200"/>
@@ -5030,11 +5025,10 @@
             <a:spAutoFit/>
           </a:bodyPr>
           <a:lstStyle/>
-          <a:p/>
-          <a:p>
-            <a:pPr algn="l">
-              <a:lnSpc>
-                <a:spcPts val="2080"/>
+          <a:p>
+            <a:pPr algn="l">
+              <a:lnSpc>
+                <a:spcPct val="125000"/>
               </a:lnSpc>
               <a:spcBef>
                 <a:spcPts val="0"/>
@@ -5056,7 +5050,7 @@
           <a:p>
             <a:pPr algn="l">
               <a:lnSpc>
-                <a:spcPts val="2080"/>
+                <a:spcPct val="125000"/>
               </a:lnSpc>
               <a:spcBef>
                 <a:spcPts val="800"/>
@@ -5078,7 +5072,7 @@
           <a:p>
             <a:pPr algn="l">
               <a:lnSpc>
-                <a:spcPts val="1820"/>
+                <a:spcPct val="125000"/>
               </a:lnSpc>
               <a:spcBef>
                 <a:spcPts val="200"/>
@@ -5100,7 +5094,7 @@
           <a:p>
             <a:pPr algn="l">
               <a:lnSpc>
-                <a:spcPts val="2080"/>
+                <a:spcPct val="125000"/>
               </a:lnSpc>
               <a:spcBef>
                 <a:spcPts val="800"/>
@@ -5122,7 +5116,7 @@
           <a:p>
             <a:pPr algn="l">
               <a:lnSpc>
-                <a:spcPts val="1820"/>
+                <a:spcPct val="125000"/>
               </a:lnSpc>
               <a:spcBef>
                 <a:spcPts val="200"/>
@@ -5144,7 +5138,7 @@
           <a:p>
             <a:pPr algn="l">
               <a:lnSpc>
-                <a:spcPts val="1820"/>
+                <a:spcPct val="125000"/>
               </a:lnSpc>
               <a:spcBef>
                 <a:spcPts val="200"/>
@@ -5166,7 +5160,7 @@
           <a:p>
             <a:pPr algn="l">
               <a:lnSpc>
-                <a:spcPts val="2080"/>
+                <a:spcPct val="125000"/>
               </a:lnSpc>
               <a:spcBef>
                 <a:spcPts val="800"/>
@@ -5188,7 +5182,7 @@
           <a:p>
             <a:pPr algn="l">
               <a:lnSpc>
-                <a:spcPts val="1820"/>
+                <a:spcPct val="125000"/>
               </a:lnSpc>
               <a:spcBef>
                 <a:spcPts val="200"/>
@@ -5210,7 +5204,7 @@
           <a:p>
             <a:pPr algn="l">
               <a:lnSpc>
-                <a:spcPts val="2080"/>
+                <a:spcPct val="125000"/>
               </a:lnSpc>
               <a:spcBef>
                 <a:spcPts val="800"/>
@@ -5232,7 +5226,7 @@
           <a:p>
             <a:pPr algn="l">
               <a:lnSpc>
-                <a:spcPts val="1820"/>
+                <a:spcPct val="125000"/>
               </a:lnSpc>
               <a:spcBef>
                 <a:spcPts val="200"/>
@@ -5343,11 +5337,10 @@
             <a:spAutoFit/>
           </a:bodyPr>
           <a:lstStyle/>
-          <a:p/>
-          <a:p>
-            <a:pPr algn="l">
-              <a:lnSpc>
-                <a:spcPts val="2080"/>
+          <a:p>
+            <a:pPr algn="l">
+              <a:lnSpc>
+                <a:spcPct val="125000"/>
               </a:lnSpc>
               <a:spcBef>
                 <a:spcPts val="0"/>
@@ -5369,7 +5362,7 @@
           <a:p>
             <a:pPr algn="l">
               <a:lnSpc>
-                <a:spcPts val="2080"/>
+                <a:spcPct val="125000"/>
               </a:lnSpc>
               <a:spcBef>
                 <a:spcPts val="800"/>
@@ -5391,7 +5384,7 @@
           <a:p>
             <a:pPr algn="l">
               <a:lnSpc>
-                <a:spcPts val="1820"/>
+                <a:spcPct val="125000"/>
               </a:lnSpc>
               <a:spcBef>
                 <a:spcPts val="200"/>
@@ -5413,7 +5406,7 @@
           <a:p>
             <a:pPr algn="l">
               <a:lnSpc>
-                <a:spcPts val="2080"/>
+                <a:spcPct val="125000"/>
               </a:lnSpc>
               <a:spcBef>
                 <a:spcPts val="800"/>
@@ -5435,7 +5428,7 @@
           <a:p>
             <a:pPr algn="l">
               <a:lnSpc>
-                <a:spcPts val="1820"/>
+                <a:spcPct val="125000"/>
               </a:lnSpc>
               <a:spcBef>
                 <a:spcPts val="200"/>
@@ -5457,7 +5450,7 @@
           <a:p>
             <a:pPr algn="l">
               <a:lnSpc>
-                <a:spcPts val="1820"/>
+                <a:spcPct val="125000"/>
               </a:lnSpc>
               <a:spcBef>
                 <a:spcPts val="200"/>
@@ -5479,7 +5472,7 @@
           <a:p>
             <a:pPr algn="l">
               <a:lnSpc>
-                <a:spcPts val="1820"/>
+                <a:spcPct val="125000"/>
               </a:lnSpc>
               <a:spcBef>
                 <a:spcPts val="200"/>
@@ -5501,7 +5494,7 @@
           <a:p>
             <a:pPr algn="l">
               <a:lnSpc>
-                <a:spcPts val="1820"/>
+                <a:spcPct val="125000"/>
               </a:lnSpc>
               <a:spcBef>
                 <a:spcPts val="200"/>
@@ -5523,7 +5516,7 @@
           <a:p>
             <a:pPr algn="l">
               <a:lnSpc>
-                <a:spcPts val="1820"/>
+                <a:spcPct val="125000"/>
               </a:lnSpc>
               <a:spcBef>
                 <a:spcPts val="200"/>
@@ -5545,7 +5538,7 @@
           <a:p>
             <a:pPr algn="l">
               <a:lnSpc>
-                <a:spcPts val="2080"/>
+                <a:spcPct val="125000"/>
               </a:lnSpc>
               <a:spcBef>
                 <a:spcPts val="800"/>
@@ -5567,7 +5560,7 @@
           <a:p>
             <a:pPr algn="l">
               <a:lnSpc>
-                <a:spcPts val="1820"/>
+                <a:spcPct val="125000"/>
               </a:lnSpc>
               <a:spcBef>
                 <a:spcPts val="200"/>
@@ -5589,7 +5582,7 @@
           <a:p>
             <a:pPr algn="l">
               <a:lnSpc>
-                <a:spcPts val="2080"/>
+                <a:spcPct val="125000"/>
               </a:lnSpc>
               <a:spcBef>
                 <a:spcPts val="800"/>
@@ -5611,7 +5604,7 @@
           <a:p>
             <a:pPr algn="l">
               <a:lnSpc>
-                <a:spcPts val="1820"/>
+                <a:spcPct val="125000"/>
               </a:lnSpc>
               <a:spcBef>
                 <a:spcPts val="200"/>
@@ -5722,11 +5715,10 @@
             <a:spAutoFit/>
           </a:bodyPr>
           <a:lstStyle/>
-          <a:p/>
-          <a:p>
-            <a:pPr algn="l">
-              <a:lnSpc>
-                <a:spcPts val="2080"/>
+          <a:p>
+            <a:pPr algn="l">
+              <a:lnSpc>
+                <a:spcPct val="125000"/>
               </a:lnSpc>
               <a:spcBef>
                 <a:spcPts val="0"/>
@@ -5748,7 +5740,7 @@
           <a:p>
             <a:pPr algn="l">
               <a:lnSpc>
-                <a:spcPts val="2080"/>
+                <a:spcPct val="125000"/>
               </a:lnSpc>
               <a:spcBef>
                 <a:spcPts val="800"/>
@@ -5770,7 +5762,7 @@
           <a:p>
             <a:pPr algn="l">
               <a:lnSpc>
-                <a:spcPts val="1820"/>
+                <a:spcPct val="125000"/>
               </a:lnSpc>
               <a:spcBef>
                 <a:spcPts val="200"/>
@@ -5792,7 +5784,7 @@
           <a:p>
             <a:pPr algn="l">
               <a:lnSpc>
-                <a:spcPts val="2080"/>
+                <a:spcPct val="125000"/>
               </a:lnSpc>
               <a:spcBef>
                 <a:spcPts val="800"/>
@@ -5814,7 +5806,7 @@
           <a:p>
             <a:pPr algn="l">
               <a:lnSpc>
-                <a:spcPts val="1820"/>
+                <a:spcPct val="125000"/>
               </a:lnSpc>
               <a:spcBef>
                 <a:spcPts val="200"/>
@@ -5836,7 +5828,7 @@
           <a:p>
             <a:pPr algn="l">
               <a:lnSpc>
-                <a:spcPts val="1820"/>
+                <a:spcPct val="125000"/>
               </a:lnSpc>
               <a:spcBef>
                 <a:spcPts val="200"/>
@@ -5858,7 +5850,7 @@
           <a:p>
             <a:pPr algn="l">
               <a:lnSpc>
-                <a:spcPts val="1820"/>
+                <a:spcPct val="125000"/>
               </a:lnSpc>
               <a:spcBef>
                 <a:spcPts val="200"/>
@@ -5880,7 +5872,7 @@
           <a:p>
             <a:pPr algn="l">
               <a:lnSpc>
-                <a:spcPts val="1820"/>
+                <a:spcPct val="125000"/>
               </a:lnSpc>
               <a:spcBef>
                 <a:spcPts val="200"/>
@@ -5902,7 +5894,7 @@
           <a:p>
             <a:pPr algn="l">
               <a:lnSpc>
-                <a:spcPts val="2080"/>
+                <a:spcPct val="125000"/>
               </a:lnSpc>
               <a:spcBef>
                 <a:spcPts val="800"/>
@@ -5924,7 +5916,7 @@
           <a:p>
             <a:pPr algn="l">
               <a:lnSpc>
-                <a:spcPts val="1820"/>
+                <a:spcPct val="125000"/>
               </a:lnSpc>
               <a:spcBef>
                 <a:spcPts val="200"/>
@@ -5946,7 +5938,7 @@
           <a:p>
             <a:pPr algn="l">
               <a:lnSpc>
-                <a:spcPts val="2080"/>
+                <a:spcPct val="125000"/>
               </a:lnSpc>
               <a:spcBef>
                 <a:spcPts val="800"/>
@@ -5968,7 +5960,7 @@
           <a:p>
             <a:pPr algn="l">
               <a:lnSpc>
-                <a:spcPts val="1820"/>
+                <a:spcPct val="125000"/>
               </a:lnSpc>
               <a:spcBef>
                 <a:spcPts val="200"/>
@@ -6079,11 +6071,10 @@
             <a:spAutoFit/>
           </a:bodyPr>
           <a:lstStyle/>
-          <a:p/>
-          <a:p>
-            <a:pPr algn="l">
-              <a:lnSpc>
-                <a:spcPts val="2080"/>
+          <a:p>
+            <a:pPr algn="l">
+              <a:lnSpc>
+                <a:spcPct val="125000"/>
               </a:lnSpc>
               <a:spcBef>
                 <a:spcPts val="0"/>
@@ -6105,7 +6096,7 @@
           <a:p>
             <a:pPr algn="l">
               <a:lnSpc>
-                <a:spcPts val="2080"/>
+                <a:spcPct val="125000"/>
               </a:lnSpc>
               <a:spcBef>
                 <a:spcPts val="800"/>
@@ -6127,7 +6118,7 @@
           <a:p>
             <a:pPr algn="l">
               <a:lnSpc>
-                <a:spcPts val="1820"/>
+                <a:spcPct val="125000"/>
               </a:lnSpc>
               <a:spcBef>
                 <a:spcPts val="200"/>
@@ -6149,7 +6140,7 @@
           <a:p>
             <a:pPr algn="l">
               <a:lnSpc>
-                <a:spcPts val="2080"/>
+                <a:spcPct val="125000"/>
               </a:lnSpc>
               <a:spcBef>
                 <a:spcPts val="800"/>
@@ -6171,7 +6162,7 @@
           <a:p>
             <a:pPr algn="l">
               <a:lnSpc>
-                <a:spcPts val="1820"/>
+                <a:spcPct val="125000"/>
               </a:lnSpc>
               <a:spcBef>
                 <a:spcPts val="200"/>
@@ -6193,7 +6184,7 @@
           <a:p>
             <a:pPr algn="l">
               <a:lnSpc>
-                <a:spcPts val="1820"/>
+                <a:spcPct val="125000"/>
               </a:lnSpc>
               <a:spcBef>
                 <a:spcPts val="200"/>
@@ -6215,7 +6206,7 @@
           <a:p>
             <a:pPr algn="l">
               <a:lnSpc>
-                <a:spcPts val="1820"/>
+                <a:spcPct val="125000"/>
               </a:lnSpc>
               <a:spcBef>
                 <a:spcPts val="200"/>
@@ -6237,7 +6228,7 @@
           <a:p>
             <a:pPr algn="l">
               <a:lnSpc>
-                <a:spcPts val="1820"/>
+                <a:spcPct val="125000"/>
               </a:lnSpc>
               <a:spcBef>
                 <a:spcPts val="200"/>
@@ -6259,7 +6250,7 @@
           <a:p>
             <a:pPr algn="l">
               <a:lnSpc>
-                <a:spcPts val="2080"/>
+                <a:spcPct val="125000"/>
               </a:lnSpc>
               <a:spcBef>
                 <a:spcPts val="800"/>
@@ -6281,7 +6272,7 @@
           <a:p>
             <a:pPr algn="l">
               <a:lnSpc>
-                <a:spcPts val="1820"/>
+                <a:spcPct val="125000"/>
               </a:lnSpc>
               <a:spcBef>
                 <a:spcPts val="200"/>
@@ -6303,7 +6294,7 @@
           <a:p>
             <a:pPr algn="l">
               <a:lnSpc>
-                <a:spcPts val="2080"/>
+                <a:spcPct val="125000"/>
               </a:lnSpc>
               <a:spcBef>
                 <a:spcPts val="800"/>
@@ -6325,7 +6316,7 @@
           <a:p>
             <a:pPr algn="l">
               <a:lnSpc>
-                <a:spcPts val="1820"/>
+                <a:spcPct val="125000"/>
               </a:lnSpc>
               <a:spcBef>
                 <a:spcPts val="200"/>
@@ -6436,11 +6427,10 @@
             <a:spAutoFit/>
           </a:bodyPr>
           <a:lstStyle/>
-          <a:p/>
-          <a:p>
-            <a:pPr algn="l">
-              <a:lnSpc>
-                <a:spcPts val="2080"/>
+          <a:p>
+            <a:pPr algn="l">
+              <a:lnSpc>
+                <a:spcPct val="125000"/>
               </a:lnSpc>
               <a:spcBef>
                 <a:spcPts val="0"/>
@@ -6462,7 +6452,7 @@
           <a:p>
             <a:pPr algn="l">
               <a:lnSpc>
-                <a:spcPts val="2080"/>
+                <a:spcPct val="125000"/>
               </a:lnSpc>
               <a:spcBef>
                 <a:spcPts val="800"/>
@@ -6484,7 +6474,7 @@
           <a:p>
             <a:pPr algn="l">
               <a:lnSpc>
-                <a:spcPts val="1820"/>
+                <a:spcPct val="125000"/>
               </a:lnSpc>
               <a:spcBef>
                 <a:spcPts val="200"/>
@@ -6506,7 +6496,7 @@
           <a:p>
             <a:pPr algn="l">
               <a:lnSpc>
-                <a:spcPts val="2080"/>
+                <a:spcPct val="125000"/>
               </a:lnSpc>
               <a:spcBef>
                 <a:spcPts val="800"/>
@@ -6528,7 +6518,7 @@
           <a:p>
             <a:pPr algn="l">
               <a:lnSpc>
-                <a:spcPts val="1820"/>
+                <a:spcPct val="125000"/>
               </a:lnSpc>
               <a:spcBef>
                 <a:spcPts val="200"/>
@@ -6550,7 +6540,7 @@
           <a:p>
             <a:pPr algn="l">
               <a:lnSpc>
-                <a:spcPts val="1820"/>
+                <a:spcPct val="125000"/>
               </a:lnSpc>
               <a:spcBef>
                 <a:spcPts val="200"/>
@@ -6572,7 +6562,7 @@
           <a:p>
             <a:pPr algn="l">
               <a:lnSpc>
-                <a:spcPts val="2080"/>
+                <a:spcPct val="125000"/>
               </a:lnSpc>
               <a:spcBef>
                 <a:spcPts val="800"/>
@@ -6594,7 +6584,7 @@
           <a:p>
             <a:pPr algn="l">
               <a:lnSpc>
-                <a:spcPts val="1820"/>
+                <a:spcPct val="125000"/>
               </a:lnSpc>
               <a:spcBef>
                 <a:spcPts val="200"/>
@@ -6616,7 +6606,7 @@
           <a:p>
             <a:pPr algn="l">
               <a:lnSpc>
-                <a:spcPts val="2080"/>
+                <a:spcPct val="125000"/>
               </a:lnSpc>
               <a:spcBef>
                 <a:spcPts val="800"/>
@@ -6638,7 +6628,7 @@
           <a:p>
             <a:pPr algn="l">
               <a:lnSpc>
-                <a:spcPts val="1820"/>
+                <a:spcPct val="125000"/>
               </a:lnSpc>
               <a:spcBef>
                 <a:spcPts val="200"/>
@@ -6749,11 +6739,10 @@
             <a:spAutoFit/>
           </a:bodyPr>
           <a:lstStyle/>
-          <a:p/>
-          <a:p>
-            <a:pPr algn="l">
-              <a:lnSpc>
-                <a:spcPts val="2080"/>
+          <a:p>
+            <a:pPr algn="l">
+              <a:lnSpc>
+                <a:spcPct val="125000"/>
               </a:lnSpc>
               <a:spcBef>
                 <a:spcPts val="0"/>
@@ -6775,7 +6764,7 @@
           <a:p>
             <a:pPr algn="l">
               <a:lnSpc>
-                <a:spcPts val="2080"/>
+                <a:spcPct val="125000"/>
               </a:lnSpc>
               <a:spcBef>
                 <a:spcPts val="800"/>
@@ -6797,7 +6786,7 @@
           <a:p>
             <a:pPr algn="l">
               <a:lnSpc>
-                <a:spcPts val="1820"/>
+                <a:spcPct val="125000"/>
               </a:lnSpc>
               <a:spcBef>
                 <a:spcPts val="200"/>
@@ -6819,7 +6808,7 @@
           <a:p>
             <a:pPr algn="l">
               <a:lnSpc>
-                <a:spcPts val="2080"/>
+                <a:spcPct val="125000"/>
               </a:lnSpc>
               <a:spcBef>
                 <a:spcPts val="800"/>
@@ -6841,7 +6830,7 @@
           <a:p>
             <a:pPr algn="l">
               <a:lnSpc>
-                <a:spcPts val="1820"/>
+                <a:spcPct val="125000"/>
               </a:lnSpc>
               <a:spcBef>
                 <a:spcPts val="200"/>
@@ -6863,7 +6852,7 @@
           <a:p>
             <a:pPr algn="l">
               <a:lnSpc>
-                <a:spcPts val="1820"/>
+                <a:spcPct val="125000"/>
               </a:lnSpc>
               <a:spcBef>
                 <a:spcPts val="200"/>
@@ -6885,7 +6874,7 @@
           <a:p>
             <a:pPr algn="l">
               <a:lnSpc>
-                <a:spcPts val="1820"/>
+                <a:spcPct val="125000"/>
               </a:lnSpc>
               <a:spcBef>
                 <a:spcPts val="200"/>
@@ -6907,7 +6896,7 @@
           <a:p>
             <a:pPr algn="l">
               <a:lnSpc>
-                <a:spcPts val="2080"/>
+                <a:spcPct val="125000"/>
               </a:lnSpc>
               <a:spcBef>
                 <a:spcPts val="800"/>
@@ -6929,7 +6918,7 @@
           <a:p>
             <a:pPr algn="l">
               <a:lnSpc>
-                <a:spcPts val="1820"/>
+                <a:spcPct val="125000"/>
               </a:lnSpc>
               <a:spcBef>
                 <a:spcPts val="200"/>
@@ -6951,7 +6940,7 @@
           <a:p>
             <a:pPr algn="l">
               <a:lnSpc>
-                <a:spcPts val="2080"/>
+                <a:spcPct val="125000"/>
               </a:lnSpc>
               <a:spcBef>
                 <a:spcPts val="800"/>
@@ -6973,7 +6962,7 @@
           <a:p>
             <a:pPr algn="l">
               <a:lnSpc>
-                <a:spcPts val="1820"/>
+                <a:spcPct val="125000"/>
               </a:lnSpc>
               <a:spcBef>
                 <a:spcPts val="200"/>
@@ -7084,11 +7073,10 @@
             <a:spAutoFit/>
           </a:bodyPr>
           <a:lstStyle/>
-          <a:p/>
-          <a:p>
-            <a:pPr algn="l">
-              <a:lnSpc>
-                <a:spcPts val="2080"/>
+          <a:p>
+            <a:pPr algn="l">
+              <a:lnSpc>
+                <a:spcPct val="125000"/>
               </a:lnSpc>
               <a:spcBef>
                 <a:spcPts val="0"/>
@@ -7110,7 +7098,7 @@
           <a:p>
             <a:pPr algn="l">
               <a:lnSpc>
-                <a:spcPts val="2080"/>
+                <a:spcPct val="125000"/>
               </a:lnSpc>
               <a:spcBef>
                 <a:spcPts val="800"/>
@@ -7132,7 +7120,7 @@
           <a:p>
             <a:pPr algn="l">
               <a:lnSpc>
-                <a:spcPts val="1820"/>
+                <a:spcPct val="125000"/>
               </a:lnSpc>
               <a:spcBef>
                 <a:spcPts val="200"/>
@@ -7154,7 +7142,7 @@
           <a:p>
             <a:pPr algn="l">
               <a:lnSpc>
-                <a:spcPts val="2080"/>
+                <a:spcPct val="125000"/>
               </a:lnSpc>
               <a:spcBef>
                 <a:spcPts val="800"/>
@@ -7176,7 +7164,7 @@
           <a:p>
             <a:pPr algn="l">
               <a:lnSpc>
-                <a:spcPts val="1820"/>
+                <a:spcPct val="125000"/>
               </a:lnSpc>
               <a:spcBef>
                 <a:spcPts val="200"/>
@@ -7198,7 +7186,7 @@
           <a:p>
             <a:pPr algn="l">
               <a:lnSpc>
-                <a:spcPts val="1820"/>
+                <a:spcPct val="125000"/>
               </a:lnSpc>
               <a:spcBef>
                 <a:spcPts val="200"/>
@@ -7220,7 +7208,7 @@
           <a:p>
             <a:pPr algn="l">
               <a:lnSpc>
-                <a:spcPts val="2080"/>
+                <a:spcPct val="125000"/>
               </a:lnSpc>
               <a:spcBef>
                 <a:spcPts val="800"/>
@@ -7242,7 +7230,7 @@
           <a:p>
             <a:pPr algn="l">
               <a:lnSpc>
-                <a:spcPts val="1820"/>
+                <a:spcPct val="125000"/>
               </a:lnSpc>
               <a:spcBef>
                 <a:spcPts val="200"/>
@@ -7264,7 +7252,7 @@
           <a:p>
             <a:pPr algn="l">
               <a:lnSpc>
-                <a:spcPts val="2080"/>
+                <a:spcPct val="125000"/>
               </a:lnSpc>
               <a:spcBef>
                 <a:spcPts val="800"/>
@@ -7286,7 +7274,7 @@
           <a:p>
             <a:pPr algn="l">
               <a:lnSpc>
-                <a:spcPts val="1820"/>
+                <a:spcPct val="125000"/>
               </a:lnSpc>
               <a:spcBef>
                 <a:spcPts val="200"/>
@@ -7397,11 +7385,10 @@
             <a:spAutoFit/>
           </a:bodyPr>
           <a:lstStyle/>
-          <a:p/>
-          <a:p>
-            <a:pPr algn="l">
-              <a:lnSpc>
-                <a:spcPts val="2080"/>
+          <a:p>
+            <a:pPr algn="l">
+              <a:lnSpc>
+                <a:spcPct val="125000"/>
               </a:lnSpc>
               <a:spcBef>
                 <a:spcPts val="0"/>
@@ -7423,7 +7410,7 @@
           <a:p>
             <a:pPr algn="l">
               <a:lnSpc>
-                <a:spcPts val="2080"/>
+                <a:spcPct val="125000"/>
               </a:lnSpc>
               <a:spcBef>
                 <a:spcPts val="800"/>
@@ -7445,7 +7432,7 @@
           <a:p>
             <a:pPr algn="l">
               <a:lnSpc>
-                <a:spcPts val="1820"/>
+                <a:spcPct val="125000"/>
               </a:lnSpc>
               <a:spcBef>
                 <a:spcPts val="200"/>
@@ -7467,7 +7454,7 @@
           <a:p>
             <a:pPr algn="l">
               <a:lnSpc>
-                <a:spcPts val="2080"/>
+                <a:spcPct val="125000"/>
               </a:lnSpc>
               <a:spcBef>
                 <a:spcPts val="800"/>
@@ -7489,7 +7476,7 @@
           <a:p>
             <a:pPr algn="l">
               <a:lnSpc>
-                <a:spcPts val="1820"/>
+                <a:spcPct val="125000"/>
               </a:lnSpc>
               <a:spcBef>
                 <a:spcPts val="200"/>
@@ -7511,7 +7498,7 @@
           <a:p>
             <a:pPr algn="l">
               <a:lnSpc>
-                <a:spcPts val="1820"/>
+                <a:spcPct val="125000"/>
               </a:lnSpc>
               <a:spcBef>
                 <a:spcPts val="200"/>
@@ -7533,7 +7520,7 @@
           <a:p>
             <a:pPr algn="l">
               <a:lnSpc>
-                <a:spcPts val="2080"/>
+                <a:spcPct val="125000"/>
               </a:lnSpc>
               <a:spcBef>
                 <a:spcPts val="800"/>
@@ -7555,7 +7542,7 @@
           <a:p>
             <a:pPr algn="l">
               <a:lnSpc>
-                <a:spcPts val="1820"/>
+                <a:spcPct val="125000"/>
               </a:lnSpc>
               <a:spcBef>
                 <a:spcPts val="200"/>
@@ -7577,7 +7564,7 @@
           <a:p>
             <a:pPr algn="l">
               <a:lnSpc>
-                <a:spcPts val="2080"/>
+                <a:spcPct val="125000"/>
               </a:lnSpc>
               <a:spcBef>
                 <a:spcPts val="800"/>
@@ -7599,7 +7586,7 @@
           <a:p>
             <a:pPr algn="l">
               <a:lnSpc>
-                <a:spcPts val="1820"/>
+                <a:spcPct val="125000"/>
               </a:lnSpc>
               <a:spcBef>
                 <a:spcPts val="200"/>
@@ -7710,11 +7697,10 @@
             <a:spAutoFit/>
           </a:bodyPr>
           <a:lstStyle/>
-          <a:p/>
-          <a:p>
-            <a:pPr algn="l">
-              <a:lnSpc>
-                <a:spcPts val="2080"/>
+          <a:p>
+            <a:pPr algn="l">
+              <a:lnSpc>
+                <a:spcPct val="125000"/>
               </a:lnSpc>
               <a:spcBef>
                 <a:spcPts val="0"/>
@@ -7736,7 +7722,7 @@
           <a:p>
             <a:pPr algn="l">
               <a:lnSpc>
-                <a:spcPts val="2080"/>
+                <a:spcPct val="125000"/>
               </a:lnSpc>
               <a:spcBef>
                 <a:spcPts val="800"/>
@@ -7758,7 +7744,7 @@
           <a:p>
             <a:pPr algn="l">
               <a:lnSpc>
-                <a:spcPts val="1820"/>
+                <a:spcPct val="125000"/>
               </a:lnSpc>
               <a:spcBef>
                 <a:spcPts val="200"/>
@@ -7780,7 +7766,7 @@
           <a:p>
             <a:pPr algn="l">
               <a:lnSpc>
-                <a:spcPts val="2080"/>
+                <a:spcPct val="125000"/>
               </a:lnSpc>
               <a:spcBef>
                 <a:spcPts val="800"/>
@@ -7802,7 +7788,7 @@
           <a:p>
             <a:pPr algn="l">
               <a:lnSpc>
-                <a:spcPts val="1820"/>
+                <a:spcPct val="125000"/>
               </a:lnSpc>
               <a:spcBef>
                 <a:spcPts val="200"/>
@@ -7824,7 +7810,7 @@
           <a:p>
             <a:pPr algn="l">
               <a:lnSpc>
-                <a:spcPts val="1820"/>
+                <a:spcPct val="125000"/>
               </a:lnSpc>
               <a:spcBef>
                 <a:spcPts val="200"/>
@@ -7846,7 +7832,7 @@
           <a:p>
             <a:pPr algn="l">
               <a:lnSpc>
-                <a:spcPts val="2080"/>
+                <a:spcPct val="125000"/>
               </a:lnSpc>
               <a:spcBef>
                 <a:spcPts val="800"/>
@@ -7868,7 +7854,7 @@
           <a:p>
             <a:pPr algn="l">
               <a:lnSpc>
-                <a:spcPts val="1820"/>
+                <a:spcPct val="125000"/>
               </a:lnSpc>
               <a:spcBef>
                 <a:spcPts val="200"/>
@@ -7890,7 +7876,7 @@
           <a:p>
             <a:pPr algn="l">
               <a:lnSpc>
-                <a:spcPts val="2080"/>
+                <a:spcPct val="125000"/>
               </a:lnSpc>
               <a:spcBef>
                 <a:spcPts val="800"/>
@@ -7912,7 +7898,7 @@
           <a:p>
             <a:pPr algn="l">
               <a:lnSpc>
-                <a:spcPts val="1820"/>
+                <a:spcPct val="125000"/>
               </a:lnSpc>
               <a:spcBef>
                 <a:spcPts val="200"/>
@@ -8023,11 +8009,10 @@
             <a:spAutoFit/>
           </a:bodyPr>
           <a:lstStyle/>
-          <a:p/>
-          <a:p>
-            <a:pPr algn="l">
-              <a:lnSpc>
-                <a:spcPts val="2080"/>
+          <a:p>
+            <a:pPr algn="l">
+              <a:lnSpc>
+                <a:spcPct val="125000"/>
               </a:lnSpc>
               <a:spcBef>
                 <a:spcPts val="0"/>
@@ -8049,7 +8034,7 @@
           <a:p>
             <a:pPr algn="l">
               <a:lnSpc>
-                <a:spcPts val="2080"/>
+                <a:spcPct val="125000"/>
               </a:lnSpc>
               <a:spcBef>
                 <a:spcPts val="800"/>
@@ -8071,7 +8056,7 @@
           <a:p>
             <a:pPr algn="l">
               <a:lnSpc>
-                <a:spcPts val="1820"/>
+                <a:spcPct val="125000"/>
               </a:lnSpc>
               <a:spcBef>
                 <a:spcPts val="200"/>
@@ -8093,7 +8078,7 @@
           <a:p>
             <a:pPr algn="l">
               <a:lnSpc>
-                <a:spcPts val="2080"/>
+                <a:spcPct val="125000"/>
               </a:lnSpc>
               <a:spcBef>
                 <a:spcPts val="800"/>
@@ -8115,7 +8100,7 @@
           <a:p>
             <a:pPr algn="l">
               <a:lnSpc>
-                <a:spcPts val="1820"/>
+                <a:spcPct val="125000"/>
               </a:lnSpc>
               <a:spcBef>
                 <a:spcPts val="200"/>
@@ -8137,7 +8122,7 @@
           <a:p>
             <a:pPr algn="l">
               <a:lnSpc>
-                <a:spcPts val="1820"/>
+                <a:spcPct val="125000"/>
               </a:lnSpc>
               <a:spcBef>
                 <a:spcPts val="200"/>
@@ -8159,7 +8144,7 @@
           <a:p>
             <a:pPr algn="l">
               <a:lnSpc>
-                <a:spcPts val="2080"/>
+                <a:spcPct val="125000"/>
               </a:lnSpc>
               <a:spcBef>
                 <a:spcPts val="800"/>
@@ -8181,7 +8166,7 @@
           <a:p>
             <a:pPr algn="l">
               <a:lnSpc>
-                <a:spcPts val="1820"/>
+                <a:spcPct val="125000"/>
               </a:lnSpc>
               <a:spcBef>
                 <a:spcPts val="200"/>
@@ -8203,7 +8188,7 @@
           <a:p>
             <a:pPr algn="l">
               <a:lnSpc>
-                <a:spcPts val="2080"/>
+                <a:spcPct val="125000"/>
               </a:lnSpc>
               <a:spcBef>
                 <a:spcPts val="800"/>
@@ -8225,7 +8210,7 @@
           <a:p>
             <a:pPr algn="l">
               <a:lnSpc>
-                <a:spcPts val="1820"/>
+                <a:spcPct val="125000"/>
               </a:lnSpc>
               <a:spcBef>
                 <a:spcPts val="200"/>
@@ -8336,11 +8321,10 @@
             <a:spAutoFit/>
           </a:bodyPr>
           <a:lstStyle/>
-          <a:p/>
-          <a:p>
-            <a:pPr algn="l">
-              <a:lnSpc>
-                <a:spcPts val="2080"/>
+          <a:p>
+            <a:pPr algn="l">
+              <a:lnSpc>
+                <a:spcPct val="125000"/>
               </a:lnSpc>
               <a:spcBef>
                 <a:spcPts val="0"/>
@@ -8362,7 +8346,7 @@
           <a:p>
             <a:pPr algn="l">
               <a:lnSpc>
-                <a:spcPts val="2080"/>
+                <a:spcPct val="125000"/>
               </a:lnSpc>
               <a:spcBef>
                 <a:spcPts val="800"/>
@@ -8384,7 +8368,7 @@
           <a:p>
             <a:pPr algn="l">
               <a:lnSpc>
-                <a:spcPts val="1820"/>
+                <a:spcPct val="125000"/>
               </a:lnSpc>
               <a:spcBef>
                 <a:spcPts val="200"/>
@@ -8406,7 +8390,7 @@
           <a:p>
             <a:pPr algn="l">
               <a:lnSpc>
-                <a:spcPts val="2080"/>
+                <a:spcPct val="125000"/>
               </a:lnSpc>
               <a:spcBef>
                 <a:spcPts val="800"/>
@@ -8428,7 +8412,7 @@
           <a:p>
             <a:pPr algn="l">
               <a:lnSpc>
-                <a:spcPts val="1820"/>
+                <a:spcPct val="125000"/>
               </a:lnSpc>
               <a:spcBef>
                 <a:spcPts val="200"/>
@@ -8450,7 +8434,7 @@
           <a:p>
             <a:pPr algn="l">
               <a:lnSpc>
-                <a:spcPts val="1820"/>
+                <a:spcPct val="125000"/>
               </a:lnSpc>
               <a:spcBef>
                 <a:spcPts val="200"/>
@@ -8472,7 +8456,7 @@
           <a:p>
             <a:pPr algn="l">
               <a:lnSpc>
-                <a:spcPts val="2080"/>
+                <a:spcPct val="125000"/>
               </a:lnSpc>
               <a:spcBef>
                 <a:spcPts val="800"/>
@@ -8494,7 +8478,7 @@
           <a:p>
             <a:pPr algn="l">
               <a:lnSpc>
-                <a:spcPts val="1820"/>
+                <a:spcPct val="125000"/>
               </a:lnSpc>
               <a:spcBef>
                 <a:spcPts val="200"/>
@@ -8516,7 +8500,7 @@
           <a:p>
             <a:pPr algn="l">
               <a:lnSpc>
-                <a:spcPts val="2080"/>
+                <a:spcPct val="125000"/>
               </a:lnSpc>
               <a:spcBef>
                 <a:spcPts val="800"/>
@@ -8538,7 +8522,7 @@
           <a:p>
             <a:pPr algn="l">
               <a:lnSpc>
-                <a:spcPts val="1820"/>
+                <a:spcPct val="125000"/>
               </a:lnSpc>
               <a:spcBef>
                 <a:spcPts val="200"/>
@@ -8649,11 +8633,10 @@
             <a:spAutoFit/>
           </a:bodyPr>
           <a:lstStyle/>
-          <a:p/>
-          <a:p>
-            <a:pPr algn="l">
-              <a:lnSpc>
-                <a:spcPts val="2080"/>
+          <a:p>
+            <a:pPr algn="l">
+              <a:lnSpc>
+                <a:spcPct val="125000"/>
               </a:lnSpc>
               <a:spcBef>
                 <a:spcPts val="0"/>
@@ -8675,7 +8658,7 @@
           <a:p>
             <a:pPr algn="l">
               <a:lnSpc>
-                <a:spcPts val="2080"/>
+                <a:spcPct val="125000"/>
               </a:lnSpc>
               <a:spcBef>
                 <a:spcPts val="800"/>
@@ -8697,7 +8680,7 @@
           <a:p>
             <a:pPr algn="l">
               <a:lnSpc>
-                <a:spcPts val="1820"/>
+                <a:spcPct val="125000"/>
               </a:lnSpc>
               <a:spcBef>
                 <a:spcPts val="200"/>
@@ -8719,7 +8702,7 @@
           <a:p>
             <a:pPr algn="l">
               <a:lnSpc>
-                <a:spcPts val="2080"/>
+                <a:spcPct val="125000"/>
               </a:lnSpc>
               <a:spcBef>
                 <a:spcPts val="800"/>
@@ -8741,7 +8724,7 @@
           <a:p>
             <a:pPr algn="l">
               <a:lnSpc>
-                <a:spcPts val="1820"/>
+                <a:spcPct val="125000"/>
               </a:lnSpc>
               <a:spcBef>
                 <a:spcPts val="200"/>
@@ -8763,7 +8746,7 @@
           <a:p>
             <a:pPr algn="l">
               <a:lnSpc>
-                <a:spcPts val="1820"/>
+                <a:spcPct val="125000"/>
               </a:lnSpc>
               <a:spcBef>
                 <a:spcPts val="200"/>
@@ -8785,7 +8768,7 @@
           <a:p>
             <a:pPr algn="l">
               <a:lnSpc>
-                <a:spcPts val="2080"/>
+                <a:spcPct val="125000"/>
               </a:lnSpc>
               <a:spcBef>
                 <a:spcPts val="800"/>
@@ -8807,7 +8790,7 @@
           <a:p>
             <a:pPr algn="l">
               <a:lnSpc>
-                <a:spcPts val="1820"/>
+                <a:spcPct val="125000"/>
               </a:lnSpc>
               <a:spcBef>
                 <a:spcPts val="200"/>
@@ -8829,7 +8812,7 @@
           <a:p>
             <a:pPr algn="l">
               <a:lnSpc>
-                <a:spcPts val="2080"/>
+                <a:spcPct val="125000"/>
               </a:lnSpc>
               <a:spcBef>
                 <a:spcPts val="800"/>
@@ -8851,7 +8834,7 @@
           <a:p>
             <a:pPr algn="l">
               <a:lnSpc>
-                <a:spcPts val="1820"/>
+                <a:spcPct val="125000"/>
               </a:lnSpc>
               <a:spcBef>
                 <a:spcPts val="200"/>
@@ -8962,11 +8945,10 @@
             <a:spAutoFit/>
           </a:bodyPr>
           <a:lstStyle/>
-          <a:p/>
-          <a:p>
-            <a:pPr algn="l">
-              <a:lnSpc>
-                <a:spcPts val="2080"/>
+          <a:p>
+            <a:pPr algn="l">
+              <a:lnSpc>
+                <a:spcPct val="125000"/>
               </a:lnSpc>
               <a:spcBef>
                 <a:spcPts val="0"/>
@@ -8988,7 +8970,7 @@
           <a:p>
             <a:pPr algn="l">
               <a:lnSpc>
-                <a:spcPts val="2080"/>
+                <a:spcPct val="125000"/>
               </a:lnSpc>
               <a:spcBef>
                 <a:spcPts val="800"/>
@@ -9010,7 +8992,7 @@
           <a:p>
             <a:pPr algn="l">
               <a:lnSpc>
-                <a:spcPts val="1820"/>
+                <a:spcPct val="125000"/>
               </a:lnSpc>
               <a:spcBef>
                 <a:spcPts val="200"/>
@@ -9032,7 +9014,7 @@
           <a:p>
             <a:pPr algn="l">
               <a:lnSpc>
-                <a:spcPts val="2080"/>
+                <a:spcPct val="125000"/>
               </a:lnSpc>
               <a:spcBef>
                 <a:spcPts val="800"/>
@@ -9054,7 +9036,7 @@
           <a:p>
             <a:pPr algn="l">
               <a:lnSpc>
-                <a:spcPts val="1820"/>
+                <a:spcPct val="125000"/>
               </a:lnSpc>
               <a:spcBef>
                 <a:spcPts val="200"/>
@@ -9076,7 +9058,7 @@
           <a:p>
             <a:pPr algn="l">
               <a:lnSpc>
-                <a:spcPts val="2080"/>
+                <a:spcPct val="125000"/>
               </a:lnSpc>
               <a:spcBef>
                 <a:spcPts val="800"/>
@@ -9098,7 +9080,7 @@
           <a:p>
             <a:pPr algn="l">
               <a:lnSpc>
-                <a:spcPts val="1820"/>
+                <a:spcPct val="125000"/>
               </a:lnSpc>
               <a:spcBef>
                 <a:spcPts val="200"/>
@@ -9120,7 +9102,7 @@
           <a:p>
             <a:pPr algn="l">
               <a:lnSpc>
-                <a:spcPts val="2080"/>
+                <a:spcPct val="125000"/>
               </a:lnSpc>
               <a:spcBef>
                 <a:spcPts val="800"/>
@@ -9142,7 +9124,7 @@
           <a:p>
             <a:pPr algn="l">
               <a:lnSpc>
-                <a:spcPts val="1820"/>
+                <a:spcPct val="125000"/>
               </a:lnSpc>
               <a:spcBef>
                 <a:spcPts val="200"/>
@@ -9253,11 +9235,10 @@
             <a:spAutoFit/>
           </a:bodyPr>
           <a:lstStyle/>
-          <a:p/>
-          <a:p>
-            <a:pPr algn="l">
-              <a:lnSpc>
-                <a:spcPts val="2080"/>
+          <a:p>
+            <a:pPr algn="l">
+              <a:lnSpc>
+                <a:spcPct val="125000"/>
               </a:lnSpc>
               <a:spcBef>
                 <a:spcPts val="0"/>
@@ -9279,7 +9260,7 @@
           <a:p>
             <a:pPr algn="l">
               <a:lnSpc>
-                <a:spcPts val="2080"/>
+                <a:spcPct val="125000"/>
               </a:lnSpc>
               <a:spcBef>
                 <a:spcPts val="800"/>
@@ -9301,7 +9282,7 @@
           <a:p>
             <a:pPr algn="l">
               <a:lnSpc>
-                <a:spcPts val="1820"/>
+                <a:spcPct val="125000"/>
               </a:lnSpc>
               <a:spcBef>
                 <a:spcPts val="200"/>
@@ -9323,7 +9304,7 @@
           <a:p>
             <a:pPr algn="l">
               <a:lnSpc>
-                <a:spcPts val="2080"/>
+                <a:spcPct val="125000"/>
               </a:lnSpc>
               <a:spcBef>
                 <a:spcPts val="800"/>
@@ -9345,7 +9326,7 @@
           <a:p>
             <a:pPr algn="l">
               <a:lnSpc>
-                <a:spcPts val="1820"/>
+                <a:spcPct val="125000"/>
               </a:lnSpc>
               <a:spcBef>
                 <a:spcPts val="200"/>
@@ -9367,7 +9348,7 @@
           <a:p>
             <a:pPr algn="l">
               <a:lnSpc>
-                <a:spcPts val="1820"/>
+                <a:spcPct val="125000"/>
               </a:lnSpc>
               <a:spcBef>
                 <a:spcPts val="200"/>
@@ -9389,7 +9370,7 @@
           <a:p>
             <a:pPr algn="l">
               <a:lnSpc>
-                <a:spcPts val="1820"/>
+                <a:spcPct val="125000"/>
               </a:lnSpc>
               <a:spcBef>
                 <a:spcPts val="200"/>
@@ -9411,7 +9392,7 @@
           <a:p>
             <a:pPr algn="l">
               <a:lnSpc>
-                <a:spcPts val="2080"/>
+                <a:spcPct val="125000"/>
               </a:lnSpc>
               <a:spcBef>
                 <a:spcPts val="800"/>
@@ -9433,7 +9414,7 @@
           <a:p>
             <a:pPr algn="l">
               <a:lnSpc>
-                <a:spcPts val="1820"/>
+                <a:spcPct val="125000"/>
               </a:lnSpc>
               <a:spcBef>
                 <a:spcPts val="200"/>
@@ -9455,7 +9436,7 @@
           <a:p>
             <a:pPr algn="l">
               <a:lnSpc>
-                <a:spcPts val="2080"/>
+                <a:spcPct val="125000"/>
               </a:lnSpc>
               <a:spcBef>
                 <a:spcPts val="800"/>
@@ -9477,7 +9458,7 @@
           <a:p>
             <a:pPr algn="l">
               <a:lnSpc>
-                <a:spcPts val="1820"/>
+                <a:spcPct val="125000"/>
               </a:lnSpc>
               <a:spcBef>
                 <a:spcPts val="200"/>
@@ -9588,11 +9569,10 @@
             <a:spAutoFit/>
           </a:bodyPr>
           <a:lstStyle/>
-          <a:p/>
-          <a:p>
-            <a:pPr algn="l">
-              <a:lnSpc>
-                <a:spcPts val="2080"/>
+          <a:p>
+            <a:pPr algn="l">
+              <a:lnSpc>
+                <a:spcPct val="125000"/>
               </a:lnSpc>
               <a:spcBef>
                 <a:spcPts val="0"/>
@@ -9614,7 +9594,7 @@
           <a:p>
             <a:pPr algn="l">
               <a:lnSpc>
-                <a:spcPts val="2080"/>
+                <a:spcPct val="125000"/>
               </a:lnSpc>
               <a:spcBef>
                 <a:spcPts val="800"/>
@@ -9636,7 +9616,7 @@
           <a:p>
             <a:pPr algn="l">
               <a:lnSpc>
-                <a:spcPts val="1820"/>
+                <a:spcPct val="125000"/>
               </a:lnSpc>
               <a:spcBef>
                 <a:spcPts val="200"/>
@@ -9658,7 +9638,7 @@
           <a:p>
             <a:pPr algn="l">
               <a:lnSpc>
-                <a:spcPts val="2080"/>
+                <a:spcPct val="125000"/>
               </a:lnSpc>
               <a:spcBef>
                 <a:spcPts val="800"/>
@@ -9680,7 +9660,7 @@
           <a:p>
             <a:pPr algn="l">
               <a:lnSpc>
-                <a:spcPts val="1820"/>
+                <a:spcPct val="125000"/>
               </a:lnSpc>
               <a:spcBef>
                 <a:spcPts val="200"/>
@@ -9702,7 +9682,7 @@
           <a:p>
             <a:pPr algn="l">
               <a:lnSpc>
-                <a:spcPts val="2080"/>
+                <a:spcPct val="125000"/>
               </a:lnSpc>
               <a:spcBef>
                 <a:spcPts val="800"/>
@@ -9724,7 +9704,7 @@
           <a:p>
             <a:pPr algn="l">
               <a:lnSpc>
-                <a:spcPts val="1820"/>
+                <a:spcPct val="125000"/>
               </a:lnSpc>
               <a:spcBef>
                 <a:spcPts val="200"/>
@@ -9746,7 +9726,7 @@
           <a:p>
             <a:pPr algn="l">
               <a:lnSpc>
-                <a:spcPts val="2080"/>
+                <a:spcPct val="125000"/>
               </a:lnSpc>
               <a:spcBef>
                 <a:spcPts val="800"/>
@@ -9768,7 +9748,7 @@
           <a:p>
             <a:pPr algn="l">
               <a:lnSpc>
-                <a:spcPts val="1820"/>
+                <a:spcPct val="125000"/>
               </a:lnSpc>
               <a:spcBef>
                 <a:spcPts val="200"/>
@@ -9879,11 +9859,10 @@
             <a:spAutoFit/>
           </a:bodyPr>
           <a:lstStyle/>
-          <a:p/>
-          <a:p>
-            <a:pPr algn="l">
-              <a:lnSpc>
-                <a:spcPts val="2080"/>
+          <a:p>
+            <a:pPr algn="l">
+              <a:lnSpc>
+                <a:spcPct val="125000"/>
               </a:lnSpc>
               <a:spcBef>
                 <a:spcPts val="0"/>
@@ -9905,7 +9884,7 @@
           <a:p>
             <a:pPr algn="l">
               <a:lnSpc>
-                <a:spcPts val="2080"/>
+                <a:spcPct val="125000"/>
               </a:lnSpc>
               <a:spcBef>
                 <a:spcPts val="800"/>
@@ -9927,7 +9906,7 @@
           <a:p>
             <a:pPr algn="l">
               <a:lnSpc>
-                <a:spcPts val="1820"/>
+                <a:spcPct val="125000"/>
               </a:lnSpc>
               <a:spcBef>
                 <a:spcPts val="200"/>
@@ -9949,7 +9928,7 @@
           <a:p>
             <a:pPr algn="l">
               <a:lnSpc>
-                <a:spcPts val="2080"/>
+                <a:spcPct val="125000"/>
               </a:lnSpc>
               <a:spcBef>
                 <a:spcPts val="800"/>
@@ -9971,7 +9950,7 @@
           <a:p>
             <a:pPr algn="l">
               <a:lnSpc>
-                <a:spcPts val="1820"/>
+                <a:spcPct val="125000"/>
               </a:lnSpc>
               <a:spcBef>
                 <a:spcPts val="200"/>
@@ -9993,7 +9972,7 @@
           <a:p>
             <a:pPr algn="l">
               <a:lnSpc>
-                <a:spcPts val="2080"/>
+                <a:spcPct val="125000"/>
               </a:lnSpc>
               <a:spcBef>
                 <a:spcPts val="800"/>
@@ -10015,7 +9994,7 @@
           <a:p>
             <a:pPr algn="l">
               <a:lnSpc>
-                <a:spcPts val="1820"/>
+                <a:spcPct val="125000"/>
               </a:lnSpc>
               <a:spcBef>
                 <a:spcPts val="200"/>
@@ -10037,7 +10016,7 @@
           <a:p>
             <a:pPr algn="l">
               <a:lnSpc>
-                <a:spcPts val="2080"/>
+                <a:spcPct val="125000"/>
               </a:lnSpc>
               <a:spcBef>
                 <a:spcPts val="800"/>
@@ -10059,7 +10038,7 @@
           <a:p>
             <a:pPr algn="l">
               <a:lnSpc>
-                <a:spcPts val="1820"/>
+                <a:spcPct val="125000"/>
               </a:lnSpc>
               <a:spcBef>
                 <a:spcPts val="200"/>
@@ -10170,11 +10149,10 @@
             <a:spAutoFit/>
           </a:bodyPr>
           <a:lstStyle/>
-          <a:p/>
-          <a:p>
-            <a:pPr algn="l">
-              <a:lnSpc>
-                <a:spcPts val="2080"/>
+          <a:p>
+            <a:pPr algn="l">
+              <a:lnSpc>
+                <a:spcPct val="125000"/>
               </a:lnSpc>
               <a:spcBef>
                 <a:spcPts val="0"/>
@@ -10196,7 +10174,7 @@
           <a:p>
             <a:pPr algn="l">
               <a:lnSpc>
-                <a:spcPts val="2080"/>
+                <a:spcPct val="125000"/>
               </a:lnSpc>
               <a:spcBef>
                 <a:spcPts val="800"/>
@@ -10218,7 +10196,7 @@
           <a:p>
             <a:pPr algn="l">
               <a:lnSpc>
-                <a:spcPts val="1820"/>
+                <a:spcPct val="125000"/>
               </a:lnSpc>
               <a:spcBef>
                 <a:spcPts val="200"/>
@@ -10240,7 +10218,7 @@
           <a:p>
             <a:pPr algn="l">
               <a:lnSpc>
-                <a:spcPts val="2080"/>
+                <a:spcPct val="125000"/>
               </a:lnSpc>
               <a:spcBef>
                 <a:spcPts val="800"/>
@@ -10262,7 +10240,7 @@
           <a:p>
             <a:pPr algn="l">
               <a:lnSpc>
-                <a:spcPts val="1820"/>
+                <a:spcPct val="125000"/>
               </a:lnSpc>
               <a:spcBef>
                 <a:spcPts val="200"/>
@@ -10284,7 +10262,7 @@
           <a:p>
             <a:pPr algn="l">
               <a:lnSpc>
-                <a:spcPts val="1820"/>
+                <a:spcPct val="125000"/>
               </a:lnSpc>
               <a:spcBef>
                 <a:spcPts val="200"/>
@@ -10306,7 +10284,7 @@
           <a:p>
             <a:pPr algn="l">
               <a:lnSpc>
-                <a:spcPts val="2080"/>
+                <a:spcPct val="125000"/>
               </a:lnSpc>
               <a:spcBef>
                 <a:spcPts val="800"/>
@@ -10328,7 +10306,7 @@
           <a:p>
             <a:pPr algn="l">
               <a:lnSpc>
-                <a:spcPts val="1820"/>
+                <a:spcPct val="125000"/>
               </a:lnSpc>
               <a:spcBef>
                 <a:spcPts val="200"/>
@@ -10350,7 +10328,7 @@
           <a:p>
             <a:pPr algn="l">
               <a:lnSpc>
-                <a:spcPts val="2080"/>
+                <a:spcPct val="125000"/>
               </a:lnSpc>
               <a:spcBef>
                 <a:spcPts val="800"/>
@@ -10372,7 +10350,7 @@
           <a:p>
             <a:pPr algn="l">
               <a:lnSpc>
-                <a:spcPts val="1820"/>
+                <a:spcPct val="125000"/>
               </a:lnSpc>
               <a:spcBef>
                 <a:spcPts val="200"/>
@@ -10483,11 +10461,10 @@
             <a:spAutoFit/>
           </a:bodyPr>
           <a:lstStyle/>
-          <a:p/>
-          <a:p>
-            <a:pPr algn="l">
-              <a:lnSpc>
-                <a:spcPts val="2080"/>
+          <a:p>
+            <a:pPr algn="l">
+              <a:lnSpc>
+                <a:spcPct val="125000"/>
               </a:lnSpc>
               <a:spcBef>
                 <a:spcPts val="0"/>
@@ -10509,7 +10486,7 @@
           <a:p>
             <a:pPr algn="l">
               <a:lnSpc>
-                <a:spcPts val="2080"/>
+                <a:spcPct val="125000"/>
               </a:lnSpc>
               <a:spcBef>
                 <a:spcPts val="800"/>
@@ -10531,7 +10508,7 @@
           <a:p>
             <a:pPr algn="l">
               <a:lnSpc>
-                <a:spcPts val="1820"/>
+                <a:spcPct val="125000"/>
               </a:lnSpc>
               <a:spcBef>
                 <a:spcPts val="200"/>
@@ -10553,7 +10530,7 @@
           <a:p>
             <a:pPr algn="l">
               <a:lnSpc>
-                <a:spcPts val="2080"/>
+                <a:spcPct val="125000"/>
               </a:lnSpc>
               <a:spcBef>
                 <a:spcPts val="800"/>
@@ -10575,7 +10552,7 @@
           <a:p>
             <a:pPr algn="l">
               <a:lnSpc>
-                <a:spcPts val="1820"/>
+                <a:spcPct val="125000"/>
               </a:lnSpc>
               <a:spcBef>
                 <a:spcPts val="200"/>
@@ -10597,7 +10574,7 @@
           <a:p>
             <a:pPr algn="l">
               <a:lnSpc>
-                <a:spcPts val="1820"/>
+                <a:spcPct val="125000"/>
               </a:lnSpc>
               <a:spcBef>
                 <a:spcPts val="200"/>
@@ -10619,7 +10596,7 @@
           <a:p>
             <a:pPr algn="l">
               <a:lnSpc>
-                <a:spcPts val="2080"/>
+                <a:spcPct val="125000"/>
               </a:lnSpc>
               <a:spcBef>
                 <a:spcPts val="800"/>
@@ -10641,7 +10618,7 @@
           <a:p>
             <a:pPr algn="l">
               <a:lnSpc>
-                <a:spcPts val="1820"/>
+                <a:spcPct val="125000"/>
               </a:lnSpc>
               <a:spcBef>
                 <a:spcPts val="200"/>
@@ -10663,7 +10640,7 @@
           <a:p>
             <a:pPr algn="l">
               <a:lnSpc>
-                <a:spcPts val="2080"/>
+                <a:spcPct val="125000"/>
               </a:lnSpc>
               <a:spcBef>
                 <a:spcPts val="800"/>
@@ -10685,7 +10662,7 @@
           <a:p>
             <a:pPr algn="l">
               <a:lnSpc>
-                <a:spcPts val="1820"/>
+                <a:spcPct val="125000"/>
               </a:lnSpc>
               <a:spcBef>
                 <a:spcPts val="200"/>
@@ -10796,11 +10773,10 @@
             <a:spAutoFit/>
           </a:bodyPr>
           <a:lstStyle/>
-          <a:p/>
-          <a:p>
-            <a:pPr algn="l">
-              <a:lnSpc>
-                <a:spcPts val="2080"/>
+          <a:p>
+            <a:pPr algn="l">
+              <a:lnSpc>
+                <a:spcPct val="125000"/>
               </a:lnSpc>
               <a:spcBef>
                 <a:spcPts val="0"/>
@@ -10822,7 +10798,7 @@
           <a:p>
             <a:pPr algn="l">
               <a:lnSpc>
-                <a:spcPts val="2080"/>
+                <a:spcPct val="125000"/>
               </a:lnSpc>
               <a:spcBef>
                 <a:spcPts val="800"/>
@@ -10844,7 +10820,7 @@
           <a:p>
             <a:pPr algn="l">
               <a:lnSpc>
-                <a:spcPts val="1820"/>
+                <a:spcPct val="125000"/>
               </a:lnSpc>
               <a:spcBef>
                 <a:spcPts val="200"/>
@@ -10866,7 +10842,7 @@
           <a:p>
             <a:pPr algn="l">
               <a:lnSpc>
-                <a:spcPts val="2080"/>
+                <a:spcPct val="125000"/>
               </a:lnSpc>
               <a:spcBef>
                 <a:spcPts val="800"/>
@@ -10888,7 +10864,7 @@
           <a:p>
             <a:pPr algn="l">
               <a:lnSpc>
-                <a:spcPts val="1820"/>
+                <a:spcPct val="125000"/>
               </a:lnSpc>
               <a:spcBef>
                 <a:spcPts val="200"/>
@@ -10910,7 +10886,7 @@
           <a:p>
             <a:pPr algn="l">
               <a:lnSpc>
-                <a:spcPts val="1820"/>
+                <a:spcPct val="125000"/>
               </a:lnSpc>
               <a:spcBef>
                 <a:spcPts val="200"/>
@@ -10932,7 +10908,7 @@
           <a:p>
             <a:pPr algn="l">
               <a:lnSpc>
-                <a:spcPts val="2080"/>
+                <a:spcPct val="125000"/>
               </a:lnSpc>
               <a:spcBef>
                 <a:spcPts val="800"/>
@@ -10954,7 +10930,7 @@
           <a:p>
             <a:pPr algn="l">
               <a:lnSpc>
-                <a:spcPts val="1820"/>
+                <a:spcPct val="125000"/>
               </a:lnSpc>
               <a:spcBef>
                 <a:spcPts val="200"/>
@@ -10976,7 +10952,7 @@
           <a:p>
             <a:pPr algn="l">
               <a:lnSpc>
-                <a:spcPts val="2080"/>
+                <a:spcPct val="125000"/>
               </a:lnSpc>
               <a:spcBef>
                 <a:spcPts val="800"/>
@@ -10998,7 +10974,7 @@
           <a:p>
             <a:pPr algn="l">
               <a:lnSpc>
-                <a:spcPts val="1820"/>
+                <a:spcPct val="125000"/>
               </a:lnSpc>
               <a:spcBef>
                 <a:spcPts val="200"/>
@@ -11109,11 +11085,10 @@
             <a:spAutoFit/>
           </a:bodyPr>
           <a:lstStyle/>
-          <a:p/>
-          <a:p>
-            <a:pPr algn="l">
-              <a:lnSpc>
-                <a:spcPts val="2080"/>
+          <a:p>
+            <a:pPr algn="l">
+              <a:lnSpc>
+                <a:spcPct val="125000"/>
               </a:lnSpc>
               <a:spcBef>
                 <a:spcPts val="0"/>
@@ -11135,7 +11110,7 @@
           <a:p>
             <a:pPr algn="l">
               <a:lnSpc>
-                <a:spcPts val="2080"/>
+                <a:spcPct val="125000"/>
               </a:lnSpc>
               <a:spcBef>
                 <a:spcPts val="800"/>
@@ -11157,7 +11132,7 @@
           <a:p>
             <a:pPr algn="l">
               <a:lnSpc>
-                <a:spcPts val="1820"/>
+                <a:spcPct val="125000"/>
               </a:lnSpc>
               <a:spcBef>
                 <a:spcPts val="200"/>
@@ -11179,7 +11154,7 @@
           <a:p>
             <a:pPr algn="l">
               <a:lnSpc>
-                <a:spcPts val="2080"/>
+                <a:spcPct val="125000"/>
               </a:lnSpc>
               <a:spcBef>
                 <a:spcPts val="800"/>
@@ -11201,7 +11176,7 @@
           <a:p>
             <a:pPr algn="l">
               <a:lnSpc>
-                <a:spcPts val="1820"/>
+                <a:spcPct val="125000"/>
               </a:lnSpc>
               <a:spcBef>
                 <a:spcPts val="200"/>
@@ -11223,7 +11198,7 @@
           <a:p>
             <a:pPr algn="l">
               <a:lnSpc>
-                <a:spcPts val="1820"/>
+                <a:spcPct val="125000"/>
               </a:lnSpc>
               <a:spcBef>
                 <a:spcPts val="200"/>
@@ -11245,7 +11220,7 @@
           <a:p>
             <a:pPr algn="l">
               <a:lnSpc>
-                <a:spcPts val="2080"/>
+                <a:spcPct val="125000"/>
               </a:lnSpc>
               <a:spcBef>
                 <a:spcPts val="800"/>
@@ -11267,7 +11242,7 @@
           <a:p>
             <a:pPr algn="l">
               <a:lnSpc>
-                <a:spcPts val="1820"/>
+                <a:spcPct val="125000"/>
               </a:lnSpc>
               <a:spcBef>
                 <a:spcPts val="200"/>
@@ -11289,7 +11264,7 @@
           <a:p>
             <a:pPr algn="l">
               <a:lnSpc>
-                <a:spcPts val="2080"/>
+                <a:spcPct val="125000"/>
               </a:lnSpc>
               <a:spcBef>
                 <a:spcPts val="800"/>
@@ -11311,7 +11286,7 @@
           <a:p>
             <a:pPr algn="l">
               <a:lnSpc>
-                <a:spcPts val="1820"/>
+                <a:spcPct val="125000"/>
               </a:lnSpc>
               <a:spcBef>
                 <a:spcPts val="200"/>
@@ -11422,11 +11397,10 @@
             <a:spAutoFit/>
           </a:bodyPr>
           <a:lstStyle/>
-          <a:p/>
-          <a:p>
-            <a:pPr algn="l">
-              <a:lnSpc>
-                <a:spcPts val="2080"/>
+          <a:p>
+            <a:pPr algn="l">
+              <a:lnSpc>
+                <a:spcPct val="125000"/>
               </a:lnSpc>
               <a:spcBef>
                 <a:spcPts val="0"/>
@@ -11448,7 +11422,7 @@
           <a:p>
             <a:pPr algn="l">
               <a:lnSpc>
-                <a:spcPts val="2080"/>
+                <a:spcPct val="125000"/>
               </a:lnSpc>
               <a:spcBef>
                 <a:spcPts val="800"/>
@@ -11470,7 +11444,7 @@
           <a:p>
             <a:pPr algn="l">
               <a:lnSpc>
-                <a:spcPts val="1820"/>
+                <a:spcPct val="125000"/>
               </a:lnSpc>
               <a:spcBef>
                 <a:spcPts val="200"/>
@@ -11492,7 +11466,7 @@
           <a:p>
             <a:pPr algn="l">
               <a:lnSpc>
-                <a:spcPts val="2080"/>
+                <a:spcPct val="125000"/>
               </a:lnSpc>
               <a:spcBef>
                 <a:spcPts val="800"/>
@@ -11514,7 +11488,7 @@
           <a:p>
             <a:pPr algn="l">
               <a:lnSpc>
-                <a:spcPts val="1820"/>
+                <a:spcPct val="125000"/>
               </a:lnSpc>
               <a:spcBef>
                 <a:spcPts val="200"/>
@@ -11536,7 +11510,7 @@
           <a:p>
             <a:pPr algn="l">
               <a:lnSpc>
-                <a:spcPts val="1820"/>
+                <a:spcPct val="125000"/>
               </a:lnSpc>
               <a:spcBef>
                 <a:spcPts val="200"/>
@@ -11558,7 +11532,7 @@
           <a:p>
             <a:pPr algn="l">
               <a:lnSpc>
-                <a:spcPts val="1820"/>
+                <a:spcPct val="125000"/>
               </a:lnSpc>
               <a:spcBef>
                 <a:spcPts val="200"/>
@@ -11580,7 +11554,7 @@
           <a:p>
             <a:pPr algn="l">
               <a:lnSpc>
-                <a:spcPts val="2080"/>
+                <a:spcPct val="125000"/>
               </a:lnSpc>
               <a:spcBef>
                 <a:spcPts val="800"/>
@@ -11602,7 +11576,7 @@
           <a:p>
             <a:pPr algn="l">
               <a:lnSpc>
-                <a:spcPts val="1820"/>
+                <a:spcPct val="125000"/>
               </a:lnSpc>
               <a:spcBef>
                 <a:spcPts val="200"/>
@@ -11624,7 +11598,7 @@
           <a:p>
             <a:pPr algn="l">
               <a:lnSpc>
-                <a:spcPts val="2080"/>
+                <a:spcPct val="125000"/>
               </a:lnSpc>
               <a:spcBef>
                 <a:spcPts val="800"/>
@@ -11646,7 +11620,7 @@
           <a:p>
             <a:pPr algn="l">
               <a:lnSpc>
-                <a:spcPts val="1820"/>
+                <a:spcPct val="125000"/>
               </a:lnSpc>
               <a:spcBef>
                 <a:spcPts val="200"/>
@@ -11757,11 +11731,10 @@
             <a:spAutoFit/>
           </a:bodyPr>
           <a:lstStyle/>
-          <a:p/>
-          <a:p>
-            <a:pPr algn="l">
-              <a:lnSpc>
-                <a:spcPts val="2080"/>
+          <a:p>
+            <a:pPr algn="l">
+              <a:lnSpc>
+                <a:spcPct val="125000"/>
               </a:lnSpc>
               <a:spcBef>
                 <a:spcPts val="0"/>
@@ -11783,7 +11756,7 @@
           <a:p>
             <a:pPr algn="l">
               <a:lnSpc>
-                <a:spcPts val="2080"/>
+                <a:spcPct val="125000"/>
               </a:lnSpc>
               <a:spcBef>
                 <a:spcPts val="800"/>
@@ -11805,7 +11778,7 @@
           <a:p>
             <a:pPr algn="l">
               <a:lnSpc>
-                <a:spcPts val="1820"/>
+                <a:spcPct val="125000"/>
               </a:lnSpc>
               <a:spcBef>
                 <a:spcPts val="200"/>
@@ -11827,7 +11800,7 @@
           <a:p>
             <a:pPr algn="l">
               <a:lnSpc>
-                <a:spcPts val="2080"/>
+                <a:spcPct val="125000"/>
               </a:lnSpc>
               <a:spcBef>
                 <a:spcPts val="800"/>
@@ -11849,7 +11822,7 @@
           <a:p>
             <a:pPr algn="l">
               <a:lnSpc>
-                <a:spcPts val="1820"/>
+                <a:spcPct val="125000"/>
               </a:lnSpc>
               <a:spcBef>
                 <a:spcPts val="200"/>
@@ -11871,7 +11844,7 @@
           <a:p>
             <a:pPr algn="l">
               <a:lnSpc>
-                <a:spcPts val="1820"/>
+                <a:spcPct val="125000"/>
               </a:lnSpc>
               <a:spcBef>
                 <a:spcPts val="200"/>
@@ -11893,7 +11866,7 @@
           <a:p>
             <a:pPr algn="l">
               <a:lnSpc>
-                <a:spcPts val="2080"/>
+                <a:spcPct val="125000"/>
               </a:lnSpc>
               <a:spcBef>
                 <a:spcPts val="800"/>
@@ -11915,7 +11888,7 @@
           <a:p>
             <a:pPr algn="l">
               <a:lnSpc>
-                <a:spcPts val="1820"/>
+                <a:spcPct val="125000"/>
               </a:lnSpc>
               <a:spcBef>
                 <a:spcPts val="200"/>
@@ -11937,7 +11910,7 @@
           <a:p>
             <a:pPr algn="l">
               <a:lnSpc>
-                <a:spcPts val="2080"/>
+                <a:spcPct val="125000"/>
               </a:lnSpc>
               <a:spcBef>
                 <a:spcPts val="800"/>
@@ -11959,7 +11932,7 @@
           <a:p>
             <a:pPr algn="l">
               <a:lnSpc>
-                <a:spcPts val="1820"/>
+                <a:spcPct val="125000"/>
               </a:lnSpc>
               <a:spcBef>
                 <a:spcPts val="200"/>
@@ -12070,11 +12043,10 @@
             <a:spAutoFit/>
           </a:bodyPr>
           <a:lstStyle/>
-          <a:p/>
-          <a:p>
-            <a:pPr algn="l">
-              <a:lnSpc>
-                <a:spcPts val="2080"/>
+          <a:p>
+            <a:pPr algn="l">
+              <a:lnSpc>
+                <a:spcPct val="125000"/>
               </a:lnSpc>
               <a:spcBef>
                 <a:spcPts val="0"/>
@@ -12096,7 +12068,7 @@
           <a:p>
             <a:pPr algn="l">
               <a:lnSpc>
-                <a:spcPts val="2080"/>
+                <a:spcPct val="125000"/>
               </a:lnSpc>
               <a:spcBef>
                 <a:spcPts val="800"/>
@@ -12118,7 +12090,7 @@
           <a:p>
             <a:pPr algn="l">
               <a:lnSpc>
-                <a:spcPts val="1820"/>
+                <a:spcPct val="125000"/>
               </a:lnSpc>
               <a:spcBef>
                 <a:spcPts val="200"/>
@@ -12140,7 +12112,7 @@
           <a:p>
             <a:pPr algn="l">
               <a:lnSpc>
-                <a:spcPts val="2080"/>
+                <a:spcPct val="125000"/>
               </a:lnSpc>
               <a:spcBef>
                 <a:spcPts val="800"/>
@@ -12162,7 +12134,7 @@
           <a:p>
             <a:pPr algn="l">
               <a:lnSpc>
-                <a:spcPts val="1820"/>
+                <a:spcPct val="125000"/>
               </a:lnSpc>
               <a:spcBef>
                 <a:spcPts val="200"/>
@@ -12184,7 +12156,7 @@
           <a:p>
             <a:pPr algn="l">
               <a:lnSpc>
-                <a:spcPts val="2080"/>
+                <a:spcPct val="125000"/>
               </a:lnSpc>
               <a:spcBef>
                 <a:spcPts val="800"/>
@@ -12206,7 +12178,7 @@
           <a:p>
             <a:pPr algn="l">
               <a:lnSpc>
-                <a:spcPts val="1820"/>
+                <a:spcPct val="125000"/>
               </a:lnSpc>
               <a:spcBef>
                 <a:spcPts val="200"/>
@@ -12228,7 +12200,7 @@
           <a:p>
             <a:pPr algn="l">
               <a:lnSpc>
-                <a:spcPts val="2080"/>
+                <a:spcPct val="125000"/>
               </a:lnSpc>
               <a:spcBef>
                 <a:spcPts val="800"/>
@@ -12250,7 +12222,7 @@
           <a:p>
             <a:pPr algn="l">
               <a:lnSpc>
-                <a:spcPts val="1820"/>
+                <a:spcPct val="125000"/>
               </a:lnSpc>
               <a:spcBef>
                 <a:spcPts val="200"/>
@@ -12361,11 +12333,10 @@
             <a:spAutoFit/>
           </a:bodyPr>
           <a:lstStyle/>
-          <a:p/>
-          <a:p>
-            <a:pPr algn="l">
-              <a:lnSpc>
-                <a:spcPts val="2080"/>
+          <a:p>
+            <a:pPr algn="l">
+              <a:lnSpc>
+                <a:spcPct val="125000"/>
               </a:lnSpc>
               <a:spcBef>
                 <a:spcPts val="0"/>
@@ -12387,7 +12358,7 @@
           <a:p>
             <a:pPr algn="l">
               <a:lnSpc>
-                <a:spcPts val="2080"/>
+                <a:spcPct val="125000"/>
               </a:lnSpc>
               <a:spcBef>
                 <a:spcPts val="800"/>
@@ -12409,7 +12380,7 @@
           <a:p>
             <a:pPr algn="l">
               <a:lnSpc>
-                <a:spcPts val="1820"/>
+                <a:spcPct val="125000"/>
               </a:lnSpc>
               <a:spcBef>
                 <a:spcPts val="200"/>
@@ -12431,7 +12402,7 @@
           <a:p>
             <a:pPr algn="l">
               <a:lnSpc>
-                <a:spcPts val="2080"/>
+                <a:spcPct val="125000"/>
               </a:lnSpc>
               <a:spcBef>
                 <a:spcPts val="800"/>
@@ -12453,7 +12424,7 @@
           <a:p>
             <a:pPr algn="l">
               <a:lnSpc>
-                <a:spcPts val="1820"/>
+                <a:spcPct val="125000"/>
               </a:lnSpc>
               <a:spcBef>
                 <a:spcPts val="200"/>
@@ -12475,7 +12446,7 @@
           <a:p>
             <a:pPr algn="l">
               <a:lnSpc>
-                <a:spcPts val="2080"/>
+                <a:spcPct val="125000"/>
               </a:lnSpc>
               <a:spcBef>
                 <a:spcPts val="800"/>
@@ -12497,7 +12468,7 @@
           <a:p>
             <a:pPr algn="l">
               <a:lnSpc>
-                <a:spcPts val="1820"/>
+                <a:spcPct val="125000"/>
               </a:lnSpc>
               <a:spcBef>
                 <a:spcPts val="200"/>
@@ -12519,7 +12490,7 @@
           <a:p>
             <a:pPr algn="l">
               <a:lnSpc>
-                <a:spcPts val="2080"/>
+                <a:spcPct val="125000"/>
               </a:lnSpc>
               <a:spcBef>
                 <a:spcPts val="800"/>
@@ -12541,7 +12512,7 @@
           <a:p>
             <a:pPr algn="l">
               <a:lnSpc>
-                <a:spcPts val="1820"/>
+                <a:spcPct val="125000"/>
               </a:lnSpc>
               <a:spcBef>
                 <a:spcPts val="200"/>
@@ -12652,11 +12623,10 @@
             <a:spAutoFit/>
           </a:bodyPr>
           <a:lstStyle/>
-          <a:p/>
-          <a:p>
-            <a:pPr algn="l">
-              <a:lnSpc>
-                <a:spcPts val="2080"/>
+          <a:p>
+            <a:pPr algn="l">
+              <a:lnSpc>
+                <a:spcPct val="125000"/>
               </a:lnSpc>
               <a:spcBef>
                 <a:spcPts val="0"/>
@@ -12678,7 +12648,7 @@
           <a:p>
             <a:pPr algn="l">
               <a:lnSpc>
-                <a:spcPts val="2080"/>
+                <a:spcPct val="125000"/>
               </a:lnSpc>
               <a:spcBef>
                 <a:spcPts val="800"/>
@@ -12700,7 +12670,7 @@
           <a:p>
             <a:pPr algn="l">
               <a:lnSpc>
-                <a:spcPts val="1820"/>
+                <a:spcPct val="125000"/>
               </a:lnSpc>
               <a:spcBef>
                 <a:spcPts val="200"/>
@@ -12722,7 +12692,7 @@
           <a:p>
             <a:pPr algn="l">
               <a:lnSpc>
-                <a:spcPts val="2080"/>
+                <a:spcPct val="125000"/>
               </a:lnSpc>
               <a:spcBef>
                 <a:spcPts val="800"/>
@@ -12744,7 +12714,7 @@
           <a:p>
             <a:pPr algn="l">
               <a:lnSpc>
-                <a:spcPts val="1820"/>
+                <a:spcPct val="125000"/>
               </a:lnSpc>
               <a:spcBef>
                 <a:spcPts val="200"/>
@@ -12766,7 +12736,7 @@
           <a:p>
             <a:pPr algn="l">
               <a:lnSpc>
-                <a:spcPts val="1820"/>
+                <a:spcPct val="125000"/>
               </a:lnSpc>
               <a:spcBef>
                 <a:spcPts val="200"/>
@@ -12788,7 +12758,7 @@
           <a:p>
             <a:pPr algn="l">
               <a:lnSpc>
-                <a:spcPts val="1820"/>
+                <a:spcPct val="125000"/>
               </a:lnSpc>
               <a:spcBef>
                 <a:spcPts val="200"/>
@@ -12810,7 +12780,7 @@
           <a:p>
             <a:pPr algn="l">
               <a:lnSpc>
-                <a:spcPts val="2080"/>
+                <a:spcPct val="125000"/>
               </a:lnSpc>
               <a:spcBef>
                 <a:spcPts val="800"/>
@@ -12832,7 +12802,7 @@
           <a:p>
             <a:pPr algn="l">
               <a:lnSpc>
-                <a:spcPts val="1820"/>
+                <a:spcPct val="125000"/>
               </a:lnSpc>
               <a:spcBef>
                 <a:spcPts val="200"/>
@@ -12854,7 +12824,7 @@
           <a:p>
             <a:pPr algn="l">
               <a:lnSpc>
-                <a:spcPts val="2080"/>
+                <a:spcPct val="125000"/>
               </a:lnSpc>
               <a:spcBef>
                 <a:spcPts val="800"/>
@@ -12876,7 +12846,7 @@
           <a:p>
             <a:pPr algn="l">
               <a:lnSpc>
-                <a:spcPts val="1820"/>
+                <a:spcPct val="125000"/>
               </a:lnSpc>
               <a:spcBef>
                 <a:spcPts val="200"/>
@@ -12987,11 +12957,10 @@
             <a:spAutoFit/>
           </a:bodyPr>
           <a:lstStyle/>
-          <a:p/>
-          <a:p>
-            <a:pPr algn="l">
-              <a:lnSpc>
-                <a:spcPts val="2080"/>
+          <a:p>
+            <a:pPr algn="l">
+              <a:lnSpc>
+                <a:spcPct val="125000"/>
               </a:lnSpc>
               <a:spcBef>
                 <a:spcPts val="0"/>
@@ -13013,7 +12982,7 @@
           <a:p>
             <a:pPr algn="l">
               <a:lnSpc>
-                <a:spcPts val="2080"/>
+                <a:spcPct val="125000"/>
               </a:lnSpc>
               <a:spcBef>
                 <a:spcPts val="800"/>
@@ -13035,7 +13004,7 @@
           <a:p>
             <a:pPr algn="l">
               <a:lnSpc>
-                <a:spcPts val="1820"/>
+                <a:spcPct val="125000"/>
               </a:lnSpc>
               <a:spcBef>
                 <a:spcPts val="200"/>
@@ -13057,7 +13026,7 @@
           <a:p>
             <a:pPr algn="l">
               <a:lnSpc>
-                <a:spcPts val="2080"/>
+                <a:spcPct val="125000"/>
               </a:lnSpc>
               <a:spcBef>
                 <a:spcPts val="800"/>
@@ -13079,7 +13048,7 @@
           <a:p>
             <a:pPr algn="l">
               <a:lnSpc>
-                <a:spcPts val="1820"/>
+                <a:spcPct val="125000"/>
               </a:lnSpc>
               <a:spcBef>
                 <a:spcPts val="200"/>
@@ -13101,7 +13070,7 @@
           <a:p>
             <a:pPr algn="l">
               <a:lnSpc>
-                <a:spcPts val="1820"/>
+                <a:spcPct val="125000"/>
               </a:lnSpc>
               <a:spcBef>
                 <a:spcPts val="200"/>
@@ -13123,7 +13092,7 @@
           <a:p>
             <a:pPr algn="l">
               <a:lnSpc>
-                <a:spcPts val="1820"/>
+                <a:spcPct val="125000"/>
               </a:lnSpc>
               <a:spcBef>
                 <a:spcPts val="200"/>
@@ -13145,7 +13114,7 @@
           <a:p>
             <a:pPr algn="l">
               <a:lnSpc>
-                <a:spcPts val="1820"/>
+                <a:spcPct val="125000"/>
               </a:lnSpc>
               <a:spcBef>
                 <a:spcPts val="200"/>
@@ -13167,7 +13136,7 @@
           <a:p>
             <a:pPr algn="l">
               <a:lnSpc>
-                <a:spcPts val="2080"/>
+                <a:spcPct val="125000"/>
               </a:lnSpc>
               <a:spcBef>
                 <a:spcPts val="800"/>
@@ -13189,7 +13158,7 @@
           <a:p>
             <a:pPr algn="l">
               <a:lnSpc>
-                <a:spcPts val="1820"/>
+                <a:spcPct val="125000"/>
               </a:lnSpc>
               <a:spcBef>
                 <a:spcPts val="200"/>
@@ -13211,7 +13180,7 @@
           <a:p>
             <a:pPr algn="l">
               <a:lnSpc>
-                <a:spcPts val="2080"/>
+                <a:spcPct val="125000"/>
               </a:lnSpc>
               <a:spcBef>
                 <a:spcPts val="800"/>
@@ -13233,7 +13202,7 @@
           <a:p>
             <a:pPr algn="l">
               <a:lnSpc>
-                <a:spcPts val="1820"/>
+                <a:spcPct val="125000"/>
               </a:lnSpc>
               <a:spcBef>
                 <a:spcPts val="200"/>
@@ -13344,11 +13313,10 @@
             <a:spAutoFit/>
           </a:bodyPr>
           <a:lstStyle/>
-          <a:p/>
-          <a:p>
-            <a:pPr algn="l">
-              <a:lnSpc>
-                <a:spcPts val="2080"/>
+          <a:p>
+            <a:pPr algn="l">
+              <a:lnSpc>
+                <a:spcPct val="125000"/>
               </a:lnSpc>
               <a:spcBef>
                 <a:spcPts val="0"/>
@@ -13370,7 +13338,7 @@
           <a:p>
             <a:pPr algn="l">
               <a:lnSpc>
-                <a:spcPts val="2080"/>
+                <a:spcPct val="125000"/>
               </a:lnSpc>
               <a:spcBef>
                 <a:spcPts val="800"/>
@@ -13392,7 +13360,7 @@
           <a:p>
             <a:pPr algn="l">
               <a:lnSpc>
-                <a:spcPts val="1820"/>
+                <a:spcPct val="125000"/>
               </a:lnSpc>
               <a:spcBef>
                 <a:spcPts val="200"/>
@@ -13414,7 +13382,7 @@
           <a:p>
             <a:pPr algn="l">
               <a:lnSpc>
-                <a:spcPts val="2080"/>
+                <a:spcPct val="125000"/>
               </a:lnSpc>
               <a:spcBef>
                 <a:spcPts val="800"/>
@@ -13436,7 +13404,7 @@
           <a:p>
             <a:pPr algn="l">
               <a:lnSpc>
-                <a:spcPts val="1820"/>
+                <a:spcPct val="125000"/>
               </a:lnSpc>
               <a:spcBef>
                 <a:spcPts val="200"/>
@@ -13458,7 +13426,7 @@
           <a:p>
             <a:pPr algn="l">
               <a:lnSpc>
-                <a:spcPts val="1820"/>
+                <a:spcPct val="125000"/>
               </a:lnSpc>
               <a:spcBef>
                 <a:spcPts val="200"/>
@@ -13480,7 +13448,7 @@
           <a:p>
             <a:pPr algn="l">
               <a:lnSpc>
-                <a:spcPts val="2080"/>
+                <a:spcPct val="125000"/>
               </a:lnSpc>
               <a:spcBef>
                 <a:spcPts val="800"/>
@@ -13502,7 +13470,7 @@
           <a:p>
             <a:pPr algn="l">
               <a:lnSpc>
-                <a:spcPts val="1820"/>
+                <a:spcPct val="125000"/>
               </a:lnSpc>
               <a:spcBef>
                 <a:spcPts val="200"/>
@@ -13524,7 +13492,7 @@
           <a:p>
             <a:pPr algn="l">
               <a:lnSpc>
-                <a:spcPts val="2080"/>
+                <a:spcPct val="125000"/>
               </a:lnSpc>
               <a:spcBef>
                 <a:spcPts val="800"/>
@@ -13546,7 +13514,7 @@
           <a:p>
             <a:pPr algn="l">
               <a:lnSpc>
-                <a:spcPts val="1820"/>
+                <a:spcPct val="125000"/>
               </a:lnSpc>
               <a:spcBef>
                 <a:spcPts val="200"/>
@@ -13657,11 +13625,10 @@
             <a:spAutoFit/>
           </a:bodyPr>
           <a:lstStyle/>
-          <a:p/>
-          <a:p>
-            <a:pPr algn="l">
-              <a:lnSpc>
-                <a:spcPts val="2080"/>
+          <a:p>
+            <a:pPr algn="l">
+              <a:lnSpc>
+                <a:spcPct val="125000"/>
               </a:lnSpc>
               <a:spcBef>
                 <a:spcPts val="0"/>
@@ -13683,7 +13650,7 @@
           <a:p>
             <a:pPr algn="l">
               <a:lnSpc>
-                <a:spcPts val="2080"/>
+                <a:spcPct val="125000"/>
               </a:lnSpc>
               <a:spcBef>
                 <a:spcPts val="800"/>
@@ -13705,7 +13672,7 @@
           <a:p>
             <a:pPr algn="l">
               <a:lnSpc>
-                <a:spcPts val="1820"/>
+                <a:spcPct val="125000"/>
               </a:lnSpc>
               <a:spcBef>
                 <a:spcPts val="200"/>
@@ -13727,7 +13694,7 @@
           <a:p>
             <a:pPr algn="l">
               <a:lnSpc>
-                <a:spcPts val="2080"/>
+                <a:spcPct val="125000"/>
               </a:lnSpc>
               <a:spcBef>
                 <a:spcPts val="800"/>
@@ -13749,7 +13716,7 @@
           <a:p>
             <a:pPr algn="l">
               <a:lnSpc>
-                <a:spcPts val="1820"/>
+                <a:spcPct val="125000"/>
               </a:lnSpc>
               <a:spcBef>
                 <a:spcPts val="200"/>
@@ -13771,7 +13738,7 @@
           <a:p>
             <a:pPr algn="l">
               <a:lnSpc>
-                <a:spcPts val="2080"/>
+                <a:spcPct val="125000"/>
               </a:lnSpc>
               <a:spcBef>
                 <a:spcPts val="800"/>
@@ -13793,7 +13760,7 @@
           <a:p>
             <a:pPr algn="l">
               <a:lnSpc>
-                <a:spcPts val="1820"/>
+                <a:spcPct val="125000"/>
               </a:lnSpc>
               <a:spcBef>
                 <a:spcPts val="200"/>
@@ -13815,7 +13782,7 @@
           <a:p>
             <a:pPr algn="l">
               <a:lnSpc>
-                <a:spcPts val="2080"/>
+                <a:spcPct val="125000"/>
               </a:lnSpc>
               <a:spcBef>
                 <a:spcPts val="800"/>
@@ -13837,7 +13804,7 @@
           <a:p>
             <a:pPr algn="l">
               <a:lnSpc>
-                <a:spcPts val="1820"/>
+                <a:spcPct val="125000"/>
               </a:lnSpc>
               <a:spcBef>
                 <a:spcPts val="200"/>
@@ -13948,11 +13915,10 @@
             <a:spAutoFit/>
           </a:bodyPr>
           <a:lstStyle/>
-          <a:p/>
-          <a:p>
-            <a:pPr algn="l">
-              <a:lnSpc>
-                <a:spcPts val="2080"/>
+          <a:p>
+            <a:pPr algn="l">
+              <a:lnSpc>
+                <a:spcPct val="125000"/>
               </a:lnSpc>
               <a:spcBef>
                 <a:spcPts val="0"/>
@@ -13974,7 +13940,7 @@
           <a:p>
             <a:pPr algn="l">
               <a:lnSpc>
-                <a:spcPts val="2080"/>
+                <a:spcPct val="125000"/>
               </a:lnSpc>
               <a:spcBef>
                 <a:spcPts val="800"/>
@@ -13996,7 +13962,7 @@
           <a:p>
             <a:pPr algn="l">
               <a:lnSpc>
-                <a:spcPts val="1820"/>
+                <a:spcPct val="125000"/>
               </a:lnSpc>
               <a:spcBef>
                 <a:spcPts val="200"/>
@@ -14018,7 +13984,7 @@
           <a:p>
             <a:pPr algn="l">
               <a:lnSpc>
-                <a:spcPts val="2080"/>
+                <a:spcPct val="125000"/>
               </a:lnSpc>
               <a:spcBef>
                 <a:spcPts val="800"/>
@@ -14040,7 +14006,7 @@
           <a:p>
             <a:pPr algn="l">
               <a:lnSpc>
-                <a:spcPts val="1820"/>
+                <a:spcPct val="125000"/>
               </a:lnSpc>
               <a:spcBef>
                 <a:spcPts val="200"/>
@@ -14062,7 +14028,7 @@
           <a:p>
             <a:pPr algn="l">
               <a:lnSpc>
-                <a:spcPts val="2080"/>
+                <a:spcPct val="125000"/>
               </a:lnSpc>
               <a:spcBef>
                 <a:spcPts val="800"/>
@@ -14084,7 +14050,7 @@
           <a:p>
             <a:pPr algn="l">
               <a:lnSpc>
-                <a:spcPts val="1820"/>
+                <a:spcPct val="125000"/>
               </a:lnSpc>
               <a:spcBef>
                 <a:spcPts val="200"/>
@@ -14106,7 +14072,7 @@
           <a:p>
             <a:pPr algn="l">
               <a:lnSpc>
-                <a:spcPts val="2080"/>
+                <a:spcPct val="125000"/>
               </a:lnSpc>
               <a:spcBef>
                 <a:spcPts val="800"/>
@@ -14128,7 +14094,7 @@
           <a:p>
             <a:pPr algn="l">
               <a:lnSpc>
-                <a:spcPts val="1820"/>
+                <a:spcPct val="125000"/>
               </a:lnSpc>
               <a:spcBef>
                 <a:spcPts val="200"/>
@@ -14239,11 +14205,10 @@
             <a:spAutoFit/>
           </a:bodyPr>
           <a:lstStyle/>
-          <a:p/>
-          <a:p>
-            <a:pPr algn="l">
-              <a:lnSpc>
-                <a:spcPts val="2080"/>
+          <a:p>
+            <a:pPr algn="l">
+              <a:lnSpc>
+                <a:spcPct val="125000"/>
               </a:lnSpc>
               <a:spcBef>
                 <a:spcPts val="0"/>
@@ -14265,7 +14230,7 @@
           <a:p>
             <a:pPr algn="l">
               <a:lnSpc>
-                <a:spcPts val="2080"/>
+                <a:spcPct val="125000"/>
               </a:lnSpc>
               <a:spcBef>
                 <a:spcPts val="800"/>
@@ -14287,7 +14252,7 @@
           <a:p>
             <a:pPr algn="l">
               <a:lnSpc>
-                <a:spcPts val="1820"/>
+                <a:spcPct val="125000"/>
               </a:lnSpc>
               <a:spcBef>
                 <a:spcPts val="200"/>
@@ -14309,7 +14274,7 @@
           <a:p>
             <a:pPr algn="l">
               <a:lnSpc>
-                <a:spcPts val="2080"/>
+                <a:spcPct val="125000"/>
               </a:lnSpc>
               <a:spcBef>
                 <a:spcPts val="800"/>
@@ -14331,7 +14296,7 @@
           <a:p>
             <a:pPr algn="l">
               <a:lnSpc>
-                <a:spcPts val="1820"/>
+                <a:spcPct val="125000"/>
               </a:lnSpc>
               <a:spcBef>
                 <a:spcPts val="200"/>
@@ -14353,7 +14318,7 @@
           <a:p>
             <a:pPr algn="l">
               <a:lnSpc>
-                <a:spcPts val="2080"/>
+                <a:spcPct val="125000"/>
               </a:lnSpc>
               <a:spcBef>
                 <a:spcPts val="800"/>
@@ -14375,7 +14340,7 @@
           <a:p>
             <a:pPr algn="l">
               <a:lnSpc>
-                <a:spcPts val="1820"/>
+                <a:spcPct val="125000"/>
               </a:lnSpc>
               <a:spcBef>
                 <a:spcPts val="200"/>
@@ -14397,7 +14362,7 @@
           <a:p>
             <a:pPr algn="l">
               <a:lnSpc>
-                <a:spcPts val="2080"/>
+                <a:spcPct val="125000"/>
               </a:lnSpc>
               <a:spcBef>
                 <a:spcPts val="800"/>
@@ -14419,7 +14384,7 @@
           <a:p>
             <a:pPr algn="l">
               <a:lnSpc>
-                <a:spcPts val="1820"/>
+                <a:spcPct val="125000"/>
               </a:lnSpc>
               <a:spcBef>
                 <a:spcPts val="200"/>
@@ -14530,11 +14495,10 @@
             <a:spAutoFit/>
           </a:bodyPr>
           <a:lstStyle/>
-          <a:p/>
-          <a:p>
-            <a:pPr algn="l">
-              <a:lnSpc>
-                <a:spcPts val="2080"/>
+          <a:p>
+            <a:pPr algn="l">
+              <a:lnSpc>
+                <a:spcPct val="125000"/>
               </a:lnSpc>
               <a:spcBef>
                 <a:spcPts val="0"/>
@@ -14556,7 +14520,7 @@
           <a:p>
             <a:pPr algn="l">
               <a:lnSpc>
-                <a:spcPts val="2080"/>
+                <a:spcPct val="125000"/>
               </a:lnSpc>
               <a:spcBef>
                 <a:spcPts val="800"/>
@@ -14578,7 +14542,7 @@
           <a:p>
             <a:pPr algn="l">
               <a:lnSpc>
-                <a:spcPts val="1820"/>
+                <a:spcPct val="125000"/>
               </a:lnSpc>
               <a:spcBef>
                 <a:spcPts val="200"/>
@@ -14600,7 +14564,7 @@
           <a:p>
             <a:pPr algn="l">
               <a:lnSpc>
-                <a:spcPts val="2080"/>
+                <a:spcPct val="125000"/>
               </a:lnSpc>
               <a:spcBef>
                 <a:spcPts val="800"/>
@@ -14622,7 +14586,7 @@
           <a:p>
             <a:pPr algn="l">
               <a:lnSpc>
-                <a:spcPts val="1820"/>
+                <a:spcPct val="125000"/>
               </a:lnSpc>
               <a:spcBef>
                 <a:spcPts val="200"/>
@@ -14644,7 +14608,7 @@
           <a:p>
             <a:pPr algn="l">
               <a:lnSpc>
-                <a:spcPts val="2080"/>
+                <a:spcPct val="125000"/>
               </a:lnSpc>
               <a:spcBef>
                 <a:spcPts val="800"/>
@@ -14666,7 +14630,7 @@
           <a:p>
             <a:pPr algn="l">
               <a:lnSpc>
-                <a:spcPts val="1820"/>
+                <a:spcPct val="125000"/>
               </a:lnSpc>
               <a:spcBef>
                 <a:spcPts val="200"/>
@@ -14688,7 +14652,7 @@
           <a:p>
             <a:pPr algn="l">
               <a:lnSpc>
-                <a:spcPts val="2080"/>
+                <a:spcPct val="125000"/>
               </a:lnSpc>
               <a:spcBef>
                 <a:spcPts val="800"/>
@@ -14710,7 +14674,7 @@
           <a:p>
             <a:pPr algn="l">
               <a:lnSpc>
-                <a:spcPts val="1820"/>
+                <a:spcPct val="125000"/>
               </a:lnSpc>
               <a:spcBef>
                 <a:spcPts val="200"/>
@@ -14821,11 +14785,10 @@
             <a:spAutoFit/>
           </a:bodyPr>
           <a:lstStyle/>
-          <a:p/>
-          <a:p>
-            <a:pPr algn="l">
-              <a:lnSpc>
-                <a:spcPts val="2080"/>
+          <a:p>
+            <a:pPr algn="l">
+              <a:lnSpc>
+                <a:spcPct val="125000"/>
               </a:lnSpc>
               <a:spcBef>
                 <a:spcPts val="0"/>
@@ -14847,7 +14810,7 @@
           <a:p>
             <a:pPr algn="l">
               <a:lnSpc>
-                <a:spcPts val="2080"/>
+                <a:spcPct val="125000"/>
               </a:lnSpc>
               <a:spcBef>
                 <a:spcPts val="800"/>
@@ -14869,7 +14832,7 @@
           <a:p>
             <a:pPr algn="l">
               <a:lnSpc>
-                <a:spcPts val="1820"/>
+                <a:spcPct val="125000"/>
               </a:lnSpc>
               <a:spcBef>
                 <a:spcPts val="200"/>
@@ -14891,7 +14854,7 @@
           <a:p>
             <a:pPr algn="l">
               <a:lnSpc>
-                <a:spcPts val="2080"/>
+                <a:spcPct val="125000"/>
               </a:lnSpc>
               <a:spcBef>
                 <a:spcPts val="800"/>
@@ -14913,7 +14876,7 @@
           <a:p>
             <a:pPr algn="l">
               <a:lnSpc>
-                <a:spcPts val="1820"/>
+                <a:spcPct val="125000"/>
               </a:lnSpc>
               <a:spcBef>
                 <a:spcPts val="200"/>
@@ -14935,7 +14898,7 @@
           <a:p>
             <a:pPr algn="l">
               <a:lnSpc>
-                <a:spcPts val="2080"/>
+                <a:spcPct val="125000"/>
               </a:lnSpc>
               <a:spcBef>
                 <a:spcPts val="800"/>
@@ -14957,7 +14920,7 @@
           <a:p>
             <a:pPr algn="l">
               <a:lnSpc>
-                <a:spcPts val="1820"/>
+                <a:spcPct val="125000"/>
               </a:lnSpc>
               <a:spcBef>
                 <a:spcPts val="200"/>
@@ -14979,7 +14942,7 @@
           <a:p>
             <a:pPr algn="l">
               <a:lnSpc>
-                <a:spcPts val="2080"/>
+                <a:spcPct val="125000"/>
               </a:lnSpc>
               <a:spcBef>
                 <a:spcPts val="800"/>
@@ -15001,7 +14964,7 @@
           <a:p>
             <a:pPr algn="l">
               <a:lnSpc>
-                <a:spcPts val="1820"/>
+                <a:spcPct val="125000"/>
               </a:lnSpc>
               <a:spcBef>
                 <a:spcPts val="200"/>
@@ -15112,11 +15075,10 @@
             <a:spAutoFit/>
           </a:bodyPr>
           <a:lstStyle/>
-          <a:p/>
-          <a:p>
-            <a:pPr algn="l">
-              <a:lnSpc>
-                <a:spcPts val="2080"/>
+          <a:p>
+            <a:pPr algn="l">
+              <a:lnSpc>
+                <a:spcPct val="125000"/>
               </a:lnSpc>
               <a:spcBef>
                 <a:spcPts val="0"/>
@@ -15138,7 +15100,7 @@
           <a:p>
             <a:pPr algn="l">
               <a:lnSpc>
-                <a:spcPts val="2080"/>
+                <a:spcPct val="125000"/>
               </a:lnSpc>
               <a:spcBef>
                 <a:spcPts val="800"/>
@@ -15160,7 +15122,7 @@
           <a:p>
             <a:pPr algn="l">
               <a:lnSpc>
-                <a:spcPts val="1820"/>
+                <a:spcPct val="125000"/>
               </a:lnSpc>
               <a:spcBef>
                 <a:spcPts val="200"/>
@@ -15182,7 +15144,7 @@
           <a:p>
             <a:pPr algn="l">
               <a:lnSpc>
-                <a:spcPts val="2080"/>
+                <a:spcPct val="125000"/>
               </a:lnSpc>
               <a:spcBef>
                 <a:spcPts val="800"/>
@@ -15204,7 +15166,7 @@
           <a:p>
             <a:pPr algn="l">
               <a:lnSpc>
-                <a:spcPts val="1820"/>
+                <a:spcPct val="125000"/>
               </a:lnSpc>
               <a:spcBef>
                 <a:spcPts val="200"/>
@@ -15226,7 +15188,7 @@
           <a:p>
             <a:pPr algn="l">
               <a:lnSpc>
-                <a:spcPts val="2080"/>
+                <a:spcPct val="125000"/>
               </a:lnSpc>
               <a:spcBef>
                 <a:spcPts val="800"/>
@@ -15248,7 +15210,7 @@
           <a:p>
             <a:pPr algn="l">
               <a:lnSpc>
-                <a:spcPts val="1820"/>
+                <a:spcPct val="125000"/>
               </a:lnSpc>
               <a:spcBef>
                 <a:spcPts val="200"/>
@@ -15270,7 +15232,7 @@
           <a:p>
             <a:pPr algn="l">
               <a:lnSpc>
-                <a:spcPts val="2080"/>
+                <a:spcPct val="125000"/>
               </a:lnSpc>
               <a:spcBef>
                 <a:spcPts val="800"/>
@@ -15292,7 +15254,7 @@
           <a:p>
             <a:pPr algn="l">
               <a:lnSpc>
-                <a:spcPts val="1820"/>
+                <a:spcPct val="125000"/>
               </a:lnSpc>
               <a:spcBef>
                 <a:spcPts val="200"/>
@@ -15403,11 +15365,10 @@
             <a:spAutoFit/>
           </a:bodyPr>
           <a:lstStyle/>
-          <a:p/>
-          <a:p>
-            <a:pPr algn="l">
-              <a:lnSpc>
-                <a:spcPts val="2080"/>
+          <a:p>
+            <a:pPr algn="l">
+              <a:lnSpc>
+                <a:spcPct val="125000"/>
               </a:lnSpc>
               <a:spcBef>
                 <a:spcPts val="0"/>
@@ -15429,7 +15390,7 @@
           <a:p>
             <a:pPr algn="l">
               <a:lnSpc>
-                <a:spcPts val="2080"/>
+                <a:spcPct val="125000"/>
               </a:lnSpc>
               <a:spcBef>
                 <a:spcPts val="800"/>
@@ -15451,7 +15412,7 @@
           <a:p>
             <a:pPr algn="l">
               <a:lnSpc>
-                <a:spcPts val="1820"/>
+                <a:spcPct val="125000"/>
               </a:lnSpc>
               <a:spcBef>
                 <a:spcPts val="200"/>
@@ -15473,7 +15434,7 @@
           <a:p>
             <a:pPr algn="l">
               <a:lnSpc>
-                <a:spcPts val="2080"/>
+                <a:spcPct val="125000"/>
               </a:lnSpc>
               <a:spcBef>
                 <a:spcPts val="800"/>
@@ -15495,7 +15456,7 @@
           <a:p>
             <a:pPr algn="l">
               <a:lnSpc>
-                <a:spcPts val="1820"/>
+                <a:spcPct val="125000"/>
               </a:lnSpc>
               <a:spcBef>
                 <a:spcPts val="200"/>
@@ -15517,7 +15478,7 @@
           <a:p>
             <a:pPr algn="l">
               <a:lnSpc>
-                <a:spcPts val="2080"/>
+                <a:spcPct val="125000"/>
               </a:lnSpc>
               <a:spcBef>
                 <a:spcPts val="800"/>
@@ -15539,7 +15500,7 @@
           <a:p>
             <a:pPr algn="l">
               <a:lnSpc>
-                <a:spcPts val="1820"/>
+                <a:spcPct val="125000"/>
               </a:lnSpc>
               <a:spcBef>
                 <a:spcPts val="200"/>
@@ -15561,7 +15522,7 @@
           <a:p>
             <a:pPr algn="l">
               <a:lnSpc>
-                <a:spcPts val="2080"/>
+                <a:spcPct val="125000"/>
               </a:lnSpc>
               <a:spcBef>
                 <a:spcPts val="800"/>
@@ -15583,7 +15544,7 @@
           <a:p>
             <a:pPr algn="l">
               <a:lnSpc>
-                <a:spcPts val="1820"/>
+                <a:spcPct val="125000"/>
               </a:lnSpc>
               <a:spcBef>
                 <a:spcPts val="200"/>
@@ -15694,11 +15655,10 @@
             <a:spAutoFit/>
           </a:bodyPr>
           <a:lstStyle/>
-          <a:p/>
-          <a:p>
-            <a:pPr algn="l">
-              <a:lnSpc>
-                <a:spcPts val="2080"/>
+          <a:p>
+            <a:pPr algn="l">
+              <a:lnSpc>
+                <a:spcPct val="125000"/>
               </a:lnSpc>
               <a:spcBef>
                 <a:spcPts val="0"/>
@@ -15720,7 +15680,7 @@
           <a:p>
             <a:pPr algn="l">
               <a:lnSpc>
-                <a:spcPts val="2080"/>
+                <a:spcPct val="125000"/>
               </a:lnSpc>
               <a:spcBef>
                 <a:spcPts val="800"/>
@@ -15742,7 +15702,7 @@
           <a:p>
             <a:pPr algn="l">
               <a:lnSpc>
-                <a:spcPts val="1820"/>
+                <a:spcPct val="125000"/>
               </a:lnSpc>
               <a:spcBef>
                 <a:spcPts val="200"/>
@@ -15764,7 +15724,7 @@
           <a:p>
             <a:pPr algn="l">
               <a:lnSpc>
-                <a:spcPts val="2080"/>
+                <a:spcPct val="125000"/>
               </a:lnSpc>
               <a:spcBef>
                 <a:spcPts val="800"/>
@@ -15786,7 +15746,7 @@
           <a:p>
             <a:pPr algn="l">
               <a:lnSpc>
-                <a:spcPts val="1820"/>
+                <a:spcPct val="125000"/>
               </a:lnSpc>
               <a:spcBef>
                 <a:spcPts val="200"/>
@@ -15808,7 +15768,7 @@
           <a:p>
             <a:pPr algn="l">
               <a:lnSpc>
-                <a:spcPts val="1820"/>
+                <a:spcPct val="125000"/>
               </a:lnSpc>
               <a:spcBef>
                 <a:spcPts val="200"/>
@@ -15830,7 +15790,7 @@
           <a:p>
             <a:pPr algn="l">
               <a:lnSpc>
-                <a:spcPts val="1820"/>
+                <a:spcPct val="125000"/>
               </a:lnSpc>
               <a:spcBef>
                 <a:spcPts val="200"/>
@@ -15852,7 +15812,7 @@
           <a:p>
             <a:pPr algn="l">
               <a:lnSpc>
-                <a:spcPts val="1820"/>
+                <a:spcPct val="125000"/>
               </a:lnSpc>
               <a:spcBef>
                 <a:spcPts val="200"/>
@@ -15874,7 +15834,7 @@
           <a:p>
             <a:pPr algn="l">
               <a:lnSpc>
-                <a:spcPts val="2080"/>
+                <a:spcPct val="125000"/>
               </a:lnSpc>
               <a:spcBef>
                 <a:spcPts val="800"/>
@@ -15896,7 +15856,7 @@
           <a:p>
             <a:pPr algn="l">
               <a:lnSpc>
-                <a:spcPts val="1820"/>
+                <a:spcPct val="125000"/>
               </a:lnSpc>
               <a:spcBef>
                 <a:spcPts val="200"/>
@@ -15918,7 +15878,7 @@
           <a:p>
             <a:pPr algn="l">
               <a:lnSpc>
-                <a:spcPts val="2080"/>
+                <a:spcPct val="125000"/>
               </a:lnSpc>
               <a:spcBef>
                 <a:spcPts val="800"/>
@@ -15940,7 +15900,7 @@
           <a:p>
             <a:pPr algn="l">
               <a:lnSpc>
-                <a:spcPts val="1820"/>
+                <a:spcPct val="125000"/>
               </a:lnSpc>
               <a:spcBef>
                 <a:spcPts val="200"/>
@@ -16051,11 +16011,10 @@
             <a:spAutoFit/>
           </a:bodyPr>
           <a:lstStyle/>
-          <a:p/>
-          <a:p>
-            <a:pPr algn="l">
-              <a:lnSpc>
-                <a:spcPts val="2080"/>
+          <a:p>
+            <a:pPr algn="l">
+              <a:lnSpc>
+                <a:spcPct val="125000"/>
               </a:lnSpc>
               <a:spcBef>
                 <a:spcPts val="0"/>
@@ -16077,7 +16036,7 @@
           <a:p>
             <a:pPr algn="l">
               <a:lnSpc>
-                <a:spcPts val="2080"/>
+                <a:spcPct val="125000"/>
               </a:lnSpc>
               <a:spcBef>
                 <a:spcPts val="800"/>
@@ -16099,7 +16058,7 @@
           <a:p>
             <a:pPr algn="l">
               <a:lnSpc>
-                <a:spcPts val="1820"/>
+                <a:spcPct val="125000"/>
               </a:lnSpc>
               <a:spcBef>
                 <a:spcPts val="200"/>
@@ -16121,7 +16080,7 @@
           <a:p>
             <a:pPr algn="l">
               <a:lnSpc>
-                <a:spcPts val="2080"/>
+                <a:spcPct val="125000"/>
               </a:lnSpc>
               <a:spcBef>
                 <a:spcPts val="800"/>
@@ -16143,7 +16102,7 @@
           <a:p>
             <a:pPr algn="l">
               <a:lnSpc>
-                <a:spcPts val="1820"/>
+                <a:spcPct val="125000"/>
               </a:lnSpc>
               <a:spcBef>
                 <a:spcPts val="200"/>
@@ -16165,7 +16124,7 @@
           <a:p>
             <a:pPr algn="l">
               <a:lnSpc>
-                <a:spcPts val="1820"/>
+                <a:spcPct val="125000"/>
               </a:lnSpc>
               <a:spcBef>
                 <a:spcPts val="200"/>
@@ -16187,7 +16146,7 @@
           <a:p>
             <a:pPr algn="l">
               <a:lnSpc>
-                <a:spcPts val="1820"/>
+                <a:spcPct val="125000"/>
               </a:lnSpc>
               <a:spcBef>
                 <a:spcPts val="200"/>
@@ -16209,7 +16168,7 @@
           <a:p>
             <a:pPr algn="l">
               <a:lnSpc>
-                <a:spcPts val="1820"/>
+                <a:spcPct val="125000"/>
               </a:lnSpc>
               <a:spcBef>
                 <a:spcPts val="200"/>
@@ -16231,7 +16190,7 @@
           <a:p>
             <a:pPr algn="l">
               <a:lnSpc>
-                <a:spcPts val="1820"/>
+                <a:spcPct val="125000"/>
               </a:lnSpc>
               <a:spcBef>
                 <a:spcPts val="200"/>
@@ -16253,7 +16212,7 @@
           <a:p>
             <a:pPr algn="l">
               <a:lnSpc>
-                <a:spcPts val="2080"/>
+                <a:spcPct val="125000"/>
               </a:lnSpc>
               <a:spcBef>
                 <a:spcPts val="800"/>
@@ -16275,7 +16234,7 @@
           <a:p>
             <a:pPr algn="l">
               <a:lnSpc>
-                <a:spcPts val="1820"/>
+                <a:spcPct val="125000"/>
               </a:lnSpc>
               <a:spcBef>
                 <a:spcPts val="200"/>
@@ -16297,7 +16256,7 @@
           <a:p>
             <a:pPr algn="l">
               <a:lnSpc>
-                <a:spcPts val="2080"/>
+                <a:spcPct val="125000"/>
               </a:lnSpc>
               <a:spcBef>
                 <a:spcPts val="800"/>
@@ -16319,7 +16278,7 @@
           <a:p>
             <a:pPr algn="l">
               <a:lnSpc>
-                <a:spcPts val="1820"/>
+                <a:spcPct val="125000"/>
               </a:lnSpc>
               <a:spcBef>
                 <a:spcPts val="200"/>
@@ -16430,11 +16389,10 @@
             <a:spAutoFit/>
           </a:bodyPr>
           <a:lstStyle/>
-          <a:p/>
-          <a:p>
-            <a:pPr algn="l">
-              <a:lnSpc>
-                <a:spcPts val="2080"/>
+          <a:p>
+            <a:pPr algn="l">
+              <a:lnSpc>
+                <a:spcPct val="125000"/>
               </a:lnSpc>
               <a:spcBef>
                 <a:spcPts val="0"/>
@@ -16456,7 +16414,7 @@
           <a:p>
             <a:pPr algn="l">
               <a:lnSpc>
-                <a:spcPts val="2080"/>
+                <a:spcPct val="125000"/>
               </a:lnSpc>
               <a:spcBef>
                 <a:spcPts val="800"/>
@@ -16478,7 +16436,7 @@
           <a:p>
             <a:pPr algn="l">
               <a:lnSpc>
-                <a:spcPts val="1820"/>
+                <a:spcPct val="125000"/>
               </a:lnSpc>
               <a:spcBef>
                 <a:spcPts val="200"/>
@@ -16500,7 +16458,7 @@
           <a:p>
             <a:pPr algn="l">
               <a:lnSpc>
-                <a:spcPts val="2080"/>
+                <a:spcPct val="125000"/>
               </a:lnSpc>
               <a:spcBef>
                 <a:spcPts val="800"/>
@@ -16522,7 +16480,7 @@
           <a:p>
             <a:pPr algn="l">
               <a:lnSpc>
-                <a:spcPts val="1820"/>
+                <a:spcPct val="125000"/>
               </a:lnSpc>
               <a:spcBef>
                 <a:spcPts val="200"/>
@@ -16544,7 +16502,7 @@
           <a:p>
             <a:pPr algn="l">
               <a:lnSpc>
-                <a:spcPts val="2080"/>
+                <a:spcPct val="125000"/>
               </a:lnSpc>
               <a:spcBef>
                 <a:spcPts val="800"/>
@@ -16566,7 +16524,7 @@
           <a:p>
             <a:pPr algn="l">
               <a:lnSpc>
-                <a:spcPts val="1820"/>
+                <a:spcPct val="125000"/>
               </a:lnSpc>
               <a:spcBef>
                 <a:spcPts val="200"/>
@@ -16588,7 +16546,7 @@
           <a:p>
             <a:pPr algn="l">
               <a:lnSpc>
-                <a:spcPts val="2080"/>
+                <a:spcPct val="125000"/>
               </a:lnSpc>
               <a:spcBef>
                 <a:spcPts val="800"/>
@@ -16610,7 +16568,7 @@
           <a:p>
             <a:pPr algn="l">
               <a:lnSpc>
-                <a:spcPts val="1820"/>
+                <a:spcPct val="125000"/>
               </a:lnSpc>
               <a:spcBef>
                 <a:spcPts val="200"/>

--- a/ppts_output_v3/03_个人所得税风险指引.pptx
+++ b/ppts_output_v3/03_个人所得税风险指引.pptx
@@ -3342,7 +3342,7 @@
                 <a:spcPts val="0"/>
               </a:spcBef>
               <a:spcAft>
-                <a:spcPts val="600"/>
+                <a:spcPts val="0"/>
               </a:spcAft>
             </a:pPr>
             <a:r>
@@ -3361,10 +3361,10 @@
                 <a:spcPct val="125000"/>
               </a:lnSpc>
               <a:spcBef>
-                <a:spcPts val="800"/>
-              </a:spcBef>
-              <a:spcAft>
-                <a:spcPts val="300"/>
+                <a:spcPts val="0"/>
+              </a:spcBef>
+              <a:spcAft>
+                <a:spcPts val="0"/>
               </a:spcAft>
             </a:pPr>
             <a:r>
@@ -3383,10 +3383,10 @@
                 <a:spcPct val="125000"/>
               </a:lnSpc>
               <a:spcBef>
-                <a:spcPts val="200"/>
-              </a:spcBef>
-              <a:spcAft>
-                <a:spcPts val="200"/>
+                <a:spcPts val="0"/>
+              </a:spcBef>
+              <a:spcAft>
+                <a:spcPts val="0"/>
               </a:spcAft>
             </a:pPr>
             <a:r>
@@ -3405,10 +3405,10 @@
                 <a:spcPct val="125000"/>
               </a:lnSpc>
               <a:spcBef>
-                <a:spcPts val="800"/>
-              </a:spcBef>
-              <a:spcAft>
-                <a:spcPts val="300"/>
+                <a:spcPts val="0"/>
+              </a:spcBef>
+              <a:spcAft>
+                <a:spcPts val="0"/>
               </a:spcAft>
             </a:pPr>
             <a:r>
@@ -3427,10 +3427,10 @@
                 <a:spcPct val="125000"/>
               </a:lnSpc>
               <a:spcBef>
-                <a:spcPts val="200"/>
-              </a:spcBef>
-              <a:spcAft>
-                <a:spcPts val="200"/>
+                <a:spcPts val="0"/>
+              </a:spcBef>
+              <a:spcAft>
+                <a:spcPts val="0"/>
               </a:spcAft>
             </a:pPr>
             <a:r>
@@ -3449,10 +3449,10 @@
                 <a:spcPct val="125000"/>
               </a:lnSpc>
               <a:spcBef>
-                <a:spcPts val="200"/>
-              </a:spcBef>
-              <a:spcAft>
-                <a:spcPts val="200"/>
+                <a:spcPts val="0"/>
+              </a:spcBef>
+              <a:spcAft>
+                <a:spcPts val="0"/>
               </a:spcAft>
             </a:pPr>
             <a:r>
@@ -3471,10 +3471,10 @@
                 <a:spcPct val="125000"/>
               </a:lnSpc>
               <a:spcBef>
-                <a:spcPts val="200"/>
-              </a:spcBef>
-              <a:spcAft>
-                <a:spcPts val="200"/>
+                <a:spcPts val="0"/>
+              </a:spcBef>
+              <a:spcAft>
+                <a:spcPts val="0"/>
               </a:spcAft>
             </a:pPr>
             <a:r>
@@ -3493,10 +3493,10 @@
                 <a:spcPct val="125000"/>
               </a:lnSpc>
               <a:spcBef>
-                <a:spcPts val="200"/>
-              </a:spcBef>
-              <a:spcAft>
-                <a:spcPts val="200"/>
+                <a:spcPts val="0"/>
+              </a:spcBef>
+              <a:spcAft>
+                <a:spcPts val="0"/>
               </a:spcAft>
             </a:pPr>
             <a:r>
@@ -3515,10 +3515,10 @@
                 <a:spcPct val="125000"/>
               </a:lnSpc>
               <a:spcBef>
-                <a:spcPts val="800"/>
-              </a:spcBef>
-              <a:spcAft>
-                <a:spcPts val="300"/>
+                <a:spcPts val="0"/>
+              </a:spcBef>
+              <a:spcAft>
+                <a:spcPts val="0"/>
               </a:spcAft>
             </a:pPr>
             <a:r>
@@ -3537,10 +3537,10 @@
                 <a:spcPct val="125000"/>
               </a:lnSpc>
               <a:spcBef>
-                <a:spcPts val="200"/>
-              </a:spcBef>
-              <a:spcAft>
-                <a:spcPts val="200"/>
+                <a:spcPts val="0"/>
+              </a:spcBef>
+              <a:spcAft>
+                <a:spcPts val="0"/>
               </a:spcAft>
             </a:pPr>
             <a:r>
@@ -3559,10 +3559,10 @@
                 <a:spcPct val="125000"/>
               </a:lnSpc>
               <a:spcBef>
-                <a:spcPts val="800"/>
-              </a:spcBef>
-              <a:spcAft>
-                <a:spcPts val="300"/>
+                <a:spcPts val="0"/>
+              </a:spcBef>
+              <a:spcAft>
+                <a:spcPts val="0"/>
               </a:spcAft>
             </a:pPr>
             <a:r>
@@ -3581,10 +3581,10 @@
                 <a:spcPct val="125000"/>
               </a:lnSpc>
               <a:spcBef>
-                <a:spcPts val="200"/>
-              </a:spcBef>
-              <a:spcAft>
-                <a:spcPts val="200"/>
+                <a:spcPts val="0"/>
+              </a:spcBef>
+              <a:spcAft>
+                <a:spcPts val="0"/>
               </a:spcAft>
             </a:pPr>
             <a:r>
@@ -3698,7 +3698,7 @@
                 <a:spcPts val="0"/>
               </a:spcBef>
               <a:spcAft>
-                <a:spcPts val="600"/>
+                <a:spcPts val="0"/>
               </a:spcAft>
             </a:pPr>
             <a:r>
@@ -3717,10 +3717,10 @@
                 <a:spcPct val="125000"/>
               </a:lnSpc>
               <a:spcBef>
-                <a:spcPts val="800"/>
-              </a:spcBef>
-              <a:spcAft>
-                <a:spcPts val="300"/>
+                <a:spcPts val="0"/>
+              </a:spcBef>
+              <a:spcAft>
+                <a:spcPts val="0"/>
               </a:spcAft>
             </a:pPr>
             <a:r>
@@ -3739,10 +3739,10 @@
                 <a:spcPct val="125000"/>
               </a:lnSpc>
               <a:spcBef>
-                <a:spcPts val="200"/>
-              </a:spcBef>
-              <a:spcAft>
-                <a:spcPts val="200"/>
+                <a:spcPts val="0"/>
+              </a:spcBef>
+              <a:spcAft>
+                <a:spcPts val="0"/>
               </a:spcAft>
             </a:pPr>
             <a:r>
@@ -3761,10 +3761,10 @@
                 <a:spcPct val="125000"/>
               </a:lnSpc>
               <a:spcBef>
-                <a:spcPts val="800"/>
-              </a:spcBef>
-              <a:spcAft>
-                <a:spcPts val="300"/>
+                <a:spcPts val="0"/>
+              </a:spcBef>
+              <a:spcAft>
+                <a:spcPts val="0"/>
               </a:spcAft>
             </a:pPr>
             <a:r>
@@ -3783,10 +3783,10 @@
                 <a:spcPct val="125000"/>
               </a:lnSpc>
               <a:spcBef>
-                <a:spcPts val="200"/>
-              </a:spcBef>
-              <a:spcAft>
-                <a:spcPts val="200"/>
+                <a:spcPts val="0"/>
+              </a:spcBef>
+              <a:spcAft>
+                <a:spcPts val="0"/>
               </a:spcAft>
             </a:pPr>
             <a:r>
@@ -3805,10 +3805,10 @@
                 <a:spcPct val="125000"/>
               </a:lnSpc>
               <a:spcBef>
-                <a:spcPts val="200"/>
-              </a:spcBef>
-              <a:spcAft>
-                <a:spcPts val="200"/>
+                <a:spcPts val="0"/>
+              </a:spcBef>
+              <a:spcAft>
+                <a:spcPts val="0"/>
               </a:spcAft>
             </a:pPr>
             <a:r>
@@ -3827,10 +3827,10 @@
                 <a:spcPct val="125000"/>
               </a:lnSpc>
               <a:spcBef>
-                <a:spcPts val="800"/>
-              </a:spcBef>
-              <a:spcAft>
-                <a:spcPts val="300"/>
+                <a:spcPts val="0"/>
+              </a:spcBef>
+              <a:spcAft>
+                <a:spcPts val="0"/>
               </a:spcAft>
             </a:pPr>
             <a:r>
@@ -3849,10 +3849,10 @@
                 <a:spcPct val="125000"/>
               </a:lnSpc>
               <a:spcBef>
-                <a:spcPts val="200"/>
-              </a:spcBef>
-              <a:spcAft>
-                <a:spcPts val="200"/>
+                <a:spcPts val="0"/>
+              </a:spcBef>
+              <a:spcAft>
+                <a:spcPts val="0"/>
               </a:spcAft>
             </a:pPr>
             <a:r>
@@ -3871,10 +3871,10 @@
                 <a:spcPct val="125000"/>
               </a:lnSpc>
               <a:spcBef>
-                <a:spcPts val="800"/>
-              </a:spcBef>
-              <a:spcAft>
-                <a:spcPts val="300"/>
+                <a:spcPts val="0"/>
+              </a:spcBef>
+              <a:spcAft>
+                <a:spcPts val="0"/>
               </a:spcAft>
             </a:pPr>
             <a:r>
@@ -3893,10 +3893,10 @@
                 <a:spcPct val="125000"/>
               </a:lnSpc>
               <a:spcBef>
-                <a:spcPts val="200"/>
-              </a:spcBef>
-              <a:spcAft>
-                <a:spcPts val="200"/>
+                <a:spcPts val="0"/>
+              </a:spcBef>
+              <a:spcAft>
+                <a:spcPts val="0"/>
               </a:spcAft>
             </a:pPr>
             <a:r>
@@ -4010,7 +4010,7 @@
                 <a:spcPts val="0"/>
               </a:spcBef>
               <a:spcAft>
-                <a:spcPts val="600"/>
+                <a:spcPts val="0"/>
               </a:spcAft>
             </a:pPr>
             <a:r>
@@ -4029,10 +4029,10 @@
                 <a:spcPct val="125000"/>
               </a:lnSpc>
               <a:spcBef>
-                <a:spcPts val="800"/>
-              </a:spcBef>
-              <a:spcAft>
-                <a:spcPts val="300"/>
+                <a:spcPts val="0"/>
+              </a:spcBef>
+              <a:spcAft>
+                <a:spcPts val="0"/>
               </a:spcAft>
             </a:pPr>
             <a:r>
@@ -4051,10 +4051,10 @@
                 <a:spcPct val="125000"/>
               </a:lnSpc>
               <a:spcBef>
-                <a:spcPts val="200"/>
-              </a:spcBef>
-              <a:spcAft>
-                <a:spcPts val="200"/>
+                <a:spcPts val="0"/>
+              </a:spcBef>
+              <a:spcAft>
+                <a:spcPts val="0"/>
               </a:spcAft>
             </a:pPr>
             <a:r>
@@ -4073,10 +4073,10 @@
                 <a:spcPct val="125000"/>
               </a:lnSpc>
               <a:spcBef>
-                <a:spcPts val="800"/>
-              </a:spcBef>
-              <a:spcAft>
-                <a:spcPts val="300"/>
+                <a:spcPts val="0"/>
+              </a:spcBef>
+              <a:spcAft>
+                <a:spcPts val="0"/>
               </a:spcAft>
             </a:pPr>
             <a:r>
@@ -4095,10 +4095,10 @@
                 <a:spcPct val="125000"/>
               </a:lnSpc>
               <a:spcBef>
-                <a:spcPts val="200"/>
-              </a:spcBef>
-              <a:spcAft>
-                <a:spcPts val="200"/>
+                <a:spcPts val="0"/>
+              </a:spcBef>
+              <a:spcAft>
+                <a:spcPts val="0"/>
               </a:spcAft>
             </a:pPr>
             <a:r>
@@ -4117,10 +4117,10 @@
                 <a:spcPct val="125000"/>
               </a:lnSpc>
               <a:spcBef>
-                <a:spcPts val="200"/>
-              </a:spcBef>
-              <a:spcAft>
-                <a:spcPts val="200"/>
+                <a:spcPts val="0"/>
+              </a:spcBef>
+              <a:spcAft>
+                <a:spcPts val="0"/>
               </a:spcAft>
             </a:pPr>
             <a:r>
@@ -4139,10 +4139,10 @@
                 <a:spcPct val="125000"/>
               </a:lnSpc>
               <a:spcBef>
-                <a:spcPts val="800"/>
-              </a:spcBef>
-              <a:spcAft>
-                <a:spcPts val="300"/>
+                <a:spcPts val="0"/>
+              </a:spcBef>
+              <a:spcAft>
+                <a:spcPts val="0"/>
               </a:spcAft>
             </a:pPr>
             <a:r>
@@ -4161,10 +4161,10 @@
                 <a:spcPct val="125000"/>
               </a:lnSpc>
               <a:spcBef>
-                <a:spcPts val="200"/>
-              </a:spcBef>
-              <a:spcAft>
-                <a:spcPts val="200"/>
+                <a:spcPts val="0"/>
+              </a:spcBef>
+              <a:spcAft>
+                <a:spcPts val="0"/>
               </a:spcAft>
             </a:pPr>
             <a:r>
@@ -4183,10 +4183,10 @@
                 <a:spcPct val="125000"/>
               </a:lnSpc>
               <a:spcBef>
-                <a:spcPts val="800"/>
-              </a:spcBef>
-              <a:spcAft>
-                <a:spcPts val="300"/>
+                <a:spcPts val="0"/>
+              </a:spcBef>
+              <a:spcAft>
+                <a:spcPts val="0"/>
               </a:spcAft>
             </a:pPr>
             <a:r>
@@ -4205,10 +4205,10 @@
                 <a:spcPct val="125000"/>
               </a:lnSpc>
               <a:spcBef>
-                <a:spcPts val="200"/>
-              </a:spcBef>
-              <a:spcAft>
-                <a:spcPts val="200"/>
+                <a:spcPts val="0"/>
+              </a:spcBef>
+              <a:spcAft>
+                <a:spcPts val="0"/>
               </a:spcAft>
             </a:pPr>
             <a:r>
@@ -4322,7 +4322,7 @@
                 <a:spcPts val="0"/>
               </a:spcBef>
               <a:spcAft>
-                <a:spcPts val="600"/>
+                <a:spcPts val="0"/>
               </a:spcAft>
             </a:pPr>
             <a:r>
@@ -4341,10 +4341,10 @@
                 <a:spcPct val="125000"/>
               </a:lnSpc>
               <a:spcBef>
-                <a:spcPts val="800"/>
-              </a:spcBef>
-              <a:spcAft>
-                <a:spcPts val="300"/>
+                <a:spcPts val="0"/>
+              </a:spcBef>
+              <a:spcAft>
+                <a:spcPts val="0"/>
               </a:spcAft>
             </a:pPr>
             <a:r>
@@ -4363,10 +4363,10 @@
                 <a:spcPct val="125000"/>
               </a:lnSpc>
               <a:spcBef>
-                <a:spcPts val="200"/>
-              </a:spcBef>
-              <a:spcAft>
-                <a:spcPts val="200"/>
+                <a:spcPts val="0"/>
+              </a:spcBef>
+              <a:spcAft>
+                <a:spcPts val="0"/>
               </a:spcAft>
             </a:pPr>
             <a:r>
@@ -4385,10 +4385,10 @@
                 <a:spcPct val="125000"/>
               </a:lnSpc>
               <a:spcBef>
-                <a:spcPts val="800"/>
-              </a:spcBef>
-              <a:spcAft>
-                <a:spcPts val="300"/>
+                <a:spcPts val="0"/>
+              </a:spcBef>
+              <a:spcAft>
+                <a:spcPts val="0"/>
               </a:spcAft>
             </a:pPr>
             <a:r>
@@ -4407,10 +4407,10 @@
                 <a:spcPct val="125000"/>
               </a:lnSpc>
               <a:spcBef>
-                <a:spcPts val="200"/>
-              </a:spcBef>
-              <a:spcAft>
-                <a:spcPts val="200"/>
+                <a:spcPts val="0"/>
+              </a:spcBef>
+              <a:spcAft>
+                <a:spcPts val="0"/>
               </a:spcAft>
             </a:pPr>
             <a:r>
@@ -4429,10 +4429,10 @@
                 <a:spcPct val="125000"/>
               </a:lnSpc>
               <a:spcBef>
-                <a:spcPts val="800"/>
-              </a:spcBef>
-              <a:spcAft>
-                <a:spcPts val="300"/>
+                <a:spcPts val="0"/>
+              </a:spcBef>
+              <a:spcAft>
+                <a:spcPts val="0"/>
               </a:spcAft>
             </a:pPr>
             <a:r>
@@ -4451,10 +4451,10 @@
                 <a:spcPct val="125000"/>
               </a:lnSpc>
               <a:spcBef>
-                <a:spcPts val="200"/>
-              </a:spcBef>
-              <a:spcAft>
-                <a:spcPts val="200"/>
+                <a:spcPts val="0"/>
+              </a:spcBef>
+              <a:spcAft>
+                <a:spcPts val="0"/>
               </a:spcAft>
             </a:pPr>
             <a:r>
@@ -4473,10 +4473,10 @@
                 <a:spcPct val="125000"/>
               </a:lnSpc>
               <a:spcBef>
-                <a:spcPts val="800"/>
-              </a:spcBef>
-              <a:spcAft>
-                <a:spcPts val="300"/>
+                <a:spcPts val="0"/>
+              </a:spcBef>
+              <a:spcAft>
+                <a:spcPts val="0"/>
               </a:spcAft>
             </a:pPr>
             <a:r>
@@ -4495,10 +4495,10 @@
                 <a:spcPct val="125000"/>
               </a:lnSpc>
               <a:spcBef>
-                <a:spcPts val="200"/>
-              </a:spcBef>
-              <a:spcAft>
-                <a:spcPts val="200"/>
+                <a:spcPts val="0"/>
+              </a:spcBef>
+              <a:spcAft>
+                <a:spcPts val="0"/>
               </a:spcAft>
             </a:pPr>
             <a:r>
@@ -4612,7 +4612,7 @@
                 <a:spcPts val="0"/>
               </a:spcBef>
               <a:spcAft>
-                <a:spcPts val="600"/>
+                <a:spcPts val="0"/>
               </a:spcAft>
             </a:pPr>
             <a:r>
@@ -4631,10 +4631,10 @@
                 <a:spcPct val="125000"/>
               </a:lnSpc>
               <a:spcBef>
-                <a:spcPts val="800"/>
-              </a:spcBef>
-              <a:spcAft>
-                <a:spcPts val="300"/>
+                <a:spcPts val="0"/>
+              </a:spcBef>
+              <a:spcAft>
+                <a:spcPts val="0"/>
               </a:spcAft>
             </a:pPr>
             <a:r>
@@ -4653,10 +4653,10 @@
                 <a:spcPct val="125000"/>
               </a:lnSpc>
               <a:spcBef>
-                <a:spcPts val="200"/>
-              </a:spcBef>
-              <a:spcAft>
-                <a:spcPts val="200"/>
+                <a:spcPts val="0"/>
+              </a:spcBef>
+              <a:spcAft>
+                <a:spcPts val="0"/>
               </a:spcAft>
             </a:pPr>
             <a:r>
@@ -4675,10 +4675,10 @@
                 <a:spcPct val="125000"/>
               </a:lnSpc>
               <a:spcBef>
-                <a:spcPts val="200"/>
-              </a:spcBef>
-              <a:spcAft>
-                <a:spcPts val="200"/>
+                <a:spcPts val="0"/>
+              </a:spcBef>
+              <a:spcAft>
+                <a:spcPts val="0"/>
               </a:spcAft>
             </a:pPr>
             <a:r>
@@ -4697,10 +4697,10 @@
                 <a:spcPct val="125000"/>
               </a:lnSpc>
               <a:spcBef>
-                <a:spcPts val="800"/>
-              </a:spcBef>
-              <a:spcAft>
-                <a:spcPts val="300"/>
+                <a:spcPts val="0"/>
+              </a:spcBef>
+              <a:spcAft>
+                <a:spcPts val="0"/>
               </a:spcAft>
             </a:pPr>
             <a:r>
@@ -4719,10 +4719,10 @@
                 <a:spcPct val="125000"/>
               </a:lnSpc>
               <a:spcBef>
-                <a:spcPts val="200"/>
-              </a:spcBef>
-              <a:spcAft>
-                <a:spcPts val="200"/>
+                <a:spcPts val="0"/>
+              </a:spcBef>
+              <a:spcAft>
+                <a:spcPts val="0"/>
               </a:spcAft>
             </a:pPr>
             <a:r>
@@ -4741,10 +4741,10 @@
                 <a:spcPct val="125000"/>
               </a:lnSpc>
               <a:spcBef>
-                <a:spcPts val="200"/>
-              </a:spcBef>
-              <a:spcAft>
-                <a:spcPts val="200"/>
+                <a:spcPts val="0"/>
+              </a:spcBef>
+              <a:spcAft>
+                <a:spcPts val="0"/>
               </a:spcAft>
             </a:pPr>
             <a:r>
@@ -4763,10 +4763,10 @@
                 <a:spcPct val="125000"/>
               </a:lnSpc>
               <a:spcBef>
-                <a:spcPts val="200"/>
-              </a:spcBef>
-              <a:spcAft>
-                <a:spcPts val="200"/>
+                <a:spcPts val="0"/>
+              </a:spcBef>
+              <a:spcAft>
+                <a:spcPts val="0"/>
               </a:spcAft>
             </a:pPr>
             <a:r>
@@ -4785,10 +4785,10 @@
                 <a:spcPct val="125000"/>
               </a:lnSpc>
               <a:spcBef>
-                <a:spcPts val="200"/>
-              </a:spcBef>
-              <a:spcAft>
-                <a:spcPts val="200"/>
+                <a:spcPts val="0"/>
+              </a:spcBef>
+              <a:spcAft>
+                <a:spcPts val="0"/>
               </a:spcAft>
             </a:pPr>
             <a:r>
@@ -4807,10 +4807,10 @@
                 <a:spcPct val="125000"/>
               </a:lnSpc>
               <a:spcBef>
-                <a:spcPts val="200"/>
-              </a:spcBef>
-              <a:spcAft>
-                <a:spcPts val="200"/>
+                <a:spcPts val="0"/>
+              </a:spcBef>
+              <a:spcAft>
+                <a:spcPts val="0"/>
               </a:spcAft>
             </a:pPr>
             <a:r>
@@ -4829,10 +4829,10 @@
                 <a:spcPct val="125000"/>
               </a:lnSpc>
               <a:spcBef>
-                <a:spcPts val="200"/>
-              </a:spcBef>
-              <a:spcAft>
-                <a:spcPts val="200"/>
+                <a:spcPts val="0"/>
+              </a:spcBef>
+              <a:spcAft>
+                <a:spcPts val="0"/>
               </a:spcAft>
             </a:pPr>
             <a:r>
@@ -4851,10 +4851,10 @@
                 <a:spcPct val="125000"/>
               </a:lnSpc>
               <a:spcBef>
-                <a:spcPts val="800"/>
-              </a:spcBef>
-              <a:spcAft>
-                <a:spcPts val="300"/>
+                <a:spcPts val="0"/>
+              </a:spcBef>
+              <a:spcAft>
+                <a:spcPts val="0"/>
               </a:spcAft>
             </a:pPr>
             <a:r>
@@ -4873,10 +4873,10 @@
                 <a:spcPct val="125000"/>
               </a:lnSpc>
               <a:spcBef>
-                <a:spcPts val="200"/>
-              </a:spcBef>
-              <a:spcAft>
-                <a:spcPts val="200"/>
+                <a:spcPts val="0"/>
+              </a:spcBef>
+              <a:spcAft>
+                <a:spcPts val="0"/>
               </a:spcAft>
             </a:pPr>
             <a:r>
@@ -4895,10 +4895,10 @@
                 <a:spcPct val="125000"/>
               </a:lnSpc>
               <a:spcBef>
-                <a:spcPts val="800"/>
-              </a:spcBef>
-              <a:spcAft>
-                <a:spcPts val="300"/>
+                <a:spcPts val="0"/>
+              </a:spcBef>
+              <a:spcAft>
+                <a:spcPts val="0"/>
               </a:spcAft>
             </a:pPr>
             <a:r>
@@ -4917,10 +4917,10 @@
                 <a:spcPct val="125000"/>
               </a:lnSpc>
               <a:spcBef>
-                <a:spcPts val="200"/>
-              </a:spcBef>
-              <a:spcAft>
-                <a:spcPts val="200"/>
+                <a:spcPts val="0"/>
+              </a:spcBef>
+              <a:spcAft>
+                <a:spcPts val="0"/>
               </a:spcAft>
             </a:pPr>
             <a:r>
@@ -5034,7 +5034,7 @@
                 <a:spcPts val="0"/>
               </a:spcBef>
               <a:spcAft>
-                <a:spcPts val="600"/>
+                <a:spcPts val="0"/>
               </a:spcAft>
             </a:pPr>
             <a:r>
@@ -5053,10 +5053,10 @@
                 <a:spcPct val="125000"/>
               </a:lnSpc>
               <a:spcBef>
-                <a:spcPts val="800"/>
-              </a:spcBef>
-              <a:spcAft>
-                <a:spcPts val="300"/>
+                <a:spcPts val="0"/>
+              </a:spcBef>
+              <a:spcAft>
+                <a:spcPts val="0"/>
               </a:spcAft>
             </a:pPr>
             <a:r>
@@ -5075,10 +5075,10 @@
                 <a:spcPct val="125000"/>
               </a:lnSpc>
               <a:spcBef>
-                <a:spcPts val="200"/>
-              </a:spcBef>
-              <a:spcAft>
-                <a:spcPts val="200"/>
+                <a:spcPts val="0"/>
+              </a:spcBef>
+              <a:spcAft>
+                <a:spcPts val="0"/>
               </a:spcAft>
             </a:pPr>
             <a:r>
@@ -5097,10 +5097,10 @@
                 <a:spcPct val="125000"/>
               </a:lnSpc>
               <a:spcBef>
-                <a:spcPts val="800"/>
-              </a:spcBef>
-              <a:spcAft>
-                <a:spcPts val="300"/>
+                <a:spcPts val="0"/>
+              </a:spcBef>
+              <a:spcAft>
+                <a:spcPts val="0"/>
               </a:spcAft>
             </a:pPr>
             <a:r>
@@ -5119,10 +5119,10 @@
                 <a:spcPct val="125000"/>
               </a:lnSpc>
               <a:spcBef>
-                <a:spcPts val="200"/>
-              </a:spcBef>
-              <a:spcAft>
-                <a:spcPts val="200"/>
+                <a:spcPts val="0"/>
+              </a:spcBef>
+              <a:spcAft>
+                <a:spcPts val="0"/>
               </a:spcAft>
             </a:pPr>
             <a:r>
@@ -5141,10 +5141,10 @@
                 <a:spcPct val="125000"/>
               </a:lnSpc>
               <a:spcBef>
-                <a:spcPts val="200"/>
-              </a:spcBef>
-              <a:spcAft>
-                <a:spcPts val="200"/>
+                <a:spcPts val="0"/>
+              </a:spcBef>
+              <a:spcAft>
+                <a:spcPts val="0"/>
               </a:spcAft>
             </a:pPr>
             <a:r>
@@ -5163,10 +5163,10 @@
                 <a:spcPct val="125000"/>
               </a:lnSpc>
               <a:spcBef>
-                <a:spcPts val="800"/>
-              </a:spcBef>
-              <a:spcAft>
-                <a:spcPts val="300"/>
+                <a:spcPts val="0"/>
+              </a:spcBef>
+              <a:spcAft>
+                <a:spcPts val="0"/>
               </a:spcAft>
             </a:pPr>
             <a:r>
@@ -5185,10 +5185,10 @@
                 <a:spcPct val="125000"/>
               </a:lnSpc>
               <a:spcBef>
-                <a:spcPts val="200"/>
-              </a:spcBef>
-              <a:spcAft>
-                <a:spcPts val="200"/>
+                <a:spcPts val="0"/>
+              </a:spcBef>
+              <a:spcAft>
+                <a:spcPts val="0"/>
               </a:spcAft>
             </a:pPr>
             <a:r>
@@ -5207,10 +5207,10 @@
                 <a:spcPct val="125000"/>
               </a:lnSpc>
               <a:spcBef>
-                <a:spcPts val="800"/>
-              </a:spcBef>
-              <a:spcAft>
-                <a:spcPts val="300"/>
+                <a:spcPts val="0"/>
+              </a:spcBef>
+              <a:spcAft>
+                <a:spcPts val="0"/>
               </a:spcAft>
             </a:pPr>
             <a:r>
@@ -5229,10 +5229,10 @@
                 <a:spcPct val="125000"/>
               </a:lnSpc>
               <a:spcBef>
-                <a:spcPts val="200"/>
-              </a:spcBef>
-              <a:spcAft>
-                <a:spcPts val="200"/>
+                <a:spcPts val="0"/>
+              </a:spcBef>
+              <a:spcAft>
+                <a:spcPts val="0"/>
               </a:spcAft>
             </a:pPr>
             <a:r>
@@ -5346,7 +5346,7 @@
                 <a:spcPts val="0"/>
               </a:spcBef>
               <a:spcAft>
-                <a:spcPts val="600"/>
+                <a:spcPts val="0"/>
               </a:spcAft>
             </a:pPr>
             <a:r>
@@ -5365,10 +5365,10 @@
                 <a:spcPct val="125000"/>
               </a:lnSpc>
               <a:spcBef>
-                <a:spcPts val="800"/>
-              </a:spcBef>
-              <a:spcAft>
-                <a:spcPts val="300"/>
+                <a:spcPts val="0"/>
+              </a:spcBef>
+              <a:spcAft>
+                <a:spcPts val="0"/>
               </a:spcAft>
             </a:pPr>
             <a:r>
@@ -5387,10 +5387,10 @@
                 <a:spcPct val="125000"/>
               </a:lnSpc>
               <a:spcBef>
-                <a:spcPts val="200"/>
-              </a:spcBef>
-              <a:spcAft>
-                <a:spcPts val="200"/>
+                <a:spcPts val="0"/>
+              </a:spcBef>
+              <a:spcAft>
+                <a:spcPts val="0"/>
               </a:spcAft>
             </a:pPr>
             <a:r>
@@ -5409,10 +5409,10 @@
                 <a:spcPct val="125000"/>
               </a:lnSpc>
               <a:spcBef>
-                <a:spcPts val="800"/>
-              </a:spcBef>
-              <a:spcAft>
-                <a:spcPts val="300"/>
+                <a:spcPts val="0"/>
+              </a:spcBef>
+              <a:spcAft>
+                <a:spcPts val="0"/>
               </a:spcAft>
             </a:pPr>
             <a:r>
@@ -5431,10 +5431,10 @@
                 <a:spcPct val="125000"/>
               </a:lnSpc>
               <a:spcBef>
-                <a:spcPts val="200"/>
-              </a:spcBef>
-              <a:spcAft>
-                <a:spcPts val="200"/>
+                <a:spcPts val="0"/>
+              </a:spcBef>
+              <a:spcAft>
+                <a:spcPts val="0"/>
               </a:spcAft>
             </a:pPr>
             <a:r>
@@ -5453,10 +5453,10 @@
                 <a:spcPct val="125000"/>
               </a:lnSpc>
               <a:spcBef>
-                <a:spcPts val="200"/>
-              </a:spcBef>
-              <a:spcAft>
-                <a:spcPts val="200"/>
+                <a:spcPts val="0"/>
+              </a:spcBef>
+              <a:spcAft>
+                <a:spcPts val="0"/>
               </a:spcAft>
             </a:pPr>
             <a:r>
@@ -5475,10 +5475,10 @@
                 <a:spcPct val="125000"/>
               </a:lnSpc>
               <a:spcBef>
-                <a:spcPts val="200"/>
-              </a:spcBef>
-              <a:spcAft>
-                <a:spcPts val="200"/>
+                <a:spcPts val="0"/>
+              </a:spcBef>
+              <a:spcAft>
+                <a:spcPts val="0"/>
               </a:spcAft>
             </a:pPr>
             <a:r>
@@ -5497,10 +5497,10 @@
                 <a:spcPct val="125000"/>
               </a:lnSpc>
               <a:spcBef>
-                <a:spcPts val="200"/>
-              </a:spcBef>
-              <a:spcAft>
-                <a:spcPts val="200"/>
+                <a:spcPts val="0"/>
+              </a:spcBef>
+              <a:spcAft>
+                <a:spcPts val="0"/>
               </a:spcAft>
             </a:pPr>
             <a:r>
@@ -5519,10 +5519,10 @@
                 <a:spcPct val="125000"/>
               </a:lnSpc>
               <a:spcBef>
-                <a:spcPts val="200"/>
-              </a:spcBef>
-              <a:spcAft>
-                <a:spcPts val="200"/>
+                <a:spcPts val="0"/>
+              </a:spcBef>
+              <a:spcAft>
+                <a:spcPts val="0"/>
               </a:spcAft>
             </a:pPr>
             <a:r>
@@ -5541,10 +5541,10 @@
                 <a:spcPct val="125000"/>
               </a:lnSpc>
               <a:spcBef>
-                <a:spcPts val="800"/>
-              </a:spcBef>
-              <a:spcAft>
-                <a:spcPts val="300"/>
+                <a:spcPts val="0"/>
+              </a:spcBef>
+              <a:spcAft>
+                <a:spcPts val="0"/>
               </a:spcAft>
             </a:pPr>
             <a:r>
@@ -5563,10 +5563,10 @@
                 <a:spcPct val="125000"/>
               </a:lnSpc>
               <a:spcBef>
-                <a:spcPts val="200"/>
-              </a:spcBef>
-              <a:spcAft>
-                <a:spcPts val="200"/>
+                <a:spcPts val="0"/>
+              </a:spcBef>
+              <a:spcAft>
+                <a:spcPts val="0"/>
               </a:spcAft>
             </a:pPr>
             <a:r>
@@ -5585,10 +5585,10 @@
                 <a:spcPct val="125000"/>
               </a:lnSpc>
               <a:spcBef>
-                <a:spcPts val="800"/>
-              </a:spcBef>
-              <a:spcAft>
-                <a:spcPts val="300"/>
+                <a:spcPts val="0"/>
+              </a:spcBef>
+              <a:spcAft>
+                <a:spcPts val="0"/>
               </a:spcAft>
             </a:pPr>
             <a:r>
@@ -5607,10 +5607,10 @@
                 <a:spcPct val="125000"/>
               </a:lnSpc>
               <a:spcBef>
-                <a:spcPts val="200"/>
-              </a:spcBef>
-              <a:spcAft>
-                <a:spcPts val="200"/>
+                <a:spcPts val="0"/>
+              </a:spcBef>
+              <a:spcAft>
+                <a:spcPts val="0"/>
               </a:spcAft>
             </a:pPr>
             <a:r>
@@ -5724,7 +5724,7 @@
                 <a:spcPts val="0"/>
               </a:spcBef>
               <a:spcAft>
-                <a:spcPts val="600"/>
+                <a:spcPts val="0"/>
               </a:spcAft>
             </a:pPr>
             <a:r>
@@ -5743,10 +5743,10 @@
                 <a:spcPct val="125000"/>
               </a:lnSpc>
               <a:spcBef>
-                <a:spcPts val="800"/>
-              </a:spcBef>
-              <a:spcAft>
-                <a:spcPts val="300"/>
+                <a:spcPts val="0"/>
+              </a:spcBef>
+              <a:spcAft>
+                <a:spcPts val="0"/>
               </a:spcAft>
             </a:pPr>
             <a:r>
@@ -5765,10 +5765,10 @@
                 <a:spcPct val="125000"/>
               </a:lnSpc>
               <a:spcBef>
-                <a:spcPts val="200"/>
-              </a:spcBef>
-              <a:spcAft>
-                <a:spcPts val="200"/>
+                <a:spcPts val="0"/>
+              </a:spcBef>
+              <a:spcAft>
+                <a:spcPts val="0"/>
               </a:spcAft>
             </a:pPr>
             <a:r>
@@ -5787,10 +5787,10 @@
                 <a:spcPct val="125000"/>
               </a:lnSpc>
               <a:spcBef>
-                <a:spcPts val="800"/>
-              </a:spcBef>
-              <a:spcAft>
-                <a:spcPts val="300"/>
+                <a:spcPts val="0"/>
+              </a:spcBef>
+              <a:spcAft>
+                <a:spcPts val="0"/>
               </a:spcAft>
             </a:pPr>
             <a:r>
@@ -5809,10 +5809,10 @@
                 <a:spcPct val="125000"/>
               </a:lnSpc>
               <a:spcBef>
-                <a:spcPts val="200"/>
-              </a:spcBef>
-              <a:spcAft>
-                <a:spcPts val="200"/>
+                <a:spcPts val="0"/>
+              </a:spcBef>
+              <a:spcAft>
+                <a:spcPts val="0"/>
               </a:spcAft>
             </a:pPr>
             <a:r>
@@ -5831,10 +5831,10 @@
                 <a:spcPct val="125000"/>
               </a:lnSpc>
               <a:spcBef>
-                <a:spcPts val="200"/>
-              </a:spcBef>
-              <a:spcAft>
-                <a:spcPts val="200"/>
+                <a:spcPts val="0"/>
+              </a:spcBef>
+              <a:spcAft>
+                <a:spcPts val="0"/>
               </a:spcAft>
             </a:pPr>
             <a:r>
@@ -5853,10 +5853,10 @@
                 <a:spcPct val="125000"/>
               </a:lnSpc>
               <a:spcBef>
-                <a:spcPts val="200"/>
-              </a:spcBef>
-              <a:spcAft>
-                <a:spcPts val="200"/>
+                <a:spcPts val="0"/>
+              </a:spcBef>
+              <a:spcAft>
+                <a:spcPts val="0"/>
               </a:spcAft>
             </a:pPr>
             <a:r>
@@ -5875,10 +5875,10 @@
                 <a:spcPct val="125000"/>
               </a:lnSpc>
               <a:spcBef>
-                <a:spcPts val="200"/>
-              </a:spcBef>
-              <a:spcAft>
-                <a:spcPts val="200"/>
+                <a:spcPts val="0"/>
+              </a:spcBef>
+              <a:spcAft>
+                <a:spcPts val="0"/>
               </a:spcAft>
             </a:pPr>
             <a:r>
@@ -5897,10 +5897,10 @@
                 <a:spcPct val="125000"/>
               </a:lnSpc>
               <a:spcBef>
-                <a:spcPts val="800"/>
-              </a:spcBef>
-              <a:spcAft>
-                <a:spcPts val="300"/>
+                <a:spcPts val="0"/>
+              </a:spcBef>
+              <a:spcAft>
+                <a:spcPts val="0"/>
               </a:spcAft>
             </a:pPr>
             <a:r>
@@ -5919,10 +5919,10 @@
                 <a:spcPct val="125000"/>
               </a:lnSpc>
               <a:spcBef>
-                <a:spcPts val="200"/>
-              </a:spcBef>
-              <a:spcAft>
-                <a:spcPts val="200"/>
+                <a:spcPts val="0"/>
+              </a:spcBef>
+              <a:spcAft>
+                <a:spcPts val="0"/>
               </a:spcAft>
             </a:pPr>
             <a:r>
@@ -5941,10 +5941,10 @@
                 <a:spcPct val="125000"/>
               </a:lnSpc>
               <a:spcBef>
-                <a:spcPts val="800"/>
-              </a:spcBef>
-              <a:spcAft>
-                <a:spcPts val="300"/>
+                <a:spcPts val="0"/>
+              </a:spcBef>
+              <a:spcAft>
+                <a:spcPts val="0"/>
               </a:spcAft>
             </a:pPr>
             <a:r>
@@ -5963,10 +5963,10 @@
                 <a:spcPct val="125000"/>
               </a:lnSpc>
               <a:spcBef>
-                <a:spcPts val="200"/>
-              </a:spcBef>
-              <a:spcAft>
-                <a:spcPts val="200"/>
+                <a:spcPts val="0"/>
+              </a:spcBef>
+              <a:spcAft>
+                <a:spcPts val="0"/>
               </a:spcAft>
             </a:pPr>
             <a:r>
@@ -6080,7 +6080,7 @@
                 <a:spcPts val="0"/>
               </a:spcBef>
               <a:spcAft>
-                <a:spcPts val="600"/>
+                <a:spcPts val="0"/>
               </a:spcAft>
             </a:pPr>
             <a:r>
@@ -6099,10 +6099,10 @@
                 <a:spcPct val="125000"/>
               </a:lnSpc>
               <a:spcBef>
-                <a:spcPts val="800"/>
-              </a:spcBef>
-              <a:spcAft>
-                <a:spcPts val="300"/>
+                <a:spcPts val="0"/>
+              </a:spcBef>
+              <a:spcAft>
+                <a:spcPts val="0"/>
               </a:spcAft>
             </a:pPr>
             <a:r>
@@ -6121,10 +6121,10 @@
                 <a:spcPct val="125000"/>
               </a:lnSpc>
               <a:spcBef>
-                <a:spcPts val="200"/>
-              </a:spcBef>
-              <a:spcAft>
-                <a:spcPts val="200"/>
+                <a:spcPts val="0"/>
+              </a:spcBef>
+              <a:spcAft>
+                <a:spcPts val="0"/>
               </a:spcAft>
             </a:pPr>
             <a:r>
@@ -6143,10 +6143,10 @@
                 <a:spcPct val="125000"/>
               </a:lnSpc>
               <a:spcBef>
-                <a:spcPts val="800"/>
-              </a:spcBef>
-              <a:spcAft>
-                <a:spcPts val="300"/>
+                <a:spcPts val="0"/>
+              </a:spcBef>
+              <a:spcAft>
+                <a:spcPts val="0"/>
               </a:spcAft>
             </a:pPr>
             <a:r>
@@ -6165,10 +6165,10 @@
                 <a:spcPct val="125000"/>
               </a:lnSpc>
               <a:spcBef>
-                <a:spcPts val="200"/>
-              </a:spcBef>
-              <a:spcAft>
-                <a:spcPts val="200"/>
+                <a:spcPts val="0"/>
+              </a:spcBef>
+              <a:spcAft>
+                <a:spcPts val="0"/>
               </a:spcAft>
             </a:pPr>
             <a:r>
@@ -6187,10 +6187,10 @@
                 <a:spcPct val="125000"/>
               </a:lnSpc>
               <a:spcBef>
-                <a:spcPts val="200"/>
-              </a:spcBef>
-              <a:spcAft>
-                <a:spcPts val="200"/>
+                <a:spcPts val="0"/>
+              </a:spcBef>
+              <a:spcAft>
+                <a:spcPts val="0"/>
               </a:spcAft>
             </a:pPr>
             <a:r>
@@ -6209,10 +6209,10 @@
                 <a:spcPct val="125000"/>
               </a:lnSpc>
               <a:spcBef>
-                <a:spcPts val="200"/>
-              </a:spcBef>
-              <a:spcAft>
-                <a:spcPts val="200"/>
+                <a:spcPts val="0"/>
+              </a:spcBef>
+              <a:spcAft>
+                <a:spcPts val="0"/>
               </a:spcAft>
             </a:pPr>
             <a:r>
@@ -6231,10 +6231,10 @@
                 <a:spcPct val="125000"/>
               </a:lnSpc>
               <a:spcBef>
-                <a:spcPts val="200"/>
-              </a:spcBef>
-              <a:spcAft>
-                <a:spcPts val="200"/>
+                <a:spcPts val="0"/>
+              </a:spcBef>
+              <a:spcAft>
+                <a:spcPts val="0"/>
               </a:spcAft>
             </a:pPr>
             <a:r>
@@ -6253,10 +6253,10 @@
                 <a:spcPct val="125000"/>
               </a:lnSpc>
               <a:spcBef>
-                <a:spcPts val="800"/>
-              </a:spcBef>
-              <a:spcAft>
-                <a:spcPts val="300"/>
+                <a:spcPts val="0"/>
+              </a:spcBef>
+              <a:spcAft>
+                <a:spcPts val="0"/>
               </a:spcAft>
             </a:pPr>
             <a:r>
@@ -6275,10 +6275,10 @@
                 <a:spcPct val="125000"/>
               </a:lnSpc>
               <a:spcBef>
-                <a:spcPts val="200"/>
-              </a:spcBef>
-              <a:spcAft>
-                <a:spcPts val="200"/>
+                <a:spcPts val="0"/>
+              </a:spcBef>
+              <a:spcAft>
+                <a:spcPts val="0"/>
               </a:spcAft>
             </a:pPr>
             <a:r>
@@ -6297,10 +6297,10 @@
                 <a:spcPct val="125000"/>
               </a:lnSpc>
               <a:spcBef>
-                <a:spcPts val="800"/>
-              </a:spcBef>
-              <a:spcAft>
-                <a:spcPts val="300"/>
+                <a:spcPts val="0"/>
+              </a:spcBef>
+              <a:spcAft>
+                <a:spcPts val="0"/>
               </a:spcAft>
             </a:pPr>
             <a:r>
@@ -6319,10 +6319,10 @@
                 <a:spcPct val="125000"/>
               </a:lnSpc>
               <a:spcBef>
-                <a:spcPts val="200"/>
-              </a:spcBef>
-              <a:spcAft>
-                <a:spcPts val="200"/>
+                <a:spcPts val="0"/>
+              </a:spcBef>
+              <a:spcAft>
+                <a:spcPts val="0"/>
               </a:spcAft>
             </a:pPr>
             <a:r>
@@ -6436,7 +6436,7 @@
                 <a:spcPts val="0"/>
               </a:spcBef>
               <a:spcAft>
-                <a:spcPts val="600"/>
+                <a:spcPts val="0"/>
               </a:spcAft>
             </a:pPr>
             <a:r>
@@ -6455,10 +6455,10 @@
                 <a:spcPct val="125000"/>
               </a:lnSpc>
               <a:spcBef>
-                <a:spcPts val="800"/>
-              </a:spcBef>
-              <a:spcAft>
-                <a:spcPts val="300"/>
+                <a:spcPts val="0"/>
+              </a:spcBef>
+              <a:spcAft>
+                <a:spcPts val="0"/>
               </a:spcAft>
             </a:pPr>
             <a:r>
@@ -6477,10 +6477,10 @@
                 <a:spcPct val="125000"/>
               </a:lnSpc>
               <a:spcBef>
-                <a:spcPts val="200"/>
-              </a:spcBef>
-              <a:spcAft>
-                <a:spcPts val="200"/>
+                <a:spcPts val="0"/>
+              </a:spcBef>
+              <a:spcAft>
+                <a:spcPts val="0"/>
               </a:spcAft>
             </a:pPr>
             <a:r>
@@ -6499,10 +6499,10 @@
                 <a:spcPct val="125000"/>
               </a:lnSpc>
               <a:spcBef>
-                <a:spcPts val="800"/>
-              </a:spcBef>
-              <a:spcAft>
-                <a:spcPts val="300"/>
+                <a:spcPts val="0"/>
+              </a:spcBef>
+              <a:spcAft>
+                <a:spcPts val="0"/>
               </a:spcAft>
             </a:pPr>
             <a:r>
@@ -6521,10 +6521,10 @@
                 <a:spcPct val="125000"/>
               </a:lnSpc>
               <a:spcBef>
-                <a:spcPts val="200"/>
-              </a:spcBef>
-              <a:spcAft>
-                <a:spcPts val="200"/>
+                <a:spcPts val="0"/>
+              </a:spcBef>
+              <a:spcAft>
+                <a:spcPts val="0"/>
               </a:spcAft>
             </a:pPr>
             <a:r>
@@ -6543,10 +6543,10 @@
                 <a:spcPct val="125000"/>
               </a:lnSpc>
               <a:spcBef>
-                <a:spcPts val="200"/>
-              </a:spcBef>
-              <a:spcAft>
-                <a:spcPts val="200"/>
+                <a:spcPts val="0"/>
+              </a:spcBef>
+              <a:spcAft>
+                <a:spcPts val="0"/>
               </a:spcAft>
             </a:pPr>
             <a:r>
@@ -6565,10 +6565,10 @@
                 <a:spcPct val="125000"/>
               </a:lnSpc>
               <a:spcBef>
-                <a:spcPts val="800"/>
-              </a:spcBef>
-              <a:spcAft>
-                <a:spcPts val="300"/>
+                <a:spcPts val="0"/>
+              </a:spcBef>
+              <a:spcAft>
+                <a:spcPts val="0"/>
               </a:spcAft>
             </a:pPr>
             <a:r>
@@ -6587,10 +6587,10 @@
                 <a:spcPct val="125000"/>
               </a:lnSpc>
               <a:spcBef>
-                <a:spcPts val="200"/>
-              </a:spcBef>
-              <a:spcAft>
-                <a:spcPts val="200"/>
+                <a:spcPts val="0"/>
+              </a:spcBef>
+              <a:spcAft>
+                <a:spcPts val="0"/>
               </a:spcAft>
             </a:pPr>
             <a:r>
@@ -6609,10 +6609,10 @@
                 <a:spcPct val="125000"/>
               </a:lnSpc>
               <a:spcBef>
-                <a:spcPts val="800"/>
-              </a:spcBef>
-              <a:spcAft>
-                <a:spcPts val="300"/>
+                <a:spcPts val="0"/>
+              </a:spcBef>
+              <a:spcAft>
+                <a:spcPts val="0"/>
               </a:spcAft>
             </a:pPr>
             <a:r>
@@ -6631,10 +6631,10 @@
                 <a:spcPct val="125000"/>
               </a:lnSpc>
               <a:spcBef>
-                <a:spcPts val="200"/>
-              </a:spcBef>
-              <a:spcAft>
-                <a:spcPts val="200"/>
+                <a:spcPts val="0"/>
+              </a:spcBef>
+              <a:spcAft>
+                <a:spcPts val="0"/>
               </a:spcAft>
             </a:pPr>
             <a:r>
@@ -6748,7 +6748,7 @@
                 <a:spcPts val="0"/>
               </a:spcBef>
               <a:spcAft>
-                <a:spcPts val="600"/>
+                <a:spcPts val="0"/>
               </a:spcAft>
             </a:pPr>
             <a:r>
@@ -6767,10 +6767,10 @@
                 <a:spcPct val="125000"/>
               </a:lnSpc>
               <a:spcBef>
-                <a:spcPts val="800"/>
-              </a:spcBef>
-              <a:spcAft>
-                <a:spcPts val="300"/>
+                <a:spcPts val="0"/>
+              </a:spcBef>
+              <a:spcAft>
+                <a:spcPts val="0"/>
               </a:spcAft>
             </a:pPr>
             <a:r>
@@ -6789,10 +6789,10 @@
                 <a:spcPct val="125000"/>
               </a:lnSpc>
               <a:spcBef>
-                <a:spcPts val="200"/>
-              </a:spcBef>
-              <a:spcAft>
-                <a:spcPts val="200"/>
+                <a:spcPts val="0"/>
+              </a:spcBef>
+              <a:spcAft>
+                <a:spcPts val="0"/>
               </a:spcAft>
             </a:pPr>
             <a:r>
@@ -6811,10 +6811,10 @@
                 <a:spcPct val="125000"/>
               </a:lnSpc>
               <a:spcBef>
-                <a:spcPts val="800"/>
-              </a:spcBef>
-              <a:spcAft>
-                <a:spcPts val="300"/>
+                <a:spcPts val="0"/>
+              </a:spcBef>
+              <a:spcAft>
+                <a:spcPts val="0"/>
               </a:spcAft>
             </a:pPr>
             <a:r>
@@ -6833,10 +6833,10 @@
                 <a:spcPct val="125000"/>
               </a:lnSpc>
               <a:spcBef>
-                <a:spcPts val="200"/>
-              </a:spcBef>
-              <a:spcAft>
-                <a:spcPts val="200"/>
+                <a:spcPts val="0"/>
+              </a:spcBef>
+              <a:spcAft>
+                <a:spcPts val="0"/>
               </a:spcAft>
             </a:pPr>
             <a:r>
@@ -6855,10 +6855,10 @@
                 <a:spcPct val="125000"/>
               </a:lnSpc>
               <a:spcBef>
-                <a:spcPts val="200"/>
-              </a:spcBef>
-              <a:spcAft>
-                <a:spcPts val="200"/>
+                <a:spcPts val="0"/>
+              </a:spcBef>
+              <a:spcAft>
+                <a:spcPts val="0"/>
               </a:spcAft>
             </a:pPr>
             <a:r>
@@ -6877,10 +6877,10 @@
                 <a:spcPct val="125000"/>
               </a:lnSpc>
               <a:spcBef>
-                <a:spcPts val="200"/>
-              </a:spcBef>
-              <a:spcAft>
-                <a:spcPts val="200"/>
+                <a:spcPts val="0"/>
+              </a:spcBef>
+              <a:spcAft>
+                <a:spcPts val="0"/>
               </a:spcAft>
             </a:pPr>
             <a:r>
@@ -6899,10 +6899,10 @@
                 <a:spcPct val="125000"/>
               </a:lnSpc>
               <a:spcBef>
-                <a:spcPts val="800"/>
-              </a:spcBef>
-              <a:spcAft>
-                <a:spcPts val="300"/>
+                <a:spcPts val="0"/>
+              </a:spcBef>
+              <a:spcAft>
+                <a:spcPts val="0"/>
               </a:spcAft>
             </a:pPr>
             <a:r>
@@ -6921,10 +6921,10 @@
                 <a:spcPct val="125000"/>
               </a:lnSpc>
               <a:spcBef>
-                <a:spcPts val="200"/>
-              </a:spcBef>
-              <a:spcAft>
-                <a:spcPts val="200"/>
+                <a:spcPts val="0"/>
+              </a:spcBef>
+              <a:spcAft>
+                <a:spcPts val="0"/>
               </a:spcAft>
             </a:pPr>
             <a:r>
@@ -6943,10 +6943,10 @@
                 <a:spcPct val="125000"/>
               </a:lnSpc>
               <a:spcBef>
-                <a:spcPts val="800"/>
-              </a:spcBef>
-              <a:spcAft>
-                <a:spcPts val="300"/>
+                <a:spcPts val="0"/>
+              </a:spcBef>
+              <a:spcAft>
+                <a:spcPts val="0"/>
               </a:spcAft>
             </a:pPr>
             <a:r>
@@ -6965,10 +6965,10 @@
                 <a:spcPct val="125000"/>
               </a:lnSpc>
               <a:spcBef>
-                <a:spcPts val="200"/>
-              </a:spcBef>
-              <a:spcAft>
-                <a:spcPts val="200"/>
+                <a:spcPts val="0"/>
+              </a:spcBef>
+              <a:spcAft>
+                <a:spcPts val="0"/>
               </a:spcAft>
             </a:pPr>
             <a:r>
@@ -7082,7 +7082,7 @@
                 <a:spcPts val="0"/>
               </a:spcBef>
               <a:spcAft>
-                <a:spcPts val="600"/>
+                <a:spcPts val="0"/>
               </a:spcAft>
             </a:pPr>
             <a:r>
@@ -7101,10 +7101,10 @@
                 <a:spcPct val="125000"/>
               </a:lnSpc>
               <a:spcBef>
-                <a:spcPts val="800"/>
-              </a:spcBef>
-              <a:spcAft>
-                <a:spcPts val="300"/>
+                <a:spcPts val="0"/>
+              </a:spcBef>
+              <a:spcAft>
+                <a:spcPts val="0"/>
               </a:spcAft>
             </a:pPr>
             <a:r>
@@ -7123,10 +7123,10 @@
                 <a:spcPct val="125000"/>
               </a:lnSpc>
               <a:spcBef>
-                <a:spcPts val="200"/>
-              </a:spcBef>
-              <a:spcAft>
-                <a:spcPts val="200"/>
+                <a:spcPts val="0"/>
+              </a:spcBef>
+              <a:spcAft>
+                <a:spcPts val="0"/>
               </a:spcAft>
             </a:pPr>
             <a:r>
@@ -7145,10 +7145,10 @@
                 <a:spcPct val="125000"/>
               </a:lnSpc>
               <a:spcBef>
-                <a:spcPts val="800"/>
-              </a:spcBef>
-              <a:spcAft>
-                <a:spcPts val="300"/>
+                <a:spcPts val="0"/>
+              </a:spcBef>
+              <a:spcAft>
+                <a:spcPts val="0"/>
               </a:spcAft>
             </a:pPr>
             <a:r>
@@ -7167,10 +7167,10 @@
                 <a:spcPct val="125000"/>
               </a:lnSpc>
               <a:spcBef>
-                <a:spcPts val="200"/>
-              </a:spcBef>
-              <a:spcAft>
-                <a:spcPts val="200"/>
+                <a:spcPts val="0"/>
+              </a:spcBef>
+              <a:spcAft>
+                <a:spcPts val="0"/>
               </a:spcAft>
             </a:pPr>
             <a:r>
@@ -7189,10 +7189,10 @@
                 <a:spcPct val="125000"/>
               </a:lnSpc>
               <a:spcBef>
-                <a:spcPts val="200"/>
-              </a:spcBef>
-              <a:spcAft>
-                <a:spcPts val="200"/>
+                <a:spcPts val="0"/>
+              </a:spcBef>
+              <a:spcAft>
+                <a:spcPts val="0"/>
               </a:spcAft>
             </a:pPr>
             <a:r>
@@ -7211,10 +7211,10 @@
                 <a:spcPct val="125000"/>
               </a:lnSpc>
               <a:spcBef>
-                <a:spcPts val="800"/>
-              </a:spcBef>
-              <a:spcAft>
-                <a:spcPts val="300"/>
+                <a:spcPts val="0"/>
+              </a:spcBef>
+              <a:spcAft>
+                <a:spcPts val="0"/>
               </a:spcAft>
             </a:pPr>
             <a:r>
@@ -7233,10 +7233,10 @@
                 <a:spcPct val="125000"/>
               </a:lnSpc>
               <a:spcBef>
-                <a:spcPts val="200"/>
-              </a:spcBef>
-              <a:spcAft>
-                <a:spcPts val="200"/>
+                <a:spcPts val="0"/>
+              </a:spcBef>
+              <a:spcAft>
+                <a:spcPts val="0"/>
               </a:spcAft>
             </a:pPr>
             <a:r>
@@ -7255,10 +7255,10 @@
                 <a:spcPct val="125000"/>
               </a:lnSpc>
               <a:spcBef>
-                <a:spcPts val="800"/>
-              </a:spcBef>
-              <a:spcAft>
-                <a:spcPts val="300"/>
+                <a:spcPts val="0"/>
+              </a:spcBef>
+              <a:spcAft>
+                <a:spcPts val="0"/>
               </a:spcAft>
             </a:pPr>
             <a:r>
@@ -7277,10 +7277,10 @@
                 <a:spcPct val="125000"/>
               </a:lnSpc>
               <a:spcBef>
-                <a:spcPts val="200"/>
-              </a:spcBef>
-              <a:spcAft>
-                <a:spcPts val="200"/>
+                <a:spcPts val="0"/>
+              </a:spcBef>
+              <a:spcAft>
+                <a:spcPts val="0"/>
               </a:spcAft>
             </a:pPr>
             <a:r>
@@ -7394,7 +7394,7 @@
                 <a:spcPts val="0"/>
               </a:spcBef>
               <a:spcAft>
-                <a:spcPts val="600"/>
+                <a:spcPts val="0"/>
               </a:spcAft>
             </a:pPr>
             <a:r>
@@ -7413,10 +7413,10 @@
                 <a:spcPct val="125000"/>
               </a:lnSpc>
               <a:spcBef>
-                <a:spcPts val="800"/>
-              </a:spcBef>
-              <a:spcAft>
-                <a:spcPts val="300"/>
+                <a:spcPts val="0"/>
+              </a:spcBef>
+              <a:spcAft>
+                <a:spcPts val="0"/>
               </a:spcAft>
             </a:pPr>
             <a:r>
@@ -7435,10 +7435,10 @@
                 <a:spcPct val="125000"/>
               </a:lnSpc>
               <a:spcBef>
-                <a:spcPts val="200"/>
-              </a:spcBef>
-              <a:spcAft>
-                <a:spcPts val="200"/>
+                <a:spcPts val="0"/>
+              </a:spcBef>
+              <a:spcAft>
+                <a:spcPts val="0"/>
               </a:spcAft>
             </a:pPr>
             <a:r>
@@ -7457,10 +7457,10 @@
                 <a:spcPct val="125000"/>
               </a:lnSpc>
               <a:spcBef>
-                <a:spcPts val="800"/>
-              </a:spcBef>
-              <a:spcAft>
-                <a:spcPts val="300"/>
+                <a:spcPts val="0"/>
+              </a:spcBef>
+              <a:spcAft>
+                <a:spcPts val="0"/>
               </a:spcAft>
             </a:pPr>
             <a:r>
@@ -7479,10 +7479,10 @@
                 <a:spcPct val="125000"/>
               </a:lnSpc>
               <a:spcBef>
-                <a:spcPts val="200"/>
-              </a:spcBef>
-              <a:spcAft>
-                <a:spcPts val="200"/>
+                <a:spcPts val="0"/>
+              </a:spcBef>
+              <a:spcAft>
+                <a:spcPts val="0"/>
               </a:spcAft>
             </a:pPr>
             <a:r>
@@ -7501,10 +7501,10 @@
                 <a:spcPct val="125000"/>
               </a:lnSpc>
               <a:spcBef>
-                <a:spcPts val="200"/>
-              </a:spcBef>
-              <a:spcAft>
-                <a:spcPts val="200"/>
+                <a:spcPts val="0"/>
+              </a:spcBef>
+              <a:spcAft>
+                <a:spcPts val="0"/>
               </a:spcAft>
             </a:pPr>
             <a:r>
@@ -7523,10 +7523,10 @@
                 <a:spcPct val="125000"/>
               </a:lnSpc>
               <a:spcBef>
-                <a:spcPts val="800"/>
-              </a:spcBef>
-              <a:spcAft>
-                <a:spcPts val="300"/>
+                <a:spcPts val="0"/>
+              </a:spcBef>
+              <a:spcAft>
+                <a:spcPts val="0"/>
               </a:spcAft>
             </a:pPr>
             <a:r>
@@ -7545,10 +7545,10 @@
                 <a:spcPct val="125000"/>
               </a:lnSpc>
               <a:spcBef>
-                <a:spcPts val="200"/>
-              </a:spcBef>
-              <a:spcAft>
-                <a:spcPts val="200"/>
+                <a:spcPts val="0"/>
+              </a:spcBef>
+              <a:spcAft>
+                <a:spcPts val="0"/>
               </a:spcAft>
             </a:pPr>
             <a:r>
@@ -7567,10 +7567,10 @@
                 <a:spcPct val="125000"/>
               </a:lnSpc>
               <a:spcBef>
-                <a:spcPts val="800"/>
-              </a:spcBef>
-              <a:spcAft>
-                <a:spcPts val="300"/>
+                <a:spcPts val="0"/>
+              </a:spcBef>
+              <a:spcAft>
+                <a:spcPts val="0"/>
               </a:spcAft>
             </a:pPr>
             <a:r>
@@ -7589,10 +7589,10 @@
                 <a:spcPct val="125000"/>
               </a:lnSpc>
               <a:spcBef>
-                <a:spcPts val="200"/>
-              </a:spcBef>
-              <a:spcAft>
-                <a:spcPts val="200"/>
+                <a:spcPts val="0"/>
+              </a:spcBef>
+              <a:spcAft>
+                <a:spcPts val="0"/>
               </a:spcAft>
             </a:pPr>
             <a:r>
@@ -7706,7 +7706,7 @@
                 <a:spcPts val="0"/>
               </a:spcBef>
               <a:spcAft>
-                <a:spcPts val="600"/>
+                <a:spcPts val="0"/>
               </a:spcAft>
             </a:pPr>
             <a:r>
@@ -7725,10 +7725,10 @@
                 <a:spcPct val="125000"/>
               </a:lnSpc>
               <a:spcBef>
-                <a:spcPts val="800"/>
-              </a:spcBef>
-              <a:spcAft>
-                <a:spcPts val="300"/>
+                <a:spcPts val="0"/>
+              </a:spcBef>
+              <a:spcAft>
+                <a:spcPts val="0"/>
               </a:spcAft>
             </a:pPr>
             <a:r>
@@ -7747,10 +7747,10 @@
                 <a:spcPct val="125000"/>
               </a:lnSpc>
               <a:spcBef>
-                <a:spcPts val="200"/>
-              </a:spcBef>
-              <a:spcAft>
-                <a:spcPts val="200"/>
+                <a:spcPts val="0"/>
+              </a:spcBef>
+              <a:spcAft>
+                <a:spcPts val="0"/>
               </a:spcAft>
             </a:pPr>
             <a:r>
@@ -7769,10 +7769,10 @@
                 <a:spcPct val="125000"/>
               </a:lnSpc>
               <a:spcBef>
-                <a:spcPts val="800"/>
-              </a:spcBef>
-              <a:spcAft>
-                <a:spcPts val="300"/>
+                <a:spcPts val="0"/>
+              </a:spcBef>
+              <a:spcAft>
+                <a:spcPts val="0"/>
               </a:spcAft>
             </a:pPr>
             <a:r>
@@ -7791,10 +7791,10 @@
                 <a:spcPct val="125000"/>
               </a:lnSpc>
               <a:spcBef>
-                <a:spcPts val="200"/>
-              </a:spcBef>
-              <a:spcAft>
-                <a:spcPts val="200"/>
+                <a:spcPts val="0"/>
+              </a:spcBef>
+              <a:spcAft>
+                <a:spcPts val="0"/>
               </a:spcAft>
             </a:pPr>
             <a:r>
@@ -7813,10 +7813,10 @@
                 <a:spcPct val="125000"/>
               </a:lnSpc>
               <a:spcBef>
-                <a:spcPts val="200"/>
-              </a:spcBef>
-              <a:spcAft>
-                <a:spcPts val="200"/>
+                <a:spcPts val="0"/>
+              </a:spcBef>
+              <a:spcAft>
+                <a:spcPts val="0"/>
               </a:spcAft>
             </a:pPr>
             <a:r>
@@ -7835,10 +7835,10 @@
                 <a:spcPct val="125000"/>
               </a:lnSpc>
               <a:spcBef>
-                <a:spcPts val="800"/>
-              </a:spcBef>
-              <a:spcAft>
-                <a:spcPts val="300"/>
+                <a:spcPts val="0"/>
+              </a:spcBef>
+              <a:spcAft>
+                <a:spcPts val="0"/>
               </a:spcAft>
             </a:pPr>
             <a:r>
@@ -7857,10 +7857,10 @@
                 <a:spcPct val="125000"/>
               </a:lnSpc>
               <a:spcBef>
-                <a:spcPts val="200"/>
-              </a:spcBef>
-              <a:spcAft>
-                <a:spcPts val="200"/>
+                <a:spcPts val="0"/>
+              </a:spcBef>
+              <a:spcAft>
+                <a:spcPts val="0"/>
               </a:spcAft>
             </a:pPr>
             <a:r>
@@ -7879,10 +7879,10 @@
                 <a:spcPct val="125000"/>
               </a:lnSpc>
               <a:spcBef>
-                <a:spcPts val="800"/>
-              </a:spcBef>
-              <a:spcAft>
-                <a:spcPts val="300"/>
+                <a:spcPts val="0"/>
+              </a:spcBef>
+              <a:spcAft>
+                <a:spcPts val="0"/>
               </a:spcAft>
             </a:pPr>
             <a:r>
@@ -7901,10 +7901,10 @@
                 <a:spcPct val="125000"/>
               </a:lnSpc>
               <a:spcBef>
-                <a:spcPts val="200"/>
-              </a:spcBef>
-              <a:spcAft>
-                <a:spcPts val="200"/>
+                <a:spcPts val="0"/>
+              </a:spcBef>
+              <a:spcAft>
+                <a:spcPts val="0"/>
               </a:spcAft>
             </a:pPr>
             <a:r>
@@ -8018,7 +8018,7 @@
                 <a:spcPts val="0"/>
               </a:spcBef>
               <a:spcAft>
-                <a:spcPts val="600"/>
+                <a:spcPts val="0"/>
               </a:spcAft>
             </a:pPr>
             <a:r>
@@ -8037,10 +8037,10 @@
                 <a:spcPct val="125000"/>
               </a:lnSpc>
               <a:spcBef>
-                <a:spcPts val="800"/>
-              </a:spcBef>
-              <a:spcAft>
-                <a:spcPts val="300"/>
+                <a:spcPts val="0"/>
+              </a:spcBef>
+              <a:spcAft>
+                <a:spcPts val="0"/>
               </a:spcAft>
             </a:pPr>
             <a:r>
@@ -8059,10 +8059,10 @@
                 <a:spcPct val="125000"/>
               </a:lnSpc>
               <a:spcBef>
-                <a:spcPts val="200"/>
-              </a:spcBef>
-              <a:spcAft>
-                <a:spcPts val="200"/>
+                <a:spcPts val="0"/>
+              </a:spcBef>
+              <a:spcAft>
+                <a:spcPts val="0"/>
               </a:spcAft>
             </a:pPr>
             <a:r>
@@ -8081,10 +8081,10 @@
                 <a:spcPct val="125000"/>
               </a:lnSpc>
               <a:spcBef>
-                <a:spcPts val="800"/>
-              </a:spcBef>
-              <a:spcAft>
-                <a:spcPts val="300"/>
+                <a:spcPts val="0"/>
+              </a:spcBef>
+              <a:spcAft>
+                <a:spcPts val="0"/>
               </a:spcAft>
             </a:pPr>
             <a:r>
@@ -8103,10 +8103,10 @@
                 <a:spcPct val="125000"/>
               </a:lnSpc>
               <a:spcBef>
-                <a:spcPts val="200"/>
-              </a:spcBef>
-              <a:spcAft>
-                <a:spcPts val="200"/>
+                <a:spcPts val="0"/>
+              </a:spcBef>
+              <a:spcAft>
+                <a:spcPts val="0"/>
               </a:spcAft>
             </a:pPr>
             <a:r>
@@ -8125,10 +8125,10 @@
                 <a:spcPct val="125000"/>
               </a:lnSpc>
               <a:spcBef>
-                <a:spcPts val="200"/>
-              </a:spcBef>
-              <a:spcAft>
-                <a:spcPts val="200"/>
+                <a:spcPts val="0"/>
+              </a:spcBef>
+              <a:spcAft>
+                <a:spcPts val="0"/>
               </a:spcAft>
             </a:pPr>
             <a:r>
@@ -8147,10 +8147,10 @@
                 <a:spcPct val="125000"/>
               </a:lnSpc>
               <a:spcBef>
-                <a:spcPts val="800"/>
-              </a:spcBef>
-              <a:spcAft>
-                <a:spcPts val="300"/>
+                <a:spcPts val="0"/>
+              </a:spcBef>
+              <a:spcAft>
+                <a:spcPts val="0"/>
               </a:spcAft>
             </a:pPr>
             <a:r>
@@ -8169,10 +8169,10 @@
                 <a:spcPct val="125000"/>
               </a:lnSpc>
               <a:spcBef>
-                <a:spcPts val="200"/>
-              </a:spcBef>
-              <a:spcAft>
-                <a:spcPts val="200"/>
+                <a:spcPts val="0"/>
+              </a:spcBef>
+              <a:spcAft>
+                <a:spcPts val="0"/>
               </a:spcAft>
             </a:pPr>
             <a:r>
@@ -8191,10 +8191,10 @@
                 <a:spcPct val="125000"/>
               </a:lnSpc>
               <a:spcBef>
-                <a:spcPts val="800"/>
-              </a:spcBef>
-              <a:spcAft>
-                <a:spcPts val="300"/>
+                <a:spcPts val="0"/>
+              </a:spcBef>
+              <a:spcAft>
+                <a:spcPts val="0"/>
               </a:spcAft>
             </a:pPr>
             <a:r>
@@ -8213,10 +8213,10 @@
                 <a:spcPct val="125000"/>
               </a:lnSpc>
               <a:spcBef>
-                <a:spcPts val="200"/>
-              </a:spcBef>
-              <a:spcAft>
-                <a:spcPts val="200"/>
+                <a:spcPts val="0"/>
+              </a:spcBef>
+              <a:spcAft>
+                <a:spcPts val="0"/>
               </a:spcAft>
             </a:pPr>
             <a:r>
@@ -8330,7 +8330,7 @@
                 <a:spcPts val="0"/>
               </a:spcBef>
               <a:spcAft>
-                <a:spcPts val="600"/>
+                <a:spcPts val="0"/>
               </a:spcAft>
             </a:pPr>
             <a:r>
@@ -8349,10 +8349,10 @@
                 <a:spcPct val="125000"/>
               </a:lnSpc>
               <a:spcBef>
-                <a:spcPts val="800"/>
-              </a:spcBef>
-              <a:spcAft>
-                <a:spcPts val="300"/>
+                <a:spcPts val="0"/>
+              </a:spcBef>
+              <a:spcAft>
+                <a:spcPts val="0"/>
               </a:spcAft>
             </a:pPr>
             <a:r>
@@ -8371,10 +8371,10 @@
                 <a:spcPct val="125000"/>
               </a:lnSpc>
               <a:spcBef>
-                <a:spcPts val="200"/>
-              </a:spcBef>
-              <a:spcAft>
-                <a:spcPts val="200"/>
+                <a:spcPts val="0"/>
+              </a:spcBef>
+              <a:spcAft>
+                <a:spcPts val="0"/>
               </a:spcAft>
             </a:pPr>
             <a:r>
@@ -8393,10 +8393,10 @@
                 <a:spcPct val="125000"/>
               </a:lnSpc>
               <a:spcBef>
-                <a:spcPts val="800"/>
-              </a:spcBef>
-              <a:spcAft>
-                <a:spcPts val="300"/>
+                <a:spcPts val="0"/>
+              </a:spcBef>
+              <a:spcAft>
+                <a:spcPts val="0"/>
               </a:spcAft>
             </a:pPr>
             <a:r>
@@ -8415,10 +8415,10 @@
                 <a:spcPct val="125000"/>
               </a:lnSpc>
               <a:spcBef>
-                <a:spcPts val="200"/>
-              </a:spcBef>
-              <a:spcAft>
-                <a:spcPts val="200"/>
+                <a:spcPts val="0"/>
+              </a:spcBef>
+              <a:spcAft>
+                <a:spcPts val="0"/>
               </a:spcAft>
             </a:pPr>
             <a:r>
@@ -8437,10 +8437,10 @@
                 <a:spcPct val="125000"/>
               </a:lnSpc>
               <a:spcBef>
-                <a:spcPts val="200"/>
-              </a:spcBef>
-              <a:spcAft>
-                <a:spcPts val="200"/>
+                <a:spcPts val="0"/>
+              </a:spcBef>
+              <a:spcAft>
+                <a:spcPts val="0"/>
               </a:spcAft>
             </a:pPr>
             <a:r>
@@ -8459,10 +8459,10 @@
                 <a:spcPct val="125000"/>
               </a:lnSpc>
               <a:spcBef>
-                <a:spcPts val="800"/>
-              </a:spcBef>
-              <a:spcAft>
-                <a:spcPts val="300"/>
+                <a:spcPts val="0"/>
+              </a:spcBef>
+              <a:spcAft>
+                <a:spcPts val="0"/>
               </a:spcAft>
             </a:pPr>
             <a:r>
@@ -8481,10 +8481,10 @@
                 <a:spcPct val="125000"/>
               </a:lnSpc>
               <a:spcBef>
-                <a:spcPts val="200"/>
-              </a:spcBef>
-              <a:spcAft>
-                <a:spcPts val="200"/>
+                <a:spcPts val="0"/>
+              </a:spcBef>
+              <a:spcAft>
+                <a:spcPts val="0"/>
               </a:spcAft>
             </a:pPr>
             <a:r>
@@ -8503,10 +8503,10 @@
                 <a:spcPct val="125000"/>
               </a:lnSpc>
               <a:spcBef>
-                <a:spcPts val="800"/>
-              </a:spcBef>
-              <a:spcAft>
-                <a:spcPts val="300"/>
+                <a:spcPts val="0"/>
+              </a:spcBef>
+              <a:spcAft>
+                <a:spcPts val="0"/>
               </a:spcAft>
             </a:pPr>
             <a:r>
@@ -8525,10 +8525,10 @@
                 <a:spcPct val="125000"/>
               </a:lnSpc>
               <a:spcBef>
-                <a:spcPts val="200"/>
-              </a:spcBef>
-              <a:spcAft>
-                <a:spcPts val="200"/>
+                <a:spcPts val="0"/>
+              </a:spcBef>
+              <a:spcAft>
+                <a:spcPts val="0"/>
               </a:spcAft>
             </a:pPr>
             <a:r>
@@ -8642,7 +8642,7 @@
                 <a:spcPts val="0"/>
               </a:spcBef>
               <a:spcAft>
-                <a:spcPts val="600"/>
+                <a:spcPts val="0"/>
               </a:spcAft>
             </a:pPr>
             <a:r>
@@ -8661,10 +8661,10 @@
                 <a:spcPct val="125000"/>
               </a:lnSpc>
               <a:spcBef>
-                <a:spcPts val="800"/>
-              </a:spcBef>
-              <a:spcAft>
-                <a:spcPts val="300"/>
+                <a:spcPts val="0"/>
+              </a:spcBef>
+              <a:spcAft>
+                <a:spcPts val="0"/>
               </a:spcAft>
             </a:pPr>
             <a:r>
@@ -8683,10 +8683,10 @@
                 <a:spcPct val="125000"/>
               </a:lnSpc>
               <a:spcBef>
-                <a:spcPts val="200"/>
-              </a:spcBef>
-              <a:spcAft>
-                <a:spcPts val="200"/>
+                <a:spcPts val="0"/>
+              </a:spcBef>
+              <a:spcAft>
+                <a:spcPts val="0"/>
               </a:spcAft>
             </a:pPr>
             <a:r>
@@ -8705,10 +8705,10 @@
                 <a:spcPct val="125000"/>
               </a:lnSpc>
               <a:spcBef>
-                <a:spcPts val="800"/>
-              </a:spcBef>
-              <a:spcAft>
-                <a:spcPts val="300"/>
+                <a:spcPts val="0"/>
+              </a:spcBef>
+              <a:spcAft>
+                <a:spcPts val="0"/>
               </a:spcAft>
             </a:pPr>
             <a:r>
@@ -8727,10 +8727,10 @@
                 <a:spcPct val="125000"/>
               </a:lnSpc>
               <a:spcBef>
-                <a:spcPts val="200"/>
-              </a:spcBef>
-              <a:spcAft>
-                <a:spcPts val="200"/>
+                <a:spcPts val="0"/>
+              </a:spcBef>
+              <a:spcAft>
+                <a:spcPts val="0"/>
               </a:spcAft>
             </a:pPr>
             <a:r>
@@ -8749,10 +8749,10 @@
                 <a:spcPct val="125000"/>
               </a:lnSpc>
               <a:spcBef>
-                <a:spcPts val="200"/>
-              </a:spcBef>
-              <a:spcAft>
-                <a:spcPts val="200"/>
+                <a:spcPts val="0"/>
+              </a:spcBef>
+              <a:spcAft>
+                <a:spcPts val="0"/>
               </a:spcAft>
             </a:pPr>
             <a:r>
@@ -8771,10 +8771,10 @@
                 <a:spcPct val="125000"/>
               </a:lnSpc>
               <a:spcBef>
-                <a:spcPts val="800"/>
-              </a:spcBef>
-              <a:spcAft>
-                <a:spcPts val="300"/>
+                <a:spcPts val="0"/>
+              </a:spcBef>
+              <a:spcAft>
+                <a:spcPts val="0"/>
               </a:spcAft>
             </a:pPr>
             <a:r>
@@ -8793,10 +8793,10 @@
                 <a:spcPct val="125000"/>
               </a:lnSpc>
               <a:spcBef>
-                <a:spcPts val="200"/>
-              </a:spcBef>
-              <a:spcAft>
-                <a:spcPts val="200"/>
+                <a:spcPts val="0"/>
+              </a:spcBef>
+              <a:spcAft>
+                <a:spcPts val="0"/>
               </a:spcAft>
             </a:pPr>
             <a:r>
@@ -8815,10 +8815,10 @@
                 <a:spcPct val="125000"/>
               </a:lnSpc>
               <a:spcBef>
-                <a:spcPts val="800"/>
-              </a:spcBef>
-              <a:spcAft>
-                <a:spcPts val="300"/>
+                <a:spcPts val="0"/>
+              </a:spcBef>
+              <a:spcAft>
+                <a:spcPts val="0"/>
               </a:spcAft>
             </a:pPr>
             <a:r>
@@ -8837,10 +8837,10 @@
                 <a:spcPct val="125000"/>
               </a:lnSpc>
               <a:spcBef>
-                <a:spcPts val="200"/>
-              </a:spcBef>
-              <a:spcAft>
-                <a:spcPts val="200"/>
+                <a:spcPts val="0"/>
+              </a:spcBef>
+              <a:spcAft>
+                <a:spcPts val="0"/>
               </a:spcAft>
             </a:pPr>
             <a:r>
@@ -8954,7 +8954,7 @@
                 <a:spcPts val="0"/>
               </a:spcBef>
               <a:spcAft>
-                <a:spcPts val="600"/>
+                <a:spcPts val="0"/>
               </a:spcAft>
             </a:pPr>
             <a:r>
@@ -8973,10 +8973,10 @@
                 <a:spcPct val="125000"/>
               </a:lnSpc>
               <a:spcBef>
-                <a:spcPts val="800"/>
-              </a:spcBef>
-              <a:spcAft>
-                <a:spcPts val="300"/>
+                <a:spcPts val="0"/>
+              </a:spcBef>
+              <a:spcAft>
+                <a:spcPts val="0"/>
               </a:spcAft>
             </a:pPr>
             <a:r>
@@ -8995,10 +8995,10 @@
                 <a:spcPct val="125000"/>
               </a:lnSpc>
               <a:spcBef>
-                <a:spcPts val="200"/>
-              </a:spcBef>
-              <a:spcAft>
-                <a:spcPts val="200"/>
+                <a:spcPts val="0"/>
+              </a:spcBef>
+              <a:spcAft>
+                <a:spcPts val="0"/>
               </a:spcAft>
             </a:pPr>
             <a:r>
@@ -9017,10 +9017,10 @@
                 <a:spcPct val="125000"/>
               </a:lnSpc>
               <a:spcBef>
-                <a:spcPts val="800"/>
-              </a:spcBef>
-              <a:spcAft>
-                <a:spcPts val="300"/>
+                <a:spcPts val="0"/>
+              </a:spcBef>
+              <a:spcAft>
+                <a:spcPts val="0"/>
               </a:spcAft>
             </a:pPr>
             <a:r>
@@ -9039,10 +9039,10 @@
                 <a:spcPct val="125000"/>
               </a:lnSpc>
               <a:spcBef>
-                <a:spcPts val="200"/>
-              </a:spcBef>
-              <a:spcAft>
-                <a:spcPts val="200"/>
+                <a:spcPts val="0"/>
+              </a:spcBef>
+              <a:spcAft>
+                <a:spcPts val="0"/>
               </a:spcAft>
             </a:pPr>
             <a:r>
@@ -9061,10 +9061,10 @@
                 <a:spcPct val="125000"/>
               </a:lnSpc>
               <a:spcBef>
-                <a:spcPts val="800"/>
-              </a:spcBef>
-              <a:spcAft>
-                <a:spcPts val="300"/>
+                <a:spcPts val="0"/>
+              </a:spcBef>
+              <a:spcAft>
+                <a:spcPts val="0"/>
               </a:spcAft>
             </a:pPr>
             <a:r>
@@ -9083,10 +9083,10 @@
                 <a:spcPct val="125000"/>
               </a:lnSpc>
               <a:spcBef>
-                <a:spcPts val="200"/>
-              </a:spcBef>
-              <a:spcAft>
-                <a:spcPts val="200"/>
+                <a:spcPts val="0"/>
+              </a:spcBef>
+              <a:spcAft>
+                <a:spcPts val="0"/>
               </a:spcAft>
             </a:pPr>
             <a:r>
@@ -9105,10 +9105,10 @@
                 <a:spcPct val="125000"/>
               </a:lnSpc>
               <a:spcBef>
-                <a:spcPts val="800"/>
-              </a:spcBef>
-              <a:spcAft>
-                <a:spcPts val="300"/>
+                <a:spcPts val="0"/>
+              </a:spcBef>
+              <a:spcAft>
+                <a:spcPts val="0"/>
               </a:spcAft>
             </a:pPr>
             <a:r>
@@ -9127,10 +9127,10 @@
                 <a:spcPct val="125000"/>
               </a:lnSpc>
               <a:spcBef>
-                <a:spcPts val="200"/>
-              </a:spcBef>
-              <a:spcAft>
-                <a:spcPts val="200"/>
+                <a:spcPts val="0"/>
+              </a:spcBef>
+              <a:spcAft>
+                <a:spcPts val="0"/>
               </a:spcAft>
             </a:pPr>
             <a:r>
@@ -9244,7 +9244,7 @@
                 <a:spcPts val="0"/>
               </a:spcBef>
               <a:spcAft>
-                <a:spcPts val="600"/>
+                <a:spcPts val="0"/>
               </a:spcAft>
             </a:pPr>
             <a:r>
@@ -9263,10 +9263,10 @@
                 <a:spcPct val="125000"/>
               </a:lnSpc>
               <a:spcBef>
-                <a:spcPts val="800"/>
-              </a:spcBef>
-              <a:spcAft>
-                <a:spcPts val="300"/>
+                <a:spcPts val="0"/>
+              </a:spcBef>
+              <a:spcAft>
+                <a:spcPts val="0"/>
               </a:spcAft>
             </a:pPr>
             <a:r>
@@ -9285,10 +9285,10 @@
                 <a:spcPct val="125000"/>
               </a:lnSpc>
               <a:spcBef>
-                <a:spcPts val="200"/>
-              </a:spcBef>
-              <a:spcAft>
-                <a:spcPts val="200"/>
+                <a:spcPts val="0"/>
+              </a:spcBef>
+              <a:spcAft>
+                <a:spcPts val="0"/>
               </a:spcAft>
             </a:pPr>
             <a:r>
@@ -9307,10 +9307,10 @@
                 <a:spcPct val="125000"/>
               </a:lnSpc>
               <a:spcBef>
-                <a:spcPts val="800"/>
-              </a:spcBef>
-              <a:spcAft>
-                <a:spcPts val="300"/>
+                <a:spcPts val="0"/>
+              </a:spcBef>
+              <a:spcAft>
+                <a:spcPts val="0"/>
               </a:spcAft>
             </a:pPr>
             <a:r>
@@ -9329,10 +9329,10 @@
                 <a:spcPct val="125000"/>
               </a:lnSpc>
               <a:spcBef>
-                <a:spcPts val="200"/>
-              </a:spcBef>
-              <a:spcAft>
-                <a:spcPts val="200"/>
+                <a:spcPts val="0"/>
+              </a:spcBef>
+              <a:spcAft>
+                <a:spcPts val="0"/>
               </a:spcAft>
             </a:pPr>
             <a:r>
@@ -9351,10 +9351,10 @@
                 <a:spcPct val="125000"/>
               </a:lnSpc>
               <a:spcBef>
-                <a:spcPts val="200"/>
-              </a:spcBef>
-              <a:spcAft>
-                <a:spcPts val="200"/>
+                <a:spcPts val="0"/>
+              </a:spcBef>
+              <a:spcAft>
+                <a:spcPts val="0"/>
               </a:spcAft>
             </a:pPr>
             <a:r>
@@ -9373,10 +9373,10 @@
                 <a:spcPct val="125000"/>
               </a:lnSpc>
               <a:spcBef>
-                <a:spcPts val="200"/>
-              </a:spcBef>
-              <a:spcAft>
-                <a:spcPts val="200"/>
+                <a:spcPts val="0"/>
+              </a:spcBef>
+              <a:spcAft>
+                <a:spcPts val="0"/>
               </a:spcAft>
             </a:pPr>
             <a:r>
@@ -9395,10 +9395,10 @@
                 <a:spcPct val="125000"/>
               </a:lnSpc>
               <a:spcBef>
-                <a:spcPts val="800"/>
-              </a:spcBef>
-              <a:spcAft>
-                <a:spcPts val="300"/>
+                <a:spcPts val="0"/>
+              </a:spcBef>
+              <a:spcAft>
+                <a:spcPts val="0"/>
               </a:spcAft>
             </a:pPr>
             <a:r>
@@ -9417,10 +9417,10 @@
                 <a:spcPct val="125000"/>
               </a:lnSpc>
               <a:spcBef>
-                <a:spcPts val="200"/>
-              </a:spcBef>
-              <a:spcAft>
-                <a:spcPts val="200"/>
+                <a:spcPts val="0"/>
+              </a:spcBef>
+              <a:spcAft>
+                <a:spcPts val="0"/>
               </a:spcAft>
             </a:pPr>
             <a:r>
@@ -9439,10 +9439,10 @@
                 <a:spcPct val="125000"/>
               </a:lnSpc>
               <a:spcBef>
-                <a:spcPts val="800"/>
-              </a:spcBef>
-              <a:spcAft>
-                <a:spcPts val="300"/>
+                <a:spcPts val="0"/>
+              </a:spcBef>
+              <a:spcAft>
+                <a:spcPts val="0"/>
               </a:spcAft>
             </a:pPr>
             <a:r>
@@ -9461,10 +9461,10 @@
                 <a:spcPct val="125000"/>
               </a:lnSpc>
               <a:spcBef>
-                <a:spcPts val="200"/>
-              </a:spcBef>
-              <a:spcAft>
-                <a:spcPts val="200"/>
+                <a:spcPts val="0"/>
+              </a:spcBef>
+              <a:spcAft>
+                <a:spcPts val="0"/>
               </a:spcAft>
             </a:pPr>
             <a:r>
@@ -9578,7 +9578,7 @@
                 <a:spcPts val="0"/>
               </a:spcBef>
               <a:spcAft>
-                <a:spcPts val="600"/>
+                <a:spcPts val="0"/>
               </a:spcAft>
             </a:pPr>
             <a:r>
@@ -9597,10 +9597,10 @@
                 <a:spcPct val="125000"/>
               </a:lnSpc>
               <a:spcBef>
-                <a:spcPts val="800"/>
-              </a:spcBef>
-              <a:spcAft>
-                <a:spcPts val="300"/>
+                <a:spcPts val="0"/>
+              </a:spcBef>
+              <a:spcAft>
+                <a:spcPts val="0"/>
               </a:spcAft>
             </a:pPr>
             <a:r>
@@ -9619,10 +9619,10 @@
                 <a:spcPct val="125000"/>
               </a:lnSpc>
               <a:spcBef>
-                <a:spcPts val="200"/>
-              </a:spcBef>
-              <a:spcAft>
-                <a:spcPts val="200"/>
+                <a:spcPts val="0"/>
+              </a:spcBef>
+              <a:spcAft>
+                <a:spcPts val="0"/>
               </a:spcAft>
             </a:pPr>
             <a:r>
@@ -9641,10 +9641,10 @@
                 <a:spcPct val="125000"/>
               </a:lnSpc>
               <a:spcBef>
-                <a:spcPts val="800"/>
-              </a:spcBef>
-              <a:spcAft>
-                <a:spcPts val="300"/>
+                <a:spcPts val="0"/>
+              </a:spcBef>
+              <a:spcAft>
+                <a:spcPts val="0"/>
               </a:spcAft>
             </a:pPr>
             <a:r>
@@ -9663,10 +9663,10 @@
                 <a:spcPct val="125000"/>
               </a:lnSpc>
               <a:spcBef>
-                <a:spcPts val="200"/>
-              </a:spcBef>
-              <a:spcAft>
-                <a:spcPts val="200"/>
+                <a:spcPts val="0"/>
+              </a:spcBef>
+              <a:spcAft>
+                <a:spcPts val="0"/>
               </a:spcAft>
             </a:pPr>
             <a:r>
@@ -9685,10 +9685,10 @@
                 <a:spcPct val="125000"/>
               </a:lnSpc>
               <a:spcBef>
-                <a:spcPts val="800"/>
-              </a:spcBef>
-              <a:spcAft>
-                <a:spcPts val="300"/>
+                <a:spcPts val="0"/>
+              </a:spcBef>
+              <a:spcAft>
+                <a:spcPts val="0"/>
               </a:spcAft>
             </a:pPr>
             <a:r>
@@ -9707,10 +9707,10 @@
                 <a:spcPct val="125000"/>
               </a:lnSpc>
               <a:spcBef>
-                <a:spcPts val="200"/>
-              </a:spcBef>
-              <a:spcAft>
-                <a:spcPts val="200"/>
+                <a:spcPts val="0"/>
+              </a:spcBef>
+              <a:spcAft>
+                <a:spcPts val="0"/>
               </a:spcAft>
             </a:pPr>
             <a:r>
@@ -9729,10 +9729,10 @@
                 <a:spcPct val="125000"/>
               </a:lnSpc>
               <a:spcBef>
-                <a:spcPts val="800"/>
-              </a:spcBef>
-              <a:spcAft>
-                <a:spcPts val="300"/>
+                <a:spcPts val="0"/>
+              </a:spcBef>
+              <a:spcAft>
+                <a:spcPts val="0"/>
               </a:spcAft>
             </a:pPr>
             <a:r>
@@ -9751,10 +9751,10 @@
                 <a:spcPct val="125000"/>
               </a:lnSpc>
               <a:spcBef>
-                <a:spcPts val="200"/>
-              </a:spcBef>
-              <a:spcAft>
-                <a:spcPts val="200"/>
+                <a:spcPts val="0"/>
+              </a:spcBef>
+              <a:spcAft>
+                <a:spcPts val="0"/>
               </a:spcAft>
             </a:pPr>
             <a:r>
@@ -9868,7 +9868,7 @@
                 <a:spcPts val="0"/>
               </a:spcBef>
               <a:spcAft>
-                <a:spcPts val="600"/>
+                <a:spcPts val="0"/>
               </a:spcAft>
             </a:pPr>
             <a:r>
@@ -9887,10 +9887,10 @@
                 <a:spcPct val="125000"/>
               </a:lnSpc>
               <a:spcBef>
-                <a:spcPts val="800"/>
-              </a:spcBef>
-              <a:spcAft>
-                <a:spcPts val="300"/>
+                <a:spcPts val="0"/>
+              </a:spcBef>
+              <a:spcAft>
+                <a:spcPts val="0"/>
               </a:spcAft>
             </a:pPr>
             <a:r>
@@ -9909,10 +9909,10 @@
                 <a:spcPct val="125000"/>
               </a:lnSpc>
               <a:spcBef>
-                <a:spcPts val="200"/>
-              </a:spcBef>
-              <a:spcAft>
-                <a:spcPts val="200"/>
+                <a:spcPts val="0"/>
+              </a:spcBef>
+              <a:spcAft>
+                <a:spcPts val="0"/>
               </a:spcAft>
             </a:pPr>
             <a:r>
@@ -9931,10 +9931,10 @@
                 <a:spcPct val="125000"/>
               </a:lnSpc>
               <a:spcBef>
-                <a:spcPts val="800"/>
-              </a:spcBef>
-              <a:spcAft>
-                <a:spcPts val="300"/>
+                <a:spcPts val="0"/>
+              </a:spcBef>
+              <a:spcAft>
+                <a:spcPts val="0"/>
               </a:spcAft>
             </a:pPr>
             <a:r>
@@ -9953,10 +9953,10 @@
                 <a:spcPct val="125000"/>
               </a:lnSpc>
               <a:spcBef>
-                <a:spcPts val="200"/>
-              </a:spcBef>
-              <a:spcAft>
-                <a:spcPts val="200"/>
+                <a:spcPts val="0"/>
+              </a:spcBef>
+              <a:spcAft>
+                <a:spcPts val="0"/>
               </a:spcAft>
             </a:pPr>
             <a:r>
@@ -9975,10 +9975,10 @@
                 <a:spcPct val="125000"/>
               </a:lnSpc>
               <a:spcBef>
-                <a:spcPts val="800"/>
-              </a:spcBef>
-              <a:spcAft>
-                <a:spcPts val="300"/>
+                <a:spcPts val="0"/>
+              </a:spcBef>
+              <a:spcAft>
+                <a:spcPts val="0"/>
               </a:spcAft>
             </a:pPr>
             <a:r>
@@ -9997,10 +9997,10 @@
                 <a:spcPct val="125000"/>
               </a:lnSpc>
               <a:spcBef>
-                <a:spcPts val="200"/>
-              </a:spcBef>
-              <a:spcAft>
-                <a:spcPts val="200"/>
+                <a:spcPts val="0"/>
+              </a:spcBef>
+              <a:spcAft>
+                <a:spcPts val="0"/>
               </a:spcAft>
             </a:pPr>
             <a:r>
@@ -10019,10 +10019,10 @@
                 <a:spcPct val="125000"/>
               </a:lnSpc>
               <a:spcBef>
-                <a:spcPts val="800"/>
-              </a:spcBef>
-              <a:spcAft>
-                <a:spcPts val="300"/>
+                <a:spcPts val="0"/>
+              </a:spcBef>
+              <a:spcAft>
+                <a:spcPts val="0"/>
               </a:spcAft>
             </a:pPr>
             <a:r>
@@ -10041,10 +10041,10 @@
                 <a:spcPct val="125000"/>
               </a:lnSpc>
               <a:spcBef>
-                <a:spcPts val="200"/>
-              </a:spcBef>
-              <a:spcAft>
-                <a:spcPts val="200"/>
+                <a:spcPts val="0"/>
+              </a:spcBef>
+              <a:spcAft>
+                <a:spcPts val="0"/>
               </a:spcAft>
             </a:pPr>
             <a:r>
@@ -10158,7 +10158,7 @@
                 <a:spcPts val="0"/>
               </a:spcBef>
               <a:spcAft>
-                <a:spcPts val="600"/>
+                <a:spcPts val="0"/>
               </a:spcAft>
             </a:pPr>
             <a:r>
@@ -10177,10 +10177,10 @@
                 <a:spcPct val="125000"/>
               </a:lnSpc>
               <a:spcBef>
-                <a:spcPts val="800"/>
-              </a:spcBef>
-              <a:spcAft>
-                <a:spcPts val="300"/>
+                <a:spcPts val="0"/>
+              </a:spcBef>
+              <a:spcAft>
+                <a:spcPts val="0"/>
               </a:spcAft>
             </a:pPr>
             <a:r>
@@ -10199,10 +10199,10 @@
                 <a:spcPct val="125000"/>
               </a:lnSpc>
               <a:spcBef>
-                <a:spcPts val="200"/>
-              </a:spcBef>
-              <a:spcAft>
-                <a:spcPts val="200"/>
+                <a:spcPts val="0"/>
+              </a:spcBef>
+              <a:spcAft>
+                <a:spcPts val="0"/>
               </a:spcAft>
             </a:pPr>
             <a:r>
@@ -10221,10 +10221,10 @@
                 <a:spcPct val="125000"/>
               </a:lnSpc>
               <a:spcBef>
-                <a:spcPts val="800"/>
-              </a:spcBef>
-              <a:spcAft>
-                <a:spcPts val="300"/>
+                <a:spcPts val="0"/>
+              </a:spcBef>
+              <a:spcAft>
+                <a:spcPts val="0"/>
               </a:spcAft>
             </a:pPr>
             <a:r>
@@ -10243,10 +10243,10 @@
                 <a:spcPct val="125000"/>
               </a:lnSpc>
               <a:spcBef>
-                <a:spcPts val="200"/>
-              </a:spcBef>
-              <a:spcAft>
-                <a:spcPts val="200"/>
+                <a:spcPts val="0"/>
+              </a:spcBef>
+              <a:spcAft>
+                <a:spcPts val="0"/>
               </a:spcAft>
             </a:pPr>
             <a:r>
@@ -10265,10 +10265,10 @@
                 <a:spcPct val="125000"/>
               </a:lnSpc>
               <a:spcBef>
-                <a:spcPts val="200"/>
-              </a:spcBef>
-              <a:spcAft>
-                <a:spcPts val="200"/>
+                <a:spcPts val="0"/>
+              </a:spcBef>
+              <a:spcAft>
+                <a:spcPts val="0"/>
               </a:spcAft>
             </a:pPr>
             <a:r>
@@ -10287,10 +10287,10 @@
                 <a:spcPct val="125000"/>
               </a:lnSpc>
               <a:spcBef>
-                <a:spcPts val="800"/>
-              </a:spcBef>
-              <a:spcAft>
-                <a:spcPts val="300"/>
+                <a:spcPts val="0"/>
+              </a:spcBef>
+              <a:spcAft>
+                <a:spcPts val="0"/>
               </a:spcAft>
             </a:pPr>
             <a:r>
@@ -10309,10 +10309,10 @@
                 <a:spcPct val="125000"/>
               </a:lnSpc>
               <a:spcBef>
-                <a:spcPts val="200"/>
-              </a:spcBef>
-              <a:spcAft>
-                <a:spcPts val="200"/>
+                <a:spcPts val="0"/>
+              </a:spcBef>
+              <a:spcAft>
+                <a:spcPts val="0"/>
               </a:spcAft>
             </a:pPr>
             <a:r>
@@ -10331,10 +10331,10 @@
                 <a:spcPct val="125000"/>
               </a:lnSpc>
               <a:spcBef>
-                <a:spcPts val="800"/>
-              </a:spcBef>
-              <a:spcAft>
-                <a:spcPts val="300"/>
+                <a:spcPts val="0"/>
+              </a:spcBef>
+              <a:spcAft>
+                <a:spcPts val="0"/>
               </a:spcAft>
             </a:pPr>
             <a:r>
@@ -10353,10 +10353,10 @@
                 <a:spcPct val="125000"/>
               </a:lnSpc>
               <a:spcBef>
-                <a:spcPts val="200"/>
-              </a:spcBef>
-              <a:spcAft>
-                <a:spcPts val="200"/>
+                <a:spcPts val="0"/>
+              </a:spcBef>
+              <a:spcAft>
+                <a:spcPts val="0"/>
               </a:spcAft>
             </a:pPr>
             <a:r>
@@ -10470,7 +10470,7 @@
                 <a:spcPts val="0"/>
               </a:spcBef>
               <a:spcAft>
-                <a:spcPts val="600"/>
+                <a:spcPts val="0"/>
               </a:spcAft>
             </a:pPr>
             <a:r>
@@ -10489,10 +10489,10 @@
                 <a:spcPct val="125000"/>
               </a:lnSpc>
               <a:spcBef>
-                <a:spcPts val="800"/>
-              </a:spcBef>
-              <a:spcAft>
-                <a:spcPts val="300"/>
+                <a:spcPts val="0"/>
+              </a:spcBef>
+              <a:spcAft>
+                <a:spcPts val="0"/>
               </a:spcAft>
             </a:pPr>
             <a:r>
@@ -10511,10 +10511,10 @@
                 <a:spcPct val="125000"/>
               </a:lnSpc>
               <a:spcBef>
-                <a:spcPts val="200"/>
-              </a:spcBef>
-              <a:spcAft>
-                <a:spcPts val="200"/>
+                <a:spcPts val="0"/>
+              </a:spcBef>
+              <a:spcAft>
+                <a:spcPts val="0"/>
               </a:spcAft>
             </a:pPr>
             <a:r>
@@ -10533,10 +10533,10 @@
                 <a:spcPct val="125000"/>
               </a:lnSpc>
               <a:spcBef>
-                <a:spcPts val="800"/>
-              </a:spcBef>
-              <a:spcAft>
-                <a:spcPts val="300"/>
+                <a:spcPts val="0"/>
+              </a:spcBef>
+              <a:spcAft>
+                <a:spcPts val="0"/>
               </a:spcAft>
             </a:pPr>
             <a:r>
@@ -10555,10 +10555,10 @@
                 <a:spcPct val="125000"/>
               </a:lnSpc>
               <a:spcBef>
-                <a:spcPts val="200"/>
-              </a:spcBef>
-              <a:spcAft>
-                <a:spcPts val="200"/>
+                <a:spcPts val="0"/>
+              </a:spcBef>
+              <a:spcAft>
+                <a:spcPts val="0"/>
               </a:spcAft>
             </a:pPr>
             <a:r>
@@ -10577,10 +10577,10 @@
                 <a:spcPct val="125000"/>
               </a:lnSpc>
               <a:spcBef>
-                <a:spcPts val="200"/>
-              </a:spcBef>
-              <a:spcAft>
-                <a:spcPts val="200"/>
+                <a:spcPts val="0"/>
+              </a:spcBef>
+              <a:spcAft>
+                <a:spcPts val="0"/>
               </a:spcAft>
             </a:pPr>
             <a:r>
@@ -10599,10 +10599,10 @@
                 <a:spcPct val="125000"/>
               </a:lnSpc>
               <a:spcBef>
-                <a:spcPts val="800"/>
-              </a:spcBef>
-              <a:spcAft>
-                <a:spcPts val="300"/>
+                <a:spcPts val="0"/>
+              </a:spcBef>
+              <a:spcAft>
+                <a:spcPts val="0"/>
               </a:spcAft>
             </a:pPr>
             <a:r>
@@ -10621,10 +10621,10 @@
                 <a:spcPct val="125000"/>
               </a:lnSpc>
               <a:spcBef>
-                <a:spcPts val="200"/>
-              </a:spcBef>
-              <a:spcAft>
-                <a:spcPts val="200"/>
+                <a:spcPts val="0"/>
+              </a:spcBef>
+              <a:spcAft>
+                <a:spcPts val="0"/>
               </a:spcAft>
             </a:pPr>
             <a:r>
@@ -10643,10 +10643,10 @@
                 <a:spcPct val="125000"/>
               </a:lnSpc>
               <a:spcBef>
-                <a:spcPts val="800"/>
-              </a:spcBef>
-              <a:spcAft>
-                <a:spcPts val="300"/>
+                <a:spcPts val="0"/>
+              </a:spcBef>
+              <a:spcAft>
+                <a:spcPts val="0"/>
               </a:spcAft>
             </a:pPr>
             <a:r>
@@ -10665,10 +10665,10 @@
                 <a:spcPct val="125000"/>
               </a:lnSpc>
               <a:spcBef>
-                <a:spcPts val="200"/>
-              </a:spcBef>
-              <a:spcAft>
-                <a:spcPts val="200"/>
+                <a:spcPts val="0"/>
+              </a:spcBef>
+              <a:spcAft>
+                <a:spcPts val="0"/>
               </a:spcAft>
             </a:pPr>
             <a:r>
@@ -10782,7 +10782,7 @@
                 <a:spcPts val="0"/>
               </a:spcBef>
               <a:spcAft>
-                <a:spcPts val="600"/>
+                <a:spcPts val="0"/>
               </a:spcAft>
             </a:pPr>
             <a:r>
@@ -10801,10 +10801,10 @@
                 <a:spcPct val="125000"/>
               </a:lnSpc>
               <a:spcBef>
-                <a:spcPts val="800"/>
-              </a:spcBef>
-              <a:spcAft>
-                <a:spcPts val="300"/>
+                <a:spcPts val="0"/>
+              </a:spcBef>
+              <a:spcAft>
+                <a:spcPts val="0"/>
               </a:spcAft>
             </a:pPr>
             <a:r>
@@ -10823,10 +10823,10 @@
                 <a:spcPct val="125000"/>
               </a:lnSpc>
               <a:spcBef>
-                <a:spcPts val="200"/>
-              </a:spcBef>
-              <a:spcAft>
-                <a:spcPts val="200"/>
+                <a:spcPts val="0"/>
+              </a:spcBef>
+              <a:spcAft>
+                <a:spcPts val="0"/>
               </a:spcAft>
             </a:pPr>
             <a:r>
@@ -10845,10 +10845,10 @@
                 <a:spcPct val="125000"/>
               </a:lnSpc>
               <a:spcBef>
-                <a:spcPts val="800"/>
-              </a:spcBef>
-              <a:spcAft>
-                <a:spcPts val="300"/>
+                <a:spcPts val="0"/>
+              </a:spcBef>
+              <a:spcAft>
+                <a:spcPts val="0"/>
               </a:spcAft>
             </a:pPr>
             <a:r>
@@ -10867,10 +10867,10 @@
                 <a:spcPct val="125000"/>
               </a:lnSpc>
               <a:spcBef>
-                <a:spcPts val="200"/>
-              </a:spcBef>
-              <a:spcAft>
-                <a:spcPts val="200"/>
+                <a:spcPts val="0"/>
+              </a:spcBef>
+              <a:spcAft>
+                <a:spcPts val="0"/>
               </a:spcAft>
             </a:pPr>
             <a:r>
@@ -10889,10 +10889,10 @@
                 <a:spcPct val="125000"/>
               </a:lnSpc>
               <a:spcBef>
-                <a:spcPts val="200"/>
-              </a:spcBef>
-              <a:spcAft>
-                <a:spcPts val="200"/>
+                <a:spcPts val="0"/>
+              </a:spcBef>
+              <a:spcAft>
+                <a:spcPts val="0"/>
               </a:spcAft>
             </a:pPr>
             <a:r>
@@ -10911,10 +10911,10 @@
                 <a:spcPct val="125000"/>
               </a:lnSpc>
               <a:spcBef>
-                <a:spcPts val="800"/>
-              </a:spcBef>
-              <a:spcAft>
-                <a:spcPts val="300"/>
+                <a:spcPts val="0"/>
+              </a:spcBef>
+              <a:spcAft>
+                <a:spcPts val="0"/>
               </a:spcAft>
             </a:pPr>
             <a:r>
@@ -10933,10 +10933,10 @@
                 <a:spcPct val="125000"/>
               </a:lnSpc>
               <a:spcBef>
-                <a:spcPts val="200"/>
-              </a:spcBef>
-              <a:spcAft>
-                <a:spcPts val="200"/>
+                <a:spcPts val="0"/>
+              </a:spcBef>
+              <a:spcAft>
+                <a:spcPts val="0"/>
               </a:spcAft>
             </a:pPr>
             <a:r>
@@ -10955,10 +10955,10 @@
                 <a:spcPct val="125000"/>
               </a:lnSpc>
               <a:spcBef>
-                <a:spcPts val="800"/>
-              </a:spcBef>
-              <a:spcAft>
-                <a:spcPts val="300"/>
+                <a:spcPts val="0"/>
+              </a:spcBef>
+              <a:spcAft>
+                <a:spcPts val="0"/>
               </a:spcAft>
             </a:pPr>
             <a:r>
@@ -10977,10 +10977,10 @@
                 <a:spcPct val="125000"/>
               </a:lnSpc>
               <a:spcBef>
-                <a:spcPts val="200"/>
-              </a:spcBef>
-              <a:spcAft>
-                <a:spcPts val="200"/>
+                <a:spcPts val="0"/>
+              </a:spcBef>
+              <a:spcAft>
+                <a:spcPts val="0"/>
               </a:spcAft>
             </a:pPr>
             <a:r>
@@ -11094,7 +11094,7 @@
                 <a:spcPts val="0"/>
               </a:spcBef>
               <a:spcAft>
-                <a:spcPts val="600"/>
+                <a:spcPts val="0"/>
               </a:spcAft>
             </a:pPr>
             <a:r>
@@ -11113,10 +11113,10 @@
                 <a:spcPct val="125000"/>
               </a:lnSpc>
               <a:spcBef>
-                <a:spcPts val="800"/>
-              </a:spcBef>
-              <a:spcAft>
-                <a:spcPts val="300"/>
+                <a:spcPts val="0"/>
+              </a:spcBef>
+              <a:spcAft>
+                <a:spcPts val="0"/>
               </a:spcAft>
             </a:pPr>
             <a:r>
@@ -11135,10 +11135,10 @@
                 <a:spcPct val="125000"/>
               </a:lnSpc>
               <a:spcBef>
-                <a:spcPts val="200"/>
-              </a:spcBef>
-              <a:spcAft>
-                <a:spcPts val="200"/>
+                <a:spcPts val="0"/>
+              </a:spcBef>
+              <a:spcAft>
+                <a:spcPts val="0"/>
               </a:spcAft>
             </a:pPr>
             <a:r>
@@ -11157,10 +11157,10 @@
                 <a:spcPct val="125000"/>
               </a:lnSpc>
               <a:spcBef>
-                <a:spcPts val="800"/>
-              </a:spcBef>
-              <a:spcAft>
-                <a:spcPts val="300"/>
+                <a:spcPts val="0"/>
+              </a:spcBef>
+              <a:spcAft>
+                <a:spcPts val="0"/>
               </a:spcAft>
             </a:pPr>
             <a:r>
@@ -11179,10 +11179,10 @@
                 <a:spcPct val="125000"/>
               </a:lnSpc>
               <a:spcBef>
-                <a:spcPts val="200"/>
-              </a:spcBef>
-              <a:spcAft>
-                <a:spcPts val="200"/>
+                <a:spcPts val="0"/>
+              </a:spcBef>
+              <a:spcAft>
+                <a:spcPts val="0"/>
               </a:spcAft>
             </a:pPr>
             <a:r>
@@ -11201,10 +11201,10 @@
                 <a:spcPct val="125000"/>
               </a:lnSpc>
               <a:spcBef>
-                <a:spcPts val="200"/>
-              </a:spcBef>
-              <a:spcAft>
-                <a:spcPts val="200"/>
+                <a:spcPts val="0"/>
+              </a:spcBef>
+              <a:spcAft>
+                <a:spcPts val="0"/>
               </a:spcAft>
             </a:pPr>
             <a:r>
@@ -11223,10 +11223,10 @@
                 <a:spcPct val="125000"/>
               </a:lnSpc>
               <a:spcBef>
-                <a:spcPts val="800"/>
-              </a:spcBef>
-              <a:spcAft>
-                <a:spcPts val="300"/>
+                <a:spcPts val="0"/>
+              </a:spcBef>
+              <a:spcAft>
+                <a:spcPts val="0"/>
               </a:spcAft>
             </a:pPr>
             <a:r>
@@ -11245,10 +11245,10 @@
                 <a:spcPct val="125000"/>
               </a:lnSpc>
               <a:spcBef>
-                <a:spcPts val="200"/>
-              </a:spcBef>
-              <a:spcAft>
-                <a:spcPts val="200"/>
+                <a:spcPts val="0"/>
+              </a:spcBef>
+              <a:spcAft>
+                <a:spcPts val="0"/>
               </a:spcAft>
             </a:pPr>
             <a:r>
@@ -11267,10 +11267,10 @@
                 <a:spcPct val="125000"/>
               </a:lnSpc>
               <a:spcBef>
-                <a:spcPts val="800"/>
-              </a:spcBef>
-              <a:spcAft>
-                <a:spcPts val="300"/>
+                <a:spcPts val="0"/>
+              </a:spcBef>
+              <a:spcAft>
+                <a:spcPts val="0"/>
               </a:spcAft>
             </a:pPr>
             <a:r>
@@ -11289,10 +11289,10 @@
                 <a:spcPct val="125000"/>
               </a:lnSpc>
               <a:spcBef>
-                <a:spcPts val="200"/>
-              </a:spcBef>
-              <a:spcAft>
-                <a:spcPts val="200"/>
+                <a:spcPts val="0"/>
+              </a:spcBef>
+              <a:spcAft>
+                <a:spcPts val="0"/>
               </a:spcAft>
             </a:pPr>
             <a:r>
@@ -11406,7 +11406,7 @@
                 <a:spcPts val="0"/>
               </a:spcBef>
               <a:spcAft>
-                <a:spcPts val="600"/>
+                <a:spcPts val="0"/>
               </a:spcAft>
             </a:pPr>
             <a:r>
@@ -11425,10 +11425,10 @@
                 <a:spcPct val="125000"/>
               </a:lnSpc>
               <a:spcBef>
-                <a:spcPts val="800"/>
-              </a:spcBef>
-              <a:spcAft>
-                <a:spcPts val="300"/>
+                <a:spcPts val="0"/>
+              </a:spcBef>
+              <a:spcAft>
+                <a:spcPts val="0"/>
               </a:spcAft>
             </a:pPr>
             <a:r>
@@ -11447,10 +11447,10 @@
                 <a:spcPct val="125000"/>
               </a:lnSpc>
               <a:spcBef>
-                <a:spcPts val="200"/>
-              </a:spcBef>
-              <a:spcAft>
-                <a:spcPts val="200"/>
+                <a:spcPts val="0"/>
+              </a:spcBef>
+              <a:spcAft>
+                <a:spcPts val="0"/>
               </a:spcAft>
             </a:pPr>
             <a:r>
@@ -11469,10 +11469,10 @@
                 <a:spcPct val="125000"/>
               </a:lnSpc>
               <a:spcBef>
-                <a:spcPts val="800"/>
-              </a:spcBef>
-              <a:spcAft>
-                <a:spcPts val="300"/>
+                <a:spcPts val="0"/>
+              </a:spcBef>
+              <a:spcAft>
+                <a:spcPts val="0"/>
               </a:spcAft>
             </a:pPr>
             <a:r>
@@ -11491,10 +11491,10 @@
                 <a:spcPct val="125000"/>
               </a:lnSpc>
               <a:spcBef>
-                <a:spcPts val="200"/>
-              </a:spcBef>
-              <a:spcAft>
-                <a:spcPts val="200"/>
+                <a:spcPts val="0"/>
+              </a:spcBef>
+              <a:spcAft>
+                <a:spcPts val="0"/>
               </a:spcAft>
             </a:pPr>
             <a:r>
@@ -11513,10 +11513,10 @@
                 <a:spcPct val="125000"/>
               </a:lnSpc>
               <a:spcBef>
-                <a:spcPts val="200"/>
-              </a:spcBef>
-              <a:spcAft>
-                <a:spcPts val="200"/>
+                <a:spcPts val="0"/>
+              </a:spcBef>
+              <a:spcAft>
+                <a:spcPts val="0"/>
               </a:spcAft>
             </a:pPr>
             <a:r>
@@ -11535,10 +11535,10 @@
                 <a:spcPct val="125000"/>
               </a:lnSpc>
               <a:spcBef>
-                <a:spcPts val="200"/>
-              </a:spcBef>
-              <a:spcAft>
-                <a:spcPts val="200"/>
+                <a:spcPts val="0"/>
+              </a:spcBef>
+              <a:spcAft>
+                <a:spcPts val="0"/>
               </a:spcAft>
             </a:pPr>
             <a:r>
@@ -11557,10 +11557,10 @@
                 <a:spcPct val="125000"/>
               </a:lnSpc>
               <a:spcBef>
-                <a:spcPts val="800"/>
-              </a:spcBef>
-              <a:spcAft>
-                <a:spcPts val="300"/>
+                <a:spcPts val="0"/>
+              </a:spcBef>
+              <a:spcAft>
+                <a:spcPts val="0"/>
               </a:spcAft>
             </a:pPr>
             <a:r>
@@ -11579,10 +11579,10 @@
                 <a:spcPct val="125000"/>
               </a:lnSpc>
               <a:spcBef>
-                <a:spcPts val="200"/>
-              </a:spcBef>
-              <a:spcAft>
-                <a:spcPts val="200"/>
+                <a:spcPts val="0"/>
+              </a:spcBef>
+              <a:spcAft>
+                <a:spcPts val="0"/>
               </a:spcAft>
             </a:pPr>
             <a:r>
@@ -11601,10 +11601,10 @@
                 <a:spcPct val="125000"/>
               </a:lnSpc>
               <a:spcBef>
-                <a:spcPts val="800"/>
-              </a:spcBef>
-              <a:spcAft>
-                <a:spcPts val="300"/>
+                <a:spcPts val="0"/>
+              </a:spcBef>
+              <a:spcAft>
+                <a:spcPts val="0"/>
               </a:spcAft>
             </a:pPr>
             <a:r>
@@ -11623,10 +11623,10 @@
                 <a:spcPct val="125000"/>
               </a:lnSpc>
               <a:spcBef>
-                <a:spcPts val="200"/>
-              </a:spcBef>
-              <a:spcAft>
-                <a:spcPts val="200"/>
+                <a:spcPts val="0"/>
+              </a:spcBef>
+              <a:spcAft>
+                <a:spcPts val="0"/>
               </a:spcAft>
             </a:pPr>
             <a:r>
@@ -11740,7 +11740,7 @@
                 <a:spcPts val="0"/>
               </a:spcBef>
               <a:spcAft>
-                <a:spcPts val="600"/>
+                <a:spcPts val="0"/>
               </a:spcAft>
             </a:pPr>
             <a:r>
@@ -11759,10 +11759,10 @@
                 <a:spcPct val="125000"/>
               </a:lnSpc>
               <a:spcBef>
-                <a:spcPts val="800"/>
-              </a:spcBef>
-              <a:spcAft>
-                <a:spcPts val="300"/>
+                <a:spcPts val="0"/>
+              </a:spcBef>
+              <a:spcAft>
+                <a:spcPts val="0"/>
               </a:spcAft>
             </a:pPr>
             <a:r>
@@ -11781,10 +11781,10 @@
                 <a:spcPct val="125000"/>
               </a:lnSpc>
               <a:spcBef>
-                <a:spcPts val="200"/>
-              </a:spcBef>
-              <a:spcAft>
-                <a:spcPts val="200"/>
+                <a:spcPts val="0"/>
+              </a:spcBef>
+              <a:spcAft>
+                <a:spcPts val="0"/>
               </a:spcAft>
             </a:pPr>
             <a:r>
@@ -11803,10 +11803,10 @@
                 <a:spcPct val="125000"/>
               </a:lnSpc>
               <a:spcBef>
-                <a:spcPts val="800"/>
-              </a:spcBef>
-              <a:spcAft>
-                <a:spcPts val="300"/>
+                <a:spcPts val="0"/>
+              </a:spcBef>
+              <a:spcAft>
+                <a:spcPts val="0"/>
               </a:spcAft>
             </a:pPr>
             <a:r>
@@ -11825,10 +11825,10 @@
                 <a:spcPct val="125000"/>
               </a:lnSpc>
               <a:spcBef>
-                <a:spcPts val="200"/>
-              </a:spcBef>
-              <a:spcAft>
-                <a:spcPts val="200"/>
+                <a:spcPts val="0"/>
+              </a:spcBef>
+              <a:spcAft>
+                <a:spcPts val="0"/>
               </a:spcAft>
             </a:pPr>
             <a:r>
@@ -11847,10 +11847,10 @@
                 <a:spcPct val="125000"/>
               </a:lnSpc>
               <a:spcBef>
-                <a:spcPts val="200"/>
-              </a:spcBef>
-              <a:spcAft>
-                <a:spcPts val="200"/>
+                <a:spcPts val="0"/>
+              </a:spcBef>
+              <a:spcAft>
+                <a:spcPts val="0"/>
               </a:spcAft>
             </a:pPr>
             <a:r>
@@ -11869,10 +11869,10 @@
                 <a:spcPct val="125000"/>
               </a:lnSpc>
               <a:spcBef>
-                <a:spcPts val="800"/>
-              </a:spcBef>
-              <a:spcAft>
-                <a:spcPts val="300"/>
+                <a:spcPts val="0"/>
+              </a:spcBef>
+              <a:spcAft>
+                <a:spcPts val="0"/>
               </a:spcAft>
             </a:pPr>
             <a:r>
@@ -11891,10 +11891,10 @@
                 <a:spcPct val="125000"/>
               </a:lnSpc>
               <a:spcBef>
-                <a:spcPts val="200"/>
-              </a:spcBef>
-              <a:spcAft>
-                <a:spcPts val="200"/>
+                <a:spcPts val="0"/>
+              </a:spcBef>
+              <a:spcAft>
+                <a:spcPts val="0"/>
               </a:spcAft>
             </a:pPr>
             <a:r>
@@ -11913,10 +11913,10 @@
                 <a:spcPct val="125000"/>
               </a:lnSpc>
               <a:spcBef>
-                <a:spcPts val="800"/>
-              </a:spcBef>
-              <a:spcAft>
-                <a:spcPts val="300"/>
+                <a:spcPts val="0"/>
+              </a:spcBef>
+              <a:spcAft>
+                <a:spcPts val="0"/>
               </a:spcAft>
             </a:pPr>
             <a:r>
@@ -11935,10 +11935,10 @@
                 <a:spcPct val="125000"/>
               </a:lnSpc>
               <a:spcBef>
-                <a:spcPts val="200"/>
-              </a:spcBef>
-              <a:spcAft>
-                <a:spcPts val="200"/>
+                <a:spcPts val="0"/>
+              </a:spcBef>
+              <a:spcAft>
+                <a:spcPts val="0"/>
               </a:spcAft>
             </a:pPr>
             <a:r>
@@ -12052,7 +12052,7 @@
                 <a:spcPts val="0"/>
               </a:spcBef>
               <a:spcAft>
-                <a:spcPts val="600"/>
+                <a:spcPts val="0"/>
               </a:spcAft>
             </a:pPr>
             <a:r>
@@ -12071,10 +12071,10 @@
                 <a:spcPct val="125000"/>
               </a:lnSpc>
               <a:spcBef>
-                <a:spcPts val="800"/>
-              </a:spcBef>
-              <a:spcAft>
-                <a:spcPts val="300"/>
+                <a:spcPts val="0"/>
+              </a:spcBef>
+              <a:spcAft>
+                <a:spcPts val="0"/>
               </a:spcAft>
             </a:pPr>
             <a:r>
@@ -12093,10 +12093,10 @@
                 <a:spcPct val="125000"/>
               </a:lnSpc>
               <a:spcBef>
-                <a:spcPts val="200"/>
-              </a:spcBef>
-              <a:spcAft>
-                <a:spcPts val="200"/>
+                <a:spcPts val="0"/>
+              </a:spcBef>
+              <a:spcAft>
+                <a:spcPts val="0"/>
               </a:spcAft>
             </a:pPr>
             <a:r>
@@ -12115,10 +12115,10 @@
                 <a:spcPct val="125000"/>
               </a:lnSpc>
               <a:spcBef>
-                <a:spcPts val="800"/>
-              </a:spcBef>
-              <a:spcAft>
-                <a:spcPts val="300"/>
+                <a:spcPts val="0"/>
+              </a:spcBef>
+              <a:spcAft>
+                <a:spcPts val="0"/>
               </a:spcAft>
             </a:pPr>
             <a:r>
@@ -12137,10 +12137,10 @@
                 <a:spcPct val="125000"/>
               </a:lnSpc>
               <a:spcBef>
-                <a:spcPts val="200"/>
-              </a:spcBef>
-              <a:spcAft>
-                <a:spcPts val="200"/>
+                <a:spcPts val="0"/>
+              </a:spcBef>
+              <a:spcAft>
+                <a:spcPts val="0"/>
               </a:spcAft>
             </a:pPr>
             <a:r>
@@ -12159,10 +12159,10 @@
                 <a:spcPct val="125000"/>
               </a:lnSpc>
               <a:spcBef>
-                <a:spcPts val="800"/>
-              </a:spcBef>
-              <a:spcAft>
-                <a:spcPts val="300"/>
+                <a:spcPts val="0"/>
+              </a:spcBef>
+              <a:spcAft>
+                <a:spcPts val="0"/>
               </a:spcAft>
             </a:pPr>
             <a:r>
@@ -12181,10 +12181,10 @@
                 <a:spcPct val="125000"/>
               </a:lnSpc>
               <a:spcBef>
-                <a:spcPts val="200"/>
-              </a:spcBef>
-              <a:spcAft>
-                <a:spcPts val="200"/>
+                <a:spcPts val="0"/>
+              </a:spcBef>
+              <a:spcAft>
+                <a:spcPts val="0"/>
               </a:spcAft>
             </a:pPr>
             <a:r>
@@ -12203,10 +12203,10 @@
                 <a:spcPct val="125000"/>
               </a:lnSpc>
               <a:spcBef>
-                <a:spcPts val="800"/>
-              </a:spcBef>
-              <a:spcAft>
-                <a:spcPts val="300"/>
+                <a:spcPts val="0"/>
+              </a:spcBef>
+              <a:spcAft>
+                <a:spcPts val="0"/>
               </a:spcAft>
             </a:pPr>
             <a:r>
@@ -12225,10 +12225,10 @@
                 <a:spcPct val="125000"/>
               </a:lnSpc>
               <a:spcBef>
-                <a:spcPts val="200"/>
-              </a:spcBef>
-              <a:spcAft>
-                <a:spcPts val="200"/>
+                <a:spcPts val="0"/>
+              </a:spcBef>
+              <a:spcAft>
+                <a:spcPts val="0"/>
               </a:spcAft>
             </a:pPr>
             <a:r>
@@ -12342,7 +12342,7 @@
                 <a:spcPts val="0"/>
               </a:spcBef>
               <a:spcAft>
-                <a:spcPts val="600"/>
+                <a:spcPts val="0"/>
               </a:spcAft>
             </a:pPr>
             <a:r>
@@ -12361,10 +12361,10 @@
                 <a:spcPct val="125000"/>
               </a:lnSpc>
               <a:spcBef>
-                <a:spcPts val="800"/>
-              </a:spcBef>
-              <a:spcAft>
-                <a:spcPts val="300"/>
+                <a:spcPts val="0"/>
+              </a:spcBef>
+              <a:spcAft>
+                <a:spcPts val="0"/>
               </a:spcAft>
             </a:pPr>
             <a:r>
@@ -12383,10 +12383,10 @@
                 <a:spcPct val="125000"/>
               </a:lnSpc>
               <a:spcBef>
-                <a:spcPts val="200"/>
-              </a:spcBef>
-              <a:spcAft>
-                <a:spcPts val="200"/>
+                <a:spcPts val="0"/>
+              </a:spcBef>
+              <a:spcAft>
+                <a:spcPts val="0"/>
               </a:spcAft>
             </a:pPr>
             <a:r>
@@ -12405,10 +12405,10 @@
                 <a:spcPct val="125000"/>
               </a:lnSpc>
               <a:spcBef>
-                <a:spcPts val="800"/>
-              </a:spcBef>
-              <a:spcAft>
-                <a:spcPts val="300"/>
+                <a:spcPts val="0"/>
+              </a:spcBef>
+              <a:spcAft>
+                <a:spcPts val="0"/>
               </a:spcAft>
             </a:pPr>
             <a:r>
@@ -12427,10 +12427,10 @@
                 <a:spcPct val="125000"/>
               </a:lnSpc>
               <a:spcBef>
-                <a:spcPts val="200"/>
-              </a:spcBef>
-              <a:spcAft>
-                <a:spcPts val="200"/>
+                <a:spcPts val="0"/>
+              </a:spcBef>
+              <a:spcAft>
+                <a:spcPts val="0"/>
               </a:spcAft>
             </a:pPr>
             <a:r>
@@ -12449,10 +12449,10 @@
                 <a:spcPct val="125000"/>
               </a:lnSpc>
               <a:spcBef>
-                <a:spcPts val="800"/>
-              </a:spcBef>
-              <a:spcAft>
-                <a:spcPts val="300"/>
+                <a:spcPts val="0"/>
+              </a:spcBef>
+              <a:spcAft>
+                <a:spcPts val="0"/>
               </a:spcAft>
             </a:pPr>
             <a:r>
@@ -12471,10 +12471,10 @@
                 <a:spcPct val="125000"/>
               </a:lnSpc>
               <a:spcBef>
-                <a:spcPts val="200"/>
-              </a:spcBef>
-              <a:spcAft>
-                <a:spcPts val="200"/>
+                <a:spcPts val="0"/>
+              </a:spcBef>
+              <a:spcAft>
+                <a:spcPts val="0"/>
               </a:spcAft>
             </a:pPr>
             <a:r>
@@ -12493,10 +12493,10 @@
                 <a:spcPct val="125000"/>
               </a:lnSpc>
               <a:spcBef>
-                <a:spcPts val="800"/>
-              </a:spcBef>
-              <a:spcAft>
-                <a:spcPts val="300"/>
+                <a:spcPts val="0"/>
+              </a:spcBef>
+              <a:spcAft>
+                <a:spcPts val="0"/>
               </a:spcAft>
             </a:pPr>
             <a:r>
@@ -12515,10 +12515,10 @@
                 <a:spcPct val="125000"/>
               </a:lnSpc>
               <a:spcBef>
-                <a:spcPts val="200"/>
-              </a:spcBef>
-              <a:spcAft>
-                <a:spcPts val="200"/>
+                <a:spcPts val="0"/>
+              </a:spcBef>
+              <a:spcAft>
+                <a:spcPts val="0"/>
               </a:spcAft>
             </a:pPr>
             <a:r>
@@ -12632,7 +12632,7 @@
                 <a:spcPts val="0"/>
               </a:spcBef>
               <a:spcAft>
-                <a:spcPts val="600"/>
+                <a:spcPts val="0"/>
               </a:spcAft>
             </a:pPr>
             <a:r>
@@ -12651,10 +12651,10 @@
                 <a:spcPct val="125000"/>
               </a:lnSpc>
               <a:spcBef>
-                <a:spcPts val="800"/>
-              </a:spcBef>
-              <a:spcAft>
-                <a:spcPts val="300"/>
+                <a:spcPts val="0"/>
+              </a:spcBef>
+              <a:spcAft>
+                <a:spcPts val="0"/>
               </a:spcAft>
             </a:pPr>
             <a:r>
@@ -12673,10 +12673,10 @@
                 <a:spcPct val="125000"/>
               </a:lnSpc>
               <a:spcBef>
-                <a:spcPts val="200"/>
-              </a:spcBef>
-              <a:spcAft>
-                <a:spcPts val="200"/>
+                <a:spcPts val="0"/>
+              </a:spcBef>
+              <a:spcAft>
+                <a:spcPts val="0"/>
               </a:spcAft>
             </a:pPr>
             <a:r>
@@ -12695,10 +12695,10 @@
                 <a:spcPct val="125000"/>
               </a:lnSpc>
               <a:spcBef>
-                <a:spcPts val="800"/>
-              </a:spcBef>
-              <a:spcAft>
-                <a:spcPts val="300"/>
+                <a:spcPts val="0"/>
+              </a:spcBef>
+              <a:spcAft>
+                <a:spcPts val="0"/>
               </a:spcAft>
             </a:pPr>
             <a:r>
@@ -12717,10 +12717,10 @@
                 <a:spcPct val="125000"/>
               </a:lnSpc>
               <a:spcBef>
-                <a:spcPts val="200"/>
-              </a:spcBef>
-              <a:spcAft>
-                <a:spcPts val="200"/>
+                <a:spcPts val="0"/>
+              </a:spcBef>
+              <a:spcAft>
+                <a:spcPts val="0"/>
               </a:spcAft>
             </a:pPr>
             <a:r>
@@ -12739,10 +12739,10 @@
                 <a:spcPct val="125000"/>
               </a:lnSpc>
               <a:spcBef>
-                <a:spcPts val="200"/>
-              </a:spcBef>
-              <a:spcAft>
-                <a:spcPts val="200"/>
+                <a:spcPts val="0"/>
+              </a:spcBef>
+              <a:spcAft>
+                <a:spcPts val="0"/>
               </a:spcAft>
             </a:pPr>
             <a:r>
@@ -12761,10 +12761,10 @@
                 <a:spcPct val="125000"/>
               </a:lnSpc>
               <a:spcBef>
-                <a:spcPts val="200"/>
-              </a:spcBef>
-              <a:spcAft>
-                <a:spcPts val="200"/>
+                <a:spcPts val="0"/>
+              </a:spcBef>
+              <a:spcAft>
+                <a:spcPts val="0"/>
               </a:spcAft>
             </a:pPr>
             <a:r>
@@ -12783,10 +12783,10 @@
                 <a:spcPct val="125000"/>
               </a:lnSpc>
               <a:spcBef>
-                <a:spcPts val="800"/>
-              </a:spcBef>
-              <a:spcAft>
-                <a:spcPts val="300"/>
+                <a:spcPts val="0"/>
+              </a:spcBef>
+              <a:spcAft>
+                <a:spcPts val="0"/>
               </a:spcAft>
             </a:pPr>
             <a:r>
@@ -12805,10 +12805,10 @@
                 <a:spcPct val="125000"/>
               </a:lnSpc>
               <a:spcBef>
-                <a:spcPts val="200"/>
-              </a:spcBef>
-              <a:spcAft>
-                <a:spcPts val="200"/>
+                <a:spcPts val="0"/>
+              </a:spcBef>
+              <a:spcAft>
+                <a:spcPts val="0"/>
               </a:spcAft>
             </a:pPr>
             <a:r>
@@ -12827,10 +12827,10 @@
                 <a:spcPct val="125000"/>
               </a:lnSpc>
               <a:spcBef>
-                <a:spcPts val="800"/>
-              </a:spcBef>
-              <a:spcAft>
-                <a:spcPts val="300"/>
+                <a:spcPts val="0"/>
+              </a:spcBef>
+              <a:spcAft>
+                <a:spcPts val="0"/>
               </a:spcAft>
             </a:pPr>
             <a:r>
@@ -12849,10 +12849,10 @@
                 <a:spcPct val="125000"/>
               </a:lnSpc>
               <a:spcBef>
-                <a:spcPts val="200"/>
-              </a:spcBef>
-              <a:spcAft>
-                <a:spcPts val="200"/>
+                <a:spcPts val="0"/>
+              </a:spcBef>
+              <a:spcAft>
+                <a:spcPts val="0"/>
               </a:spcAft>
             </a:pPr>
             <a:r>
@@ -12966,7 +12966,7 @@
                 <a:spcPts val="0"/>
               </a:spcBef>
               <a:spcAft>
-                <a:spcPts val="600"/>
+                <a:spcPts val="0"/>
               </a:spcAft>
             </a:pPr>
             <a:r>
@@ -12985,10 +12985,10 @@
                 <a:spcPct val="125000"/>
               </a:lnSpc>
               <a:spcBef>
-                <a:spcPts val="800"/>
-              </a:spcBef>
-              <a:spcAft>
-                <a:spcPts val="300"/>
+                <a:spcPts val="0"/>
+              </a:spcBef>
+              <a:spcAft>
+                <a:spcPts val="0"/>
               </a:spcAft>
             </a:pPr>
             <a:r>
@@ -13007,10 +13007,10 @@
                 <a:spcPct val="125000"/>
               </a:lnSpc>
               <a:spcBef>
-                <a:spcPts val="200"/>
-              </a:spcBef>
-              <a:spcAft>
-                <a:spcPts val="200"/>
+                <a:spcPts val="0"/>
+              </a:spcBef>
+              <a:spcAft>
+                <a:spcPts val="0"/>
               </a:spcAft>
             </a:pPr>
             <a:r>
@@ -13029,10 +13029,10 @@
                 <a:spcPct val="125000"/>
               </a:lnSpc>
               <a:spcBef>
-                <a:spcPts val="800"/>
-              </a:spcBef>
-              <a:spcAft>
-                <a:spcPts val="300"/>
+                <a:spcPts val="0"/>
+              </a:spcBef>
+              <a:spcAft>
+                <a:spcPts val="0"/>
               </a:spcAft>
             </a:pPr>
             <a:r>
@@ -13051,10 +13051,10 @@
                 <a:spcPct val="125000"/>
               </a:lnSpc>
               <a:spcBef>
-                <a:spcPts val="200"/>
-              </a:spcBef>
-              <a:spcAft>
-                <a:spcPts val="200"/>
+                <a:spcPts val="0"/>
+              </a:spcBef>
+              <a:spcAft>
+                <a:spcPts val="0"/>
               </a:spcAft>
             </a:pPr>
             <a:r>
@@ -13073,10 +13073,10 @@
                 <a:spcPct val="125000"/>
               </a:lnSpc>
               <a:spcBef>
-                <a:spcPts val="200"/>
-              </a:spcBef>
-              <a:spcAft>
-                <a:spcPts val="200"/>
+                <a:spcPts val="0"/>
+              </a:spcBef>
+              <a:spcAft>
+                <a:spcPts val="0"/>
               </a:spcAft>
             </a:pPr>
             <a:r>
@@ -13095,10 +13095,10 @@
                 <a:spcPct val="125000"/>
               </a:lnSpc>
               <a:spcBef>
-                <a:spcPts val="200"/>
-              </a:spcBef>
-              <a:spcAft>
-                <a:spcPts val="200"/>
+                <a:spcPts val="0"/>
+              </a:spcBef>
+              <a:spcAft>
+                <a:spcPts val="0"/>
               </a:spcAft>
             </a:pPr>
             <a:r>
@@ -13117,10 +13117,10 @@
                 <a:spcPct val="125000"/>
               </a:lnSpc>
               <a:spcBef>
-                <a:spcPts val="200"/>
-              </a:spcBef>
-              <a:spcAft>
-                <a:spcPts val="200"/>
+                <a:spcPts val="0"/>
+              </a:spcBef>
+              <a:spcAft>
+                <a:spcPts val="0"/>
               </a:spcAft>
             </a:pPr>
             <a:r>
@@ -13139,10 +13139,10 @@
                 <a:spcPct val="125000"/>
               </a:lnSpc>
               <a:spcBef>
-                <a:spcPts val="800"/>
-              </a:spcBef>
-              <a:spcAft>
-                <a:spcPts val="300"/>
+                <a:spcPts val="0"/>
+              </a:spcBef>
+              <a:spcAft>
+                <a:spcPts val="0"/>
               </a:spcAft>
             </a:pPr>
             <a:r>
@@ -13161,10 +13161,10 @@
                 <a:spcPct val="125000"/>
               </a:lnSpc>
               <a:spcBef>
-                <a:spcPts val="200"/>
-              </a:spcBef>
-              <a:spcAft>
-                <a:spcPts val="200"/>
+                <a:spcPts val="0"/>
+              </a:spcBef>
+              <a:spcAft>
+                <a:spcPts val="0"/>
               </a:spcAft>
             </a:pPr>
             <a:r>
@@ -13183,10 +13183,10 @@
                 <a:spcPct val="125000"/>
               </a:lnSpc>
               <a:spcBef>
-                <a:spcPts val="800"/>
-              </a:spcBef>
-              <a:spcAft>
-                <a:spcPts val="300"/>
+                <a:spcPts val="0"/>
+              </a:spcBef>
+              <a:spcAft>
+                <a:spcPts val="0"/>
               </a:spcAft>
             </a:pPr>
             <a:r>
@@ -13205,10 +13205,10 @@
                 <a:spcPct val="125000"/>
               </a:lnSpc>
               <a:spcBef>
-                <a:spcPts val="200"/>
-              </a:spcBef>
-              <a:spcAft>
-                <a:spcPts val="200"/>
+                <a:spcPts val="0"/>
+              </a:spcBef>
+              <a:spcAft>
+                <a:spcPts val="0"/>
               </a:spcAft>
             </a:pPr>
             <a:r>
@@ -13322,7 +13322,7 @@
                 <a:spcPts val="0"/>
               </a:spcBef>
               <a:spcAft>
-                <a:spcPts val="600"/>
+                <a:spcPts val="0"/>
               </a:spcAft>
             </a:pPr>
             <a:r>
@@ -13341,10 +13341,10 @@
                 <a:spcPct val="125000"/>
               </a:lnSpc>
               <a:spcBef>
-                <a:spcPts val="800"/>
-              </a:spcBef>
-              <a:spcAft>
-                <a:spcPts val="300"/>
+                <a:spcPts val="0"/>
+              </a:spcBef>
+              <a:spcAft>
+                <a:spcPts val="0"/>
               </a:spcAft>
             </a:pPr>
             <a:r>
@@ -13363,10 +13363,10 @@
                 <a:spcPct val="125000"/>
               </a:lnSpc>
               <a:spcBef>
-                <a:spcPts val="200"/>
-              </a:spcBef>
-              <a:spcAft>
-                <a:spcPts val="200"/>
+                <a:spcPts val="0"/>
+              </a:spcBef>
+              <a:spcAft>
+                <a:spcPts val="0"/>
               </a:spcAft>
             </a:pPr>
             <a:r>
@@ -13385,10 +13385,10 @@
                 <a:spcPct val="125000"/>
               </a:lnSpc>
               <a:spcBef>
-                <a:spcPts val="800"/>
-              </a:spcBef>
-              <a:spcAft>
-                <a:spcPts val="300"/>
+                <a:spcPts val="0"/>
+              </a:spcBef>
+              <a:spcAft>
+                <a:spcPts val="0"/>
               </a:spcAft>
             </a:pPr>
             <a:r>
@@ -13407,10 +13407,10 @@
                 <a:spcPct val="125000"/>
               </a:lnSpc>
               <a:spcBef>
-                <a:spcPts val="200"/>
-              </a:spcBef>
-              <a:spcAft>
-                <a:spcPts val="200"/>
+                <a:spcPts val="0"/>
+              </a:spcBef>
+              <a:spcAft>
+                <a:spcPts val="0"/>
               </a:spcAft>
             </a:pPr>
             <a:r>
@@ -13429,10 +13429,10 @@
                 <a:spcPct val="125000"/>
               </a:lnSpc>
               <a:spcBef>
-                <a:spcPts val="200"/>
-              </a:spcBef>
-              <a:spcAft>
-                <a:spcPts val="200"/>
+                <a:spcPts val="0"/>
+              </a:spcBef>
+              <a:spcAft>
+                <a:spcPts val="0"/>
               </a:spcAft>
             </a:pPr>
             <a:r>
@@ -13451,10 +13451,10 @@
                 <a:spcPct val="125000"/>
               </a:lnSpc>
               <a:spcBef>
-                <a:spcPts val="800"/>
-              </a:spcBef>
-              <a:spcAft>
-                <a:spcPts val="300"/>
+                <a:spcPts val="0"/>
+              </a:spcBef>
+              <a:spcAft>
+                <a:spcPts val="0"/>
               </a:spcAft>
             </a:pPr>
             <a:r>
@@ -13473,10 +13473,10 @@
                 <a:spcPct val="125000"/>
               </a:lnSpc>
               <a:spcBef>
-                <a:spcPts val="200"/>
-              </a:spcBef>
-              <a:spcAft>
-                <a:spcPts val="200"/>
+                <a:spcPts val="0"/>
+              </a:spcBef>
+              <a:spcAft>
+                <a:spcPts val="0"/>
               </a:spcAft>
             </a:pPr>
             <a:r>
@@ -13495,10 +13495,10 @@
                 <a:spcPct val="125000"/>
               </a:lnSpc>
               <a:spcBef>
-                <a:spcPts val="800"/>
-              </a:spcBef>
-              <a:spcAft>
-                <a:spcPts val="300"/>
+                <a:spcPts val="0"/>
+              </a:spcBef>
+              <a:spcAft>
+                <a:spcPts val="0"/>
               </a:spcAft>
             </a:pPr>
             <a:r>
@@ -13517,10 +13517,10 @@
                 <a:spcPct val="125000"/>
               </a:lnSpc>
               <a:spcBef>
-                <a:spcPts val="200"/>
-              </a:spcBef>
-              <a:spcAft>
-                <a:spcPts val="200"/>
+                <a:spcPts val="0"/>
+              </a:spcBef>
+              <a:spcAft>
+                <a:spcPts val="0"/>
               </a:spcAft>
             </a:pPr>
             <a:r>
@@ -13634,7 +13634,7 @@
                 <a:spcPts val="0"/>
               </a:spcBef>
               <a:spcAft>
-                <a:spcPts val="600"/>
+                <a:spcPts val="0"/>
               </a:spcAft>
             </a:pPr>
             <a:r>
@@ -13653,10 +13653,10 @@
                 <a:spcPct val="125000"/>
               </a:lnSpc>
               <a:spcBef>
-                <a:spcPts val="800"/>
-              </a:spcBef>
-              <a:spcAft>
-                <a:spcPts val="300"/>
+                <a:spcPts val="0"/>
+              </a:spcBef>
+              <a:spcAft>
+                <a:spcPts val="0"/>
               </a:spcAft>
             </a:pPr>
             <a:r>
@@ -13675,10 +13675,10 @@
                 <a:spcPct val="125000"/>
               </a:lnSpc>
               <a:spcBef>
-                <a:spcPts val="200"/>
-              </a:spcBef>
-              <a:spcAft>
-                <a:spcPts val="200"/>
+                <a:spcPts val="0"/>
+              </a:spcBef>
+              <a:spcAft>
+                <a:spcPts val="0"/>
               </a:spcAft>
             </a:pPr>
             <a:r>
@@ -13697,10 +13697,10 @@
                 <a:spcPct val="125000"/>
               </a:lnSpc>
               <a:spcBef>
-                <a:spcPts val="800"/>
-              </a:spcBef>
-              <a:spcAft>
-                <a:spcPts val="300"/>
+                <a:spcPts val="0"/>
+              </a:spcBef>
+              <a:spcAft>
+                <a:spcPts val="0"/>
               </a:spcAft>
             </a:pPr>
             <a:r>
@@ -13719,10 +13719,10 @@
                 <a:spcPct val="125000"/>
               </a:lnSpc>
               <a:spcBef>
-                <a:spcPts val="200"/>
-              </a:spcBef>
-              <a:spcAft>
-                <a:spcPts val="200"/>
+                <a:spcPts val="0"/>
+              </a:spcBef>
+              <a:spcAft>
+                <a:spcPts val="0"/>
               </a:spcAft>
             </a:pPr>
             <a:r>
@@ -13741,10 +13741,10 @@
                 <a:spcPct val="125000"/>
               </a:lnSpc>
               <a:spcBef>
-                <a:spcPts val="800"/>
-              </a:spcBef>
-              <a:spcAft>
-                <a:spcPts val="300"/>
+                <a:spcPts val="0"/>
+              </a:spcBef>
+              <a:spcAft>
+                <a:spcPts val="0"/>
               </a:spcAft>
             </a:pPr>
             <a:r>
@@ -13763,10 +13763,10 @@
                 <a:spcPct val="125000"/>
               </a:lnSpc>
               <a:spcBef>
-                <a:spcPts val="200"/>
-              </a:spcBef>
-              <a:spcAft>
-                <a:spcPts val="200"/>
+                <a:spcPts val="0"/>
+              </a:spcBef>
+              <a:spcAft>
+                <a:spcPts val="0"/>
               </a:spcAft>
             </a:pPr>
             <a:r>
@@ -13785,10 +13785,10 @@
                 <a:spcPct val="125000"/>
               </a:lnSpc>
               <a:spcBef>
-                <a:spcPts val="800"/>
-              </a:spcBef>
-              <a:spcAft>
-                <a:spcPts val="300"/>
+                <a:spcPts val="0"/>
+              </a:spcBef>
+              <a:spcAft>
+                <a:spcPts val="0"/>
               </a:spcAft>
             </a:pPr>
             <a:r>
@@ -13807,10 +13807,10 @@
                 <a:spcPct val="125000"/>
               </a:lnSpc>
               <a:spcBef>
-                <a:spcPts val="200"/>
-              </a:spcBef>
-              <a:spcAft>
-                <a:spcPts val="200"/>
+                <a:spcPts val="0"/>
+              </a:spcBef>
+              <a:spcAft>
+                <a:spcPts val="0"/>
               </a:spcAft>
             </a:pPr>
             <a:r>
@@ -13924,7 +13924,7 @@
                 <a:spcPts val="0"/>
               </a:spcBef>
               <a:spcAft>
-                <a:spcPts val="600"/>
+                <a:spcPts val="0"/>
               </a:spcAft>
             </a:pPr>
             <a:r>
@@ -13943,10 +13943,10 @@
                 <a:spcPct val="125000"/>
               </a:lnSpc>
               <a:spcBef>
-                <a:spcPts val="800"/>
-              </a:spcBef>
-              <a:spcAft>
-                <a:spcPts val="300"/>
+                <a:spcPts val="0"/>
+              </a:spcBef>
+              <a:spcAft>
+                <a:spcPts val="0"/>
               </a:spcAft>
             </a:pPr>
             <a:r>
@@ -13965,10 +13965,10 @@
                 <a:spcPct val="125000"/>
               </a:lnSpc>
               <a:spcBef>
-                <a:spcPts val="200"/>
-              </a:spcBef>
-              <a:spcAft>
-                <a:spcPts val="200"/>
+                <a:spcPts val="0"/>
+              </a:spcBef>
+              <a:spcAft>
+                <a:spcPts val="0"/>
               </a:spcAft>
             </a:pPr>
             <a:r>
@@ -13987,10 +13987,10 @@
                 <a:spcPct val="125000"/>
               </a:lnSpc>
               <a:spcBef>
-                <a:spcPts val="800"/>
-              </a:spcBef>
-              <a:spcAft>
-                <a:spcPts val="300"/>
+                <a:spcPts val="0"/>
+              </a:spcBef>
+              <a:spcAft>
+                <a:spcPts val="0"/>
               </a:spcAft>
             </a:pPr>
             <a:r>
@@ -14009,10 +14009,10 @@
                 <a:spcPct val="125000"/>
               </a:lnSpc>
               <a:spcBef>
-                <a:spcPts val="200"/>
-              </a:spcBef>
-              <a:spcAft>
-                <a:spcPts val="200"/>
+                <a:spcPts val="0"/>
+              </a:spcBef>
+              <a:spcAft>
+                <a:spcPts val="0"/>
               </a:spcAft>
             </a:pPr>
             <a:r>
@@ -14031,10 +14031,10 @@
                 <a:spcPct val="125000"/>
               </a:lnSpc>
               <a:spcBef>
-                <a:spcPts val="800"/>
-              </a:spcBef>
-              <a:spcAft>
-                <a:spcPts val="300"/>
+                <a:spcPts val="0"/>
+              </a:spcBef>
+              <a:spcAft>
+                <a:spcPts val="0"/>
               </a:spcAft>
             </a:pPr>
             <a:r>
@@ -14053,10 +14053,10 @@
                 <a:spcPct val="125000"/>
               </a:lnSpc>
               <a:spcBef>
-                <a:spcPts val="200"/>
-              </a:spcBef>
-              <a:spcAft>
-                <a:spcPts val="200"/>
+                <a:spcPts val="0"/>
+              </a:spcBef>
+              <a:spcAft>
+                <a:spcPts val="0"/>
               </a:spcAft>
             </a:pPr>
             <a:r>
@@ -14075,10 +14075,10 @@
                 <a:spcPct val="125000"/>
               </a:lnSpc>
               <a:spcBef>
-                <a:spcPts val="800"/>
-              </a:spcBef>
-              <a:spcAft>
-                <a:spcPts val="300"/>
+                <a:spcPts val="0"/>
+              </a:spcBef>
+              <a:spcAft>
+                <a:spcPts val="0"/>
               </a:spcAft>
             </a:pPr>
             <a:r>
@@ -14097,10 +14097,10 @@
                 <a:spcPct val="125000"/>
               </a:lnSpc>
               <a:spcBef>
-                <a:spcPts val="200"/>
-              </a:spcBef>
-              <a:spcAft>
-                <a:spcPts val="200"/>
+                <a:spcPts val="0"/>
+              </a:spcBef>
+              <a:spcAft>
+                <a:spcPts val="0"/>
               </a:spcAft>
             </a:pPr>
             <a:r>
@@ -14214,7 +14214,7 @@
                 <a:spcPts val="0"/>
               </a:spcBef>
               <a:spcAft>
-                <a:spcPts val="600"/>
+                <a:spcPts val="0"/>
               </a:spcAft>
             </a:pPr>
             <a:r>
@@ -14233,10 +14233,10 @@
                 <a:spcPct val="125000"/>
               </a:lnSpc>
               <a:spcBef>
-                <a:spcPts val="800"/>
-              </a:spcBef>
-              <a:spcAft>
-                <a:spcPts val="300"/>
+                <a:spcPts val="0"/>
+              </a:spcBef>
+              <a:spcAft>
+                <a:spcPts val="0"/>
               </a:spcAft>
             </a:pPr>
             <a:r>
@@ -14255,10 +14255,10 @@
                 <a:spcPct val="125000"/>
               </a:lnSpc>
               <a:spcBef>
-                <a:spcPts val="200"/>
-              </a:spcBef>
-              <a:spcAft>
-                <a:spcPts val="200"/>
+                <a:spcPts val="0"/>
+              </a:spcBef>
+              <a:spcAft>
+                <a:spcPts val="0"/>
               </a:spcAft>
             </a:pPr>
             <a:r>
@@ -14277,10 +14277,10 @@
                 <a:spcPct val="125000"/>
               </a:lnSpc>
               <a:spcBef>
-                <a:spcPts val="800"/>
-              </a:spcBef>
-              <a:spcAft>
-                <a:spcPts val="300"/>
+                <a:spcPts val="0"/>
+              </a:spcBef>
+              <a:spcAft>
+                <a:spcPts val="0"/>
               </a:spcAft>
             </a:pPr>
             <a:r>
@@ -14299,10 +14299,10 @@
                 <a:spcPct val="125000"/>
               </a:lnSpc>
               <a:spcBef>
-                <a:spcPts val="200"/>
-              </a:spcBef>
-              <a:spcAft>
-                <a:spcPts val="200"/>
+                <a:spcPts val="0"/>
+              </a:spcBef>
+              <a:spcAft>
+                <a:spcPts val="0"/>
               </a:spcAft>
             </a:pPr>
             <a:r>
@@ -14321,10 +14321,10 @@
                 <a:spcPct val="125000"/>
               </a:lnSpc>
               <a:spcBef>
-                <a:spcPts val="800"/>
-              </a:spcBef>
-              <a:spcAft>
-                <a:spcPts val="300"/>
+                <a:spcPts val="0"/>
+              </a:spcBef>
+              <a:spcAft>
+                <a:spcPts val="0"/>
               </a:spcAft>
             </a:pPr>
             <a:r>
@@ -14343,10 +14343,10 @@
                 <a:spcPct val="125000"/>
               </a:lnSpc>
               <a:spcBef>
-                <a:spcPts val="200"/>
-              </a:spcBef>
-              <a:spcAft>
-                <a:spcPts val="200"/>
+                <a:spcPts val="0"/>
+              </a:spcBef>
+              <a:spcAft>
+                <a:spcPts val="0"/>
               </a:spcAft>
             </a:pPr>
             <a:r>
@@ -14365,10 +14365,10 @@
                 <a:spcPct val="125000"/>
               </a:lnSpc>
               <a:spcBef>
-                <a:spcPts val="800"/>
-              </a:spcBef>
-              <a:spcAft>
-                <a:spcPts val="300"/>
+                <a:spcPts val="0"/>
+              </a:spcBef>
+              <a:spcAft>
+                <a:spcPts val="0"/>
               </a:spcAft>
             </a:pPr>
             <a:r>
@@ -14387,10 +14387,10 @@
                 <a:spcPct val="125000"/>
               </a:lnSpc>
               <a:spcBef>
-                <a:spcPts val="200"/>
-              </a:spcBef>
-              <a:spcAft>
-                <a:spcPts val="200"/>
+                <a:spcPts val="0"/>
+              </a:spcBef>
+              <a:spcAft>
+                <a:spcPts val="0"/>
               </a:spcAft>
             </a:pPr>
             <a:r>
@@ -14504,7 +14504,7 @@
                 <a:spcPts val="0"/>
               </a:spcBef>
               <a:spcAft>
-                <a:spcPts val="600"/>
+                <a:spcPts val="0"/>
               </a:spcAft>
             </a:pPr>
             <a:r>
@@ -14523,10 +14523,10 @@
                 <a:spcPct val="125000"/>
               </a:lnSpc>
               <a:spcBef>
-                <a:spcPts val="800"/>
-              </a:spcBef>
-              <a:spcAft>
-                <a:spcPts val="300"/>
+                <a:spcPts val="0"/>
+              </a:spcBef>
+              <a:spcAft>
+                <a:spcPts val="0"/>
               </a:spcAft>
             </a:pPr>
             <a:r>
@@ -14545,10 +14545,10 @@
                 <a:spcPct val="125000"/>
               </a:lnSpc>
               <a:spcBef>
-                <a:spcPts val="200"/>
-              </a:spcBef>
-              <a:spcAft>
-                <a:spcPts val="200"/>
+                <a:spcPts val="0"/>
+              </a:spcBef>
+              <a:spcAft>
+                <a:spcPts val="0"/>
               </a:spcAft>
             </a:pPr>
             <a:r>
@@ -14567,10 +14567,10 @@
                 <a:spcPct val="125000"/>
               </a:lnSpc>
               <a:spcBef>
-                <a:spcPts val="800"/>
-              </a:spcBef>
-              <a:spcAft>
-                <a:spcPts val="300"/>
+                <a:spcPts val="0"/>
+              </a:spcBef>
+              <a:spcAft>
+                <a:spcPts val="0"/>
               </a:spcAft>
             </a:pPr>
             <a:r>
@@ -14589,10 +14589,10 @@
                 <a:spcPct val="125000"/>
               </a:lnSpc>
               <a:spcBef>
-                <a:spcPts val="200"/>
-              </a:spcBef>
-              <a:spcAft>
-                <a:spcPts val="200"/>
+                <a:spcPts val="0"/>
+              </a:spcBef>
+              <a:spcAft>
+                <a:spcPts val="0"/>
               </a:spcAft>
             </a:pPr>
             <a:r>
@@ -14611,10 +14611,10 @@
                 <a:spcPct val="125000"/>
               </a:lnSpc>
               <a:spcBef>
-                <a:spcPts val="800"/>
-              </a:spcBef>
-              <a:spcAft>
-                <a:spcPts val="300"/>
+                <a:spcPts val="0"/>
+              </a:spcBef>
+              <a:spcAft>
+                <a:spcPts val="0"/>
               </a:spcAft>
             </a:pPr>
             <a:r>
@@ -14633,10 +14633,10 @@
                 <a:spcPct val="125000"/>
               </a:lnSpc>
               <a:spcBef>
-                <a:spcPts val="200"/>
-              </a:spcBef>
-              <a:spcAft>
-                <a:spcPts val="200"/>
+                <a:spcPts val="0"/>
+              </a:spcBef>
+              <a:spcAft>
+                <a:spcPts val="0"/>
               </a:spcAft>
             </a:pPr>
             <a:r>
@@ -14655,10 +14655,10 @@
                 <a:spcPct val="125000"/>
               </a:lnSpc>
               <a:spcBef>
-                <a:spcPts val="800"/>
-              </a:spcBef>
-              <a:spcAft>
-                <a:spcPts val="300"/>
+                <a:spcPts val="0"/>
+              </a:spcBef>
+              <a:spcAft>
+                <a:spcPts val="0"/>
               </a:spcAft>
             </a:pPr>
             <a:r>
@@ -14677,10 +14677,10 @@
                 <a:spcPct val="125000"/>
               </a:lnSpc>
               <a:spcBef>
-                <a:spcPts val="200"/>
-              </a:spcBef>
-              <a:spcAft>
-                <a:spcPts val="200"/>
+                <a:spcPts val="0"/>
+              </a:spcBef>
+              <a:spcAft>
+                <a:spcPts val="0"/>
               </a:spcAft>
             </a:pPr>
             <a:r>
@@ -14794,7 +14794,7 @@
                 <a:spcPts val="0"/>
               </a:spcBef>
               <a:spcAft>
-                <a:spcPts val="600"/>
+                <a:spcPts val="0"/>
               </a:spcAft>
             </a:pPr>
             <a:r>
@@ -14813,10 +14813,10 @@
                 <a:spcPct val="125000"/>
               </a:lnSpc>
               <a:spcBef>
-                <a:spcPts val="800"/>
-              </a:spcBef>
-              <a:spcAft>
-                <a:spcPts val="300"/>
+                <a:spcPts val="0"/>
+              </a:spcBef>
+              <a:spcAft>
+                <a:spcPts val="0"/>
               </a:spcAft>
             </a:pPr>
             <a:r>
@@ -14835,10 +14835,10 @@
                 <a:spcPct val="125000"/>
               </a:lnSpc>
               <a:spcBef>
-                <a:spcPts val="200"/>
-              </a:spcBef>
-              <a:spcAft>
-                <a:spcPts val="200"/>
+                <a:spcPts val="0"/>
+              </a:spcBef>
+              <a:spcAft>
+                <a:spcPts val="0"/>
               </a:spcAft>
             </a:pPr>
             <a:r>
@@ -14857,10 +14857,10 @@
                 <a:spcPct val="125000"/>
               </a:lnSpc>
               <a:spcBef>
-                <a:spcPts val="800"/>
-              </a:spcBef>
-              <a:spcAft>
-                <a:spcPts val="300"/>
+                <a:spcPts val="0"/>
+              </a:spcBef>
+              <a:spcAft>
+                <a:spcPts val="0"/>
               </a:spcAft>
             </a:pPr>
             <a:r>
@@ -14879,10 +14879,10 @@
                 <a:spcPct val="125000"/>
               </a:lnSpc>
               <a:spcBef>
-                <a:spcPts val="200"/>
-              </a:spcBef>
-              <a:spcAft>
-                <a:spcPts val="200"/>
+                <a:spcPts val="0"/>
+              </a:spcBef>
+              <a:spcAft>
+                <a:spcPts val="0"/>
               </a:spcAft>
             </a:pPr>
             <a:r>
@@ -14901,10 +14901,10 @@
                 <a:spcPct val="125000"/>
               </a:lnSpc>
               <a:spcBef>
-                <a:spcPts val="800"/>
-              </a:spcBef>
-              <a:spcAft>
-                <a:spcPts val="300"/>
+                <a:spcPts val="0"/>
+              </a:spcBef>
+              <a:spcAft>
+                <a:spcPts val="0"/>
               </a:spcAft>
             </a:pPr>
             <a:r>
@@ -14923,10 +14923,10 @@
                 <a:spcPct val="125000"/>
               </a:lnSpc>
               <a:spcBef>
-                <a:spcPts val="200"/>
-              </a:spcBef>
-              <a:spcAft>
-                <a:spcPts val="200"/>
+                <a:spcPts val="0"/>
+              </a:spcBef>
+              <a:spcAft>
+                <a:spcPts val="0"/>
               </a:spcAft>
             </a:pPr>
             <a:r>
@@ -14945,10 +14945,10 @@
                 <a:spcPct val="125000"/>
               </a:lnSpc>
               <a:spcBef>
-                <a:spcPts val="800"/>
-              </a:spcBef>
-              <a:spcAft>
-                <a:spcPts val="300"/>
+                <a:spcPts val="0"/>
+              </a:spcBef>
+              <a:spcAft>
+                <a:spcPts val="0"/>
               </a:spcAft>
             </a:pPr>
             <a:r>
@@ -14967,10 +14967,10 @@
                 <a:spcPct val="125000"/>
               </a:lnSpc>
               <a:spcBef>
-                <a:spcPts val="200"/>
-              </a:spcBef>
-              <a:spcAft>
-                <a:spcPts val="200"/>
+                <a:spcPts val="0"/>
+              </a:spcBef>
+              <a:spcAft>
+                <a:spcPts val="0"/>
               </a:spcAft>
             </a:pPr>
             <a:r>
@@ -15084,7 +15084,7 @@
                 <a:spcPts val="0"/>
               </a:spcBef>
               <a:spcAft>
-                <a:spcPts val="600"/>
+                <a:spcPts val="0"/>
               </a:spcAft>
             </a:pPr>
             <a:r>
@@ -15103,10 +15103,10 @@
                 <a:spcPct val="125000"/>
               </a:lnSpc>
               <a:spcBef>
-                <a:spcPts val="800"/>
-              </a:spcBef>
-              <a:spcAft>
-                <a:spcPts val="300"/>
+                <a:spcPts val="0"/>
+              </a:spcBef>
+              <a:spcAft>
+                <a:spcPts val="0"/>
               </a:spcAft>
             </a:pPr>
             <a:r>
@@ -15125,10 +15125,10 @@
                 <a:spcPct val="125000"/>
               </a:lnSpc>
               <a:spcBef>
-                <a:spcPts val="200"/>
-              </a:spcBef>
-              <a:spcAft>
-                <a:spcPts val="200"/>
+                <a:spcPts val="0"/>
+              </a:spcBef>
+              <a:spcAft>
+                <a:spcPts val="0"/>
               </a:spcAft>
             </a:pPr>
             <a:r>
@@ -15147,10 +15147,10 @@
                 <a:spcPct val="125000"/>
               </a:lnSpc>
               <a:spcBef>
-                <a:spcPts val="800"/>
-              </a:spcBef>
-              <a:spcAft>
-                <a:spcPts val="300"/>
+                <a:spcPts val="0"/>
+              </a:spcBef>
+              <a:spcAft>
+                <a:spcPts val="0"/>
               </a:spcAft>
             </a:pPr>
             <a:r>
@@ -15169,10 +15169,10 @@
                 <a:spcPct val="125000"/>
               </a:lnSpc>
               <a:spcBef>
-                <a:spcPts val="200"/>
-              </a:spcBef>
-              <a:spcAft>
-                <a:spcPts val="200"/>
+                <a:spcPts val="0"/>
+              </a:spcBef>
+              <a:spcAft>
+                <a:spcPts val="0"/>
               </a:spcAft>
             </a:pPr>
             <a:r>
@@ -15191,10 +15191,10 @@
                 <a:spcPct val="125000"/>
               </a:lnSpc>
               <a:spcBef>
-                <a:spcPts val="800"/>
-              </a:spcBef>
-              <a:spcAft>
-                <a:spcPts val="300"/>
+                <a:spcPts val="0"/>
+              </a:spcBef>
+              <a:spcAft>
+                <a:spcPts val="0"/>
               </a:spcAft>
             </a:pPr>
             <a:r>
@@ -15213,10 +15213,10 @@
                 <a:spcPct val="125000"/>
               </a:lnSpc>
               <a:spcBef>
-                <a:spcPts val="200"/>
-              </a:spcBef>
-              <a:spcAft>
-                <a:spcPts val="200"/>
+                <a:spcPts val="0"/>
+              </a:spcBef>
+              <a:spcAft>
+                <a:spcPts val="0"/>
               </a:spcAft>
             </a:pPr>
             <a:r>
@@ -15235,10 +15235,10 @@
                 <a:spcPct val="125000"/>
               </a:lnSpc>
               <a:spcBef>
-                <a:spcPts val="800"/>
-              </a:spcBef>
-              <a:spcAft>
-                <a:spcPts val="300"/>
+                <a:spcPts val="0"/>
+              </a:spcBef>
+              <a:spcAft>
+                <a:spcPts val="0"/>
               </a:spcAft>
             </a:pPr>
             <a:r>
@@ -15257,10 +15257,10 @@
                 <a:spcPct val="125000"/>
               </a:lnSpc>
               <a:spcBef>
-                <a:spcPts val="200"/>
-              </a:spcBef>
-              <a:spcAft>
-                <a:spcPts val="200"/>
+                <a:spcPts val="0"/>
+              </a:spcBef>
+              <a:spcAft>
+                <a:spcPts val="0"/>
               </a:spcAft>
             </a:pPr>
             <a:r>
@@ -15374,7 +15374,7 @@
                 <a:spcPts val="0"/>
               </a:spcBef>
               <a:spcAft>
-                <a:spcPts val="600"/>
+                <a:spcPts val="0"/>
               </a:spcAft>
             </a:pPr>
             <a:r>
@@ -15393,10 +15393,10 @@
                 <a:spcPct val="125000"/>
               </a:lnSpc>
               <a:spcBef>
-                <a:spcPts val="800"/>
-              </a:spcBef>
-              <a:spcAft>
-                <a:spcPts val="300"/>
+                <a:spcPts val="0"/>
+              </a:spcBef>
+              <a:spcAft>
+                <a:spcPts val="0"/>
               </a:spcAft>
             </a:pPr>
             <a:r>
@@ -15415,10 +15415,10 @@
                 <a:spcPct val="125000"/>
               </a:lnSpc>
               <a:spcBef>
-                <a:spcPts val="200"/>
-              </a:spcBef>
-              <a:spcAft>
-                <a:spcPts val="200"/>
+                <a:spcPts val="0"/>
+              </a:spcBef>
+              <a:spcAft>
+                <a:spcPts val="0"/>
               </a:spcAft>
             </a:pPr>
             <a:r>
@@ -15437,10 +15437,10 @@
                 <a:spcPct val="125000"/>
               </a:lnSpc>
               <a:spcBef>
-                <a:spcPts val="800"/>
-              </a:spcBef>
-              <a:spcAft>
-                <a:spcPts val="300"/>
+                <a:spcPts val="0"/>
+              </a:spcBef>
+              <a:spcAft>
+                <a:spcPts val="0"/>
               </a:spcAft>
             </a:pPr>
             <a:r>
@@ -15459,10 +15459,10 @@
                 <a:spcPct val="125000"/>
               </a:lnSpc>
               <a:spcBef>
-                <a:spcPts val="200"/>
-              </a:spcBef>
-              <a:spcAft>
-                <a:spcPts val="200"/>
+                <a:spcPts val="0"/>
+              </a:spcBef>
+              <a:spcAft>
+                <a:spcPts val="0"/>
               </a:spcAft>
             </a:pPr>
             <a:r>
@@ -15481,10 +15481,10 @@
                 <a:spcPct val="125000"/>
               </a:lnSpc>
               <a:spcBef>
-                <a:spcPts val="800"/>
-              </a:spcBef>
-              <a:spcAft>
-                <a:spcPts val="300"/>
+                <a:spcPts val="0"/>
+              </a:spcBef>
+              <a:spcAft>
+                <a:spcPts val="0"/>
               </a:spcAft>
             </a:pPr>
             <a:r>
@@ -15503,10 +15503,10 @@
                 <a:spcPct val="125000"/>
               </a:lnSpc>
               <a:spcBef>
-                <a:spcPts val="200"/>
-              </a:spcBef>
-              <a:spcAft>
-                <a:spcPts val="200"/>
+                <a:spcPts val="0"/>
+              </a:spcBef>
+              <a:spcAft>
+                <a:spcPts val="0"/>
               </a:spcAft>
             </a:pPr>
             <a:r>
@@ -15525,10 +15525,10 @@
                 <a:spcPct val="125000"/>
               </a:lnSpc>
               <a:spcBef>
-                <a:spcPts val="800"/>
-              </a:spcBef>
-              <a:spcAft>
-                <a:spcPts val="300"/>
+                <a:spcPts val="0"/>
+              </a:spcBef>
+              <a:spcAft>
+                <a:spcPts val="0"/>
               </a:spcAft>
             </a:pPr>
             <a:r>
@@ -15547,10 +15547,10 @@
                 <a:spcPct val="125000"/>
               </a:lnSpc>
               <a:spcBef>
-                <a:spcPts val="200"/>
-              </a:spcBef>
-              <a:spcAft>
-                <a:spcPts val="200"/>
+                <a:spcPts val="0"/>
+              </a:spcBef>
+              <a:spcAft>
+                <a:spcPts val="0"/>
               </a:spcAft>
             </a:pPr>
             <a:r>
@@ -15664,7 +15664,7 @@
                 <a:spcPts val="0"/>
               </a:spcBef>
               <a:spcAft>
-                <a:spcPts val="600"/>
+                <a:spcPts val="0"/>
               </a:spcAft>
             </a:pPr>
             <a:r>
@@ -15683,10 +15683,10 @@
                 <a:spcPct val="125000"/>
               </a:lnSpc>
               <a:spcBef>
-                <a:spcPts val="800"/>
-              </a:spcBef>
-              <a:spcAft>
-                <a:spcPts val="300"/>
+                <a:spcPts val="0"/>
+              </a:spcBef>
+              <a:spcAft>
+                <a:spcPts val="0"/>
               </a:spcAft>
             </a:pPr>
             <a:r>
@@ -15705,10 +15705,10 @@
                 <a:spcPct val="125000"/>
               </a:lnSpc>
               <a:spcBef>
-                <a:spcPts val="200"/>
-              </a:spcBef>
-              <a:spcAft>
-                <a:spcPts val="200"/>
+                <a:spcPts val="0"/>
+              </a:spcBef>
+              <a:spcAft>
+                <a:spcPts val="0"/>
               </a:spcAft>
             </a:pPr>
             <a:r>
@@ -15727,10 +15727,10 @@
                 <a:spcPct val="125000"/>
               </a:lnSpc>
               <a:spcBef>
-                <a:spcPts val="800"/>
-              </a:spcBef>
-              <a:spcAft>
-                <a:spcPts val="300"/>
+                <a:spcPts val="0"/>
+              </a:spcBef>
+              <a:spcAft>
+                <a:spcPts val="0"/>
               </a:spcAft>
             </a:pPr>
             <a:r>
@@ -15749,10 +15749,10 @@
                 <a:spcPct val="125000"/>
               </a:lnSpc>
               <a:spcBef>
-                <a:spcPts val="200"/>
-              </a:spcBef>
-              <a:spcAft>
-                <a:spcPts val="200"/>
+                <a:spcPts val="0"/>
+              </a:spcBef>
+              <a:spcAft>
+                <a:spcPts val="0"/>
               </a:spcAft>
             </a:pPr>
             <a:r>
@@ -15771,10 +15771,10 @@
                 <a:spcPct val="125000"/>
               </a:lnSpc>
               <a:spcBef>
-                <a:spcPts val="200"/>
-              </a:spcBef>
-              <a:spcAft>
-                <a:spcPts val="200"/>
+                <a:spcPts val="0"/>
+              </a:spcBef>
+              <a:spcAft>
+                <a:spcPts val="0"/>
               </a:spcAft>
             </a:pPr>
             <a:r>
@@ -15793,10 +15793,10 @@
                 <a:spcPct val="125000"/>
               </a:lnSpc>
               <a:spcBef>
-                <a:spcPts val="200"/>
-              </a:spcBef>
-              <a:spcAft>
-                <a:spcPts val="200"/>
+                <a:spcPts val="0"/>
+              </a:spcBef>
+              <a:spcAft>
+                <a:spcPts val="0"/>
               </a:spcAft>
             </a:pPr>
             <a:r>
@@ -15815,10 +15815,10 @@
                 <a:spcPct val="125000"/>
               </a:lnSpc>
               <a:spcBef>
-                <a:spcPts val="200"/>
-              </a:spcBef>
-              <a:spcAft>
-                <a:spcPts val="200"/>
+                <a:spcPts val="0"/>
+              </a:spcBef>
+              <a:spcAft>
+                <a:spcPts val="0"/>
               </a:spcAft>
             </a:pPr>
             <a:r>
@@ -15837,10 +15837,10 @@
                 <a:spcPct val="125000"/>
               </a:lnSpc>
               <a:spcBef>
-                <a:spcPts val="800"/>
-              </a:spcBef>
-              <a:spcAft>
-                <a:spcPts val="300"/>
+                <a:spcPts val="0"/>
+              </a:spcBef>
+              <a:spcAft>
+                <a:spcPts val="0"/>
               </a:spcAft>
             </a:pPr>
             <a:r>
@@ -15859,10 +15859,10 @@
                 <a:spcPct val="125000"/>
               </a:lnSpc>
               <a:spcBef>
-                <a:spcPts val="200"/>
-              </a:spcBef>
-              <a:spcAft>
-                <a:spcPts val="200"/>
+                <a:spcPts val="0"/>
+              </a:spcBef>
+              <a:spcAft>
+                <a:spcPts val="0"/>
               </a:spcAft>
             </a:pPr>
             <a:r>
@@ -15881,10 +15881,10 @@
                 <a:spcPct val="125000"/>
               </a:lnSpc>
               <a:spcBef>
-                <a:spcPts val="800"/>
-              </a:spcBef>
-              <a:spcAft>
-                <a:spcPts val="300"/>
+                <a:spcPts val="0"/>
+              </a:spcBef>
+              <a:spcAft>
+                <a:spcPts val="0"/>
               </a:spcAft>
             </a:pPr>
             <a:r>
@@ -15903,10 +15903,10 @@
                 <a:spcPct val="125000"/>
               </a:lnSpc>
               <a:spcBef>
-                <a:spcPts val="200"/>
-              </a:spcBef>
-              <a:spcAft>
-                <a:spcPts val="200"/>
+                <a:spcPts val="0"/>
+              </a:spcBef>
+              <a:spcAft>
+                <a:spcPts val="0"/>
               </a:spcAft>
             </a:pPr>
             <a:r>
@@ -16020,7 +16020,7 @@
                 <a:spcPts val="0"/>
               </a:spcBef>
               <a:spcAft>
-                <a:spcPts val="600"/>
+                <a:spcPts val="0"/>
               </a:spcAft>
             </a:pPr>
             <a:r>
@@ -16039,10 +16039,10 @@
                 <a:spcPct val="125000"/>
               </a:lnSpc>
               <a:spcBef>
-                <a:spcPts val="800"/>
-              </a:spcBef>
-              <a:spcAft>
-                <a:spcPts val="300"/>
+                <a:spcPts val="0"/>
+              </a:spcBef>
+              <a:spcAft>
+                <a:spcPts val="0"/>
               </a:spcAft>
             </a:pPr>
             <a:r>
@@ -16061,10 +16061,10 @@
                 <a:spcPct val="125000"/>
               </a:lnSpc>
               <a:spcBef>
-                <a:spcPts val="200"/>
-              </a:spcBef>
-              <a:spcAft>
-                <a:spcPts val="200"/>
+                <a:spcPts val="0"/>
+              </a:spcBef>
+              <a:spcAft>
+                <a:spcPts val="0"/>
               </a:spcAft>
             </a:pPr>
             <a:r>
@@ -16083,10 +16083,10 @@
                 <a:spcPct val="125000"/>
               </a:lnSpc>
               <a:spcBef>
-                <a:spcPts val="800"/>
-              </a:spcBef>
-              <a:spcAft>
-                <a:spcPts val="300"/>
+                <a:spcPts val="0"/>
+              </a:spcBef>
+              <a:spcAft>
+                <a:spcPts val="0"/>
               </a:spcAft>
             </a:pPr>
             <a:r>
@@ -16105,10 +16105,10 @@
                 <a:spcPct val="125000"/>
               </a:lnSpc>
               <a:spcBef>
-                <a:spcPts val="200"/>
-              </a:spcBef>
-              <a:spcAft>
-                <a:spcPts val="200"/>
+                <a:spcPts val="0"/>
+              </a:spcBef>
+              <a:spcAft>
+                <a:spcPts val="0"/>
               </a:spcAft>
             </a:pPr>
             <a:r>
@@ -16127,10 +16127,10 @@
                 <a:spcPct val="125000"/>
               </a:lnSpc>
               <a:spcBef>
-                <a:spcPts val="200"/>
-              </a:spcBef>
-              <a:spcAft>
-                <a:spcPts val="200"/>
+                <a:spcPts val="0"/>
+              </a:spcBef>
+              <a:spcAft>
+                <a:spcPts val="0"/>
               </a:spcAft>
             </a:pPr>
             <a:r>
@@ -16149,10 +16149,10 @@
                 <a:spcPct val="125000"/>
               </a:lnSpc>
               <a:spcBef>
-                <a:spcPts val="200"/>
-              </a:spcBef>
-              <a:spcAft>
-                <a:spcPts val="200"/>
+                <a:spcPts val="0"/>
+              </a:spcBef>
+              <a:spcAft>
+                <a:spcPts val="0"/>
               </a:spcAft>
             </a:pPr>
             <a:r>
@@ -16171,10 +16171,10 @@
                 <a:spcPct val="125000"/>
               </a:lnSpc>
               <a:spcBef>
-                <a:spcPts val="200"/>
-              </a:spcBef>
-              <a:spcAft>
-                <a:spcPts val="200"/>
+                <a:spcPts val="0"/>
+              </a:spcBef>
+              <a:spcAft>
+                <a:spcPts val="0"/>
               </a:spcAft>
             </a:pPr>
             <a:r>
@@ -16193,10 +16193,10 @@
                 <a:spcPct val="125000"/>
               </a:lnSpc>
               <a:spcBef>
-                <a:spcPts val="200"/>
-              </a:spcBef>
-              <a:spcAft>
-                <a:spcPts val="200"/>
+                <a:spcPts val="0"/>
+              </a:spcBef>
+              <a:spcAft>
+                <a:spcPts val="0"/>
               </a:spcAft>
             </a:pPr>
             <a:r>
@@ -16215,10 +16215,10 @@
                 <a:spcPct val="125000"/>
               </a:lnSpc>
               <a:spcBef>
-                <a:spcPts val="800"/>
-              </a:spcBef>
-              <a:spcAft>
-                <a:spcPts val="300"/>
+                <a:spcPts val="0"/>
+              </a:spcBef>
+              <a:spcAft>
+                <a:spcPts val="0"/>
               </a:spcAft>
             </a:pPr>
             <a:r>
@@ -16237,10 +16237,10 @@
                 <a:spcPct val="125000"/>
               </a:lnSpc>
               <a:spcBef>
-                <a:spcPts val="200"/>
-              </a:spcBef>
-              <a:spcAft>
-                <a:spcPts val="200"/>
+                <a:spcPts val="0"/>
+              </a:spcBef>
+              <a:spcAft>
+                <a:spcPts val="0"/>
               </a:spcAft>
             </a:pPr>
             <a:r>
@@ -16259,10 +16259,10 @@
                 <a:spcPct val="125000"/>
               </a:lnSpc>
               <a:spcBef>
-                <a:spcPts val="800"/>
-              </a:spcBef>
-              <a:spcAft>
-                <a:spcPts val="300"/>
+                <a:spcPts val="0"/>
+              </a:spcBef>
+              <a:spcAft>
+                <a:spcPts val="0"/>
               </a:spcAft>
             </a:pPr>
             <a:r>
@@ -16281,10 +16281,10 @@
                 <a:spcPct val="125000"/>
               </a:lnSpc>
               <a:spcBef>
-                <a:spcPts val="200"/>
-              </a:spcBef>
-              <a:spcAft>
-                <a:spcPts val="200"/>
+                <a:spcPts val="0"/>
+              </a:spcBef>
+              <a:spcAft>
+                <a:spcPts val="0"/>
               </a:spcAft>
             </a:pPr>
             <a:r>
@@ -16398,7 +16398,7 @@
                 <a:spcPts val="0"/>
               </a:spcBef>
               <a:spcAft>
-                <a:spcPts val="600"/>
+                <a:spcPts val="0"/>
               </a:spcAft>
             </a:pPr>
             <a:r>
@@ -16417,10 +16417,10 @@
                 <a:spcPct val="125000"/>
               </a:lnSpc>
               <a:spcBef>
-                <a:spcPts val="800"/>
-              </a:spcBef>
-              <a:spcAft>
-                <a:spcPts val="300"/>
+                <a:spcPts val="0"/>
+              </a:spcBef>
+              <a:spcAft>
+                <a:spcPts val="0"/>
               </a:spcAft>
             </a:pPr>
             <a:r>
@@ -16439,10 +16439,10 @@
                 <a:spcPct val="125000"/>
               </a:lnSpc>
               <a:spcBef>
-                <a:spcPts val="200"/>
-              </a:spcBef>
-              <a:spcAft>
-                <a:spcPts val="200"/>
+                <a:spcPts val="0"/>
+              </a:spcBef>
+              <a:spcAft>
+                <a:spcPts val="0"/>
               </a:spcAft>
             </a:pPr>
             <a:r>
@@ -16461,10 +16461,10 @@
                 <a:spcPct val="125000"/>
               </a:lnSpc>
               <a:spcBef>
-                <a:spcPts val="800"/>
-              </a:spcBef>
-              <a:spcAft>
-                <a:spcPts val="300"/>
+                <a:spcPts val="0"/>
+              </a:spcBef>
+              <a:spcAft>
+                <a:spcPts val="0"/>
               </a:spcAft>
             </a:pPr>
             <a:r>
@@ -16483,10 +16483,10 @@
                 <a:spcPct val="125000"/>
               </a:lnSpc>
               <a:spcBef>
-                <a:spcPts val="200"/>
-              </a:spcBef>
-              <a:spcAft>
-                <a:spcPts val="200"/>
+                <a:spcPts val="0"/>
+              </a:spcBef>
+              <a:spcAft>
+                <a:spcPts val="0"/>
               </a:spcAft>
             </a:pPr>
             <a:r>
@@ -16505,10 +16505,10 @@
                 <a:spcPct val="125000"/>
               </a:lnSpc>
               <a:spcBef>
-                <a:spcPts val="800"/>
-              </a:spcBef>
-              <a:spcAft>
-                <a:spcPts val="300"/>
+                <a:spcPts val="0"/>
+              </a:spcBef>
+              <a:spcAft>
+                <a:spcPts val="0"/>
               </a:spcAft>
             </a:pPr>
             <a:r>
@@ -16527,10 +16527,10 @@
                 <a:spcPct val="125000"/>
               </a:lnSpc>
               <a:spcBef>
-                <a:spcPts val="200"/>
-              </a:spcBef>
-              <a:spcAft>
-                <a:spcPts val="200"/>
+                <a:spcPts val="0"/>
+              </a:spcBef>
+              <a:spcAft>
+                <a:spcPts val="0"/>
               </a:spcAft>
             </a:pPr>
             <a:r>
@@ -16549,10 +16549,10 @@
                 <a:spcPct val="125000"/>
               </a:lnSpc>
               <a:spcBef>
-                <a:spcPts val="800"/>
-              </a:spcBef>
-              <a:spcAft>
-                <a:spcPts val="300"/>
+                <a:spcPts val="0"/>
+              </a:spcBef>
+              <a:spcAft>
+                <a:spcPts val="0"/>
               </a:spcAft>
             </a:pPr>
             <a:r>
@@ -16571,10 +16571,10 @@
                 <a:spcPct val="125000"/>
               </a:lnSpc>
               <a:spcBef>
-                <a:spcPts val="200"/>
-              </a:spcBef>
-              <a:spcAft>
-                <a:spcPts val="200"/>
+                <a:spcPts val="0"/>
+              </a:spcBef>
+              <a:spcAft>
+                <a:spcPts val="0"/>
               </a:spcAft>
             </a:pPr>
             <a:r>

--- a/ppts_output_v3/03_个人所得税风险指引.pptx
+++ b/ppts_output_v3/03_个人所得税风险指引.pptx
@@ -3300,7 +3300,7 @@
           <a:bodyPr rtlCol="0" anchor="ctr" wrap="square" lIns="365760"/>
           <a:lstStyle/>
           <a:p>
-            <a:pPr algn="l"/>
+            <a:pPr algn="just"/>
             <a:r>
               <a:rPr sz="1500" b="1">
                 <a:solidFill>
@@ -3334,7 +3334,7 @@
           </a:bodyPr>
           <a:lstStyle/>
           <a:p>
-            <a:pPr algn="l">
+            <a:pPr algn="just">
               <a:lnSpc>
                 <a:spcPct val="125000"/>
               </a:lnSpc>
@@ -3356,7 +3356,7 @@
             </a:r>
           </a:p>
           <a:p>
-            <a:pPr algn="l">
+            <a:pPr algn="just">
               <a:lnSpc>
                 <a:spcPct val="125000"/>
               </a:lnSpc>
@@ -3378,7 +3378,7 @@
             </a:r>
           </a:p>
           <a:p>
-            <a:pPr algn="l">
+            <a:pPr algn="just">
               <a:lnSpc>
                 <a:spcPct val="125000"/>
               </a:lnSpc>
@@ -3400,7 +3400,7 @@
             </a:r>
           </a:p>
           <a:p>
-            <a:pPr algn="l">
+            <a:pPr algn="just">
               <a:lnSpc>
                 <a:spcPct val="125000"/>
               </a:lnSpc>
@@ -3422,7 +3422,7 @@
             </a:r>
           </a:p>
           <a:p>
-            <a:pPr algn="l">
+            <a:pPr algn="just">
               <a:lnSpc>
                 <a:spcPct val="125000"/>
               </a:lnSpc>
@@ -3444,7 +3444,7 @@
             </a:r>
           </a:p>
           <a:p>
-            <a:pPr algn="l">
+            <a:pPr algn="just">
               <a:lnSpc>
                 <a:spcPct val="125000"/>
               </a:lnSpc>
@@ -3466,7 +3466,7 @@
             </a:r>
           </a:p>
           <a:p>
-            <a:pPr algn="l">
+            <a:pPr algn="just">
               <a:lnSpc>
                 <a:spcPct val="125000"/>
               </a:lnSpc>
@@ -3488,7 +3488,7 @@
             </a:r>
           </a:p>
           <a:p>
-            <a:pPr algn="l">
+            <a:pPr algn="just">
               <a:lnSpc>
                 <a:spcPct val="125000"/>
               </a:lnSpc>
@@ -3510,7 +3510,7 @@
             </a:r>
           </a:p>
           <a:p>
-            <a:pPr algn="l">
+            <a:pPr algn="just">
               <a:lnSpc>
                 <a:spcPct val="125000"/>
               </a:lnSpc>
@@ -3532,7 +3532,7 @@
             </a:r>
           </a:p>
           <a:p>
-            <a:pPr algn="l">
+            <a:pPr algn="just">
               <a:lnSpc>
                 <a:spcPct val="125000"/>
               </a:lnSpc>
@@ -3554,7 +3554,7 @@
             </a:r>
           </a:p>
           <a:p>
-            <a:pPr algn="l">
+            <a:pPr algn="just">
               <a:lnSpc>
                 <a:spcPct val="125000"/>
               </a:lnSpc>
@@ -3576,7 +3576,7 @@
             </a:r>
           </a:p>
           <a:p>
-            <a:pPr algn="l">
+            <a:pPr algn="just">
               <a:lnSpc>
                 <a:spcPct val="125000"/>
               </a:lnSpc>
@@ -3656,7 +3656,7 @@
           <a:bodyPr rtlCol="0" anchor="ctr" wrap="square" lIns="365760"/>
           <a:lstStyle/>
           <a:p>
-            <a:pPr algn="l"/>
+            <a:pPr algn="just"/>
             <a:r>
               <a:rPr sz="1500" b="1">
                 <a:solidFill>
@@ -3690,7 +3690,7 @@
           </a:bodyPr>
           <a:lstStyle/>
           <a:p>
-            <a:pPr algn="l">
+            <a:pPr algn="just">
               <a:lnSpc>
                 <a:spcPct val="125000"/>
               </a:lnSpc>
@@ -3712,7 +3712,7 @@
             </a:r>
           </a:p>
           <a:p>
-            <a:pPr algn="l">
+            <a:pPr algn="just">
               <a:lnSpc>
                 <a:spcPct val="125000"/>
               </a:lnSpc>
@@ -3734,7 +3734,7 @@
             </a:r>
           </a:p>
           <a:p>
-            <a:pPr algn="l">
+            <a:pPr algn="just">
               <a:lnSpc>
                 <a:spcPct val="125000"/>
               </a:lnSpc>
@@ -3756,7 +3756,7 @@
             </a:r>
           </a:p>
           <a:p>
-            <a:pPr algn="l">
+            <a:pPr algn="just">
               <a:lnSpc>
                 <a:spcPct val="125000"/>
               </a:lnSpc>
@@ -3778,7 +3778,7 @@
             </a:r>
           </a:p>
           <a:p>
-            <a:pPr algn="l">
+            <a:pPr algn="just">
               <a:lnSpc>
                 <a:spcPct val="125000"/>
               </a:lnSpc>
@@ -3800,7 +3800,7 @@
             </a:r>
           </a:p>
           <a:p>
-            <a:pPr algn="l">
+            <a:pPr algn="just">
               <a:lnSpc>
                 <a:spcPct val="125000"/>
               </a:lnSpc>
@@ -3822,7 +3822,7 @@
             </a:r>
           </a:p>
           <a:p>
-            <a:pPr algn="l">
+            <a:pPr algn="just">
               <a:lnSpc>
                 <a:spcPct val="125000"/>
               </a:lnSpc>
@@ -3844,7 +3844,7 @@
             </a:r>
           </a:p>
           <a:p>
-            <a:pPr algn="l">
+            <a:pPr algn="just">
               <a:lnSpc>
                 <a:spcPct val="125000"/>
               </a:lnSpc>
@@ -3866,7 +3866,7 @@
             </a:r>
           </a:p>
           <a:p>
-            <a:pPr algn="l">
+            <a:pPr algn="just">
               <a:lnSpc>
                 <a:spcPct val="125000"/>
               </a:lnSpc>
@@ -3888,7 +3888,7 @@
             </a:r>
           </a:p>
           <a:p>
-            <a:pPr algn="l">
+            <a:pPr algn="just">
               <a:lnSpc>
                 <a:spcPct val="125000"/>
               </a:lnSpc>
@@ -3968,7 +3968,7 @@
           <a:bodyPr rtlCol="0" anchor="ctr" wrap="square" lIns="365760"/>
           <a:lstStyle/>
           <a:p>
-            <a:pPr algn="l"/>
+            <a:pPr algn="just"/>
             <a:r>
               <a:rPr sz="1500" b="1">
                 <a:solidFill>
@@ -4002,7 +4002,7 @@
           </a:bodyPr>
           <a:lstStyle/>
           <a:p>
-            <a:pPr algn="l">
+            <a:pPr algn="just">
               <a:lnSpc>
                 <a:spcPct val="125000"/>
               </a:lnSpc>
@@ -4024,7 +4024,7 @@
             </a:r>
           </a:p>
           <a:p>
-            <a:pPr algn="l">
+            <a:pPr algn="just">
               <a:lnSpc>
                 <a:spcPct val="125000"/>
               </a:lnSpc>
@@ -4046,7 +4046,7 @@
             </a:r>
           </a:p>
           <a:p>
-            <a:pPr algn="l">
+            <a:pPr algn="just">
               <a:lnSpc>
                 <a:spcPct val="125000"/>
               </a:lnSpc>
@@ -4068,7 +4068,7 @@
             </a:r>
           </a:p>
           <a:p>
-            <a:pPr algn="l">
+            <a:pPr algn="just">
               <a:lnSpc>
                 <a:spcPct val="125000"/>
               </a:lnSpc>
@@ -4090,7 +4090,7 @@
             </a:r>
           </a:p>
           <a:p>
-            <a:pPr algn="l">
+            <a:pPr algn="just">
               <a:lnSpc>
                 <a:spcPct val="125000"/>
               </a:lnSpc>
@@ -4112,7 +4112,7 @@
             </a:r>
           </a:p>
           <a:p>
-            <a:pPr algn="l">
+            <a:pPr algn="just">
               <a:lnSpc>
                 <a:spcPct val="125000"/>
               </a:lnSpc>
@@ -4134,7 +4134,7 @@
             </a:r>
           </a:p>
           <a:p>
-            <a:pPr algn="l">
+            <a:pPr algn="just">
               <a:lnSpc>
                 <a:spcPct val="125000"/>
               </a:lnSpc>
@@ -4156,7 +4156,7 @@
             </a:r>
           </a:p>
           <a:p>
-            <a:pPr algn="l">
+            <a:pPr algn="just">
               <a:lnSpc>
                 <a:spcPct val="125000"/>
               </a:lnSpc>
@@ -4178,7 +4178,7 @@
             </a:r>
           </a:p>
           <a:p>
-            <a:pPr algn="l">
+            <a:pPr algn="just">
               <a:lnSpc>
                 <a:spcPct val="125000"/>
               </a:lnSpc>
@@ -4200,7 +4200,7 @@
             </a:r>
           </a:p>
           <a:p>
-            <a:pPr algn="l">
+            <a:pPr algn="just">
               <a:lnSpc>
                 <a:spcPct val="125000"/>
               </a:lnSpc>
@@ -4280,7 +4280,7 @@
           <a:bodyPr rtlCol="0" anchor="ctr" wrap="square" lIns="365760"/>
           <a:lstStyle/>
           <a:p>
-            <a:pPr algn="l"/>
+            <a:pPr algn="just"/>
             <a:r>
               <a:rPr sz="1500" b="1">
                 <a:solidFill>
@@ -4314,7 +4314,7 @@
           </a:bodyPr>
           <a:lstStyle/>
           <a:p>
-            <a:pPr algn="l">
+            <a:pPr algn="just">
               <a:lnSpc>
                 <a:spcPct val="125000"/>
               </a:lnSpc>
@@ -4336,7 +4336,7 @@
             </a:r>
           </a:p>
           <a:p>
-            <a:pPr algn="l">
+            <a:pPr algn="just">
               <a:lnSpc>
                 <a:spcPct val="125000"/>
               </a:lnSpc>
@@ -4358,7 +4358,7 @@
             </a:r>
           </a:p>
           <a:p>
-            <a:pPr algn="l">
+            <a:pPr algn="just">
               <a:lnSpc>
                 <a:spcPct val="125000"/>
               </a:lnSpc>
@@ -4380,7 +4380,7 @@
             </a:r>
           </a:p>
           <a:p>
-            <a:pPr algn="l">
+            <a:pPr algn="just">
               <a:lnSpc>
                 <a:spcPct val="125000"/>
               </a:lnSpc>
@@ -4402,7 +4402,7 @@
             </a:r>
           </a:p>
           <a:p>
-            <a:pPr algn="l">
+            <a:pPr algn="just">
               <a:lnSpc>
                 <a:spcPct val="125000"/>
               </a:lnSpc>
@@ -4424,7 +4424,7 @@
             </a:r>
           </a:p>
           <a:p>
-            <a:pPr algn="l">
+            <a:pPr algn="just">
               <a:lnSpc>
                 <a:spcPct val="125000"/>
               </a:lnSpc>
@@ -4446,7 +4446,7 @@
             </a:r>
           </a:p>
           <a:p>
-            <a:pPr algn="l">
+            <a:pPr algn="just">
               <a:lnSpc>
                 <a:spcPct val="125000"/>
               </a:lnSpc>
@@ -4468,7 +4468,7 @@
             </a:r>
           </a:p>
           <a:p>
-            <a:pPr algn="l">
+            <a:pPr algn="just">
               <a:lnSpc>
                 <a:spcPct val="125000"/>
               </a:lnSpc>
@@ -4490,7 +4490,7 @@
             </a:r>
           </a:p>
           <a:p>
-            <a:pPr algn="l">
+            <a:pPr algn="just">
               <a:lnSpc>
                 <a:spcPct val="125000"/>
               </a:lnSpc>
@@ -4570,7 +4570,7 @@
           <a:bodyPr rtlCol="0" anchor="ctr" wrap="square" lIns="365760"/>
           <a:lstStyle/>
           <a:p>
-            <a:pPr algn="l"/>
+            <a:pPr algn="just"/>
             <a:r>
               <a:rPr sz="1500" b="1">
                 <a:solidFill>
@@ -4604,7 +4604,7 @@
           </a:bodyPr>
           <a:lstStyle/>
           <a:p>
-            <a:pPr algn="l">
+            <a:pPr algn="just">
               <a:lnSpc>
                 <a:spcPct val="125000"/>
               </a:lnSpc>
@@ -4626,7 +4626,7 @@
             </a:r>
           </a:p>
           <a:p>
-            <a:pPr algn="l">
+            <a:pPr algn="just">
               <a:lnSpc>
                 <a:spcPct val="125000"/>
               </a:lnSpc>
@@ -4648,7 +4648,7 @@
             </a:r>
           </a:p>
           <a:p>
-            <a:pPr algn="l">
+            <a:pPr algn="just">
               <a:lnSpc>
                 <a:spcPct val="125000"/>
               </a:lnSpc>
@@ -4670,7 +4670,7 @@
             </a:r>
           </a:p>
           <a:p>
-            <a:pPr algn="l">
+            <a:pPr algn="just">
               <a:lnSpc>
                 <a:spcPct val="125000"/>
               </a:lnSpc>
@@ -4692,7 +4692,7 @@
             </a:r>
           </a:p>
           <a:p>
-            <a:pPr algn="l">
+            <a:pPr algn="just">
               <a:lnSpc>
                 <a:spcPct val="125000"/>
               </a:lnSpc>
@@ -4714,7 +4714,7 @@
             </a:r>
           </a:p>
           <a:p>
-            <a:pPr algn="l">
+            <a:pPr algn="just">
               <a:lnSpc>
                 <a:spcPct val="125000"/>
               </a:lnSpc>
@@ -4736,7 +4736,7 @@
             </a:r>
           </a:p>
           <a:p>
-            <a:pPr algn="l">
+            <a:pPr algn="just">
               <a:lnSpc>
                 <a:spcPct val="125000"/>
               </a:lnSpc>
@@ -4758,7 +4758,7 @@
             </a:r>
           </a:p>
           <a:p>
-            <a:pPr algn="l">
+            <a:pPr algn="just">
               <a:lnSpc>
                 <a:spcPct val="125000"/>
               </a:lnSpc>
@@ -4780,7 +4780,7 @@
             </a:r>
           </a:p>
           <a:p>
-            <a:pPr algn="l">
+            <a:pPr algn="just">
               <a:lnSpc>
                 <a:spcPct val="125000"/>
               </a:lnSpc>
@@ -4802,7 +4802,7 @@
             </a:r>
           </a:p>
           <a:p>
-            <a:pPr algn="l">
+            <a:pPr algn="just">
               <a:lnSpc>
                 <a:spcPct val="125000"/>
               </a:lnSpc>
@@ -4824,7 +4824,7 @@
             </a:r>
           </a:p>
           <a:p>
-            <a:pPr algn="l">
+            <a:pPr algn="just">
               <a:lnSpc>
                 <a:spcPct val="125000"/>
               </a:lnSpc>
@@ -4846,7 +4846,7 @@
             </a:r>
           </a:p>
           <a:p>
-            <a:pPr algn="l">
+            <a:pPr algn="just">
               <a:lnSpc>
                 <a:spcPct val="125000"/>
               </a:lnSpc>
@@ -4868,7 +4868,7 @@
             </a:r>
           </a:p>
           <a:p>
-            <a:pPr algn="l">
+            <a:pPr algn="just">
               <a:lnSpc>
                 <a:spcPct val="125000"/>
               </a:lnSpc>
@@ -4890,7 +4890,7 @@
             </a:r>
           </a:p>
           <a:p>
-            <a:pPr algn="l">
+            <a:pPr algn="just">
               <a:lnSpc>
                 <a:spcPct val="125000"/>
               </a:lnSpc>
@@ -4912,7 +4912,7 @@
             </a:r>
           </a:p>
           <a:p>
-            <a:pPr algn="l">
+            <a:pPr algn="just">
               <a:lnSpc>
                 <a:spcPct val="125000"/>
               </a:lnSpc>
@@ -4992,7 +4992,7 @@
           <a:bodyPr rtlCol="0" anchor="ctr" wrap="square" lIns="365760"/>
           <a:lstStyle/>
           <a:p>
-            <a:pPr algn="l"/>
+            <a:pPr algn="just"/>
             <a:r>
               <a:rPr sz="1500" b="1">
                 <a:solidFill>
@@ -5026,7 +5026,7 @@
           </a:bodyPr>
           <a:lstStyle/>
           <a:p>
-            <a:pPr algn="l">
+            <a:pPr algn="just">
               <a:lnSpc>
                 <a:spcPct val="125000"/>
               </a:lnSpc>
@@ -5048,7 +5048,7 @@
             </a:r>
           </a:p>
           <a:p>
-            <a:pPr algn="l">
+            <a:pPr algn="just">
               <a:lnSpc>
                 <a:spcPct val="125000"/>
               </a:lnSpc>
@@ -5070,7 +5070,7 @@
             </a:r>
           </a:p>
           <a:p>
-            <a:pPr algn="l">
+            <a:pPr algn="just">
               <a:lnSpc>
                 <a:spcPct val="125000"/>
               </a:lnSpc>
@@ -5092,7 +5092,7 @@
             </a:r>
           </a:p>
           <a:p>
-            <a:pPr algn="l">
+            <a:pPr algn="just">
               <a:lnSpc>
                 <a:spcPct val="125000"/>
               </a:lnSpc>
@@ -5114,7 +5114,7 @@
             </a:r>
           </a:p>
           <a:p>
-            <a:pPr algn="l">
+            <a:pPr algn="just">
               <a:lnSpc>
                 <a:spcPct val="125000"/>
               </a:lnSpc>
@@ -5136,7 +5136,7 @@
             </a:r>
           </a:p>
           <a:p>
-            <a:pPr algn="l">
+            <a:pPr algn="just">
               <a:lnSpc>
                 <a:spcPct val="125000"/>
               </a:lnSpc>
@@ -5158,7 +5158,7 @@
             </a:r>
           </a:p>
           <a:p>
-            <a:pPr algn="l">
+            <a:pPr algn="just">
               <a:lnSpc>
                 <a:spcPct val="125000"/>
               </a:lnSpc>
@@ -5180,7 +5180,7 @@
             </a:r>
           </a:p>
           <a:p>
-            <a:pPr algn="l">
+            <a:pPr algn="just">
               <a:lnSpc>
                 <a:spcPct val="125000"/>
               </a:lnSpc>
@@ -5202,7 +5202,7 @@
             </a:r>
           </a:p>
           <a:p>
-            <a:pPr algn="l">
+            <a:pPr algn="just">
               <a:lnSpc>
                 <a:spcPct val="125000"/>
               </a:lnSpc>
@@ -5224,7 +5224,7 @@
             </a:r>
           </a:p>
           <a:p>
-            <a:pPr algn="l">
+            <a:pPr algn="just">
               <a:lnSpc>
                 <a:spcPct val="125000"/>
               </a:lnSpc>
@@ -5304,7 +5304,7 @@
           <a:bodyPr rtlCol="0" anchor="ctr" wrap="square" lIns="365760"/>
           <a:lstStyle/>
           <a:p>
-            <a:pPr algn="l"/>
+            <a:pPr algn="just"/>
             <a:r>
               <a:rPr sz="1500" b="1">
                 <a:solidFill>
@@ -5338,7 +5338,7 @@
           </a:bodyPr>
           <a:lstStyle/>
           <a:p>
-            <a:pPr algn="l">
+            <a:pPr algn="just">
               <a:lnSpc>
                 <a:spcPct val="125000"/>
               </a:lnSpc>
@@ -5360,7 +5360,7 @@
             </a:r>
           </a:p>
           <a:p>
-            <a:pPr algn="l">
+            <a:pPr algn="just">
               <a:lnSpc>
                 <a:spcPct val="125000"/>
               </a:lnSpc>
@@ -5382,7 +5382,7 @@
             </a:r>
           </a:p>
           <a:p>
-            <a:pPr algn="l">
+            <a:pPr algn="just">
               <a:lnSpc>
                 <a:spcPct val="125000"/>
               </a:lnSpc>
@@ -5404,7 +5404,7 @@
             </a:r>
           </a:p>
           <a:p>
-            <a:pPr algn="l">
+            <a:pPr algn="just">
               <a:lnSpc>
                 <a:spcPct val="125000"/>
               </a:lnSpc>
@@ -5426,7 +5426,7 @@
             </a:r>
           </a:p>
           <a:p>
-            <a:pPr algn="l">
+            <a:pPr algn="just">
               <a:lnSpc>
                 <a:spcPct val="125000"/>
               </a:lnSpc>
@@ -5448,7 +5448,7 @@
             </a:r>
           </a:p>
           <a:p>
-            <a:pPr algn="l">
+            <a:pPr algn="just">
               <a:lnSpc>
                 <a:spcPct val="125000"/>
               </a:lnSpc>
@@ -5470,7 +5470,7 @@
             </a:r>
           </a:p>
           <a:p>
-            <a:pPr algn="l">
+            <a:pPr algn="just">
               <a:lnSpc>
                 <a:spcPct val="125000"/>
               </a:lnSpc>
@@ -5492,7 +5492,7 @@
             </a:r>
           </a:p>
           <a:p>
-            <a:pPr algn="l">
+            <a:pPr algn="just">
               <a:lnSpc>
                 <a:spcPct val="125000"/>
               </a:lnSpc>
@@ -5514,7 +5514,7 @@
             </a:r>
           </a:p>
           <a:p>
-            <a:pPr algn="l">
+            <a:pPr algn="just">
               <a:lnSpc>
                 <a:spcPct val="125000"/>
               </a:lnSpc>
@@ -5536,7 +5536,7 @@
             </a:r>
           </a:p>
           <a:p>
-            <a:pPr algn="l">
+            <a:pPr algn="just">
               <a:lnSpc>
                 <a:spcPct val="125000"/>
               </a:lnSpc>
@@ -5558,7 +5558,7 @@
             </a:r>
           </a:p>
           <a:p>
-            <a:pPr algn="l">
+            <a:pPr algn="just">
               <a:lnSpc>
                 <a:spcPct val="125000"/>
               </a:lnSpc>
@@ -5580,7 +5580,7 @@
             </a:r>
           </a:p>
           <a:p>
-            <a:pPr algn="l">
+            <a:pPr algn="just">
               <a:lnSpc>
                 <a:spcPct val="125000"/>
               </a:lnSpc>
@@ -5602,7 +5602,7 @@
             </a:r>
           </a:p>
           <a:p>
-            <a:pPr algn="l">
+            <a:pPr algn="just">
               <a:lnSpc>
                 <a:spcPct val="125000"/>
               </a:lnSpc>
@@ -5682,7 +5682,7 @@
           <a:bodyPr rtlCol="0" anchor="ctr" wrap="square" lIns="365760"/>
           <a:lstStyle/>
           <a:p>
-            <a:pPr algn="l"/>
+            <a:pPr algn="just"/>
             <a:r>
               <a:rPr sz="1500" b="1">
                 <a:solidFill>
@@ -5716,7 +5716,7 @@
           </a:bodyPr>
           <a:lstStyle/>
           <a:p>
-            <a:pPr algn="l">
+            <a:pPr algn="just">
               <a:lnSpc>
                 <a:spcPct val="125000"/>
               </a:lnSpc>
@@ -5738,7 +5738,7 @@
             </a:r>
           </a:p>
           <a:p>
-            <a:pPr algn="l">
+            <a:pPr algn="just">
               <a:lnSpc>
                 <a:spcPct val="125000"/>
               </a:lnSpc>
@@ -5760,7 +5760,7 @@
             </a:r>
           </a:p>
           <a:p>
-            <a:pPr algn="l">
+            <a:pPr algn="just">
               <a:lnSpc>
                 <a:spcPct val="125000"/>
               </a:lnSpc>
@@ -5782,7 +5782,7 @@
             </a:r>
           </a:p>
           <a:p>
-            <a:pPr algn="l">
+            <a:pPr algn="just">
               <a:lnSpc>
                 <a:spcPct val="125000"/>
               </a:lnSpc>
@@ -5804,7 +5804,7 @@
             </a:r>
           </a:p>
           <a:p>
-            <a:pPr algn="l">
+            <a:pPr algn="just">
               <a:lnSpc>
                 <a:spcPct val="125000"/>
               </a:lnSpc>
@@ -5826,7 +5826,7 @@
             </a:r>
           </a:p>
           <a:p>
-            <a:pPr algn="l">
+            <a:pPr algn="just">
               <a:lnSpc>
                 <a:spcPct val="125000"/>
               </a:lnSpc>
@@ -5848,7 +5848,7 @@
             </a:r>
           </a:p>
           <a:p>
-            <a:pPr algn="l">
+            <a:pPr algn="just">
               <a:lnSpc>
                 <a:spcPct val="125000"/>
               </a:lnSpc>
@@ -5870,7 +5870,7 @@
             </a:r>
           </a:p>
           <a:p>
-            <a:pPr algn="l">
+            <a:pPr algn="just">
               <a:lnSpc>
                 <a:spcPct val="125000"/>
               </a:lnSpc>
@@ -5892,7 +5892,7 @@
             </a:r>
           </a:p>
           <a:p>
-            <a:pPr algn="l">
+            <a:pPr algn="just">
               <a:lnSpc>
                 <a:spcPct val="125000"/>
               </a:lnSpc>
@@ -5914,7 +5914,7 @@
             </a:r>
           </a:p>
           <a:p>
-            <a:pPr algn="l">
+            <a:pPr algn="just">
               <a:lnSpc>
                 <a:spcPct val="125000"/>
               </a:lnSpc>
@@ -5936,7 +5936,7 @@
             </a:r>
           </a:p>
           <a:p>
-            <a:pPr algn="l">
+            <a:pPr algn="just">
               <a:lnSpc>
                 <a:spcPct val="125000"/>
               </a:lnSpc>
@@ -5958,7 +5958,7 @@
             </a:r>
           </a:p>
           <a:p>
-            <a:pPr algn="l">
+            <a:pPr algn="just">
               <a:lnSpc>
                 <a:spcPct val="125000"/>
               </a:lnSpc>
@@ -6038,7 +6038,7 @@
           <a:bodyPr rtlCol="0" anchor="ctr" wrap="square" lIns="365760"/>
           <a:lstStyle/>
           <a:p>
-            <a:pPr algn="l"/>
+            <a:pPr algn="just"/>
             <a:r>
               <a:rPr sz="1500" b="1">
                 <a:solidFill>
@@ -6072,7 +6072,7 @@
           </a:bodyPr>
           <a:lstStyle/>
           <a:p>
-            <a:pPr algn="l">
+            <a:pPr algn="just">
               <a:lnSpc>
                 <a:spcPct val="125000"/>
               </a:lnSpc>
@@ -6094,7 +6094,7 @@
             </a:r>
           </a:p>
           <a:p>
-            <a:pPr algn="l">
+            <a:pPr algn="just">
               <a:lnSpc>
                 <a:spcPct val="125000"/>
               </a:lnSpc>
@@ -6116,7 +6116,7 @@
             </a:r>
           </a:p>
           <a:p>
-            <a:pPr algn="l">
+            <a:pPr algn="just">
               <a:lnSpc>
                 <a:spcPct val="125000"/>
               </a:lnSpc>
@@ -6138,7 +6138,7 @@
             </a:r>
           </a:p>
           <a:p>
-            <a:pPr algn="l">
+            <a:pPr algn="just">
               <a:lnSpc>
                 <a:spcPct val="125000"/>
               </a:lnSpc>
@@ -6160,7 +6160,7 @@
             </a:r>
           </a:p>
           <a:p>
-            <a:pPr algn="l">
+            <a:pPr algn="just">
               <a:lnSpc>
                 <a:spcPct val="125000"/>
               </a:lnSpc>
@@ -6182,7 +6182,7 @@
             </a:r>
           </a:p>
           <a:p>
-            <a:pPr algn="l">
+            <a:pPr algn="just">
               <a:lnSpc>
                 <a:spcPct val="125000"/>
               </a:lnSpc>
@@ -6204,7 +6204,7 @@
             </a:r>
           </a:p>
           <a:p>
-            <a:pPr algn="l">
+            <a:pPr algn="just">
               <a:lnSpc>
                 <a:spcPct val="125000"/>
               </a:lnSpc>
@@ -6226,7 +6226,7 @@
             </a:r>
           </a:p>
           <a:p>
-            <a:pPr algn="l">
+            <a:pPr algn="just">
               <a:lnSpc>
                 <a:spcPct val="125000"/>
               </a:lnSpc>
@@ -6248,7 +6248,7 @@
             </a:r>
           </a:p>
           <a:p>
-            <a:pPr algn="l">
+            <a:pPr algn="just">
               <a:lnSpc>
                 <a:spcPct val="125000"/>
               </a:lnSpc>
@@ -6270,7 +6270,7 @@
             </a:r>
           </a:p>
           <a:p>
-            <a:pPr algn="l">
+            <a:pPr algn="just">
               <a:lnSpc>
                 <a:spcPct val="125000"/>
               </a:lnSpc>
@@ -6292,7 +6292,7 @@
             </a:r>
           </a:p>
           <a:p>
-            <a:pPr algn="l">
+            <a:pPr algn="just">
               <a:lnSpc>
                 <a:spcPct val="125000"/>
               </a:lnSpc>
@@ -6314,7 +6314,7 @@
             </a:r>
           </a:p>
           <a:p>
-            <a:pPr algn="l">
+            <a:pPr algn="just">
               <a:lnSpc>
                 <a:spcPct val="125000"/>
               </a:lnSpc>
@@ -6394,7 +6394,7 @@
           <a:bodyPr rtlCol="0" anchor="ctr" wrap="square" lIns="365760"/>
           <a:lstStyle/>
           <a:p>
-            <a:pPr algn="l"/>
+            <a:pPr algn="just"/>
             <a:r>
               <a:rPr sz="1500" b="1">
                 <a:solidFill>
@@ -6428,7 +6428,7 @@
           </a:bodyPr>
           <a:lstStyle/>
           <a:p>
-            <a:pPr algn="l">
+            <a:pPr algn="just">
               <a:lnSpc>
                 <a:spcPct val="125000"/>
               </a:lnSpc>
@@ -6450,7 +6450,7 @@
             </a:r>
           </a:p>
           <a:p>
-            <a:pPr algn="l">
+            <a:pPr algn="just">
               <a:lnSpc>
                 <a:spcPct val="125000"/>
               </a:lnSpc>
@@ -6472,7 +6472,7 @@
             </a:r>
           </a:p>
           <a:p>
-            <a:pPr algn="l">
+            <a:pPr algn="just">
               <a:lnSpc>
                 <a:spcPct val="125000"/>
               </a:lnSpc>
@@ -6494,7 +6494,7 @@
             </a:r>
           </a:p>
           <a:p>
-            <a:pPr algn="l">
+            <a:pPr algn="just">
               <a:lnSpc>
                 <a:spcPct val="125000"/>
               </a:lnSpc>
@@ -6516,7 +6516,7 @@
             </a:r>
           </a:p>
           <a:p>
-            <a:pPr algn="l">
+            <a:pPr algn="just">
               <a:lnSpc>
                 <a:spcPct val="125000"/>
               </a:lnSpc>
@@ -6538,7 +6538,7 @@
             </a:r>
           </a:p>
           <a:p>
-            <a:pPr algn="l">
+            <a:pPr algn="just">
               <a:lnSpc>
                 <a:spcPct val="125000"/>
               </a:lnSpc>
@@ -6560,7 +6560,7 @@
             </a:r>
           </a:p>
           <a:p>
-            <a:pPr algn="l">
+            <a:pPr algn="just">
               <a:lnSpc>
                 <a:spcPct val="125000"/>
               </a:lnSpc>
@@ -6582,7 +6582,7 @@
             </a:r>
           </a:p>
           <a:p>
-            <a:pPr algn="l">
+            <a:pPr algn="just">
               <a:lnSpc>
                 <a:spcPct val="125000"/>
               </a:lnSpc>
@@ -6604,7 +6604,7 @@
             </a:r>
           </a:p>
           <a:p>
-            <a:pPr algn="l">
+            <a:pPr algn="just">
               <a:lnSpc>
                 <a:spcPct val="125000"/>
               </a:lnSpc>
@@ -6626,7 +6626,7 @@
             </a:r>
           </a:p>
           <a:p>
-            <a:pPr algn="l">
+            <a:pPr algn="just">
               <a:lnSpc>
                 <a:spcPct val="125000"/>
               </a:lnSpc>
@@ -6706,7 +6706,7 @@
           <a:bodyPr rtlCol="0" anchor="ctr" wrap="square" lIns="365760"/>
           <a:lstStyle/>
           <a:p>
-            <a:pPr algn="l"/>
+            <a:pPr algn="just"/>
             <a:r>
               <a:rPr sz="1500" b="1">
                 <a:solidFill>
@@ -6740,7 +6740,7 @@
           </a:bodyPr>
           <a:lstStyle/>
           <a:p>
-            <a:pPr algn="l">
+            <a:pPr algn="just">
               <a:lnSpc>
                 <a:spcPct val="125000"/>
               </a:lnSpc>
@@ -6762,7 +6762,7 @@
             </a:r>
           </a:p>
           <a:p>
-            <a:pPr algn="l">
+            <a:pPr algn="just">
               <a:lnSpc>
                 <a:spcPct val="125000"/>
               </a:lnSpc>
@@ -6784,7 +6784,7 @@
             </a:r>
           </a:p>
           <a:p>
-            <a:pPr algn="l">
+            <a:pPr algn="just">
               <a:lnSpc>
                 <a:spcPct val="125000"/>
               </a:lnSpc>
@@ -6806,7 +6806,7 @@
             </a:r>
           </a:p>
           <a:p>
-            <a:pPr algn="l">
+            <a:pPr algn="just">
               <a:lnSpc>
                 <a:spcPct val="125000"/>
               </a:lnSpc>
@@ -6828,7 +6828,7 @@
             </a:r>
           </a:p>
           <a:p>
-            <a:pPr algn="l">
+            <a:pPr algn="just">
               <a:lnSpc>
                 <a:spcPct val="125000"/>
               </a:lnSpc>
@@ -6850,7 +6850,7 @@
             </a:r>
           </a:p>
           <a:p>
-            <a:pPr algn="l">
+            <a:pPr algn="just">
               <a:lnSpc>
                 <a:spcPct val="125000"/>
               </a:lnSpc>
@@ -6872,7 +6872,7 @@
             </a:r>
           </a:p>
           <a:p>
-            <a:pPr algn="l">
+            <a:pPr algn="just">
               <a:lnSpc>
                 <a:spcPct val="125000"/>
               </a:lnSpc>
@@ -6894,7 +6894,7 @@
             </a:r>
           </a:p>
           <a:p>
-            <a:pPr algn="l">
+            <a:pPr algn="just">
               <a:lnSpc>
                 <a:spcPct val="125000"/>
               </a:lnSpc>
@@ -6916,7 +6916,7 @@
             </a:r>
           </a:p>
           <a:p>
-            <a:pPr algn="l">
+            <a:pPr algn="just">
               <a:lnSpc>
                 <a:spcPct val="125000"/>
               </a:lnSpc>
@@ -6938,7 +6938,7 @@
             </a:r>
           </a:p>
           <a:p>
-            <a:pPr algn="l">
+            <a:pPr algn="just">
               <a:lnSpc>
                 <a:spcPct val="125000"/>
               </a:lnSpc>
@@ -6960,7 +6960,7 @@
             </a:r>
           </a:p>
           <a:p>
-            <a:pPr algn="l">
+            <a:pPr algn="just">
               <a:lnSpc>
                 <a:spcPct val="125000"/>
               </a:lnSpc>
@@ -7040,7 +7040,7 @@
           <a:bodyPr rtlCol="0" anchor="ctr" wrap="square" lIns="365760"/>
           <a:lstStyle/>
           <a:p>
-            <a:pPr algn="l"/>
+            <a:pPr algn="just"/>
             <a:r>
               <a:rPr sz="1500" b="1">
                 <a:solidFill>
@@ -7074,7 +7074,7 @@
           </a:bodyPr>
           <a:lstStyle/>
           <a:p>
-            <a:pPr algn="l">
+            <a:pPr algn="just">
               <a:lnSpc>
                 <a:spcPct val="125000"/>
               </a:lnSpc>
@@ -7096,7 +7096,7 @@
             </a:r>
           </a:p>
           <a:p>
-            <a:pPr algn="l">
+            <a:pPr algn="just">
               <a:lnSpc>
                 <a:spcPct val="125000"/>
               </a:lnSpc>
@@ -7118,7 +7118,7 @@
             </a:r>
           </a:p>
           <a:p>
-            <a:pPr algn="l">
+            <a:pPr algn="just">
               <a:lnSpc>
                 <a:spcPct val="125000"/>
               </a:lnSpc>
@@ -7140,7 +7140,7 @@
             </a:r>
           </a:p>
           <a:p>
-            <a:pPr algn="l">
+            <a:pPr algn="just">
               <a:lnSpc>
                 <a:spcPct val="125000"/>
               </a:lnSpc>
@@ -7162,7 +7162,7 @@
             </a:r>
           </a:p>
           <a:p>
-            <a:pPr algn="l">
+            <a:pPr algn="just">
               <a:lnSpc>
                 <a:spcPct val="125000"/>
               </a:lnSpc>
@@ -7184,7 +7184,7 @@
             </a:r>
           </a:p>
           <a:p>
-            <a:pPr algn="l">
+            <a:pPr algn="just">
               <a:lnSpc>
                 <a:spcPct val="125000"/>
               </a:lnSpc>
@@ -7206,7 +7206,7 @@
             </a:r>
           </a:p>
           <a:p>
-            <a:pPr algn="l">
+            <a:pPr algn="just">
               <a:lnSpc>
                 <a:spcPct val="125000"/>
               </a:lnSpc>
@@ -7228,7 +7228,7 @@
             </a:r>
           </a:p>
           <a:p>
-            <a:pPr algn="l">
+            <a:pPr algn="just">
               <a:lnSpc>
                 <a:spcPct val="125000"/>
               </a:lnSpc>
@@ -7250,7 +7250,7 @@
             </a:r>
           </a:p>
           <a:p>
-            <a:pPr algn="l">
+            <a:pPr algn="just">
               <a:lnSpc>
                 <a:spcPct val="125000"/>
               </a:lnSpc>
@@ -7272,7 +7272,7 @@
             </a:r>
           </a:p>
           <a:p>
-            <a:pPr algn="l">
+            <a:pPr algn="just">
               <a:lnSpc>
                 <a:spcPct val="125000"/>
               </a:lnSpc>
@@ -7352,7 +7352,7 @@
           <a:bodyPr rtlCol="0" anchor="ctr" wrap="square" lIns="365760"/>
           <a:lstStyle/>
           <a:p>
-            <a:pPr algn="l"/>
+            <a:pPr algn="just"/>
             <a:r>
               <a:rPr sz="1500" b="1">
                 <a:solidFill>
@@ -7386,7 +7386,7 @@
           </a:bodyPr>
           <a:lstStyle/>
           <a:p>
-            <a:pPr algn="l">
+            <a:pPr algn="just">
               <a:lnSpc>
                 <a:spcPct val="125000"/>
               </a:lnSpc>
@@ -7408,7 +7408,7 @@
             </a:r>
           </a:p>
           <a:p>
-            <a:pPr algn="l">
+            <a:pPr algn="just">
               <a:lnSpc>
                 <a:spcPct val="125000"/>
               </a:lnSpc>
@@ -7430,7 +7430,7 @@
             </a:r>
           </a:p>
           <a:p>
-            <a:pPr algn="l">
+            <a:pPr algn="just">
               <a:lnSpc>
                 <a:spcPct val="125000"/>
               </a:lnSpc>
@@ -7452,7 +7452,7 @@
             </a:r>
           </a:p>
           <a:p>
-            <a:pPr algn="l">
+            <a:pPr algn="just">
               <a:lnSpc>
                 <a:spcPct val="125000"/>
               </a:lnSpc>
@@ -7474,7 +7474,7 @@
             </a:r>
           </a:p>
           <a:p>
-            <a:pPr algn="l">
+            <a:pPr algn="just">
               <a:lnSpc>
                 <a:spcPct val="125000"/>
               </a:lnSpc>
@@ -7496,7 +7496,7 @@
             </a:r>
           </a:p>
           <a:p>
-            <a:pPr algn="l">
+            <a:pPr algn="just">
               <a:lnSpc>
                 <a:spcPct val="125000"/>
               </a:lnSpc>
@@ -7518,7 +7518,7 @@
             </a:r>
           </a:p>
           <a:p>
-            <a:pPr algn="l">
+            <a:pPr algn="just">
               <a:lnSpc>
                 <a:spcPct val="125000"/>
               </a:lnSpc>
@@ -7540,7 +7540,7 @@
             </a:r>
           </a:p>
           <a:p>
-            <a:pPr algn="l">
+            <a:pPr algn="just">
               <a:lnSpc>
                 <a:spcPct val="125000"/>
               </a:lnSpc>
@@ -7562,7 +7562,7 @@
             </a:r>
           </a:p>
           <a:p>
-            <a:pPr algn="l">
+            <a:pPr algn="just">
               <a:lnSpc>
                 <a:spcPct val="125000"/>
               </a:lnSpc>
@@ -7584,7 +7584,7 @@
             </a:r>
           </a:p>
           <a:p>
-            <a:pPr algn="l">
+            <a:pPr algn="just">
               <a:lnSpc>
                 <a:spcPct val="125000"/>
               </a:lnSpc>
@@ -7664,7 +7664,7 @@
           <a:bodyPr rtlCol="0" anchor="ctr" wrap="square" lIns="365760"/>
           <a:lstStyle/>
           <a:p>
-            <a:pPr algn="l"/>
+            <a:pPr algn="just"/>
             <a:r>
               <a:rPr sz="1500" b="1">
                 <a:solidFill>
@@ -7698,7 +7698,7 @@
           </a:bodyPr>
           <a:lstStyle/>
           <a:p>
-            <a:pPr algn="l">
+            <a:pPr algn="just">
               <a:lnSpc>
                 <a:spcPct val="125000"/>
               </a:lnSpc>
@@ -7720,7 +7720,7 @@
             </a:r>
           </a:p>
           <a:p>
-            <a:pPr algn="l">
+            <a:pPr algn="just">
               <a:lnSpc>
                 <a:spcPct val="125000"/>
               </a:lnSpc>
@@ -7742,7 +7742,7 @@
             </a:r>
           </a:p>
           <a:p>
-            <a:pPr algn="l">
+            <a:pPr algn="just">
               <a:lnSpc>
                 <a:spcPct val="125000"/>
               </a:lnSpc>
@@ -7764,7 +7764,7 @@
             </a:r>
           </a:p>
           <a:p>
-            <a:pPr algn="l">
+            <a:pPr algn="just">
               <a:lnSpc>
                 <a:spcPct val="125000"/>
               </a:lnSpc>
@@ -7786,7 +7786,7 @@
             </a:r>
           </a:p>
           <a:p>
-            <a:pPr algn="l">
+            <a:pPr algn="just">
               <a:lnSpc>
                 <a:spcPct val="125000"/>
               </a:lnSpc>
@@ -7808,7 +7808,7 @@
             </a:r>
           </a:p>
           <a:p>
-            <a:pPr algn="l">
+            <a:pPr algn="just">
               <a:lnSpc>
                 <a:spcPct val="125000"/>
               </a:lnSpc>
@@ -7830,7 +7830,7 @@
             </a:r>
           </a:p>
           <a:p>
-            <a:pPr algn="l">
+            <a:pPr algn="just">
               <a:lnSpc>
                 <a:spcPct val="125000"/>
               </a:lnSpc>
@@ -7852,7 +7852,7 @@
             </a:r>
           </a:p>
           <a:p>
-            <a:pPr algn="l">
+            <a:pPr algn="just">
               <a:lnSpc>
                 <a:spcPct val="125000"/>
               </a:lnSpc>
@@ -7874,7 +7874,7 @@
             </a:r>
           </a:p>
           <a:p>
-            <a:pPr algn="l">
+            <a:pPr algn="just">
               <a:lnSpc>
                 <a:spcPct val="125000"/>
               </a:lnSpc>
@@ -7896,7 +7896,7 @@
             </a:r>
           </a:p>
           <a:p>
-            <a:pPr algn="l">
+            <a:pPr algn="just">
               <a:lnSpc>
                 <a:spcPct val="125000"/>
               </a:lnSpc>
@@ -7976,7 +7976,7 @@
           <a:bodyPr rtlCol="0" anchor="ctr" wrap="square" lIns="365760"/>
           <a:lstStyle/>
           <a:p>
-            <a:pPr algn="l"/>
+            <a:pPr algn="just"/>
             <a:r>
               <a:rPr sz="1500" b="1">
                 <a:solidFill>
@@ -8010,7 +8010,7 @@
           </a:bodyPr>
           <a:lstStyle/>
           <a:p>
-            <a:pPr algn="l">
+            <a:pPr algn="just">
               <a:lnSpc>
                 <a:spcPct val="125000"/>
               </a:lnSpc>
@@ -8032,7 +8032,7 @@
             </a:r>
           </a:p>
           <a:p>
-            <a:pPr algn="l">
+            <a:pPr algn="just">
               <a:lnSpc>
                 <a:spcPct val="125000"/>
               </a:lnSpc>
@@ -8054,7 +8054,7 @@
             </a:r>
           </a:p>
           <a:p>
-            <a:pPr algn="l">
+            <a:pPr algn="just">
               <a:lnSpc>
                 <a:spcPct val="125000"/>
               </a:lnSpc>
@@ -8076,7 +8076,7 @@
             </a:r>
           </a:p>
           <a:p>
-            <a:pPr algn="l">
+            <a:pPr algn="just">
               <a:lnSpc>
                 <a:spcPct val="125000"/>
               </a:lnSpc>
@@ -8098,7 +8098,7 @@
             </a:r>
           </a:p>
           <a:p>
-            <a:pPr algn="l">
+            <a:pPr algn="just">
               <a:lnSpc>
                 <a:spcPct val="125000"/>
               </a:lnSpc>
@@ -8120,7 +8120,7 @@
             </a:r>
           </a:p>
           <a:p>
-            <a:pPr algn="l">
+            <a:pPr algn="just">
               <a:lnSpc>
                 <a:spcPct val="125000"/>
               </a:lnSpc>
@@ -8142,7 +8142,7 @@
             </a:r>
           </a:p>
           <a:p>
-            <a:pPr algn="l">
+            <a:pPr algn="just">
               <a:lnSpc>
                 <a:spcPct val="125000"/>
               </a:lnSpc>
@@ -8164,7 +8164,7 @@
             </a:r>
           </a:p>
           <a:p>
-            <a:pPr algn="l">
+            <a:pPr algn="just">
               <a:lnSpc>
                 <a:spcPct val="125000"/>
               </a:lnSpc>
@@ -8186,7 +8186,7 @@
             </a:r>
           </a:p>
           <a:p>
-            <a:pPr algn="l">
+            <a:pPr algn="just">
               <a:lnSpc>
                 <a:spcPct val="125000"/>
               </a:lnSpc>
@@ -8208,7 +8208,7 @@
             </a:r>
           </a:p>
           <a:p>
-            <a:pPr algn="l">
+            <a:pPr algn="just">
               <a:lnSpc>
                 <a:spcPct val="125000"/>
               </a:lnSpc>
@@ -8288,7 +8288,7 @@
           <a:bodyPr rtlCol="0" anchor="ctr" wrap="square" lIns="365760"/>
           <a:lstStyle/>
           <a:p>
-            <a:pPr algn="l"/>
+            <a:pPr algn="just"/>
             <a:r>
               <a:rPr sz="1500" b="1">
                 <a:solidFill>
@@ -8322,7 +8322,7 @@
           </a:bodyPr>
           <a:lstStyle/>
           <a:p>
-            <a:pPr algn="l">
+            <a:pPr algn="just">
               <a:lnSpc>
                 <a:spcPct val="125000"/>
               </a:lnSpc>
@@ -8344,7 +8344,7 @@
             </a:r>
           </a:p>
           <a:p>
-            <a:pPr algn="l">
+            <a:pPr algn="just">
               <a:lnSpc>
                 <a:spcPct val="125000"/>
               </a:lnSpc>
@@ -8366,7 +8366,7 @@
             </a:r>
           </a:p>
           <a:p>
-            <a:pPr algn="l">
+            <a:pPr algn="just">
               <a:lnSpc>
                 <a:spcPct val="125000"/>
               </a:lnSpc>
@@ -8388,7 +8388,7 @@
             </a:r>
           </a:p>
           <a:p>
-            <a:pPr algn="l">
+            <a:pPr algn="just">
               <a:lnSpc>
                 <a:spcPct val="125000"/>
               </a:lnSpc>
@@ -8410,7 +8410,7 @@
             </a:r>
           </a:p>
           <a:p>
-            <a:pPr algn="l">
+            <a:pPr algn="just">
               <a:lnSpc>
                 <a:spcPct val="125000"/>
               </a:lnSpc>
@@ -8432,7 +8432,7 @@
             </a:r>
           </a:p>
           <a:p>
-            <a:pPr algn="l">
+            <a:pPr algn="just">
               <a:lnSpc>
                 <a:spcPct val="125000"/>
               </a:lnSpc>
@@ -8454,7 +8454,7 @@
             </a:r>
           </a:p>
           <a:p>
-            <a:pPr algn="l">
+            <a:pPr algn="just">
               <a:lnSpc>
                 <a:spcPct val="125000"/>
               </a:lnSpc>
@@ -8476,7 +8476,7 @@
             </a:r>
           </a:p>
           <a:p>
-            <a:pPr algn="l">
+            <a:pPr algn="just">
               <a:lnSpc>
                 <a:spcPct val="125000"/>
               </a:lnSpc>
@@ -8498,7 +8498,7 @@
             </a:r>
           </a:p>
           <a:p>
-            <a:pPr algn="l">
+            <a:pPr algn="just">
               <a:lnSpc>
                 <a:spcPct val="125000"/>
               </a:lnSpc>
@@ -8520,7 +8520,7 @@
             </a:r>
           </a:p>
           <a:p>
-            <a:pPr algn="l">
+            <a:pPr algn="just">
               <a:lnSpc>
                 <a:spcPct val="125000"/>
               </a:lnSpc>
@@ -8600,7 +8600,7 @@
           <a:bodyPr rtlCol="0" anchor="ctr" wrap="square" lIns="365760"/>
           <a:lstStyle/>
           <a:p>
-            <a:pPr algn="l"/>
+            <a:pPr algn="just"/>
             <a:r>
               <a:rPr sz="1500" b="1">
                 <a:solidFill>
@@ -8634,7 +8634,7 @@
           </a:bodyPr>
           <a:lstStyle/>
           <a:p>
-            <a:pPr algn="l">
+            <a:pPr algn="just">
               <a:lnSpc>
                 <a:spcPct val="125000"/>
               </a:lnSpc>
@@ -8656,7 +8656,7 @@
             </a:r>
           </a:p>
           <a:p>
-            <a:pPr algn="l">
+            <a:pPr algn="just">
               <a:lnSpc>
                 <a:spcPct val="125000"/>
               </a:lnSpc>
@@ -8678,7 +8678,7 @@
             </a:r>
           </a:p>
           <a:p>
-            <a:pPr algn="l">
+            <a:pPr algn="just">
               <a:lnSpc>
                 <a:spcPct val="125000"/>
               </a:lnSpc>
@@ -8700,7 +8700,7 @@
             </a:r>
           </a:p>
           <a:p>
-            <a:pPr algn="l">
+            <a:pPr algn="just">
               <a:lnSpc>
                 <a:spcPct val="125000"/>
               </a:lnSpc>
@@ -8722,7 +8722,7 @@
             </a:r>
           </a:p>
           <a:p>
-            <a:pPr algn="l">
+            <a:pPr algn="just">
               <a:lnSpc>
                 <a:spcPct val="125000"/>
               </a:lnSpc>
@@ -8744,7 +8744,7 @@
             </a:r>
           </a:p>
           <a:p>
-            <a:pPr algn="l">
+            <a:pPr algn="just">
               <a:lnSpc>
                 <a:spcPct val="125000"/>
               </a:lnSpc>
@@ -8766,7 +8766,7 @@
             </a:r>
           </a:p>
           <a:p>
-            <a:pPr algn="l">
+            <a:pPr algn="just">
               <a:lnSpc>
                 <a:spcPct val="125000"/>
               </a:lnSpc>
@@ -8788,7 +8788,7 @@
             </a:r>
           </a:p>
           <a:p>
-            <a:pPr algn="l">
+            <a:pPr algn="just">
               <a:lnSpc>
                 <a:spcPct val="125000"/>
               </a:lnSpc>
@@ -8810,7 +8810,7 @@
             </a:r>
           </a:p>
           <a:p>
-            <a:pPr algn="l">
+            <a:pPr algn="just">
               <a:lnSpc>
                 <a:spcPct val="125000"/>
               </a:lnSpc>
@@ -8832,7 +8832,7 @@
             </a:r>
           </a:p>
           <a:p>
-            <a:pPr algn="l">
+            <a:pPr algn="just">
               <a:lnSpc>
                 <a:spcPct val="125000"/>
               </a:lnSpc>
@@ -8912,7 +8912,7 @@
           <a:bodyPr rtlCol="0" anchor="ctr" wrap="square" lIns="365760"/>
           <a:lstStyle/>
           <a:p>
-            <a:pPr algn="l"/>
+            <a:pPr algn="just"/>
             <a:r>
               <a:rPr sz="1500" b="1">
                 <a:solidFill>
@@ -8946,7 +8946,7 @@
           </a:bodyPr>
           <a:lstStyle/>
           <a:p>
-            <a:pPr algn="l">
+            <a:pPr algn="just">
               <a:lnSpc>
                 <a:spcPct val="125000"/>
               </a:lnSpc>
@@ -8968,7 +8968,7 @@
             </a:r>
           </a:p>
           <a:p>
-            <a:pPr algn="l">
+            <a:pPr algn="just">
               <a:lnSpc>
                 <a:spcPct val="125000"/>
               </a:lnSpc>
@@ -8990,7 +8990,7 @@
             </a:r>
           </a:p>
           <a:p>
-            <a:pPr algn="l">
+            <a:pPr algn="just">
               <a:lnSpc>
                 <a:spcPct val="125000"/>
               </a:lnSpc>
@@ -9012,7 +9012,7 @@
             </a:r>
           </a:p>
           <a:p>
-            <a:pPr algn="l">
+            <a:pPr algn="just">
               <a:lnSpc>
                 <a:spcPct val="125000"/>
               </a:lnSpc>
@@ -9034,7 +9034,7 @@
             </a:r>
           </a:p>
           <a:p>
-            <a:pPr algn="l">
+            <a:pPr algn="just">
               <a:lnSpc>
                 <a:spcPct val="125000"/>
               </a:lnSpc>
@@ -9056,7 +9056,7 @@
             </a:r>
           </a:p>
           <a:p>
-            <a:pPr algn="l">
+            <a:pPr algn="just">
               <a:lnSpc>
                 <a:spcPct val="125000"/>
               </a:lnSpc>
@@ -9078,7 +9078,7 @@
             </a:r>
           </a:p>
           <a:p>
-            <a:pPr algn="l">
+            <a:pPr algn="just">
               <a:lnSpc>
                 <a:spcPct val="125000"/>
               </a:lnSpc>
@@ -9100,7 +9100,7 @@
             </a:r>
           </a:p>
           <a:p>
-            <a:pPr algn="l">
+            <a:pPr algn="just">
               <a:lnSpc>
                 <a:spcPct val="125000"/>
               </a:lnSpc>
@@ -9122,7 +9122,7 @@
             </a:r>
           </a:p>
           <a:p>
-            <a:pPr algn="l">
+            <a:pPr algn="just">
               <a:lnSpc>
                 <a:spcPct val="125000"/>
               </a:lnSpc>
@@ -9202,7 +9202,7 @@
           <a:bodyPr rtlCol="0" anchor="ctr" wrap="square" lIns="365760"/>
           <a:lstStyle/>
           <a:p>
-            <a:pPr algn="l"/>
+            <a:pPr algn="just"/>
             <a:r>
               <a:rPr sz="1500" b="1">
                 <a:solidFill>
@@ -9236,7 +9236,7 @@
           </a:bodyPr>
           <a:lstStyle/>
           <a:p>
-            <a:pPr algn="l">
+            <a:pPr algn="just">
               <a:lnSpc>
                 <a:spcPct val="125000"/>
               </a:lnSpc>
@@ -9258,7 +9258,7 @@
             </a:r>
           </a:p>
           <a:p>
-            <a:pPr algn="l">
+            <a:pPr algn="just">
               <a:lnSpc>
                 <a:spcPct val="125000"/>
               </a:lnSpc>
@@ -9280,7 +9280,7 @@
             </a:r>
           </a:p>
           <a:p>
-            <a:pPr algn="l">
+            <a:pPr algn="just">
               <a:lnSpc>
                 <a:spcPct val="125000"/>
               </a:lnSpc>
@@ -9302,7 +9302,7 @@
             </a:r>
           </a:p>
           <a:p>
-            <a:pPr algn="l">
+            <a:pPr algn="just">
               <a:lnSpc>
                 <a:spcPct val="125000"/>
               </a:lnSpc>
@@ -9324,7 +9324,7 @@
             </a:r>
           </a:p>
           <a:p>
-            <a:pPr algn="l">
+            <a:pPr algn="just">
               <a:lnSpc>
                 <a:spcPct val="125000"/>
               </a:lnSpc>
@@ -9346,7 +9346,7 @@
             </a:r>
           </a:p>
           <a:p>
-            <a:pPr algn="l">
+            <a:pPr algn="just">
               <a:lnSpc>
                 <a:spcPct val="125000"/>
               </a:lnSpc>
@@ -9368,7 +9368,7 @@
             </a:r>
           </a:p>
           <a:p>
-            <a:pPr algn="l">
+            <a:pPr algn="just">
               <a:lnSpc>
                 <a:spcPct val="125000"/>
               </a:lnSpc>
@@ -9390,7 +9390,7 @@
             </a:r>
           </a:p>
           <a:p>
-            <a:pPr algn="l">
+            <a:pPr algn="just">
               <a:lnSpc>
                 <a:spcPct val="125000"/>
               </a:lnSpc>
@@ -9412,7 +9412,7 @@
             </a:r>
           </a:p>
           <a:p>
-            <a:pPr algn="l">
+            <a:pPr algn="just">
               <a:lnSpc>
                 <a:spcPct val="125000"/>
               </a:lnSpc>
@@ -9434,7 +9434,7 @@
             </a:r>
           </a:p>
           <a:p>
-            <a:pPr algn="l">
+            <a:pPr algn="just">
               <a:lnSpc>
                 <a:spcPct val="125000"/>
               </a:lnSpc>
@@ -9456,7 +9456,7 @@
             </a:r>
           </a:p>
           <a:p>
-            <a:pPr algn="l">
+            <a:pPr algn="just">
               <a:lnSpc>
                 <a:spcPct val="125000"/>
               </a:lnSpc>
@@ -9536,7 +9536,7 @@
           <a:bodyPr rtlCol="0" anchor="ctr" wrap="square" lIns="365760"/>
           <a:lstStyle/>
           <a:p>
-            <a:pPr algn="l"/>
+            <a:pPr algn="just"/>
             <a:r>
               <a:rPr sz="1500" b="1">
                 <a:solidFill>
@@ -9570,7 +9570,7 @@
           </a:bodyPr>
           <a:lstStyle/>
           <a:p>
-            <a:pPr algn="l">
+            <a:pPr algn="just">
               <a:lnSpc>
                 <a:spcPct val="125000"/>
               </a:lnSpc>
@@ -9592,7 +9592,7 @@
             </a:r>
           </a:p>
           <a:p>
-            <a:pPr algn="l">
+            <a:pPr algn="just">
               <a:lnSpc>
                 <a:spcPct val="125000"/>
               </a:lnSpc>
@@ -9614,7 +9614,7 @@
             </a:r>
           </a:p>
           <a:p>
-            <a:pPr algn="l">
+            <a:pPr algn="just">
               <a:lnSpc>
                 <a:spcPct val="125000"/>
               </a:lnSpc>
@@ -9636,7 +9636,7 @@
             </a:r>
           </a:p>
           <a:p>
-            <a:pPr algn="l">
+            <a:pPr algn="just">
               <a:lnSpc>
                 <a:spcPct val="125000"/>
               </a:lnSpc>
@@ -9658,7 +9658,7 @@
             </a:r>
           </a:p>
           <a:p>
-            <a:pPr algn="l">
+            <a:pPr algn="just">
               <a:lnSpc>
                 <a:spcPct val="125000"/>
               </a:lnSpc>
@@ -9680,7 +9680,7 @@
             </a:r>
           </a:p>
           <a:p>
-            <a:pPr algn="l">
+            <a:pPr algn="just">
               <a:lnSpc>
                 <a:spcPct val="125000"/>
               </a:lnSpc>
@@ -9702,7 +9702,7 @@
             </a:r>
           </a:p>
           <a:p>
-            <a:pPr algn="l">
+            <a:pPr algn="just">
               <a:lnSpc>
                 <a:spcPct val="125000"/>
               </a:lnSpc>
@@ -9724,7 +9724,7 @@
             </a:r>
           </a:p>
           <a:p>
-            <a:pPr algn="l">
+            <a:pPr algn="just">
               <a:lnSpc>
                 <a:spcPct val="125000"/>
               </a:lnSpc>
@@ -9746,7 +9746,7 @@
             </a:r>
           </a:p>
           <a:p>
-            <a:pPr algn="l">
+            <a:pPr algn="just">
               <a:lnSpc>
                 <a:spcPct val="125000"/>
               </a:lnSpc>
@@ -9826,7 +9826,7 @@
           <a:bodyPr rtlCol="0" anchor="ctr" wrap="square" lIns="365760"/>
           <a:lstStyle/>
           <a:p>
-            <a:pPr algn="l"/>
+            <a:pPr algn="just"/>
             <a:r>
               <a:rPr sz="1500" b="1">
                 <a:solidFill>
@@ -9860,7 +9860,7 @@
           </a:bodyPr>
           <a:lstStyle/>
           <a:p>
-            <a:pPr algn="l">
+            <a:pPr algn="just">
               <a:lnSpc>
                 <a:spcPct val="125000"/>
               </a:lnSpc>
@@ -9882,7 +9882,7 @@
             </a:r>
           </a:p>
           <a:p>
-            <a:pPr algn="l">
+            <a:pPr algn="just">
               <a:lnSpc>
                 <a:spcPct val="125000"/>
               </a:lnSpc>
@@ -9904,7 +9904,7 @@
             </a:r>
           </a:p>
           <a:p>
-            <a:pPr algn="l">
+            <a:pPr algn="just">
               <a:lnSpc>
                 <a:spcPct val="125000"/>
               </a:lnSpc>
@@ -9926,7 +9926,7 @@
             </a:r>
           </a:p>
           <a:p>
-            <a:pPr algn="l">
+            <a:pPr algn="just">
               <a:lnSpc>
                 <a:spcPct val="125000"/>
               </a:lnSpc>
@@ -9948,7 +9948,7 @@
             </a:r>
           </a:p>
           <a:p>
-            <a:pPr algn="l">
+            <a:pPr algn="just">
               <a:lnSpc>
                 <a:spcPct val="125000"/>
               </a:lnSpc>
@@ -9970,7 +9970,7 @@
             </a:r>
           </a:p>
           <a:p>
-            <a:pPr algn="l">
+            <a:pPr algn="just">
               <a:lnSpc>
                 <a:spcPct val="125000"/>
               </a:lnSpc>
@@ -9992,7 +9992,7 @@
             </a:r>
           </a:p>
           <a:p>
-            <a:pPr algn="l">
+            <a:pPr algn="just">
               <a:lnSpc>
                 <a:spcPct val="125000"/>
               </a:lnSpc>
@@ -10014,7 +10014,7 @@
             </a:r>
           </a:p>
           <a:p>
-            <a:pPr algn="l">
+            <a:pPr algn="just">
               <a:lnSpc>
                 <a:spcPct val="125000"/>
               </a:lnSpc>
@@ -10036,7 +10036,7 @@
             </a:r>
           </a:p>
           <a:p>
-            <a:pPr algn="l">
+            <a:pPr algn="just">
               <a:lnSpc>
                 <a:spcPct val="125000"/>
               </a:lnSpc>
@@ -10116,7 +10116,7 @@
           <a:bodyPr rtlCol="0" anchor="ctr" wrap="square" lIns="365760"/>
           <a:lstStyle/>
           <a:p>
-            <a:pPr algn="l"/>
+            <a:pPr algn="just"/>
             <a:r>
               <a:rPr sz="1500" b="1">
                 <a:solidFill>
@@ -10150,7 +10150,7 @@
           </a:bodyPr>
           <a:lstStyle/>
           <a:p>
-            <a:pPr algn="l">
+            <a:pPr algn="just">
               <a:lnSpc>
                 <a:spcPct val="125000"/>
               </a:lnSpc>
@@ -10172,7 +10172,7 @@
             </a:r>
           </a:p>
           <a:p>
-            <a:pPr algn="l">
+            <a:pPr algn="just">
               <a:lnSpc>
                 <a:spcPct val="125000"/>
               </a:lnSpc>
@@ -10194,7 +10194,7 @@
             </a:r>
           </a:p>
           <a:p>
-            <a:pPr algn="l">
+            <a:pPr algn="just">
               <a:lnSpc>
                 <a:spcPct val="125000"/>
               </a:lnSpc>
@@ -10216,7 +10216,7 @@
             </a:r>
           </a:p>
           <a:p>
-            <a:pPr algn="l">
+            <a:pPr algn="just">
               <a:lnSpc>
                 <a:spcPct val="125000"/>
               </a:lnSpc>
@@ -10238,7 +10238,7 @@
             </a:r>
           </a:p>
           <a:p>
-            <a:pPr algn="l">
+            <a:pPr algn="just">
               <a:lnSpc>
                 <a:spcPct val="125000"/>
               </a:lnSpc>
@@ -10260,7 +10260,7 @@
             </a:r>
           </a:p>
           <a:p>
-            <a:pPr algn="l">
+            <a:pPr algn="just">
               <a:lnSpc>
                 <a:spcPct val="125000"/>
               </a:lnSpc>
@@ -10282,7 +10282,7 @@
             </a:r>
           </a:p>
           <a:p>
-            <a:pPr algn="l">
+            <a:pPr algn="just">
               <a:lnSpc>
                 <a:spcPct val="125000"/>
               </a:lnSpc>
@@ -10304,7 +10304,7 @@
             </a:r>
           </a:p>
           <a:p>
-            <a:pPr algn="l">
+            <a:pPr algn="just">
               <a:lnSpc>
                 <a:spcPct val="125000"/>
               </a:lnSpc>
@@ -10326,7 +10326,7 @@
             </a:r>
           </a:p>
           <a:p>
-            <a:pPr algn="l">
+            <a:pPr algn="just">
               <a:lnSpc>
                 <a:spcPct val="125000"/>
               </a:lnSpc>
@@ -10348,7 +10348,7 @@
             </a:r>
           </a:p>
           <a:p>
-            <a:pPr algn="l">
+            <a:pPr algn="just">
               <a:lnSpc>
                 <a:spcPct val="125000"/>
               </a:lnSpc>
@@ -10428,7 +10428,7 @@
           <a:bodyPr rtlCol="0" anchor="ctr" wrap="square" lIns="365760"/>
           <a:lstStyle/>
           <a:p>
-            <a:pPr algn="l"/>
+            <a:pPr algn="just"/>
             <a:r>
               <a:rPr sz="1500" b="1">
                 <a:solidFill>
@@ -10462,7 +10462,7 @@
           </a:bodyPr>
           <a:lstStyle/>
           <a:p>
-            <a:pPr algn="l">
+            <a:pPr algn="just">
               <a:lnSpc>
                 <a:spcPct val="125000"/>
               </a:lnSpc>
@@ -10484,7 +10484,7 @@
             </a:r>
           </a:p>
           <a:p>
-            <a:pPr algn="l">
+            <a:pPr algn="just">
               <a:lnSpc>
                 <a:spcPct val="125000"/>
               </a:lnSpc>
@@ -10506,7 +10506,7 @@
             </a:r>
           </a:p>
           <a:p>
-            <a:pPr algn="l">
+            <a:pPr algn="just">
               <a:lnSpc>
                 <a:spcPct val="125000"/>
               </a:lnSpc>
@@ -10528,7 +10528,7 @@
             </a:r>
           </a:p>
           <a:p>
-            <a:pPr algn="l">
+            <a:pPr algn="just">
               <a:lnSpc>
                 <a:spcPct val="125000"/>
               </a:lnSpc>
@@ -10550,7 +10550,7 @@
             </a:r>
           </a:p>
           <a:p>
-            <a:pPr algn="l">
+            <a:pPr algn="just">
               <a:lnSpc>
                 <a:spcPct val="125000"/>
               </a:lnSpc>
@@ -10572,7 +10572,7 @@
             </a:r>
           </a:p>
           <a:p>
-            <a:pPr algn="l">
+            <a:pPr algn="just">
               <a:lnSpc>
                 <a:spcPct val="125000"/>
               </a:lnSpc>
@@ -10594,7 +10594,7 @@
             </a:r>
           </a:p>
           <a:p>
-            <a:pPr algn="l">
+            <a:pPr algn="just">
               <a:lnSpc>
                 <a:spcPct val="125000"/>
               </a:lnSpc>
@@ -10616,7 +10616,7 @@
             </a:r>
           </a:p>
           <a:p>
-            <a:pPr algn="l">
+            <a:pPr algn="just">
               <a:lnSpc>
                 <a:spcPct val="125000"/>
               </a:lnSpc>
@@ -10638,7 +10638,7 @@
             </a:r>
           </a:p>
           <a:p>
-            <a:pPr algn="l">
+            <a:pPr algn="just">
               <a:lnSpc>
                 <a:spcPct val="125000"/>
               </a:lnSpc>
@@ -10660,7 +10660,7 @@
             </a:r>
           </a:p>
           <a:p>
-            <a:pPr algn="l">
+            <a:pPr algn="just">
               <a:lnSpc>
                 <a:spcPct val="125000"/>
               </a:lnSpc>
@@ -10740,7 +10740,7 @@
           <a:bodyPr rtlCol="0" anchor="ctr" wrap="square" lIns="365760"/>
           <a:lstStyle/>
           <a:p>
-            <a:pPr algn="l"/>
+            <a:pPr algn="just"/>
             <a:r>
               <a:rPr sz="1500" b="1">
                 <a:solidFill>
@@ -10774,7 +10774,7 @@
           </a:bodyPr>
           <a:lstStyle/>
           <a:p>
-            <a:pPr algn="l">
+            <a:pPr algn="just">
               <a:lnSpc>
                 <a:spcPct val="125000"/>
               </a:lnSpc>
@@ -10796,7 +10796,7 @@
             </a:r>
           </a:p>
           <a:p>
-            <a:pPr algn="l">
+            <a:pPr algn="just">
               <a:lnSpc>
                 <a:spcPct val="125000"/>
               </a:lnSpc>
@@ -10818,7 +10818,7 @@
             </a:r>
           </a:p>
           <a:p>
-            <a:pPr algn="l">
+            <a:pPr algn="just">
               <a:lnSpc>
                 <a:spcPct val="125000"/>
               </a:lnSpc>
@@ -10840,7 +10840,7 @@
             </a:r>
           </a:p>
           <a:p>
-            <a:pPr algn="l">
+            <a:pPr algn="just">
               <a:lnSpc>
                 <a:spcPct val="125000"/>
               </a:lnSpc>
@@ -10862,7 +10862,7 @@
             </a:r>
           </a:p>
           <a:p>
-            <a:pPr algn="l">
+            <a:pPr algn="just">
               <a:lnSpc>
                 <a:spcPct val="125000"/>
               </a:lnSpc>
@@ -10884,7 +10884,7 @@
             </a:r>
           </a:p>
           <a:p>
-            <a:pPr algn="l">
+            <a:pPr algn="just">
               <a:lnSpc>
                 <a:spcPct val="125000"/>
               </a:lnSpc>
@@ -10906,7 +10906,7 @@
             </a:r>
           </a:p>
           <a:p>
-            <a:pPr algn="l">
+            <a:pPr algn="just">
               <a:lnSpc>
                 <a:spcPct val="125000"/>
               </a:lnSpc>
@@ -10928,7 +10928,7 @@
             </a:r>
           </a:p>
           <a:p>
-            <a:pPr algn="l">
+            <a:pPr algn="just">
               <a:lnSpc>
                 <a:spcPct val="125000"/>
               </a:lnSpc>
@@ -10950,7 +10950,7 @@
             </a:r>
           </a:p>
           <a:p>
-            <a:pPr algn="l">
+            <a:pPr algn="just">
               <a:lnSpc>
                 <a:spcPct val="125000"/>
               </a:lnSpc>
@@ -10972,7 +10972,7 @@
             </a:r>
           </a:p>
           <a:p>
-            <a:pPr algn="l">
+            <a:pPr algn="just">
               <a:lnSpc>
                 <a:spcPct val="125000"/>
               </a:lnSpc>
@@ -11052,7 +11052,7 @@
           <a:bodyPr rtlCol="0" anchor="ctr" wrap="square" lIns="365760"/>
           <a:lstStyle/>
           <a:p>
-            <a:pPr algn="l"/>
+            <a:pPr algn="just"/>
             <a:r>
               <a:rPr sz="1500" b="1">
                 <a:solidFill>
@@ -11086,7 +11086,7 @@
           </a:bodyPr>
           <a:lstStyle/>
           <a:p>
-            <a:pPr algn="l">
+            <a:pPr algn="just">
               <a:lnSpc>
                 <a:spcPct val="125000"/>
               </a:lnSpc>
@@ -11108,7 +11108,7 @@
             </a:r>
           </a:p>
           <a:p>
-            <a:pPr algn="l">
+            <a:pPr algn="just">
               <a:lnSpc>
                 <a:spcPct val="125000"/>
               </a:lnSpc>
@@ -11130,7 +11130,7 @@
             </a:r>
           </a:p>
           <a:p>
-            <a:pPr algn="l">
+            <a:pPr algn="just">
               <a:lnSpc>
                 <a:spcPct val="125000"/>
               </a:lnSpc>
@@ -11152,7 +11152,7 @@
             </a:r>
           </a:p>
           <a:p>
-            <a:pPr algn="l">
+            <a:pPr algn="just">
               <a:lnSpc>
                 <a:spcPct val="125000"/>
               </a:lnSpc>
@@ -11174,7 +11174,7 @@
             </a:r>
           </a:p>
           <a:p>
-            <a:pPr algn="l">
+            <a:pPr algn="just">
               <a:lnSpc>
                 <a:spcPct val="125000"/>
               </a:lnSpc>
@@ -11196,7 +11196,7 @@
             </a:r>
           </a:p>
           <a:p>
-            <a:pPr algn="l">
+            <a:pPr algn="just">
               <a:lnSpc>
                 <a:spcPct val="125000"/>
               </a:lnSpc>
@@ -11218,7 +11218,7 @@
             </a:r>
           </a:p>
           <a:p>
-            <a:pPr algn="l">
+            <a:pPr algn="just">
               <a:lnSpc>
                 <a:spcPct val="125000"/>
               </a:lnSpc>
@@ -11240,7 +11240,7 @@
             </a:r>
           </a:p>
           <a:p>
-            <a:pPr algn="l">
+            <a:pPr algn="just">
               <a:lnSpc>
                 <a:spcPct val="125000"/>
               </a:lnSpc>
@@ -11262,7 +11262,7 @@
             </a:r>
           </a:p>
           <a:p>
-            <a:pPr algn="l">
+            <a:pPr algn="just">
               <a:lnSpc>
                 <a:spcPct val="125000"/>
               </a:lnSpc>
@@ -11284,7 +11284,7 @@
             </a:r>
           </a:p>
           <a:p>
-            <a:pPr algn="l">
+            <a:pPr algn="just">
               <a:lnSpc>
                 <a:spcPct val="125000"/>
               </a:lnSpc>
@@ -11364,7 +11364,7 @@
           <a:bodyPr rtlCol="0" anchor="ctr" wrap="square" lIns="365760"/>
           <a:lstStyle/>
           <a:p>
-            <a:pPr algn="l"/>
+            <a:pPr algn="just"/>
             <a:r>
               <a:rPr sz="1500" b="1">
                 <a:solidFill>
@@ -11398,7 +11398,7 @@
           </a:bodyPr>
           <a:lstStyle/>
           <a:p>
-            <a:pPr algn="l">
+            <a:pPr algn="just">
               <a:lnSpc>
                 <a:spcPct val="125000"/>
               </a:lnSpc>
@@ -11420,7 +11420,7 @@
             </a:r>
           </a:p>
           <a:p>
-            <a:pPr algn="l">
+            <a:pPr algn="just">
               <a:lnSpc>
                 <a:spcPct val="125000"/>
               </a:lnSpc>
@@ -11442,7 +11442,7 @@
             </a:r>
           </a:p>
           <a:p>
-            <a:pPr algn="l">
+            <a:pPr algn="just">
               <a:lnSpc>
                 <a:spcPct val="125000"/>
               </a:lnSpc>
@@ -11464,7 +11464,7 @@
             </a:r>
           </a:p>
           <a:p>
-            <a:pPr algn="l">
+            <a:pPr algn="just">
               <a:lnSpc>
                 <a:spcPct val="125000"/>
               </a:lnSpc>
@@ -11486,7 +11486,7 @@
             </a:r>
           </a:p>
           <a:p>
-            <a:pPr algn="l">
+            <a:pPr algn="just">
               <a:lnSpc>
                 <a:spcPct val="125000"/>
               </a:lnSpc>
@@ -11508,7 +11508,7 @@
             </a:r>
           </a:p>
           <a:p>
-            <a:pPr algn="l">
+            <a:pPr algn="just">
               <a:lnSpc>
                 <a:spcPct val="125000"/>
               </a:lnSpc>
@@ -11530,7 +11530,7 @@
             </a:r>
           </a:p>
           <a:p>
-            <a:pPr algn="l">
+            <a:pPr algn="just">
               <a:lnSpc>
                 <a:spcPct val="125000"/>
               </a:lnSpc>
@@ -11552,7 +11552,7 @@
             </a:r>
           </a:p>
           <a:p>
-            <a:pPr algn="l">
+            <a:pPr algn="just">
               <a:lnSpc>
                 <a:spcPct val="125000"/>
               </a:lnSpc>
@@ -11574,7 +11574,7 @@
             </a:r>
           </a:p>
           <a:p>
-            <a:pPr algn="l">
+            <a:pPr algn="just">
               <a:lnSpc>
                 <a:spcPct val="125000"/>
               </a:lnSpc>
@@ -11596,7 +11596,7 @@
             </a:r>
           </a:p>
           <a:p>
-            <a:pPr algn="l">
+            <a:pPr algn="just">
               <a:lnSpc>
                 <a:spcPct val="125000"/>
               </a:lnSpc>
@@ -11618,7 +11618,7 @@
             </a:r>
           </a:p>
           <a:p>
-            <a:pPr algn="l">
+            <a:pPr algn="just">
               <a:lnSpc>
                 <a:spcPct val="125000"/>
               </a:lnSpc>
@@ -11698,7 +11698,7 @@
           <a:bodyPr rtlCol="0" anchor="ctr" wrap="square" lIns="365760"/>
           <a:lstStyle/>
           <a:p>
-            <a:pPr algn="l"/>
+            <a:pPr algn="just"/>
             <a:r>
               <a:rPr sz="1500" b="1">
                 <a:solidFill>
@@ -11732,7 +11732,7 @@
           </a:bodyPr>
           <a:lstStyle/>
           <a:p>
-            <a:pPr algn="l">
+            <a:pPr algn="just">
               <a:lnSpc>
                 <a:spcPct val="125000"/>
               </a:lnSpc>
@@ -11754,7 +11754,7 @@
             </a:r>
           </a:p>
           <a:p>
-            <a:pPr algn="l">
+            <a:pPr algn="just">
               <a:lnSpc>
                 <a:spcPct val="125000"/>
               </a:lnSpc>
@@ -11776,7 +11776,7 @@
             </a:r>
           </a:p>
           <a:p>
-            <a:pPr algn="l">
+            <a:pPr algn="just">
               <a:lnSpc>
                 <a:spcPct val="125000"/>
               </a:lnSpc>
@@ -11798,7 +11798,7 @@
             </a:r>
           </a:p>
           <a:p>
-            <a:pPr algn="l">
+            <a:pPr algn="just">
               <a:lnSpc>
                 <a:spcPct val="125000"/>
               </a:lnSpc>
@@ -11820,7 +11820,7 @@
             </a:r>
           </a:p>
           <a:p>
-            <a:pPr algn="l">
+            <a:pPr algn="just">
               <a:lnSpc>
                 <a:spcPct val="125000"/>
               </a:lnSpc>
@@ -11842,7 +11842,7 @@
             </a:r>
           </a:p>
           <a:p>
-            <a:pPr algn="l">
+            <a:pPr algn="just">
               <a:lnSpc>
                 <a:spcPct val="125000"/>
               </a:lnSpc>
@@ -11864,7 +11864,7 @@
             </a:r>
           </a:p>
           <a:p>
-            <a:pPr algn="l">
+            <a:pPr algn="just">
               <a:lnSpc>
                 <a:spcPct val="125000"/>
               </a:lnSpc>
@@ -11886,7 +11886,7 @@
             </a:r>
           </a:p>
           <a:p>
-            <a:pPr algn="l">
+            <a:pPr algn="just">
               <a:lnSpc>
                 <a:spcPct val="125000"/>
               </a:lnSpc>
@@ -11908,7 +11908,7 @@
             </a:r>
           </a:p>
           <a:p>
-            <a:pPr algn="l">
+            <a:pPr algn="just">
               <a:lnSpc>
                 <a:spcPct val="125000"/>
               </a:lnSpc>
@@ -11930,7 +11930,7 @@
             </a:r>
           </a:p>
           <a:p>
-            <a:pPr algn="l">
+            <a:pPr algn="just">
               <a:lnSpc>
                 <a:spcPct val="125000"/>
               </a:lnSpc>
@@ -12010,7 +12010,7 @@
           <a:bodyPr rtlCol="0" anchor="ctr" wrap="square" lIns="365760"/>
           <a:lstStyle/>
           <a:p>
-            <a:pPr algn="l"/>
+            <a:pPr algn="just"/>
             <a:r>
               <a:rPr sz="1500" b="1">
                 <a:solidFill>
@@ -12044,7 +12044,7 @@
           </a:bodyPr>
           <a:lstStyle/>
           <a:p>
-            <a:pPr algn="l">
+            <a:pPr algn="just">
               <a:lnSpc>
                 <a:spcPct val="125000"/>
               </a:lnSpc>
@@ -12066,7 +12066,7 @@
             </a:r>
           </a:p>
           <a:p>
-            <a:pPr algn="l">
+            <a:pPr algn="just">
               <a:lnSpc>
                 <a:spcPct val="125000"/>
               </a:lnSpc>
@@ -12088,7 +12088,7 @@
             </a:r>
           </a:p>
           <a:p>
-            <a:pPr algn="l">
+            <a:pPr algn="just">
               <a:lnSpc>
                 <a:spcPct val="125000"/>
               </a:lnSpc>
@@ -12110,7 +12110,7 @@
             </a:r>
           </a:p>
           <a:p>
-            <a:pPr algn="l">
+            <a:pPr algn="just">
               <a:lnSpc>
                 <a:spcPct val="125000"/>
               </a:lnSpc>
@@ -12132,7 +12132,7 @@
             </a:r>
           </a:p>
           <a:p>
-            <a:pPr algn="l">
+            <a:pPr algn="just">
               <a:lnSpc>
                 <a:spcPct val="125000"/>
               </a:lnSpc>
@@ -12154,7 +12154,7 @@
             </a:r>
           </a:p>
           <a:p>
-            <a:pPr algn="l">
+            <a:pPr algn="just">
               <a:lnSpc>
                 <a:spcPct val="125000"/>
               </a:lnSpc>
@@ -12176,7 +12176,7 @@
             </a:r>
           </a:p>
           <a:p>
-            <a:pPr algn="l">
+            <a:pPr algn="just">
               <a:lnSpc>
                 <a:spcPct val="125000"/>
               </a:lnSpc>
@@ -12198,7 +12198,7 @@
             </a:r>
           </a:p>
           <a:p>
-            <a:pPr algn="l">
+            <a:pPr algn="just">
               <a:lnSpc>
                 <a:spcPct val="125000"/>
               </a:lnSpc>
@@ -12220,7 +12220,7 @@
             </a:r>
           </a:p>
           <a:p>
-            <a:pPr algn="l">
+            <a:pPr algn="just">
               <a:lnSpc>
                 <a:spcPct val="125000"/>
               </a:lnSpc>
@@ -12300,7 +12300,7 @@
           <a:bodyPr rtlCol="0" anchor="ctr" wrap="square" lIns="365760"/>
           <a:lstStyle/>
           <a:p>
-            <a:pPr algn="l"/>
+            <a:pPr algn="just"/>
             <a:r>
               <a:rPr sz="1500" b="1">
                 <a:solidFill>
@@ -12334,7 +12334,7 @@
           </a:bodyPr>
           <a:lstStyle/>
           <a:p>
-            <a:pPr algn="l">
+            <a:pPr algn="just">
               <a:lnSpc>
                 <a:spcPct val="125000"/>
               </a:lnSpc>
@@ -12356,7 +12356,7 @@
             </a:r>
           </a:p>
           <a:p>
-            <a:pPr algn="l">
+            <a:pPr algn="just">
               <a:lnSpc>
                 <a:spcPct val="125000"/>
               </a:lnSpc>
@@ -12378,7 +12378,7 @@
             </a:r>
           </a:p>
           <a:p>
-            <a:pPr algn="l">
+            <a:pPr algn="just">
               <a:lnSpc>
                 <a:spcPct val="125000"/>
               </a:lnSpc>
@@ -12400,7 +12400,7 @@
             </a:r>
           </a:p>
           <a:p>
-            <a:pPr algn="l">
+            <a:pPr algn="just">
               <a:lnSpc>
                 <a:spcPct val="125000"/>
               </a:lnSpc>
@@ -12422,7 +12422,7 @@
             </a:r>
           </a:p>
           <a:p>
-            <a:pPr algn="l">
+            <a:pPr algn="just">
               <a:lnSpc>
                 <a:spcPct val="125000"/>
               </a:lnSpc>
@@ -12444,7 +12444,7 @@
             </a:r>
           </a:p>
           <a:p>
-            <a:pPr algn="l">
+            <a:pPr algn="just">
               <a:lnSpc>
                 <a:spcPct val="125000"/>
               </a:lnSpc>
@@ -12466,7 +12466,7 @@
             </a:r>
           </a:p>
           <a:p>
-            <a:pPr algn="l">
+            <a:pPr algn="just">
               <a:lnSpc>
                 <a:spcPct val="125000"/>
               </a:lnSpc>
@@ -12488,7 +12488,7 @@
             </a:r>
           </a:p>
           <a:p>
-            <a:pPr algn="l">
+            <a:pPr algn="just">
               <a:lnSpc>
                 <a:spcPct val="125000"/>
               </a:lnSpc>
@@ -12510,7 +12510,7 @@
             </a:r>
           </a:p>
           <a:p>
-            <a:pPr algn="l">
+            <a:pPr algn="just">
               <a:lnSpc>
                 <a:spcPct val="125000"/>
               </a:lnSpc>
@@ -12590,7 +12590,7 @@
           <a:bodyPr rtlCol="0" anchor="ctr" wrap="square" lIns="365760"/>
           <a:lstStyle/>
           <a:p>
-            <a:pPr algn="l"/>
+            <a:pPr algn="just"/>
             <a:r>
               <a:rPr sz="1500" b="1">
                 <a:solidFill>
@@ -12624,7 +12624,7 @@
           </a:bodyPr>
           <a:lstStyle/>
           <a:p>
-            <a:pPr algn="l">
+            <a:pPr algn="just">
               <a:lnSpc>
                 <a:spcPct val="125000"/>
               </a:lnSpc>
@@ -12646,7 +12646,7 @@
             </a:r>
           </a:p>
           <a:p>
-            <a:pPr algn="l">
+            <a:pPr algn="just">
               <a:lnSpc>
                 <a:spcPct val="125000"/>
               </a:lnSpc>
@@ -12668,7 +12668,7 @@
             </a:r>
           </a:p>
           <a:p>
-            <a:pPr algn="l">
+            <a:pPr algn="just">
               <a:lnSpc>
                 <a:spcPct val="125000"/>
               </a:lnSpc>
@@ -12690,7 +12690,7 @@
             </a:r>
           </a:p>
           <a:p>
-            <a:pPr algn="l">
+            <a:pPr algn="just">
               <a:lnSpc>
                 <a:spcPct val="125000"/>
               </a:lnSpc>
@@ -12712,7 +12712,7 @@
             </a:r>
           </a:p>
           <a:p>
-            <a:pPr algn="l">
+            <a:pPr algn="just">
               <a:lnSpc>
                 <a:spcPct val="125000"/>
               </a:lnSpc>
@@ -12734,7 +12734,7 @@
             </a:r>
           </a:p>
           <a:p>
-            <a:pPr algn="l">
+            <a:pPr algn="just">
               <a:lnSpc>
                 <a:spcPct val="125000"/>
               </a:lnSpc>
@@ -12756,7 +12756,7 @@
             </a:r>
           </a:p>
           <a:p>
-            <a:pPr algn="l">
+            <a:pPr algn="just">
               <a:lnSpc>
                 <a:spcPct val="125000"/>
               </a:lnSpc>
@@ -12778,7 +12778,7 @@
             </a:r>
           </a:p>
           <a:p>
-            <a:pPr algn="l">
+            <a:pPr algn="just">
               <a:lnSpc>
                 <a:spcPct val="125000"/>
               </a:lnSpc>
@@ -12800,7 +12800,7 @@
             </a:r>
           </a:p>
           <a:p>
-            <a:pPr algn="l">
+            <a:pPr algn="just">
               <a:lnSpc>
                 <a:spcPct val="125000"/>
               </a:lnSpc>
@@ -12822,7 +12822,7 @@
             </a:r>
           </a:p>
           <a:p>
-            <a:pPr algn="l">
+            <a:pPr algn="just">
               <a:lnSpc>
                 <a:spcPct val="125000"/>
               </a:lnSpc>
@@ -12844,7 +12844,7 @@
             </a:r>
           </a:p>
           <a:p>
-            <a:pPr algn="l">
+            <a:pPr algn="just">
               <a:lnSpc>
                 <a:spcPct val="125000"/>
               </a:lnSpc>
@@ -12924,7 +12924,7 @@
           <a:bodyPr rtlCol="0" anchor="ctr" wrap="square" lIns="365760"/>
           <a:lstStyle/>
           <a:p>
-            <a:pPr algn="l"/>
+            <a:pPr algn="just"/>
             <a:r>
               <a:rPr sz="1500" b="1">
                 <a:solidFill>
@@ -12958,7 +12958,7 @@
           </a:bodyPr>
           <a:lstStyle/>
           <a:p>
-            <a:pPr algn="l">
+            <a:pPr algn="just">
               <a:lnSpc>
                 <a:spcPct val="125000"/>
               </a:lnSpc>
@@ -12980,7 +12980,7 @@
             </a:r>
           </a:p>
           <a:p>
-            <a:pPr algn="l">
+            <a:pPr algn="just">
               <a:lnSpc>
                 <a:spcPct val="125000"/>
               </a:lnSpc>
@@ -13002,7 +13002,7 @@
             </a:r>
           </a:p>
           <a:p>
-            <a:pPr algn="l">
+            <a:pPr algn="just">
               <a:lnSpc>
                 <a:spcPct val="125000"/>
               </a:lnSpc>
@@ -13024,7 +13024,7 @@
             </a:r>
           </a:p>
           <a:p>
-            <a:pPr algn="l">
+            <a:pPr algn="just">
               <a:lnSpc>
                 <a:spcPct val="125000"/>
               </a:lnSpc>
@@ -13046,7 +13046,7 @@
             </a:r>
           </a:p>
           <a:p>
-            <a:pPr algn="l">
+            <a:pPr algn="just">
               <a:lnSpc>
                 <a:spcPct val="125000"/>
               </a:lnSpc>
@@ -13068,7 +13068,7 @@
             </a:r>
           </a:p>
           <a:p>
-            <a:pPr algn="l">
+            <a:pPr algn="just">
               <a:lnSpc>
                 <a:spcPct val="125000"/>
               </a:lnSpc>
@@ -13090,7 +13090,7 @@
             </a:r>
           </a:p>
           <a:p>
-            <a:pPr algn="l">
+            <a:pPr algn="just">
               <a:lnSpc>
                 <a:spcPct val="125000"/>
               </a:lnSpc>
@@ -13112,7 +13112,7 @@
             </a:r>
           </a:p>
           <a:p>
-            <a:pPr algn="l">
+            <a:pPr algn="just">
               <a:lnSpc>
                 <a:spcPct val="125000"/>
               </a:lnSpc>
@@ -13134,7 +13134,7 @@
             </a:r>
           </a:p>
           <a:p>
-            <a:pPr algn="l">
+            <a:pPr algn="just">
               <a:lnSpc>
                 <a:spcPct val="125000"/>
               </a:lnSpc>
@@ -13156,7 +13156,7 @@
             </a:r>
           </a:p>
           <a:p>
-            <a:pPr algn="l">
+            <a:pPr algn="just">
               <a:lnSpc>
                 <a:spcPct val="125000"/>
               </a:lnSpc>
@@ -13178,7 +13178,7 @@
             </a:r>
           </a:p>
           <a:p>
-            <a:pPr algn="l">
+            <a:pPr algn="just">
               <a:lnSpc>
                 <a:spcPct val="125000"/>
               </a:lnSpc>
@@ -13200,7 +13200,7 @@
             </a:r>
           </a:p>
           <a:p>
-            <a:pPr algn="l">
+            <a:pPr algn="just">
               <a:lnSpc>
                 <a:spcPct val="125000"/>
               </a:lnSpc>
@@ -13280,7 +13280,7 @@
           <a:bodyPr rtlCol="0" anchor="ctr" wrap="square" lIns="365760"/>
           <a:lstStyle/>
           <a:p>
-            <a:pPr algn="l"/>
+            <a:pPr algn="just"/>
             <a:r>
               <a:rPr sz="1500" b="1">
                 <a:solidFill>
@@ -13314,7 +13314,7 @@
           </a:bodyPr>
           <a:lstStyle/>
           <a:p>
-            <a:pPr algn="l">
+            <a:pPr algn="just">
               <a:lnSpc>
                 <a:spcPct val="125000"/>
               </a:lnSpc>
@@ -13336,7 +13336,7 @@
             </a:r>
           </a:p>
           <a:p>
-            <a:pPr algn="l">
+            <a:pPr algn="just">
               <a:lnSpc>
                 <a:spcPct val="125000"/>
               </a:lnSpc>
@@ -13358,7 +13358,7 @@
             </a:r>
           </a:p>
           <a:p>
-            <a:pPr algn="l">
+            <a:pPr algn="just">
               <a:lnSpc>
                 <a:spcPct val="125000"/>
               </a:lnSpc>
@@ -13380,7 +13380,7 @@
             </a:r>
           </a:p>
           <a:p>
-            <a:pPr algn="l">
+            <a:pPr algn="just">
               <a:lnSpc>
                 <a:spcPct val="125000"/>
               </a:lnSpc>
@@ -13402,7 +13402,7 @@
             </a:r>
           </a:p>
           <a:p>
-            <a:pPr algn="l">
+            <a:pPr algn="just">
               <a:lnSpc>
                 <a:spcPct val="125000"/>
               </a:lnSpc>
@@ -13424,7 +13424,7 @@
             </a:r>
           </a:p>
           <a:p>
-            <a:pPr algn="l">
+            <a:pPr algn="just">
               <a:lnSpc>
                 <a:spcPct val="125000"/>
               </a:lnSpc>
@@ -13446,7 +13446,7 @@
             </a:r>
           </a:p>
           <a:p>
-            <a:pPr algn="l">
+            <a:pPr algn="just">
               <a:lnSpc>
                 <a:spcPct val="125000"/>
               </a:lnSpc>
@@ -13468,7 +13468,7 @@
             </a:r>
           </a:p>
           <a:p>
-            <a:pPr algn="l">
+            <a:pPr algn="just">
               <a:lnSpc>
                 <a:spcPct val="125000"/>
               </a:lnSpc>
@@ -13490,7 +13490,7 @@
             </a:r>
           </a:p>
           <a:p>
-            <a:pPr algn="l">
+            <a:pPr algn="just">
               <a:lnSpc>
                 <a:spcPct val="125000"/>
               </a:lnSpc>
@@ -13512,7 +13512,7 @@
             </a:r>
           </a:p>
           <a:p>
-            <a:pPr algn="l">
+            <a:pPr algn="just">
               <a:lnSpc>
                 <a:spcPct val="125000"/>
               </a:lnSpc>
@@ -13592,7 +13592,7 @@
           <a:bodyPr rtlCol="0" anchor="ctr" wrap="square" lIns="365760"/>
           <a:lstStyle/>
           <a:p>
-            <a:pPr algn="l"/>
+            <a:pPr algn="just"/>
             <a:r>
               <a:rPr sz="1500" b="1">
                 <a:solidFill>
@@ -13626,7 +13626,7 @@
           </a:bodyPr>
           <a:lstStyle/>
           <a:p>
-            <a:pPr algn="l">
+            <a:pPr algn="just">
               <a:lnSpc>
                 <a:spcPct val="125000"/>
               </a:lnSpc>
@@ -13648,7 +13648,7 @@
             </a:r>
           </a:p>
           <a:p>
-            <a:pPr algn="l">
+            <a:pPr algn="just">
               <a:lnSpc>
                 <a:spcPct val="125000"/>
               </a:lnSpc>
@@ -13670,7 +13670,7 @@
             </a:r>
           </a:p>
           <a:p>
-            <a:pPr algn="l">
+            <a:pPr algn="just">
               <a:lnSpc>
                 <a:spcPct val="125000"/>
               </a:lnSpc>
@@ -13692,7 +13692,7 @@
             </a:r>
           </a:p>
           <a:p>
-            <a:pPr algn="l">
+            <a:pPr algn="just">
               <a:lnSpc>
                 <a:spcPct val="125000"/>
               </a:lnSpc>
@@ -13714,7 +13714,7 @@
             </a:r>
           </a:p>
           <a:p>
-            <a:pPr algn="l">
+            <a:pPr algn="just">
               <a:lnSpc>
                 <a:spcPct val="125000"/>
               </a:lnSpc>
@@ -13736,7 +13736,7 @@
             </a:r>
           </a:p>
           <a:p>
-            <a:pPr algn="l">
+            <a:pPr algn="just">
               <a:lnSpc>
                 <a:spcPct val="125000"/>
               </a:lnSpc>
@@ -13758,7 +13758,7 @@
             </a:r>
           </a:p>
           <a:p>
-            <a:pPr algn="l">
+            <a:pPr algn="just">
               <a:lnSpc>
                 <a:spcPct val="125000"/>
               </a:lnSpc>
@@ -13780,7 +13780,7 @@
             </a:r>
           </a:p>
           <a:p>
-            <a:pPr algn="l">
+            <a:pPr algn="just">
               <a:lnSpc>
                 <a:spcPct val="125000"/>
               </a:lnSpc>
@@ -13802,7 +13802,7 @@
             </a:r>
           </a:p>
           <a:p>
-            <a:pPr algn="l">
+            <a:pPr algn="just">
               <a:lnSpc>
                 <a:spcPct val="125000"/>
               </a:lnSpc>
@@ -13882,7 +13882,7 @@
           <a:bodyPr rtlCol="0" anchor="ctr" wrap="square" lIns="365760"/>
           <a:lstStyle/>
           <a:p>
-            <a:pPr algn="l"/>
+            <a:pPr algn="just"/>
             <a:r>
               <a:rPr sz="1500" b="1">
                 <a:solidFill>
@@ -13916,7 +13916,7 @@
           </a:bodyPr>
           <a:lstStyle/>
           <a:p>
-            <a:pPr algn="l">
+            <a:pPr algn="just">
               <a:lnSpc>
                 <a:spcPct val="125000"/>
               </a:lnSpc>
@@ -13938,7 +13938,7 @@
             </a:r>
           </a:p>
           <a:p>
-            <a:pPr algn="l">
+            <a:pPr algn="just">
               <a:lnSpc>
                 <a:spcPct val="125000"/>
               </a:lnSpc>
@@ -13960,7 +13960,7 @@
             </a:r>
           </a:p>
           <a:p>
-            <a:pPr algn="l">
+            <a:pPr algn="just">
               <a:lnSpc>
                 <a:spcPct val="125000"/>
               </a:lnSpc>
@@ -13982,7 +13982,7 @@
             </a:r>
           </a:p>
           <a:p>
-            <a:pPr algn="l">
+            <a:pPr algn="just">
               <a:lnSpc>
                 <a:spcPct val="125000"/>
               </a:lnSpc>
@@ -14004,7 +14004,7 @@
             </a:r>
           </a:p>
           <a:p>
-            <a:pPr algn="l">
+            <a:pPr algn="just">
               <a:lnSpc>
                 <a:spcPct val="125000"/>
               </a:lnSpc>
@@ -14026,7 +14026,7 @@
             </a:r>
           </a:p>
           <a:p>
-            <a:pPr algn="l">
+            <a:pPr algn="just">
               <a:lnSpc>
                 <a:spcPct val="125000"/>
               </a:lnSpc>
@@ -14048,7 +14048,7 @@
             </a:r>
           </a:p>
           <a:p>
-            <a:pPr algn="l">
+            <a:pPr algn="just">
               <a:lnSpc>
                 <a:spcPct val="125000"/>
               </a:lnSpc>
@@ -14070,7 +14070,7 @@
             </a:r>
           </a:p>
           <a:p>
-            <a:pPr algn="l">
+            <a:pPr algn="just">
               <a:lnSpc>
                 <a:spcPct val="125000"/>
               </a:lnSpc>
@@ -14092,7 +14092,7 @@
             </a:r>
           </a:p>
           <a:p>
-            <a:pPr algn="l">
+            <a:pPr algn="just">
               <a:lnSpc>
                 <a:spcPct val="125000"/>
               </a:lnSpc>
@@ -14172,7 +14172,7 @@
           <a:bodyPr rtlCol="0" anchor="ctr" wrap="square" lIns="365760"/>
           <a:lstStyle/>
           <a:p>
-            <a:pPr algn="l"/>
+            <a:pPr algn="just"/>
             <a:r>
               <a:rPr sz="1500" b="1">
                 <a:solidFill>
@@ -14206,7 +14206,7 @@
           </a:bodyPr>
           <a:lstStyle/>
           <a:p>
-            <a:pPr algn="l">
+            <a:pPr algn="just">
               <a:lnSpc>
                 <a:spcPct val="125000"/>
               </a:lnSpc>
@@ -14228,7 +14228,7 @@
             </a:r>
           </a:p>
           <a:p>
-            <a:pPr algn="l">
+            <a:pPr algn="just">
               <a:lnSpc>
                 <a:spcPct val="125000"/>
               </a:lnSpc>
@@ -14250,7 +14250,7 @@
             </a:r>
           </a:p>
           <a:p>
-            <a:pPr algn="l">
+            <a:pPr algn="just">
               <a:lnSpc>
                 <a:spcPct val="125000"/>
               </a:lnSpc>
@@ -14272,7 +14272,7 @@
             </a:r>
           </a:p>
           <a:p>
-            <a:pPr algn="l">
+            <a:pPr algn="just">
               <a:lnSpc>
                 <a:spcPct val="125000"/>
               </a:lnSpc>
@@ -14294,7 +14294,7 @@
             </a:r>
           </a:p>
           <a:p>
-            <a:pPr algn="l">
+            <a:pPr algn="just">
               <a:lnSpc>
                 <a:spcPct val="125000"/>
               </a:lnSpc>
@@ -14316,7 +14316,7 @@
             </a:r>
           </a:p>
           <a:p>
-            <a:pPr algn="l">
+            <a:pPr algn="just">
               <a:lnSpc>
                 <a:spcPct val="125000"/>
               </a:lnSpc>
@@ -14338,7 +14338,7 @@
             </a:r>
           </a:p>
           <a:p>
-            <a:pPr algn="l">
+            <a:pPr algn="just">
               <a:lnSpc>
                 <a:spcPct val="125000"/>
               </a:lnSpc>
@@ -14360,7 +14360,7 @@
             </a:r>
           </a:p>
           <a:p>
-            <a:pPr algn="l">
+            <a:pPr algn="just">
               <a:lnSpc>
                 <a:spcPct val="125000"/>
               </a:lnSpc>
@@ -14382,7 +14382,7 @@
             </a:r>
           </a:p>
           <a:p>
-            <a:pPr algn="l">
+            <a:pPr algn="just">
               <a:lnSpc>
                 <a:spcPct val="125000"/>
               </a:lnSpc>
@@ -14462,7 +14462,7 @@
           <a:bodyPr rtlCol="0" anchor="ctr" wrap="square" lIns="365760"/>
           <a:lstStyle/>
           <a:p>
-            <a:pPr algn="l"/>
+            <a:pPr algn="just"/>
             <a:r>
               <a:rPr sz="1500" b="1">
                 <a:solidFill>
@@ -14496,7 +14496,7 @@
           </a:bodyPr>
           <a:lstStyle/>
           <a:p>
-            <a:pPr algn="l">
+            <a:pPr algn="just">
               <a:lnSpc>
                 <a:spcPct val="125000"/>
               </a:lnSpc>
@@ -14518,7 +14518,7 @@
             </a:r>
           </a:p>
           <a:p>
-            <a:pPr algn="l">
+            <a:pPr algn="just">
               <a:lnSpc>
                 <a:spcPct val="125000"/>
               </a:lnSpc>
@@ -14540,7 +14540,7 @@
             </a:r>
           </a:p>
           <a:p>
-            <a:pPr algn="l">
+            <a:pPr algn="just">
               <a:lnSpc>
                 <a:spcPct val="125000"/>
               </a:lnSpc>
@@ -14562,7 +14562,7 @@
             </a:r>
           </a:p>
           <a:p>
-            <a:pPr algn="l">
+            <a:pPr algn="just">
               <a:lnSpc>
                 <a:spcPct val="125000"/>
               </a:lnSpc>
@@ -14584,7 +14584,7 @@
             </a:r>
           </a:p>
           <a:p>
-            <a:pPr algn="l">
+            <a:pPr algn="just">
               <a:lnSpc>
                 <a:spcPct val="125000"/>
               </a:lnSpc>
@@ -14606,7 +14606,7 @@
             </a:r>
           </a:p>
           <a:p>
-            <a:pPr algn="l">
+            <a:pPr algn="just">
               <a:lnSpc>
                 <a:spcPct val="125000"/>
               </a:lnSpc>
@@ -14628,7 +14628,7 @@
             </a:r>
           </a:p>
           <a:p>
-            <a:pPr algn="l">
+            <a:pPr algn="just">
               <a:lnSpc>
                 <a:spcPct val="125000"/>
               </a:lnSpc>
@@ -14650,7 +14650,7 @@
             </a:r>
           </a:p>
           <a:p>
-            <a:pPr algn="l">
+            <a:pPr algn="just">
               <a:lnSpc>
                 <a:spcPct val="125000"/>
               </a:lnSpc>
@@ -14672,7 +14672,7 @@
             </a:r>
           </a:p>
           <a:p>
-            <a:pPr algn="l">
+            <a:pPr algn="just">
               <a:lnSpc>
                 <a:spcPct val="125000"/>
               </a:lnSpc>
@@ -14752,7 +14752,7 @@
           <a:bodyPr rtlCol="0" anchor="ctr" wrap="square" lIns="365760"/>
           <a:lstStyle/>
           <a:p>
-            <a:pPr algn="l"/>
+            <a:pPr algn="just"/>
             <a:r>
               <a:rPr sz="1500" b="1">
                 <a:solidFill>
@@ -14786,7 +14786,7 @@
           </a:bodyPr>
           <a:lstStyle/>
           <a:p>
-            <a:pPr algn="l">
+            <a:pPr algn="just">
               <a:lnSpc>
                 <a:spcPct val="125000"/>
               </a:lnSpc>
@@ -14808,7 +14808,7 @@
             </a:r>
           </a:p>
           <a:p>
-            <a:pPr algn="l">
+            <a:pPr algn="just">
               <a:lnSpc>
                 <a:spcPct val="125000"/>
               </a:lnSpc>
@@ -14830,7 +14830,7 @@
             </a:r>
           </a:p>
           <a:p>
-            <a:pPr algn="l">
+            <a:pPr algn="just">
               <a:lnSpc>
                 <a:spcPct val="125000"/>
               </a:lnSpc>
@@ -14852,7 +14852,7 @@
             </a:r>
           </a:p>
           <a:p>
-            <a:pPr algn="l">
+            <a:pPr algn="just">
               <a:lnSpc>
                 <a:spcPct val="125000"/>
               </a:lnSpc>
@@ -14874,7 +14874,7 @@
             </a:r>
           </a:p>
           <a:p>
-            <a:pPr algn="l">
+            <a:pPr algn="just">
               <a:lnSpc>
                 <a:spcPct val="125000"/>
               </a:lnSpc>
@@ -14896,7 +14896,7 @@
             </a:r>
           </a:p>
           <a:p>
-            <a:pPr algn="l">
+            <a:pPr algn="just">
               <a:lnSpc>
                 <a:spcPct val="125000"/>
               </a:lnSpc>
@@ -14918,7 +14918,7 @@
             </a:r>
           </a:p>
           <a:p>
-            <a:pPr algn="l">
+            <a:pPr algn="just">
               <a:lnSpc>
                 <a:spcPct val="125000"/>
               </a:lnSpc>
@@ -14940,7 +14940,7 @@
             </a:r>
           </a:p>
           <a:p>
-            <a:pPr algn="l">
+            <a:pPr algn="just">
               <a:lnSpc>
                 <a:spcPct val="125000"/>
               </a:lnSpc>
@@ -14962,7 +14962,7 @@
             </a:r>
           </a:p>
           <a:p>
-            <a:pPr algn="l">
+            <a:pPr algn="just">
               <a:lnSpc>
                 <a:spcPct val="125000"/>
               </a:lnSpc>
@@ -15042,7 +15042,7 @@
           <a:bodyPr rtlCol="0" anchor="ctr" wrap="square" lIns="365760"/>
           <a:lstStyle/>
           <a:p>
-            <a:pPr algn="l"/>
+            <a:pPr algn="just"/>
             <a:r>
               <a:rPr sz="1500" b="1">
                 <a:solidFill>
@@ -15076,7 +15076,7 @@
           </a:bodyPr>
           <a:lstStyle/>
           <a:p>
-            <a:pPr algn="l">
+            <a:pPr algn="just">
               <a:lnSpc>
                 <a:spcPct val="125000"/>
               </a:lnSpc>
@@ -15098,7 +15098,7 @@
             </a:r>
           </a:p>
           <a:p>
-            <a:pPr algn="l">
+            <a:pPr algn="just">
               <a:lnSpc>
                 <a:spcPct val="125000"/>
               </a:lnSpc>
@@ -15120,7 +15120,7 @@
             </a:r>
           </a:p>
           <a:p>
-            <a:pPr algn="l">
+            <a:pPr algn="just">
               <a:lnSpc>
                 <a:spcPct val="125000"/>
               </a:lnSpc>
@@ -15142,7 +15142,7 @@
             </a:r>
           </a:p>
           <a:p>
-            <a:pPr algn="l">
+            <a:pPr algn="just">
               <a:lnSpc>
                 <a:spcPct val="125000"/>
               </a:lnSpc>
@@ -15164,7 +15164,7 @@
             </a:r>
           </a:p>
           <a:p>
-            <a:pPr algn="l">
+            <a:pPr algn="just">
               <a:lnSpc>
                 <a:spcPct val="125000"/>
               </a:lnSpc>
@@ -15186,7 +15186,7 @@
             </a:r>
           </a:p>
           <a:p>
-            <a:pPr algn="l">
+            <a:pPr algn="just">
               <a:lnSpc>
                 <a:spcPct val="125000"/>
               </a:lnSpc>
@@ -15208,7 +15208,7 @@
             </a:r>
           </a:p>
           <a:p>
-            <a:pPr algn="l">
+            <a:pPr algn="just">
               <a:lnSpc>
                 <a:spcPct val="125000"/>
               </a:lnSpc>
@@ -15230,7 +15230,7 @@
             </a:r>
           </a:p>
           <a:p>
-            <a:pPr algn="l">
+            <a:pPr algn="just">
               <a:lnSpc>
                 <a:spcPct val="125000"/>
               </a:lnSpc>
@@ -15252,7 +15252,7 @@
             </a:r>
           </a:p>
           <a:p>
-            <a:pPr algn="l">
+            <a:pPr algn="just">
               <a:lnSpc>
                 <a:spcPct val="125000"/>
               </a:lnSpc>
@@ -15332,7 +15332,7 @@
           <a:bodyPr rtlCol="0" anchor="ctr" wrap="square" lIns="365760"/>
           <a:lstStyle/>
           <a:p>
-            <a:pPr algn="l"/>
+            <a:pPr algn="just"/>
             <a:r>
               <a:rPr sz="1500" b="1">
                 <a:solidFill>
@@ -15366,7 +15366,7 @@
           </a:bodyPr>
           <a:lstStyle/>
           <a:p>
-            <a:pPr algn="l">
+            <a:pPr algn="just">
               <a:lnSpc>
                 <a:spcPct val="125000"/>
               </a:lnSpc>
@@ -15388,7 +15388,7 @@
             </a:r>
           </a:p>
           <a:p>
-            <a:pPr algn="l">
+            <a:pPr algn="just">
               <a:lnSpc>
                 <a:spcPct val="125000"/>
               </a:lnSpc>
@@ -15410,7 +15410,7 @@
             </a:r>
           </a:p>
           <a:p>
-            <a:pPr algn="l">
+            <a:pPr algn="just">
               <a:lnSpc>
                 <a:spcPct val="125000"/>
               </a:lnSpc>
@@ -15432,7 +15432,7 @@
             </a:r>
           </a:p>
           <a:p>
-            <a:pPr algn="l">
+            <a:pPr algn="just">
               <a:lnSpc>
                 <a:spcPct val="125000"/>
               </a:lnSpc>
@@ -15454,7 +15454,7 @@
             </a:r>
           </a:p>
           <a:p>
-            <a:pPr algn="l">
+            <a:pPr algn="just">
               <a:lnSpc>
                 <a:spcPct val="125000"/>
               </a:lnSpc>
@@ -15476,7 +15476,7 @@
             </a:r>
           </a:p>
           <a:p>
-            <a:pPr algn="l">
+            <a:pPr algn="just">
               <a:lnSpc>
                 <a:spcPct val="125000"/>
               </a:lnSpc>
@@ -15498,7 +15498,7 @@
             </a:r>
           </a:p>
           <a:p>
-            <a:pPr algn="l">
+            <a:pPr algn="just">
               <a:lnSpc>
                 <a:spcPct val="125000"/>
               </a:lnSpc>
@@ -15520,7 +15520,7 @@
             </a:r>
           </a:p>
           <a:p>
-            <a:pPr algn="l">
+            <a:pPr algn="just">
               <a:lnSpc>
                 <a:spcPct val="125000"/>
               </a:lnSpc>
@@ -15542,7 +15542,7 @@
             </a:r>
           </a:p>
           <a:p>
-            <a:pPr algn="l">
+            <a:pPr algn="just">
               <a:lnSpc>
                 <a:spcPct val="125000"/>
               </a:lnSpc>
@@ -15622,7 +15622,7 @@
           <a:bodyPr rtlCol="0" anchor="ctr" wrap="square" lIns="365760"/>
           <a:lstStyle/>
           <a:p>
-            <a:pPr algn="l"/>
+            <a:pPr algn="just"/>
             <a:r>
               <a:rPr sz="1500" b="1">
                 <a:solidFill>
@@ -15656,7 +15656,7 @@
           </a:bodyPr>
           <a:lstStyle/>
           <a:p>
-            <a:pPr algn="l">
+            <a:pPr algn="just">
               <a:lnSpc>
                 <a:spcPct val="125000"/>
               </a:lnSpc>
@@ -15678,7 +15678,7 @@
             </a:r>
           </a:p>
           <a:p>
-            <a:pPr algn="l">
+            <a:pPr algn="just">
               <a:lnSpc>
                 <a:spcPct val="125000"/>
               </a:lnSpc>
@@ -15700,7 +15700,7 @@
             </a:r>
           </a:p>
           <a:p>
-            <a:pPr algn="l">
+            <a:pPr algn="just">
               <a:lnSpc>
                 <a:spcPct val="125000"/>
               </a:lnSpc>
@@ -15722,7 +15722,7 @@
             </a:r>
           </a:p>
           <a:p>
-            <a:pPr algn="l">
+            <a:pPr algn="just">
               <a:lnSpc>
                 <a:spcPct val="125000"/>
               </a:lnSpc>
@@ -15744,7 +15744,7 @@
             </a:r>
           </a:p>
           <a:p>
-            <a:pPr algn="l">
+            <a:pPr algn="just">
               <a:lnSpc>
                 <a:spcPct val="125000"/>
               </a:lnSpc>
@@ -15766,7 +15766,7 @@
             </a:r>
           </a:p>
           <a:p>
-            <a:pPr algn="l">
+            <a:pPr algn="just">
               <a:lnSpc>
                 <a:spcPct val="125000"/>
               </a:lnSpc>
@@ -15788,7 +15788,7 @@
             </a:r>
           </a:p>
           <a:p>
-            <a:pPr algn="l">
+            <a:pPr algn="just">
               <a:lnSpc>
                 <a:spcPct val="125000"/>
               </a:lnSpc>
@@ -15810,7 +15810,7 @@
             </a:r>
           </a:p>
           <a:p>
-            <a:pPr algn="l">
+            <a:pPr algn="just">
               <a:lnSpc>
                 <a:spcPct val="125000"/>
               </a:lnSpc>
@@ -15832,7 +15832,7 @@
             </a:r>
           </a:p>
           <a:p>
-            <a:pPr algn="l">
+            <a:pPr algn="just">
               <a:lnSpc>
                 <a:spcPct val="125000"/>
               </a:lnSpc>
@@ -15854,7 +15854,7 @@
             </a:r>
           </a:p>
           <a:p>
-            <a:pPr algn="l">
+            <a:pPr algn="just">
               <a:lnSpc>
                 <a:spcPct val="125000"/>
               </a:lnSpc>
@@ -15876,7 +15876,7 @@
             </a:r>
           </a:p>
           <a:p>
-            <a:pPr algn="l">
+            <a:pPr algn="just">
               <a:lnSpc>
                 <a:spcPct val="125000"/>
               </a:lnSpc>
@@ -15898,7 +15898,7 @@
             </a:r>
           </a:p>
           <a:p>
-            <a:pPr algn="l">
+            <a:pPr algn="just">
               <a:lnSpc>
                 <a:spcPct val="125000"/>
               </a:lnSpc>
@@ -15978,7 +15978,7 @@
           <a:bodyPr rtlCol="0" anchor="ctr" wrap="square" lIns="365760"/>
           <a:lstStyle/>
           <a:p>
-            <a:pPr algn="l"/>
+            <a:pPr algn="just"/>
             <a:r>
               <a:rPr sz="1500" b="1">
                 <a:solidFill>
@@ -16012,7 +16012,7 @@
           </a:bodyPr>
           <a:lstStyle/>
           <a:p>
-            <a:pPr algn="l">
+            <a:pPr algn="just">
               <a:lnSpc>
                 <a:spcPct val="125000"/>
               </a:lnSpc>
@@ -16034,7 +16034,7 @@
             </a:r>
           </a:p>
           <a:p>
-            <a:pPr algn="l">
+            <a:pPr algn="just">
               <a:lnSpc>
                 <a:spcPct val="125000"/>
               </a:lnSpc>
@@ -16056,7 +16056,7 @@
             </a:r>
           </a:p>
           <a:p>
-            <a:pPr algn="l">
+            <a:pPr algn="just">
               <a:lnSpc>
                 <a:spcPct val="125000"/>
               </a:lnSpc>
@@ -16078,7 +16078,7 @@
             </a:r>
           </a:p>
           <a:p>
-            <a:pPr algn="l">
+            <a:pPr algn="just">
               <a:lnSpc>
                 <a:spcPct val="125000"/>
               </a:lnSpc>
@@ -16100,7 +16100,7 @@
             </a:r>
           </a:p>
           <a:p>
-            <a:pPr algn="l">
+            <a:pPr algn="just">
               <a:lnSpc>
                 <a:spcPct val="125000"/>
               </a:lnSpc>
@@ -16122,7 +16122,7 @@
             </a:r>
           </a:p>
           <a:p>
-            <a:pPr algn="l">
+            <a:pPr algn="just">
               <a:lnSpc>
                 <a:spcPct val="125000"/>
               </a:lnSpc>
@@ -16144,7 +16144,7 @@
             </a:r>
           </a:p>
           <a:p>
-            <a:pPr algn="l">
+            <a:pPr algn="just">
               <a:lnSpc>
                 <a:spcPct val="125000"/>
               </a:lnSpc>
@@ -16166,7 +16166,7 @@
             </a:r>
           </a:p>
           <a:p>
-            <a:pPr algn="l">
+            <a:pPr algn="just">
               <a:lnSpc>
                 <a:spcPct val="125000"/>
               </a:lnSpc>
@@ -16188,7 +16188,7 @@
             </a:r>
           </a:p>
           <a:p>
-            <a:pPr algn="l">
+            <a:pPr algn="just">
               <a:lnSpc>
                 <a:spcPct val="125000"/>
               </a:lnSpc>
@@ -16210,7 +16210,7 @@
             </a:r>
           </a:p>
           <a:p>
-            <a:pPr algn="l">
+            <a:pPr algn="just">
               <a:lnSpc>
                 <a:spcPct val="125000"/>
               </a:lnSpc>
@@ -16232,7 +16232,7 @@
             </a:r>
           </a:p>
           <a:p>
-            <a:pPr algn="l">
+            <a:pPr algn="just">
               <a:lnSpc>
                 <a:spcPct val="125000"/>
               </a:lnSpc>
@@ -16254,7 +16254,7 @@
             </a:r>
           </a:p>
           <a:p>
-            <a:pPr algn="l">
+            <a:pPr algn="just">
               <a:lnSpc>
                 <a:spcPct val="125000"/>
               </a:lnSpc>
@@ -16276,7 +16276,7 @@
             </a:r>
           </a:p>
           <a:p>
-            <a:pPr algn="l">
+            <a:pPr algn="just">
               <a:lnSpc>
                 <a:spcPct val="125000"/>
               </a:lnSpc>
@@ -16356,7 +16356,7 @@
           <a:bodyPr rtlCol="0" anchor="ctr" wrap="square" lIns="365760"/>
           <a:lstStyle/>
           <a:p>
-            <a:pPr algn="l"/>
+            <a:pPr algn="just"/>
             <a:r>
               <a:rPr sz="1500" b="1">
                 <a:solidFill>
@@ -16390,7 +16390,7 @@
           </a:bodyPr>
           <a:lstStyle/>
           <a:p>
-            <a:pPr algn="l">
+            <a:pPr algn="just">
               <a:lnSpc>
                 <a:spcPct val="125000"/>
               </a:lnSpc>
@@ -16412,7 +16412,7 @@
             </a:r>
           </a:p>
           <a:p>
-            <a:pPr algn="l">
+            <a:pPr algn="just">
               <a:lnSpc>
                 <a:spcPct val="125000"/>
               </a:lnSpc>
@@ -16434,7 +16434,7 @@
             </a:r>
           </a:p>
           <a:p>
-            <a:pPr algn="l">
+            <a:pPr algn="just">
               <a:lnSpc>
                 <a:spcPct val="125000"/>
               </a:lnSpc>
@@ -16456,7 +16456,7 @@
             </a:r>
           </a:p>
           <a:p>
-            <a:pPr algn="l">
+            <a:pPr algn="just">
               <a:lnSpc>
                 <a:spcPct val="125000"/>
               </a:lnSpc>
@@ -16478,7 +16478,7 @@
             </a:r>
           </a:p>
           <a:p>
-            <a:pPr algn="l">
+            <a:pPr algn="just">
               <a:lnSpc>
                 <a:spcPct val="125000"/>
               </a:lnSpc>
@@ -16500,7 +16500,7 @@
             </a:r>
           </a:p>
           <a:p>
-            <a:pPr algn="l">
+            <a:pPr algn="just">
               <a:lnSpc>
                 <a:spcPct val="125000"/>
               </a:lnSpc>
@@ -16522,7 +16522,7 @@
             </a:r>
           </a:p>
           <a:p>
-            <a:pPr algn="l">
+            <a:pPr algn="just">
               <a:lnSpc>
                 <a:spcPct val="125000"/>
               </a:lnSpc>
@@ -16544,7 +16544,7 @@
             </a:r>
           </a:p>
           <a:p>
-            <a:pPr algn="l">
+            <a:pPr algn="just">
               <a:lnSpc>
                 <a:spcPct val="125000"/>
               </a:lnSpc>
@@ -16566,7 +16566,7 @@
             </a:r>
           </a:p>
           <a:p>
-            <a:pPr algn="l">
+            <a:pPr algn="just">
               <a:lnSpc>
                 <a:spcPct val="125000"/>
               </a:lnSpc>

--- a/ppts_output_v3/03_个人所得税风险指引.pptx
+++ b/ppts_output_v3/03_个人所得税风险指引.pptx
@@ -3336,7 +3336,7 @@
           <a:p>
             <a:pPr algn="just">
               <a:lnSpc>
-                <a:spcPct val="125000"/>
+                <a:spcPct val="110000"/>
               </a:lnSpc>
               <a:spcBef>
                 <a:spcPts val="0"/>
@@ -3358,7 +3358,7 @@
           <a:p>
             <a:pPr algn="just">
               <a:lnSpc>
-                <a:spcPct val="125000"/>
+                <a:spcPct val="110000"/>
               </a:lnSpc>
               <a:spcBef>
                 <a:spcPts val="0"/>
@@ -3380,7 +3380,7 @@
           <a:p>
             <a:pPr algn="just">
               <a:lnSpc>
-                <a:spcPct val="125000"/>
+                <a:spcPct val="110000"/>
               </a:lnSpc>
               <a:spcBef>
                 <a:spcPts val="0"/>
@@ -3402,7 +3402,7 @@
           <a:p>
             <a:pPr algn="just">
               <a:lnSpc>
-                <a:spcPct val="125000"/>
+                <a:spcPct val="110000"/>
               </a:lnSpc>
               <a:spcBef>
                 <a:spcPts val="0"/>
@@ -3424,7 +3424,7 @@
           <a:p>
             <a:pPr algn="just">
               <a:lnSpc>
-                <a:spcPct val="125000"/>
+                <a:spcPct val="110000"/>
               </a:lnSpc>
               <a:spcBef>
                 <a:spcPts val="0"/>
@@ -3446,7 +3446,7 @@
           <a:p>
             <a:pPr algn="just">
               <a:lnSpc>
-                <a:spcPct val="125000"/>
+                <a:spcPct val="110000"/>
               </a:lnSpc>
               <a:spcBef>
                 <a:spcPts val="0"/>
@@ -3468,7 +3468,7 @@
           <a:p>
             <a:pPr algn="just">
               <a:lnSpc>
-                <a:spcPct val="125000"/>
+                <a:spcPct val="110000"/>
               </a:lnSpc>
               <a:spcBef>
                 <a:spcPts val="0"/>
@@ -3490,7 +3490,7 @@
           <a:p>
             <a:pPr algn="just">
               <a:lnSpc>
-                <a:spcPct val="125000"/>
+                <a:spcPct val="110000"/>
               </a:lnSpc>
               <a:spcBef>
                 <a:spcPts val="0"/>
@@ -3512,7 +3512,7 @@
           <a:p>
             <a:pPr algn="just">
               <a:lnSpc>
-                <a:spcPct val="125000"/>
+                <a:spcPct val="110000"/>
               </a:lnSpc>
               <a:spcBef>
                 <a:spcPts val="0"/>
@@ -3534,7 +3534,7 @@
           <a:p>
             <a:pPr algn="just">
               <a:lnSpc>
-                <a:spcPct val="125000"/>
+                <a:spcPct val="110000"/>
               </a:lnSpc>
               <a:spcBef>
                 <a:spcPts val="0"/>
@@ -3556,7 +3556,7 @@
           <a:p>
             <a:pPr algn="just">
               <a:lnSpc>
-                <a:spcPct val="125000"/>
+                <a:spcPct val="110000"/>
               </a:lnSpc>
               <a:spcBef>
                 <a:spcPts val="0"/>
@@ -3578,7 +3578,7 @@
           <a:p>
             <a:pPr algn="just">
               <a:lnSpc>
-                <a:spcPct val="125000"/>
+                <a:spcPct val="110000"/>
               </a:lnSpc>
               <a:spcBef>
                 <a:spcPts val="0"/>
@@ -3692,7 +3692,7 @@
           <a:p>
             <a:pPr algn="just">
               <a:lnSpc>
-                <a:spcPct val="125000"/>
+                <a:spcPct val="110000"/>
               </a:lnSpc>
               <a:spcBef>
                 <a:spcPts val="0"/>
@@ -3714,7 +3714,7 @@
           <a:p>
             <a:pPr algn="just">
               <a:lnSpc>
-                <a:spcPct val="125000"/>
+                <a:spcPct val="110000"/>
               </a:lnSpc>
               <a:spcBef>
                 <a:spcPts val="0"/>
@@ -3736,7 +3736,7 @@
           <a:p>
             <a:pPr algn="just">
               <a:lnSpc>
-                <a:spcPct val="125000"/>
+                <a:spcPct val="110000"/>
               </a:lnSpc>
               <a:spcBef>
                 <a:spcPts val="0"/>
@@ -3758,7 +3758,7 @@
           <a:p>
             <a:pPr algn="just">
               <a:lnSpc>
-                <a:spcPct val="125000"/>
+                <a:spcPct val="110000"/>
               </a:lnSpc>
               <a:spcBef>
                 <a:spcPts val="0"/>
@@ -3780,7 +3780,7 @@
           <a:p>
             <a:pPr algn="just">
               <a:lnSpc>
-                <a:spcPct val="125000"/>
+                <a:spcPct val="110000"/>
               </a:lnSpc>
               <a:spcBef>
                 <a:spcPts val="0"/>
@@ -3802,7 +3802,7 @@
           <a:p>
             <a:pPr algn="just">
               <a:lnSpc>
-                <a:spcPct val="125000"/>
+                <a:spcPct val="110000"/>
               </a:lnSpc>
               <a:spcBef>
                 <a:spcPts val="0"/>
@@ -3824,7 +3824,7 @@
           <a:p>
             <a:pPr algn="just">
               <a:lnSpc>
-                <a:spcPct val="125000"/>
+                <a:spcPct val="110000"/>
               </a:lnSpc>
               <a:spcBef>
                 <a:spcPts val="0"/>
@@ -3846,7 +3846,7 @@
           <a:p>
             <a:pPr algn="just">
               <a:lnSpc>
-                <a:spcPct val="125000"/>
+                <a:spcPct val="110000"/>
               </a:lnSpc>
               <a:spcBef>
                 <a:spcPts val="0"/>
@@ -3868,7 +3868,7 @@
           <a:p>
             <a:pPr algn="just">
               <a:lnSpc>
-                <a:spcPct val="125000"/>
+                <a:spcPct val="110000"/>
               </a:lnSpc>
               <a:spcBef>
                 <a:spcPts val="0"/>
@@ -3890,7 +3890,7 @@
           <a:p>
             <a:pPr algn="just">
               <a:lnSpc>
-                <a:spcPct val="125000"/>
+                <a:spcPct val="110000"/>
               </a:lnSpc>
               <a:spcBef>
                 <a:spcPts val="0"/>
@@ -4004,7 +4004,7 @@
           <a:p>
             <a:pPr algn="just">
               <a:lnSpc>
-                <a:spcPct val="125000"/>
+                <a:spcPct val="110000"/>
               </a:lnSpc>
               <a:spcBef>
                 <a:spcPts val="0"/>
@@ -4026,7 +4026,7 @@
           <a:p>
             <a:pPr algn="just">
               <a:lnSpc>
-                <a:spcPct val="125000"/>
+                <a:spcPct val="110000"/>
               </a:lnSpc>
               <a:spcBef>
                 <a:spcPts val="0"/>
@@ -4048,7 +4048,7 @@
           <a:p>
             <a:pPr algn="just">
               <a:lnSpc>
-                <a:spcPct val="125000"/>
+                <a:spcPct val="110000"/>
               </a:lnSpc>
               <a:spcBef>
                 <a:spcPts val="0"/>
@@ -4070,7 +4070,7 @@
           <a:p>
             <a:pPr algn="just">
               <a:lnSpc>
-                <a:spcPct val="125000"/>
+                <a:spcPct val="110000"/>
               </a:lnSpc>
               <a:spcBef>
                 <a:spcPts val="0"/>
@@ -4092,7 +4092,7 @@
           <a:p>
             <a:pPr algn="just">
               <a:lnSpc>
-                <a:spcPct val="125000"/>
+                <a:spcPct val="110000"/>
               </a:lnSpc>
               <a:spcBef>
                 <a:spcPts val="0"/>
@@ -4114,7 +4114,7 @@
           <a:p>
             <a:pPr algn="just">
               <a:lnSpc>
-                <a:spcPct val="125000"/>
+                <a:spcPct val="110000"/>
               </a:lnSpc>
               <a:spcBef>
                 <a:spcPts val="0"/>
@@ -4136,7 +4136,7 @@
           <a:p>
             <a:pPr algn="just">
               <a:lnSpc>
-                <a:spcPct val="125000"/>
+                <a:spcPct val="110000"/>
               </a:lnSpc>
               <a:spcBef>
                 <a:spcPts val="0"/>
@@ -4158,7 +4158,7 @@
           <a:p>
             <a:pPr algn="just">
               <a:lnSpc>
-                <a:spcPct val="125000"/>
+                <a:spcPct val="110000"/>
               </a:lnSpc>
               <a:spcBef>
                 <a:spcPts val="0"/>
@@ -4180,7 +4180,7 @@
           <a:p>
             <a:pPr algn="just">
               <a:lnSpc>
-                <a:spcPct val="125000"/>
+                <a:spcPct val="110000"/>
               </a:lnSpc>
               <a:spcBef>
                 <a:spcPts val="0"/>
@@ -4202,7 +4202,7 @@
           <a:p>
             <a:pPr algn="just">
               <a:lnSpc>
-                <a:spcPct val="125000"/>
+                <a:spcPct val="110000"/>
               </a:lnSpc>
               <a:spcBef>
                 <a:spcPts val="0"/>
@@ -4316,7 +4316,7 @@
           <a:p>
             <a:pPr algn="just">
               <a:lnSpc>
-                <a:spcPct val="125000"/>
+                <a:spcPct val="110000"/>
               </a:lnSpc>
               <a:spcBef>
                 <a:spcPts val="0"/>
@@ -4338,7 +4338,7 @@
           <a:p>
             <a:pPr algn="just">
               <a:lnSpc>
-                <a:spcPct val="125000"/>
+                <a:spcPct val="110000"/>
               </a:lnSpc>
               <a:spcBef>
                 <a:spcPts val="0"/>
@@ -4360,7 +4360,7 @@
           <a:p>
             <a:pPr algn="just">
               <a:lnSpc>
-                <a:spcPct val="125000"/>
+                <a:spcPct val="110000"/>
               </a:lnSpc>
               <a:spcBef>
                 <a:spcPts val="0"/>
@@ -4382,7 +4382,7 @@
           <a:p>
             <a:pPr algn="just">
               <a:lnSpc>
-                <a:spcPct val="125000"/>
+                <a:spcPct val="110000"/>
               </a:lnSpc>
               <a:spcBef>
                 <a:spcPts val="0"/>
@@ -4404,7 +4404,7 @@
           <a:p>
             <a:pPr algn="just">
               <a:lnSpc>
-                <a:spcPct val="125000"/>
+                <a:spcPct val="110000"/>
               </a:lnSpc>
               <a:spcBef>
                 <a:spcPts val="0"/>
@@ -4426,7 +4426,7 @@
           <a:p>
             <a:pPr algn="just">
               <a:lnSpc>
-                <a:spcPct val="125000"/>
+                <a:spcPct val="110000"/>
               </a:lnSpc>
               <a:spcBef>
                 <a:spcPts val="0"/>
@@ -4448,7 +4448,7 @@
           <a:p>
             <a:pPr algn="just">
               <a:lnSpc>
-                <a:spcPct val="125000"/>
+                <a:spcPct val="110000"/>
               </a:lnSpc>
               <a:spcBef>
                 <a:spcPts val="0"/>
@@ -4470,7 +4470,7 @@
           <a:p>
             <a:pPr algn="just">
               <a:lnSpc>
-                <a:spcPct val="125000"/>
+                <a:spcPct val="110000"/>
               </a:lnSpc>
               <a:spcBef>
                 <a:spcPts val="0"/>
@@ -4492,7 +4492,7 @@
           <a:p>
             <a:pPr algn="just">
               <a:lnSpc>
-                <a:spcPct val="125000"/>
+                <a:spcPct val="110000"/>
               </a:lnSpc>
               <a:spcBef>
                 <a:spcPts val="0"/>
@@ -4606,7 +4606,7 @@
           <a:p>
             <a:pPr algn="just">
               <a:lnSpc>
-                <a:spcPct val="125000"/>
+                <a:spcPct val="110000"/>
               </a:lnSpc>
               <a:spcBef>
                 <a:spcPts val="0"/>
@@ -4628,7 +4628,7 @@
           <a:p>
             <a:pPr algn="just">
               <a:lnSpc>
-                <a:spcPct val="125000"/>
+                <a:spcPct val="110000"/>
               </a:lnSpc>
               <a:spcBef>
                 <a:spcPts val="0"/>
@@ -4650,7 +4650,7 @@
           <a:p>
             <a:pPr algn="just">
               <a:lnSpc>
-                <a:spcPct val="125000"/>
+                <a:spcPct val="110000"/>
               </a:lnSpc>
               <a:spcBef>
                 <a:spcPts val="0"/>
@@ -4672,7 +4672,7 @@
           <a:p>
             <a:pPr algn="just">
               <a:lnSpc>
-                <a:spcPct val="125000"/>
+                <a:spcPct val="110000"/>
               </a:lnSpc>
               <a:spcBef>
                 <a:spcPts val="0"/>
@@ -4694,7 +4694,7 @@
           <a:p>
             <a:pPr algn="just">
               <a:lnSpc>
-                <a:spcPct val="125000"/>
+                <a:spcPct val="110000"/>
               </a:lnSpc>
               <a:spcBef>
                 <a:spcPts val="0"/>
@@ -4716,7 +4716,7 @@
           <a:p>
             <a:pPr algn="just">
               <a:lnSpc>
-                <a:spcPct val="125000"/>
+                <a:spcPct val="110000"/>
               </a:lnSpc>
               <a:spcBef>
                 <a:spcPts val="0"/>
@@ -4738,7 +4738,7 @@
           <a:p>
             <a:pPr algn="just">
               <a:lnSpc>
-                <a:spcPct val="125000"/>
+                <a:spcPct val="110000"/>
               </a:lnSpc>
               <a:spcBef>
                 <a:spcPts val="0"/>
@@ -4760,7 +4760,7 @@
           <a:p>
             <a:pPr algn="just">
               <a:lnSpc>
-                <a:spcPct val="125000"/>
+                <a:spcPct val="110000"/>
               </a:lnSpc>
               <a:spcBef>
                 <a:spcPts val="0"/>
@@ -4782,7 +4782,7 @@
           <a:p>
             <a:pPr algn="just">
               <a:lnSpc>
-                <a:spcPct val="125000"/>
+                <a:spcPct val="110000"/>
               </a:lnSpc>
               <a:spcBef>
                 <a:spcPts val="0"/>
@@ -4804,7 +4804,7 @@
           <a:p>
             <a:pPr algn="just">
               <a:lnSpc>
-                <a:spcPct val="125000"/>
+                <a:spcPct val="110000"/>
               </a:lnSpc>
               <a:spcBef>
                 <a:spcPts val="0"/>
@@ -4826,7 +4826,7 @@
           <a:p>
             <a:pPr algn="just">
               <a:lnSpc>
-                <a:spcPct val="125000"/>
+                <a:spcPct val="110000"/>
               </a:lnSpc>
               <a:spcBef>
                 <a:spcPts val="0"/>
@@ -4848,7 +4848,7 @@
           <a:p>
             <a:pPr algn="just">
               <a:lnSpc>
-                <a:spcPct val="125000"/>
+                <a:spcPct val="110000"/>
               </a:lnSpc>
               <a:spcBef>
                 <a:spcPts val="0"/>
@@ -4870,7 +4870,7 @@
           <a:p>
             <a:pPr algn="just">
               <a:lnSpc>
-                <a:spcPct val="125000"/>
+                <a:spcPct val="110000"/>
               </a:lnSpc>
               <a:spcBef>
                 <a:spcPts val="0"/>
@@ -4892,7 +4892,7 @@
           <a:p>
             <a:pPr algn="just">
               <a:lnSpc>
-                <a:spcPct val="125000"/>
+                <a:spcPct val="110000"/>
               </a:lnSpc>
               <a:spcBef>
                 <a:spcPts val="0"/>
@@ -4914,7 +4914,7 @@
           <a:p>
             <a:pPr algn="just">
               <a:lnSpc>
-                <a:spcPct val="125000"/>
+                <a:spcPct val="110000"/>
               </a:lnSpc>
               <a:spcBef>
                 <a:spcPts val="0"/>
@@ -5028,7 +5028,7 @@
           <a:p>
             <a:pPr algn="just">
               <a:lnSpc>
-                <a:spcPct val="125000"/>
+                <a:spcPct val="110000"/>
               </a:lnSpc>
               <a:spcBef>
                 <a:spcPts val="0"/>
@@ -5050,7 +5050,7 @@
           <a:p>
             <a:pPr algn="just">
               <a:lnSpc>
-                <a:spcPct val="125000"/>
+                <a:spcPct val="110000"/>
               </a:lnSpc>
               <a:spcBef>
                 <a:spcPts val="0"/>
@@ -5072,7 +5072,7 @@
           <a:p>
             <a:pPr algn="just">
               <a:lnSpc>
-                <a:spcPct val="125000"/>
+                <a:spcPct val="110000"/>
               </a:lnSpc>
               <a:spcBef>
                 <a:spcPts val="0"/>
@@ -5094,7 +5094,7 @@
           <a:p>
             <a:pPr algn="just">
               <a:lnSpc>
-                <a:spcPct val="125000"/>
+                <a:spcPct val="110000"/>
               </a:lnSpc>
               <a:spcBef>
                 <a:spcPts val="0"/>
@@ -5116,7 +5116,7 @@
           <a:p>
             <a:pPr algn="just">
               <a:lnSpc>
-                <a:spcPct val="125000"/>
+                <a:spcPct val="110000"/>
               </a:lnSpc>
               <a:spcBef>
                 <a:spcPts val="0"/>
@@ -5138,7 +5138,7 @@
           <a:p>
             <a:pPr algn="just">
               <a:lnSpc>
-                <a:spcPct val="125000"/>
+                <a:spcPct val="110000"/>
               </a:lnSpc>
               <a:spcBef>
                 <a:spcPts val="0"/>
@@ -5160,7 +5160,7 @@
           <a:p>
             <a:pPr algn="just">
               <a:lnSpc>
-                <a:spcPct val="125000"/>
+                <a:spcPct val="110000"/>
               </a:lnSpc>
               <a:spcBef>
                 <a:spcPts val="0"/>
@@ -5182,7 +5182,7 @@
           <a:p>
             <a:pPr algn="just">
               <a:lnSpc>
-                <a:spcPct val="125000"/>
+                <a:spcPct val="110000"/>
               </a:lnSpc>
               <a:spcBef>
                 <a:spcPts val="0"/>
@@ -5204,7 +5204,7 @@
           <a:p>
             <a:pPr algn="just">
               <a:lnSpc>
-                <a:spcPct val="125000"/>
+                <a:spcPct val="110000"/>
               </a:lnSpc>
               <a:spcBef>
                 <a:spcPts val="0"/>
@@ -5226,7 +5226,7 @@
           <a:p>
             <a:pPr algn="just">
               <a:lnSpc>
-                <a:spcPct val="125000"/>
+                <a:spcPct val="110000"/>
               </a:lnSpc>
               <a:spcBef>
                 <a:spcPts val="0"/>
@@ -5340,7 +5340,7 @@
           <a:p>
             <a:pPr algn="just">
               <a:lnSpc>
-                <a:spcPct val="125000"/>
+                <a:spcPct val="110000"/>
               </a:lnSpc>
               <a:spcBef>
                 <a:spcPts val="0"/>
@@ -5362,7 +5362,7 @@
           <a:p>
             <a:pPr algn="just">
               <a:lnSpc>
-                <a:spcPct val="125000"/>
+                <a:spcPct val="110000"/>
               </a:lnSpc>
               <a:spcBef>
                 <a:spcPts val="0"/>
@@ -5384,7 +5384,7 @@
           <a:p>
             <a:pPr algn="just">
               <a:lnSpc>
-                <a:spcPct val="125000"/>
+                <a:spcPct val="110000"/>
               </a:lnSpc>
               <a:spcBef>
                 <a:spcPts val="0"/>
@@ -5406,7 +5406,7 @@
           <a:p>
             <a:pPr algn="just">
               <a:lnSpc>
-                <a:spcPct val="125000"/>
+                <a:spcPct val="110000"/>
               </a:lnSpc>
               <a:spcBef>
                 <a:spcPts val="0"/>
@@ -5428,7 +5428,7 @@
           <a:p>
             <a:pPr algn="just">
               <a:lnSpc>
-                <a:spcPct val="125000"/>
+                <a:spcPct val="110000"/>
               </a:lnSpc>
               <a:spcBef>
                 <a:spcPts val="0"/>
@@ -5450,7 +5450,7 @@
           <a:p>
             <a:pPr algn="just">
               <a:lnSpc>
-                <a:spcPct val="125000"/>
+                <a:spcPct val="110000"/>
               </a:lnSpc>
               <a:spcBef>
                 <a:spcPts val="0"/>
@@ -5472,7 +5472,7 @@
           <a:p>
             <a:pPr algn="just">
               <a:lnSpc>
-                <a:spcPct val="125000"/>
+                <a:spcPct val="110000"/>
               </a:lnSpc>
               <a:spcBef>
                 <a:spcPts val="0"/>
@@ -5494,7 +5494,7 @@
           <a:p>
             <a:pPr algn="just">
               <a:lnSpc>
-                <a:spcPct val="125000"/>
+                <a:spcPct val="110000"/>
               </a:lnSpc>
               <a:spcBef>
                 <a:spcPts val="0"/>
@@ -5516,7 +5516,7 @@
           <a:p>
             <a:pPr algn="just">
               <a:lnSpc>
-                <a:spcPct val="125000"/>
+                <a:spcPct val="110000"/>
               </a:lnSpc>
               <a:spcBef>
                 <a:spcPts val="0"/>
@@ -5538,7 +5538,7 @@
           <a:p>
             <a:pPr algn="just">
               <a:lnSpc>
-                <a:spcPct val="125000"/>
+                <a:spcPct val="110000"/>
               </a:lnSpc>
               <a:spcBef>
                 <a:spcPts val="0"/>
@@ -5560,7 +5560,7 @@
           <a:p>
             <a:pPr algn="just">
               <a:lnSpc>
-                <a:spcPct val="125000"/>
+                <a:spcPct val="110000"/>
               </a:lnSpc>
               <a:spcBef>
                 <a:spcPts val="0"/>
@@ -5582,7 +5582,7 @@
           <a:p>
             <a:pPr algn="just">
               <a:lnSpc>
-                <a:spcPct val="125000"/>
+                <a:spcPct val="110000"/>
               </a:lnSpc>
               <a:spcBef>
                 <a:spcPts val="0"/>
@@ -5604,7 +5604,7 @@
           <a:p>
             <a:pPr algn="just">
               <a:lnSpc>
-                <a:spcPct val="125000"/>
+                <a:spcPct val="110000"/>
               </a:lnSpc>
               <a:spcBef>
                 <a:spcPts val="0"/>
@@ -5718,7 +5718,7 @@
           <a:p>
             <a:pPr algn="just">
               <a:lnSpc>
-                <a:spcPct val="125000"/>
+                <a:spcPct val="110000"/>
               </a:lnSpc>
               <a:spcBef>
                 <a:spcPts val="0"/>
@@ -5740,7 +5740,7 @@
           <a:p>
             <a:pPr algn="just">
               <a:lnSpc>
-                <a:spcPct val="125000"/>
+                <a:spcPct val="110000"/>
               </a:lnSpc>
               <a:spcBef>
                 <a:spcPts val="0"/>
@@ -5762,7 +5762,7 @@
           <a:p>
             <a:pPr algn="just">
               <a:lnSpc>
-                <a:spcPct val="125000"/>
+                <a:spcPct val="110000"/>
               </a:lnSpc>
               <a:spcBef>
                 <a:spcPts val="0"/>
@@ -5784,7 +5784,7 @@
           <a:p>
             <a:pPr algn="just">
               <a:lnSpc>
-                <a:spcPct val="125000"/>
+                <a:spcPct val="110000"/>
               </a:lnSpc>
               <a:spcBef>
                 <a:spcPts val="0"/>
@@ -5806,7 +5806,7 @@
           <a:p>
             <a:pPr algn="just">
               <a:lnSpc>
-                <a:spcPct val="125000"/>
+                <a:spcPct val="110000"/>
               </a:lnSpc>
               <a:spcBef>
                 <a:spcPts val="0"/>
@@ -5828,7 +5828,7 @@
           <a:p>
             <a:pPr algn="just">
               <a:lnSpc>
-                <a:spcPct val="125000"/>
+                <a:spcPct val="110000"/>
               </a:lnSpc>
               <a:spcBef>
                 <a:spcPts val="0"/>
@@ -5850,7 +5850,7 @@
           <a:p>
             <a:pPr algn="just">
               <a:lnSpc>
-                <a:spcPct val="125000"/>
+                <a:spcPct val="110000"/>
               </a:lnSpc>
               <a:spcBef>
                 <a:spcPts val="0"/>
@@ -5872,7 +5872,7 @@
           <a:p>
             <a:pPr algn="just">
               <a:lnSpc>
-                <a:spcPct val="125000"/>
+                <a:spcPct val="110000"/>
               </a:lnSpc>
               <a:spcBef>
                 <a:spcPts val="0"/>
@@ -5894,7 +5894,7 @@
           <a:p>
             <a:pPr algn="just">
               <a:lnSpc>
-                <a:spcPct val="125000"/>
+                <a:spcPct val="110000"/>
               </a:lnSpc>
               <a:spcBef>
                 <a:spcPts val="0"/>
@@ -5916,7 +5916,7 @@
           <a:p>
             <a:pPr algn="just">
               <a:lnSpc>
-                <a:spcPct val="125000"/>
+                <a:spcPct val="110000"/>
               </a:lnSpc>
               <a:spcBef>
                 <a:spcPts val="0"/>
@@ -5938,7 +5938,7 @@
           <a:p>
             <a:pPr algn="just">
               <a:lnSpc>
-                <a:spcPct val="125000"/>
+                <a:spcPct val="110000"/>
               </a:lnSpc>
               <a:spcBef>
                 <a:spcPts val="0"/>
@@ -5960,7 +5960,7 @@
           <a:p>
             <a:pPr algn="just">
               <a:lnSpc>
-                <a:spcPct val="125000"/>
+                <a:spcPct val="110000"/>
               </a:lnSpc>
               <a:spcBef>
                 <a:spcPts val="0"/>
@@ -6074,7 +6074,7 @@
           <a:p>
             <a:pPr algn="just">
               <a:lnSpc>
-                <a:spcPct val="125000"/>
+                <a:spcPct val="110000"/>
               </a:lnSpc>
               <a:spcBef>
                 <a:spcPts val="0"/>
@@ -6096,7 +6096,7 @@
           <a:p>
             <a:pPr algn="just">
               <a:lnSpc>
-                <a:spcPct val="125000"/>
+                <a:spcPct val="110000"/>
               </a:lnSpc>
               <a:spcBef>
                 <a:spcPts val="0"/>
@@ -6118,7 +6118,7 @@
           <a:p>
             <a:pPr algn="just">
               <a:lnSpc>
-                <a:spcPct val="125000"/>
+                <a:spcPct val="110000"/>
               </a:lnSpc>
               <a:spcBef>
                 <a:spcPts val="0"/>
@@ -6140,7 +6140,7 @@
           <a:p>
             <a:pPr algn="just">
               <a:lnSpc>
-                <a:spcPct val="125000"/>
+                <a:spcPct val="110000"/>
               </a:lnSpc>
               <a:spcBef>
                 <a:spcPts val="0"/>
@@ -6162,7 +6162,7 @@
           <a:p>
             <a:pPr algn="just">
               <a:lnSpc>
-                <a:spcPct val="125000"/>
+                <a:spcPct val="110000"/>
               </a:lnSpc>
               <a:spcBef>
                 <a:spcPts val="0"/>
@@ -6184,7 +6184,7 @@
           <a:p>
             <a:pPr algn="just">
               <a:lnSpc>
-                <a:spcPct val="125000"/>
+                <a:spcPct val="110000"/>
               </a:lnSpc>
               <a:spcBef>
                 <a:spcPts val="0"/>
@@ -6206,7 +6206,7 @@
           <a:p>
             <a:pPr algn="just">
               <a:lnSpc>
-                <a:spcPct val="125000"/>
+                <a:spcPct val="110000"/>
               </a:lnSpc>
               <a:spcBef>
                 <a:spcPts val="0"/>
@@ -6228,7 +6228,7 @@
           <a:p>
             <a:pPr algn="just">
               <a:lnSpc>
-                <a:spcPct val="125000"/>
+                <a:spcPct val="110000"/>
               </a:lnSpc>
               <a:spcBef>
                 <a:spcPts val="0"/>
@@ -6250,7 +6250,7 @@
           <a:p>
             <a:pPr algn="just">
               <a:lnSpc>
-                <a:spcPct val="125000"/>
+                <a:spcPct val="110000"/>
               </a:lnSpc>
               <a:spcBef>
                 <a:spcPts val="0"/>
@@ -6272,7 +6272,7 @@
           <a:p>
             <a:pPr algn="just">
               <a:lnSpc>
-                <a:spcPct val="125000"/>
+                <a:spcPct val="110000"/>
               </a:lnSpc>
               <a:spcBef>
                 <a:spcPts val="0"/>
@@ -6294,7 +6294,7 @@
           <a:p>
             <a:pPr algn="just">
               <a:lnSpc>
-                <a:spcPct val="125000"/>
+                <a:spcPct val="110000"/>
               </a:lnSpc>
               <a:spcBef>
                 <a:spcPts val="0"/>
@@ -6316,7 +6316,7 @@
           <a:p>
             <a:pPr algn="just">
               <a:lnSpc>
-                <a:spcPct val="125000"/>
+                <a:spcPct val="110000"/>
               </a:lnSpc>
               <a:spcBef>
                 <a:spcPts val="0"/>
@@ -6430,7 +6430,7 @@
           <a:p>
             <a:pPr algn="just">
               <a:lnSpc>
-                <a:spcPct val="125000"/>
+                <a:spcPct val="110000"/>
               </a:lnSpc>
               <a:spcBef>
                 <a:spcPts val="0"/>
@@ -6452,7 +6452,7 @@
           <a:p>
             <a:pPr algn="just">
               <a:lnSpc>
-                <a:spcPct val="125000"/>
+                <a:spcPct val="110000"/>
               </a:lnSpc>
               <a:spcBef>
                 <a:spcPts val="0"/>
@@ -6474,7 +6474,7 @@
           <a:p>
             <a:pPr algn="just">
               <a:lnSpc>
-                <a:spcPct val="125000"/>
+                <a:spcPct val="110000"/>
               </a:lnSpc>
               <a:spcBef>
                 <a:spcPts val="0"/>
@@ -6496,7 +6496,7 @@
           <a:p>
             <a:pPr algn="just">
               <a:lnSpc>
-                <a:spcPct val="125000"/>
+                <a:spcPct val="110000"/>
               </a:lnSpc>
               <a:spcBef>
                 <a:spcPts val="0"/>
@@ -6518,7 +6518,7 @@
           <a:p>
             <a:pPr algn="just">
               <a:lnSpc>
-                <a:spcPct val="125000"/>
+                <a:spcPct val="110000"/>
               </a:lnSpc>
               <a:spcBef>
                 <a:spcPts val="0"/>
@@ -6540,7 +6540,7 @@
           <a:p>
             <a:pPr algn="just">
               <a:lnSpc>
-                <a:spcPct val="125000"/>
+                <a:spcPct val="110000"/>
               </a:lnSpc>
               <a:spcBef>
                 <a:spcPts val="0"/>
@@ -6562,7 +6562,7 @@
           <a:p>
             <a:pPr algn="just">
               <a:lnSpc>
-                <a:spcPct val="125000"/>
+                <a:spcPct val="110000"/>
               </a:lnSpc>
               <a:spcBef>
                 <a:spcPts val="0"/>
@@ -6584,7 +6584,7 @@
           <a:p>
             <a:pPr algn="just">
               <a:lnSpc>
-                <a:spcPct val="125000"/>
+                <a:spcPct val="110000"/>
               </a:lnSpc>
               <a:spcBef>
                 <a:spcPts val="0"/>
@@ -6606,7 +6606,7 @@
           <a:p>
             <a:pPr algn="just">
               <a:lnSpc>
-                <a:spcPct val="125000"/>
+                <a:spcPct val="110000"/>
               </a:lnSpc>
               <a:spcBef>
                 <a:spcPts val="0"/>
@@ -6628,7 +6628,7 @@
           <a:p>
             <a:pPr algn="just">
               <a:lnSpc>
-                <a:spcPct val="125000"/>
+                <a:spcPct val="110000"/>
               </a:lnSpc>
               <a:spcBef>
                 <a:spcPts val="0"/>
@@ -6742,7 +6742,7 @@
           <a:p>
             <a:pPr algn="just">
               <a:lnSpc>
-                <a:spcPct val="125000"/>
+                <a:spcPct val="110000"/>
               </a:lnSpc>
               <a:spcBef>
                 <a:spcPts val="0"/>
@@ -6764,7 +6764,7 @@
           <a:p>
             <a:pPr algn="just">
               <a:lnSpc>
-                <a:spcPct val="125000"/>
+                <a:spcPct val="110000"/>
               </a:lnSpc>
               <a:spcBef>
                 <a:spcPts val="0"/>
@@ -6786,7 +6786,7 @@
           <a:p>
             <a:pPr algn="just">
               <a:lnSpc>
-                <a:spcPct val="125000"/>
+                <a:spcPct val="110000"/>
               </a:lnSpc>
               <a:spcBef>
                 <a:spcPts val="0"/>
@@ -6808,7 +6808,7 @@
           <a:p>
             <a:pPr algn="just">
               <a:lnSpc>
-                <a:spcPct val="125000"/>
+                <a:spcPct val="110000"/>
               </a:lnSpc>
               <a:spcBef>
                 <a:spcPts val="0"/>
@@ -6830,7 +6830,7 @@
           <a:p>
             <a:pPr algn="just">
               <a:lnSpc>
-                <a:spcPct val="125000"/>
+                <a:spcPct val="110000"/>
               </a:lnSpc>
               <a:spcBef>
                 <a:spcPts val="0"/>
@@ -6852,7 +6852,7 @@
           <a:p>
             <a:pPr algn="just">
               <a:lnSpc>
-                <a:spcPct val="125000"/>
+                <a:spcPct val="110000"/>
               </a:lnSpc>
               <a:spcBef>
                 <a:spcPts val="0"/>
@@ -6874,7 +6874,7 @@
           <a:p>
             <a:pPr algn="just">
               <a:lnSpc>
-                <a:spcPct val="125000"/>
+                <a:spcPct val="110000"/>
               </a:lnSpc>
               <a:spcBef>
                 <a:spcPts val="0"/>
@@ -6896,7 +6896,7 @@
           <a:p>
             <a:pPr algn="just">
               <a:lnSpc>
-                <a:spcPct val="125000"/>
+                <a:spcPct val="110000"/>
               </a:lnSpc>
               <a:spcBef>
                 <a:spcPts val="0"/>
@@ -6918,7 +6918,7 @@
           <a:p>
             <a:pPr algn="just">
               <a:lnSpc>
-                <a:spcPct val="125000"/>
+                <a:spcPct val="110000"/>
               </a:lnSpc>
               <a:spcBef>
                 <a:spcPts val="0"/>
@@ -6940,7 +6940,7 @@
           <a:p>
             <a:pPr algn="just">
               <a:lnSpc>
-                <a:spcPct val="125000"/>
+                <a:spcPct val="110000"/>
               </a:lnSpc>
               <a:spcBef>
                 <a:spcPts val="0"/>
@@ -6962,7 +6962,7 @@
           <a:p>
             <a:pPr algn="just">
               <a:lnSpc>
-                <a:spcPct val="125000"/>
+                <a:spcPct val="110000"/>
               </a:lnSpc>
               <a:spcBef>
                 <a:spcPts val="0"/>
@@ -7076,7 +7076,7 @@
           <a:p>
             <a:pPr algn="just">
               <a:lnSpc>
-                <a:spcPct val="125000"/>
+                <a:spcPct val="110000"/>
               </a:lnSpc>
               <a:spcBef>
                 <a:spcPts val="0"/>
@@ -7098,7 +7098,7 @@
           <a:p>
             <a:pPr algn="just">
               <a:lnSpc>
-                <a:spcPct val="125000"/>
+                <a:spcPct val="110000"/>
               </a:lnSpc>
               <a:spcBef>
                 <a:spcPts val="0"/>
@@ -7120,7 +7120,7 @@
           <a:p>
             <a:pPr algn="just">
               <a:lnSpc>
-                <a:spcPct val="125000"/>
+                <a:spcPct val="110000"/>
               </a:lnSpc>
               <a:spcBef>
                 <a:spcPts val="0"/>
@@ -7142,7 +7142,7 @@
           <a:p>
             <a:pPr algn="just">
               <a:lnSpc>
-                <a:spcPct val="125000"/>
+                <a:spcPct val="110000"/>
               </a:lnSpc>
               <a:spcBef>
                 <a:spcPts val="0"/>
@@ -7164,7 +7164,7 @@
           <a:p>
             <a:pPr algn="just">
               <a:lnSpc>
-                <a:spcPct val="125000"/>
+                <a:spcPct val="110000"/>
               </a:lnSpc>
               <a:spcBef>
                 <a:spcPts val="0"/>
@@ -7186,7 +7186,7 @@
           <a:p>
             <a:pPr algn="just">
               <a:lnSpc>
-                <a:spcPct val="125000"/>
+                <a:spcPct val="110000"/>
               </a:lnSpc>
               <a:spcBef>
                 <a:spcPts val="0"/>
@@ -7208,7 +7208,7 @@
           <a:p>
             <a:pPr algn="just">
               <a:lnSpc>
-                <a:spcPct val="125000"/>
+                <a:spcPct val="110000"/>
               </a:lnSpc>
               <a:spcBef>
                 <a:spcPts val="0"/>
@@ -7230,7 +7230,7 @@
           <a:p>
             <a:pPr algn="just">
               <a:lnSpc>
-                <a:spcPct val="125000"/>
+                <a:spcPct val="110000"/>
               </a:lnSpc>
               <a:spcBef>
                 <a:spcPts val="0"/>
@@ -7252,7 +7252,7 @@
           <a:p>
             <a:pPr algn="just">
               <a:lnSpc>
-                <a:spcPct val="125000"/>
+                <a:spcPct val="110000"/>
               </a:lnSpc>
               <a:spcBef>
                 <a:spcPts val="0"/>
@@ -7274,7 +7274,7 @@
           <a:p>
             <a:pPr algn="just">
               <a:lnSpc>
-                <a:spcPct val="125000"/>
+                <a:spcPct val="110000"/>
               </a:lnSpc>
               <a:spcBef>
                 <a:spcPts val="0"/>
@@ -7388,7 +7388,7 @@
           <a:p>
             <a:pPr algn="just">
               <a:lnSpc>
-                <a:spcPct val="125000"/>
+                <a:spcPct val="110000"/>
               </a:lnSpc>
               <a:spcBef>
                 <a:spcPts val="0"/>
@@ -7410,7 +7410,7 @@
           <a:p>
             <a:pPr algn="just">
               <a:lnSpc>
-                <a:spcPct val="125000"/>
+                <a:spcPct val="110000"/>
               </a:lnSpc>
               <a:spcBef>
                 <a:spcPts val="0"/>
@@ -7432,7 +7432,7 @@
           <a:p>
             <a:pPr algn="just">
               <a:lnSpc>
-                <a:spcPct val="125000"/>
+                <a:spcPct val="110000"/>
               </a:lnSpc>
               <a:spcBef>
                 <a:spcPts val="0"/>
@@ -7454,7 +7454,7 @@
           <a:p>
             <a:pPr algn="just">
               <a:lnSpc>
-                <a:spcPct val="125000"/>
+                <a:spcPct val="110000"/>
               </a:lnSpc>
               <a:spcBef>
                 <a:spcPts val="0"/>
@@ -7476,7 +7476,7 @@
           <a:p>
             <a:pPr algn="just">
               <a:lnSpc>
-                <a:spcPct val="125000"/>
+                <a:spcPct val="110000"/>
               </a:lnSpc>
               <a:spcBef>
                 <a:spcPts val="0"/>
@@ -7498,7 +7498,7 @@
           <a:p>
             <a:pPr algn="just">
               <a:lnSpc>
-                <a:spcPct val="125000"/>
+                <a:spcPct val="110000"/>
               </a:lnSpc>
               <a:spcBef>
                 <a:spcPts val="0"/>
@@ -7520,7 +7520,7 @@
           <a:p>
             <a:pPr algn="just">
               <a:lnSpc>
-                <a:spcPct val="125000"/>
+                <a:spcPct val="110000"/>
               </a:lnSpc>
               <a:spcBef>
                 <a:spcPts val="0"/>
@@ -7542,7 +7542,7 @@
           <a:p>
             <a:pPr algn="just">
               <a:lnSpc>
-                <a:spcPct val="125000"/>
+                <a:spcPct val="110000"/>
               </a:lnSpc>
               <a:spcBef>
                 <a:spcPts val="0"/>
@@ -7564,7 +7564,7 @@
           <a:p>
             <a:pPr algn="just">
               <a:lnSpc>
-                <a:spcPct val="125000"/>
+                <a:spcPct val="110000"/>
               </a:lnSpc>
               <a:spcBef>
                 <a:spcPts val="0"/>
@@ -7586,7 +7586,7 @@
           <a:p>
             <a:pPr algn="just">
               <a:lnSpc>
-                <a:spcPct val="125000"/>
+                <a:spcPct val="110000"/>
               </a:lnSpc>
               <a:spcBef>
                 <a:spcPts val="0"/>
@@ -7700,7 +7700,7 @@
           <a:p>
             <a:pPr algn="just">
               <a:lnSpc>
-                <a:spcPct val="125000"/>
+                <a:spcPct val="110000"/>
               </a:lnSpc>
               <a:spcBef>
                 <a:spcPts val="0"/>
@@ -7722,7 +7722,7 @@
           <a:p>
             <a:pPr algn="just">
               <a:lnSpc>
-                <a:spcPct val="125000"/>
+                <a:spcPct val="110000"/>
               </a:lnSpc>
               <a:spcBef>
                 <a:spcPts val="0"/>
@@ -7744,7 +7744,7 @@
           <a:p>
             <a:pPr algn="just">
               <a:lnSpc>
-                <a:spcPct val="125000"/>
+                <a:spcPct val="110000"/>
               </a:lnSpc>
               <a:spcBef>
                 <a:spcPts val="0"/>
@@ -7766,7 +7766,7 @@
           <a:p>
             <a:pPr algn="just">
               <a:lnSpc>
-                <a:spcPct val="125000"/>
+                <a:spcPct val="110000"/>
               </a:lnSpc>
               <a:spcBef>
                 <a:spcPts val="0"/>
@@ -7788,7 +7788,7 @@
           <a:p>
             <a:pPr algn="just">
               <a:lnSpc>
-                <a:spcPct val="125000"/>
+                <a:spcPct val="110000"/>
               </a:lnSpc>
               <a:spcBef>
                 <a:spcPts val="0"/>
@@ -7810,7 +7810,7 @@
           <a:p>
             <a:pPr algn="just">
               <a:lnSpc>
-                <a:spcPct val="125000"/>
+                <a:spcPct val="110000"/>
               </a:lnSpc>
               <a:spcBef>
                 <a:spcPts val="0"/>
@@ -7832,7 +7832,7 @@
           <a:p>
             <a:pPr algn="just">
               <a:lnSpc>
-                <a:spcPct val="125000"/>
+                <a:spcPct val="110000"/>
               </a:lnSpc>
               <a:spcBef>
                 <a:spcPts val="0"/>
@@ -7854,7 +7854,7 @@
           <a:p>
             <a:pPr algn="just">
               <a:lnSpc>
-                <a:spcPct val="125000"/>
+                <a:spcPct val="110000"/>
               </a:lnSpc>
               <a:spcBef>
                 <a:spcPts val="0"/>
@@ -7876,7 +7876,7 @@
           <a:p>
             <a:pPr algn="just">
               <a:lnSpc>
-                <a:spcPct val="125000"/>
+                <a:spcPct val="110000"/>
               </a:lnSpc>
               <a:spcBef>
                 <a:spcPts val="0"/>
@@ -7898,7 +7898,7 @@
           <a:p>
             <a:pPr algn="just">
               <a:lnSpc>
-                <a:spcPct val="125000"/>
+                <a:spcPct val="110000"/>
               </a:lnSpc>
               <a:spcBef>
                 <a:spcPts val="0"/>
@@ -8012,7 +8012,7 @@
           <a:p>
             <a:pPr algn="just">
               <a:lnSpc>
-                <a:spcPct val="125000"/>
+                <a:spcPct val="110000"/>
               </a:lnSpc>
               <a:spcBef>
                 <a:spcPts val="0"/>
@@ -8034,7 +8034,7 @@
           <a:p>
             <a:pPr algn="just">
               <a:lnSpc>
-                <a:spcPct val="125000"/>
+                <a:spcPct val="110000"/>
               </a:lnSpc>
               <a:spcBef>
                 <a:spcPts val="0"/>
@@ -8056,7 +8056,7 @@
           <a:p>
             <a:pPr algn="just">
               <a:lnSpc>
-                <a:spcPct val="125000"/>
+                <a:spcPct val="110000"/>
               </a:lnSpc>
               <a:spcBef>
                 <a:spcPts val="0"/>
@@ -8078,7 +8078,7 @@
           <a:p>
             <a:pPr algn="just">
               <a:lnSpc>
-                <a:spcPct val="125000"/>
+                <a:spcPct val="110000"/>
               </a:lnSpc>
               <a:spcBef>
                 <a:spcPts val="0"/>
@@ -8100,7 +8100,7 @@
           <a:p>
             <a:pPr algn="just">
               <a:lnSpc>
-                <a:spcPct val="125000"/>
+                <a:spcPct val="110000"/>
               </a:lnSpc>
               <a:spcBef>
                 <a:spcPts val="0"/>
@@ -8122,7 +8122,7 @@
           <a:p>
             <a:pPr algn="just">
               <a:lnSpc>
-                <a:spcPct val="125000"/>
+                <a:spcPct val="110000"/>
               </a:lnSpc>
               <a:spcBef>
                 <a:spcPts val="0"/>
@@ -8144,7 +8144,7 @@
           <a:p>
             <a:pPr algn="just">
               <a:lnSpc>
-                <a:spcPct val="125000"/>
+                <a:spcPct val="110000"/>
               </a:lnSpc>
               <a:spcBef>
                 <a:spcPts val="0"/>
@@ -8166,7 +8166,7 @@
           <a:p>
             <a:pPr algn="just">
               <a:lnSpc>
-                <a:spcPct val="125000"/>
+                <a:spcPct val="110000"/>
               </a:lnSpc>
               <a:spcBef>
                 <a:spcPts val="0"/>
@@ -8188,7 +8188,7 @@
           <a:p>
             <a:pPr algn="just">
               <a:lnSpc>
-                <a:spcPct val="125000"/>
+                <a:spcPct val="110000"/>
               </a:lnSpc>
               <a:spcBef>
                 <a:spcPts val="0"/>
@@ -8210,7 +8210,7 @@
           <a:p>
             <a:pPr algn="just">
               <a:lnSpc>
-                <a:spcPct val="125000"/>
+                <a:spcPct val="110000"/>
               </a:lnSpc>
               <a:spcBef>
                 <a:spcPts val="0"/>
@@ -8324,7 +8324,7 @@
           <a:p>
             <a:pPr algn="just">
               <a:lnSpc>
-                <a:spcPct val="125000"/>
+                <a:spcPct val="110000"/>
               </a:lnSpc>
               <a:spcBef>
                 <a:spcPts val="0"/>
@@ -8346,7 +8346,7 @@
           <a:p>
             <a:pPr algn="just">
               <a:lnSpc>
-                <a:spcPct val="125000"/>
+                <a:spcPct val="110000"/>
               </a:lnSpc>
               <a:spcBef>
                 <a:spcPts val="0"/>
@@ -8368,7 +8368,7 @@
           <a:p>
             <a:pPr algn="just">
               <a:lnSpc>
-                <a:spcPct val="125000"/>
+                <a:spcPct val="110000"/>
               </a:lnSpc>
               <a:spcBef>
                 <a:spcPts val="0"/>
@@ -8390,7 +8390,7 @@
           <a:p>
             <a:pPr algn="just">
               <a:lnSpc>
-                <a:spcPct val="125000"/>
+                <a:spcPct val="110000"/>
               </a:lnSpc>
               <a:spcBef>
                 <a:spcPts val="0"/>
@@ -8412,7 +8412,7 @@
           <a:p>
             <a:pPr algn="just">
               <a:lnSpc>
-                <a:spcPct val="125000"/>
+                <a:spcPct val="110000"/>
               </a:lnSpc>
               <a:spcBef>
                 <a:spcPts val="0"/>
@@ -8434,7 +8434,7 @@
           <a:p>
             <a:pPr algn="just">
               <a:lnSpc>
-                <a:spcPct val="125000"/>
+                <a:spcPct val="110000"/>
               </a:lnSpc>
               <a:spcBef>
                 <a:spcPts val="0"/>
@@ -8456,7 +8456,7 @@
           <a:p>
             <a:pPr algn="just">
               <a:lnSpc>
-                <a:spcPct val="125000"/>
+                <a:spcPct val="110000"/>
               </a:lnSpc>
               <a:spcBef>
                 <a:spcPts val="0"/>
@@ -8478,7 +8478,7 @@
           <a:p>
             <a:pPr algn="just">
               <a:lnSpc>
-                <a:spcPct val="125000"/>
+                <a:spcPct val="110000"/>
               </a:lnSpc>
               <a:spcBef>
                 <a:spcPts val="0"/>
@@ -8500,7 +8500,7 @@
           <a:p>
             <a:pPr algn="just">
               <a:lnSpc>
-                <a:spcPct val="125000"/>
+                <a:spcPct val="110000"/>
               </a:lnSpc>
               <a:spcBef>
                 <a:spcPts val="0"/>
@@ -8522,7 +8522,7 @@
           <a:p>
             <a:pPr algn="just">
               <a:lnSpc>
-                <a:spcPct val="125000"/>
+                <a:spcPct val="110000"/>
               </a:lnSpc>
               <a:spcBef>
                 <a:spcPts val="0"/>
@@ -8636,7 +8636,7 @@
           <a:p>
             <a:pPr algn="just">
               <a:lnSpc>
-                <a:spcPct val="125000"/>
+                <a:spcPct val="110000"/>
               </a:lnSpc>
               <a:spcBef>
                 <a:spcPts val="0"/>
@@ -8658,7 +8658,7 @@
           <a:p>
             <a:pPr algn="just">
               <a:lnSpc>
-                <a:spcPct val="125000"/>
+                <a:spcPct val="110000"/>
               </a:lnSpc>
               <a:spcBef>
                 <a:spcPts val="0"/>
@@ -8680,7 +8680,7 @@
           <a:p>
             <a:pPr algn="just">
               <a:lnSpc>
-                <a:spcPct val="125000"/>
+                <a:spcPct val="110000"/>
               </a:lnSpc>
               <a:spcBef>
                 <a:spcPts val="0"/>
@@ -8702,7 +8702,7 @@
           <a:p>
             <a:pPr algn="just">
               <a:lnSpc>
-                <a:spcPct val="125000"/>
+                <a:spcPct val="110000"/>
               </a:lnSpc>
               <a:spcBef>
                 <a:spcPts val="0"/>
@@ -8724,7 +8724,7 @@
           <a:p>
             <a:pPr algn="just">
               <a:lnSpc>
-                <a:spcPct val="125000"/>
+                <a:spcPct val="110000"/>
               </a:lnSpc>
               <a:spcBef>
                 <a:spcPts val="0"/>
@@ -8746,7 +8746,7 @@
           <a:p>
             <a:pPr algn="just">
               <a:lnSpc>
-                <a:spcPct val="125000"/>
+                <a:spcPct val="110000"/>
               </a:lnSpc>
               <a:spcBef>
                 <a:spcPts val="0"/>
@@ -8768,7 +8768,7 @@
           <a:p>
             <a:pPr algn="just">
               <a:lnSpc>
-                <a:spcPct val="125000"/>
+                <a:spcPct val="110000"/>
               </a:lnSpc>
               <a:spcBef>
                 <a:spcPts val="0"/>
@@ -8790,7 +8790,7 @@
           <a:p>
             <a:pPr algn="just">
               <a:lnSpc>
-                <a:spcPct val="125000"/>
+                <a:spcPct val="110000"/>
               </a:lnSpc>
               <a:spcBef>
                 <a:spcPts val="0"/>
@@ -8812,7 +8812,7 @@
           <a:p>
             <a:pPr algn="just">
               <a:lnSpc>
-                <a:spcPct val="125000"/>
+                <a:spcPct val="110000"/>
               </a:lnSpc>
               <a:spcBef>
                 <a:spcPts val="0"/>
@@ -8834,7 +8834,7 @@
           <a:p>
             <a:pPr algn="just">
               <a:lnSpc>
-                <a:spcPct val="125000"/>
+                <a:spcPct val="110000"/>
               </a:lnSpc>
               <a:spcBef>
                 <a:spcPts val="0"/>
@@ -8948,7 +8948,7 @@
           <a:p>
             <a:pPr algn="just">
               <a:lnSpc>
-                <a:spcPct val="125000"/>
+                <a:spcPct val="110000"/>
               </a:lnSpc>
               <a:spcBef>
                 <a:spcPts val="0"/>
@@ -8970,7 +8970,7 @@
           <a:p>
             <a:pPr algn="just">
               <a:lnSpc>
-                <a:spcPct val="125000"/>
+                <a:spcPct val="110000"/>
               </a:lnSpc>
               <a:spcBef>
                 <a:spcPts val="0"/>
@@ -8992,7 +8992,7 @@
           <a:p>
             <a:pPr algn="just">
               <a:lnSpc>
-                <a:spcPct val="125000"/>
+                <a:spcPct val="110000"/>
               </a:lnSpc>
               <a:spcBef>
                 <a:spcPts val="0"/>
@@ -9014,7 +9014,7 @@
           <a:p>
             <a:pPr algn="just">
               <a:lnSpc>
-                <a:spcPct val="125000"/>
+                <a:spcPct val="110000"/>
               </a:lnSpc>
               <a:spcBef>
                 <a:spcPts val="0"/>
@@ -9036,7 +9036,7 @@
           <a:p>
             <a:pPr algn="just">
               <a:lnSpc>
-                <a:spcPct val="125000"/>
+                <a:spcPct val="110000"/>
               </a:lnSpc>
               <a:spcBef>
                 <a:spcPts val="0"/>
@@ -9058,7 +9058,7 @@
           <a:p>
             <a:pPr algn="just">
               <a:lnSpc>
-                <a:spcPct val="125000"/>
+                <a:spcPct val="110000"/>
               </a:lnSpc>
               <a:spcBef>
                 <a:spcPts val="0"/>
@@ -9080,7 +9080,7 @@
           <a:p>
             <a:pPr algn="just">
               <a:lnSpc>
-                <a:spcPct val="125000"/>
+                <a:spcPct val="110000"/>
               </a:lnSpc>
               <a:spcBef>
                 <a:spcPts val="0"/>
@@ -9102,7 +9102,7 @@
           <a:p>
             <a:pPr algn="just">
               <a:lnSpc>
-                <a:spcPct val="125000"/>
+                <a:spcPct val="110000"/>
               </a:lnSpc>
               <a:spcBef>
                 <a:spcPts val="0"/>
@@ -9124,7 +9124,7 @@
           <a:p>
             <a:pPr algn="just">
               <a:lnSpc>
-                <a:spcPct val="125000"/>
+                <a:spcPct val="110000"/>
               </a:lnSpc>
               <a:spcBef>
                 <a:spcPts val="0"/>
@@ -9238,7 +9238,7 @@
           <a:p>
             <a:pPr algn="just">
               <a:lnSpc>
-                <a:spcPct val="125000"/>
+                <a:spcPct val="110000"/>
               </a:lnSpc>
               <a:spcBef>
                 <a:spcPts val="0"/>
@@ -9260,7 +9260,7 @@
           <a:p>
             <a:pPr algn="just">
               <a:lnSpc>
-                <a:spcPct val="125000"/>
+                <a:spcPct val="110000"/>
               </a:lnSpc>
               <a:spcBef>
                 <a:spcPts val="0"/>
@@ -9282,7 +9282,7 @@
           <a:p>
             <a:pPr algn="just">
               <a:lnSpc>
-                <a:spcPct val="125000"/>
+                <a:spcPct val="110000"/>
               </a:lnSpc>
               <a:spcBef>
                 <a:spcPts val="0"/>
@@ -9304,7 +9304,7 @@
           <a:p>
             <a:pPr algn="just">
               <a:lnSpc>
-                <a:spcPct val="125000"/>
+                <a:spcPct val="110000"/>
               </a:lnSpc>
               <a:spcBef>
                 <a:spcPts val="0"/>
@@ -9326,7 +9326,7 @@
           <a:p>
             <a:pPr algn="just">
               <a:lnSpc>
-                <a:spcPct val="125000"/>
+                <a:spcPct val="110000"/>
               </a:lnSpc>
               <a:spcBef>
                 <a:spcPts val="0"/>
@@ -9348,7 +9348,7 @@
           <a:p>
             <a:pPr algn="just">
               <a:lnSpc>
-                <a:spcPct val="125000"/>
+                <a:spcPct val="110000"/>
               </a:lnSpc>
               <a:spcBef>
                 <a:spcPts val="0"/>
@@ -9370,7 +9370,7 @@
           <a:p>
             <a:pPr algn="just">
               <a:lnSpc>
-                <a:spcPct val="125000"/>
+                <a:spcPct val="110000"/>
               </a:lnSpc>
               <a:spcBef>
                 <a:spcPts val="0"/>
@@ -9392,7 +9392,7 @@
           <a:p>
             <a:pPr algn="just">
               <a:lnSpc>
-                <a:spcPct val="125000"/>
+                <a:spcPct val="110000"/>
               </a:lnSpc>
               <a:spcBef>
                 <a:spcPts val="0"/>
@@ -9414,7 +9414,7 @@
           <a:p>
             <a:pPr algn="just">
               <a:lnSpc>
-                <a:spcPct val="125000"/>
+                <a:spcPct val="110000"/>
               </a:lnSpc>
               <a:spcBef>
                 <a:spcPts val="0"/>
@@ -9436,7 +9436,7 @@
           <a:p>
             <a:pPr algn="just">
               <a:lnSpc>
-                <a:spcPct val="125000"/>
+                <a:spcPct val="110000"/>
               </a:lnSpc>
               <a:spcBef>
                 <a:spcPts val="0"/>
@@ -9458,7 +9458,7 @@
           <a:p>
             <a:pPr algn="just">
               <a:lnSpc>
-                <a:spcPct val="125000"/>
+                <a:spcPct val="110000"/>
               </a:lnSpc>
               <a:spcBef>
                 <a:spcPts val="0"/>
@@ -9572,7 +9572,7 @@
           <a:p>
             <a:pPr algn="just">
               <a:lnSpc>
-                <a:spcPct val="125000"/>
+                <a:spcPct val="110000"/>
               </a:lnSpc>
               <a:spcBef>
                 <a:spcPts val="0"/>
@@ -9594,7 +9594,7 @@
           <a:p>
             <a:pPr algn="just">
               <a:lnSpc>
-                <a:spcPct val="125000"/>
+                <a:spcPct val="110000"/>
               </a:lnSpc>
               <a:spcBef>
                 <a:spcPts val="0"/>
@@ -9616,7 +9616,7 @@
           <a:p>
             <a:pPr algn="just">
               <a:lnSpc>
-                <a:spcPct val="125000"/>
+                <a:spcPct val="110000"/>
               </a:lnSpc>
               <a:spcBef>
                 <a:spcPts val="0"/>
@@ -9638,7 +9638,7 @@
           <a:p>
             <a:pPr algn="just">
               <a:lnSpc>
-                <a:spcPct val="125000"/>
+                <a:spcPct val="110000"/>
               </a:lnSpc>
               <a:spcBef>
                 <a:spcPts val="0"/>
@@ -9660,7 +9660,7 @@
           <a:p>
             <a:pPr algn="just">
               <a:lnSpc>
-                <a:spcPct val="125000"/>
+                <a:spcPct val="110000"/>
               </a:lnSpc>
               <a:spcBef>
                 <a:spcPts val="0"/>
@@ -9682,7 +9682,7 @@
           <a:p>
             <a:pPr algn="just">
               <a:lnSpc>
-                <a:spcPct val="125000"/>
+                <a:spcPct val="110000"/>
               </a:lnSpc>
               <a:spcBef>
                 <a:spcPts val="0"/>
@@ -9704,7 +9704,7 @@
           <a:p>
             <a:pPr algn="just">
               <a:lnSpc>
-                <a:spcPct val="125000"/>
+                <a:spcPct val="110000"/>
               </a:lnSpc>
               <a:spcBef>
                 <a:spcPts val="0"/>
@@ -9726,7 +9726,7 @@
           <a:p>
             <a:pPr algn="just">
               <a:lnSpc>
-                <a:spcPct val="125000"/>
+                <a:spcPct val="110000"/>
               </a:lnSpc>
               <a:spcBef>
                 <a:spcPts val="0"/>
@@ -9748,7 +9748,7 @@
           <a:p>
             <a:pPr algn="just">
               <a:lnSpc>
-                <a:spcPct val="125000"/>
+                <a:spcPct val="110000"/>
               </a:lnSpc>
               <a:spcBef>
                 <a:spcPts val="0"/>
@@ -9862,7 +9862,7 @@
           <a:p>
             <a:pPr algn="just">
               <a:lnSpc>
-                <a:spcPct val="125000"/>
+                <a:spcPct val="110000"/>
               </a:lnSpc>
               <a:spcBef>
                 <a:spcPts val="0"/>
@@ -9884,7 +9884,7 @@
           <a:p>
             <a:pPr algn="just">
               <a:lnSpc>
-                <a:spcPct val="125000"/>
+                <a:spcPct val="110000"/>
               </a:lnSpc>
               <a:spcBef>
                 <a:spcPts val="0"/>
@@ -9906,7 +9906,7 @@
           <a:p>
             <a:pPr algn="just">
               <a:lnSpc>
-                <a:spcPct val="125000"/>
+                <a:spcPct val="110000"/>
               </a:lnSpc>
               <a:spcBef>
                 <a:spcPts val="0"/>
@@ -9928,7 +9928,7 @@
           <a:p>
             <a:pPr algn="just">
               <a:lnSpc>
-                <a:spcPct val="125000"/>
+                <a:spcPct val="110000"/>
               </a:lnSpc>
               <a:spcBef>
                 <a:spcPts val="0"/>
@@ -9950,7 +9950,7 @@
           <a:p>
             <a:pPr algn="just">
               <a:lnSpc>
-                <a:spcPct val="125000"/>
+                <a:spcPct val="110000"/>
               </a:lnSpc>
               <a:spcBef>
                 <a:spcPts val="0"/>
@@ -9972,7 +9972,7 @@
           <a:p>
             <a:pPr algn="just">
               <a:lnSpc>
-                <a:spcPct val="125000"/>
+                <a:spcPct val="110000"/>
               </a:lnSpc>
               <a:spcBef>
                 <a:spcPts val="0"/>
@@ -9994,7 +9994,7 @@
           <a:p>
             <a:pPr algn="just">
               <a:lnSpc>
-                <a:spcPct val="125000"/>
+                <a:spcPct val="110000"/>
               </a:lnSpc>
               <a:spcBef>
                 <a:spcPts val="0"/>
@@ -10016,7 +10016,7 @@
           <a:p>
             <a:pPr algn="just">
               <a:lnSpc>
-                <a:spcPct val="125000"/>
+                <a:spcPct val="110000"/>
               </a:lnSpc>
               <a:spcBef>
                 <a:spcPts val="0"/>
@@ -10038,7 +10038,7 @@
           <a:p>
             <a:pPr algn="just">
               <a:lnSpc>
-                <a:spcPct val="125000"/>
+                <a:spcPct val="110000"/>
               </a:lnSpc>
               <a:spcBef>
                 <a:spcPts val="0"/>
@@ -10152,7 +10152,7 @@
           <a:p>
             <a:pPr algn="just">
               <a:lnSpc>
-                <a:spcPct val="125000"/>
+                <a:spcPct val="110000"/>
               </a:lnSpc>
               <a:spcBef>
                 <a:spcPts val="0"/>
@@ -10174,7 +10174,7 @@
           <a:p>
             <a:pPr algn="just">
               <a:lnSpc>
-                <a:spcPct val="125000"/>
+                <a:spcPct val="110000"/>
               </a:lnSpc>
               <a:spcBef>
                 <a:spcPts val="0"/>
@@ -10196,7 +10196,7 @@
           <a:p>
             <a:pPr algn="just">
               <a:lnSpc>
-                <a:spcPct val="125000"/>
+                <a:spcPct val="110000"/>
               </a:lnSpc>
               <a:spcBef>
                 <a:spcPts val="0"/>
@@ -10218,7 +10218,7 @@
           <a:p>
             <a:pPr algn="just">
               <a:lnSpc>
-                <a:spcPct val="125000"/>
+                <a:spcPct val="110000"/>
               </a:lnSpc>
               <a:spcBef>
                 <a:spcPts val="0"/>
@@ -10240,7 +10240,7 @@
           <a:p>
             <a:pPr algn="just">
               <a:lnSpc>
-                <a:spcPct val="125000"/>
+                <a:spcPct val="110000"/>
               </a:lnSpc>
               <a:spcBef>
                 <a:spcPts val="0"/>
@@ -10262,7 +10262,7 @@
           <a:p>
             <a:pPr algn="just">
               <a:lnSpc>
-                <a:spcPct val="125000"/>
+                <a:spcPct val="110000"/>
               </a:lnSpc>
               <a:spcBef>
                 <a:spcPts val="0"/>
@@ -10284,7 +10284,7 @@
           <a:p>
             <a:pPr algn="just">
               <a:lnSpc>
-                <a:spcPct val="125000"/>
+                <a:spcPct val="110000"/>
               </a:lnSpc>
               <a:spcBef>
                 <a:spcPts val="0"/>
@@ -10306,7 +10306,7 @@
           <a:p>
             <a:pPr algn="just">
               <a:lnSpc>
-                <a:spcPct val="125000"/>
+                <a:spcPct val="110000"/>
               </a:lnSpc>
               <a:spcBef>
                 <a:spcPts val="0"/>
@@ -10328,7 +10328,7 @@
           <a:p>
             <a:pPr algn="just">
               <a:lnSpc>
-                <a:spcPct val="125000"/>
+                <a:spcPct val="110000"/>
               </a:lnSpc>
               <a:spcBef>
                 <a:spcPts val="0"/>
@@ -10350,7 +10350,7 @@
           <a:p>
             <a:pPr algn="just">
               <a:lnSpc>
-                <a:spcPct val="125000"/>
+                <a:spcPct val="110000"/>
               </a:lnSpc>
               <a:spcBef>
                 <a:spcPts val="0"/>
@@ -10464,7 +10464,7 @@
           <a:p>
             <a:pPr algn="just">
               <a:lnSpc>
-                <a:spcPct val="125000"/>
+                <a:spcPct val="110000"/>
               </a:lnSpc>
               <a:spcBef>
                 <a:spcPts val="0"/>
@@ -10486,7 +10486,7 @@
           <a:p>
             <a:pPr algn="just">
               <a:lnSpc>
-                <a:spcPct val="125000"/>
+                <a:spcPct val="110000"/>
               </a:lnSpc>
               <a:spcBef>
                 <a:spcPts val="0"/>
@@ -10508,7 +10508,7 @@
           <a:p>
             <a:pPr algn="just">
               <a:lnSpc>
-                <a:spcPct val="125000"/>
+                <a:spcPct val="110000"/>
               </a:lnSpc>
               <a:spcBef>
                 <a:spcPts val="0"/>
@@ -10530,7 +10530,7 @@
           <a:p>
             <a:pPr algn="just">
               <a:lnSpc>
-                <a:spcPct val="125000"/>
+                <a:spcPct val="110000"/>
               </a:lnSpc>
               <a:spcBef>
                 <a:spcPts val="0"/>
@@ -10552,7 +10552,7 @@
           <a:p>
             <a:pPr algn="just">
               <a:lnSpc>
-                <a:spcPct val="125000"/>
+                <a:spcPct val="110000"/>
               </a:lnSpc>
               <a:spcBef>
                 <a:spcPts val="0"/>
@@ -10574,7 +10574,7 @@
           <a:p>
             <a:pPr algn="just">
               <a:lnSpc>
-                <a:spcPct val="125000"/>
+                <a:spcPct val="110000"/>
               </a:lnSpc>
               <a:spcBef>
                 <a:spcPts val="0"/>
@@ -10596,7 +10596,7 @@
           <a:p>
             <a:pPr algn="just">
               <a:lnSpc>
-                <a:spcPct val="125000"/>
+                <a:spcPct val="110000"/>
               </a:lnSpc>
               <a:spcBef>
                 <a:spcPts val="0"/>
@@ -10618,7 +10618,7 @@
           <a:p>
             <a:pPr algn="just">
               <a:lnSpc>
-                <a:spcPct val="125000"/>
+                <a:spcPct val="110000"/>
               </a:lnSpc>
               <a:spcBef>
                 <a:spcPts val="0"/>
@@ -10640,7 +10640,7 @@
           <a:p>
             <a:pPr algn="just">
               <a:lnSpc>
-                <a:spcPct val="125000"/>
+                <a:spcPct val="110000"/>
               </a:lnSpc>
               <a:spcBef>
                 <a:spcPts val="0"/>
@@ -10662,7 +10662,7 @@
           <a:p>
             <a:pPr algn="just">
               <a:lnSpc>
-                <a:spcPct val="125000"/>
+                <a:spcPct val="110000"/>
               </a:lnSpc>
               <a:spcBef>
                 <a:spcPts val="0"/>
@@ -10776,7 +10776,7 @@
           <a:p>
             <a:pPr algn="just">
               <a:lnSpc>
-                <a:spcPct val="125000"/>
+                <a:spcPct val="110000"/>
               </a:lnSpc>
               <a:spcBef>
                 <a:spcPts val="0"/>
@@ -10798,7 +10798,7 @@
           <a:p>
             <a:pPr algn="just">
               <a:lnSpc>
-                <a:spcPct val="125000"/>
+                <a:spcPct val="110000"/>
               </a:lnSpc>
               <a:spcBef>
                 <a:spcPts val="0"/>
@@ -10820,7 +10820,7 @@
           <a:p>
             <a:pPr algn="just">
               <a:lnSpc>
-                <a:spcPct val="125000"/>
+                <a:spcPct val="110000"/>
               </a:lnSpc>
               <a:spcBef>
                 <a:spcPts val="0"/>
@@ -10842,7 +10842,7 @@
           <a:p>
             <a:pPr algn="just">
               <a:lnSpc>
-                <a:spcPct val="125000"/>
+                <a:spcPct val="110000"/>
               </a:lnSpc>
               <a:spcBef>
                 <a:spcPts val="0"/>
@@ -10864,7 +10864,7 @@
           <a:p>
             <a:pPr algn="just">
               <a:lnSpc>
-                <a:spcPct val="125000"/>
+                <a:spcPct val="110000"/>
               </a:lnSpc>
               <a:spcBef>
                 <a:spcPts val="0"/>
@@ -10886,7 +10886,7 @@
           <a:p>
             <a:pPr algn="just">
               <a:lnSpc>
-                <a:spcPct val="125000"/>
+                <a:spcPct val="110000"/>
               </a:lnSpc>
               <a:spcBef>
                 <a:spcPts val="0"/>
@@ -10908,7 +10908,7 @@
           <a:p>
             <a:pPr algn="just">
               <a:lnSpc>
-                <a:spcPct val="125000"/>
+                <a:spcPct val="110000"/>
               </a:lnSpc>
               <a:spcBef>
                 <a:spcPts val="0"/>
@@ -10930,7 +10930,7 @@
           <a:p>
             <a:pPr algn="just">
               <a:lnSpc>
-                <a:spcPct val="125000"/>
+                <a:spcPct val="110000"/>
               </a:lnSpc>
               <a:spcBef>
                 <a:spcPts val="0"/>
@@ -10952,7 +10952,7 @@
           <a:p>
             <a:pPr algn="just">
               <a:lnSpc>
-                <a:spcPct val="125000"/>
+                <a:spcPct val="110000"/>
               </a:lnSpc>
               <a:spcBef>
                 <a:spcPts val="0"/>
@@ -10974,7 +10974,7 @@
           <a:p>
             <a:pPr algn="just">
               <a:lnSpc>
-                <a:spcPct val="125000"/>
+                <a:spcPct val="110000"/>
               </a:lnSpc>
               <a:spcBef>
                 <a:spcPts val="0"/>
@@ -11088,7 +11088,7 @@
           <a:p>
             <a:pPr algn="just">
               <a:lnSpc>
-                <a:spcPct val="125000"/>
+                <a:spcPct val="110000"/>
               </a:lnSpc>
               <a:spcBef>
                 <a:spcPts val="0"/>
@@ -11110,7 +11110,7 @@
           <a:p>
             <a:pPr algn="just">
               <a:lnSpc>
-                <a:spcPct val="125000"/>
+                <a:spcPct val="110000"/>
               </a:lnSpc>
               <a:spcBef>
                 <a:spcPts val="0"/>
@@ -11132,7 +11132,7 @@
           <a:p>
             <a:pPr algn="just">
               <a:lnSpc>
-                <a:spcPct val="125000"/>
+                <a:spcPct val="110000"/>
               </a:lnSpc>
               <a:spcBef>
                 <a:spcPts val="0"/>
@@ -11154,7 +11154,7 @@
           <a:p>
             <a:pPr algn="just">
               <a:lnSpc>
-                <a:spcPct val="125000"/>
+                <a:spcPct val="110000"/>
               </a:lnSpc>
               <a:spcBef>
                 <a:spcPts val="0"/>
@@ -11176,7 +11176,7 @@
           <a:p>
             <a:pPr algn="just">
               <a:lnSpc>
-                <a:spcPct val="125000"/>
+                <a:spcPct val="110000"/>
               </a:lnSpc>
               <a:spcBef>
                 <a:spcPts val="0"/>
@@ -11198,7 +11198,7 @@
           <a:p>
             <a:pPr algn="just">
               <a:lnSpc>
-                <a:spcPct val="125000"/>
+                <a:spcPct val="110000"/>
               </a:lnSpc>
               <a:spcBef>
                 <a:spcPts val="0"/>
@@ -11220,7 +11220,7 @@
           <a:p>
             <a:pPr algn="just">
               <a:lnSpc>
-                <a:spcPct val="125000"/>
+                <a:spcPct val="110000"/>
               </a:lnSpc>
               <a:spcBef>
                 <a:spcPts val="0"/>
@@ -11242,7 +11242,7 @@
           <a:p>
             <a:pPr algn="just">
               <a:lnSpc>
-                <a:spcPct val="125000"/>
+                <a:spcPct val="110000"/>
               </a:lnSpc>
               <a:spcBef>
                 <a:spcPts val="0"/>
@@ -11264,7 +11264,7 @@
           <a:p>
             <a:pPr algn="just">
               <a:lnSpc>
-                <a:spcPct val="125000"/>
+                <a:spcPct val="110000"/>
               </a:lnSpc>
               <a:spcBef>
                 <a:spcPts val="0"/>
@@ -11286,7 +11286,7 @@
           <a:p>
             <a:pPr algn="just">
               <a:lnSpc>
-                <a:spcPct val="125000"/>
+                <a:spcPct val="110000"/>
               </a:lnSpc>
               <a:spcBef>
                 <a:spcPts val="0"/>
@@ -11400,7 +11400,7 @@
           <a:p>
             <a:pPr algn="just">
               <a:lnSpc>
-                <a:spcPct val="125000"/>
+                <a:spcPct val="110000"/>
               </a:lnSpc>
               <a:spcBef>
                 <a:spcPts val="0"/>
@@ -11422,7 +11422,7 @@
           <a:p>
             <a:pPr algn="just">
               <a:lnSpc>
-                <a:spcPct val="125000"/>
+                <a:spcPct val="110000"/>
               </a:lnSpc>
               <a:spcBef>
                 <a:spcPts val="0"/>
@@ -11444,7 +11444,7 @@
           <a:p>
             <a:pPr algn="just">
               <a:lnSpc>
-                <a:spcPct val="125000"/>
+                <a:spcPct val="110000"/>
               </a:lnSpc>
               <a:spcBef>
                 <a:spcPts val="0"/>
@@ -11466,7 +11466,7 @@
           <a:p>
             <a:pPr algn="just">
               <a:lnSpc>
-                <a:spcPct val="125000"/>
+                <a:spcPct val="110000"/>
               </a:lnSpc>
               <a:spcBef>
                 <a:spcPts val="0"/>
@@ -11488,7 +11488,7 @@
           <a:p>
             <a:pPr algn="just">
               <a:lnSpc>
-                <a:spcPct val="125000"/>
+                <a:spcPct val="110000"/>
               </a:lnSpc>
               <a:spcBef>
                 <a:spcPts val="0"/>
@@ -11510,7 +11510,7 @@
           <a:p>
             <a:pPr algn="just">
               <a:lnSpc>
-                <a:spcPct val="125000"/>
+                <a:spcPct val="110000"/>
               </a:lnSpc>
               <a:spcBef>
                 <a:spcPts val="0"/>
@@ -11532,7 +11532,7 @@
           <a:p>
             <a:pPr algn="just">
               <a:lnSpc>
-                <a:spcPct val="125000"/>
+                <a:spcPct val="110000"/>
               </a:lnSpc>
               <a:spcBef>
                 <a:spcPts val="0"/>
@@ -11554,7 +11554,7 @@
           <a:p>
             <a:pPr algn="just">
               <a:lnSpc>
-                <a:spcPct val="125000"/>
+                <a:spcPct val="110000"/>
               </a:lnSpc>
               <a:spcBef>
                 <a:spcPts val="0"/>
@@ -11576,7 +11576,7 @@
           <a:p>
             <a:pPr algn="just">
               <a:lnSpc>
-                <a:spcPct val="125000"/>
+                <a:spcPct val="110000"/>
               </a:lnSpc>
               <a:spcBef>
                 <a:spcPts val="0"/>
@@ -11598,7 +11598,7 @@
           <a:p>
             <a:pPr algn="just">
               <a:lnSpc>
-                <a:spcPct val="125000"/>
+                <a:spcPct val="110000"/>
               </a:lnSpc>
               <a:spcBef>
                 <a:spcPts val="0"/>
@@ -11620,7 +11620,7 @@
           <a:p>
             <a:pPr algn="just">
               <a:lnSpc>
-                <a:spcPct val="125000"/>
+                <a:spcPct val="110000"/>
               </a:lnSpc>
               <a:spcBef>
                 <a:spcPts val="0"/>
@@ -11734,7 +11734,7 @@
           <a:p>
             <a:pPr algn="just">
               <a:lnSpc>
-                <a:spcPct val="125000"/>
+                <a:spcPct val="110000"/>
               </a:lnSpc>
               <a:spcBef>
                 <a:spcPts val="0"/>
@@ -11756,7 +11756,7 @@
           <a:p>
             <a:pPr algn="just">
               <a:lnSpc>
-                <a:spcPct val="125000"/>
+                <a:spcPct val="110000"/>
               </a:lnSpc>
               <a:spcBef>
                 <a:spcPts val="0"/>
@@ -11778,7 +11778,7 @@
           <a:p>
             <a:pPr algn="just">
               <a:lnSpc>
-                <a:spcPct val="125000"/>
+                <a:spcPct val="110000"/>
               </a:lnSpc>
               <a:spcBef>
                 <a:spcPts val="0"/>
@@ -11800,7 +11800,7 @@
           <a:p>
             <a:pPr algn="just">
               <a:lnSpc>
-                <a:spcPct val="125000"/>
+                <a:spcPct val="110000"/>
               </a:lnSpc>
               <a:spcBef>
                 <a:spcPts val="0"/>
@@ -11822,7 +11822,7 @@
           <a:p>
             <a:pPr algn="just">
               <a:lnSpc>
-                <a:spcPct val="125000"/>
+                <a:spcPct val="110000"/>
               </a:lnSpc>
               <a:spcBef>
                 <a:spcPts val="0"/>
@@ -11844,7 +11844,7 @@
           <a:p>
             <a:pPr algn="just">
               <a:lnSpc>
-                <a:spcPct val="125000"/>
+                <a:spcPct val="110000"/>
               </a:lnSpc>
               <a:spcBef>
                 <a:spcPts val="0"/>
@@ -11866,7 +11866,7 @@
           <a:p>
             <a:pPr algn="just">
               <a:lnSpc>
-                <a:spcPct val="125000"/>
+                <a:spcPct val="110000"/>
               </a:lnSpc>
               <a:spcBef>
                 <a:spcPts val="0"/>
@@ -11888,7 +11888,7 @@
           <a:p>
             <a:pPr algn="just">
               <a:lnSpc>
-                <a:spcPct val="125000"/>
+                <a:spcPct val="110000"/>
               </a:lnSpc>
               <a:spcBef>
                 <a:spcPts val="0"/>
@@ -11910,7 +11910,7 @@
           <a:p>
             <a:pPr algn="just">
               <a:lnSpc>
-                <a:spcPct val="125000"/>
+                <a:spcPct val="110000"/>
               </a:lnSpc>
               <a:spcBef>
                 <a:spcPts val="0"/>
@@ -11932,7 +11932,7 @@
           <a:p>
             <a:pPr algn="just">
               <a:lnSpc>
-                <a:spcPct val="125000"/>
+                <a:spcPct val="110000"/>
               </a:lnSpc>
               <a:spcBef>
                 <a:spcPts val="0"/>
@@ -12046,7 +12046,7 @@
           <a:p>
             <a:pPr algn="just">
               <a:lnSpc>
-                <a:spcPct val="125000"/>
+                <a:spcPct val="110000"/>
               </a:lnSpc>
               <a:spcBef>
                 <a:spcPts val="0"/>
@@ -12068,7 +12068,7 @@
           <a:p>
             <a:pPr algn="just">
               <a:lnSpc>
-                <a:spcPct val="125000"/>
+                <a:spcPct val="110000"/>
               </a:lnSpc>
               <a:spcBef>
                 <a:spcPts val="0"/>
@@ -12090,7 +12090,7 @@
           <a:p>
             <a:pPr algn="just">
               <a:lnSpc>
-                <a:spcPct val="125000"/>
+                <a:spcPct val="110000"/>
               </a:lnSpc>
               <a:spcBef>
                 <a:spcPts val="0"/>
@@ -12112,7 +12112,7 @@
           <a:p>
             <a:pPr algn="just">
               <a:lnSpc>
-                <a:spcPct val="125000"/>
+                <a:spcPct val="110000"/>
               </a:lnSpc>
               <a:spcBef>
                 <a:spcPts val="0"/>
@@ -12134,7 +12134,7 @@
           <a:p>
             <a:pPr algn="just">
               <a:lnSpc>
-                <a:spcPct val="125000"/>
+                <a:spcPct val="110000"/>
               </a:lnSpc>
               <a:spcBef>
                 <a:spcPts val="0"/>
@@ -12156,7 +12156,7 @@
           <a:p>
             <a:pPr algn="just">
               <a:lnSpc>
-                <a:spcPct val="125000"/>
+                <a:spcPct val="110000"/>
               </a:lnSpc>
               <a:spcBef>
                 <a:spcPts val="0"/>
@@ -12178,7 +12178,7 @@
           <a:p>
             <a:pPr algn="just">
               <a:lnSpc>
-                <a:spcPct val="125000"/>
+                <a:spcPct val="110000"/>
               </a:lnSpc>
               <a:spcBef>
                 <a:spcPts val="0"/>
@@ -12200,7 +12200,7 @@
           <a:p>
             <a:pPr algn="just">
               <a:lnSpc>
-                <a:spcPct val="125000"/>
+                <a:spcPct val="110000"/>
               </a:lnSpc>
               <a:spcBef>
                 <a:spcPts val="0"/>
@@ -12222,7 +12222,7 @@
           <a:p>
             <a:pPr algn="just">
               <a:lnSpc>
-                <a:spcPct val="125000"/>
+                <a:spcPct val="110000"/>
               </a:lnSpc>
               <a:spcBef>
                 <a:spcPts val="0"/>
@@ -12336,7 +12336,7 @@
           <a:p>
             <a:pPr algn="just">
               <a:lnSpc>
-                <a:spcPct val="125000"/>
+                <a:spcPct val="110000"/>
               </a:lnSpc>
               <a:spcBef>
                 <a:spcPts val="0"/>
@@ -12358,7 +12358,7 @@
           <a:p>
             <a:pPr algn="just">
               <a:lnSpc>
-                <a:spcPct val="125000"/>
+                <a:spcPct val="110000"/>
               </a:lnSpc>
               <a:spcBef>
                 <a:spcPts val="0"/>
@@ -12380,7 +12380,7 @@
           <a:p>
             <a:pPr algn="just">
               <a:lnSpc>
-                <a:spcPct val="125000"/>
+                <a:spcPct val="110000"/>
               </a:lnSpc>
               <a:spcBef>
                 <a:spcPts val="0"/>
@@ -12402,7 +12402,7 @@
           <a:p>
             <a:pPr algn="just">
               <a:lnSpc>
-                <a:spcPct val="125000"/>
+                <a:spcPct val="110000"/>
               </a:lnSpc>
               <a:spcBef>
                 <a:spcPts val="0"/>
@@ -12424,7 +12424,7 @@
           <a:p>
             <a:pPr algn="just">
               <a:lnSpc>
-                <a:spcPct val="125000"/>
+                <a:spcPct val="110000"/>
               </a:lnSpc>
               <a:spcBef>
                 <a:spcPts val="0"/>
@@ -12446,7 +12446,7 @@
           <a:p>
             <a:pPr algn="just">
               <a:lnSpc>
-                <a:spcPct val="125000"/>
+                <a:spcPct val="110000"/>
               </a:lnSpc>
               <a:spcBef>
                 <a:spcPts val="0"/>
@@ -12468,7 +12468,7 @@
           <a:p>
             <a:pPr algn="just">
               <a:lnSpc>
-                <a:spcPct val="125000"/>
+                <a:spcPct val="110000"/>
               </a:lnSpc>
               <a:spcBef>
                 <a:spcPts val="0"/>
@@ -12490,7 +12490,7 @@
           <a:p>
             <a:pPr algn="just">
               <a:lnSpc>
-                <a:spcPct val="125000"/>
+                <a:spcPct val="110000"/>
               </a:lnSpc>
               <a:spcBef>
                 <a:spcPts val="0"/>
@@ -12512,7 +12512,7 @@
           <a:p>
             <a:pPr algn="just">
               <a:lnSpc>
-                <a:spcPct val="125000"/>
+                <a:spcPct val="110000"/>
               </a:lnSpc>
               <a:spcBef>
                 <a:spcPts val="0"/>
@@ -12626,7 +12626,7 @@
           <a:p>
             <a:pPr algn="just">
               <a:lnSpc>
-                <a:spcPct val="125000"/>
+                <a:spcPct val="110000"/>
               </a:lnSpc>
               <a:spcBef>
                 <a:spcPts val="0"/>
@@ -12648,7 +12648,7 @@
           <a:p>
             <a:pPr algn="just">
               <a:lnSpc>
-                <a:spcPct val="125000"/>
+                <a:spcPct val="110000"/>
               </a:lnSpc>
               <a:spcBef>
                 <a:spcPts val="0"/>
@@ -12670,7 +12670,7 @@
           <a:p>
             <a:pPr algn="just">
               <a:lnSpc>
-                <a:spcPct val="125000"/>
+                <a:spcPct val="110000"/>
               </a:lnSpc>
               <a:spcBef>
                 <a:spcPts val="0"/>
@@ -12692,7 +12692,7 @@
           <a:p>
             <a:pPr algn="just">
               <a:lnSpc>
-                <a:spcPct val="125000"/>
+                <a:spcPct val="110000"/>
               </a:lnSpc>
               <a:spcBef>
                 <a:spcPts val="0"/>
@@ -12714,7 +12714,7 @@
           <a:p>
             <a:pPr algn="just">
               <a:lnSpc>
-                <a:spcPct val="125000"/>
+                <a:spcPct val="110000"/>
               </a:lnSpc>
               <a:spcBef>
                 <a:spcPts val="0"/>
@@ -12736,7 +12736,7 @@
           <a:p>
             <a:pPr algn="just">
               <a:lnSpc>
-                <a:spcPct val="125000"/>
+                <a:spcPct val="110000"/>
               </a:lnSpc>
               <a:spcBef>
                 <a:spcPts val="0"/>
@@ -12758,7 +12758,7 @@
           <a:p>
             <a:pPr algn="just">
               <a:lnSpc>
-                <a:spcPct val="125000"/>
+                <a:spcPct val="110000"/>
               </a:lnSpc>
               <a:spcBef>
                 <a:spcPts val="0"/>
@@ -12780,7 +12780,7 @@
           <a:p>
             <a:pPr algn="just">
               <a:lnSpc>
-                <a:spcPct val="125000"/>
+                <a:spcPct val="110000"/>
               </a:lnSpc>
               <a:spcBef>
                 <a:spcPts val="0"/>
@@ -12802,7 +12802,7 @@
           <a:p>
             <a:pPr algn="just">
               <a:lnSpc>
-                <a:spcPct val="125000"/>
+                <a:spcPct val="110000"/>
               </a:lnSpc>
               <a:spcBef>
                 <a:spcPts val="0"/>
@@ -12824,7 +12824,7 @@
           <a:p>
             <a:pPr algn="just">
               <a:lnSpc>
-                <a:spcPct val="125000"/>
+                <a:spcPct val="110000"/>
               </a:lnSpc>
               <a:spcBef>
                 <a:spcPts val="0"/>
@@ -12846,7 +12846,7 @@
           <a:p>
             <a:pPr algn="just">
               <a:lnSpc>
-                <a:spcPct val="125000"/>
+                <a:spcPct val="110000"/>
               </a:lnSpc>
               <a:spcBef>
                 <a:spcPts val="0"/>
@@ -12960,7 +12960,7 @@
           <a:p>
             <a:pPr algn="just">
               <a:lnSpc>
-                <a:spcPct val="125000"/>
+                <a:spcPct val="110000"/>
               </a:lnSpc>
               <a:spcBef>
                 <a:spcPts val="0"/>
@@ -12982,7 +12982,7 @@
           <a:p>
             <a:pPr algn="just">
               <a:lnSpc>
-                <a:spcPct val="125000"/>
+                <a:spcPct val="110000"/>
               </a:lnSpc>
               <a:spcBef>
                 <a:spcPts val="0"/>
@@ -13004,7 +13004,7 @@
           <a:p>
             <a:pPr algn="just">
               <a:lnSpc>
-                <a:spcPct val="125000"/>
+                <a:spcPct val="110000"/>
               </a:lnSpc>
               <a:spcBef>
                 <a:spcPts val="0"/>
@@ -13026,7 +13026,7 @@
           <a:p>
             <a:pPr algn="just">
               <a:lnSpc>
-                <a:spcPct val="125000"/>
+                <a:spcPct val="110000"/>
               </a:lnSpc>
               <a:spcBef>
                 <a:spcPts val="0"/>
@@ -13048,7 +13048,7 @@
           <a:p>
             <a:pPr algn="just">
               <a:lnSpc>
-                <a:spcPct val="125000"/>
+                <a:spcPct val="110000"/>
               </a:lnSpc>
               <a:spcBef>
                 <a:spcPts val="0"/>
@@ -13070,7 +13070,7 @@
           <a:p>
             <a:pPr algn="just">
               <a:lnSpc>
-                <a:spcPct val="125000"/>
+                <a:spcPct val="110000"/>
               </a:lnSpc>
               <a:spcBef>
                 <a:spcPts val="0"/>
@@ -13092,7 +13092,7 @@
           <a:p>
             <a:pPr algn="just">
               <a:lnSpc>
-                <a:spcPct val="125000"/>
+                <a:spcPct val="110000"/>
               </a:lnSpc>
               <a:spcBef>
                 <a:spcPts val="0"/>
@@ -13114,7 +13114,7 @@
           <a:p>
             <a:pPr algn="just">
               <a:lnSpc>
-                <a:spcPct val="125000"/>
+                <a:spcPct val="110000"/>
               </a:lnSpc>
               <a:spcBef>
                 <a:spcPts val="0"/>
@@ -13136,7 +13136,7 @@
           <a:p>
             <a:pPr algn="just">
               <a:lnSpc>
-                <a:spcPct val="125000"/>
+                <a:spcPct val="110000"/>
               </a:lnSpc>
               <a:spcBef>
                 <a:spcPts val="0"/>
@@ -13158,7 +13158,7 @@
           <a:p>
             <a:pPr algn="just">
               <a:lnSpc>
-                <a:spcPct val="125000"/>
+                <a:spcPct val="110000"/>
               </a:lnSpc>
               <a:spcBef>
                 <a:spcPts val="0"/>
@@ -13180,7 +13180,7 @@
           <a:p>
             <a:pPr algn="just">
               <a:lnSpc>
-                <a:spcPct val="125000"/>
+                <a:spcPct val="110000"/>
               </a:lnSpc>
               <a:spcBef>
                 <a:spcPts val="0"/>
@@ -13202,7 +13202,7 @@
           <a:p>
             <a:pPr algn="just">
               <a:lnSpc>
-                <a:spcPct val="125000"/>
+                <a:spcPct val="110000"/>
               </a:lnSpc>
               <a:spcBef>
                 <a:spcPts val="0"/>
@@ -13316,7 +13316,7 @@
           <a:p>
             <a:pPr algn="just">
               <a:lnSpc>
-                <a:spcPct val="125000"/>
+                <a:spcPct val="110000"/>
               </a:lnSpc>
               <a:spcBef>
                 <a:spcPts val="0"/>
@@ -13338,7 +13338,7 @@
           <a:p>
             <a:pPr algn="just">
               <a:lnSpc>
-                <a:spcPct val="125000"/>
+                <a:spcPct val="110000"/>
               </a:lnSpc>
               <a:spcBef>
                 <a:spcPts val="0"/>
@@ -13360,7 +13360,7 @@
           <a:p>
             <a:pPr algn="just">
               <a:lnSpc>
-                <a:spcPct val="125000"/>
+                <a:spcPct val="110000"/>
               </a:lnSpc>
               <a:spcBef>
                 <a:spcPts val="0"/>
@@ -13382,7 +13382,7 @@
           <a:p>
             <a:pPr algn="just">
               <a:lnSpc>
-                <a:spcPct val="125000"/>
+                <a:spcPct val="110000"/>
               </a:lnSpc>
               <a:spcBef>
                 <a:spcPts val="0"/>
@@ -13404,7 +13404,7 @@
           <a:p>
             <a:pPr algn="just">
               <a:lnSpc>
-                <a:spcPct val="125000"/>
+                <a:spcPct val="110000"/>
               </a:lnSpc>
               <a:spcBef>
                 <a:spcPts val="0"/>
@@ -13426,7 +13426,7 @@
           <a:p>
             <a:pPr algn="just">
               <a:lnSpc>
-                <a:spcPct val="125000"/>
+                <a:spcPct val="110000"/>
               </a:lnSpc>
               <a:spcBef>
                 <a:spcPts val="0"/>
@@ -13448,7 +13448,7 @@
           <a:p>
             <a:pPr algn="just">
               <a:lnSpc>
-                <a:spcPct val="125000"/>
+                <a:spcPct val="110000"/>
               </a:lnSpc>
               <a:spcBef>
                 <a:spcPts val="0"/>
@@ -13470,7 +13470,7 @@
           <a:p>
             <a:pPr algn="just">
               <a:lnSpc>
-                <a:spcPct val="125000"/>
+                <a:spcPct val="110000"/>
               </a:lnSpc>
               <a:spcBef>
                 <a:spcPts val="0"/>
@@ -13492,7 +13492,7 @@
           <a:p>
             <a:pPr algn="just">
               <a:lnSpc>
-                <a:spcPct val="125000"/>
+                <a:spcPct val="110000"/>
               </a:lnSpc>
               <a:spcBef>
                 <a:spcPts val="0"/>
@@ -13514,7 +13514,7 @@
           <a:p>
             <a:pPr algn="just">
               <a:lnSpc>
-                <a:spcPct val="125000"/>
+                <a:spcPct val="110000"/>
               </a:lnSpc>
               <a:spcBef>
                 <a:spcPts val="0"/>
@@ -13628,7 +13628,7 @@
           <a:p>
             <a:pPr algn="just">
               <a:lnSpc>
-                <a:spcPct val="125000"/>
+                <a:spcPct val="110000"/>
               </a:lnSpc>
               <a:spcBef>
                 <a:spcPts val="0"/>
@@ -13650,7 +13650,7 @@
           <a:p>
             <a:pPr algn="just">
               <a:lnSpc>
-                <a:spcPct val="125000"/>
+                <a:spcPct val="110000"/>
               </a:lnSpc>
               <a:spcBef>
                 <a:spcPts val="0"/>
@@ -13672,7 +13672,7 @@
           <a:p>
             <a:pPr algn="just">
               <a:lnSpc>
-                <a:spcPct val="125000"/>
+                <a:spcPct val="110000"/>
               </a:lnSpc>
               <a:spcBef>
                 <a:spcPts val="0"/>
@@ -13694,7 +13694,7 @@
           <a:p>
             <a:pPr algn="just">
               <a:lnSpc>
-                <a:spcPct val="125000"/>
+                <a:spcPct val="110000"/>
               </a:lnSpc>
               <a:spcBef>
                 <a:spcPts val="0"/>
@@ -13716,7 +13716,7 @@
           <a:p>
             <a:pPr algn="just">
               <a:lnSpc>
-                <a:spcPct val="125000"/>
+                <a:spcPct val="110000"/>
               </a:lnSpc>
               <a:spcBef>
                 <a:spcPts val="0"/>
@@ -13738,7 +13738,7 @@
           <a:p>
             <a:pPr algn="just">
               <a:lnSpc>
-                <a:spcPct val="125000"/>
+                <a:spcPct val="110000"/>
               </a:lnSpc>
               <a:spcBef>
                 <a:spcPts val="0"/>
@@ -13760,7 +13760,7 @@
           <a:p>
             <a:pPr algn="just">
               <a:lnSpc>
-                <a:spcPct val="125000"/>
+                <a:spcPct val="110000"/>
               </a:lnSpc>
               <a:spcBef>
                 <a:spcPts val="0"/>
@@ -13782,7 +13782,7 @@
           <a:p>
             <a:pPr algn="just">
               <a:lnSpc>
-                <a:spcPct val="125000"/>
+                <a:spcPct val="110000"/>
               </a:lnSpc>
               <a:spcBef>
                 <a:spcPts val="0"/>
@@ -13804,7 +13804,7 @@
           <a:p>
             <a:pPr algn="just">
               <a:lnSpc>
-                <a:spcPct val="125000"/>
+                <a:spcPct val="110000"/>
               </a:lnSpc>
               <a:spcBef>
                 <a:spcPts val="0"/>
@@ -13918,7 +13918,7 @@
           <a:p>
             <a:pPr algn="just">
               <a:lnSpc>
-                <a:spcPct val="125000"/>
+                <a:spcPct val="110000"/>
               </a:lnSpc>
               <a:spcBef>
                 <a:spcPts val="0"/>
@@ -13940,7 +13940,7 @@
           <a:p>
             <a:pPr algn="just">
               <a:lnSpc>
-                <a:spcPct val="125000"/>
+                <a:spcPct val="110000"/>
               </a:lnSpc>
               <a:spcBef>
                 <a:spcPts val="0"/>
@@ -13962,7 +13962,7 @@
           <a:p>
             <a:pPr algn="just">
               <a:lnSpc>
-                <a:spcPct val="125000"/>
+                <a:spcPct val="110000"/>
               </a:lnSpc>
               <a:spcBef>
                 <a:spcPts val="0"/>
@@ -13984,7 +13984,7 @@
           <a:p>
             <a:pPr algn="just">
               <a:lnSpc>
-                <a:spcPct val="125000"/>
+                <a:spcPct val="110000"/>
               </a:lnSpc>
               <a:spcBef>
                 <a:spcPts val="0"/>
@@ -14006,7 +14006,7 @@
           <a:p>
             <a:pPr algn="just">
               <a:lnSpc>
-                <a:spcPct val="125000"/>
+                <a:spcPct val="110000"/>
               </a:lnSpc>
               <a:spcBef>
                 <a:spcPts val="0"/>
@@ -14028,7 +14028,7 @@
           <a:p>
             <a:pPr algn="just">
               <a:lnSpc>
-                <a:spcPct val="125000"/>
+                <a:spcPct val="110000"/>
               </a:lnSpc>
               <a:spcBef>
                 <a:spcPts val="0"/>
@@ -14050,7 +14050,7 @@
           <a:p>
             <a:pPr algn="just">
               <a:lnSpc>
-                <a:spcPct val="125000"/>
+                <a:spcPct val="110000"/>
               </a:lnSpc>
               <a:spcBef>
                 <a:spcPts val="0"/>
@@ -14072,7 +14072,7 @@
           <a:p>
             <a:pPr algn="just">
               <a:lnSpc>
-                <a:spcPct val="125000"/>
+                <a:spcPct val="110000"/>
               </a:lnSpc>
               <a:spcBef>
                 <a:spcPts val="0"/>
@@ -14094,7 +14094,7 @@
           <a:p>
             <a:pPr algn="just">
               <a:lnSpc>
-                <a:spcPct val="125000"/>
+                <a:spcPct val="110000"/>
               </a:lnSpc>
               <a:spcBef>
                 <a:spcPts val="0"/>
@@ -14208,7 +14208,7 @@
           <a:p>
             <a:pPr algn="just">
               <a:lnSpc>
-                <a:spcPct val="125000"/>
+                <a:spcPct val="110000"/>
               </a:lnSpc>
               <a:spcBef>
                 <a:spcPts val="0"/>
@@ -14230,7 +14230,7 @@
           <a:p>
             <a:pPr algn="just">
               <a:lnSpc>
-                <a:spcPct val="125000"/>
+                <a:spcPct val="110000"/>
               </a:lnSpc>
               <a:spcBef>
                 <a:spcPts val="0"/>
@@ -14252,7 +14252,7 @@
           <a:p>
             <a:pPr algn="just">
               <a:lnSpc>
-                <a:spcPct val="125000"/>
+                <a:spcPct val="110000"/>
               </a:lnSpc>
               <a:spcBef>
                 <a:spcPts val="0"/>
@@ -14274,7 +14274,7 @@
           <a:p>
             <a:pPr algn="just">
               <a:lnSpc>
-                <a:spcPct val="125000"/>
+                <a:spcPct val="110000"/>
               </a:lnSpc>
               <a:spcBef>
                 <a:spcPts val="0"/>
@@ -14296,7 +14296,7 @@
           <a:p>
             <a:pPr algn="just">
               <a:lnSpc>
-                <a:spcPct val="125000"/>
+                <a:spcPct val="110000"/>
               </a:lnSpc>
               <a:spcBef>
                 <a:spcPts val="0"/>
@@ -14318,7 +14318,7 @@
           <a:p>
             <a:pPr algn="just">
               <a:lnSpc>
-                <a:spcPct val="125000"/>
+                <a:spcPct val="110000"/>
               </a:lnSpc>
               <a:spcBef>
                 <a:spcPts val="0"/>
@@ -14340,7 +14340,7 @@
           <a:p>
             <a:pPr algn="just">
               <a:lnSpc>
-                <a:spcPct val="125000"/>
+                <a:spcPct val="110000"/>
               </a:lnSpc>
               <a:spcBef>
                 <a:spcPts val="0"/>
@@ -14362,7 +14362,7 @@
           <a:p>
             <a:pPr algn="just">
               <a:lnSpc>
-                <a:spcPct val="125000"/>
+                <a:spcPct val="110000"/>
               </a:lnSpc>
               <a:spcBef>
                 <a:spcPts val="0"/>
@@ -14384,7 +14384,7 @@
           <a:p>
             <a:pPr algn="just">
               <a:lnSpc>
-                <a:spcPct val="125000"/>
+                <a:spcPct val="110000"/>
               </a:lnSpc>
               <a:spcBef>
                 <a:spcPts val="0"/>
@@ -14498,7 +14498,7 @@
           <a:p>
             <a:pPr algn="just">
               <a:lnSpc>
-                <a:spcPct val="125000"/>
+                <a:spcPct val="110000"/>
               </a:lnSpc>
               <a:spcBef>
                 <a:spcPts val="0"/>
@@ -14520,7 +14520,7 @@
           <a:p>
             <a:pPr algn="just">
               <a:lnSpc>
-                <a:spcPct val="125000"/>
+                <a:spcPct val="110000"/>
               </a:lnSpc>
               <a:spcBef>
                 <a:spcPts val="0"/>
@@ -14542,7 +14542,7 @@
           <a:p>
             <a:pPr algn="just">
               <a:lnSpc>
-                <a:spcPct val="125000"/>
+                <a:spcPct val="110000"/>
               </a:lnSpc>
               <a:spcBef>
                 <a:spcPts val="0"/>
@@ -14564,7 +14564,7 @@
           <a:p>
             <a:pPr algn="just">
               <a:lnSpc>
-                <a:spcPct val="125000"/>
+                <a:spcPct val="110000"/>
               </a:lnSpc>
               <a:spcBef>
                 <a:spcPts val="0"/>
@@ -14586,7 +14586,7 @@
           <a:p>
             <a:pPr algn="just">
               <a:lnSpc>
-                <a:spcPct val="125000"/>
+                <a:spcPct val="110000"/>
               </a:lnSpc>
               <a:spcBef>
                 <a:spcPts val="0"/>
@@ -14608,7 +14608,7 @@
           <a:p>
             <a:pPr algn="just">
               <a:lnSpc>
-                <a:spcPct val="125000"/>
+                <a:spcPct val="110000"/>
               </a:lnSpc>
               <a:spcBef>
                 <a:spcPts val="0"/>
@@ -14630,7 +14630,7 @@
           <a:p>
             <a:pPr algn="just">
               <a:lnSpc>
-                <a:spcPct val="125000"/>
+                <a:spcPct val="110000"/>
               </a:lnSpc>
               <a:spcBef>
                 <a:spcPts val="0"/>
@@ -14652,7 +14652,7 @@
           <a:p>
             <a:pPr algn="just">
               <a:lnSpc>
-                <a:spcPct val="125000"/>
+                <a:spcPct val="110000"/>
               </a:lnSpc>
               <a:spcBef>
                 <a:spcPts val="0"/>
@@ -14674,7 +14674,7 @@
           <a:p>
             <a:pPr algn="just">
               <a:lnSpc>
-                <a:spcPct val="125000"/>
+                <a:spcPct val="110000"/>
               </a:lnSpc>
               <a:spcBef>
                 <a:spcPts val="0"/>
@@ -14788,7 +14788,7 @@
           <a:p>
             <a:pPr algn="just">
               <a:lnSpc>
-                <a:spcPct val="125000"/>
+                <a:spcPct val="110000"/>
               </a:lnSpc>
               <a:spcBef>
                 <a:spcPts val="0"/>
@@ -14810,7 +14810,7 @@
           <a:p>
             <a:pPr algn="just">
               <a:lnSpc>
-                <a:spcPct val="125000"/>
+                <a:spcPct val="110000"/>
               </a:lnSpc>
               <a:spcBef>
                 <a:spcPts val="0"/>
@@ -14832,7 +14832,7 @@
           <a:p>
             <a:pPr algn="just">
               <a:lnSpc>
-                <a:spcPct val="125000"/>
+                <a:spcPct val="110000"/>
               </a:lnSpc>
               <a:spcBef>
                 <a:spcPts val="0"/>
@@ -14854,7 +14854,7 @@
           <a:p>
             <a:pPr algn="just">
               <a:lnSpc>
-                <a:spcPct val="125000"/>
+                <a:spcPct val="110000"/>
               </a:lnSpc>
               <a:spcBef>
                 <a:spcPts val="0"/>
@@ -14876,7 +14876,7 @@
           <a:p>
             <a:pPr algn="just">
               <a:lnSpc>
-                <a:spcPct val="125000"/>
+                <a:spcPct val="110000"/>
               </a:lnSpc>
               <a:spcBef>
                 <a:spcPts val="0"/>
@@ -14898,7 +14898,7 @@
           <a:p>
             <a:pPr algn="just">
               <a:lnSpc>
-                <a:spcPct val="125000"/>
+                <a:spcPct val="110000"/>
               </a:lnSpc>
               <a:spcBef>
                 <a:spcPts val="0"/>
@@ -14920,7 +14920,7 @@
           <a:p>
             <a:pPr algn="just">
               <a:lnSpc>
-                <a:spcPct val="125000"/>
+                <a:spcPct val="110000"/>
               </a:lnSpc>
               <a:spcBef>
                 <a:spcPts val="0"/>
@@ -14942,7 +14942,7 @@
           <a:p>
             <a:pPr algn="just">
               <a:lnSpc>
-                <a:spcPct val="125000"/>
+                <a:spcPct val="110000"/>
               </a:lnSpc>
               <a:spcBef>
                 <a:spcPts val="0"/>
@@ -14964,7 +14964,7 @@
           <a:p>
             <a:pPr algn="just">
               <a:lnSpc>
-                <a:spcPct val="125000"/>
+                <a:spcPct val="110000"/>
               </a:lnSpc>
               <a:spcBef>
                 <a:spcPts val="0"/>
@@ -15078,7 +15078,7 @@
           <a:p>
             <a:pPr algn="just">
               <a:lnSpc>
-                <a:spcPct val="125000"/>
+                <a:spcPct val="110000"/>
               </a:lnSpc>
               <a:spcBef>
                 <a:spcPts val="0"/>
@@ -15100,7 +15100,7 @@
           <a:p>
             <a:pPr algn="just">
               <a:lnSpc>
-                <a:spcPct val="125000"/>
+                <a:spcPct val="110000"/>
               </a:lnSpc>
               <a:spcBef>
                 <a:spcPts val="0"/>
@@ -15122,7 +15122,7 @@
           <a:p>
             <a:pPr algn="just">
               <a:lnSpc>
-                <a:spcPct val="125000"/>
+                <a:spcPct val="110000"/>
               </a:lnSpc>
               <a:spcBef>
                 <a:spcPts val="0"/>
@@ -15144,7 +15144,7 @@
           <a:p>
             <a:pPr algn="just">
               <a:lnSpc>
-                <a:spcPct val="125000"/>
+                <a:spcPct val="110000"/>
               </a:lnSpc>
               <a:spcBef>
                 <a:spcPts val="0"/>
@@ -15166,7 +15166,7 @@
           <a:p>
             <a:pPr algn="just">
               <a:lnSpc>
-                <a:spcPct val="125000"/>
+                <a:spcPct val="110000"/>
               </a:lnSpc>
               <a:spcBef>
                 <a:spcPts val="0"/>
@@ -15188,7 +15188,7 @@
           <a:p>
             <a:pPr algn="just">
               <a:lnSpc>
-                <a:spcPct val="125000"/>
+                <a:spcPct val="110000"/>
               </a:lnSpc>
               <a:spcBef>
                 <a:spcPts val="0"/>
@@ -15210,7 +15210,7 @@
           <a:p>
             <a:pPr algn="just">
               <a:lnSpc>
-                <a:spcPct val="125000"/>
+                <a:spcPct val="110000"/>
               </a:lnSpc>
               <a:spcBef>
                 <a:spcPts val="0"/>
@@ -15232,7 +15232,7 @@
           <a:p>
             <a:pPr algn="just">
               <a:lnSpc>
-                <a:spcPct val="125000"/>
+                <a:spcPct val="110000"/>
               </a:lnSpc>
               <a:spcBef>
                 <a:spcPts val="0"/>
@@ -15254,7 +15254,7 @@
           <a:p>
             <a:pPr algn="just">
               <a:lnSpc>
-                <a:spcPct val="125000"/>
+                <a:spcPct val="110000"/>
               </a:lnSpc>
               <a:spcBef>
                 <a:spcPts val="0"/>
@@ -15368,7 +15368,7 @@
           <a:p>
             <a:pPr algn="just">
               <a:lnSpc>
-                <a:spcPct val="125000"/>
+                <a:spcPct val="110000"/>
               </a:lnSpc>
               <a:spcBef>
                 <a:spcPts val="0"/>
@@ -15390,7 +15390,7 @@
           <a:p>
             <a:pPr algn="just">
               <a:lnSpc>
-                <a:spcPct val="125000"/>
+                <a:spcPct val="110000"/>
               </a:lnSpc>
               <a:spcBef>
                 <a:spcPts val="0"/>
@@ -15412,7 +15412,7 @@
           <a:p>
             <a:pPr algn="just">
               <a:lnSpc>
-                <a:spcPct val="125000"/>
+                <a:spcPct val="110000"/>
               </a:lnSpc>
               <a:spcBef>
                 <a:spcPts val="0"/>
@@ -15434,7 +15434,7 @@
           <a:p>
             <a:pPr algn="just">
               <a:lnSpc>
-                <a:spcPct val="125000"/>
+                <a:spcPct val="110000"/>
               </a:lnSpc>
               <a:spcBef>
                 <a:spcPts val="0"/>
@@ -15456,7 +15456,7 @@
           <a:p>
             <a:pPr algn="just">
               <a:lnSpc>
-                <a:spcPct val="125000"/>
+                <a:spcPct val="110000"/>
               </a:lnSpc>
               <a:spcBef>
                 <a:spcPts val="0"/>
@@ -15478,7 +15478,7 @@
           <a:p>
             <a:pPr algn="just">
               <a:lnSpc>
-                <a:spcPct val="125000"/>
+                <a:spcPct val="110000"/>
               </a:lnSpc>
               <a:spcBef>
                 <a:spcPts val="0"/>
@@ -15500,7 +15500,7 @@
           <a:p>
             <a:pPr algn="just">
               <a:lnSpc>
-                <a:spcPct val="125000"/>
+                <a:spcPct val="110000"/>
               </a:lnSpc>
               <a:spcBef>
                 <a:spcPts val="0"/>
@@ -15522,7 +15522,7 @@
           <a:p>
             <a:pPr algn="just">
               <a:lnSpc>
-                <a:spcPct val="125000"/>
+                <a:spcPct val="110000"/>
               </a:lnSpc>
               <a:spcBef>
                 <a:spcPts val="0"/>
@@ -15544,7 +15544,7 @@
           <a:p>
             <a:pPr algn="just">
               <a:lnSpc>
-                <a:spcPct val="125000"/>
+                <a:spcPct val="110000"/>
               </a:lnSpc>
               <a:spcBef>
                 <a:spcPts val="0"/>
@@ -15658,7 +15658,7 @@
           <a:p>
             <a:pPr algn="just">
               <a:lnSpc>
-                <a:spcPct val="125000"/>
+                <a:spcPct val="110000"/>
               </a:lnSpc>
               <a:spcBef>
                 <a:spcPts val="0"/>
@@ -15680,7 +15680,7 @@
           <a:p>
             <a:pPr algn="just">
               <a:lnSpc>
-                <a:spcPct val="125000"/>
+                <a:spcPct val="110000"/>
               </a:lnSpc>
               <a:spcBef>
                 <a:spcPts val="0"/>
@@ -15702,7 +15702,7 @@
           <a:p>
             <a:pPr algn="just">
               <a:lnSpc>
-                <a:spcPct val="125000"/>
+                <a:spcPct val="110000"/>
               </a:lnSpc>
               <a:spcBef>
                 <a:spcPts val="0"/>
@@ -15724,7 +15724,7 @@
           <a:p>
             <a:pPr algn="just">
               <a:lnSpc>
-                <a:spcPct val="125000"/>
+                <a:spcPct val="110000"/>
               </a:lnSpc>
               <a:spcBef>
                 <a:spcPts val="0"/>
@@ -15746,7 +15746,7 @@
           <a:p>
             <a:pPr algn="just">
               <a:lnSpc>
-                <a:spcPct val="125000"/>
+                <a:spcPct val="110000"/>
               </a:lnSpc>
               <a:spcBef>
                 <a:spcPts val="0"/>
@@ -15768,7 +15768,7 @@
           <a:p>
             <a:pPr algn="just">
               <a:lnSpc>
-                <a:spcPct val="125000"/>
+                <a:spcPct val="110000"/>
               </a:lnSpc>
               <a:spcBef>
                 <a:spcPts val="0"/>
@@ -15790,7 +15790,7 @@
           <a:p>
             <a:pPr algn="just">
               <a:lnSpc>
-                <a:spcPct val="125000"/>
+                <a:spcPct val="110000"/>
               </a:lnSpc>
               <a:spcBef>
                 <a:spcPts val="0"/>
@@ -15812,7 +15812,7 @@
           <a:p>
             <a:pPr algn="just">
               <a:lnSpc>
-                <a:spcPct val="125000"/>
+                <a:spcPct val="110000"/>
               </a:lnSpc>
               <a:spcBef>
                 <a:spcPts val="0"/>
@@ -15834,7 +15834,7 @@
           <a:p>
             <a:pPr algn="just">
               <a:lnSpc>
-                <a:spcPct val="125000"/>
+                <a:spcPct val="110000"/>
               </a:lnSpc>
               <a:spcBef>
                 <a:spcPts val="0"/>
@@ -15856,7 +15856,7 @@
           <a:p>
             <a:pPr algn="just">
               <a:lnSpc>
-                <a:spcPct val="125000"/>
+                <a:spcPct val="110000"/>
               </a:lnSpc>
               <a:spcBef>
                 <a:spcPts val="0"/>
@@ -15878,7 +15878,7 @@
           <a:p>
             <a:pPr algn="just">
               <a:lnSpc>
-                <a:spcPct val="125000"/>
+                <a:spcPct val="110000"/>
               </a:lnSpc>
               <a:spcBef>
                 <a:spcPts val="0"/>
@@ -15900,7 +15900,7 @@
           <a:p>
             <a:pPr algn="just">
               <a:lnSpc>
-                <a:spcPct val="125000"/>
+                <a:spcPct val="110000"/>
               </a:lnSpc>
               <a:spcBef>
                 <a:spcPts val="0"/>
@@ -16014,7 +16014,7 @@
           <a:p>
             <a:pPr algn="just">
               <a:lnSpc>
-                <a:spcPct val="125000"/>
+                <a:spcPct val="110000"/>
               </a:lnSpc>
               <a:spcBef>
                 <a:spcPts val="0"/>
@@ -16036,7 +16036,7 @@
           <a:p>
             <a:pPr algn="just">
               <a:lnSpc>
-                <a:spcPct val="125000"/>
+                <a:spcPct val="110000"/>
               </a:lnSpc>
               <a:spcBef>
                 <a:spcPts val="0"/>
@@ -16058,7 +16058,7 @@
           <a:p>
             <a:pPr algn="just">
               <a:lnSpc>
-                <a:spcPct val="125000"/>
+                <a:spcPct val="110000"/>
               </a:lnSpc>
               <a:spcBef>
                 <a:spcPts val="0"/>
@@ -16080,7 +16080,7 @@
           <a:p>
             <a:pPr algn="just">
               <a:lnSpc>
-                <a:spcPct val="125000"/>
+                <a:spcPct val="110000"/>
               </a:lnSpc>
               <a:spcBef>
                 <a:spcPts val="0"/>
@@ -16102,7 +16102,7 @@
           <a:p>
             <a:pPr algn="just">
               <a:lnSpc>
-                <a:spcPct val="125000"/>
+                <a:spcPct val="110000"/>
               </a:lnSpc>
               <a:spcBef>
                 <a:spcPts val="0"/>
@@ -16124,7 +16124,7 @@
           <a:p>
             <a:pPr algn="just">
               <a:lnSpc>
-                <a:spcPct val="125000"/>
+                <a:spcPct val="110000"/>
               </a:lnSpc>
               <a:spcBef>
                 <a:spcPts val="0"/>
@@ -16146,7 +16146,7 @@
           <a:p>
             <a:pPr algn="just">
               <a:lnSpc>
-                <a:spcPct val="125000"/>
+                <a:spcPct val="110000"/>
               </a:lnSpc>
               <a:spcBef>
                 <a:spcPts val="0"/>
@@ -16168,7 +16168,7 @@
           <a:p>
             <a:pPr algn="just">
               <a:lnSpc>
-                <a:spcPct val="125000"/>
+                <a:spcPct val="110000"/>
               </a:lnSpc>
               <a:spcBef>
                 <a:spcPts val="0"/>
@@ -16190,7 +16190,7 @@
           <a:p>
             <a:pPr algn="just">
               <a:lnSpc>
-                <a:spcPct val="125000"/>
+                <a:spcPct val="110000"/>
               </a:lnSpc>
               <a:spcBef>
                 <a:spcPts val="0"/>
@@ -16212,7 +16212,7 @@
           <a:p>
             <a:pPr algn="just">
               <a:lnSpc>
-                <a:spcPct val="125000"/>
+                <a:spcPct val="110000"/>
               </a:lnSpc>
               <a:spcBef>
                 <a:spcPts val="0"/>
@@ -16234,7 +16234,7 @@
           <a:p>
             <a:pPr algn="just">
               <a:lnSpc>
-                <a:spcPct val="125000"/>
+                <a:spcPct val="110000"/>
               </a:lnSpc>
               <a:spcBef>
                 <a:spcPts val="0"/>
@@ -16256,7 +16256,7 @@
           <a:p>
             <a:pPr algn="just">
               <a:lnSpc>
-                <a:spcPct val="125000"/>
+                <a:spcPct val="110000"/>
               </a:lnSpc>
               <a:spcBef>
                 <a:spcPts val="0"/>
@@ -16278,7 +16278,7 @@
           <a:p>
             <a:pPr algn="just">
               <a:lnSpc>
-                <a:spcPct val="125000"/>
+                <a:spcPct val="110000"/>
               </a:lnSpc>
               <a:spcBef>
                 <a:spcPts val="0"/>
@@ -16392,7 +16392,7 @@
           <a:p>
             <a:pPr algn="just">
               <a:lnSpc>
-                <a:spcPct val="125000"/>
+                <a:spcPct val="110000"/>
               </a:lnSpc>
               <a:spcBef>
                 <a:spcPts val="0"/>
@@ -16414,7 +16414,7 @@
           <a:p>
             <a:pPr algn="just">
               <a:lnSpc>
-                <a:spcPct val="125000"/>
+                <a:spcPct val="110000"/>
               </a:lnSpc>
               <a:spcBef>
                 <a:spcPts val="0"/>
@@ -16436,7 +16436,7 @@
           <a:p>
             <a:pPr algn="just">
               <a:lnSpc>
-                <a:spcPct val="125000"/>
+                <a:spcPct val="110000"/>
               </a:lnSpc>
               <a:spcBef>
                 <a:spcPts val="0"/>
@@ -16458,7 +16458,7 @@
           <a:p>
             <a:pPr algn="just">
               <a:lnSpc>
-                <a:spcPct val="125000"/>
+                <a:spcPct val="110000"/>
               </a:lnSpc>
               <a:spcBef>
                 <a:spcPts val="0"/>
@@ -16480,7 +16480,7 @@
           <a:p>
             <a:pPr algn="just">
               <a:lnSpc>
-                <a:spcPct val="125000"/>
+                <a:spcPct val="110000"/>
               </a:lnSpc>
               <a:spcBef>
                 <a:spcPts val="0"/>
@@ -16502,7 +16502,7 @@
           <a:p>
             <a:pPr algn="just">
               <a:lnSpc>
-                <a:spcPct val="125000"/>
+                <a:spcPct val="110000"/>
               </a:lnSpc>
               <a:spcBef>
                 <a:spcPts val="0"/>
@@ -16524,7 +16524,7 @@
           <a:p>
             <a:pPr algn="just">
               <a:lnSpc>
-                <a:spcPct val="125000"/>
+                <a:spcPct val="110000"/>
               </a:lnSpc>
               <a:spcBef>
                 <a:spcPts val="0"/>
@@ -16546,7 +16546,7 @@
           <a:p>
             <a:pPr algn="just">
               <a:lnSpc>
-                <a:spcPct val="125000"/>
+                <a:spcPct val="110000"/>
               </a:lnSpc>
               <a:spcBef>
                 <a:spcPts val="0"/>
@@ -16568,7 +16568,7 @@
           <a:p>
             <a:pPr algn="just">
               <a:lnSpc>
-                <a:spcPct val="125000"/>
+                <a:spcPct val="110000"/>
               </a:lnSpc>
               <a:spcBef>
                 <a:spcPts val="0"/>

--- a/ppts_output_v3/03_个人所得税风险指引.pptx
+++ b/ppts_output_v3/03_个人所得税风险指引.pptx
@@ -3126,7 +3126,7 @@
     <p:bg>
       <p:bgPr>
         <a:solidFill>
-          <a:srgbClr val="1B3A5C"/>
+          <a:srgbClr val="6B2D3B"/>
         </a:solidFill>
         <a:effectLst/>
       </p:bgPr>
@@ -3140,13 +3140,56 @@
       <p:grpSpPr/>
       <p:sp>
         <p:nvSpPr>
-          <p:cNvPr id="2" name="TextBox 1"/>
+          <p:cNvPr id="2" name="Oval 1"/>
+          <p:cNvSpPr/>
+          <p:nvPr/>
+        </p:nvSpPr>
+        <p:spPr>
+          <a:xfrm>
+            <a:off x="3353104" y="274320"/>
+            <a:ext cx="5486400" cy="5486400"/>
+          </a:xfrm>
+          <a:prstGeom prst="ellipse">
+            <a:avLst/>
+          </a:prstGeom>
+          <a:solidFill>
+            <a:srgbClr val="A76977"/>
+          </a:solidFill>
+          <a:ln>
+            <a:noFill/>
+          </a:ln>
+        </p:spPr>
+        <p:style>
+          <a:lnRef idx="1">
+            <a:schemeClr val="accent1"/>
+          </a:lnRef>
+          <a:fillRef idx="3">
+            <a:schemeClr val="accent1"/>
+          </a:fillRef>
+          <a:effectRef idx="2">
+            <a:schemeClr val="accent1"/>
+          </a:effectRef>
+          <a:fontRef idx="minor">
+            <a:schemeClr val="lt1"/>
+          </a:fontRef>
+        </p:style>
+        <p:txBody>
+          <a:bodyPr rtlCol="0" anchor="ctr"/>
+          <a:lstStyle/>
+          <a:p>
+            <a:pPr algn="ctr"/>
+          </a:p>
+        </p:txBody>
+      </p:sp>
+      <p:sp>
+        <p:nvSpPr>
+          <p:cNvPr id="3" name="TextBox 2"/>
           <p:cNvSpPr txBox="1"/>
           <p:nvPr/>
         </p:nvSpPr>
         <p:spPr>
           <a:xfrm>
-            <a:off x="731520" y="1371600"/>
+            <a:off x="731520" y="1645920"/>
             <a:ext cx="10728655" cy="2286000"/>
           </a:xfrm>
           <a:prstGeom prst="rect">
@@ -3175,14 +3218,57 @@
       </p:sp>
       <p:sp>
         <p:nvSpPr>
-          <p:cNvPr id="3" name="TextBox 2"/>
+          <p:cNvPr id="4" name="Rectangle 3"/>
+          <p:cNvSpPr/>
+          <p:nvPr/>
+        </p:nvSpPr>
+        <p:spPr>
+          <a:xfrm>
+            <a:off x="4114800" y="3749039"/>
+            <a:ext cx="3962095" cy="18288"/>
+          </a:xfrm>
+          <a:prstGeom prst="rect">
+            <a:avLst/>
+          </a:prstGeom>
+          <a:solidFill>
+            <a:srgbClr val="FFFFFF"/>
+          </a:solidFill>
+          <a:ln>
+            <a:noFill/>
+          </a:ln>
+        </p:spPr>
+        <p:style>
+          <a:lnRef idx="1">
+            <a:schemeClr val="accent1"/>
+          </a:lnRef>
+          <a:fillRef idx="3">
+            <a:schemeClr val="accent1"/>
+          </a:fillRef>
+          <a:effectRef idx="2">
+            <a:schemeClr val="accent1"/>
+          </a:effectRef>
+          <a:fontRef idx="minor">
+            <a:schemeClr val="lt1"/>
+          </a:fontRef>
+        </p:style>
+        <p:txBody>
+          <a:bodyPr rtlCol="0" anchor="ctr"/>
+          <a:lstStyle/>
+          <a:p>
+            <a:pPr algn="ctr"/>
+          </a:p>
+        </p:txBody>
+      </p:sp>
+      <p:sp>
+        <p:nvSpPr>
+          <p:cNvPr id="5" name="TextBox 4"/>
           <p:cNvSpPr txBox="1"/>
           <p:nvPr/>
         </p:nvSpPr>
         <p:spPr>
           <a:xfrm>
-            <a:off x="731520" y="3840480"/>
-            <a:ext cx="10728655" cy="731520"/>
+            <a:off x="731520" y="3931920"/>
+            <a:ext cx="10728655" cy="548640"/>
           </a:xfrm>
           <a:prstGeom prst="rect">
             <a:avLst/>
@@ -3198,7 +3284,7 @@
             <a:pPr algn="ctr">
               <a:defRPr sz="2200">
                 <a:solidFill>
-                  <a:srgbClr val="AABBCC"/>
+                  <a:srgbClr val="CCCCCC"/>
                 </a:solidFill>
               </a:defRPr>
             </a:pPr>
@@ -3210,7 +3296,7 @@
       </p:sp>
       <p:sp>
         <p:nvSpPr>
-          <p:cNvPr id="4" name="TextBox 3"/>
+          <p:cNvPr id="6" name="TextBox 5"/>
           <p:cNvSpPr txBox="1"/>
           <p:nvPr/>
         </p:nvSpPr>
@@ -3233,7 +3319,7 @@
             <a:pPr algn="ctr">
               <a:defRPr sz="1600">
                 <a:solidFill>
-                  <a:srgbClr val="8899AA"/>
+                  <a:srgbClr val="AABBCC"/>
                 </a:solidFill>
               </a:defRPr>
             </a:pPr>
@@ -3276,7 +3362,7 @@
             <a:avLst/>
           </a:prstGeom>
           <a:solidFill>
-            <a:srgbClr val="1B3A5C"/>
+            <a:srgbClr val="6B2D3B"/>
           </a:solidFill>
           <a:ln>
             <a:noFill/>
@@ -3348,7 +3434,7 @@
             <a:r>
               <a:rPr sz="1600" b="1">
                 <a:solidFill>
-                  <a:srgbClr val="1B3A5C"/>
+                  <a:srgbClr val="6B2D3B"/>
                 </a:solidFill>
                 <a:latin typeface="Microsoft YaHei"/>
               </a:rPr>
@@ -3596,6 +3682,49 @@
               </a:rPr>
               <a:t>2027年12月31日前，居民个人取得的全年一次性奖金可以不并入当年综合所得，以全年一次性奖金收入除以12个月得到的数额，按照本通知所附按月换算后的综合所得税率表单独计算纳税，自2028年1月1日起，居民个人取得全年一次性奖金，则应并入当年综合所得计算缴纳个人所得税。企业应保证账面计提奖金数与企业奖金发放文件或其他资料相符，作为以后税务稽查备用。对员工少缴的个税应进行补缴。</a:t>
             </a:r>
+          </a:p>
+        </p:txBody>
+      </p:sp>
+      <p:sp>
+        <p:nvSpPr>
+          <p:cNvPr id="4" name="Rectangle 3"/>
+          <p:cNvSpPr/>
+          <p:nvPr/>
+        </p:nvSpPr>
+        <p:spPr>
+          <a:xfrm>
+            <a:off x="457200" y="6720840"/>
+            <a:ext cx="11277295" cy="27432"/>
+          </a:xfrm>
+          <a:prstGeom prst="rect">
+            <a:avLst/>
+          </a:prstGeom>
+          <a:solidFill>
+            <a:srgbClr val="6B2D3B"/>
+          </a:solidFill>
+          <a:ln>
+            <a:noFill/>
+          </a:ln>
+        </p:spPr>
+        <p:style>
+          <a:lnRef idx="1">
+            <a:schemeClr val="accent1"/>
+          </a:lnRef>
+          <a:fillRef idx="3">
+            <a:schemeClr val="accent1"/>
+          </a:fillRef>
+          <a:effectRef idx="2">
+            <a:schemeClr val="accent1"/>
+          </a:effectRef>
+          <a:fontRef idx="minor">
+            <a:schemeClr val="lt1"/>
+          </a:fontRef>
+        </p:style>
+        <p:txBody>
+          <a:bodyPr rtlCol="0" anchor="ctr"/>
+          <a:lstStyle/>
+          <a:p>
+            <a:pPr algn="ctr"/>
           </a:p>
         </p:txBody>
       </p:sp>
@@ -3632,7 +3761,7 @@
             <a:avLst/>
           </a:prstGeom>
           <a:solidFill>
-            <a:srgbClr val="1B3A5C"/>
+            <a:srgbClr val="6B2D3B"/>
           </a:solidFill>
           <a:ln>
             <a:noFill/>
@@ -3704,7 +3833,7 @@
             <a:r>
               <a:rPr sz="1600" b="1">
                 <a:solidFill>
-                  <a:srgbClr val="1B3A5C"/>
+                  <a:srgbClr val="6B2D3B"/>
                 </a:solidFill>
                 <a:latin typeface="Microsoft YaHei"/>
               </a:rPr>
@@ -3908,6 +4037,49 @@
               </a:rPr>
               <a:t>企业从福利费和工会经费中支付给单位职工的人人有份的可以量化的且可以分割的福利，比如：购物卡、过节福利等，未按税法规定并入工资、薪金所得扣缴个人所得税，应及时予以调整。</a:t>
             </a:r>
+          </a:p>
+        </p:txBody>
+      </p:sp>
+      <p:sp>
+        <p:nvSpPr>
+          <p:cNvPr id="4" name="Rectangle 3"/>
+          <p:cNvSpPr/>
+          <p:nvPr/>
+        </p:nvSpPr>
+        <p:spPr>
+          <a:xfrm>
+            <a:off x="457200" y="6720840"/>
+            <a:ext cx="11277295" cy="27432"/>
+          </a:xfrm>
+          <a:prstGeom prst="rect">
+            <a:avLst/>
+          </a:prstGeom>
+          <a:solidFill>
+            <a:srgbClr val="6B2D3B"/>
+          </a:solidFill>
+          <a:ln>
+            <a:noFill/>
+          </a:ln>
+        </p:spPr>
+        <p:style>
+          <a:lnRef idx="1">
+            <a:schemeClr val="accent1"/>
+          </a:lnRef>
+          <a:fillRef idx="3">
+            <a:schemeClr val="accent1"/>
+          </a:fillRef>
+          <a:effectRef idx="2">
+            <a:schemeClr val="accent1"/>
+          </a:effectRef>
+          <a:fontRef idx="minor">
+            <a:schemeClr val="lt1"/>
+          </a:fontRef>
+        </p:style>
+        <p:txBody>
+          <a:bodyPr rtlCol="0" anchor="ctr"/>
+          <a:lstStyle/>
+          <a:p>
+            <a:pPr algn="ctr"/>
           </a:p>
         </p:txBody>
       </p:sp>
@@ -3944,7 +4116,7 @@
             <a:avLst/>
           </a:prstGeom>
           <a:solidFill>
-            <a:srgbClr val="1B3A5C"/>
+            <a:srgbClr val="6B2D3B"/>
           </a:solidFill>
           <a:ln>
             <a:noFill/>
@@ -4016,7 +4188,7 @@
             <a:r>
               <a:rPr sz="1600" b="1">
                 <a:solidFill>
-                  <a:srgbClr val="1B3A5C"/>
+                  <a:srgbClr val="6B2D3B"/>
                 </a:solidFill>
                 <a:latin typeface="Microsoft YaHei"/>
               </a:rPr>
@@ -4220,6 +4392,49 @@
               </a:rPr>
               <a:t>企业应按税法规定的比例计提福利费、工会经费等费用，如存在超比例计提现象应在所得税前进行纳税调整，从超比例计提的福利费、工会经费中支付给员工个人的福利、补贴、补助不能免纳个税，应区别于临时性生活困难补助，应并入职工工资、薪金所得扣缴个人所得税。</a:t>
             </a:r>
+          </a:p>
+        </p:txBody>
+      </p:sp>
+      <p:sp>
+        <p:nvSpPr>
+          <p:cNvPr id="4" name="Rectangle 3"/>
+          <p:cNvSpPr/>
+          <p:nvPr/>
+        </p:nvSpPr>
+        <p:spPr>
+          <a:xfrm>
+            <a:off x="457200" y="6720840"/>
+            <a:ext cx="11277295" cy="27432"/>
+          </a:xfrm>
+          <a:prstGeom prst="rect">
+            <a:avLst/>
+          </a:prstGeom>
+          <a:solidFill>
+            <a:srgbClr val="6B2D3B"/>
+          </a:solidFill>
+          <a:ln>
+            <a:noFill/>
+          </a:ln>
+        </p:spPr>
+        <p:style>
+          <a:lnRef idx="1">
+            <a:schemeClr val="accent1"/>
+          </a:lnRef>
+          <a:fillRef idx="3">
+            <a:schemeClr val="accent1"/>
+          </a:fillRef>
+          <a:effectRef idx="2">
+            <a:schemeClr val="accent1"/>
+          </a:effectRef>
+          <a:fontRef idx="minor">
+            <a:schemeClr val="lt1"/>
+          </a:fontRef>
+        </p:style>
+        <p:txBody>
+          <a:bodyPr rtlCol="0" anchor="ctr"/>
+          <a:lstStyle/>
+          <a:p>
+            <a:pPr algn="ctr"/>
           </a:p>
         </p:txBody>
       </p:sp>
@@ -4256,7 +4471,7 @@
             <a:avLst/>
           </a:prstGeom>
           <a:solidFill>
-            <a:srgbClr val="1B3A5C"/>
+            <a:srgbClr val="6B2D3B"/>
           </a:solidFill>
           <a:ln>
             <a:noFill/>
@@ -4328,7 +4543,7 @@
             <a:r>
               <a:rPr sz="1600" b="1">
                 <a:solidFill>
-                  <a:srgbClr val="1B3A5C"/>
+                  <a:srgbClr val="6B2D3B"/>
                 </a:solidFill>
                 <a:latin typeface="Microsoft YaHei"/>
               </a:rPr>
@@ -4510,6 +4725,49 @@
               </a:rPr>
               <a:t>个人所得的范围是指个人因任职或者受雇而取得的工资、薪金、奖金、年终加薪、劳动分红、津贴、补贴以及与任职或者受雇有关的其他所得。企业应自查有无为员工支付与企业生产经营无关的消费性支出及购买汽车、住房等财产性支出的情况，如有，应按照“工资、薪金所得”项目并入员工工资扣缴个人所得税。</a:t>
             </a:r>
+          </a:p>
+        </p:txBody>
+      </p:sp>
+      <p:sp>
+        <p:nvSpPr>
+          <p:cNvPr id="4" name="Rectangle 3"/>
+          <p:cNvSpPr/>
+          <p:nvPr/>
+        </p:nvSpPr>
+        <p:spPr>
+          <a:xfrm>
+            <a:off x="457200" y="6720840"/>
+            <a:ext cx="11277295" cy="27432"/>
+          </a:xfrm>
+          <a:prstGeom prst="rect">
+            <a:avLst/>
+          </a:prstGeom>
+          <a:solidFill>
+            <a:srgbClr val="6B2D3B"/>
+          </a:solidFill>
+          <a:ln>
+            <a:noFill/>
+          </a:ln>
+        </p:spPr>
+        <p:style>
+          <a:lnRef idx="1">
+            <a:schemeClr val="accent1"/>
+          </a:lnRef>
+          <a:fillRef idx="3">
+            <a:schemeClr val="accent1"/>
+          </a:fillRef>
+          <a:effectRef idx="2">
+            <a:schemeClr val="accent1"/>
+          </a:effectRef>
+          <a:fontRef idx="minor">
+            <a:schemeClr val="lt1"/>
+          </a:fontRef>
+        </p:style>
+        <p:txBody>
+          <a:bodyPr rtlCol="0" anchor="ctr"/>
+          <a:lstStyle/>
+          <a:p>
+            <a:pPr algn="ctr"/>
           </a:p>
         </p:txBody>
       </p:sp>
@@ -4546,7 +4804,7 @@
             <a:avLst/>
           </a:prstGeom>
           <a:solidFill>
-            <a:srgbClr val="1B3A5C"/>
+            <a:srgbClr val="6B2D3B"/>
           </a:solidFill>
           <a:ln>
             <a:noFill/>
@@ -4618,7 +4876,7 @@
             <a:r>
               <a:rPr sz="1600" b="1">
                 <a:solidFill>
-                  <a:srgbClr val="1B3A5C"/>
+                  <a:srgbClr val="6B2D3B"/>
                 </a:solidFill>
                 <a:latin typeface="Microsoft YaHei"/>
               </a:rPr>
@@ -4932,6 +5190,49 @@
               </a:rPr>
               <a:t>准确区分两类情形：1.查看售房是否发生在住房制度改革期间2.查看是否按照县级以上政府规定的房改成本价格出售3.查看出售的是否为公有住房符合上述条件的，差价部分免征个人所得税应税情形的计税处理：1.将差价收入除以12个月，根据月度税率表确定适用税率和速算扣除数2.按照“不并入当年综合所得，单独计算纳税”的原则计算应纳税额企业在支付或确认职工取得该项所得时，应依法履行代扣代缴义务，及时向税务机关申报缴纳个人所得税。企业应留存相关购房合同、房改批复文件、成本核算资料及扣缴凭证备查。</a:t>
             </a:r>
+          </a:p>
+        </p:txBody>
+      </p:sp>
+      <p:sp>
+        <p:nvSpPr>
+          <p:cNvPr id="4" name="Rectangle 3"/>
+          <p:cNvSpPr/>
+          <p:nvPr/>
+        </p:nvSpPr>
+        <p:spPr>
+          <a:xfrm>
+            <a:off x="457200" y="6720840"/>
+            <a:ext cx="11277295" cy="27432"/>
+          </a:xfrm>
+          <a:prstGeom prst="rect">
+            <a:avLst/>
+          </a:prstGeom>
+          <a:solidFill>
+            <a:srgbClr val="6B2D3B"/>
+          </a:solidFill>
+          <a:ln>
+            <a:noFill/>
+          </a:ln>
+        </p:spPr>
+        <p:style>
+          <a:lnRef idx="1">
+            <a:schemeClr val="accent1"/>
+          </a:lnRef>
+          <a:fillRef idx="3">
+            <a:schemeClr val="accent1"/>
+          </a:fillRef>
+          <a:effectRef idx="2">
+            <a:schemeClr val="accent1"/>
+          </a:effectRef>
+          <a:fontRef idx="minor">
+            <a:schemeClr val="lt1"/>
+          </a:fontRef>
+        </p:style>
+        <p:txBody>
+          <a:bodyPr rtlCol="0" anchor="ctr"/>
+          <a:lstStyle/>
+          <a:p>
+            <a:pPr algn="ctr"/>
           </a:p>
         </p:txBody>
       </p:sp>
@@ -4968,7 +5269,7 @@
             <a:avLst/>
           </a:prstGeom>
           <a:solidFill>
-            <a:srgbClr val="1B3A5C"/>
+            <a:srgbClr val="6B2D3B"/>
           </a:solidFill>
           <a:ln>
             <a:noFill/>
@@ -5040,7 +5341,7 @@
             <a:r>
               <a:rPr sz="1600" b="1">
                 <a:solidFill>
-                  <a:srgbClr val="1B3A5C"/>
+                  <a:srgbClr val="6B2D3B"/>
                 </a:solidFill>
                 <a:latin typeface="Microsoft YaHei"/>
               </a:rPr>
@@ -5244,6 +5545,49 @@
               </a:rPr>
               <a:t>个人所得的范围是指个人因任职或者受雇而取得的工资、薪金、奖金、年终加薪、劳动分红、津贴、补贴以及与任职或者受雇有关的其他所得。该企业应当将对营销业绩突出的人员以培训班、研讨会、工作考察等名义组织旅游活动发生的费用，与当期工资薪金合并，征收个人所得税。</a:t>
             </a:r>
+          </a:p>
+        </p:txBody>
+      </p:sp>
+      <p:sp>
+        <p:nvSpPr>
+          <p:cNvPr id="4" name="Rectangle 3"/>
+          <p:cNvSpPr/>
+          <p:nvPr/>
+        </p:nvSpPr>
+        <p:spPr>
+          <a:xfrm>
+            <a:off x="457200" y="6720840"/>
+            <a:ext cx="11277295" cy="27432"/>
+          </a:xfrm>
+          <a:prstGeom prst="rect">
+            <a:avLst/>
+          </a:prstGeom>
+          <a:solidFill>
+            <a:srgbClr val="6B2D3B"/>
+          </a:solidFill>
+          <a:ln>
+            <a:noFill/>
+          </a:ln>
+        </p:spPr>
+        <p:style>
+          <a:lnRef idx="1">
+            <a:schemeClr val="accent1"/>
+          </a:lnRef>
+          <a:fillRef idx="3">
+            <a:schemeClr val="accent1"/>
+          </a:fillRef>
+          <a:effectRef idx="2">
+            <a:schemeClr val="accent1"/>
+          </a:effectRef>
+          <a:fontRef idx="minor">
+            <a:schemeClr val="lt1"/>
+          </a:fontRef>
+        </p:style>
+        <p:txBody>
+          <a:bodyPr rtlCol="0" anchor="ctr"/>
+          <a:lstStyle/>
+          <a:p>
+            <a:pPr algn="ctr"/>
           </a:p>
         </p:txBody>
       </p:sp>
@@ -5280,7 +5624,7 @@
             <a:avLst/>
           </a:prstGeom>
           <a:solidFill>
-            <a:srgbClr val="1B3A5C"/>
+            <a:srgbClr val="6B2D3B"/>
           </a:solidFill>
           <a:ln>
             <a:noFill/>
@@ -5352,7 +5696,7 @@
             <a:r>
               <a:rPr sz="1600" b="1">
                 <a:solidFill>
-                  <a:srgbClr val="1B3A5C"/>
+                  <a:srgbClr val="6B2D3B"/>
                 </a:solidFill>
                 <a:latin typeface="Microsoft YaHei"/>
               </a:rPr>
@@ -5622,6 +5966,49 @@
               </a:rPr>
               <a:t>个人所得的范围是指个人因任职或者受雇而取得的工资、薪金、奖金、年终加薪、劳动分红、津贴、补贴以及与任职或者受雇有关的其他所得。电话费和通讯费按月发放的，并入当月“工资、薪金”所得扣缴个人所得税；不按月发放的，分解到所属月份并与该月份“工资、薪金”所得合并后扣缴个人所得税。如果所在省制定了免税补贴标准（税前扣除标准）的，在标准限额内的部分可免予征收个人所得税，在标准外以发票方式为职工报销费用的，计入当月个人收入征税；未明确税前扣除标准的，应合理确定补贴中因私用形成的个人收入部分，扣缴个人所得税。</a:t>
             </a:r>
+          </a:p>
+        </p:txBody>
+      </p:sp>
+      <p:sp>
+        <p:nvSpPr>
+          <p:cNvPr id="4" name="Rectangle 3"/>
+          <p:cNvSpPr/>
+          <p:nvPr/>
+        </p:nvSpPr>
+        <p:spPr>
+          <a:xfrm>
+            <a:off x="457200" y="6720840"/>
+            <a:ext cx="11277295" cy="27432"/>
+          </a:xfrm>
+          <a:prstGeom prst="rect">
+            <a:avLst/>
+          </a:prstGeom>
+          <a:solidFill>
+            <a:srgbClr val="6B2D3B"/>
+          </a:solidFill>
+          <a:ln>
+            <a:noFill/>
+          </a:ln>
+        </p:spPr>
+        <p:style>
+          <a:lnRef idx="1">
+            <a:schemeClr val="accent1"/>
+          </a:lnRef>
+          <a:fillRef idx="3">
+            <a:schemeClr val="accent1"/>
+          </a:fillRef>
+          <a:effectRef idx="2">
+            <a:schemeClr val="accent1"/>
+          </a:effectRef>
+          <a:fontRef idx="minor">
+            <a:schemeClr val="lt1"/>
+          </a:fontRef>
+        </p:style>
+        <p:txBody>
+          <a:bodyPr rtlCol="0" anchor="ctr"/>
+          <a:lstStyle/>
+          <a:p>
+            <a:pPr algn="ctr"/>
           </a:p>
         </p:txBody>
       </p:sp>
@@ -5658,7 +6045,7 @@
             <a:avLst/>
           </a:prstGeom>
           <a:solidFill>
-            <a:srgbClr val="1B3A5C"/>
+            <a:srgbClr val="6B2D3B"/>
           </a:solidFill>
           <a:ln>
             <a:noFill/>
@@ -5730,7 +6117,7 @@
             <a:r>
               <a:rPr sz="1600" b="1">
                 <a:solidFill>
-                  <a:srgbClr val="1B3A5C"/>
+                  <a:srgbClr val="6B2D3B"/>
                 </a:solidFill>
                 <a:latin typeface="Microsoft YaHei"/>
               </a:rPr>
@@ -5978,6 +6365,49 @@
               </a:rPr>
               <a:t>纳税人在主要工作城市没有住房的，对应三档标准进行扣除。纳税人配偶在纳税人主要工作城市有房的，视同纳税人有房；纳税人及其配偶主要工作城市相同的，只能由一方扣除；纳税人及其配偶不能同时分别享受住房贷款利息支出和住房租金出租。住房租金按月扣除。</a:t>
             </a:r>
+          </a:p>
+        </p:txBody>
+      </p:sp>
+      <p:sp>
+        <p:nvSpPr>
+          <p:cNvPr id="4" name="Rectangle 3"/>
+          <p:cNvSpPr/>
+          <p:nvPr/>
+        </p:nvSpPr>
+        <p:spPr>
+          <a:xfrm>
+            <a:off x="457200" y="6720840"/>
+            <a:ext cx="11277295" cy="27432"/>
+          </a:xfrm>
+          <a:prstGeom prst="rect">
+            <a:avLst/>
+          </a:prstGeom>
+          <a:solidFill>
+            <a:srgbClr val="6B2D3B"/>
+          </a:solidFill>
+          <a:ln>
+            <a:noFill/>
+          </a:ln>
+        </p:spPr>
+        <p:style>
+          <a:lnRef idx="1">
+            <a:schemeClr val="accent1"/>
+          </a:lnRef>
+          <a:fillRef idx="3">
+            <a:schemeClr val="accent1"/>
+          </a:fillRef>
+          <a:effectRef idx="2">
+            <a:schemeClr val="accent1"/>
+          </a:effectRef>
+          <a:fontRef idx="minor">
+            <a:schemeClr val="lt1"/>
+          </a:fontRef>
+        </p:style>
+        <p:txBody>
+          <a:bodyPr rtlCol="0" anchor="ctr"/>
+          <a:lstStyle/>
+          <a:p>
+            <a:pPr algn="ctr"/>
           </a:p>
         </p:txBody>
       </p:sp>
@@ -6014,7 +6444,7 @@
             <a:avLst/>
           </a:prstGeom>
           <a:solidFill>
-            <a:srgbClr val="1B3A5C"/>
+            <a:srgbClr val="6B2D3B"/>
           </a:solidFill>
           <a:ln>
             <a:noFill/>
@@ -6086,7 +6516,7 @@
             <a:r>
               <a:rPr sz="1600" b="1">
                 <a:solidFill>
-                  <a:srgbClr val="1B3A5C"/>
+                  <a:srgbClr val="6B2D3B"/>
                 </a:solidFill>
                 <a:latin typeface="Microsoft YaHei"/>
               </a:rPr>
@@ -6334,6 +6764,49 @@
               </a:rPr>
               <a:t>企业能够采用据实报销的，就据实报销；难以据实报销的，企业建立差旅费补助标准和报销制度，规范报销手续，只要按照制度和标准实事求是、有足够依据表明差旅费补助不是变相发放工资性补贴津贴就可以不征税，否则要将超标准部分并入工资薪金计征个税。</a:t>
             </a:r>
+          </a:p>
+        </p:txBody>
+      </p:sp>
+      <p:sp>
+        <p:nvSpPr>
+          <p:cNvPr id="4" name="Rectangle 3"/>
+          <p:cNvSpPr/>
+          <p:nvPr/>
+        </p:nvSpPr>
+        <p:spPr>
+          <a:xfrm>
+            <a:off x="457200" y="6720840"/>
+            <a:ext cx="11277295" cy="27432"/>
+          </a:xfrm>
+          <a:prstGeom prst="rect">
+            <a:avLst/>
+          </a:prstGeom>
+          <a:solidFill>
+            <a:srgbClr val="6B2D3B"/>
+          </a:solidFill>
+          <a:ln>
+            <a:noFill/>
+          </a:ln>
+        </p:spPr>
+        <p:style>
+          <a:lnRef idx="1">
+            <a:schemeClr val="accent1"/>
+          </a:lnRef>
+          <a:fillRef idx="3">
+            <a:schemeClr val="accent1"/>
+          </a:fillRef>
+          <a:effectRef idx="2">
+            <a:schemeClr val="accent1"/>
+          </a:effectRef>
+          <a:fontRef idx="minor">
+            <a:schemeClr val="lt1"/>
+          </a:fontRef>
+        </p:style>
+        <p:txBody>
+          <a:bodyPr rtlCol="0" anchor="ctr"/>
+          <a:lstStyle/>
+          <a:p>
+            <a:pPr algn="ctr"/>
           </a:p>
         </p:txBody>
       </p:sp>
@@ -6370,7 +6843,7 @@
             <a:avLst/>
           </a:prstGeom>
           <a:solidFill>
-            <a:srgbClr val="1B3A5C"/>
+            <a:srgbClr val="6B2D3B"/>
           </a:solidFill>
           <a:ln>
             <a:noFill/>
@@ -6442,7 +6915,7 @@
             <a:r>
               <a:rPr sz="1600" b="1">
                 <a:solidFill>
-                  <a:srgbClr val="1B3A5C"/>
+                  <a:srgbClr val="6B2D3B"/>
                 </a:solidFill>
                 <a:latin typeface="Microsoft YaHei"/>
               </a:rPr>
@@ -6646,6 +7119,49 @@
               </a:rPr>
               <a:t>个人所得的范围是指个人因任职或者受雇而取得的工资、薪金、奖金、年终加薪、劳动分红、津贴、补贴以及与任职或者受雇有关的其他所得。企业为员工支付的如暖气费、物业费、护眼费、降温费、洗衣费等应与当期工资合并按“工资、薪金所得”项目扣缴个人所得税。</a:t>
             </a:r>
+          </a:p>
+        </p:txBody>
+      </p:sp>
+      <p:sp>
+        <p:nvSpPr>
+          <p:cNvPr id="4" name="Rectangle 3"/>
+          <p:cNvSpPr/>
+          <p:nvPr/>
+        </p:nvSpPr>
+        <p:spPr>
+          <a:xfrm>
+            <a:off x="457200" y="6720840"/>
+            <a:ext cx="11277295" cy="27432"/>
+          </a:xfrm>
+          <a:prstGeom prst="rect">
+            <a:avLst/>
+          </a:prstGeom>
+          <a:solidFill>
+            <a:srgbClr val="6B2D3B"/>
+          </a:solidFill>
+          <a:ln>
+            <a:noFill/>
+          </a:ln>
+        </p:spPr>
+        <p:style>
+          <a:lnRef idx="1">
+            <a:schemeClr val="accent1"/>
+          </a:lnRef>
+          <a:fillRef idx="3">
+            <a:schemeClr val="accent1"/>
+          </a:fillRef>
+          <a:effectRef idx="2">
+            <a:schemeClr val="accent1"/>
+          </a:effectRef>
+          <a:fontRef idx="minor">
+            <a:schemeClr val="lt1"/>
+          </a:fontRef>
+        </p:style>
+        <p:txBody>
+          <a:bodyPr rtlCol="0" anchor="ctr"/>
+          <a:lstStyle/>
+          <a:p>
+            <a:pPr algn="ctr"/>
           </a:p>
         </p:txBody>
       </p:sp>
@@ -6682,7 +7198,7 @@
             <a:avLst/>
           </a:prstGeom>
           <a:solidFill>
-            <a:srgbClr val="1B3A5C"/>
+            <a:srgbClr val="6B2D3B"/>
           </a:solidFill>
           <a:ln>
             <a:noFill/>
@@ -6754,7 +7270,7 @@
             <a:r>
               <a:rPr sz="1600" b="1">
                 <a:solidFill>
-                  <a:srgbClr val="1B3A5C"/>
+                  <a:srgbClr val="6B2D3B"/>
                 </a:solidFill>
                 <a:latin typeface="Microsoft YaHei"/>
               </a:rPr>
@@ -6980,6 +7496,49 @@
               </a:rPr>
               <a:t>企业对职工薪酬进行专案管理，建立完善职工个人纳税信息，及时向税务机关缴纳个人所得税税款。</a:t>
             </a:r>
+          </a:p>
+        </p:txBody>
+      </p:sp>
+      <p:sp>
+        <p:nvSpPr>
+          <p:cNvPr id="4" name="Rectangle 3"/>
+          <p:cNvSpPr/>
+          <p:nvPr/>
+        </p:nvSpPr>
+        <p:spPr>
+          <a:xfrm>
+            <a:off x="457200" y="6720840"/>
+            <a:ext cx="11277295" cy="27432"/>
+          </a:xfrm>
+          <a:prstGeom prst="rect">
+            <a:avLst/>
+          </a:prstGeom>
+          <a:solidFill>
+            <a:srgbClr val="6B2D3B"/>
+          </a:solidFill>
+          <a:ln>
+            <a:noFill/>
+          </a:ln>
+        </p:spPr>
+        <p:style>
+          <a:lnRef idx="1">
+            <a:schemeClr val="accent1"/>
+          </a:lnRef>
+          <a:fillRef idx="3">
+            <a:schemeClr val="accent1"/>
+          </a:fillRef>
+          <a:effectRef idx="2">
+            <a:schemeClr val="accent1"/>
+          </a:effectRef>
+          <a:fontRef idx="minor">
+            <a:schemeClr val="lt1"/>
+          </a:fontRef>
+        </p:style>
+        <p:txBody>
+          <a:bodyPr rtlCol="0" anchor="ctr"/>
+          <a:lstStyle/>
+          <a:p>
+            <a:pPr algn="ctr"/>
           </a:p>
         </p:txBody>
       </p:sp>
@@ -7016,7 +7575,7 @@
             <a:avLst/>
           </a:prstGeom>
           <a:solidFill>
-            <a:srgbClr val="1B3A5C"/>
+            <a:srgbClr val="6B2D3B"/>
           </a:solidFill>
           <a:ln>
             <a:noFill/>
@@ -7088,7 +7647,7 @@
             <a:r>
               <a:rPr sz="1600" b="1">
                 <a:solidFill>
-                  <a:srgbClr val="1B3A5C"/>
+                  <a:srgbClr val="6B2D3B"/>
                 </a:solidFill>
                 <a:latin typeface="Microsoft YaHei"/>
               </a:rPr>
@@ -7292,6 +7851,49 @@
               </a:rPr>
               <a:t>个人所得的范围是指个人因任职或者受雇而取得的工资、薪金、奖金、年终加薪、劳动分红、津贴、补贴以及与任职或者受雇有关的其他所得。企业无论以何种形式为员工或其子女支付或报销医药费、子女教育费，都应与员工当期工资合并，按“工资、薪金所得”项目扣缴个人所得税。</a:t>
             </a:r>
+          </a:p>
+        </p:txBody>
+      </p:sp>
+      <p:sp>
+        <p:nvSpPr>
+          <p:cNvPr id="4" name="Rectangle 3"/>
+          <p:cNvSpPr/>
+          <p:nvPr/>
+        </p:nvSpPr>
+        <p:spPr>
+          <a:xfrm>
+            <a:off x="457200" y="6720840"/>
+            <a:ext cx="11277295" cy="27432"/>
+          </a:xfrm>
+          <a:prstGeom prst="rect">
+            <a:avLst/>
+          </a:prstGeom>
+          <a:solidFill>
+            <a:srgbClr val="6B2D3B"/>
+          </a:solidFill>
+          <a:ln>
+            <a:noFill/>
+          </a:ln>
+        </p:spPr>
+        <p:style>
+          <a:lnRef idx="1">
+            <a:schemeClr val="accent1"/>
+          </a:lnRef>
+          <a:fillRef idx="3">
+            <a:schemeClr val="accent1"/>
+          </a:fillRef>
+          <a:effectRef idx="2">
+            <a:schemeClr val="accent1"/>
+          </a:effectRef>
+          <a:fontRef idx="minor">
+            <a:schemeClr val="lt1"/>
+          </a:fontRef>
+        </p:style>
+        <p:txBody>
+          <a:bodyPr rtlCol="0" anchor="ctr"/>
+          <a:lstStyle/>
+          <a:p>
+            <a:pPr algn="ctr"/>
           </a:p>
         </p:txBody>
       </p:sp>
@@ -7328,7 +7930,7 @@
             <a:avLst/>
           </a:prstGeom>
           <a:solidFill>
-            <a:srgbClr val="1B3A5C"/>
+            <a:srgbClr val="6B2D3B"/>
           </a:solidFill>
           <a:ln>
             <a:noFill/>
@@ -7400,7 +8002,7 @@
             <a:r>
               <a:rPr sz="1600" b="1">
                 <a:solidFill>
-                  <a:srgbClr val="1B3A5C"/>
+                  <a:srgbClr val="6B2D3B"/>
                 </a:solidFill>
                 <a:latin typeface="Microsoft YaHei"/>
               </a:rPr>
@@ -7604,6 +8206,49 @@
               </a:rPr>
               <a:t>劳务报酬所得属于一次性收入的，以取得该项目收入为一次；属于同一项目连续性收入的，以一个月内取得的收入为一次。</a:t>
             </a:r>
+          </a:p>
+        </p:txBody>
+      </p:sp>
+      <p:sp>
+        <p:nvSpPr>
+          <p:cNvPr id="4" name="Rectangle 3"/>
+          <p:cNvSpPr/>
+          <p:nvPr/>
+        </p:nvSpPr>
+        <p:spPr>
+          <a:xfrm>
+            <a:off x="457200" y="6720840"/>
+            <a:ext cx="11277295" cy="27432"/>
+          </a:xfrm>
+          <a:prstGeom prst="rect">
+            <a:avLst/>
+          </a:prstGeom>
+          <a:solidFill>
+            <a:srgbClr val="6B2D3B"/>
+          </a:solidFill>
+          <a:ln>
+            <a:noFill/>
+          </a:ln>
+        </p:spPr>
+        <p:style>
+          <a:lnRef idx="1">
+            <a:schemeClr val="accent1"/>
+          </a:lnRef>
+          <a:fillRef idx="3">
+            <a:schemeClr val="accent1"/>
+          </a:fillRef>
+          <a:effectRef idx="2">
+            <a:schemeClr val="accent1"/>
+          </a:effectRef>
+          <a:fontRef idx="minor">
+            <a:schemeClr val="lt1"/>
+          </a:fontRef>
+        </p:style>
+        <p:txBody>
+          <a:bodyPr rtlCol="0" anchor="ctr"/>
+          <a:lstStyle/>
+          <a:p>
+            <a:pPr algn="ctr"/>
           </a:p>
         </p:txBody>
       </p:sp>
@@ -7640,7 +8285,7 @@
             <a:avLst/>
           </a:prstGeom>
           <a:solidFill>
-            <a:srgbClr val="1B3A5C"/>
+            <a:srgbClr val="6B2D3B"/>
           </a:solidFill>
           <a:ln>
             <a:noFill/>
@@ -7712,7 +8357,7 @@
             <a:r>
               <a:rPr sz="1600" b="1">
                 <a:solidFill>
-                  <a:srgbClr val="1B3A5C"/>
+                  <a:srgbClr val="6B2D3B"/>
                 </a:solidFill>
                 <a:latin typeface="Microsoft YaHei"/>
               </a:rPr>
@@ -7916,6 +8561,49 @@
               </a:rPr>
               <a:t>企业应在支付个人劳务费时要求个人提供劳务发票，严格核查票面信息有无记载代扣个税情况，对代开发票时未交个税的个人劳务或未不提供发票的个人劳务在支付劳务费时按现行劳务报酬税率进行代扣代缴。</a:t>
             </a:r>
+          </a:p>
+        </p:txBody>
+      </p:sp>
+      <p:sp>
+        <p:nvSpPr>
+          <p:cNvPr id="4" name="Rectangle 3"/>
+          <p:cNvSpPr/>
+          <p:nvPr/>
+        </p:nvSpPr>
+        <p:spPr>
+          <a:xfrm>
+            <a:off x="457200" y="6720840"/>
+            <a:ext cx="11277295" cy="27432"/>
+          </a:xfrm>
+          <a:prstGeom prst="rect">
+            <a:avLst/>
+          </a:prstGeom>
+          <a:solidFill>
+            <a:srgbClr val="6B2D3B"/>
+          </a:solidFill>
+          <a:ln>
+            <a:noFill/>
+          </a:ln>
+        </p:spPr>
+        <p:style>
+          <a:lnRef idx="1">
+            <a:schemeClr val="accent1"/>
+          </a:lnRef>
+          <a:fillRef idx="3">
+            <a:schemeClr val="accent1"/>
+          </a:fillRef>
+          <a:effectRef idx="2">
+            <a:schemeClr val="accent1"/>
+          </a:effectRef>
+          <a:fontRef idx="minor">
+            <a:schemeClr val="lt1"/>
+          </a:fontRef>
+        </p:style>
+        <p:txBody>
+          <a:bodyPr rtlCol="0" anchor="ctr"/>
+          <a:lstStyle/>
+          <a:p>
+            <a:pPr algn="ctr"/>
           </a:p>
         </p:txBody>
       </p:sp>
@@ -7952,7 +8640,7 @@
             <a:avLst/>
           </a:prstGeom>
           <a:solidFill>
-            <a:srgbClr val="1B3A5C"/>
+            <a:srgbClr val="6B2D3B"/>
           </a:solidFill>
           <a:ln>
             <a:noFill/>
@@ -8024,7 +8712,7 @@
             <a:r>
               <a:rPr sz="1600" b="1">
                 <a:solidFill>
-                  <a:srgbClr val="1B3A5C"/>
+                  <a:srgbClr val="6B2D3B"/>
                 </a:solidFill>
                 <a:latin typeface="Microsoft YaHei"/>
               </a:rPr>
@@ -8228,6 +8916,49 @@
               </a:rPr>
               <a:t>企业在业务宣传、广告等活动中，随机向本单位以外的个人赠送礼品（包括网络红包，下同），以及企业在年会、座谈会、庆典以及其他活动中向本单位以外的个人赠送礼品，个人取得的礼品收入，应按“偶然所得”代扣代缴个税。</a:t>
             </a:r>
+          </a:p>
+        </p:txBody>
+      </p:sp>
+      <p:sp>
+        <p:nvSpPr>
+          <p:cNvPr id="4" name="Rectangle 3"/>
+          <p:cNvSpPr/>
+          <p:nvPr/>
+        </p:nvSpPr>
+        <p:spPr>
+          <a:xfrm>
+            <a:off x="457200" y="6720840"/>
+            <a:ext cx="11277295" cy="27432"/>
+          </a:xfrm>
+          <a:prstGeom prst="rect">
+            <a:avLst/>
+          </a:prstGeom>
+          <a:solidFill>
+            <a:srgbClr val="6B2D3B"/>
+          </a:solidFill>
+          <a:ln>
+            <a:noFill/>
+          </a:ln>
+        </p:spPr>
+        <p:style>
+          <a:lnRef idx="1">
+            <a:schemeClr val="accent1"/>
+          </a:lnRef>
+          <a:fillRef idx="3">
+            <a:schemeClr val="accent1"/>
+          </a:fillRef>
+          <a:effectRef idx="2">
+            <a:schemeClr val="accent1"/>
+          </a:effectRef>
+          <a:fontRef idx="minor">
+            <a:schemeClr val="lt1"/>
+          </a:fontRef>
+        </p:style>
+        <p:txBody>
+          <a:bodyPr rtlCol="0" anchor="ctr"/>
+          <a:lstStyle/>
+          <a:p>
+            <a:pPr algn="ctr"/>
           </a:p>
         </p:txBody>
       </p:sp>
@@ -8264,7 +8995,7 @@
             <a:avLst/>
           </a:prstGeom>
           <a:solidFill>
-            <a:srgbClr val="1B3A5C"/>
+            <a:srgbClr val="6B2D3B"/>
           </a:solidFill>
           <a:ln>
             <a:noFill/>
@@ -8336,7 +9067,7 @@
             <a:r>
               <a:rPr sz="1600" b="1">
                 <a:solidFill>
-                  <a:srgbClr val="1B3A5C"/>
+                  <a:srgbClr val="6B2D3B"/>
                 </a:solidFill>
                 <a:latin typeface="Microsoft YaHei"/>
               </a:rPr>
@@ -8540,6 +9271,49 @@
               </a:rPr>
               <a:t>企事业单位和个人超过规定的比例和标准缴付的基本养老保险费、基本医疗保险费和失业保险费，将超过部分并入个人当期的工资、薪金收入，计算扣缴个人所得税。</a:t>
             </a:r>
+          </a:p>
+        </p:txBody>
+      </p:sp>
+      <p:sp>
+        <p:nvSpPr>
+          <p:cNvPr id="4" name="Rectangle 3"/>
+          <p:cNvSpPr/>
+          <p:nvPr/>
+        </p:nvSpPr>
+        <p:spPr>
+          <a:xfrm>
+            <a:off x="457200" y="6720840"/>
+            <a:ext cx="11277295" cy="27432"/>
+          </a:xfrm>
+          <a:prstGeom prst="rect">
+            <a:avLst/>
+          </a:prstGeom>
+          <a:solidFill>
+            <a:srgbClr val="6B2D3B"/>
+          </a:solidFill>
+          <a:ln>
+            <a:noFill/>
+          </a:ln>
+        </p:spPr>
+        <p:style>
+          <a:lnRef idx="1">
+            <a:schemeClr val="accent1"/>
+          </a:lnRef>
+          <a:fillRef idx="3">
+            <a:schemeClr val="accent1"/>
+          </a:fillRef>
+          <a:effectRef idx="2">
+            <a:schemeClr val="accent1"/>
+          </a:effectRef>
+          <a:fontRef idx="minor">
+            <a:schemeClr val="lt1"/>
+          </a:fontRef>
+        </p:style>
+        <p:txBody>
+          <a:bodyPr rtlCol="0" anchor="ctr"/>
+          <a:lstStyle/>
+          <a:p>
+            <a:pPr algn="ctr"/>
           </a:p>
         </p:txBody>
       </p:sp>
@@ -8576,7 +9350,7 @@
             <a:avLst/>
           </a:prstGeom>
           <a:solidFill>
-            <a:srgbClr val="1B3A5C"/>
+            <a:srgbClr val="6B2D3B"/>
           </a:solidFill>
           <a:ln>
             <a:noFill/>
@@ -8648,7 +9422,7 @@
             <a:r>
               <a:rPr sz="1600" b="1">
                 <a:solidFill>
-                  <a:srgbClr val="1B3A5C"/>
+                  <a:srgbClr val="6B2D3B"/>
                 </a:solidFill>
                 <a:latin typeface="Microsoft YaHei"/>
               </a:rPr>
@@ -8852,6 +9626,49 @@
               </a:rPr>
               <a:t>企事业单位和个人超过规定的比例和标准缴付的住房公积金，将超过部分应并入个人当期的工资、薪金收入，计算扣缴个人所得税。</a:t>
             </a:r>
+          </a:p>
+        </p:txBody>
+      </p:sp>
+      <p:sp>
+        <p:nvSpPr>
+          <p:cNvPr id="4" name="Rectangle 3"/>
+          <p:cNvSpPr/>
+          <p:nvPr/>
+        </p:nvSpPr>
+        <p:spPr>
+          <a:xfrm>
+            <a:off x="457200" y="6720840"/>
+            <a:ext cx="11277295" cy="27432"/>
+          </a:xfrm>
+          <a:prstGeom prst="rect">
+            <a:avLst/>
+          </a:prstGeom>
+          <a:solidFill>
+            <a:srgbClr val="6B2D3B"/>
+          </a:solidFill>
+          <a:ln>
+            <a:noFill/>
+          </a:ln>
+        </p:spPr>
+        <p:style>
+          <a:lnRef idx="1">
+            <a:schemeClr val="accent1"/>
+          </a:lnRef>
+          <a:fillRef idx="3">
+            <a:schemeClr val="accent1"/>
+          </a:fillRef>
+          <a:effectRef idx="2">
+            <a:schemeClr val="accent1"/>
+          </a:effectRef>
+          <a:fontRef idx="minor">
+            <a:schemeClr val="lt1"/>
+          </a:fontRef>
+        </p:style>
+        <p:txBody>
+          <a:bodyPr rtlCol="0" anchor="ctr"/>
+          <a:lstStyle/>
+          <a:p>
+            <a:pPr algn="ctr"/>
           </a:p>
         </p:txBody>
       </p:sp>
@@ -8888,7 +9705,7 @@
             <a:avLst/>
           </a:prstGeom>
           <a:solidFill>
-            <a:srgbClr val="1B3A5C"/>
+            <a:srgbClr val="6B2D3B"/>
           </a:solidFill>
           <a:ln>
             <a:noFill/>
@@ -8960,7 +9777,7 @@
             <a:r>
               <a:rPr sz="1600" b="1">
                 <a:solidFill>
-                  <a:srgbClr val="1B3A5C"/>
+                  <a:srgbClr val="6B2D3B"/>
                 </a:solidFill>
                 <a:latin typeface="Microsoft YaHei"/>
               </a:rPr>
@@ -9142,6 +9959,49 @@
               </a:rPr>
               <a:t>企业应向主管税务局报送年金方案、人社部出具的方案备案函、计划确认函等资料。托管人根据受托人指令及账户管理人提供的资料，按照规定计算扣缴个人当期领取年金待遇的应纳税款，并向托管人所在地主管税务机关申报解缴。 在年金领取环节，由托管人在为个人支付年金待遇时，根据个人当月取得的年金所得、往期缴费及纳税情况计算扣缴个人所得税，并向托管人主管税务机关申报缴纳。年金托管人在第一次代扣代缴年金领取人的个人所得税时，应在《个人所得税基础信息表（A 表）》“备注”中注明“年金领取”字样。其余项目仍按《个人所得税基础信息表（A 表）》的填表说明填写。扣缴义务人应将个人领取的年金所属期间填入《扣缴个人所得税报告表》第6列“所得期间”，将领取年金金额填入第7列“收入额”，将允许减计的金额填入第15列“其他”。其余项目仍按《扣缴个人所得税报告表》的填表说明填写。</a:t>
             </a:r>
+          </a:p>
+        </p:txBody>
+      </p:sp>
+      <p:sp>
+        <p:nvSpPr>
+          <p:cNvPr id="4" name="Rectangle 3"/>
+          <p:cNvSpPr/>
+          <p:nvPr/>
+        </p:nvSpPr>
+        <p:spPr>
+          <a:xfrm>
+            <a:off x="457200" y="6720840"/>
+            <a:ext cx="11277295" cy="27432"/>
+          </a:xfrm>
+          <a:prstGeom prst="rect">
+            <a:avLst/>
+          </a:prstGeom>
+          <a:solidFill>
+            <a:srgbClr val="6B2D3B"/>
+          </a:solidFill>
+          <a:ln>
+            <a:noFill/>
+          </a:ln>
+        </p:spPr>
+        <p:style>
+          <a:lnRef idx="1">
+            <a:schemeClr val="accent1"/>
+          </a:lnRef>
+          <a:fillRef idx="3">
+            <a:schemeClr val="accent1"/>
+          </a:fillRef>
+          <a:effectRef idx="2">
+            <a:schemeClr val="accent1"/>
+          </a:effectRef>
+          <a:fontRef idx="minor">
+            <a:schemeClr val="lt1"/>
+          </a:fontRef>
+        </p:style>
+        <p:txBody>
+          <a:bodyPr rtlCol="0" anchor="ctr"/>
+          <a:lstStyle/>
+          <a:p>
+            <a:pPr algn="ctr"/>
           </a:p>
         </p:txBody>
       </p:sp>
@@ -9178,7 +10038,7 @@
             <a:avLst/>
           </a:prstGeom>
           <a:solidFill>
-            <a:srgbClr val="1B3A5C"/>
+            <a:srgbClr val="6B2D3B"/>
           </a:solidFill>
           <a:ln>
             <a:noFill/>
@@ -9250,7 +10110,7 @@
             <a:r>
               <a:rPr sz="1600" b="1">
                 <a:solidFill>
-                  <a:srgbClr val="1B3A5C"/>
+                  <a:srgbClr val="6B2D3B"/>
                 </a:solidFill>
                 <a:latin typeface="Microsoft YaHei"/>
               </a:rPr>
@@ -9476,6 +10336,49 @@
               </a:rPr>
               <a:t>企业应向主管税务局报送年金方案、人社部出具的方案备案函、计划确认函等资料。在年金缴费环节，由个人所在单位在其缴费时，对超出免税标准的部分随同当月工资、薪金所得一并计算代扣个人所得税，并向其所在单位主管税务机关申报缴纳。扣缴义务人应将个人允许税前扣除的年金缴费部分填入《扣缴个人所得税报告表》第14列“允许扣除的税费”。其余项目仍按《扣缴个人所得税报告表》的填表说明填写。</a:t>
             </a:r>
+          </a:p>
+        </p:txBody>
+      </p:sp>
+      <p:sp>
+        <p:nvSpPr>
+          <p:cNvPr id="4" name="Rectangle 3"/>
+          <p:cNvSpPr/>
+          <p:nvPr/>
+        </p:nvSpPr>
+        <p:spPr>
+          <a:xfrm>
+            <a:off x="457200" y="6720840"/>
+            <a:ext cx="11277295" cy="27432"/>
+          </a:xfrm>
+          <a:prstGeom prst="rect">
+            <a:avLst/>
+          </a:prstGeom>
+          <a:solidFill>
+            <a:srgbClr val="6B2D3B"/>
+          </a:solidFill>
+          <a:ln>
+            <a:noFill/>
+          </a:ln>
+        </p:spPr>
+        <p:style>
+          <a:lnRef idx="1">
+            <a:schemeClr val="accent1"/>
+          </a:lnRef>
+          <a:fillRef idx="3">
+            <a:schemeClr val="accent1"/>
+          </a:fillRef>
+          <a:effectRef idx="2">
+            <a:schemeClr val="accent1"/>
+          </a:effectRef>
+          <a:fontRef idx="minor">
+            <a:schemeClr val="lt1"/>
+          </a:fontRef>
+        </p:style>
+        <p:txBody>
+          <a:bodyPr rtlCol="0" anchor="ctr"/>
+          <a:lstStyle/>
+          <a:p>
+            <a:pPr algn="ctr"/>
           </a:p>
         </p:txBody>
       </p:sp>
@@ -9512,7 +10415,7 @@
             <a:avLst/>
           </a:prstGeom>
           <a:solidFill>
-            <a:srgbClr val="1B3A5C"/>
+            <a:srgbClr val="6B2D3B"/>
           </a:solidFill>
           <a:ln>
             <a:noFill/>
@@ -9584,7 +10487,7 @@
             <a:r>
               <a:rPr sz="1600" b="1">
                 <a:solidFill>
-                  <a:srgbClr val="1B3A5C"/>
+                  <a:srgbClr val="6B2D3B"/>
                 </a:solidFill>
                 <a:latin typeface="Microsoft YaHei"/>
               </a:rPr>
@@ -9766,6 +10669,49 @@
               </a:rPr>
               <a:t>个人与用人单位解除劳动关系取得一次性补偿收入（包括用人单位发放的经济补偿金、生活补助费和其他补助费），在当地上年职工平均工资3倍数额以内的部分，免征个人所得税；超过3倍数额的部分，不并入当年综合所得，单独适用综合所得税率表，计算纳税。</a:t>
             </a:r>
+          </a:p>
+        </p:txBody>
+      </p:sp>
+      <p:sp>
+        <p:nvSpPr>
+          <p:cNvPr id="4" name="Rectangle 3"/>
+          <p:cNvSpPr/>
+          <p:nvPr/>
+        </p:nvSpPr>
+        <p:spPr>
+          <a:xfrm>
+            <a:off x="457200" y="6720840"/>
+            <a:ext cx="11277295" cy="27432"/>
+          </a:xfrm>
+          <a:prstGeom prst="rect">
+            <a:avLst/>
+          </a:prstGeom>
+          <a:solidFill>
+            <a:srgbClr val="6B2D3B"/>
+          </a:solidFill>
+          <a:ln>
+            <a:noFill/>
+          </a:ln>
+        </p:spPr>
+        <p:style>
+          <a:lnRef idx="1">
+            <a:schemeClr val="accent1"/>
+          </a:lnRef>
+          <a:fillRef idx="3">
+            <a:schemeClr val="accent1"/>
+          </a:fillRef>
+          <a:effectRef idx="2">
+            <a:schemeClr val="accent1"/>
+          </a:effectRef>
+          <a:fontRef idx="minor">
+            <a:schemeClr val="lt1"/>
+          </a:fontRef>
+        </p:style>
+        <p:txBody>
+          <a:bodyPr rtlCol="0" anchor="ctr"/>
+          <a:lstStyle/>
+          <a:p>
+            <a:pPr algn="ctr"/>
           </a:p>
         </p:txBody>
       </p:sp>
@@ -9802,7 +10748,7 @@
             <a:avLst/>
           </a:prstGeom>
           <a:solidFill>
-            <a:srgbClr val="1B3A5C"/>
+            <a:srgbClr val="6B2D3B"/>
           </a:solidFill>
           <a:ln>
             <a:noFill/>
@@ -9874,7 +10820,7 @@
             <a:r>
               <a:rPr sz="1600" b="1">
                 <a:solidFill>
-                  <a:srgbClr val="1B3A5C"/>
+                  <a:srgbClr val="6B2D3B"/>
                 </a:solidFill>
                 <a:latin typeface="Microsoft YaHei"/>
               </a:rPr>
@@ -10056,6 +11002,49 @@
               </a:rPr>
               <a:t>个人与用人单位解除劳动关系取得一次性补偿收入（包括用人单位发放的经济补偿金、生活补助费和其他补助费），在当地上年职工平均工资3倍数额以内的部分，免征个人所得税；超过3倍数额的部分，不并入当年综合所得，单独适用综合所得税率表，计算纳税。</a:t>
             </a:r>
+          </a:p>
+        </p:txBody>
+      </p:sp>
+      <p:sp>
+        <p:nvSpPr>
+          <p:cNvPr id="4" name="Rectangle 3"/>
+          <p:cNvSpPr/>
+          <p:nvPr/>
+        </p:nvSpPr>
+        <p:spPr>
+          <a:xfrm>
+            <a:off x="457200" y="6720840"/>
+            <a:ext cx="11277295" cy="27432"/>
+          </a:xfrm>
+          <a:prstGeom prst="rect">
+            <a:avLst/>
+          </a:prstGeom>
+          <a:solidFill>
+            <a:srgbClr val="6B2D3B"/>
+          </a:solidFill>
+          <a:ln>
+            <a:noFill/>
+          </a:ln>
+        </p:spPr>
+        <p:style>
+          <a:lnRef idx="1">
+            <a:schemeClr val="accent1"/>
+          </a:lnRef>
+          <a:fillRef idx="3">
+            <a:schemeClr val="accent1"/>
+          </a:fillRef>
+          <a:effectRef idx="2">
+            <a:schemeClr val="accent1"/>
+          </a:effectRef>
+          <a:fontRef idx="minor">
+            <a:schemeClr val="lt1"/>
+          </a:fontRef>
+        </p:style>
+        <p:txBody>
+          <a:bodyPr rtlCol="0" anchor="ctr"/>
+          <a:lstStyle/>
+          <a:p>
+            <a:pPr algn="ctr"/>
           </a:p>
         </p:txBody>
       </p:sp>
@@ -10092,7 +11081,7 @@
             <a:avLst/>
           </a:prstGeom>
           <a:solidFill>
-            <a:srgbClr val="1B3A5C"/>
+            <a:srgbClr val="6B2D3B"/>
           </a:solidFill>
           <a:ln>
             <a:noFill/>
@@ -10164,7 +11153,7 @@
             <a:r>
               <a:rPr sz="1600" b="1">
                 <a:solidFill>
-                  <a:srgbClr val="1B3A5C"/>
+                  <a:srgbClr val="6B2D3B"/>
                 </a:solidFill>
                 <a:latin typeface="Microsoft YaHei"/>
               </a:rPr>
@@ -10368,6 +11357,49 @@
               </a:rPr>
               <a:t>企业熟悉掌握相关税收政策，准确核算企业的工资薪金所得，完善企业相关薪金管理的风险防范机制。</a:t>
             </a:r>
+          </a:p>
+        </p:txBody>
+      </p:sp>
+      <p:sp>
+        <p:nvSpPr>
+          <p:cNvPr id="4" name="Rectangle 3"/>
+          <p:cNvSpPr/>
+          <p:nvPr/>
+        </p:nvSpPr>
+        <p:spPr>
+          <a:xfrm>
+            <a:off x="457200" y="6720840"/>
+            <a:ext cx="11277295" cy="27432"/>
+          </a:xfrm>
+          <a:prstGeom prst="rect">
+            <a:avLst/>
+          </a:prstGeom>
+          <a:solidFill>
+            <a:srgbClr val="6B2D3B"/>
+          </a:solidFill>
+          <a:ln>
+            <a:noFill/>
+          </a:ln>
+        </p:spPr>
+        <p:style>
+          <a:lnRef idx="1">
+            <a:schemeClr val="accent1"/>
+          </a:lnRef>
+          <a:fillRef idx="3">
+            <a:schemeClr val="accent1"/>
+          </a:fillRef>
+          <a:effectRef idx="2">
+            <a:schemeClr val="accent1"/>
+          </a:effectRef>
+          <a:fontRef idx="minor">
+            <a:schemeClr val="lt1"/>
+          </a:fontRef>
+        </p:style>
+        <p:txBody>
+          <a:bodyPr rtlCol="0" anchor="ctr"/>
+          <a:lstStyle/>
+          <a:p>
+            <a:pPr algn="ctr"/>
           </a:p>
         </p:txBody>
       </p:sp>
@@ -10404,7 +11436,7 @@
             <a:avLst/>
           </a:prstGeom>
           <a:solidFill>
-            <a:srgbClr val="1B3A5C"/>
+            <a:srgbClr val="6B2D3B"/>
           </a:solidFill>
           <a:ln>
             <a:noFill/>
@@ -10476,7 +11508,7 @@
             <a:r>
               <a:rPr sz="1600" b="1">
                 <a:solidFill>
-                  <a:srgbClr val="1B3A5C"/>
+                  <a:srgbClr val="6B2D3B"/>
                 </a:solidFill>
                 <a:latin typeface="Microsoft YaHei"/>
               </a:rPr>
@@ -10680,6 +11712,49 @@
               </a:rPr>
               <a:t>个人在公司（包括关联公司）任职、受雇，同时兼任董事、监事的，未将董事费、监事费与个人工资收入合并，应统一按“工资、薪金所得”项目缴纳个人所得税。</a:t>
             </a:r>
+          </a:p>
+        </p:txBody>
+      </p:sp>
+      <p:sp>
+        <p:nvSpPr>
+          <p:cNvPr id="4" name="Rectangle 3"/>
+          <p:cNvSpPr/>
+          <p:nvPr/>
+        </p:nvSpPr>
+        <p:spPr>
+          <a:xfrm>
+            <a:off x="457200" y="6720840"/>
+            <a:ext cx="11277295" cy="27432"/>
+          </a:xfrm>
+          <a:prstGeom prst="rect">
+            <a:avLst/>
+          </a:prstGeom>
+          <a:solidFill>
+            <a:srgbClr val="6B2D3B"/>
+          </a:solidFill>
+          <a:ln>
+            <a:noFill/>
+          </a:ln>
+        </p:spPr>
+        <p:style>
+          <a:lnRef idx="1">
+            <a:schemeClr val="accent1"/>
+          </a:lnRef>
+          <a:fillRef idx="3">
+            <a:schemeClr val="accent1"/>
+          </a:fillRef>
+          <a:effectRef idx="2">
+            <a:schemeClr val="accent1"/>
+          </a:effectRef>
+          <a:fontRef idx="minor">
+            <a:schemeClr val="lt1"/>
+          </a:fontRef>
+        </p:style>
+        <p:txBody>
+          <a:bodyPr rtlCol="0" anchor="ctr"/>
+          <a:lstStyle/>
+          <a:p>
+            <a:pPr algn="ctr"/>
           </a:p>
         </p:txBody>
       </p:sp>
@@ -10716,7 +11791,7 @@
             <a:avLst/>
           </a:prstGeom>
           <a:solidFill>
-            <a:srgbClr val="1B3A5C"/>
+            <a:srgbClr val="6B2D3B"/>
           </a:solidFill>
           <a:ln>
             <a:noFill/>
@@ -10788,7 +11863,7 @@
             <a:r>
               <a:rPr sz="1600" b="1">
                 <a:solidFill>
-                  <a:srgbClr val="1B3A5C"/>
+                  <a:srgbClr val="6B2D3B"/>
                 </a:solidFill>
                 <a:latin typeface="Microsoft YaHei"/>
               </a:rPr>
@@ -10992,6 +12067,49 @@
               </a:rPr>
               <a:t>企业董事、监事由于只担任董事或监事职务所取得的董事费收入，应按照“劳务报酬所得”项目扣缴个人所得税。</a:t>
             </a:r>
+          </a:p>
+        </p:txBody>
+      </p:sp>
+      <p:sp>
+        <p:nvSpPr>
+          <p:cNvPr id="4" name="Rectangle 3"/>
+          <p:cNvSpPr/>
+          <p:nvPr/>
+        </p:nvSpPr>
+        <p:spPr>
+          <a:xfrm>
+            <a:off x="457200" y="6720840"/>
+            <a:ext cx="11277295" cy="27432"/>
+          </a:xfrm>
+          <a:prstGeom prst="rect">
+            <a:avLst/>
+          </a:prstGeom>
+          <a:solidFill>
+            <a:srgbClr val="6B2D3B"/>
+          </a:solidFill>
+          <a:ln>
+            <a:noFill/>
+          </a:ln>
+        </p:spPr>
+        <p:style>
+          <a:lnRef idx="1">
+            <a:schemeClr val="accent1"/>
+          </a:lnRef>
+          <a:fillRef idx="3">
+            <a:schemeClr val="accent1"/>
+          </a:fillRef>
+          <a:effectRef idx="2">
+            <a:schemeClr val="accent1"/>
+          </a:effectRef>
+          <a:fontRef idx="minor">
+            <a:schemeClr val="lt1"/>
+          </a:fontRef>
+        </p:style>
+        <p:txBody>
+          <a:bodyPr rtlCol="0" anchor="ctr"/>
+          <a:lstStyle/>
+          <a:p>
+            <a:pPr algn="ctr"/>
           </a:p>
         </p:txBody>
       </p:sp>
@@ -11028,7 +12146,7 @@
             <a:avLst/>
           </a:prstGeom>
           <a:solidFill>
-            <a:srgbClr val="1B3A5C"/>
+            <a:srgbClr val="6B2D3B"/>
           </a:solidFill>
           <a:ln>
             <a:noFill/>
@@ -11100,7 +12218,7 @@
             <a:r>
               <a:rPr sz="1600" b="1">
                 <a:solidFill>
-                  <a:srgbClr val="1B3A5C"/>
+                  <a:srgbClr val="6B2D3B"/>
                 </a:solidFill>
                 <a:latin typeface="Microsoft YaHei"/>
               </a:rPr>
@@ -11304,6 +12422,49 @@
               </a:rPr>
               <a:t>企业接受个人转让的股票或股份，除转让境内上市公司股票免税外，应按税法规定按“财产转让所得”项目扣缴个人所得税。</a:t>
             </a:r>
+          </a:p>
+        </p:txBody>
+      </p:sp>
+      <p:sp>
+        <p:nvSpPr>
+          <p:cNvPr id="4" name="Rectangle 3"/>
+          <p:cNvSpPr/>
+          <p:nvPr/>
+        </p:nvSpPr>
+        <p:spPr>
+          <a:xfrm>
+            <a:off x="457200" y="6720840"/>
+            <a:ext cx="11277295" cy="27432"/>
+          </a:xfrm>
+          <a:prstGeom prst="rect">
+            <a:avLst/>
+          </a:prstGeom>
+          <a:solidFill>
+            <a:srgbClr val="6B2D3B"/>
+          </a:solidFill>
+          <a:ln>
+            <a:noFill/>
+          </a:ln>
+        </p:spPr>
+        <p:style>
+          <a:lnRef idx="1">
+            <a:schemeClr val="accent1"/>
+          </a:lnRef>
+          <a:fillRef idx="3">
+            <a:schemeClr val="accent1"/>
+          </a:fillRef>
+          <a:effectRef idx="2">
+            <a:schemeClr val="accent1"/>
+          </a:effectRef>
+          <a:fontRef idx="minor">
+            <a:schemeClr val="lt1"/>
+          </a:fontRef>
+        </p:style>
+        <p:txBody>
+          <a:bodyPr rtlCol="0" anchor="ctr"/>
+          <a:lstStyle/>
+          <a:p>
+            <a:pPr algn="ctr"/>
           </a:p>
         </p:txBody>
       </p:sp>
@@ -11340,7 +12501,7 @@
             <a:avLst/>
           </a:prstGeom>
           <a:solidFill>
-            <a:srgbClr val="1B3A5C"/>
+            <a:srgbClr val="6B2D3B"/>
           </a:solidFill>
           <a:ln>
             <a:noFill/>
@@ -11412,7 +12573,7 @@
             <a:r>
               <a:rPr sz="1600" b="1">
                 <a:solidFill>
-                  <a:srgbClr val="1B3A5C"/>
+                  <a:srgbClr val="6B2D3B"/>
                 </a:solidFill>
                 <a:latin typeface="Microsoft YaHei"/>
               </a:rPr>
@@ -11638,6 +12799,49 @@
               </a:rPr>
               <a:t>核查申报的股权转让收入是否存在明显偏低且无正当理由。</a:t>
             </a:r>
+          </a:p>
+        </p:txBody>
+      </p:sp>
+      <p:sp>
+        <p:nvSpPr>
+          <p:cNvPr id="4" name="Rectangle 3"/>
+          <p:cNvSpPr/>
+          <p:nvPr/>
+        </p:nvSpPr>
+        <p:spPr>
+          <a:xfrm>
+            <a:off x="457200" y="6720840"/>
+            <a:ext cx="11277295" cy="27432"/>
+          </a:xfrm>
+          <a:prstGeom prst="rect">
+            <a:avLst/>
+          </a:prstGeom>
+          <a:solidFill>
+            <a:srgbClr val="6B2D3B"/>
+          </a:solidFill>
+          <a:ln>
+            <a:noFill/>
+          </a:ln>
+        </p:spPr>
+        <p:style>
+          <a:lnRef idx="1">
+            <a:schemeClr val="accent1"/>
+          </a:lnRef>
+          <a:fillRef idx="3">
+            <a:schemeClr val="accent1"/>
+          </a:fillRef>
+          <a:effectRef idx="2">
+            <a:schemeClr val="accent1"/>
+          </a:effectRef>
+          <a:fontRef idx="minor">
+            <a:schemeClr val="lt1"/>
+          </a:fontRef>
+        </p:style>
+        <p:txBody>
+          <a:bodyPr rtlCol="0" anchor="ctr"/>
+          <a:lstStyle/>
+          <a:p>
+            <a:pPr algn="ctr"/>
           </a:p>
         </p:txBody>
       </p:sp>
@@ -11674,7 +12878,7 @@
             <a:avLst/>
           </a:prstGeom>
           <a:solidFill>
-            <a:srgbClr val="1B3A5C"/>
+            <a:srgbClr val="6B2D3B"/>
           </a:solidFill>
           <a:ln>
             <a:noFill/>
@@ -11746,7 +12950,7 @@
             <a:r>
               <a:rPr sz="1600" b="1">
                 <a:solidFill>
-                  <a:srgbClr val="1B3A5C"/>
+                  <a:srgbClr val="6B2D3B"/>
                 </a:solidFill>
                 <a:latin typeface="Microsoft YaHei"/>
               </a:rPr>
@@ -11950,6 +13154,49 @@
               </a:rPr>
               <a:t>企业转让股权收入，应于转让协议生效且完成股权变更手续时，确认收入的实现。即使未收到款项，扣缴义务人、纳税人也应当依法在次月15日内向主管税务机关申报纳税。</a:t>
             </a:r>
+          </a:p>
+        </p:txBody>
+      </p:sp>
+      <p:sp>
+        <p:nvSpPr>
+          <p:cNvPr id="4" name="Rectangle 3"/>
+          <p:cNvSpPr/>
+          <p:nvPr/>
+        </p:nvSpPr>
+        <p:spPr>
+          <a:xfrm>
+            <a:off x="457200" y="6720840"/>
+            <a:ext cx="11277295" cy="27432"/>
+          </a:xfrm>
+          <a:prstGeom prst="rect">
+            <a:avLst/>
+          </a:prstGeom>
+          <a:solidFill>
+            <a:srgbClr val="6B2D3B"/>
+          </a:solidFill>
+          <a:ln>
+            <a:noFill/>
+          </a:ln>
+        </p:spPr>
+        <p:style>
+          <a:lnRef idx="1">
+            <a:schemeClr val="accent1"/>
+          </a:lnRef>
+          <a:fillRef idx="3">
+            <a:schemeClr val="accent1"/>
+          </a:fillRef>
+          <a:effectRef idx="2">
+            <a:schemeClr val="accent1"/>
+          </a:effectRef>
+          <a:fontRef idx="minor">
+            <a:schemeClr val="lt1"/>
+          </a:fontRef>
+        </p:style>
+        <p:txBody>
+          <a:bodyPr rtlCol="0" anchor="ctr"/>
+          <a:lstStyle/>
+          <a:p>
+            <a:pPr algn="ctr"/>
           </a:p>
         </p:txBody>
       </p:sp>
@@ -11986,7 +13233,7 @@
             <a:avLst/>
           </a:prstGeom>
           <a:solidFill>
-            <a:srgbClr val="1B3A5C"/>
+            <a:srgbClr val="6B2D3B"/>
           </a:solidFill>
           <a:ln>
             <a:noFill/>
@@ -12058,7 +13305,7 @@
             <a:r>
               <a:rPr sz="1600" b="1">
                 <a:solidFill>
-                  <a:srgbClr val="1B3A5C"/>
+                  <a:srgbClr val="6B2D3B"/>
                 </a:solidFill>
                 <a:latin typeface="Microsoft YaHei"/>
               </a:rPr>
@@ -12240,6 +13487,49 @@
               </a:rPr>
               <a:t>如果股权转让协议已经履行，受让人已经向转让方支付了股权转让款，并在当地工商部门办理了工商变更登记手续。即使解除原股权转让合同、退回股权，也应缴付前一次转让行为对应的个税，如果前次交易已经缴了个税，对前次转让行为征收的个人所得税款不予退回。</a:t>
             </a:r>
+          </a:p>
+        </p:txBody>
+      </p:sp>
+      <p:sp>
+        <p:nvSpPr>
+          <p:cNvPr id="4" name="Rectangle 3"/>
+          <p:cNvSpPr/>
+          <p:nvPr/>
+        </p:nvSpPr>
+        <p:spPr>
+          <a:xfrm>
+            <a:off x="457200" y="6720840"/>
+            <a:ext cx="11277295" cy="27432"/>
+          </a:xfrm>
+          <a:prstGeom prst="rect">
+            <a:avLst/>
+          </a:prstGeom>
+          <a:solidFill>
+            <a:srgbClr val="6B2D3B"/>
+          </a:solidFill>
+          <a:ln>
+            <a:noFill/>
+          </a:ln>
+        </p:spPr>
+        <p:style>
+          <a:lnRef idx="1">
+            <a:schemeClr val="accent1"/>
+          </a:lnRef>
+          <a:fillRef idx="3">
+            <a:schemeClr val="accent1"/>
+          </a:fillRef>
+          <a:effectRef idx="2">
+            <a:schemeClr val="accent1"/>
+          </a:effectRef>
+          <a:fontRef idx="minor">
+            <a:schemeClr val="lt1"/>
+          </a:fontRef>
+        </p:style>
+        <p:txBody>
+          <a:bodyPr rtlCol="0" anchor="ctr"/>
+          <a:lstStyle/>
+          <a:p>
+            <a:pPr algn="ctr"/>
           </a:p>
         </p:txBody>
       </p:sp>
@@ -12276,7 +13566,7 @@
             <a:avLst/>
           </a:prstGeom>
           <a:solidFill>
-            <a:srgbClr val="1B3A5C"/>
+            <a:srgbClr val="6B2D3B"/>
           </a:solidFill>
           <a:ln>
             <a:noFill/>
@@ -12348,7 +13638,7 @@
             <a:r>
               <a:rPr sz="1600" b="1">
                 <a:solidFill>
-                  <a:srgbClr val="1B3A5C"/>
+                  <a:srgbClr val="6B2D3B"/>
                 </a:solidFill>
                 <a:latin typeface="Microsoft YaHei"/>
               </a:rPr>
@@ -12530,6 +13820,49 @@
               </a:rPr>
               <a:t>转让方个人取得的该违约金应并入财产转让收入，按照“财产转让所得”项目计算缴纳个人所得税，税款由取得所得的转让方个人向主管税务机关自行申报缴纳。</a:t>
             </a:r>
+          </a:p>
+        </p:txBody>
+      </p:sp>
+      <p:sp>
+        <p:nvSpPr>
+          <p:cNvPr id="4" name="Rectangle 3"/>
+          <p:cNvSpPr/>
+          <p:nvPr/>
+        </p:nvSpPr>
+        <p:spPr>
+          <a:xfrm>
+            <a:off x="457200" y="6720840"/>
+            <a:ext cx="11277295" cy="27432"/>
+          </a:xfrm>
+          <a:prstGeom prst="rect">
+            <a:avLst/>
+          </a:prstGeom>
+          <a:solidFill>
+            <a:srgbClr val="6B2D3B"/>
+          </a:solidFill>
+          <a:ln>
+            <a:noFill/>
+          </a:ln>
+        </p:spPr>
+        <p:style>
+          <a:lnRef idx="1">
+            <a:schemeClr val="accent1"/>
+          </a:lnRef>
+          <a:fillRef idx="3">
+            <a:schemeClr val="accent1"/>
+          </a:fillRef>
+          <a:effectRef idx="2">
+            <a:schemeClr val="accent1"/>
+          </a:effectRef>
+          <a:fontRef idx="minor">
+            <a:schemeClr val="lt1"/>
+          </a:fontRef>
+        </p:style>
+        <p:txBody>
+          <a:bodyPr rtlCol="0" anchor="ctr"/>
+          <a:lstStyle/>
+          <a:p>
+            <a:pPr algn="ctr"/>
           </a:p>
         </p:txBody>
       </p:sp>
@@ -12566,7 +13899,7 @@
             <a:avLst/>
           </a:prstGeom>
           <a:solidFill>
-            <a:srgbClr val="1B3A5C"/>
+            <a:srgbClr val="6B2D3B"/>
           </a:solidFill>
           <a:ln>
             <a:noFill/>
@@ -12638,7 +13971,7 @@
             <a:r>
               <a:rPr sz="1600" b="1">
                 <a:solidFill>
-                  <a:srgbClr val="1B3A5C"/>
+                  <a:srgbClr val="6B2D3B"/>
                 </a:solidFill>
                 <a:latin typeface="Microsoft YaHei"/>
               </a:rPr>
@@ -12864,6 +14197,49 @@
               </a:rPr>
               <a:t>纳税人发生的首套住房贷款利息支出，在实际发生贷款利息的年度，按照每月1000元的标准定额扣除，扣除期限最长不超过240个月。纳税人只能享受一次首套住房贷款的利息扣除。首套住房贷款是指购买住房享受首套住房贷款利率的住房贷款。</a:t>
             </a:r>
+          </a:p>
+        </p:txBody>
+      </p:sp>
+      <p:sp>
+        <p:nvSpPr>
+          <p:cNvPr id="4" name="Rectangle 3"/>
+          <p:cNvSpPr/>
+          <p:nvPr/>
+        </p:nvSpPr>
+        <p:spPr>
+          <a:xfrm>
+            <a:off x="457200" y="6720840"/>
+            <a:ext cx="11277295" cy="27432"/>
+          </a:xfrm>
+          <a:prstGeom prst="rect">
+            <a:avLst/>
+          </a:prstGeom>
+          <a:solidFill>
+            <a:srgbClr val="6B2D3B"/>
+          </a:solidFill>
+          <a:ln>
+            <a:noFill/>
+          </a:ln>
+        </p:spPr>
+        <p:style>
+          <a:lnRef idx="1">
+            <a:schemeClr val="accent1"/>
+          </a:lnRef>
+          <a:fillRef idx="3">
+            <a:schemeClr val="accent1"/>
+          </a:fillRef>
+          <a:effectRef idx="2">
+            <a:schemeClr val="accent1"/>
+          </a:effectRef>
+          <a:fontRef idx="minor">
+            <a:schemeClr val="lt1"/>
+          </a:fontRef>
+        </p:style>
+        <p:txBody>
+          <a:bodyPr rtlCol="0" anchor="ctr"/>
+          <a:lstStyle/>
+          <a:p>
+            <a:pPr algn="ctr"/>
           </a:p>
         </p:txBody>
       </p:sp>
@@ -12900,7 +14276,7 @@
             <a:avLst/>
           </a:prstGeom>
           <a:solidFill>
-            <a:srgbClr val="1B3A5C"/>
+            <a:srgbClr val="6B2D3B"/>
           </a:solidFill>
           <a:ln>
             <a:noFill/>
@@ -12972,7 +14348,7 @@
             <a:r>
               <a:rPr sz="1600" b="1">
                 <a:solidFill>
-                  <a:srgbClr val="1B3A5C"/>
+                  <a:srgbClr val="6B2D3B"/>
                 </a:solidFill>
                 <a:latin typeface="Microsoft YaHei"/>
               </a:rPr>
@@ -13220,6 +14596,49 @@
               </a:rPr>
               <a:t>纳税人赡养一位及以上被赡养人的赡养支出，统一按照以下标准定额扣除：（一）纳税人为独生子女的，按照每月3000元的标准定额扣除；（二）纳税人为非独生子女的，由其与兄弟姐妹分摊每月3000元的扣除额度，每人分摊的额度不能超过每月1500元。可以由赡养人均摊或者约定分摊，也可以由被赡养人指定分摊。约定或者指定分摊的须签订书面分摊协议，指定分摊优先于约定分摊。具体分摊方式和额度在一个纳税年度内不能变更。第二十三条本办法所称被赡养人是指年满60岁的父母，以及子女均已去世的年满60岁的祖父母、外祖父母。</a:t>
             </a:r>
+          </a:p>
+        </p:txBody>
+      </p:sp>
+      <p:sp>
+        <p:nvSpPr>
+          <p:cNvPr id="4" name="Rectangle 3"/>
+          <p:cNvSpPr/>
+          <p:nvPr/>
+        </p:nvSpPr>
+        <p:spPr>
+          <a:xfrm>
+            <a:off x="457200" y="6720840"/>
+            <a:ext cx="11277295" cy="27432"/>
+          </a:xfrm>
+          <a:prstGeom prst="rect">
+            <a:avLst/>
+          </a:prstGeom>
+          <a:solidFill>
+            <a:srgbClr val="6B2D3B"/>
+          </a:solidFill>
+          <a:ln>
+            <a:noFill/>
+          </a:ln>
+        </p:spPr>
+        <p:style>
+          <a:lnRef idx="1">
+            <a:schemeClr val="accent1"/>
+          </a:lnRef>
+          <a:fillRef idx="3">
+            <a:schemeClr val="accent1"/>
+          </a:fillRef>
+          <a:effectRef idx="2">
+            <a:schemeClr val="accent1"/>
+          </a:effectRef>
+          <a:fontRef idx="minor">
+            <a:schemeClr val="lt1"/>
+          </a:fontRef>
+        </p:style>
+        <p:txBody>
+          <a:bodyPr rtlCol="0" anchor="ctr"/>
+          <a:lstStyle/>
+          <a:p>
+            <a:pPr algn="ctr"/>
           </a:p>
         </p:txBody>
       </p:sp>
@@ -13256,7 +14675,7 @@
             <a:avLst/>
           </a:prstGeom>
           <a:solidFill>
-            <a:srgbClr val="1B3A5C"/>
+            <a:srgbClr val="6B2D3B"/>
           </a:solidFill>
           <a:ln>
             <a:noFill/>
@@ -13328,7 +14747,7 @@
             <a:r>
               <a:rPr sz="1600" b="1">
                 <a:solidFill>
-                  <a:srgbClr val="1B3A5C"/>
+                  <a:srgbClr val="6B2D3B"/>
                 </a:solidFill>
                 <a:latin typeface="Microsoft YaHei"/>
               </a:rPr>
@@ -13532,6 +14951,49 @@
               </a:rPr>
               <a:t>对于在境内居住累计满183天的年度连续满六年的无住所居民个人，企业应将其境内、境外取得的全部工资薪金所得合并计算缴纳个人所得税，计算方法为：应纳税额=当月境内、外的工资、薪金应纳税所得额×适用税率-速算扣除数。</a:t>
             </a:r>
+          </a:p>
+        </p:txBody>
+      </p:sp>
+      <p:sp>
+        <p:nvSpPr>
+          <p:cNvPr id="4" name="Rectangle 3"/>
+          <p:cNvSpPr/>
+          <p:nvPr/>
+        </p:nvSpPr>
+        <p:spPr>
+          <a:xfrm>
+            <a:off x="457200" y="6720840"/>
+            <a:ext cx="11277295" cy="27432"/>
+          </a:xfrm>
+          <a:prstGeom prst="rect">
+            <a:avLst/>
+          </a:prstGeom>
+          <a:solidFill>
+            <a:srgbClr val="6B2D3B"/>
+          </a:solidFill>
+          <a:ln>
+            <a:noFill/>
+          </a:ln>
+        </p:spPr>
+        <p:style>
+          <a:lnRef idx="1">
+            <a:schemeClr val="accent1"/>
+          </a:lnRef>
+          <a:fillRef idx="3">
+            <a:schemeClr val="accent1"/>
+          </a:fillRef>
+          <a:effectRef idx="2">
+            <a:schemeClr val="accent1"/>
+          </a:effectRef>
+          <a:fontRef idx="minor">
+            <a:schemeClr val="lt1"/>
+          </a:fontRef>
+        </p:style>
+        <p:txBody>
+          <a:bodyPr rtlCol="0" anchor="ctr"/>
+          <a:lstStyle/>
+          <a:p>
+            <a:pPr algn="ctr"/>
           </a:p>
         </p:txBody>
       </p:sp>
@@ -13568,7 +15030,7 @@
             <a:avLst/>
           </a:prstGeom>
           <a:solidFill>
-            <a:srgbClr val="1B3A5C"/>
+            <a:srgbClr val="6B2D3B"/>
           </a:solidFill>
           <a:ln>
             <a:noFill/>
@@ -13640,7 +15102,7 @@
             <a:r>
               <a:rPr sz="1600" b="1">
                 <a:solidFill>
-                  <a:srgbClr val="1B3A5C"/>
+                  <a:srgbClr val="6B2D3B"/>
                 </a:solidFill>
                 <a:latin typeface="Microsoft YaHei"/>
               </a:rPr>
@@ -13822,6 +15284,49 @@
               </a:rPr>
               <a:t>企业熟悉掌握相关的纳税义务时间，及时向税务机关缴纳税款，应着重加强相关专业素质的队伍建设，建立完善的防范机制。</a:t>
             </a:r>
+          </a:p>
+        </p:txBody>
+      </p:sp>
+      <p:sp>
+        <p:nvSpPr>
+          <p:cNvPr id="4" name="Rectangle 3"/>
+          <p:cNvSpPr/>
+          <p:nvPr/>
+        </p:nvSpPr>
+        <p:spPr>
+          <a:xfrm>
+            <a:off x="457200" y="6720840"/>
+            <a:ext cx="11277295" cy="27432"/>
+          </a:xfrm>
+          <a:prstGeom prst="rect">
+            <a:avLst/>
+          </a:prstGeom>
+          <a:solidFill>
+            <a:srgbClr val="6B2D3B"/>
+          </a:solidFill>
+          <a:ln>
+            <a:noFill/>
+          </a:ln>
+        </p:spPr>
+        <p:style>
+          <a:lnRef idx="1">
+            <a:schemeClr val="accent1"/>
+          </a:lnRef>
+          <a:fillRef idx="3">
+            <a:schemeClr val="accent1"/>
+          </a:fillRef>
+          <a:effectRef idx="2">
+            <a:schemeClr val="accent1"/>
+          </a:effectRef>
+          <a:fontRef idx="minor">
+            <a:schemeClr val="lt1"/>
+          </a:fontRef>
+        </p:style>
+        <p:txBody>
+          <a:bodyPr rtlCol="0" anchor="ctr"/>
+          <a:lstStyle/>
+          <a:p>
+            <a:pPr algn="ctr"/>
           </a:p>
         </p:txBody>
       </p:sp>
@@ -13858,7 +15363,7 @@
             <a:avLst/>
           </a:prstGeom>
           <a:solidFill>
-            <a:srgbClr val="1B3A5C"/>
+            <a:srgbClr val="6B2D3B"/>
           </a:solidFill>
           <a:ln>
             <a:noFill/>
@@ -13930,7 +15435,7 @@
             <a:r>
               <a:rPr sz="1600" b="1">
                 <a:solidFill>
-                  <a:srgbClr val="1B3A5C"/>
+                  <a:srgbClr val="6B2D3B"/>
                 </a:solidFill>
                 <a:latin typeface="Microsoft YaHei"/>
               </a:rPr>
@@ -14112,6 +15617,49 @@
               </a:rPr>
               <a:t>企业在广告设计、制作、发布过程中支付提供图书、报刊上发布的图文作品的个人报酬，应按“稿酬所得”项目扣缴个人所得税。</a:t>
             </a:r>
+          </a:p>
+        </p:txBody>
+      </p:sp>
+      <p:sp>
+        <p:nvSpPr>
+          <p:cNvPr id="4" name="Rectangle 3"/>
+          <p:cNvSpPr/>
+          <p:nvPr/>
+        </p:nvSpPr>
+        <p:spPr>
+          <a:xfrm>
+            <a:off x="457200" y="6720840"/>
+            <a:ext cx="11277295" cy="27432"/>
+          </a:xfrm>
+          <a:prstGeom prst="rect">
+            <a:avLst/>
+          </a:prstGeom>
+          <a:solidFill>
+            <a:srgbClr val="6B2D3B"/>
+          </a:solidFill>
+          <a:ln>
+            <a:noFill/>
+          </a:ln>
+        </p:spPr>
+        <p:style>
+          <a:lnRef idx="1">
+            <a:schemeClr val="accent1"/>
+          </a:lnRef>
+          <a:fillRef idx="3">
+            <a:schemeClr val="accent1"/>
+          </a:fillRef>
+          <a:effectRef idx="2">
+            <a:schemeClr val="accent1"/>
+          </a:effectRef>
+          <a:fontRef idx="minor">
+            <a:schemeClr val="lt1"/>
+          </a:fontRef>
+        </p:style>
+        <p:txBody>
+          <a:bodyPr rtlCol="0" anchor="ctr"/>
+          <a:lstStyle/>
+          <a:p>
+            <a:pPr algn="ctr"/>
           </a:p>
         </p:txBody>
       </p:sp>
@@ -14148,7 +15696,7 @@
             <a:avLst/>
           </a:prstGeom>
           <a:solidFill>
-            <a:srgbClr val="1B3A5C"/>
+            <a:srgbClr val="6B2D3B"/>
           </a:solidFill>
           <a:ln>
             <a:noFill/>
@@ -14220,7 +15768,7 @@
             <a:r>
               <a:rPr sz="1600" b="1">
                 <a:solidFill>
-                  <a:srgbClr val="1B3A5C"/>
+                  <a:srgbClr val="6B2D3B"/>
                 </a:solidFill>
                 <a:latin typeface="Microsoft YaHei"/>
               </a:rPr>
@@ -14402,6 +15950,49 @@
               </a:rPr>
               <a:t>纳税人发生的医药费用，超过自己负担15000元后的部分，可以选择由本人扣，也可以由其配偶扣；未成年子女发生的医药费用在超过15000元自付部分后，可以选择由其父母一方扣。年度预扣预缴时不扣除，在年度汇算清缴时按年扣除。</a:t>
             </a:r>
+          </a:p>
+        </p:txBody>
+      </p:sp>
+      <p:sp>
+        <p:nvSpPr>
+          <p:cNvPr id="4" name="Rectangle 3"/>
+          <p:cNvSpPr/>
+          <p:nvPr/>
+        </p:nvSpPr>
+        <p:spPr>
+          <a:xfrm>
+            <a:off x="457200" y="6720840"/>
+            <a:ext cx="11277295" cy="27432"/>
+          </a:xfrm>
+          <a:prstGeom prst="rect">
+            <a:avLst/>
+          </a:prstGeom>
+          <a:solidFill>
+            <a:srgbClr val="6B2D3B"/>
+          </a:solidFill>
+          <a:ln>
+            <a:noFill/>
+          </a:ln>
+        </p:spPr>
+        <p:style>
+          <a:lnRef idx="1">
+            <a:schemeClr val="accent1"/>
+          </a:lnRef>
+          <a:fillRef idx="3">
+            <a:schemeClr val="accent1"/>
+          </a:fillRef>
+          <a:effectRef idx="2">
+            <a:schemeClr val="accent1"/>
+          </a:effectRef>
+          <a:fontRef idx="minor">
+            <a:schemeClr val="lt1"/>
+          </a:fontRef>
+        </p:style>
+        <p:txBody>
+          <a:bodyPr rtlCol="0" anchor="ctr"/>
+          <a:lstStyle/>
+          <a:p>
+            <a:pPr algn="ctr"/>
           </a:p>
         </p:txBody>
       </p:sp>
@@ -14438,7 +16029,7 @@
             <a:avLst/>
           </a:prstGeom>
           <a:solidFill>
-            <a:srgbClr val="1B3A5C"/>
+            <a:srgbClr val="6B2D3B"/>
           </a:solidFill>
           <a:ln>
             <a:noFill/>
@@ -14510,7 +16101,7 @@
             <a:r>
               <a:rPr sz="1600" b="1">
                 <a:solidFill>
-                  <a:srgbClr val="1B3A5C"/>
+                  <a:srgbClr val="6B2D3B"/>
                 </a:solidFill>
                 <a:latin typeface="Microsoft YaHei"/>
               </a:rPr>
@@ -14692,6 +16283,49 @@
               </a:rPr>
               <a:t>外籍个人符合居民个人条件的，可以选择享受个人所得税专项附加扣除，也可以选择享受住房补贴、语言训练费、子女教育费等津补贴免税优惠政策，但不得同时享受。外籍个人一经选择，在一个纳税年度内不得变更。本政策执行至2027年12月31日。</a:t>
             </a:r>
+          </a:p>
+        </p:txBody>
+      </p:sp>
+      <p:sp>
+        <p:nvSpPr>
+          <p:cNvPr id="4" name="Rectangle 3"/>
+          <p:cNvSpPr/>
+          <p:nvPr/>
+        </p:nvSpPr>
+        <p:spPr>
+          <a:xfrm>
+            <a:off x="457200" y="6720840"/>
+            <a:ext cx="11277295" cy="27432"/>
+          </a:xfrm>
+          <a:prstGeom prst="rect">
+            <a:avLst/>
+          </a:prstGeom>
+          <a:solidFill>
+            <a:srgbClr val="6B2D3B"/>
+          </a:solidFill>
+          <a:ln>
+            <a:noFill/>
+          </a:ln>
+        </p:spPr>
+        <p:style>
+          <a:lnRef idx="1">
+            <a:schemeClr val="accent1"/>
+          </a:lnRef>
+          <a:fillRef idx="3">
+            <a:schemeClr val="accent1"/>
+          </a:fillRef>
+          <a:effectRef idx="2">
+            <a:schemeClr val="accent1"/>
+          </a:effectRef>
+          <a:fontRef idx="minor">
+            <a:schemeClr val="lt1"/>
+          </a:fontRef>
+        </p:style>
+        <p:txBody>
+          <a:bodyPr rtlCol="0" anchor="ctr"/>
+          <a:lstStyle/>
+          <a:p>
+            <a:pPr algn="ctr"/>
           </a:p>
         </p:txBody>
       </p:sp>
@@ -14728,7 +16362,7 @@
             <a:avLst/>
           </a:prstGeom>
           <a:solidFill>
-            <a:srgbClr val="1B3A5C"/>
+            <a:srgbClr val="6B2D3B"/>
           </a:solidFill>
           <a:ln>
             <a:noFill/>
@@ -14800,7 +16434,7 @@
             <a:r>
               <a:rPr sz="1600" b="1">
                 <a:solidFill>
-                  <a:srgbClr val="1B3A5C"/>
+                  <a:srgbClr val="6B2D3B"/>
                 </a:solidFill>
                 <a:latin typeface="Microsoft YaHei"/>
               </a:rPr>
@@ -14982,6 +16616,49 @@
               </a:rPr>
               <a:t>查看股东会决议，核实是否将未分配利润、盈余公积、资本公积转增股本，结合个人所得税申报材料，确认是否按规定代扣代缴了自然人股东的个人所得税。</a:t>
             </a:r>
+          </a:p>
+        </p:txBody>
+      </p:sp>
+      <p:sp>
+        <p:nvSpPr>
+          <p:cNvPr id="4" name="Rectangle 3"/>
+          <p:cNvSpPr/>
+          <p:nvPr/>
+        </p:nvSpPr>
+        <p:spPr>
+          <a:xfrm>
+            <a:off x="457200" y="6720840"/>
+            <a:ext cx="11277295" cy="27432"/>
+          </a:xfrm>
+          <a:prstGeom prst="rect">
+            <a:avLst/>
+          </a:prstGeom>
+          <a:solidFill>
+            <a:srgbClr val="6B2D3B"/>
+          </a:solidFill>
+          <a:ln>
+            <a:noFill/>
+          </a:ln>
+        </p:spPr>
+        <p:style>
+          <a:lnRef idx="1">
+            <a:schemeClr val="accent1"/>
+          </a:lnRef>
+          <a:fillRef idx="3">
+            <a:schemeClr val="accent1"/>
+          </a:fillRef>
+          <a:effectRef idx="2">
+            <a:schemeClr val="accent1"/>
+          </a:effectRef>
+          <a:fontRef idx="minor">
+            <a:schemeClr val="lt1"/>
+          </a:fontRef>
+        </p:style>
+        <p:txBody>
+          <a:bodyPr rtlCol="0" anchor="ctr"/>
+          <a:lstStyle/>
+          <a:p>
+            <a:pPr algn="ctr"/>
           </a:p>
         </p:txBody>
       </p:sp>
@@ -15018,7 +16695,7 @@
             <a:avLst/>
           </a:prstGeom>
           <a:solidFill>
-            <a:srgbClr val="1B3A5C"/>
+            <a:srgbClr val="6B2D3B"/>
           </a:solidFill>
           <a:ln>
             <a:noFill/>
@@ -15090,7 +16767,7 @@
             <a:r>
               <a:rPr sz="1600" b="1">
                 <a:solidFill>
-                  <a:srgbClr val="1B3A5C"/>
+                  <a:srgbClr val="6B2D3B"/>
                 </a:solidFill>
                 <a:latin typeface="Microsoft YaHei"/>
               </a:rPr>
@@ -15272,6 +16949,49 @@
               </a:rPr>
               <a:t>企业应当自行检查自身发生的股票期权业务，若是存在上述业务，企业对该股票期权的具体类型分类，若是存在业务处理与该类型不符的情形，企业及时进行调整纠正。</a:t>
             </a:r>
+          </a:p>
+        </p:txBody>
+      </p:sp>
+      <p:sp>
+        <p:nvSpPr>
+          <p:cNvPr id="4" name="Rectangle 3"/>
+          <p:cNvSpPr/>
+          <p:nvPr/>
+        </p:nvSpPr>
+        <p:spPr>
+          <a:xfrm>
+            <a:off x="457200" y="6720840"/>
+            <a:ext cx="11277295" cy="27432"/>
+          </a:xfrm>
+          <a:prstGeom prst="rect">
+            <a:avLst/>
+          </a:prstGeom>
+          <a:solidFill>
+            <a:srgbClr val="6B2D3B"/>
+          </a:solidFill>
+          <a:ln>
+            <a:noFill/>
+          </a:ln>
+        </p:spPr>
+        <p:style>
+          <a:lnRef idx="1">
+            <a:schemeClr val="accent1"/>
+          </a:lnRef>
+          <a:fillRef idx="3">
+            <a:schemeClr val="accent1"/>
+          </a:fillRef>
+          <a:effectRef idx="2">
+            <a:schemeClr val="accent1"/>
+          </a:effectRef>
+          <a:fontRef idx="minor">
+            <a:schemeClr val="lt1"/>
+          </a:fontRef>
+        </p:style>
+        <p:txBody>
+          <a:bodyPr rtlCol="0" anchor="ctr"/>
+          <a:lstStyle/>
+          <a:p>
+            <a:pPr algn="ctr"/>
           </a:p>
         </p:txBody>
       </p:sp>
@@ -15308,7 +17028,7 @@
             <a:avLst/>
           </a:prstGeom>
           <a:solidFill>
-            <a:srgbClr val="1B3A5C"/>
+            <a:srgbClr val="6B2D3B"/>
           </a:solidFill>
           <a:ln>
             <a:noFill/>
@@ -15380,7 +17100,7 @@
             <a:r>
               <a:rPr sz="1600" b="1">
                 <a:solidFill>
-                  <a:srgbClr val="1B3A5C"/>
+                  <a:srgbClr val="6B2D3B"/>
                 </a:solidFill>
                 <a:latin typeface="Microsoft YaHei"/>
               </a:rPr>
@@ -15562,6 +17282,49 @@
               </a:rPr>
               <a:t>企业应当自行检查是否存在将财产和房屋分配给投资者的情形，若是存在，企业是否有未履行代扣代缴义务的问题，若是存在，企业及时进行调整纠正。</a:t>
             </a:r>
+          </a:p>
+        </p:txBody>
+      </p:sp>
+      <p:sp>
+        <p:nvSpPr>
+          <p:cNvPr id="4" name="Rectangle 3"/>
+          <p:cNvSpPr/>
+          <p:nvPr/>
+        </p:nvSpPr>
+        <p:spPr>
+          <a:xfrm>
+            <a:off x="457200" y="6720840"/>
+            <a:ext cx="11277295" cy="27432"/>
+          </a:xfrm>
+          <a:prstGeom prst="rect">
+            <a:avLst/>
+          </a:prstGeom>
+          <a:solidFill>
+            <a:srgbClr val="6B2D3B"/>
+          </a:solidFill>
+          <a:ln>
+            <a:noFill/>
+          </a:ln>
+        </p:spPr>
+        <p:style>
+          <a:lnRef idx="1">
+            <a:schemeClr val="accent1"/>
+          </a:lnRef>
+          <a:fillRef idx="3">
+            <a:schemeClr val="accent1"/>
+          </a:fillRef>
+          <a:effectRef idx="2">
+            <a:schemeClr val="accent1"/>
+          </a:effectRef>
+          <a:fontRef idx="minor">
+            <a:schemeClr val="lt1"/>
+          </a:fontRef>
+        </p:style>
+        <p:txBody>
+          <a:bodyPr rtlCol="0" anchor="ctr"/>
+          <a:lstStyle/>
+          <a:p>
+            <a:pPr algn="ctr"/>
           </a:p>
         </p:txBody>
       </p:sp>
@@ -15598,7 +17361,7 @@
             <a:avLst/>
           </a:prstGeom>
           <a:solidFill>
-            <a:srgbClr val="1B3A5C"/>
+            <a:srgbClr val="6B2D3B"/>
           </a:solidFill>
           <a:ln>
             <a:noFill/>
@@ -15670,7 +17433,7 @@
             <a:r>
               <a:rPr sz="1600" b="1">
                 <a:solidFill>
-                  <a:srgbClr val="1B3A5C"/>
+                  <a:srgbClr val="6B2D3B"/>
                 </a:solidFill>
                 <a:latin typeface="Microsoft YaHei"/>
               </a:rPr>
@@ -15918,6 +17681,49 @@
               </a:rPr>
               <a:t>企业应当自行检查自身“管理费用”等成本费用明细账户，判断是否存在多计扣除费用，从而错误代扣代缴税款的税务风险，若是存在，企业及时进行调整纠正。</a:t>
             </a:r>
+          </a:p>
+        </p:txBody>
+      </p:sp>
+      <p:sp>
+        <p:nvSpPr>
+          <p:cNvPr id="4" name="Rectangle 3"/>
+          <p:cNvSpPr/>
+          <p:nvPr/>
+        </p:nvSpPr>
+        <p:spPr>
+          <a:xfrm>
+            <a:off x="457200" y="6720840"/>
+            <a:ext cx="11277295" cy="27432"/>
+          </a:xfrm>
+          <a:prstGeom prst="rect">
+            <a:avLst/>
+          </a:prstGeom>
+          <a:solidFill>
+            <a:srgbClr val="6B2D3B"/>
+          </a:solidFill>
+          <a:ln>
+            <a:noFill/>
+          </a:ln>
+        </p:spPr>
+        <p:style>
+          <a:lnRef idx="1">
+            <a:schemeClr val="accent1"/>
+          </a:lnRef>
+          <a:fillRef idx="3">
+            <a:schemeClr val="accent1"/>
+          </a:fillRef>
+          <a:effectRef idx="2">
+            <a:schemeClr val="accent1"/>
+          </a:effectRef>
+          <a:fontRef idx="minor">
+            <a:schemeClr val="lt1"/>
+          </a:fontRef>
+        </p:style>
+        <p:txBody>
+          <a:bodyPr rtlCol="0" anchor="ctr"/>
+          <a:lstStyle/>
+          <a:p>
+            <a:pPr algn="ctr"/>
           </a:p>
         </p:txBody>
       </p:sp>
@@ -15954,7 +17760,7 @@
             <a:avLst/>
           </a:prstGeom>
           <a:solidFill>
-            <a:srgbClr val="1B3A5C"/>
+            <a:srgbClr val="6B2D3B"/>
           </a:solidFill>
           <a:ln>
             <a:noFill/>
@@ -16026,7 +17832,7 @@
             <a:r>
               <a:rPr sz="1600" b="1">
                 <a:solidFill>
-                  <a:srgbClr val="1B3A5C"/>
+                  <a:srgbClr val="6B2D3B"/>
                 </a:solidFill>
                 <a:latin typeface="Microsoft YaHei"/>
               </a:rPr>
@@ -16296,6 +18102,49 @@
               </a:rPr>
               <a:t>企业每年年末应自查账面有无员工个人借款尚未收回的情况，应及时督促上交或报销，对员工个人借款跨年仍未归还的，应视同员工个人收入，按照“工资、薪金所得”项目计征个税，企业进行代扣代缴。</a:t>
             </a:r>
+          </a:p>
+        </p:txBody>
+      </p:sp>
+      <p:sp>
+        <p:nvSpPr>
+          <p:cNvPr id="4" name="Rectangle 3"/>
+          <p:cNvSpPr/>
+          <p:nvPr/>
+        </p:nvSpPr>
+        <p:spPr>
+          <a:xfrm>
+            <a:off x="457200" y="6720840"/>
+            <a:ext cx="11277295" cy="27432"/>
+          </a:xfrm>
+          <a:prstGeom prst="rect">
+            <a:avLst/>
+          </a:prstGeom>
+          <a:solidFill>
+            <a:srgbClr val="6B2D3B"/>
+          </a:solidFill>
+          <a:ln>
+            <a:noFill/>
+          </a:ln>
+        </p:spPr>
+        <p:style>
+          <a:lnRef idx="1">
+            <a:schemeClr val="accent1"/>
+          </a:lnRef>
+          <a:fillRef idx="3">
+            <a:schemeClr val="accent1"/>
+          </a:fillRef>
+          <a:effectRef idx="2">
+            <a:schemeClr val="accent1"/>
+          </a:effectRef>
+          <a:fontRef idx="minor">
+            <a:schemeClr val="lt1"/>
+          </a:fontRef>
+        </p:style>
+        <p:txBody>
+          <a:bodyPr rtlCol="0" anchor="ctr"/>
+          <a:lstStyle/>
+          <a:p>
+            <a:pPr algn="ctr"/>
           </a:p>
         </p:txBody>
       </p:sp>
@@ -16332,7 +18181,7 @@
             <a:avLst/>
           </a:prstGeom>
           <a:solidFill>
-            <a:srgbClr val="1B3A5C"/>
+            <a:srgbClr val="6B2D3B"/>
           </a:solidFill>
           <a:ln>
             <a:noFill/>
@@ -16404,7 +18253,7 @@
             <a:r>
               <a:rPr sz="1600" b="1">
                 <a:solidFill>
-                  <a:srgbClr val="1B3A5C"/>
+                  <a:srgbClr val="6B2D3B"/>
                 </a:solidFill>
                 <a:latin typeface="Microsoft YaHei"/>
               </a:rPr>
@@ -16586,6 +18435,49 @@
               </a:rPr>
               <a:t>企业应在每年年底疏理往来科目余额，企业的借款在其他应收款长时间挂账，分别不同的款项内容，存在以下风险：（1）对其他单位或个人的借款，涉及缴纳增值税。（2）对自然人股东个人借款超期未归还，视同对股东个人的股息红利分配缴纳20%个税。（3）对员工个人借款超期未归还且用于购买房屋或其他，视同工资薪金发放缴纳个税。企业间往来长期挂账不处理，视同企业间借贷行为，应视同贷款服务，按银行同期贷款利率计算利息，并按利息收入缴纳增值税，同时要调整企业应纳税所得额。</a:t>
             </a:r>
+          </a:p>
+        </p:txBody>
+      </p:sp>
+      <p:sp>
+        <p:nvSpPr>
+          <p:cNvPr id="4" name="Rectangle 3"/>
+          <p:cNvSpPr/>
+          <p:nvPr/>
+        </p:nvSpPr>
+        <p:spPr>
+          <a:xfrm>
+            <a:off x="457200" y="6720840"/>
+            <a:ext cx="11277295" cy="27432"/>
+          </a:xfrm>
+          <a:prstGeom prst="rect">
+            <a:avLst/>
+          </a:prstGeom>
+          <a:solidFill>
+            <a:srgbClr val="6B2D3B"/>
+          </a:solidFill>
+          <a:ln>
+            <a:noFill/>
+          </a:ln>
+        </p:spPr>
+        <p:style>
+          <a:lnRef idx="1">
+            <a:schemeClr val="accent1"/>
+          </a:lnRef>
+          <a:fillRef idx="3">
+            <a:schemeClr val="accent1"/>
+          </a:fillRef>
+          <a:effectRef idx="2">
+            <a:schemeClr val="accent1"/>
+          </a:effectRef>
+          <a:fontRef idx="minor">
+            <a:schemeClr val="lt1"/>
+          </a:fontRef>
+        </p:style>
+        <p:txBody>
+          <a:bodyPr rtlCol="0" anchor="ctr"/>
+          <a:lstStyle/>
+          <a:p>
+            <a:pPr algn="ctr"/>
           </a:p>
         </p:txBody>
       </p:sp>

--- a/ppts_output_v3/03_个人所得税风险指引.pptx
+++ b/ppts_output_v3/03_个人所得税风险指引.pptx
@@ -3208,6 +3208,7 @@
                 <a:solidFill>
                   <a:srgbClr val="FFFFFF"/>
                 </a:solidFill>
+                <a:latin typeface="Microsoft YaHei"/>
               </a:defRPr>
             </a:pPr>
             <a:r>
@@ -3286,6 +3287,7 @@
                 <a:solidFill>
                   <a:srgbClr val="CCCCCC"/>
                 </a:solidFill>
+                <a:latin typeface="Microsoft YaHei"/>
               </a:defRPr>
             </a:pPr>
             <a:r>
@@ -3321,6 +3323,7 @@
                 <a:solidFill>
                   <a:srgbClr val="AABBCC"/>
                 </a:solidFill>
+                <a:latin typeface="Microsoft YaHei"/>
               </a:defRPr>
             </a:pPr>
             <a:r>
@@ -3392,6 +3395,7 @@
                 <a:solidFill>
                   <a:srgbClr val="FFFFFF"/>
                 </a:solidFill>
+                <a:latin typeface="Microsoft YaHei"/>
               </a:rPr>
               <a:t>个人所得税风险指引  |  风险点 9</a:t>
             </a:r>
@@ -3791,6 +3795,7 @@
                 <a:solidFill>
                   <a:srgbClr val="FFFFFF"/>
                 </a:solidFill>
+                <a:latin typeface="Microsoft YaHei"/>
               </a:rPr>
               <a:t>个人所得税风险指引  |  风险点 10</a:t>
             </a:r>
@@ -4146,6 +4151,7 @@
                 <a:solidFill>
                   <a:srgbClr val="FFFFFF"/>
                 </a:solidFill>
+                <a:latin typeface="Microsoft YaHei"/>
               </a:rPr>
               <a:t>个人所得税风险指引  |  风险点 11</a:t>
             </a:r>
@@ -4501,6 +4507,7 @@
                 <a:solidFill>
                   <a:srgbClr val="FFFFFF"/>
                 </a:solidFill>
+                <a:latin typeface="Microsoft YaHei"/>
               </a:rPr>
               <a:t>个人所得税风险指引  |  风险点 12</a:t>
             </a:r>
@@ -4834,6 +4841,7 @@
                 <a:solidFill>
                   <a:srgbClr val="FFFFFF"/>
                 </a:solidFill>
+                <a:latin typeface="Microsoft YaHei"/>
               </a:rPr>
               <a:t>个人所得税风险指引  |  风险点 13</a:t>
             </a:r>
@@ -5299,6 +5307,7 @@
                 <a:solidFill>
                   <a:srgbClr val="FFFFFF"/>
                 </a:solidFill>
+                <a:latin typeface="Microsoft YaHei"/>
               </a:rPr>
               <a:t>个人所得税风险指引  |  风险点 14</a:t>
             </a:r>
@@ -5654,6 +5663,7 @@
                 <a:solidFill>
                   <a:srgbClr val="FFFFFF"/>
                 </a:solidFill>
+                <a:latin typeface="Microsoft YaHei"/>
               </a:rPr>
               <a:t>个人所得税风险指引  |  风险点 15</a:t>
             </a:r>
@@ -6075,6 +6085,7 @@
                 <a:solidFill>
                   <a:srgbClr val="FFFFFF"/>
                 </a:solidFill>
+                <a:latin typeface="Microsoft YaHei"/>
               </a:rPr>
               <a:t>个人所得税风险指引  |  风险点 16</a:t>
             </a:r>
@@ -6474,6 +6485,7 @@
                 <a:solidFill>
                   <a:srgbClr val="FFFFFF"/>
                 </a:solidFill>
+                <a:latin typeface="Microsoft YaHei"/>
               </a:rPr>
               <a:t>个人所得税风险指引  |  风险点 17</a:t>
             </a:r>
@@ -6873,6 +6885,7 @@
                 <a:solidFill>
                   <a:srgbClr val="FFFFFF"/>
                 </a:solidFill>
+                <a:latin typeface="Microsoft YaHei"/>
               </a:rPr>
               <a:t>个人所得税风险指引  |  风险点 18</a:t>
             </a:r>
@@ -7228,6 +7241,7 @@
                 <a:solidFill>
                   <a:srgbClr val="FFFFFF"/>
                 </a:solidFill>
+                <a:latin typeface="Microsoft YaHei"/>
               </a:rPr>
               <a:t>个人所得税风险指引  |  风险点 1</a:t>
             </a:r>
@@ -7605,6 +7619,7 @@
                 <a:solidFill>
                   <a:srgbClr val="FFFFFF"/>
                 </a:solidFill>
+                <a:latin typeface="Microsoft YaHei"/>
               </a:rPr>
               <a:t>个人所得税风险指引  |  风险点 19</a:t>
             </a:r>
@@ -7960,6 +7975,7 @@
                 <a:solidFill>
                   <a:srgbClr val="FFFFFF"/>
                 </a:solidFill>
+                <a:latin typeface="Microsoft YaHei"/>
               </a:rPr>
               <a:t>个人所得税风险指引  |  风险点 20</a:t>
             </a:r>
@@ -8315,6 +8331,7 @@
                 <a:solidFill>
                   <a:srgbClr val="FFFFFF"/>
                 </a:solidFill>
+                <a:latin typeface="Microsoft YaHei"/>
               </a:rPr>
               <a:t>个人所得税风险指引  |  风险点 21</a:t>
             </a:r>
@@ -8670,6 +8687,7 @@
                 <a:solidFill>
                   <a:srgbClr val="FFFFFF"/>
                 </a:solidFill>
+                <a:latin typeface="Microsoft YaHei"/>
               </a:rPr>
               <a:t>个人所得税风险指引  |  风险点 22</a:t>
             </a:r>
@@ -9025,6 +9043,7 @@
                 <a:solidFill>
                   <a:srgbClr val="FFFFFF"/>
                 </a:solidFill>
+                <a:latin typeface="Microsoft YaHei"/>
               </a:rPr>
               <a:t>个人所得税风险指引  |  风险点 23</a:t>
             </a:r>
@@ -9380,6 +9399,7 @@
                 <a:solidFill>
                   <a:srgbClr val="FFFFFF"/>
                 </a:solidFill>
+                <a:latin typeface="Microsoft YaHei"/>
               </a:rPr>
               <a:t>个人所得税风险指引  |  风险点 24</a:t>
             </a:r>
@@ -9735,6 +9755,7 @@
                 <a:solidFill>
                   <a:srgbClr val="FFFFFF"/>
                 </a:solidFill>
+                <a:latin typeface="Microsoft YaHei"/>
               </a:rPr>
               <a:t>个人所得税风险指引  |  风险点 25</a:t>
             </a:r>
@@ -10068,6 +10089,7 @@
                 <a:solidFill>
                   <a:srgbClr val="FFFFFF"/>
                 </a:solidFill>
+                <a:latin typeface="Microsoft YaHei"/>
               </a:rPr>
               <a:t>个人所得税风险指引  |  风险点 26</a:t>
             </a:r>
@@ -10445,6 +10467,7 @@
                 <a:solidFill>
                   <a:srgbClr val="FFFFFF"/>
                 </a:solidFill>
+                <a:latin typeface="Microsoft YaHei"/>
               </a:rPr>
               <a:t>个人所得税风险指引  |  风险点 27</a:t>
             </a:r>
@@ -10778,6 +10801,7 @@
                 <a:solidFill>
                   <a:srgbClr val="FFFFFF"/>
                 </a:solidFill>
+                <a:latin typeface="Microsoft YaHei"/>
               </a:rPr>
               <a:t>个人所得税风险指引  |  风险点 28</a:t>
             </a:r>
@@ -11111,6 +11135,7 @@
                 <a:solidFill>
                   <a:srgbClr val="FFFFFF"/>
                 </a:solidFill>
+                <a:latin typeface="Microsoft YaHei"/>
               </a:rPr>
               <a:t>个人所得税风险指引  |  风险点 2</a:t>
             </a:r>
@@ -11466,6 +11491,7 @@
                 <a:solidFill>
                   <a:srgbClr val="FFFFFF"/>
                 </a:solidFill>
+                <a:latin typeface="Microsoft YaHei"/>
               </a:rPr>
               <a:t>个人所得税风险指引  |  风险点 29</a:t>
             </a:r>
@@ -11821,6 +11847,7 @@
                 <a:solidFill>
                   <a:srgbClr val="FFFFFF"/>
                 </a:solidFill>
+                <a:latin typeface="Microsoft YaHei"/>
               </a:rPr>
               <a:t>个人所得税风险指引  |  风险点 30</a:t>
             </a:r>
@@ -12176,6 +12203,7 @@
                 <a:solidFill>
                   <a:srgbClr val="FFFFFF"/>
                 </a:solidFill>
+                <a:latin typeface="Microsoft YaHei"/>
               </a:rPr>
               <a:t>个人所得税风险指引  |  风险点 31</a:t>
             </a:r>
@@ -12531,6 +12559,7 @@
                 <a:solidFill>
                   <a:srgbClr val="FFFFFF"/>
                 </a:solidFill>
+                <a:latin typeface="Microsoft YaHei"/>
               </a:rPr>
               <a:t>个人所得税风险指引  |  风险点 32</a:t>
             </a:r>
@@ -12908,6 +12937,7 @@
                 <a:solidFill>
                   <a:srgbClr val="FFFFFF"/>
                 </a:solidFill>
+                <a:latin typeface="Microsoft YaHei"/>
               </a:rPr>
               <a:t>个人所得税风险指引  |  风险点 33</a:t>
             </a:r>
@@ -13263,6 +13293,7 @@
                 <a:solidFill>
                   <a:srgbClr val="FFFFFF"/>
                 </a:solidFill>
+                <a:latin typeface="Microsoft YaHei"/>
               </a:rPr>
               <a:t>个人所得税风险指引  |  风险点 34</a:t>
             </a:r>
@@ -13596,6 +13627,7 @@
                 <a:solidFill>
                   <a:srgbClr val="FFFFFF"/>
                 </a:solidFill>
+                <a:latin typeface="Microsoft YaHei"/>
               </a:rPr>
               <a:t>个人所得税风险指引  |  风险点 35</a:t>
             </a:r>
@@ -13929,6 +13961,7 @@
                 <a:solidFill>
                   <a:srgbClr val="FFFFFF"/>
                 </a:solidFill>
+                <a:latin typeface="Microsoft YaHei"/>
               </a:rPr>
               <a:t>个人所得税风险指引  |  风险点 36</a:t>
             </a:r>
@@ -14306,6 +14339,7 @@
                 <a:solidFill>
                   <a:srgbClr val="FFFFFF"/>
                 </a:solidFill>
+                <a:latin typeface="Microsoft YaHei"/>
               </a:rPr>
               <a:t>个人所得税风险指引  |  风险点 37</a:t>
             </a:r>
@@ -14705,6 +14739,7 @@
                 <a:solidFill>
                   <a:srgbClr val="FFFFFF"/>
                 </a:solidFill>
+                <a:latin typeface="Microsoft YaHei"/>
               </a:rPr>
               <a:t>个人所得税风险指引  |  风险点 38</a:t>
             </a:r>
@@ -15060,6 +15095,7 @@
                 <a:solidFill>
                   <a:srgbClr val="FFFFFF"/>
                 </a:solidFill>
+                <a:latin typeface="Microsoft YaHei"/>
               </a:rPr>
               <a:t>个人所得税风险指引  |  风险点 3</a:t>
             </a:r>
@@ -15393,6 +15429,7 @@
                 <a:solidFill>
                   <a:srgbClr val="FFFFFF"/>
                 </a:solidFill>
+                <a:latin typeface="Microsoft YaHei"/>
               </a:rPr>
               <a:t>个人所得税风险指引  |  风险点 39</a:t>
             </a:r>
@@ -15726,6 +15763,7 @@
                 <a:solidFill>
                   <a:srgbClr val="FFFFFF"/>
                 </a:solidFill>
+                <a:latin typeface="Microsoft YaHei"/>
               </a:rPr>
               <a:t>个人所得税风险指引  |  风险点 40</a:t>
             </a:r>
@@ -16059,6 +16097,7 @@
                 <a:solidFill>
                   <a:srgbClr val="FFFFFF"/>
                 </a:solidFill>
+                <a:latin typeface="Microsoft YaHei"/>
               </a:rPr>
               <a:t>个人所得税风险指引  |  风险点 41</a:t>
             </a:r>
@@ -16392,6 +16431,7 @@
                 <a:solidFill>
                   <a:srgbClr val="FFFFFF"/>
                 </a:solidFill>
+                <a:latin typeface="Microsoft YaHei"/>
               </a:rPr>
               <a:t>个人所得税风险指引  |  风险点 42</a:t>
             </a:r>
@@ -16725,6 +16765,7 @@
                 <a:solidFill>
                   <a:srgbClr val="FFFFFF"/>
                 </a:solidFill>
+                <a:latin typeface="Microsoft YaHei"/>
               </a:rPr>
               <a:t>个人所得税风险指引  |  风险点 4</a:t>
             </a:r>
@@ -17058,6 +17099,7 @@
                 <a:solidFill>
                   <a:srgbClr val="FFFFFF"/>
                 </a:solidFill>
+                <a:latin typeface="Microsoft YaHei"/>
               </a:rPr>
               <a:t>个人所得税风险指引  |  风险点 5</a:t>
             </a:r>
@@ -17391,6 +17433,7 @@
                 <a:solidFill>
                   <a:srgbClr val="FFFFFF"/>
                 </a:solidFill>
+                <a:latin typeface="Microsoft YaHei"/>
               </a:rPr>
               <a:t>个人所得税风险指引  |  风险点 6</a:t>
             </a:r>
@@ -17790,6 +17833,7 @@
                 <a:solidFill>
                   <a:srgbClr val="FFFFFF"/>
                 </a:solidFill>
+                <a:latin typeface="Microsoft YaHei"/>
               </a:rPr>
               <a:t>个人所得税风险指引  |  风险点 7</a:t>
             </a:r>
@@ -18211,6 +18255,7 @@
                 <a:solidFill>
                   <a:srgbClr val="FFFFFF"/>
                 </a:solidFill>
+                <a:latin typeface="Microsoft YaHei"/>
               </a:rPr>
               <a:t>个人所得税风险指引  |  风险点 8</a:t>
             </a:r>
